--- a/Unit decks/Unit 08 - Performance Measurement.pptx
+++ b/Unit decks/Unit 08 - Performance Measurement.pptx
@@ -627,6 +627,34 @@
             </a:r>
             <a:endParaRPr lang="en-US" dirty="0"/>
           </a:p>
+          <a:p/>
+          <a:p>
+            <a:r>
+              <a:t>Professional insights:</a:t>
+            </a:r>
+          </a:p>
+          <a:p/>
+          <a:p>
+            <a:r>
+              <a:t>After visible success: Sustaining results often means returning to uncomfortable issues people assumed were resolved. Monitor whether commitments remain alive in actual behaviour; previous agreement does not guarantee continued delivery.</a:t>
+            </a:r>
+          </a:p>
+          <a:p>
+            <a:r>
+              <a:t>Source: Journal, 11 August 2026 — Professional Insights: Leadership</a:t>
+            </a:r>
+          </a:p>
+          <a:p/>
+          <a:p>
+            <a:r>
+              <a:t>Analysis as delay: Requesting more evidence can be a substitute for acting on the evidence already available, and perpetual analysis often protects people from accountability for a decision. Where the evidence is sufficient, set a deadline and decide.</a:t>
+            </a:r>
+          </a:p>
+          <a:p>
+            <a:r>
+              <a:t>Source: Journal, 24 May 2026 — Professional Insights: Strategy</a:t>
+            </a:r>
+          </a:p>
         </p:txBody>
       </p:sp>
       <p:sp>
@@ -733,6 +761,45 @@
             </a:r>
             <a:endParaRPr lang="en-US" dirty="0"/>
           </a:p>
+          <a:p/>
+          <a:p>
+            <a:r>
+              <a:t>Professional insights:</a:t>
+            </a:r>
+          </a:p>
+          <a:p/>
+          <a:p>
+            <a:r>
+              <a:t>01 · Early Warning Signals Are Missed: A strategy without an early warning system, a way to detect drift before collapse, is operating blind.</a:t>
+            </a:r>
+          </a:p>
+          <a:p>
+            <a:r>
+              <a:t>Source: Journal, 7 January 2026 — Professional Insights: Strategy</a:t>
+            </a:r>
+          </a:p>
+          <a:p/>
+          <a:p>
+            <a:r>
+              <a:t>Deferred warnings: Most organisational decline accumulates through small warnings that everyone could see and no one acted on. Take the risk that has been deferred because it is not yet urgent and put a decision date against it before the deferral becomes the decision.</a:t>
+            </a:r>
+          </a:p>
+          <a:p>
+            <a:r>
+              <a:t>Source: Journal, 17 June 2026 — Professional Insights: Strategy</a:t>
+            </a:r>
+          </a:p>
+          <a:p/>
+          <a:p>
+            <a:r>
+              <a:t>03 · Loss of Organisational Learning: Reviews create little value when lessons remain conversational. Insight must alter decisions, controls, resource allocation and expected behaviour, or recurring problems keep being treated as isolated events.</a:t>
+            </a:r>
+          </a:p>
+          <a:p>
+            <a:r>
+              <a:t>Source: Journal, 10 August 2026 — Professional Insights: Strategy</a:t>
+            </a:r>
+          </a:p>
         </p:txBody>
       </p:sp>
       <p:sp>
@@ -841,6 +908,45 @@
             </a:r>
             <a:endParaRPr lang="en-US" dirty="0"/>
           </a:p>
+          <a:p/>
+          <a:p>
+            <a:r>
+              <a:t>Professional insights:</a:t>
+            </a:r>
+          </a:p>
+          <a:p/>
+          <a:p>
+            <a:r>
+              <a:t>Progress Confirmation: Teams that move from task to task without acknowledging progress build a culture where people feel invisible. Affirmation is structural.</a:t>
+            </a:r>
+          </a:p>
+          <a:p>
+            <a:r>
+              <a:t>Source: Journal, 5 January 2026 — Professional Insights: Culture</a:t>
+            </a:r>
+          </a:p>
+          <a:p/>
+          <a:p>
+            <a:r>
+              <a:t>Early Warning: Read a difficult moment accurately, naming it honestly without catastrophising it. The leader who treats every disruption as terminal loses the confidence of the people around them.</a:t>
+            </a:r>
+          </a:p>
+          <a:p>
+            <a:r>
+              <a:t>Source: Journal, 22 June 2026 — Professional Insights: Leadership</a:t>
+            </a:r>
+          </a:p>
+          <a:p/>
+          <a:p>
+            <a:r>
+              <a:t>Significant Gap: Underperforming initiatives often receive an open-ended reprieve that no one revisits. Extensions should come with a defined window and concrete intervention, so that patience with a struggling effort does not become a permanent subsidy of failure.</a:t>
+            </a:r>
+          </a:p>
+          <a:p>
+            <a:r>
+              <a:t>Source: Journal, 14 June 2026 — Professional Insights: Strategy</a:t>
+            </a:r>
+          </a:p>
         </p:txBody>
       </p:sp>
       <p:sp>
@@ -1052,6 +1158,34 @@
             </a:r>
             <a:endParaRPr lang="en-US" dirty="0"/>
           </a:p>
+          <a:p/>
+          <a:p>
+            <a:r>
+              <a:t>Professional insights:</a:t>
+            </a:r>
+          </a:p>
+          <a:p/>
+          <a:p>
+            <a:r>
+              <a:t>Gap 02 · Evidence Quality: The most corrosive pattern is the gap between advertised and actual performance: dashboards that look green and reports that signal health with no results underneath. Make it safer to disclose a thin harvest than to perform a false one.</a:t>
+            </a:r>
+          </a:p>
+          <a:p>
+            <a:r>
+              <a:t>Source: Journal, 27 May 2026 — Professional Insights: Culture</a:t>
+            </a:r>
+          </a:p>
+          <a:p/>
+          <a:p>
+            <a:r>
+              <a:t>Gap 04 · Learning Suppression: Formal systems can exist while actual behaviour contradicts their purpose. Strategic reviews should examine lived practice alongside formal compliance.</a:t>
+            </a:r>
+          </a:p>
+          <a:p>
+            <a:r>
+              <a:t>Source: Journal, 8 September 2026 — Professional Insights: Strategy</a:t>
+            </a:r>
+          </a:p>
         </p:txBody>
       </p:sp>
       <p:sp>
@@ -1245,6 +1379,23 @@
 The conversation shifts from asking “Is my function achieving its KPI/KR?” to asking “Is the chain of execution across our functions holding together?” When leaders observe performance horizontally in this way, coordination improves and performance measurement begins to reveal the true state of enterprise execution.</a:t>
             </a:r>
             <a:endParaRPr lang="en-US" dirty="0"/>
+          </a:p>
+          <a:p/>
+          <a:p>
+            <a:r>
+              <a:t>Professional insights:</a:t>
+            </a:r>
+          </a:p>
+          <a:p/>
+          <a:p>
+            <a:r>
+              <a:t>Interdependence: Healthy organisations create conditions in which differentiated strengths work together. The test of collective culture: when one part suffers, others respond; when one succeeds, others celebrate. Indifference and internal envy both weaken collective performance.</a:t>
+            </a:r>
+          </a:p>
+          <a:p>
+            <a:r>
+              <a:t>Source: Journal, 9 September 2026 — Professional Insights: Culture</a:t>
+            </a:r>
           </a:p>
         </p:txBody>
       </p:sp>
@@ -1470,6 +1621,23 @@
 What decision must we take now?</a:t>
             </a:r>
             <a:endParaRPr lang="en-US" dirty="0"/>
+          </a:p>
+          <a:p/>
+          <a:p>
+            <a:r>
+              <a:t>Professional insights:</a:t>
+            </a:r>
+          </a:p>
+          <a:p/>
+          <a:p>
+            <a:r>
+              <a:t>Reviewing a win: When results are strong, leaders tend to credit their own judgement; when results are weak, they credit conditions. When reviewing a win, name the conditions, the inherited groundwork and the people whose work made it possible before naming your own decisions.</a:t>
+            </a:r>
+          </a:p>
+          <a:p>
+            <a:r>
+              <a:t>Source: Journal, 25 May 2026 — Professional Insights: Leadership</a:t>
+            </a:r>
           </a:p>
         </p:txBody>
       </p:sp>
@@ -1831,6 +1999,23 @@
             </a:r>
             <a:endParaRPr lang="en-US" dirty="0"/>
           </a:p>
+          <a:p/>
+          <a:p>
+            <a:r>
+              <a:t>Professional insights:</a:t>
+            </a:r>
+          </a:p>
+          <a:p/>
+          <a:p>
+            <a:r>
+              <a:t>A shared signal system: Organisations that rely on leaders to communicate every directional shift in person are bottlenecked by access to those leaders. A shared, reliable signal system allows consistent coordination without constant individual instruction. Use this with “This board is where we make the system visible”.</a:t>
+            </a:r>
+          </a:p>
+          <a:p>
+            <a:r>
+              <a:t>Source: Journal, 5 March 2026 — Professional Insights</a:t>
+            </a:r>
+          </a:p>
         </p:txBody>
       </p:sp>
       <p:sp>
@@ -1933,6 +2118,34 @@
 - Corrective Actions Agreed — Restore Stage Alignment Score / 10 — Corrective actions agreed: 1. ... 2. ... 3. ... Follow-up: Owner: ___ | By: ___ Revised alignment score: ___/10</a:t>
             </a:r>
             <a:endParaRPr lang="en-US" dirty="0"/>
+          </a:p>
+          <a:p/>
+          <a:p>
+            <a:r>
+              <a:t>Professional insights:</a:t>
+            </a:r>
+          </a:p>
+          <a:p/>
+          <a:p>
+            <a:r>
+              <a:t>What does this require of me?: The leader who receives honest feedback about a genuine problem and responds with honesty before justification, and action before communication, creates the conditions for real leadership. Use this to brief the CXO role.</a:t>
+            </a:r>
+          </a:p>
+          <a:p>
+            <a:r>
+              <a:t>Source: Journal, 29 June 2026 — Professional Insights: Leadership</a:t>
+            </a:r>
+          </a:p>
+          <a:p/>
+          <a:p>
+            <a:r>
+              <a:t>Correction with a pathway back: Accountability without a pathway back becomes punishment. Correct firmly where necessary, and deliberately restore trust, contribution and dignity when change is evident.</a:t>
+            </a:r>
+          </a:p>
+          <a:p>
+            <a:r>
+              <a:t>Source: Journal, 16 September 2026 — Professional Insights: Leadership</a:t>
+            </a:r>
           </a:p>
         </p:txBody>
       </p:sp>
@@ -2051,6 +2264,34 @@
             </a:r>
             <a:endParaRPr lang="en-US" dirty="0"/>
           </a:p>
+          <a:p/>
+          <a:p>
+            <a:r>
+              <a:t>Professional insights:</a:t>
+            </a:r>
+          </a:p>
+          <a:p/>
+          <a:p>
+            <a:r>
+              <a:t>02 · Diagnosis: Leaders who either conceal failure or weaponise it prevent learning. Mature accountability names what went wrong, understands why it happened and moves people toward responsible change.</a:t>
+            </a:r>
+          </a:p>
+          <a:p>
+            <a:r>
+              <a:t>Source: Journal, 10 August 2026 — Professional Insights: Leadership</a:t>
+            </a:r>
+          </a:p>
+          <a:p/>
+          <a:p>
+            <a:r>
+              <a:t>Intent and outcome: Holding people accountable for outcomes without considering intent produces a culture of blame. Intent matters.</a:t>
+            </a:r>
+          </a:p>
+          <a:p>
+            <a:r>
+              <a:t>Source: Journal, 17 March 2026 — Professional Insights</a:t>
+            </a:r>
+          </a:p>
         </p:txBody>
       </p:sp>
       <p:sp>
@@ -2444,6 +2685,34 @@
             </a:r>
             <a:endParaRPr lang="en-US" dirty="0"/>
           </a:p>
+          <a:p/>
+          <a:p>
+            <a:r>
+              <a:t>Professional insights:</a:t>
+            </a:r>
+          </a:p>
+          <a:p/>
+          <a:p>
+            <a:r>
+              <a:t>Finished or settled: Many costly strategic decisions are made quietly mid-execution, when the team decides that what has been done is probably enough. Audit the exits: where exactly did we decide to stop, and why? The gap between results and potential often sits at that point.</a:t>
+            </a:r>
+          </a:p>
+          <a:p>
+            <a:r>
+              <a:t>Source: Journal, 25 June 2026 — Professional Insights: Strategy</a:t>
+            </a:r>
+          </a:p>
+          <a:p/>
+          <a:p>
+            <a:r>
+              <a:t>Understanding and action: A culture that rewards understanding without requiring corresponding action trains people to be articulate more than effective. Check whether people acted on what they understood.</a:t>
+            </a:r>
+          </a:p>
+          <a:p>
+            <a:r>
+              <a:t>Source: Journal, 8 June 2026 — Professional Insights: Culture</a:t>
+            </a:r>
+          </a:p>
         </p:txBody>
       </p:sp>
       <p:sp>
@@ -2549,6 +2818,34 @@
 Facilitator prompt: “What is the average gap in your organisation between when a performance problem begins and when leadership first becomes aware of it? What does that gap cost?”</a:t>
             </a:r>
             <a:endParaRPr lang="en-US" dirty="0"/>
+          </a:p>
+          <a:p/>
+          <a:p>
+            <a:r>
+              <a:t>Professional insights:</a:t>
+            </a:r>
+          </a:p>
+          <a:p/>
+          <a:p>
+            <a:r>
+              <a:t>02 · Establishes Accountability: Strategic completion requires tracking every component of the declared goal, including the parts that bring no visible victory. Record what has been accomplished as evidence that commitments are being kept.</a:t>
+            </a:r>
+          </a:p>
+          <a:p>
+            <a:r>
+              <a:t>Source: Journal, 9 April 2026 — Professional Insights: Strategy</a:t>
+            </a:r>
+          </a:p>
+          <a:p/>
+          <a:p>
+            <a:r>
+              <a:t>Upstream conditions: Outcomes are shaped long before they become visible. Look past final performance indicators to the upstream conditions shaping decisions: information flows, incentives, norms, routines and dominant voices. Use this with 03 · Enables Learning.</a:t>
+            </a:r>
+          </a:p>
+          <a:p>
+            <a:r>
+              <a:t>Source: Journal, 6 September 2026 — Professional Insights: Strategy</a:t>
+            </a:r>
           </a:p>
         </p:txBody>
       </p:sp>
@@ -2670,6 +2967,34 @@
             </a:r>
             <a:endParaRPr lang="en-US" dirty="0"/>
           </a:p>
+          <a:p/>
+          <a:p>
+            <a:r>
+              <a:t>Professional insights:</a:t>
+            </a:r>
+          </a:p>
+          <a:p/>
+          <a:p>
+            <a:r>
+              <a:t>Restore · renewed conviction: Stalled work needs renewed conviction as well as renewed activity. New deadlines alone achieve little; restore the purpose, authority and significance of the work so people understand why it must continue.</a:t>
+            </a:r>
+          </a:p>
+          <a:p>
+            <a:r>
+              <a:t>Source: Journal, 31 July 2026 — Professional Insights: Strategy</a:t>
+            </a:r>
+          </a:p>
+          <a:p/>
+          <a:p>
+            <a:r>
+              <a:t>A recovery pathway in advance: The leader who designs the recovery pathway before a failure happens is doing a higher quality of work. Name one plausible failure and check whether a clear, understood recovery pathway exists. If it does not, build one.</a:t>
+            </a:r>
+          </a:p>
+          <a:p>
+            <a:r>
+              <a:t>Source: Journal, 9 June 2026 — Professional Insights: Leadership</a:t>
+            </a:r>
+          </a:p>
         </p:txBody>
       </p:sp>
       <p:sp>
@@ -2765,6 +3090,45 @@
 Guidance (Section 1): The key facilitation moment is when leaders understand that most performance gaps have a diagnosable cause — and that the three root causes (accountability, skill, structural misfit) require fundamentally different responses.</a:t>
             </a:r>
             <a:endParaRPr lang="en-US" dirty="0"/>
+          </a:p>
+          <a:p/>
+          <a:p>
+            <a:r>
+              <a:t>Professional insights:</a:t>
+            </a:r>
+          </a:p>
+          <a:p/>
+          <a:p>
+            <a:r>
+              <a:t>Cannot or will not: Leaders must distinguish between team members who cannot perform and those who will not. The interventions differ: inability needs development and unwillingness needs accountability.</a:t>
+            </a:r>
+          </a:p>
+          <a:p>
+            <a:r>
+              <a:t>Source: Journal, 7 January 2026 — Professional Insights: Leadership</a:t>
+            </a:r>
+          </a:p>
+          <a:p/>
+          <a:p>
+            <a:r>
+              <a:t>Simple causality: Avoid assuming that every negative outcome proves individual failure, or that every positive outcome proves sound practice. Use this with “Misfit or structural constraint”.</a:t>
+            </a:r>
+          </a:p>
+          <a:p>
+            <a:r>
+              <a:t>Source: Journal, 18 August 2026 — Professional Insights: Strategy</a:t>
+            </a:r>
+          </a:p>
+          <a:p/>
+          <a:p>
+            <a:r>
+              <a:t>Specific accountability: Accountability works when it is specific and behaviour-based. Vague, general assessments of character produce no specific correction.</a:t>
+            </a:r>
+          </a:p>
+          <a:p>
+            <a:r>
+              <a:t>Source: Journal, 8 April 2026 — Professional Insights: Culture</a:t>
+            </a:r>
           </a:p>
         </p:txBody>
       </p:sp>

--- a/Unit decks/Unit 08 - Performance Measurement.pptx
+++ b/Unit decks/Unit 08 - Performance Measurement.pptx
@@ -630,6 +630,39 @@
           <a:p/>
           <a:p>
             <a:r>
+              <a:t>Source detail (S2R® manuscript):</a:t>
+            </a:r>
+          </a:p>
+          <a:p/>
+          <a:p>
+            <a:r>
+              <a:t>Strategy design is rarely the differentiator: Leadership teams articulate compelling visions, define ambitious OKRs, and cascade KPIs across the organisation. The elegance of the strategy design rarely separates the organisations that sustain execution momentum from those that quietly stall.</a:t>
+            </a:r>
+          </a:p>
+          <a:p>
+            <a:r>
+              <a:t>The rhythm of conversations: Organisations that consistently convert strategy into results rely on more than the strength of the original plan. They rely on a rhythm of disciplined performance conversations that keeps execution visible, corrects drift early, and sustains organisational focus over time.</a:t>
+            </a:r>
+          </a:p>
+          <a:p/>
+          <a:p>
+            <a:r>
+              <a:t>The discipline that sustains momentum: When the review discipline operates consistently, something powerful begins to emerge inside the organisation. Execution becomes visible, discussable, and recoverable.</a:t>
+            </a:r>
+          </a:p>
+          <a:p>
+            <a:r>
+              <a:t>Leaders are no longer surprised by performance outcomes at the end of the year. They observe the trajectory of progress in real time. Teams understand that their work contributes directly to enterprise outcomes. Obstacles are surfaced while they are still manageable. Accountability remains active.</a:t>
+            </a:r>
+          </a:p>
+          <a:p>
+            <a:r>
+              <a:t>Over time, this discipline builds a culture where strategy, once announced, is continuously examined, adjusted, and advanced through structured leadership dialogue. That is what transforms performance measurement from a reporting system into a genuine execution discipline.</a:t>
+            </a:r>
+          </a:p>
+          <a:p/>
+          <a:p>
+            <a:r>
               <a:t>Professional insights:</a:t>
             </a:r>
           </a:p>
@@ -764,6 +797,38 @@
           <a:p/>
           <a:p>
             <a:r>
+              <a:t>Source detail (S2R® manuscript):</a:t>
+            </a:r>
+          </a:p>
+          <a:p/>
+          <a:p>
+            <a:r>
+              <a:t>Further detail for each consequence:</a:t>
+            </a:r>
+          </a:p>
+          <a:p>
+            <a:r>
+              <a:t>01 · Early Warning Signals Are Missed: A further subtle indicator is a dependency between functions that introduces unexpected delays. The organisation continues operating under the assumption that progress is on track until the gap becomes large enough that recovery is far more difficult. Disciplined review conversations prevent this outcome by ensuring that progress is observed while it is unfolding.</a:t>
+            </a:r>
+          </a:p>
+          <a:p>
+            <a:r>
+              <a:t>02 · Gradual Diffusion of Accountability: When progress is regularly reviewed and discussed, KPI owners understand that their work remains connected to the organisation’s strategic priorities. Over time, without review, accountability becomes ambiguous. People assume progress is occurring somewhere in the system, yet no one feels the immediate responsibility to ensure that it actually is. Structured performance reviews prevent this diffusion by maintaining a clear line of ownership between the KPI and the individual responsible for advancing it.</a:t>
+            </a:r>
+          </a:p>
+          <a:p>
+            <a:r>
+              <a:t>03 · Loss of Organisational Learning: Execution delivers outcomes and also develops the organisation’s capability to execute increasingly complex strategies over time. When review reflections occur consistently, the organisation begins to accumulate execution intelligence. Teams develop a deeper understanding of how work actually moves through the organisation.</a:t>
+            </a:r>
+          </a:p>
+          <a:p>
+            <a:r>
+              <a:t>04 · Erodes Leadership Credibility: Every review conversation reinforces the seriousness with which the organisation treats its strategic objectives.</a:t>
+            </a:r>
+          </a:p>
+          <a:p/>
+          <a:p>
+            <a:r>
               <a:t>Professional insights:</a:t>
             </a:r>
           </a:p>
@@ -911,6 +976,18 @@
           <a:p/>
           <a:p>
             <a:r>
+              <a:t>Source detail (S2R® manuscript):</a:t>
+            </a:r>
+          </a:p>
+          <a:p/>
+          <a:p>
+            <a:r>
+              <a:t>Significant Gap (further detail): This signal indicates that the organisation must diagnose the deeper conditions affecting execution.</a:t>
+            </a:r>
+          </a:p>
+          <a:p/>
+          <a:p>
+            <a:r>
               <a:t>Professional insights:</a:t>
             </a:r>
           </a:p>
@@ -1044,6 +1121,23 @@
             </a:r>
             <a:endParaRPr lang="en-US" dirty="0"/>
           </a:p>
+          <a:p/>
+          <a:p>
+            <a:r>
+              <a:t>Source detail (S2R® manuscript):</a:t>
+            </a:r>
+          </a:p>
+          <a:p/>
+          <a:p>
+            <a:r>
+              <a:t>Section opening: Performance measurement rarely breaks down for lack of agreed goals, targets or KPIs. The problem is rarely the absence of measurement.</a:t>
+            </a:r>
+          </a:p>
+          <a:p>
+            <a:r>
+              <a:t>As a leadership conversation discipline, performance measurement determines whether the executive team can see execution reality clearly and intervene early enough to maintain momentum.</a:t>
+            </a:r>
+          </a:p>
         </p:txBody>
       </p:sp>
       <p:sp>
@@ -1161,6 +1255,43 @@
           <a:p/>
           <a:p>
             <a:r>
+              <a:t>Source detail (S2R® manuscript):</a:t>
+            </a:r>
+          </a:p>
+          <a:p/>
+          <a:p>
+            <a:r>
+              <a:t>Further detail for each gap:</a:t>
+            </a:r>
+          </a:p>
+          <a:p>
+            <a:r>
+              <a:t>Gap 01 · Horizontal Coordination: In the functional reviews, Technology evaluates system delivery. Customer experience depends on marketing promises, operational delivery, technology reliability, and service responsiveness. Revenue growth depends on sales capability, product readiness, pricing discipline, and operational fulfilment.</a:t>
+            </a:r>
+          </a:p>
+          <a:p>
+            <a:r>
+              <a:t>The cross-functional sessions sit alongside the functional reviews and serve a different purpose. The conversation shifts from “How is my function performing?” to “How is the execution system performing?” When leaders observe performance through this collective perspective, interdependencies become visible and coordination improves.</a:t>
+            </a:r>
+          </a:p>
+          <a:p>
+            <a:r>
+              <a:t>Gap 02 · Evidence Quality: When the evidence standard becomes consistent across functions, performance conversations regain their diagnostic power. Leaders spend less time debating data and more time improving execution.</a:t>
+            </a:r>
+          </a:p>
+          <a:p>
+            <a:r>
+              <a:t>Gap 03 · Review Rhythm Breakdown: Measurement is a continuous execution responsibility for KPI/KR owners. The Alignment Brigade protects the rhythm by ensuring that review conversations occur with the consistency required to detect early signals of drift.</a:t>
+            </a:r>
+          </a:p>
+          <a:p>
+            <a:r>
+              <a:t>Gap 04 · Learning Suppression: Over time the organisation becomes more effective at measuring performance and at improving how performance is produced.</a:t>
+            </a:r>
+          </a:p>
+          <a:p/>
+          <a:p>
+            <a:r>
               <a:t>Professional insights:</a:t>
             </a:r>
           </a:p>
@@ -1379,6 +1510,18 @@
 The conversation shifts from asking “Is my function achieving its KPI/KR?” to asking “Is the chain of execution across our functions holding together?” When leaders observe performance horizontally in this way, coordination improves and performance measurement begins to reveal the true state of enterprise execution.</a:t>
             </a:r>
             <a:endParaRPr lang="en-US" dirty="0"/>
+          </a:p>
+          <a:p/>
+          <a:p>
+            <a:r>
+              <a:t>Source detail (S2R® manuscript):</a:t>
+            </a:r>
+          </a:p>
+          <a:p/>
+          <a:p>
+            <a:r>
+              <a:t>The risk the collective guards against: Performance reviews fragmenting into isolated departmental conversations, where leaders see only isolated functional success.</a:t>
+            </a:r>
           </a:p>
           <a:p/>
           <a:p>
@@ -1518,6 +1661,59 @@
             </a:r>
             <a:endParaRPr lang="en-US" dirty="0"/>
           </a:p>
+          <a:p/>
+          <a:p>
+            <a:r>
+              <a:t>Source detail (S2R® manuscript):</a:t>
+            </a:r>
+          </a:p>
+          <a:p/>
+          <a:p>
+            <a:r>
+              <a:t>Round 1 (further detail): The percentage each leader states involves no estimate and no narrative opinion. The purpose of this round is to establish a shared baseline understanding of enterprise execution momentum.</a:t>
+            </a:r>
+          </a:p>
+          <a:p>
+            <a:r>
+              <a:t>Round 2 (further detail): Once a warning is recognised as a cross-functional execution dependency, the Alignment Brigade can intervene before the issue evolves into a measurable performance gap.</a:t>
+            </a:r>
+          </a:p>
+          <a:p>
+            <a:r>
+              <a:t>Round 3 (further detail): The learning may involve a capability insight, a coordination improvement, a leadership practice that strengthened execution, or a structural obstacle that slowed progress.</a:t>
+            </a:r>
+          </a:p>
+          <a:p/>
+          <a:p>
+            <a:r>
+              <a:t>What the circle produces: When the Collective Intelligence Circle is completed, the executive team achieves three outcomes.</a:t>
+            </a:r>
+          </a:p>
+          <a:p>
+            <a:r>
+              <a:t>First, the organisation gains a clear snapshot of enterprise progress toward its strategic Key Results.</a:t>
+            </a:r>
+          </a:p>
+          <a:p>
+            <a:r>
+              <a:t>Second, emerging risks become visible early enough for coordinated intervention.</a:t>
+            </a:r>
+          </a:p>
+          <a:p>
+            <a:r>
+              <a:t>Third, the organisation captures execution learning that strengthens future performance.</a:t>
+            </a:r>
+          </a:p>
+          <a:p>
+            <a:r>
+              <a:t>This conversation transforms performance measurement from a departmental reporting exercise into an enterprise intelligence practice. The executive team begins to see how the strategy is moving across the organisation in real time.</a:t>
+            </a:r>
+          </a:p>
+          <a:p>
+            <a:r>
+              <a:t>Through this practice, performance measurement becomes the organisation’s radar system for strategy execution.</a:t>
+            </a:r>
+          </a:p>
         </p:txBody>
       </p:sp>
       <p:sp>
@@ -1621,6 +1817,18 @@
 What decision must we take now?</a:t>
             </a:r>
             <a:endParaRPr lang="en-US" dirty="0"/>
+          </a:p>
+          <a:p/>
+          <a:p>
+            <a:r>
+              <a:t>Source detail (S2R® manuscript):</a:t>
+            </a:r>
+          </a:p>
+          <a:p/>
+          <a:p>
+            <a:r>
+              <a:t>Position on the board: The synthesis layer is a fourth section added across the bottom of the board, titled “Enterprise Intelligence Synthesis”.</a:t>
+            </a:r>
           </a:p>
           <a:p/>
           <a:p>
@@ -2002,6 +2210,60 @@
           <a:p/>
           <a:p>
             <a:r>
+              <a:t>Source detail (S2R® manuscript):</a:t>
+            </a:r>
+          </a:p>
+          <a:p/>
+          <a:p>
+            <a:r>
+              <a:t>What each CXO contributes:</a:t>
+            </a:r>
+          </a:p>
+          <a:p>
+            <a:r>
+              <a:t>Zone 1: % progress toward Key Results / KPIs; supporting evidence (from PM review sheets); momentum signal (accelerating, stable or slowing).</a:t>
+            </a:r>
+          </a:p>
+          <a:p>
+            <a:r>
+              <a:t>Zone 2: one or two early warning signals; evidence from PM reviews; potential impact area (optional but recommended).</a:t>
+            </a:r>
+          </a:p>
+          <a:p>
+            <a:r>
+              <a:t>Zone 3: one key execution insight; evidence from PM reviews; where it applies (function or enterprise).</a:t>
+            </a:r>
+          </a:p>
+          <a:p/>
+          <a:p>
+            <a:r>
+              <a:t>Board flow (how the board is used in the session):</a:t>
+            </a:r>
+          </a:p>
+          <a:p>
+            <a:r>
+              <a:t>Round 1, Populate Trajectory: each CXO posts their entry into Zone 1: “We are at X% progress, supported by [evidence], and momentum is [state].” Outcome: a visible enterprise execution baseline; immediate visibility of uneven progress.</a:t>
+            </a:r>
+          </a:p>
+          <a:p>
+            <a:r>
+              <a:t>Round 2, Populate Warning Signals: each CXO posts into Zone 2: “An emerging risk is [signal], supported by [evidence].” Outcome: early-stage risks become visible; cross-functional dependencies begin to surface.</a:t>
+            </a:r>
+          </a:p>
+          <a:p>
+            <a:r>
+              <a:t>Round 3, Populate Execution Learning: each CXO posts into Zone 3: “A key execution learning is [insight], supported by [evidence].” Outcome: practical intelligence on how execution actually works; patterns of effectiveness and friction emerge.</a:t>
+            </a:r>
+          </a:p>
+          <a:p/>
+          <a:p>
+            <a:r>
+              <a:t>What this board achieves: When built and used correctly, the board delivers a real-time view of enterprise execution; early visibility of systemic risks; a growing base of execution intelligence; and a shift from departmental reporting to collective decision-making.</a:t>
+            </a:r>
+          </a:p>
+          <a:p/>
+          <a:p>
+            <a:r>
               <a:t>Professional insights:</a:t>
             </a:r>
           </a:p>
@@ -2118,6 +2380,23 @@
 - Corrective Actions Agreed — Restore Stage Alignment Score / 10 — Corrective actions agreed: 1. ... 2. ... 3. ... Follow-up: Owner: ___ | By: ___ Revised alignment score: ___/10</a:t>
             </a:r>
             <a:endParaRPr lang="en-US" dirty="0"/>
+          </a:p>
+          <a:p/>
+          <a:p>
+            <a:r>
+              <a:t>Source detail (S2R® manuscript):</a:t>
+            </a:r>
+          </a:p>
+          <a:p/>
+          <a:p>
+            <a:r>
+              <a:t>Purpose of the exercise: This exercise simulates a situation where performance has fallen significantly below target and the leader must activate the Accountability Loop using the Review–Realign–Restore framework.</a:t>
+            </a:r>
+          </a:p>
+          <a:p>
+            <a:r>
+              <a:t>Brief to the CXO: You are the CXO responsible for ensuring progress toward the Key Result. Your objective is to diagnose the root cause of the performance gap without immediately blaming the individual. Conduct the conversation using the Accountability Loop, then use the alignment dialogue to restore momentum.</a:t>
+            </a:r>
           </a:p>
           <a:p/>
           <a:p>
@@ -2392,6 +2671,39 @@
             </a:r>
             <a:endParaRPr lang="en-US" dirty="0"/>
           </a:p>
+          <a:p/>
+          <a:p>
+            <a:r>
+              <a:t>Source detail (S2R® manuscript):</a:t>
+            </a:r>
+          </a:p>
+          <a:p/>
+          <a:p>
+            <a:r>
+              <a:t>The unit in one view: The Performance Measurement unit establishes the review discipline that keeps strategy execution visible and correctable. It recognises a fundamental execution reality: strategy fails when progress is not consistently examined, however strong the leaders’ intention.</a:t>
+            </a:r>
+          </a:p>
+          <a:p>
+            <a:r>
+              <a:t>Performance measurement therefore creates the visibility infrastructure that allows the organisation to observe whether work across functions is actually advancing the Success in Practice. The unit progresses through four stages that strengthen this execution visibility.</a:t>
+            </a:r>
+          </a:p>
+          <a:p/>
+          <a:p>
+            <a:r>
+              <a:t>Further detail by stage:</a:t>
+            </a:r>
+          </a:p>
+          <a:p>
+            <a:r>
+              <a:t>Extrapolating (Where): Leaders examine where performance measurement commonly weakens across the executive system.</a:t>
+            </a:r>
+          </a:p>
+          <a:p>
+            <a:r>
+              <a:t>Integration (Collective): The executive team synthesises their performance insights through a Collective Intelligence Circle built on evidence from their PM review sheets. Each CXO contributes three signals: progress confirmation, early warning indicators, and execution learnings.</a:t>
+            </a:r>
+          </a:p>
         </p:txBody>
       </p:sp>
       <p:sp>
@@ -2589,6 +2901,23 @@
             </a:r>
             <a:endParaRPr lang="en-US" dirty="0"/>
           </a:p>
+          <a:p/>
+          <a:p>
+            <a:r>
+              <a:t>Source detail (S2R® manuscript):</a:t>
+            </a:r>
+          </a:p>
+          <a:p/>
+          <a:p>
+            <a:r>
+              <a:t>Facilitator script (opening): The performance review conversation is the moment where evidence is examined, progress is acknowledged, gaps are named, and course corrections are agreed. It is where performance management actually happens.</a:t>
+            </a:r>
+          </a:p>
+          <a:p>
+            <a:r>
+              <a:t>This unit makes that conversation a genuine conversation about execution reality: grounded in evidence, focused on progress, and committed to recovery when things go off track.</a:t>
+            </a:r>
+          </a:p>
         </p:txBody>
       </p:sp>
       <p:sp>
@@ -2688,6 +3017,40 @@
           <a:p/>
           <a:p>
             <a:r>
+              <a:t>Source detail (S2R® manuscript):</a:t>
+            </a:r>
+          </a:p>
+          <a:p/>
+          <a:p>
+            <a:r>
+              <a:t>The pattern in many organisations: In many organisations, enormous effort goes into designing strategy. Leaders invest months clarifying direction, defining OKRs, setting targets, and aligning teams around ambitious outcomes. Scorecards are built. KPIs are cascaded. Performance frameworks are communicated.</a:t>
+            </a:r>
+          </a:p>
+          <a:p>
+            <a:r>
+              <a:t>Yet several months later, when leadership teams pause and reflect, the same uncertainty often appears. Work is happening. Teams are busy. Initiatives are underway. Leaders still cannot confidently answer a more fundamental question: “Is the work being done actually advancing the strategy?” This is the gap that performance measurement exists to close.</a:t>
+            </a:r>
+          </a:p>
+          <a:p/>
+          <a:p>
+            <a:r>
+              <a:t>The visibility infrastructure: Performance measurement creates the visibility infrastructure that allows leaders to observe whether the organisation is genuinely progressing toward its strategic outcomes. Without this infrastructure, strategy remains largely interpretive. Each function develops its own sense of progress. Activity becomes mistaken for advancement. Energy is expended, but the connection to the enterprise result becomes difficult to see.</a:t>
+            </a:r>
+          </a:p>
+          <a:p>
+            <a:r>
+              <a:t>Performance measurement restores that line of sight. It allows the organisation to move from activity visibility to progress visibility.</a:t>
+            </a:r>
+          </a:p>
+          <a:p/>
+          <a:p>
+            <a:r>
+              <a:t>What activity measures give: Counts of projects launched, meetings held, campaigns executed and deliverables completed create a sense of operational movement.</a:t>
+            </a:r>
+          </a:p>
+          <a:p/>
+          <a:p>
+            <a:r>
               <a:t>Professional insights:</a:t>
             </a:r>
           </a:p>
@@ -2818,6 +3181,97 @@
 Facilitator prompt: “What is the average gap in your organisation between when a performance problem begins and when leadership first becomes aware of it? What does that gap cost?”</a:t>
             </a:r>
             <a:endParaRPr lang="en-US" dirty="0"/>
+          </a:p>
+          <a:p/>
+          <a:p>
+            <a:r>
+              <a:t>Source detail (S2R® manuscript):</a:t>
+            </a:r>
+          </a:p>
+          <a:p/>
+          <a:p>
+            <a:r>
+              <a:t>Course correction (further detail): Without early signals, problems are discovered only when targets have already been missed.</a:t>
+            </a:r>
+          </a:p>
+          <a:p>
+            <a:r>
+              <a:t>With and without measurement: Without measurement, strategy remains largely aspirational. With measurement, strategy becomes manageable.</a:t>
+            </a:r>
+          </a:p>
+          <a:p/>
+          <a:p>
+            <a:r>
+              <a:t>Execution rhythm: Performance measurement creates execution rhythm. Most strategic outcomes are the result of cumulative progress built over time. Teams experiment, adjust, learn, and refine their approach as they move forward. Because of this, progress must be observed repeatedly across weeks, months, and quarters.</a:t>
+            </a:r>
+          </a:p>
+          <a:p>
+            <a:r>
+              <a:t>Regular review cycles allow leaders to notice the subtle signals that indicate whether execution is strengthening or weakening. Momentum may begin to accelerate in one area while slowing in another. Resource constraints may appear. Decision bottlenecks may surface. Capability gaps may become visible. When these signals are visible early, leaders can respond while the situation is still manageable.</a:t>
+            </a:r>
+          </a:p>
+          <a:p>
+            <a:r>
+              <a:t>This rhythm prevents the most common leadership surprise in organisations: discovering performance failure only at the end of the reporting period. Performance measurement ensures that strategy is observed while it is unfolding, as well as evaluated after the fact.</a:t>
+            </a:r>
+          </a:p>
+          <a:p/>
+          <a:p>
+            <a:r>
+              <a:t>A leadership practice: Within the Strategy2Results® system, performance measurement is understood as a leadership practice as well as a reporting mechanism. It shapes how leaders observe execution reality, how they engage their teams in evidence-based dialogue, and how they guide the organisation through obstacles and adjustments.</a:t>
+            </a:r>
+          </a:p>
+          <a:p>
+            <a:r>
+              <a:t>Review signals priority: The act of regularly reviewing evidence communicates something powerful throughout the organisation. It signals priority. Teams pay attention to what leaders review. When performance evidence is consistently examined, discussed, and acted upon, people understand that execution outcomes matter. Attention naturally flows toward the priorities that receive leadership scrutiny.</a:t>
+            </a:r>
+          </a:p>
+          <a:p>
+            <a:r>
+              <a:t>If a KPI appears on a scorecard but never appears in leadership conversations, the organisation quietly concludes that the KPI does not truly matter. When performance evidence becomes part of the regular leadership dialogue, accountability strengthens and focus sharpens.</a:t>
+            </a:r>
+          </a:p>
+          <a:p/>
+          <a:p>
+            <a:r>
+              <a:t>From data to execution intelligence: At this point, performance measurement begins to evolve beyond data collection. It becomes execution intelligence. Data on its own rarely improves performance. Numbers simply describe what has happened. Insight emerges only when those numbers are interpreted through disciplined conversation. Performance measurement therefore transforms data into decision insight.</a:t>
+            </a:r>
+          </a:p>
+          <a:p>
+            <a:r>
+              <a:t>Each review cycle helps leaders answer three essential questions:</a:t>
+            </a:r>
+          </a:p>
+          <a:p>
+            <a:r>
+              <a:t>1. What progress has been achieved since the last review?</a:t>
+            </a:r>
+          </a:p>
+          <a:p>
+            <a:r>
+              <a:t>2. What obstacles are preventing further progress?</a:t>
+            </a:r>
+          </a:p>
+          <a:p>
+            <a:r>
+              <a:t>3. What adjustment will restore momentum toward the target?</a:t>
+            </a:r>
+          </a:p>
+          <a:p>
+            <a:r>
+              <a:t>Through these conversations, performance management becomes a learning system. Teams develop a deeper understanding of how strategy unfolds in practice. Leaders strengthen their ability to guide execution through uncertainty and complexity.</a:t>
+            </a:r>
+          </a:p>
+          <a:p/>
+          <a:p>
+            <a:r>
+              <a:t>Scorecards and review discipline: Many organisations successfully build scorecards. Far fewer build the review discipline required to make those scorecards meaningful. The difference between the two determines whether performance management becomes a compliance ritual or a genuine engine of execution progress.</a:t>
+            </a:r>
+          </a:p>
+          <a:p>
+            <a:r>
+              <a:t>Through disciplined review conversations, organisations transform performance data into insight, insight into action, and action into renewed progress toward their strategic results.</a:t>
+            </a:r>
           </a:p>
           <a:p/>
           <a:p>
@@ -2970,6 +3424,67 @@
           <a:p/>
           <a:p>
             <a:r>
+              <a:t>Source detail (S2R® manuscript):</a:t>
+            </a:r>
+          </a:p>
+          <a:p/>
+          <a:p>
+            <a:r>
+              <a:t>From visibility to conversation: Once performance measurement makes execution visible, the next challenge is to translate performance visibility into meaningful conversations that restore momentum. The cycle transforms raw data into insight, and insight into action, so that performance measurement does not end with a score being recorded.</a:t>
+            </a:r>
+          </a:p>
+          <a:p>
+            <a:r>
+              <a:t>The stagnation the cycle prevents: Many organisations collect performance data but fail to convert that data into disciplined action. Reports are produced, dashboards are circulated, and metrics are displayed, yet very little actually changes in the way work is executed. The Review–Realign–Restore Cycle prevents this stagnation by creating a structured rhythm through which performance evidence is examined, interpreted, and acted upon. Through this cycle, performance measurement becomes a living execution discipline.</a:t>
+            </a:r>
+          </a:p>
+          <a:p/>
+          <a:p>
+            <a:r>
+              <a:t>Review (further detail): The self-assessment requires more than assigning a score: it requires the submission of verifiable evidence. Process indicators also count as evidence. The leader responsible for overseeing the KPI reviews the same KPI and examines the submitted evidence.</a:t>
+            </a:r>
+          </a:p>
+          <a:p>
+            <a:r>
+              <a:t>The existence of these two perspectives is intentional. Self-assessment encourages ownership and reflection by the KPI owner. Leader assessment introduces strategic perspective and broader organisational context. By examining both assessments together, the review conversation becomes a joint sense-making exercise.</a:t>
+            </a:r>
+          </a:p>
+          <a:p>
+            <a:r>
+              <a:t>The three review questions shift the conversation away from opinion and toward observable progress. The review stage therefore creates the visibility necessary for meaningful leadership action.</a:t>
+            </a:r>
+          </a:p>
+          <a:p/>
+          <a:p>
+            <a:r>
+              <a:t>Realign (further detail): The three root causes and their recovery responses are set out in full in the notes of the Accountability Loop slide.</a:t>
+            </a:r>
+          </a:p>
+          <a:p/>
+          <a:p>
+            <a:r>
+              <a:t>Restore (further detail): Execution momentum is restored through disciplined follow-through. The updated alignment score provides an ongoing signal of organisational readiness for execution.</a:t>
+            </a:r>
+          </a:p>
+          <a:p/>
+          <a:p>
+            <a:r>
+              <a:t>Why the cycle matters: The Review–Realign–Restore Cycle transforms performance measurement into an execution recovery system. Without this cycle, measurement becomes historical reporting. Numbers describe what happened in the past but provide little guidance about what should happen next.</a:t>
+            </a:r>
+          </a:p>
+          <a:p>
+            <a:r>
+              <a:t>With this cycle in place, measurement becomes a dynamic leadership process. Leaders observe progress. They diagnose emerging obstacles. They intervene intelligently. They restore momentum before performance failure becomes systemic.</a:t>
+            </a:r>
+          </a:p>
+          <a:p>
+            <a:r>
+              <a:t>Over time, this discipline builds an organisation that measures performance and continuously restores it. That capability is one of the defining characteristics of organisations that consistently convert strategy into results.</a:t>
+            </a:r>
+          </a:p>
+          <a:p/>
+          <a:p>
+            <a:r>
               <a:t>Professional insights:</a:t>
             </a:r>
           </a:p>
@@ -3090,6 +3605,45 @@
 Guidance (Section 1): The key facilitation moment is when leaders understand that most performance gaps have a diagnosable cause — and that the three root causes (accountability, skill, structural misfit) require fundamentally different responses.</a:t>
             </a:r>
             <a:endParaRPr lang="en-US" dirty="0"/>
+          </a:p>
+          <a:p/>
+          <a:p>
+            <a:r>
+              <a:t>Source detail (S2R® manuscript):</a:t>
+            </a:r>
+          </a:p>
+          <a:p/>
+          <a:p>
+            <a:r>
+              <a:t>Why gaps arise: Market conditions shift. Internal dependencies create delays. Capabilities evolve more slowly than anticipated. Competing priorities emerge. The realignment stage assigns no blame.</a:t>
+            </a:r>
+          </a:p>
+          <a:p>
+            <a:r>
+              <a:t>The default response: Many organisations respond to performance gaps with one default response: they push harder. More urgency is applied. More pressure is introduced. Deadlines are reinforced. Pressure alone rarely solves execution challenges because pressure does not identify the underlying cause of the problem. The Accountability Loop focuses on diagnosing the root cause of the gap.</a:t>
+            </a:r>
+          </a:p>
+          <a:p/>
+          <a:p>
+            <a:r>
+              <a:t>Lack of accountability (in full): The work may feel detached from a meaningful outcome. Competing priorities may have diluted attention. Personal energy may have shifted elsewhere. When this condition appears, the leader revisits the broader organisational context of the KPI. The conversation reconnects the task to the enterprise outcome it supports. The individual is reminded how their contribution fits into the wider organisational map. By restoring that line of sight, motivation and commitment can often be reactivated.</a:t>
+            </a:r>
+          </a:p>
+          <a:p>
+            <a:r>
+              <a:t>Lack of skill (in full): The challenge may involve technical expertise, analytical capability, leadership skills, or process knowledge that was initially underestimated. When the root cause is skill-related, the response focuses on capability development and adds no pressure. Targeted coaching may be introduced. Peer support may be arranged. Formal training may be provided. In some cases the timeline attached to the KPI may also require adjustment if the capability development process requires additional time.</a:t>
+            </a:r>
+          </a:p>
+          <a:p>
+            <a:r>
+              <a:t>Misfit of role or structural constraint (in full): Sometimes the issue lies beyond motivation and skill development. The role may require capabilities that the individual does not naturally bring to the task. In these cases the conversation shifts toward structural alignment. The task may be redistributed across the team. Responsibilities may be adjusted. In some situations the individual may be repositioned into a role that better aligns with their strengths.</a:t>
+            </a:r>
+          </a:p>
+          <a:p/>
+          <a:p>
+            <a:r>
+              <a:t>The leadership principle behind the separation: Performance discussions focus on progress toward outcomes. Role alignment discussions focus on placing individuals where their capabilities can generate the greatest organisational value. By maintaining this distinction, the organisation protects both fairness and clarity.</a:t>
+            </a:r>
           </a:p>
           <a:p/>
           <a:p>

--- a/Unit decks/Unit 08 - Performance Measurement.pptx
+++ b/Unit decks/Unit 08 - Performance Measurement.pptx
@@ -19,6 +19,7 @@
     <p:sldId id="279" r:id="rId30"/>
     <p:sldId id="264" r:id="rId10"/>
     <p:sldId id="266" r:id="rId12"/>
+    <p:sldId id="285" r:id="rId24"/>
     <p:sldId id="268" r:id="rId14"/>
     <p:sldId id="269" r:id="rId15"/>
     <p:sldId id="280" r:id="rId31"/>
@@ -577,6 +578,21 @@
           <a:p>
             <a:endParaRPr dirty="0"/>
           </a:p>
+          <a:p>
+            <a:endParaRPr lang="en-GB" dirty="0"/>
+          </a:p>
+          <a:p>
+            <a:r>
+              <a:rPr lang="en-GB" b="1" dirty="0"/>
+              <a:t>ON THE PORTAL, AFTER THE TEACHING:</a:t>
+            </a:r>
+          </a:p>
+          <a:p>
+            <a:r>
+              <a:rPr lang="en-GB" dirty="0"/>
+              <a:t>Participants write the reflection at the foot of part 2.1: where they have seen the velocity gap in their own setting, the point where it opened (detecting the deviation, understanding its cause, making the decision or translating it into action), the consequence that followed and what the delay cost.</a:t>
+            </a:r>
+          </a:p>
         </p:txBody>
       </p:sp>
       <p:sp>
@@ -836,13 +852,13 @@
 The Horizontal Coordination Gap
 One of the most common breakdowns occurs when performance reviews happen inside functions, with no cross-functional view. Each department reviews its KPIs independently. Finance examines financial indicators. Operations reviews throughput. Marketing examines campaign performance. Individually, these conversations may be rigorous and technically sound.
 But strategy execution rarely moves through a single function. Enterprise outcomes depend on interdependent execution across multiple functions. When performance reviews remain confined within functional boundaries, leaders see partial performance signals and miss the full execution pattern. Each function may report strong progress while the overall strategic outcome remains inconsistent.
-The Alignment Brigade closes this gap by introducing periodic cross-functional performance reviews where the executive team collectively examines how the KPIs across functions interact to produce enterprise outcomes.
+The leadership team, acting as the collective intelligence for execution discipline, closes this gap by introducing periodic cross-functional performance reviews where the executive team collectively examines how the KPIs across functions interact to produce enterprise outcomes.
 Facilitator question: “Name a strategic outcome in your organisation that required three or more functions to execute successfully. Where did the handoffs break down — and would a cross-functional review have caught it earlier?”
 Gap 02
 The Evidence Quality Gap
 Performance measurement loses power when review conversations rely on weak or inconsistent evidence. In some cases KPI owners present narrative explanations with no verifiable indicators. In others, the evidence reflects activity alone, with no evidence of progress toward the outcome. Sometimes information arrives too late to support timely decisions.
 When evidence quality declines, review conversations shift away from execution insight and toward interpretation debates. Leaders begin discussing whether the data can be trusted, and the review loses sight of what the data reveals about progress. Over time, the credibility of the performance system weakens.
-Closing this gap requires the Alignment Brigade to reinforce a simple but powerful principle: every performance review must be anchored in verifiable evidence that shows observable movement toward the outcome, is timely enough to inform decisions, and is clearly connected to the KPI, target, or Key Result being assessed.
+Closing this gap requires the leadership team, acting as the collective intelligence for execution discipline, to reinforce a simple but powerful principle: every performance review must be anchored in verifiable evidence that shows observable movement toward the outcome, is timely enough to inform decisions, and is clearly connected to the KPI, target, or Key Result being assessed.
 Facilitator question: “In your last performance review, what percentage of the conversation was spent debating the data versus acting on it? That ratio is a proxy for your evidence quality gap.”
 Gap 03
 The Review Rhythm Breakdown
@@ -891,7 +907,7 @@
           </a:p>
           <a:p>
             <a:r>
-              <a:t>Gap 03 · Review Rhythm Breakdown: Measurement is a continuous execution responsibility for KPI/KR owners. The Alignment Brigade protects the rhythm by ensuring that review conversations occur with the consistency required to detect early signals of drift.</a:t>
+              <a:t>Gap 03 · Review Rhythm Breakdown: Measurement is a continuous execution responsibility for KPI/KR owners. The leadership team, acting as the collective intelligence for execution discipline, protects the rhythm by ensuring that review conversations occur with the consistency required to detect early signals of drift.</a:t>
             </a:r>
           </a:p>
           <a:p>
@@ -1206,7 +1222,7 @@
           <a:p>
             <a:r>
               <a:rPr lang="en-GB" dirty="0"/>
-              <a:t>Say: "Many organisations conduct performance reviews. Few organisations convert those reviews into collective strategic intelligence. EPIC ensures that insights emerging from PM review sheets are brought together across functions in a structured conversation that allows the Alignment Brigade to observe execution as a living system."</a:t>
+              <a:t>Say: "Many organisations conduct performance reviews. Few organisations convert those reviews into collective strategic intelligence. EPIC ensures that insights emerging from PM review sheets are brought together across functions in a structured conversation that allows the leadership team, acting as the collective intelligence for execution discipline, to observe execution as a living system."</a:t>
             </a:r>
           </a:p>
           <a:p>
@@ -1287,7 +1303,7 @@
           <a:p>
             <a:r>
               <a:rPr lang="en-GB" dirty="0"/>
-              <a:t>Say: "What the executive team sees: Where a signal in one function is connected to activity in another. What looked like an isolated operational issue shows itself as a cross-functional execution dependency, and the Alignment Brigade can act on it before it becomes a measurable performance gap."</a:t>
+              <a:t>Say: "What the executive team sees: Where a signal in one function is connected to activity in another. What looked like an isolated operational issue shows itself as a cross-functional execution dependency, and the leadership team, acting as the collective intelligence for execution discipline, can act on it before it becomes a measurable performance gap."</a:t>
             </a:r>
           </a:p>
           <a:p>
@@ -1377,7 +1393,7 @@
           <a:p>
             <a:r>
               <a:rPr lang="en-GB" dirty="0"/>
-              <a:t>Participants write their own three signals at the foot of each tab of part 4.1, from their own Key Results and KPIs.</a:t>
+              <a:t>Participants write their early warning signal and their execution learning at the foot of the second and third tabs of part 4.1, from their own Key Results and KPIs. At the foot of part 4.1, they name the conversation type most difficult for them and their team.</a:t>
             </a:r>
           </a:p>
         </p:txBody>
@@ -1793,7 +1809,7 @@
           <a:p>
             <a:r>
               <a:rPr lang="en-GB" dirty="0"/>
-              <a:t>Say: "You are a CXO responsible for the Objective and Key Result (OKR): “Reduce customer complaint resolution time from 48 hours to 12 hours.” The latest performance review shows that progress has stalled and complaint resolution is still averaging 36 hours. The target deadline is six weeks away."</a:t>
+              <a:t>Say: "You are a CXO responsible for the Objective and Key Result (OKR): “Reduce customer complaint resolution time from 48 hours to 12 hours.” The Key Result supports the enterprise Objective of improving customer retention. At the start of the quarter, in the Alignment Dialogue, the Head of Customer Service rated their alignment with this Key Result at 9. The latest Review of the Review–Realign–Restore Cycle shows that progress has stalled at 36 hours, six weeks before the deadline, and that alignment has fallen. You must now activate the Accountability Loop to determine which of the three root causes is behind the gap."</a:t>
             </a:r>
           </a:p>
           <a:p>
@@ -1808,19 +1824,31 @@
           <a:p>
             <a:r>
               <a:rPr lang="en-GB" dirty="0"/>
-              <a:t>CXO: "Conducts the accountability conversation. Must diagnose the root cause without blaming. Uses the Accountability Loop to identify whether the issue is accountability, skill, or structural misfit, then uses the alignment dialogue of Unit 7 to restore momentum. Aims to reach an alignment of 9–10."</a:t>
+              <a:t>CXO: "Conducts the accountability conversation on the case. Opens with the evidence and the alignment score, then works through the GROW model with the team member: Goal, Reality, Options and Will. Aims to move the alignment close to 10."</a:t>
             </a:r>
           </a:p>
           <a:p>
             <a:r>
               <a:rPr lang="en-GB" dirty="0"/>
-              <a:t>Team member: "Responsible for execution of the improvement initiative. Responds authentically to the conversation. May show defensiveness, uncertainty, or genuine constraint, reflecting real organisational dynamics."</a:t>
+              <a:t>Team Member: "Owns the Key Result. Responds authentically to the conversation, and may show defensiveness, uncertainty or genuine constraint."</a:t>
             </a:r>
           </a:p>
           <a:p>
             <a:r>
               <a:rPr lang="en-GB" dirty="0"/>
-              <a:t>Observer: "Evaluates the quality of the conversation against the three criteria below. Provides structured feedback after the role play. Does not intervene during the exercise."</a:t>
+              <a:t>Observer: "Notes how the CXO used each stage of the GROW model. Gives feedback after the role play and does not intervene during it."</a:t>
+            </a:r>
+          </a:p>
+          <a:p>
+            <a:r>
+              <a:rPr lang="en-GB" dirty="0"/>
+              <a:t>Give the team member this brief privately: "You own the complaint resolution Key Result and you want the 12-hour target: customers tell you every week that waiting two days is why they leave. You check the numbers every day, and you and your team have been clearing the backlog by hand over weekends. The people and the new ticketing system are in place, and running the team is what you do well. The triage redesign is behind because you cannot tell from the routing reports which complaint types cause the delays, and you have never redesigned a process from data. Share this only when the CXO’s questions bring it out."</a:t>
+            </a:r>
+          </a:p>
+          <a:p>
+            <a:r>
+              <a:rPr lang="en-GB" dirty="0"/>
+              <a:t>The role play case is built on a lack of skill. The Portfolio case participants analyse after class is built on a different root cause.</a:t>
             </a:r>
           </a:p>
           <a:p>
@@ -1835,19 +1863,19 @@
           <a:p>
             <a:r>
               <a:rPr lang="en-GB" b="1" dirty="0"/>
-              <a:t>3. Run the conversation.</a:t>
+              <a:t>3. Run the conversation using GROW.</a:t>
             </a:r>
           </a:p>
           <a:p>
             <a:r>
               <a:rPr lang="en-GB" dirty="0"/>
-              <a:t>The CXO opens with the evidence and diagnoses the root cause with the team member before any corrective action is discussed.</a:t>
+              <a:t>The CXO opens with the evidence and asks the alignment question, then works through Goal, Reality, Options and Will with the team member.</a:t>
             </a:r>
           </a:p>
           <a:p>
             <a:r>
               <a:rPr lang="en-GB" dirty="0"/>
-              <a:t>If the CXO defaults to pressure and skips diagnosis, pause and redirect: "You have identified the gap. Now diagnose the cause. Is this an accountability issue, a skill gap, or a structural constraint? What evidence do you have for that?"</a:t>
+              <a:t>If the CXO defaults to pressure, pause and redirect: "You have identified the gap. Now ask about the reality behind it before you move to options."</a:t>
             </a:r>
           </a:p>
           <a:p>
@@ -1862,7 +1890,7 @@
           <a:p>
             <a:r>
               <a:rPr lang="en-GB" dirty="0"/>
-              <a:t>The CXO closes with the corrective actions, the follow-up and the alignment question.</a:t>
+              <a:t>The CXO closes with the actions, the follow-up and the alignment question asked again, aiming close to 10.</a:t>
             </a:r>
           </a:p>
           <a:p>
@@ -1883,7 +1911,7 @@
           <a:p>
             <a:r>
               <a:rPr lang="en-GB" dirty="0"/>
-              <a:t>The observer posts in the chat the root cause diagnosed (accountability, skill or structural), the evidence for it and how the conversation met each criterion.</a:t>
+              <a:t>The observer posts in the chat how the CXO used each stage of GROW and the root cause that surfaced.</a:t>
             </a:r>
           </a:p>
           <a:p>
@@ -1904,7 +1932,7 @@
           <a:p>
             <a:r>
               <a:rPr lang="en-GB" dirty="0"/>
-              <a:t>Participants complete personal Portfolio work in part 4.2 of their own file. They read a full conversation on the same case and work out how the CXO applied the cycle and the loop: the evidence used in Review, the root cause diagnosed in Realign and how the other two were ruled out, the corrective actions and the movement of the alignment score in Restore, and their own judgement against the three criteria.</a:t>
+              <a:t>After class, participants complete personal Portfolio work in part 4.2 of their own file. They read a scripted conversation on a different case, in which the root cause is never named. They deduce which of the three root causes is evident and the lines that rule out the other two, write how they would use GROW to resolve it and move the alignment close to 10, and judge how the CXO applied the Accountability Loop against the GROW model.</a:t>
             </a:r>
           </a:p>
         </p:txBody>
@@ -1991,7 +2019,7 @@
           <a:p>
             <a:r>
               <a:rPr lang="en-GB" b="1" dirty="0"/>
-              <a:t>4.2 — EVALUATION CRITERIA</a:t>
+              <a:t>4.2 — ANALYSING THE CONVERSATION WITH GROW</a:t>
             </a:r>
           </a:p>
           <a:p>
@@ -2009,25 +2037,46 @@
           <a:p>
             <a:r>
               <a:rPr lang="en-GB" b="1" dirty="0"/>
-              <a:t>1. Brief the observer before the role play.</a:t>
+              <a:t>1. Recall GROW from Unit 7.</a:t>
             </a:r>
           </a:p>
           <a:p>
             <a:r>
               <a:rPr lang="en-GB" dirty="0"/>
-              <a:t>Criterion 01 · Evidence Was Used in the Discussion: "Did the CXO anchor the conversation in verifiable performance data? Was the 36-hour average cited specifically? Were trends, milestones, or other evidence referenced? A conversation without evidence quickly becomes a debate about effort."</a:t>
+              <a:t>Say: "The GROW model of Unit 7 is the basis for analysing the conversation. Each stage asks a question, and the individual does the thinking, so the answers reached are their own."</a:t>
+            </a:r>
+          </a:p>
+          <a:p>
+            <a:endParaRPr lang="en-GB" dirty="0"/>
+          </a:p>
+          <a:p>
+            <a:r>
+              <a:rPr lang="en-GB" b="1" dirty="0"/>
+              <a:t>2. Teach each stage as it works in the Accountability Loop.</a:t>
             </a:r>
           </a:p>
           <a:p>
             <a:r>
               <a:rPr lang="en-GB" dirty="0"/>
-              <a:t>Criterion 02 · Root Cause Was Correctly Identified: "Did the CXO arrive at a root cause diagnosis through genuine dialogue, or assume one at the outset? The root cause must emerge from the conversation. A misdiagnosed root cause leads to a mismatched recovery response that will fail even if executed well."</a:t>
+              <a:t>G · Goal: "What the individual wants to reach. In the Accountability Loop: ownership of the Key Result again, an alignment score of 9 or 10." Question: “What would a 9 or 10 look like for you on this Key Result?”</a:t>
             </a:r>
           </a:p>
           <a:p>
             <a:r>
               <a:rPr lang="en-GB" dirty="0"/>
-              <a:t>Criterion 03 · Clear Corrective Actions Were Agreed: "Did the conversation end with specific, time-bound corrective actions that both parties understood and accepted? Was an alignment score agreed? Was a follow-up mechanism established? A review conversation that does not produce a named next action has not completed the Restore stage of the cycle."</a:t>
+              <a:t>R · Reality: "What is true today. The leader explores what stands behind the score and the gap, and listens without defending the target." Question: “What has moved your alignment from where it was?”</a:t>
+            </a:r>
+          </a:p>
+          <a:p>
+            <a:r>
+              <a:rPr lang="en-GB" dirty="0"/>
+              <a:t>O · Options: "What could be done. The individual generates the ways forward, matched to the root cause." Question: “What could you do? What support would make the difference?”</a:t>
+            </a:r>
+          </a:p>
+          <a:p>
+            <a:r>
+              <a:rPr lang="en-GB" dirty="0"/>
+              <a:t>W · Will: "What will be done, and by whom. The actions, the owner and the follow-up are agreed, and the alignment question is asked again." Question: “With that agreed, where is your alignment now, on the scale of 1–10?”</a:t>
             </a:r>
           </a:p>
           <a:p>
@@ -2036,13 +2085,28 @@
           <a:p>
             <a:r>
               <a:rPr lang="en-GB" b="1" dirty="0"/>
-              <a:t>2. Use the criteria in the debrief.</a:t>
+              <a:t>3. Brief the observer before the role play.</a:t>
             </a:r>
           </a:p>
           <a:p>
             <a:r>
               <a:rPr lang="en-GB" dirty="0"/>
-              <a:t>The observer posts how the conversation met each criterion. Ask the room which criterion was hardest to meet, and why.</a:t>
+              <a:t>Say: "Note how the CXO used each stage of GROW: did the CXO agree the goal, explore the reality, let the owner generate the options, and close with the will and the alignment question asked again?"</a:t>
+            </a:r>
+          </a:p>
+          <a:p>
+            <a:endParaRPr lang="en-GB" dirty="0"/>
+          </a:p>
+          <a:p>
+            <a:r>
+              <a:rPr lang="en-GB" b="1" dirty="0"/>
+              <a:t>4. Use GROW in the debrief.</a:t>
+            </a:r>
+          </a:p>
+          <a:p>
+            <a:r>
+              <a:rPr lang="en-GB" dirty="0"/>
+              <a:t>The observer posts how the CXO used each stage. Ask the room which stage was hardest to hold, and why.</a:t>
             </a:r>
           </a:p>
           <a:p>
@@ -2069,7 +2133,7 @@
           <a:p>
             <a:r>
               <a:rPr lang="en-GB" dirty="0"/>
-              <a:t>In part 4.2 of their own file, participants judge the scripted conversation against these three criteria.</a:t>
+              <a:t>After class, in part 4.2 of their own file, participants deduce the root cause in a scripted conversation, use GROW to plan its resolution, and judge how the CXO applied the Accountability Loop.</a:t>
             </a:r>
           </a:p>
         </p:txBody>
@@ -2103,6 +2167,172 @@
         <p14:creationId xmlns:p14="http://schemas.microsoft.com/office/powerpoint/2010/main" val="1024086991"/>
       </p:ext>
     </p:extLst>
+  </p:cSld>
+  <p:clrMapOvr>
+    <a:masterClrMapping/>
+  </p:clrMapOvr>
+</p:notes>
+</file>
+
+<file path=ppt/notesSlides/notesSlide23.xml><?xml version="1.0" encoding="utf-8"?>
+<p:notes xmlns:a="http://schemas.openxmlformats.org/drawingml/2006/main" xmlns:p="http://schemas.openxmlformats.org/presentationml/2006/main" xmlns:r="http://schemas.openxmlformats.org/officeDocument/2006/relationships">
+  <p:cSld>
+    <p:spTree>
+      <p:nvGrpSpPr>
+        <p:cNvPr id="1" name=""/>
+        <p:cNvGrpSpPr/>
+        <p:nvPr/>
+      </p:nvGrpSpPr>
+      <p:grpSpPr>
+        <a:xfrm>
+          <a:off x="0" y="0"/>
+          <a:ext cx="0" cy="0"/>
+          <a:chOff x="0" y="0"/>
+          <a:chExt cx="0" cy="0"/>
+        </a:xfrm>
+      </p:grpSpPr>
+      <p:sp>
+        <p:nvSpPr>
+          <p:cNvPr id="2" name="Slide Image Placeholder 1"/>
+          <p:cNvSpPr>
+            <a:spLocks noGrp="1" noRot="1" noChangeAspect="1"/>
+          </p:cNvSpPr>
+          <p:nvPr>
+            <p:ph type="sldImg"/>
+          </p:nvPr>
+        </p:nvSpPr>
+        <p:spPr/>
+      </p:sp>
+      <p:sp>
+        <p:nvSpPr>
+          <p:cNvPr id="3" name="Notes Placeholder 2"/>
+          <p:cNvSpPr>
+            <a:spLocks noGrp="1"/>
+          </p:cNvSpPr>
+          <p:nvPr>
+            <p:ph type="body" idx="1"/>
+          </p:nvPr>
+        </p:nvSpPr>
+        <p:spPr/>
+        <p:txBody>
+          <a:bodyPr/>
+          <a:lstStyle/>
+          <a:p>
+            <a:r>
+              <a:rPr lang="en-GB" b="1" dirty="0"/>
+              <a:t>SECTION 2 REFLECTIONS</a:t>
+            </a:r>
+          </a:p>
+          <a:p>
+            <a:endParaRPr lang="en-GB" dirty="0"/>
+          </a:p>
+          <a:p>
+            <a:r>
+              <a:rPr lang="en-GB" b="1" dirty="0"/>
+              <a:t>HOW TO USE THIS SLIDE:</a:t>
+            </a:r>
+          </a:p>
+          <a:p>
+            <a:endParaRPr lang="en-GB" dirty="0"/>
+          </a:p>
+          <a:p>
+            <a:r>
+              <a:rPr lang="en-GB" b="1" dirty="0"/>
+              <a:t>1. Show the slide and read the prompt aloud.</a:t>
+            </a:r>
+          </a:p>
+          <a:p>
+            <a:r>
+              <a:rPr lang="en-GB" dirty="0"/>
+              <a:t>2.1 Reflection — Where You Have Seen the Velocity Gap: "The velocity gap is the distance between the pace of progress you planned and the pace you achieved. Think of a strategic priority in your own setting that moved more slowly than planned while its measures were in place. Where did the velocity gap open: in detecting the deviation, understanding its cause, making the decision or translating the decision into action? Which of the four consequences followed, and what did the delay cost?"</a:t>
+            </a:r>
+          </a:p>
+          <a:p>
+            <a:endParaRPr lang="en-GB" dirty="0"/>
+          </a:p>
+          <a:p>
+            <a:r>
+              <a:rPr lang="en-GB" b="1" dirty="0"/>
+              <a:t>2. Say what the reflection is for.</a:t>
+            </a:r>
+          </a:p>
+          <a:p>
+            <a:r>
+              <a:rPr lang="en-GB" dirty="0"/>
+              <a:t>Say: "Execution velocity is the rate at which an organisation converts strategic intent into measurable results. In this reflection, you name one place in your own setting where the pace fell behind the plan, and the point where the gap opened."</a:t>
+            </a:r>
+          </a:p>
+          <a:p>
+            <a:endParaRPr lang="en-GB" dirty="0"/>
+          </a:p>
+          <a:p>
+            <a:r>
+              <a:rPr lang="en-GB" b="1" dirty="0"/>
+              <a:t>3. Set the standard.</a:t>
+            </a:r>
+          </a:p>
+          <a:p>
+            <a:r>
+              <a:rPr lang="en-GB" dirty="0"/>
+              <a:t>Say: "Name a real priority, the real point of delay and what it cost."</a:t>
+            </a:r>
+          </a:p>
+          <a:p>
+            <a:endParaRPr lang="en-GB" dirty="0"/>
+          </a:p>
+          <a:p>
+            <a:r>
+              <a:rPr lang="en-GB" b="1" dirty="0"/>
+              <a:t>4. Bridge to Section 3.</a:t>
+            </a:r>
+          </a:p>
+          <a:p>
+            <a:r>
+              <a:rPr lang="en-GB" dirty="0"/>
+              <a:t>Say: "You have seen what weak review discipline costs. Section 3 shows where the review of performance breaks down across functions."</a:t>
+            </a:r>
+          </a:p>
+          <a:p>
+            <a:endParaRPr lang="en-GB" dirty="0"/>
+          </a:p>
+          <a:p>
+            <a:r>
+              <a:rPr lang="en-GB" b="1" dirty="0"/>
+              <a:t>ON THE PORTAL, AFTER THE TEACHING:</a:t>
+            </a:r>
+          </a:p>
+          <a:p>
+            <a:r>
+              <a:rPr lang="en-GB" dirty="0"/>
+              <a:t>Participants write this reflection in Section 2 of the participant file, at the foot of part 2.1.</a:t>
+            </a:r>
+          </a:p>
+        </p:txBody>
+      </p:sp>
+      <p:sp>
+        <p:nvSpPr>
+          <p:cNvPr id="4" name="Slide Number Placeholder 3"/>
+          <p:cNvSpPr>
+            <a:spLocks noGrp="1"/>
+          </p:cNvSpPr>
+          <p:nvPr>
+            <p:ph type="sldNum" sz="quarter" idx="10"/>
+          </p:nvPr>
+        </p:nvSpPr>
+        <p:spPr/>
+        <p:txBody>
+          <a:bodyPr/>
+          <a:lstStyle/>
+          <a:p>
+            <a:fld id="{F7021451-1387-4CA6-816F-3879F97B5CBC}" type="slidenum">
+              <a:rPr lang="en-US"/>
+              <a:t>7</a:t>
+            </a:fld>
+            <a:endParaRPr lang="en-US"/>
+          </a:p>
+        </p:txBody>
+      </p:sp>
+    </p:spTree>
   </p:cSld>
   <p:clrMapOvr>
     <a:masterClrMapping/>
@@ -2475,7 +2705,7 @@
           <a:p>
             <a:r>
               <a:rPr lang="en-GB" dirty="0"/>
-              <a:t>Say: "No single role opens a fracture alone. The Alignment Brigade closes the four fractures when each leader sees how the habits in their own reviews feed them, and the executive team reviews the chain of execution together."</a:t>
+              <a:t>Say: "No single role opens a fracture alone. The leadership team, acting as the collective intelligence for execution discipline, closes the four fractures when each leader sees how the habits in their own reviews feed them, and the executive team reviews the chain of execution together."</a:t>
             </a:r>
           </a:p>
           <a:p>
@@ -2762,13 +2992,13 @@
           <a:p>
             <a:r>
               <a:rPr lang="en-GB" dirty="0"/>
-              <a:t>4.1 Reflection — Your Progress Signal: "For one of your Key Results or KPIs: what is your current percentage progress, what evidence supports it, and is your momentum accelerating, stable or slowing?"</a:t>
+              <a:t>4.1 Reflection — Your Early Warning Signal: "Which one or two early warning signals have emerged in your area? What evidence supports each, and what could it affect?"</a:t>
             </a:r>
           </a:p>
           <a:p>
             <a:r>
               <a:rPr lang="en-GB" dirty="0"/>
-              <a:t>4.1 Reflection — Your Early Warning Signal: "Which one or two early warning signals have emerged in your area? What evidence supports each, and what could it affect?"</a:t>
+              <a:t>4.1 Reflection — Your Execution Learning: "What is one key execution learning from your performance reviews? What evidence supports it, and does it apply to your function or to the enterprise?"</a:t>
             </a:r>
           </a:p>
           <a:p>
@@ -2798,7 +3028,7 @@
           <a:p>
             <a:r>
               <a:rPr lang="en-GB" dirty="0"/>
-              <a:t>Participants write their progress signal and their early warning signal at the foot of the first two tabs of part 4.1.</a:t>
+              <a:t>Participants write their early warning signal and their execution learning at the foot of the second and third tabs of part 4.1.</a:t>
             </a:r>
           </a:p>
         </p:txBody>
@@ -2904,7 +3134,7 @@
           <a:p>
             <a:r>
               <a:rPr lang="en-GB" dirty="0"/>
-              <a:t>4.1 Reflection — Your Execution Learning: "What is one key execution learning from your performance reviews? What evidence supports it, and does it apply to your function or to the enterprise?"</a:t>
+              <a:t>4.1 Reflection — The Conversation Type Most Difficult for Your Team: "Which conversation type is most difficult for you and your team: reporting progress against evidence, naming an early warning, or sharing an execution learning? What makes it difficult, and what would make it easier?"</a:t>
             </a:r>
           </a:p>
           <a:p>
@@ -2925,7 +3155,7 @@
           <a:p>
             <a:r>
               <a:rPr lang="en-GB" dirty="0"/>
-              <a:t>Say: "In 4.2, you read a full Accountability Loop conversation on the case of the role play and work out how the CXO applied the cycle: the evidence in Review, the root cause in Realign, the corrective actions and the alignment score in Restore. This is personal work, and it builds your learning portfolio."</a:t>
+              <a:t>Say: "In 4.2, you read a full Accountability Loop conversation on a different case from the role play. The conversation never names the root cause: you deduce which of the three it is, write how you would use GROW to resolve it and move the alignment close to 10, and judge how the CXO applied the loop against GROW. This is personal work, and it builds your learning portfolio."</a:t>
             </a:r>
           </a:p>
           <a:p>
@@ -2955,7 +3185,7 @@
           <a:p>
             <a:r>
               <a:rPr lang="en-GB" dirty="0"/>
-              <a:t>Participants write their execution learning at the foot of the third tab of part 4.1, and complete the Portfolio work of part 4.2.</a:t>
+              <a:t>Participants write the reflection at the foot of part 4.1, and complete the Portfolio work of part 4.2.</a:t>
             </a:r>
           </a:p>
         </p:txBody>
@@ -4535,7 +4765,7 @@
           <a:p>
             <a:r>
               <a:rPr lang="en-GB" dirty="0"/>
-              <a:t>Say: "When a gap is identified, the leader activates the Accountability Loop: a structured diagnostic process designed to restore traction and ownership without collapsing into unproductive performance pressure. Most performance gaps emerge from one of three underlying conditions."</a:t>
+              <a:t>Say: "When a gap is identified, the leader activates the Accountability Loop: a structured diagnostic process designed to restore traction and ownership without collapsing into unproductive performance pressure. Most performance gaps emerge from one of three underlying conditions, and each calls for its own recovery."</a:t>
             </a:r>
           </a:p>
           <a:p>
@@ -4544,7 +4774,22 @@
           <a:p>
             <a:r>
               <a:rPr lang="en-GB" b="1" dirty="0"/>
-              <a:t>2. Teach the three root causes, one card at a time.</a:t>
+              <a:t>2. Name how the recovery is achieved.</a:t>
+            </a:r>
+          </a:p>
+          <a:p>
+            <a:r>
+              <a:rPr lang="en-GB" dirty="0"/>
+              <a:t>Say: "The leader achieves the recovery through the GROW model you used for the Alignment Dialogue in Unit 7: Goal, Reality, Options and Will. The goal of the conversation is ownership of the KPI: an alignment score of 9 or 10."</a:t>
+            </a:r>
+          </a:p>
+          <a:p>
+            <a:endParaRPr lang="en-GB" dirty="0"/>
+          </a:p>
+          <a:p>
+            <a:r>
+              <a:rPr lang="en-GB" b="1" dirty="0"/>
+              <a:t>3. Teach the three root causes, one card at a time.</a:t>
             </a:r>
           </a:p>
           <a:p>
@@ -4556,8 +4801,26 @@
           <a:p>
             <a:r>
               <a:rPr lang="en-GB" dirty="0"/>
+              <a:t>Achieving it through GROW. Goal: Reconnect the KPI to the enterprise outcome it supports, and agree what an alignment of 9 or 10 would look like. Reality: Explore what has drawn attention away from the KPI and how the individual now sees the target. Options: The individual names how they will restore focus on the KPI among competing priorities. Will: The individual restates ownership, the actions and the follow-up date, and the leader asks the alignment question again.</a:t>
+            </a:r>
+          </a:p>
+          <a:p>
+            <a:endParaRPr lang="en-GB" dirty="0"/>
+          </a:p>
+          <a:p>
+            <a:r>
+              <a:rPr lang="en-GB" dirty="0"/>
               <a:t>Lack of skill. Say: "The individual is committed but lacks the capability required to achieve the expected level. The challenge may involve technical expertise, analytical capability, leadership skills, or process knowledge that was initially underestimated. Recovery: Develop capability, with no added pressure. Targeted coaching may be introduced. Peer support may be arranged. Formal training may be provided. In some cases the timeline attached to the KPI may also require adjustment if the capability development process requires additional time."</a:t>
             </a:r>
+          </a:p>
+          <a:p>
+            <a:r>
+              <a:rPr lang="en-GB" dirty="0"/>
+              <a:t>Achieving it through GROW. Goal: Agree the result the KPI requires, the capability it calls for, and what an alignment of 9 or 10 would look like. Reality: Establish which part of the task the individual cannot yet do, and what they can already do well. Options: Choose together among targeted coaching, peer support, formal training and an adjusted timeline. Will: Agree the development plan, any adjusted milestones and the follow-up, and ask the alignment question again.</a:t>
+            </a:r>
+          </a:p>
+          <a:p>
+            <a:endParaRPr lang="en-GB" dirty="0"/>
           </a:p>
           <a:p>
             <a:r>
@@ -4568,6 +4831,21 @@
           <a:p>
             <a:r>
               <a:rPr lang="en-GB" dirty="0"/>
+              <a:t>Achieving it through GROW. Goal: Agree the outcome the KPI must deliver, whoever delivers it. Reality: Establish where the demands of the role and the strengths of the individual, or the structure around them, do not match. Options: Consider redistributing the task, adjusting responsibilities or, in a separate role conversation, repositioning the individual. Will: Agree the structural change, who decides it and by when, and ask the alignment question again with whoever now owns the KPI.</a:t>
+            </a:r>
+          </a:p>
+          <a:p>
+            <a:endParaRPr lang="en-GB" dirty="0"/>
+          </a:p>
+          <a:p>
+            <a:r>
+              <a:rPr lang="en-GB" dirty="0"/>
+              <a:t>Then say: "Every recovery closes with the alignment question asked again: on a scale of 1 to 10, where is your alignment now?"</a:t>
+            </a:r>
+          </a:p>
+          <a:p>
+            <a:r>
+              <a:rPr lang="en-GB" dirty="0"/>
               <a:t>Then say: "Leaders must distinguish between team members who cannot perform and those who will not. Inability needs development, and unwillingness needs accountability." (Journal, 7 January 2026, Professional Insights: Leadership)</a:t>
             </a:r>
           </a:p>
@@ -4583,7 +4861,7 @@
           <a:p>
             <a:r>
               <a:rPr lang="en-GB" b="1" dirty="0"/>
-              <a:t>3. Keep the two conversations separate.</a:t>
+              <a:t>4. Keep the two conversations separate.</a:t>
             </a:r>
           </a:p>
           <a:p>
@@ -4604,7 +4882,7 @@
           <a:p>
             <a:r>
               <a:rPr lang="en-GB" b="1" dirty="0"/>
-              <a:t>4. Ask, now that the loop is taught.</a:t>
+              <a:t>5. Ask, now that the loop is taught.</a:t>
             </a:r>
           </a:p>
           <a:p>
@@ -5359,6 +5637,424 @@
 </p:sld>
 </file>
 
+<file path=ppt/slides/slide10.xml><?xml version="1.0" encoding="utf-8"?>
+<p:sld xmlns:a="http://schemas.openxmlformats.org/drawingml/2006/main" xmlns:r="http://schemas.openxmlformats.org/officeDocument/2006/relationships" xmlns:p="http://schemas.openxmlformats.org/presentationml/2006/main">
+  <p:cSld name="Slide 9">
+    <p:bg>
+      <p:bgPr>
+        <a:solidFill>
+          <a:srgbClr val="1A5C2C"/>
+        </a:solidFill>
+        <a:effectLst/>
+      </p:bgPr>
+    </p:bg>
+    <p:spTree>
+      <p:nvGrpSpPr>
+        <p:cNvPr id="1" name=""/>
+        <p:cNvGrpSpPr/>
+        <p:nvPr/>
+      </p:nvGrpSpPr>
+      <p:grpSpPr>
+        <a:xfrm>
+          <a:off x="0" y="0"/>
+          <a:ext cx="0" cy="0"/>
+          <a:chOff x="0" y="0"/>
+          <a:chExt cx="0" cy="0"/>
+        </a:xfrm>
+      </p:grpSpPr>
+      <p:sp>
+        <p:nvSpPr>
+          <p:cNvPr id="2" name="Text 0"/>
+          <p:cNvSpPr txBox="1"/>
+          <p:nvPr/>
+        </p:nvSpPr>
+        <p:spPr>
+          <a:xfrm>
+            <a:off x="457200" y="822960"/>
+            <a:ext cx="2103120" cy="2194560"/>
+          </a:xfrm>
+          <a:prstGeom prst="rect">
+            <a:avLst/>
+          </a:prstGeom>
+          <a:noFill/>
+          <a:ln/>
+        </p:spPr>
+        <p:txBody>
+          <a:bodyPr wrap="square" lIns="0" tIns="0" rIns="0" bIns="0" rtlCol="0" anchor="t"/>
+          <a:lstStyle/>
+          <a:p>
+            <a:pPr marL="0" indent="0">
+              <a:buNone/>
+            </a:pPr>
+            <a:r>
+              <a:rPr lang="en-US" sz="15000" b="1" dirty="0">
+                <a:solidFill>
+                  <a:srgbClr val="C6A24C"/>
+                </a:solidFill>
+                <a:latin typeface="Cambria" pitchFamily="34" charset="0"/>
+                <a:ea typeface="Cambria" pitchFamily="34" charset="-122"/>
+                <a:cs typeface="Cambria" pitchFamily="34" charset="-120"/>
+              </a:rPr>
+              <a:t>2</a:t>
+            </a:r>
+            <a:endParaRPr lang="en-US" sz="15000" dirty="0"/>
+          </a:p>
+        </p:txBody>
+      </p:sp>
+      <p:sp>
+        <p:nvSpPr>
+          <p:cNvPr id="3" name="Text 1"/>
+          <p:cNvSpPr txBox="1"/>
+          <p:nvPr/>
+        </p:nvSpPr>
+        <p:spPr>
+          <a:xfrm>
+            <a:off x="2743200" y="914400"/>
+            <a:ext cx="8229600" cy="457200"/>
+          </a:xfrm>
+          <a:prstGeom prst="rect">
+            <a:avLst/>
+          </a:prstGeom>
+          <a:noFill/>
+          <a:ln/>
+        </p:spPr>
+        <p:txBody>
+          <a:bodyPr wrap="square" lIns="0" tIns="0" rIns="0" bIns="0" rtlCol="0" anchor="t"/>
+          <a:lstStyle/>
+          <a:p>
+            <a:pPr marL="0" indent="0">
+              <a:buNone/>
+            </a:pPr>
+            <a:r>
+              <a:rPr lang="en-US" sz="2400" b="1" dirty="0">
+                <a:solidFill>
+                  <a:srgbClr val="E6D3A0"/>
+                </a:solidFill>
+                <a:latin typeface="Calibri" pitchFamily="34" charset="0"/>
+                <a:ea typeface="Calibri" pitchFamily="34" charset="-122"/>
+                <a:cs typeface="Calibri" pitchFamily="34" charset="-120"/>
+              </a:rPr>
+              <a:t>Section 2</a:t>
+            </a:r>
+            <a:endParaRPr lang="en-US" sz="2400" dirty="0"/>
+          </a:p>
+        </p:txBody>
+      </p:sp>
+      <p:sp>
+        <p:nvSpPr>
+          <p:cNvPr id="4" name="Text 2"/>
+          <p:cNvSpPr txBox="1"/>
+          <p:nvPr/>
+        </p:nvSpPr>
+        <p:spPr>
+          <a:xfrm>
+            <a:off x="2743200" y="1371600"/>
+            <a:ext cx="8961120" cy="868680"/>
+          </a:xfrm>
+          <a:prstGeom prst="rect">
+            <a:avLst/>
+          </a:prstGeom>
+          <a:noFill/>
+          <a:ln/>
+        </p:spPr>
+        <p:txBody>
+          <a:bodyPr wrap="square" lIns="0" tIns="0" rIns="0" bIns="0" rtlCol="0" anchor="t"/>
+          <a:lstStyle/>
+          <a:p>
+            <a:pPr marL="0" indent="0">
+              <a:buNone/>
+            </a:pPr>
+            <a:r>
+              <a:rPr lang="en-US" sz="4400" b="1" dirty="0">
+                <a:solidFill>
+                  <a:srgbClr val="FFFFFF"/>
+                </a:solidFill>
+                <a:latin typeface="Cambria" pitchFamily="34" charset="0"/>
+                <a:ea typeface="Cambria" pitchFamily="34" charset="-122"/>
+                <a:cs typeface="Cambria" pitchFamily="34" charset="-120"/>
+              </a:rPr>
+              <a:t>Intelligence — Why</a:t>
+            </a:r>
+            <a:endParaRPr lang="en-US" sz="4400" dirty="0"/>
+          </a:p>
+        </p:txBody>
+      </p:sp>
+      <p:sp>
+        <p:nvSpPr>
+          <p:cNvPr id="5" name="Text 3"/>
+          <p:cNvSpPr txBox="1"/>
+          <p:nvPr/>
+        </p:nvSpPr>
+        <p:spPr>
+          <a:xfrm>
+            <a:off x="2743200" y="2240280"/>
+            <a:ext cx="8961120" cy="868680"/>
+          </a:xfrm>
+          <a:prstGeom prst="rect">
+            <a:avLst/>
+          </a:prstGeom>
+          <a:noFill/>
+          <a:ln/>
+        </p:spPr>
+        <p:txBody>
+          <a:bodyPr wrap="square" lIns="0" tIns="0" rIns="0" bIns="0" rtlCol="0" anchor="t"/>
+          <a:lstStyle/>
+          <a:p>
+            <a:pPr marL="0" indent="0">
+              <a:buNone/>
+            </a:pPr>
+            <a:r>
+              <a:rPr lang="en-US" sz="2600" i="1" dirty="0">
+                <a:solidFill>
+                  <a:srgbClr val="DDE8DF"/>
+                </a:solidFill>
+                <a:latin typeface="Calibri" pitchFamily="34" charset="0"/>
+                <a:ea typeface="Calibri" pitchFamily="34" charset="-122"/>
+                <a:cs typeface="Calibri" pitchFamily="34" charset="-120"/>
+              </a:rPr>
+              <a:t>Why Performance Measurement Determines Execution Velocity</a:t>
+            </a:r>
+            <a:endParaRPr lang="en-US" sz="2600" dirty="0"/>
+          </a:p>
+        </p:txBody>
+      </p:sp>
+      <p:sp>
+        <p:nvSpPr>
+          <p:cNvPr id="6" name="Text 4"/>
+          <p:cNvSpPr txBox="1"/>
+          <p:nvPr/>
+        </p:nvSpPr>
+        <p:spPr>
+          <a:xfrm>
+            <a:off x="2743200" y="3246120"/>
+            <a:ext cx="8229600" cy="457200"/>
+          </a:xfrm>
+          <a:prstGeom prst="rect">
+            <a:avLst/>
+          </a:prstGeom>
+          <a:noFill/>
+          <a:ln/>
+        </p:spPr>
+        <p:txBody>
+          <a:bodyPr wrap="square" lIns="0" tIns="0" rIns="0" bIns="0" rtlCol="0" anchor="t"/>
+          <a:lstStyle/>
+          <a:p>
+            <a:pPr marL="0" indent="0">
+              <a:buNone/>
+            </a:pPr>
+            <a:r>
+              <a:rPr lang="en-US" sz="2400" b="1" dirty="0">
+                <a:solidFill>
+                  <a:srgbClr val="C6A24C"/>
+                </a:solidFill>
+                <a:latin typeface="Calibri" pitchFamily="34" charset="0"/>
+                <a:ea typeface="Calibri" pitchFamily="34" charset="-122"/>
+                <a:cs typeface="Calibri" pitchFamily="34" charset="-120"/>
+              </a:rPr>
+              <a:t>Section learning outcomes</a:t>
+            </a:r>
+            <a:endParaRPr lang="en-US" sz="2400" dirty="0"/>
+          </a:p>
+        </p:txBody>
+      </p:sp>
+      <p:sp>
+        <p:nvSpPr>
+          <p:cNvPr id="7" name="Shape 5"/>
+          <p:cNvSpPr/>
+          <p:nvPr/>
+        </p:nvSpPr>
+        <p:spPr>
+          <a:xfrm>
+            <a:off x="2743200" y="3822192"/>
+            <a:ext cx="384048" cy="384048"/>
+          </a:xfrm>
+          <a:prstGeom prst="ellipse">
+            <a:avLst/>
+          </a:prstGeom>
+          <a:solidFill>
+            <a:srgbClr val="C6A24C"/>
+          </a:solidFill>
+          <a:ln w="12700">
+            <a:solidFill>
+              <a:srgbClr val="C6A24C"/>
+            </a:solidFill>
+            <a:prstDash val="solid"/>
+          </a:ln>
+        </p:spPr>
+        <p:txBody>
+          <a:bodyPr/>
+          <a:lstStyle/>
+          <a:p>
+            <a:endParaRPr lang="en-ZA"/>
+          </a:p>
+        </p:txBody>
+      </p:sp>
+      <p:pic>
+        <p:nvPicPr>
+          <p:cNvPr id="8" name="Image 0" descr="preencoded.png"/>
+          <p:cNvPicPr>
+            <a:picLocks noChangeAspect="1"/>
+          </p:cNvPicPr>
+          <p:nvPr/>
+        </p:nvPicPr>
+        <p:blipFill>
+          <a:blip r:embed="rId3"/>
+          <a:stretch>
+            <a:fillRect/>
+          </a:stretch>
+        </p:blipFill>
+        <p:spPr>
+          <a:xfrm>
+            <a:off x="2839212" y="3918204"/>
+            <a:ext cx="192024" cy="192024"/>
+          </a:xfrm>
+          <a:prstGeom prst="rect">
+            <a:avLst/>
+          </a:prstGeom>
+        </p:spPr>
+      </p:pic>
+      <p:sp>
+        <p:nvSpPr>
+          <p:cNvPr id="9" name="Text 6"/>
+          <p:cNvSpPr txBox="1"/>
+          <p:nvPr/>
+        </p:nvSpPr>
+        <p:spPr>
+          <a:xfrm>
+            <a:off x="3291840" y="3749040"/>
+            <a:ext cx="8412480" cy="1097280"/>
+          </a:xfrm>
+          <a:prstGeom prst="rect">
+            <a:avLst/>
+          </a:prstGeom>
+          <a:noFill/>
+          <a:ln/>
+        </p:spPr>
+        <p:txBody>
+          <a:bodyPr wrap="square" lIns="0" tIns="0" rIns="0" bIns="0" rtlCol="0" anchor="t"/>
+          <a:lstStyle/>
+          <a:p>
+            <a:pPr marL="0" indent="0">
+              <a:buNone/>
+            </a:pPr>
+            <a:r>
+              <a:rPr lang="en-US" sz="2400" dirty="0">
+                <a:solidFill>
+                  <a:srgbClr val="FFFFFF"/>
+                </a:solidFill>
+                <a:latin typeface="Calibri" pitchFamily="34" charset="0"/>
+                <a:ea typeface="Calibri" pitchFamily="34" charset="-122"/>
+                <a:cs typeface="Calibri" pitchFamily="34" charset="-120"/>
+              </a:rPr>
+              <a:t>Explain why review discipline determines the pace of execution.</a:t>
+            </a:r>
+            <a:endParaRPr lang="en-US" sz="2400" dirty="0"/>
+          </a:p>
+        </p:txBody>
+      </p:sp>
+      <p:sp>
+        <p:nvSpPr>
+          <p:cNvPr id="10" name="Shape 7"/>
+          <p:cNvSpPr/>
+          <p:nvPr/>
+        </p:nvSpPr>
+        <p:spPr>
+          <a:xfrm>
+            <a:off x="2743200" y="5010912"/>
+            <a:ext cx="384048" cy="384048"/>
+          </a:xfrm>
+          <a:prstGeom prst="ellipse">
+            <a:avLst/>
+          </a:prstGeom>
+          <a:solidFill>
+            <a:srgbClr val="C6A24C"/>
+          </a:solidFill>
+          <a:ln w="12700">
+            <a:solidFill>
+              <a:srgbClr val="C6A24C"/>
+            </a:solidFill>
+            <a:prstDash val="solid"/>
+          </a:ln>
+        </p:spPr>
+        <p:txBody>
+          <a:bodyPr/>
+          <a:lstStyle/>
+          <a:p>
+            <a:endParaRPr lang="en-ZA"/>
+          </a:p>
+        </p:txBody>
+      </p:sp>
+      <p:pic>
+        <p:nvPicPr>
+          <p:cNvPr id="11" name="Image 1" descr="preencoded.png"/>
+          <p:cNvPicPr>
+            <a:picLocks noChangeAspect="1"/>
+          </p:cNvPicPr>
+          <p:nvPr/>
+        </p:nvPicPr>
+        <p:blipFill>
+          <a:blip r:embed="rId3"/>
+          <a:stretch>
+            <a:fillRect/>
+          </a:stretch>
+        </p:blipFill>
+        <p:spPr>
+          <a:xfrm>
+            <a:off x="2839212" y="5106924"/>
+            <a:ext cx="192024" cy="192024"/>
+          </a:xfrm>
+          <a:prstGeom prst="rect">
+            <a:avLst/>
+          </a:prstGeom>
+        </p:spPr>
+      </p:pic>
+      <p:sp>
+        <p:nvSpPr>
+          <p:cNvPr id="12" name="Text 8"/>
+          <p:cNvSpPr txBox="1"/>
+          <p:nvPr/>
+        </p:nvSpPr>
+        <p:spPr>
+          <a:xfrm>
+            <a:off x="3291840" y="4937760"/>
+            <a:ext cx="8412480" cy="1097280"/>
+          </a:xfrm>
+          <a:prstGeom prst="rect">
+            <a:avLst/>
+          </a:prstGeom>
+          <a:noFill/>
+          <a:ln/>
+        </p:spPr>
+        <p:txBody>
+          <a:bodyPr wrap="square" lIns="0" tIns="0" rIns="0" bIns="0" rtlCol="0" anchor="t"/>
+          <a:lstStyle/>
+          <a:p>
+            <a:pPr marL="0" indent="0">
+              <a:buNone/>
+            </a:pPr>
+            <a:r>
+              <a:rPr lang="en-US" sz="2400" dirty="0">
+                <a:solidFill>
+                  <a:srgbClr val="FFFFFF"/>
+                </a:solidFill>
+                <a:latin typeface="Calibri" pitchFamily="34" charset="0"/>
+                <a:ea typeface="Calibri" pitchFamily="34" charset="-122"/>
+                <a:cs typeface="Calibri" pitchFamily="34" charset="-120"/>
+              </a:rPr>
+              <a:t>Recognise the early signs that review discipline is weakening and the cost each carries.</a:t>
+            </a:r>
+            <a:endParaRPr lang="en-US" sz="2400" dirty="0"/>
+          </a:p>
+        </p:txBody>
+      </p:sp>
+    </p:spTree>
+  </p:cSld>
+  <p:clrMapOvr>
+    <a:masterClrMapping/>
+  </p:clrMapOvr>
+</p:sld>
+</file>
+
 <file path=ppt/slides/slide11.xml><?xml version="1.0" encoding="utf-8"?>
 <p:sld xmlns:a="http://schemas.openxmlformats.org/drawingml/2006/main" xmlns:r="http://schemas.openxmlformats.org/officeDocument/2006/relationships" xmlns:p="http://schemas.openxmlformats.org/presentationml/2006/main">
   <p:cSld name="Slide 11">
@@ -5855,7 +6551,7 @@
 </p:sld>
 </file>
 
-<file path=ppt/slides/slide13.xml><?xml version="1.0" encoding="utf-8"?>
+<file path=ppt/slides/slide12.xml><?xml version="1.0" encoding="utf-8"?>
 <p:sld xmlns:a="http://schemas.openxmlformats.org/drawingml/2006/main" xmlns:r="http://schemas.openxmlformats.org/officeDocument/2006/relationships" xmlns:p="http://schemas.openxmlformats.org/presentationml/2006/main">
   <p:cSld name="Slide 13">
     <p:bg>
@@ -6273,7 +6969,7 @@
 </p:sld>
 </file>
 
-<file path=ppt/slides/slide14.xml><?xml version="1.0" encoding="utf-8"?>
+<file path=ppt/slides/slide13.xml><?xml version="1.0" encoding="utf-8"?>
 <p:sld xmlns:a="http://schemas.openxmlformats.org/drawingml/2006/main" xmlns:r="http://schemas.openxmlformats.org/officeDocument/2006/relationships" xmlns:p="http://schemas.openxmlformats.org/presentationml/2006/main">
   <p:cSld name="Slide 14">
     <p:bg>
@@ -7017,7 +7713,874 @@
 </p:sld>
 </file>
 
+<file path=ppt/slides/slide14.xml><?xml version="1.0" encoding="utf-8"?>
+<p:sld xmlns:a="http://schemas.openxmlformats.org/drawingml/2006/main" xmlns:p="http://schemas.openxmlformats.org/presentationml/2006/main" xmlns:r="http://schemas.openxmlformats.org/officeDocument/2006/relationships">
+  <p:cSld>
+    <p:bg>
+      <p:bgPr>
+        <a:solidFill>
+          <a:srgbClr val="FFFFFF"/>
+        </a:solidFill>
+        <a:effectLst/>
+      </p:bgPr>
+    </p:bg>
+    <p:spTree>
+      <p:nvGrpSpPr>
+        <p:cNvPr id="1" name=""/>
+        <p:cNvGrpSpPr/>
+        <p:nvPr/>
+      </p:nvGrpSpPr>
+      <p:grpSpPr/>
+      <p:sp>
+        <p:nvSpPr>
+          <p:cNvPr id="2" name="Text 0"/>
+          <p:cNvSpPr txBox="1"/>
+          <p:nvPr/>
+        </p:nvSpPr>
+        <p:spPr>
+          <a:xfrm>
+            <a:off x="548640" y="411480"/>
+            <a:ext cx="11064240" cy="868680"/>
+          </a:xfrm>
+          <a:prstGeom prst="rect">
+            <a:avLst/>
+          </a:prstGeom>
+          <a:noFill/>
+          <a:ln/>
+        </p:spPr>
+        <p:txBody>
+          <a:bodyPr wrap="square" lIns="0" tIns="0" rIns="0" bIns="0" rtlCol="0" anchor="ctr"/>
+          <a:lstStyle/>
+          <a:p>
+            <a:pPr marL="0" indent="0">
+              <a:buNone/>
+            </a:pPr>
+            <a:r>
+              <a:rPr lang="en-US" sz="3600" b="1" dirty="0">
+                <a:solidFill>
+                  <a:srgbClr val="1A5C2C"/>
+                </a:solidFill>
+                <a:latin typeface="Cambria" pitchFamily="34" charset="0"/>
+                <a:ea typeface="Cambria" pitchFamily="34" charset="-122"/>
+                <a:cs typeface="Cambria" pitchFamily="34" charset="-120"/>
+              </a:rPr>
+              <a:t>3.2 · The CXO performance gap contributors</a:t>
+            </a:r>
+            <a:endParaRPr lang="en-US" sz="3600" dirty="0"/>
+          </a:p>
+        </p:txBody>
+      </p:sp>
+      <p:sp>
+        <p:nvSpPr>
+          <p:cNvPr id="3" name="Shape 1"/>
+          <p:cNvSpPr/>
+          <p:nvPr/>
+        </p:nvSpPr>
+        <p:spPr>
+          <a:xfrm>
+            <a:off x="548640" y="1508760"/>
+            <a:ext cx="5408676" cy="2286000"/>
+          </a:xfrm>
+          <a:prstGeom prst="roundRect">
+            <a:avLst>
+              <a:gd name="adj" fmla="val 4000"/>
+            </a:avLst>
+          </a:prstGeom>
+          <a:solidFill>
+            <a:srgbClr val="EEF4EF"/>
+          </a:solidFill>
+          <a:ln w="12700">
+            <a:solidFill>
+              <a:srgbClr val="EEF4EF"/>
+            </a:solidFill>
+            <a:prstDash val="solid"/>
+          </a:ln>
+        </p:spPr>
+        <p:txBody>
+          <a:bodyPr/>
+          <a:lstStyle/>
+          <a:p>
+            <a:endParaRPr lang="en-ZA"/>
+          </a:p>
+        </p:txBody>
+      </p:sp>
+      <p:sp>
+        <p:nvSpPr>
+          <p:cNvPr id="4" name="Shape 2"/>
+          <p:cNvSpPr/>
+          <p:nvPr/>
+        </p:nvSpPr>
+        <p:spPr>
+          <a:xfrm>
+            <a:off x="777240" y="1737360"/>
+            <a:ext cx="548640" cy="548640"/>
+          </a:xfrm>
+          <a:prstGeom prst="ellipse">
+            <a:avLst/>
+          </a:prstGeom>
+          <a:solidFill>
+            <a:srgbClr val="1A5C2C"/>
+          </a:solidFill>
+          <a:ln w="12700">
+            <a:solidFill>
+              <a:srgbClr val="1A5C2C"/>
+            </a:solidFill>
+            <a:prstDash val="solid"/>
+          </a:ln>
+        </p:spPr>
+        <p:txBody>
+          <a:bodyPr/>
+          <a:lstStyle/>
+          <a:p>
+            <a:endParaRPr lang="en-ZA"/>
+          </a:p>
+        </p:txBody>
+      </p:sp>
+      <p:pic>
+        <p:nvPicPr>
+          <p:cNvPr id="5" name="Image 0" descr="preencoded.png"/>
+          <p:cNvPicPr>
+            <a:picLocks noChangeAspect="1"/>
+          </p:cNvPicPr>
+          <p:nvPr/>
+        </p:nvPicPr>
+        <p:blipFill>
+          <a:blip r:embed="rId2"/>
+          <a:stretch>
+            <a:fillRect/>
+          </a:stretch>
+        </p:blipFill>
+        <p:spPr>
+          <a:xfrm>
+            <a:off x="914400" y="1874520"/>
+            <a:ext cx="274320" cy="274320"/>
+          </a:xfrm>
+          <a:prstGeom prst="rect">
+            <a:avLst/>
+          </a:prstGeom>
+        </p:spPr>
+      </p:pic>
+      <p:sp>
+        <p:nvSpPr>
+          <p:cNvPr id="6" name="Text 3"/>
+          <p:cNvSpPr txBox="1"/>
+          <p:nvPr/>
+        </p:nvSpPr>
+        <p:spPr>
+          <a:xfrm>
+            <a:off x="1508760" y="1691640"/>
+            <a:ext cx="4219956" cy="923544"/>
+          </a:xfrm>
+          <a:prstGeom prst="rect">
+            <a:avLst/>
+          </a:prstGeom>
+          <a:noFill/>
+          <a:ln/>
+        </p:spPr>
+        <p:txBody>
+          <a:bodyPr wrap="square" lIns="0" tIns="0" rIns="0" bIns="0" rtlCol="0" anchor="ctr"/>
+          <a:lstStyle/>
+          <a:p>
+            <a:pPr marL="0" indent="0">
+              <a:buNone/>
+            </a:pPr>
+            <a:r>
+              <a:rPr lang="en-US" sz="2600" b="1" dirty="0">
+                <a:solidFill>
+                  <a:srgbClr val="1A5C2C"/>
+                </a:solidFill>
+                <a:latin typeface="Cambria" pitchFamily="34" charset="0"/>
+                <a:ea typeface="Cambria" pitchFamily="34" charset="-122"/>
+                <a:cs typeface="Cambria" pitchFamily="34" charset="-120"/>
+              </a:rPr>
+              <a:t>Gap 01 · Horizontal Coordination</a:t>
+            </a:r>
+            <a:endParaRPr lang="en-US" sz="2600" dirty="0"/>
+          </a:p>
+        </p:txBody>
+      </p:sp>
+      <p:sp>
+        <p:nvSpPr>
+          <p:cNvPr id="7" name="Text 4"/>
+          <p:cNvSpPr txBox="1"/>
+          <p:nvPr/>
+        </p:nvSpPr>
+        <p:spPr>
+          <a:xfrm>
+            <a:off x="777240" y="2752344"/>
+            <a:ext cx="4951476" cy="905256"/>
+          </a:xfrm>
+          <a:prstGeom prst="rect">
+            <a:avLst/>
+          </a:prstGeom>
+          <a:noFill/>
+          <a:ln/>
+        </p:spPr>
+        <p:txBody>
+          <a:bodyPr wrap="square" lIns="0" tIns="0" rIns="0" bIns="0" rtlCol="0" anchor="t"/>
+          <a:lstStyle/>
+          <a:p>
+            <a:pPr marL="0" indent="0">
+              <a:buNone/>
+            </a:pPr>
+            <a:r>
+              <a:rPr lang="en-US" sz="2400" dirty="0">
+                <a:solidFill>
+                  <a:srgbClr val="1F2A22"/>
+                </a:solidFill>
+                <a:latin typeface="Calibri" pitchFamily="34" charset="0"/>
+                <a:ea typeface="Calibri" pitchFamily="34" charset="-122"/>
+                <a:cs typeface="Calibri" pitchFamily="34" charset="-120"/>
+              </a:rPr>
+              <a:t>COO · CTO/CIO · CMO · CCO · CPO</a:t>
+            </a:r>
+            <a:endParaRPr lang="en-US" sz="2400" dirty="0"/>
+          </a:p>
+        </p:txBody>
+      </p:sp>
+      <p:sp>
+        <p:nvSpPr>
+          <p:cNvPr id="8" name="Shape 5"/>
+          <p:cNvSpPr/>
+          <p:nvPr/>
+        </p:nvSpPr>
+        <p:spPr>
+          <a:xfrm>
+            <a:off x="6231636" y="1508760"/>
+            <a:ext cx="5408676" cy="2286000"/>
+          </a:xfrm>
+          <a:prstGeom prst="roundRect">
+            <a:avLst>
+              <a:gd name="adj" fmla="val 4000"/>
+            </a:avLst>
+          </a:prstGeom>
+          <a:solidFill>
+            <a:srgbClr val="EEF4EF"/>
+          </a:solidFill>
+          <a:ln w="12700">
+            <a:solidFill>
+              <a:srgbClr val="EEF4EF"/>
+            </a:solidFill>
+            <a:prstDash val="solid"/>
+          </a:ln>
+        </p:spPr>
+        <p:txBody>
+          <a:bodyPr/>
+          <a:lstStyle/>
+          <a:p>
+            <a:endParaRPr lang="en-ZA"/>
+          </a:p>
+        </p:txBody>
+      </p:sp>
+      <p:sp>
+        <p:nvSpPr>
+          <p:cNvPr id="9" name="Shape 6"/>
+          <p:cNvSpPr/>
+          <p:nvPr/>
+        </p:nvSpPr>
+        <p:spPr>
+          <a:xfrm>
+            <a:off x="6460236" y="1737360"/>
+            <a:ext cx="548640" cy="548640"/>
+          </a:xfrm>
+          <a:prstGeom prst="ellipse">
+            <a:avLst/>
+          </a:prstGeom>
+          <a:solidFill>
+            <a:srgbClr val="1A5C2C"/>
+          </a:solidFill>
+          <a:ln w="12700">
+            <a:solidFill>
+              <a:srgbClr val="1A5C2C"/>
+            </a:solidFill>
+            <a:prstDash val="solid"/>
+          </a:ln>
+        </p:spPr>
+        <p:txBody>
+          <a:bodyPr/>
+          <a:lstStyle/>
+          <a:p>
+            <a:endParaRPr lang="en-ZA"/>
+          </a:p>
+        </p:txBody>
+      </p:sp>
+      <p:pic>
+        <p:nvPicPr>
+          <p:cNvPr id="10" name="Image 1" descr="preencoded.png"/>
+          <p:cNvPicPr>
+            <a:picLocks noChangeAspect="1"/>
+          </p:cNvPicPr>
+          <p:nvPr/>
+        </p:nvPicPr>
+        <p:blipFill>
+          <a:blip r:embed="rId5"/>
+          <a:stretch>
+            <a:fillRect/>
+          </a:stretch>
+        </p:blipFill>
+        <p:spPr>
+          <a:xfrm>
+            <a:off x="6597396" y="1874520"/>
+            <a:ext cx="274320" cy="274320"/>
+          </a:xfrm>
+          <a:prstGeom prst="rect">
+            <a:avLst/>
+          </a:prstGeom>
+        </p:spPr>
+      </p:pic>
+      <p:sp>
+        <p:nvSpPr>
+          <p:cNvPr id="11" name="Text 7"/>
+          <p:cNvSpPr txBox="1"/>
+          <p:nvPr/>
+        </p:nvSpPr>
+        <p:spPr>
+          <a:xfrm>
+            <a:off x="7191756" y="1691640"/>
+            <a:ext cx="4219956" cy="923544"/>
+          </a:xfrm>
+          <a:prstGeom prst="rect">
+            <a:avLst/>
+          </a:prstGeom>
+          <a:noFill/>
+          <a:ln/>
+        </p:spPr>
+        <p:txBody>
+          <a:bodyPr wrap="square" lIns="0" tIns="0" rIns="0" bIns="0" rtlCol="0" anchor="ctr"/>
+          <a:lstStyle/>
+          <a:p>
+            <a:pPr marL="0" indent="0">
+              <a:buNone/>
+            </a:pPr>
+            <a:r>
+              <a:rPr lang="en-US" sz="2600" b="1" dirty="0">
+                <a:solidFill>
+                  <a:srgbClr val="1A5C2C"/>
+                </a:solidFill>
+                <a:latin typeface="Cambria" pitchFamily="34" charset="0"/>
+                <a:ea typeface="Cambria" pitchFamily="34" charset="-122"/>
+                <a:cs typeface="Cambria" pitchFamily="34" charset="-120"/>
+              </a:rPr>
+              <a:t>Gap 02 · Evidence Quality</a:t>
+            </a:r>
+            <a:endParaRPr lang="en-US" sz="2600" dirty="0"/>
+          </a:p>
+        </p:txBody>
+      </p:sp>
+      <p:sp>
+        <p:nvSpPr>
+          <p:cNvPr id="12" name="Text 8"/>
+          <p:cNvSpPr txBox="1"/>
+          <p:nvPr/>
+        </p:nvSpPr>
+        <p:spPr>
+          <a:xfrm>
+            <a:off x="6460236" y="2752344"/>
+            <a:ext cx="4951476" cy="905256"/>
+          </a:xfrm>
+          <a:prstGeom prst="rect">
+            <a:avLst/>
+          </a:prstGeom>
+          <a:noFill/>
+          <a:ln/>
+        </p:spPr>
+        <p:txBody>
+          <a:bodyPr wrap="square" lIns="0" tIns="0" rIns="0" bIns="0" rtlCol="0" anchor="t"/>
+          <a:lstStyle/>
+          <a:p>
+            <a:pPr marL="0" indent="0">
+              <a:buNone/>
+            </a:pPr>
+            <a:r>
+              <a:rPr lang="en-US" sz="2400" dirty="0">
+                <a:solidFill>
+                  <a:srgbClr val="1F2A22"/>
+                </a:solidFill>
+                <a:latin typeface="Calibri" pitchFamily="34" charset="0"/>
+                <a:ea typeface="Calibri" pitchFamily="34" charset="-122"/>
+                <a:cs typeface="Calibri" pitchFamily="34" charset="-120"/>
+              </a:rPr>
+              <a:t>CFO · CHRO · CTO/CIO · CMO · CPO</a:t>
+            </a:r>
+            <a:endParaRPr lang="en-US" sz="2400" dirty="0"/>
+          </a:p>
+        </p:txBody>
+      </p:sp>
+      <p:sp>
+        <p:nvSpPr>
+          <p:cNvPr id="13" name="Shape 9"/>
+          <p:cNvSpPr/>
+          <p:nvPr/>
+        </p:nvSpPr>
+        <p:spPr>
+          <a:xfrm>
+            <a:off x="548640" y="4069080"/>
+            <a:ext cx="5408676" cy="2286000"/>
+          </a:xfrm>
+          <a:prstGeom prst="roundRect">
+            <a:avLst>
+              <a:gd name="adj" fmla="val 4000"/>
+            </a:avLst>
+          </a:prstGeom>
+          <a:solidFill>
+            <a:srgbClr val="EEF4EF"/>
+          </a:solidFill>
+          <a:ln w="12700">
+            <a:solidFill>
+              <a:srgbClr val="EEF4EF"/>
+            </a:solidFill>
+            <a:prstDash val="solid"/>
+          </a:ln>
+        </p:spPr>
+        <p:txBody>
+          <a:bodyPr/>
+          <a:lstStyle/>
+          <a:p>
+            <a:endParaRPr lang="en-ZA"/>
+          </a:p>
+        </p:txBody>
+      </p:sp>
+      <p:sp>
+        <p:nvSpPr>
+          <p:cNvPr id="14" name="Shape 10"/>
+          <p:cNvSpPr/>
+          <p:nvPr/>
+        </p:nvSpPr>
+        <p:spPr>
+          <a:xfrm>
+            <a:off x="777240" y="4297680"/>
+            <a:ext cx="548640" cy="548640"/>
+          </a:xfrm>
+          <a:prstGeom prst="ellipse">
+            <a:avLst/>
+          </a:prstGeom>
+          <a:solidFill>
+            <a:srgbClr val="1A5C2C"/>
+          </a:solidFill>
+          <a:ln w="12700">
+            <a:solidFill>
+              <a:srgbClr val="1A5C2C"/>
+            </a:solidFill>
+            <a:prstDash val="solid"/>
+          </a:ln>
+        </p:spPr>
+        <p:txBody>
+          <a:bodyPr/>
+          <a:lstStyle/>
+          <a:p>
+            <a:endParaRPr lang="en-ZA"/>
+          </a:p>
+        </p:txBody>
+      </p:sp>
+      <p:pic>
+        <p:nvPicPr>
+          <p:cNvPr id="15" name="Image 2" descr="preencoded.png"/>
+          <p:cNvPicPr>
+            <a:picLocks noChangeAspect="1"/>
+          </p:cNvPicPr>
+          <p:nvPr/>
+        </p:nvPicPr>
+        <p:blipFill>
+          <a:blip r:embed="rId4"/>
+          <a:stretch>
+            <a:fillRect/>
+          </a:stretch>
+        </p:blipFill>
+        <p:spPr>
+          <a:xfrm>
+            <a:off x="914400" y="4434840"/>
+            <a:ext cx="274320" cy="274320"/>
+          </a:xfrm>
+          <a:prstGeom prst="rect">
+            <a:avLst/>
+          </a:prstGeom>
+        </p:spPr>
+      </p:pic>
+      <p:sp>
+        <p:nvSpPr>
+          <p:cNvPr id="16" name="Text 11"/>
+          <p:cNvSpPr txBox="1"/>
+          <p:nvPr/>
+        </p:nvSpPr>
+        <p:spPr>
+          <a:xfrm>
+            <a:off x="1508760" y="4251960"/>
+            <a:ext cx="4219956" cy="923544"/>
+          </a:xfrm>
+          <a:prstGeom prst="rect">
+            <a:avLst/>
+          </a:prstGeom>
+          <a:noFill/>
+          <a:ln/>
+        </p:spPr>
+        <p:txBody>
+          <a:bodyPr wrap="square" lIns="0" tIns="0" rIns="0" bIns="0" rtlCol="0" anchor="ctr"/>
+          <a:lstStyle/>
+          <a:p>
+            <a:pPr marL="0" indent="0">
+              <a:buNone/>
+            </a:pPr>
+            <a:r>
+              <a:rPr lang="en-US" sz="2600" b="1" dirty="0">
+                <a:solidFill>
+                  <a:srgbClr val="1A5C2C"/>
+                </a:solidFill>
+                <a:latin typeface="Cambria" pitchFamily="34" charset="0"/>
+                <a:ea typeface="Cambria" pitchFamily="34" charset="-122"/>
+                <a:cs typeface="Cambria" pitchFamily="34" charset="-120"/>
+              </a:rPr>
+              <a:t>Gap 03 · Review Rhythm Breakdown</a:t>
+            </a:r>
+            <a:endParaRPr lang="en-US" sz="2600" dirty="0"/>
+          </a:p>
+        </p:txBody>
+      </p:sp>
+      <p:sp>
+        <p:nvSpPr>
+          <p:cNvPr id="17" name="Text 12"/>
+          <p:cNvSpPr txBox="1"/>
+          <p:nvPr/>
+        </p:nvSpPr>
+        <p:spPr>
+          <a:xfrm>
+            <a:off x="777240" y="5312664"/>
+            <a:ext cx="4951476" cy="905256"/>
+          </a:xfrm>
+          <a:prstGeom prst="rect">
+            <a:avLst/>
+          </a:prstGeom>
+          <a:noFill/>
+          <a:ln/>
+        </p:spPr>
+        <p:txBody>
+          <a:bodyPr wrap="square" lIns="0" tIns="0" rIns="0" bIns="0" rtlCol="0" anchor="t"/>
+          <a:lstStyle/>
+          <a:p>
+            <a:pPr marL="0" indent="0">
+              <a:buNone/>
+            </a:pPr>
+            <a:r>
+              <a:rPr lang="en-US" sz="2400" dirty="0">
+                <a:solidFill>
+                  <a:srgbClr val="1F2A22"/>
+                </a:solidFill>
+                <a:latin typeface="Calibri" pitchFamily="34" charset="0"/>
+                <a:ea typeface="Calibri" pitchFamily="34" charset="-122"/>
+                <a:cs typeface="Calibri" pitchFamily="34" charset="-120"/>
+              </a:rPr>
+              <a:t>CEO · CHRO · CRO · CSO</a:t>
+            </a:r>
+            <a:endParaRPr lang="en-US" sz="2400" dirty="0"/>
+          </a:p>
+        </p:txBody>
+      </p:sp>
+      <p:sp>
+        <p:nvSpPr>
+          <p:cNvPr id="18" name="Shape 13"/>
+          <p:cNvSpPr/>
+          <p:nvPr/>
+        </p:nvSpPr>
+        <p:spPr>
+          <a:xfrm>
+            <a:off x="6231636" y="4069080"/>
+            <a:ext cx="5408676" cy="2286000"/>
+          </a:xfrm>
+          <a:prstGeom prst="roundRect">
+            <a:avLst>
+              <a:gd name="adj" fmla="val 4000"/>
+            </a:avLst>
+          </a:prstGeom>
+          <a:solidFill>
+            <a:srgbClr val="EEF4EF"/>
+          </a:solidFill>
+          <a:ln w="12700">
+            <a:solidFill>
+              <a:srgbClr val="EEF4EF"/>
+            </a:solidFill>
+            <a:prstDash val="solid"/>
+          </a:ln>
+        </p:spPr>
+        <p:txBody>
+          <a:bodyPr/>
+          <a:lstStyle/>
+          <a:p>
+            <a:endParaRPr lang="en-ZA"/>
+          </a:p>
+        </p:txBody>
+      </p:sp>
+      <p:sp>
+        <p:nvSpPr>
+          <p:cNvPr id="19" name="Shape 14"/>
+          <p:cNvSpPr/>
+          <p:nvPr/>
+        </p:nvSpPr>
+        <p:spPr>
+          <a:xfrm>
+            <a:off x="6460236" y="4297680"/>
+            <a:ext cx="548640" cy="548640"/>
+          </a:xfrm>
+          <a:prstGeom prst="ellipse">
+            <a:avLst/>
+          </a:prstGeom>
+          <a:solidFill>
+            <a:srgbClr val="1A5C2C"/>
+          </a:solidFill>
+          <a:ln w="12700">
+            <a:solidFill>
+              <a:srgbClr val="1A5C2C"/>
+            </a:solidFill>
+            <a:prstDash val="solid"/>
+          </a:ln>
+        </p:spPr>
+        <p:txBody>
+          <a:bodyPr/>
+          <a:lstStyle/>
+          <a:p>
+            <a:endParaRPr lang="en-ZA"/>
+          </a:p>
+        </p:txBody>
+      </p:sp>
+      <p:pic>
+        <p:nvPicPr>
+          <p:cNvPr id="20" name="Image 3" descr="preencoded.png"/>
+          <p:cNvPicPr>
+            <a:picLocks noChangeAspect="1"/>
+          </p:cNvPicPr>
+          <p:nvPr/>
+        </p:nvPicPr>
+        <p:blipFill>
+          <a:blip r:embed="rId3"/>
+          <a:stretch>
+            <a:fillRect/>
+          </a:stretch>
+        </p:blipFill>
+        <p:spPr>
+          <a:xfrm>
+            <a:off x="6597396" y="4434840"/>
+            <a:ext cx="274320" cy="274320"/>
+          </a:xfrm>
+          <a:prstGeom prst="rect">
+            <a:avLst/>
+          </a:prstGeom>
+        </p:spPr>
+      </p:pic>
+      <p:sp>
+        <p:nvSpPr>
+          <p:cNvPr id="21" name="Text 15"/>
+          <p:cNvSpPr txBox="1"/>
+          <p:nvPr/>
+        </p:nvSpPr>
+        <p:spPr>
+          <a:xfrm>
+            <a:off x="7191756" y="4251960"/>
+            <a:ext cx="4219956" cy="923544"/>
+          </a:xfrm>
+          <a:prstGeom prst="rect">
+            <a:avLst/>
+          </a:prstGeom>
+          <a:noFill/>
+          <a:ln/>
+        </p:spPr>
+        <p:txBody>
+          <a:bodyPr wrap="square" lIns="0" tIns="0" rIns="0" bIns="0" rtlCol="0" anchor="ctr"/>
+          <a:lstStyle/>
+          <a:p>
+            <a:pPr marL="0" indent="0">
+              <a:buNone/>
+            </a:pPr>
+            <a:r>
+              <a:rPr lang="en-US" sz="2600" b="1" dirty="0">
+                <a:solidFill>
+                  <a:srgbClr val="1A5C2C"/>
+                </a:solidFill>
+                <a:latin typeface="Cambria" pitchFamily="34" charset="0"/>
+                <a:ea typeface="Cambria" pitchFamily="34" charset="-122"/>
+                <a:cs typeface="Cambria" pitchFamily="34" charset="-120"/>
+              </a:rPr>
+              <a:t>Gap 04 · Learning Suppression</a:t>
+            </a:r>
+            <a:endParaRPr lang="en-US" sz="2600" dirty="0"/>
+          </a:p>
+        </p:txBody>
+      </p:sp>
+      <p:sp>
+        <p:nvSpPr>
+          <p:cNvPr id="22" name="Text 16"/>
+          <p:cNvSpPr txBox="1"/>
+          <p:nvPr/>
+        </p:nvSpPr>
+        <p:spPr>
+          <a:xfrm>
+            <a:off x="6460236" y="5312664"/>
+            <a:ext cx="4951476" cy="905256"/>
+          </a:xfrm>
+          <a:prstGeom prst="rect">
+            <a:avLst/>
+          </a:prstGeom>
+          <a:noFill/>
+          <a:ln/>
+        </p:spPr>
+        <p:txBody>
+          <a:bodyPr wrap="square" lIns="0" tIns="0" rIns="0" bIns="0" rtlCol="0" anchor="t"/>
+          <a:lstStyle/>
+          <a:p>
+            <a:pPr marL="0" indent="0">
+              <a:buNone/>
+            </a:pPr>
+            <a:r>
+              <a:rPr lang="en-US" sz="2400" dirty="0">
+                <a:solidFill>
+                  <a:srgbClr val="1F2A22"/>
+                </a:solidFill>
+                <a:latin typeface="Calibri" pitchFamily="34" charset="0"/>
+                <a:ea typeface="Calibri" pitchFamily="34" charset="-122"/>
+                <a:cs typeface="Calibri" pitchFamily="34" charset="-120"/>
+              </a:rPr>
+              <a:t>CEO · CFO · CCO · CRO · CSO</a:t>
+            </a:r>
+            <a:endParaRPr lang="en-US" sz="2400" dirty="0"/>
+          </a:p>
+        </p:txBody>
+      </p:sp>
+    </p:spTree>
+  </p:cSld>
+  <p:clrMapOvr>
+    <a:masterClrMapping/>
+  </p:clrMapOvr>
+</p:sld>
+</file>
+
 <file path=ppt/slides/slide15.xml><?xml version="1.0" encoding="utf-8"?>
+<p:sld xmlns:a="http://schemas.openxmlformats.org/drawingml/2006/main" xmlns:p="http://schemas.openxmlformats.org/presentationml/2006/main" xmlns:r="http://schemas.openxmlformats.org/officeDocument/2006/relationships">
+  <p:cSld>
+    <p:bg>
+      <p:bgPr>
+        <a:solidFill>
+          <a:srgbClr val="FFFFFF"/>
+        </a:solidFill>
+        <a:effectLst/>
+      </p:bgPr>
+    </p:bg>
+    <p:spTree>
+      <p:nvGrpSpPr>
+        <p:cNvPr id="1" name=""/>
+        <p:cNvGrpSpPr/>
+        <p:nvPr/>
+      </p:nvGrpSpPr>
+      <p:grpSpPr/>
+      <p:sp>
+        <p:nvSpPr>
+          <p:cNvPr id="2" name="Text 0"/>
+          <p:cNvSpPr txBox="1"/>
+          <p:nvPr/>
+        </p:nvSpPr>
+        <p:spPr>
+          <a:xfrm>
+            <a:off x="548640" y="411480"/>
+            <a:ext cx="11064240" cy="868680"/>
+          </a:xfrm>
+          <a:prstGeom prst="rect">
+            <a:avLst/>
+          </a:prstGeom>
+          <a:noFill/>
+          <a:ln/>
+        </p:spPr>
+        <p:txBody>
+          <a:bodyPr wrap="square" lIns="0" tIns="0" rIns="0" bIns="0" rtlCol="0" anchor="ctr"/>
+          <a:lstStyle/>
+          <a:p>
+            <a:pPr marL="0" indent="0">
+              <a:buNone/>
+            </a:pPr>
+            <a:r>
+              <a:rPr lang="en-US" sz="3600" b="1" dirty="0">
+                <a:solidFill>
+                  <a:srgbClr val="1A5C2C"/>
+                </a:solidFill>
+                <a:latin typeface="Cambria" pitchFamily="34" charset="0"/>
+                <a:ea typeface="Cambria" pitchFamily="34" charset="-122"/>
+                <a:cs typeface="Cambria" pitchFamily="34" charset="-120"/>
+              </a:rPr>
+              <a:t>Section 3 Reflections</a:t>
+            </a:r>
+            <a:endParaRPr lang="en-US" sz="3600" dirty="0"/>
+          </a:p>
+        </p:txBody>
+      </p:sp>
+      <p:pic>
+        <p:nvPicPr>
+          <p:cNvPr id="3" name="Reflection 3.1" descr="ref_3.1.png"/>
+          <p:cNvPicPr>
+            <a:picLocks noChangeAspect="1"/>
+          </p:cNvPicPr>
+          <p:nvPr/>
+        </p:nvPicPr>
+        <p:blipFill>
+          <a:blip r:embed="rId6"/>
+          <a:stretch>
+            <a:fillRect/>
+          </a:stretch>
+        </p:blipFill>
+        <p:spPr>
+          <a:xfrm>
+            <a:off x="1691640" y="1463040"/>
+            <a:ext cx="10058400" cy="965491"/>
+          </a:xfrm>
+          <a:prstGeom prst="rect">
+            <a:avLst/>
+          </a:prstGeom>
+        </p:spPr>
+      </p:pic>
+      <p:sp>
+        <p:nvSpPr>
+          <p:cNvPr id="4" name="Part 3.1"/>
+          <p:cNvSpPr/>
+          <p:nvPr/>
+        </p:nvSpPr>
+        <p:spPr>
+          <a:xfrm>
+            <a:off x="548640" y="1511445"/>
+            <a:ext cx="868680" cy="868680"/>
+          </a:xfrm>
+          <a:prstGeom prst="ellipse">
+            <a:avLst/>
+          </a:prstGeom>
+          <a:solidFill>
+            <a:srgbClr val="C6A24C"/>
+          </a:solidFill>
+          <a:ln>
+            <a:solidFill>
+              <a:srgbClr val="C6A24C"/>
+            </a:solidFill>
+          </a:ln>
+          <a:effectLst/>
+        </p:spPr>
+        <p:txBody>
+          <a:bodyPr wrap="none" lIns="0" tIns="0" rIns="0" bIns="0" rtlCol="0" anchor="ctr"/>
+          <a:lstStyle/>
+          <a:p>
+            <a:pPr algn="ctr"/>
+            <a:r>
+              <a:rPr lang="en-GB" sz="2400" b="1">
+                <a:solidFill>
+                  <a:srgbClr val="FFFFFF"/>
+                </a:solidFill>
+                <a:latin typeface="Calibri"/>
+              </a:rPr>
+              <a:t>3.1</a:t>
+            </a:r>
+          </a:p>
+        </p:txBody>
+      </p:sp>
+    </p:spTree>
+  </p:cSld>
+  <p:clrMapOvr>
+    <a:masterClrMapping/>
+  </p:clrMapOvr>
+</p:sld>
+</file>
+
+<file path=ppt/slides/slide16.xml><?xml version="1.0" encoding="utf-8"?>
 <p:sld xmlns:a="http://schemas.openxmlformats.org/drawingml/2006/main" xmlns:r="http://schemas.openxmlformats.org/officeDocument/2006/relationships" xmlns:p="http://schemas.openxmlformats.org/presentationml/2006/main">
   <p:cSld name="Slide 15">
     <p:bg>
@@ -8084,13 +9647,13 @@
 </p:sld>
 </file>
 
-<file path=ppt/slides/slide19.xml><?xml version="1.0" encoding="utf-8"?>
+<file path=ppt/slides/slide18.xml><?xml version="1.0" encoding="utf-8"?>
 <p:sld xmlns:a="http://schemas.openxmlformats.org/drawingml/2006/main" xmlns:r="http://schemas.openxmlformats.org/officeDocument/2006/relationships" xmlns:p="http://schemas.openxmlformats.org/presentationml/2006/main">
-  <p:cSld name="Slide 19">
+  <p:cSld name="Slide 21">
     <p:bg>
       <p:bgPr>
         <a:solidFill>
-          <a:srgbClr val="1A5C2C"/>
+          <a:srgbClr val="0F3B1C"/>
         </a:solidFill>
         <a:effectLst/>
       </p:bgPr>
@@ -8111,209 +9674,14 @@
       </p:grpSpPr>
       <p:sp>
         <p:nvSpPr>
-          <p:cNvPr id="2" name="Text 0"/>
-          <p:cNvSpPr txBox="1"/>
-          <p:nvPr/>
-        </p:nvSpPr>
-        <p:spPr>
-          <a:xfrm>
-            <a:off x="457200" y="822960"/>
-            <a:ext cx="2103120" cy="2194560"/>
-          </a:xfrm>
-          <a:prstGeom prst="rect">
-            <a:avLst/>
-          </a:prstGeom>
-          <a:noFill/>
-          <a:ln/>
-        </p:spPr>
-        <p:txBody>
-          <a:bodyPr wrap="square" lIns="0" tIns="0" rIns="0" bIns="0" rtlCol="0" anchor="t"/>
-          <a:lstStyle/>
-          <a:p>
-            <a:pPr marL="0" indent="0">
-              <a:buNone/>
-            </a:pPr>
-            <a:r>
-              <a:rPr lang="en-US" sz="15000" b="1" dirty="0">
-                <a:solidFill>
-                  <a:srgbClr val="C6A24C"/>
-                </a:solidFill>
-                <a:latin typeface="Cambria" pitchFamily="34" charset="0"/>
-                <a:ea typeface="Cambria" pitchFamily="34" charset="-122"/>
-                <a:cs typeface="Cambria" pitchFamily="34" charset="-120"/>
-              </a:rPr>
-              <a:t>5</a:t>
-            </a:r>
-            <a:endParaRPr lang="en-US" sz="15000" dirty="0"/>
-          </a:p>
-        </p:txBody>
-      </p:sp>
-      <p:sp>
-        <p:nvSpPr>
-          <p:cNvPr id="3" name="Text 1"/>
-          <p:cNvSpPr txBox="1"/>
-          <p:nvPr/>
-        </p:nvSpPr>
-        <p:spPr>
-          <a:xfrm>
-            <a:off x="2743200" y="914400"/>
-            <a:ext cx="8229600" cy="457200"/>
-          </a:xfrm>
-          <a:prstGeom prst="rect">
-            <a:avLst/>
-          </a:prstGeom>
-          <a:noFill/>
-          <a:ln/>
-        </p:spPr>
-        <p:txBody>
-          <a:bodyPr wrap="square" lIns="0" tIns="0" rIns="0" bIns="0" rtlCol="0" anchor="t"/>
-          <a:lstStyle/>
-          <a:p>
-            <a:pPr marL="0" indent="0">
-              <a:buNone/>
-            </a:pPr>
-            <a:r>
-              <a:rPr lang="en-US" sz="2400" b="1" dirty="0">
-                <a:solidFill>
-                  <a:srgbClr val="E6D3A0"/>
-                </a:solidFill>
-                <a:latin typeface="Calibri" pitchFamily="34" charset="0"/>
-                <a:ea typeface="Calibri" pitchFamily="34" charset="-122"/>
-                <a:cs typeface="Calibri" pitchFamily="34" charset="-120"/>
-              </a:rPr>
-              <a:t>Section 5</a:t>
-            </a:r>
-            <a:endParaRPr lang="en-US" sz="2400" dirty="0"/>
-          </a:p>
-        </p:txBody>
-      </p:sp>
-      <p:sp>
-        <p:nvSpPr>
-          <p:cNvPr id="4" name="Text 2"/>
-          <p:cNvSpPr txBox="1"/>
-          <p:nvPr/>
-        </p:nvSpPr>
-        <p:spPr>
-          <a:xfrm>
-            <a:off x="2743200" y="1371600"/>
-            <a:ext cx="8961120" cy="868680"/>
-          </a:xfrm>
-          <a:prstGeom prst="rect">
-            <a:avLst/>
-          </a:prstGeom>
-          <a:noFill/>
-          <a:ln/>
-        </p:spPr>
-        <p:txBody>
-          <a:bodyPr wrap="square" lIns="0" tIns="0" rIns="0" bIns="0" rtlCol="0" anchor="t"/>
-          <a:lstStyle/>
-          <a:p>
-            <a:pPr marL="0" indent="0">
-              <a:buNone/>
-            </a:pPr>
-            <a:r>
-              <a:rPr lang="en-US" sz="4400" b="1" dirty="0">
-                <a:solidFill>
-                  <a:srgbClr val="FFFFFF"/>
-                </a:solidFill>
-                <a:latin typeface="Cambria" pitchFamily="34" charset="0"/>
-                <a:ea typeface="Cambria" pitchFamily="34" charset="-122"/>
-                <a:cs typeface="Cambria" pitchFamily="34" charset="-120"/>
-              </a:rPr>
-              <a:t>Application — In Practice</a:t>
-            </a:r>
-            <a:endParaRPr lang="en-US" sz="4400" dirty="0"/>
-          </a:p>
-        </p:txBody>
-      </p:sp>
-      <p:sp>
-        <p:nvSpPr>
-          <p:cNvPr id="5" name="Text 3"/>
-          <p:cNvSpPr txBox="1"/>
-          <p:nvPr/>
-        </p:nvSpPr>
-        <p:spPr>
-          <a:xfrm>
-            <a:off x="2743200" y="2240280"/>
-            <a:ext cx="8961120" cy="868680"/>
-          </a:xfrm>
-          <a:prstGeom prst="rect">
-            <a:avLst/>
-          </a:prstGeom>
-          <a:noFill/>
-          <a:ln/>
-        </p:spPr>
-        <p:txBody>
-          <a:bodyPr wrap="square" lIns="0" tIns="0" rIns="0" bIns="0" rtlCol="0" anchor="t"/>
-          <a:lstStyle/>
-          <a:p>
-            <a:pPr marL="0" indent="0">
-              <a:buNone/>
-            </a:pPr>
-            <a:r>
-              <a:rPr lang="en-US" sz="2600" i="1" dirty="0">
-                <a:solidFill>
-                  <a:srgbClr val="DDE8DF"/>
-                </a:solidFill>
-                <a:latin typeface="Calibri" pitchFamily="34" charset="0"/>
-                <a:ea typeface="Calibri" pitchFamily="34" charset="-122"/>
-                <a:cs typeface="Calibri" pitchFamily="34" charset="-120"/>
-              </a:rPr>
-              <a:t>Applying the Four Consequences of Weak Review Discipline</a:t>
-            </a:r>
-            <a:endParaRPr lang="en-US" sz="2600" dirty="0"/>
-          </a:p>
-        </p:txBody>
-      </p:sp>
-      <p:sp>
-        <p:nvSpPr>
-          <p:cNvPr id="6" name="Text 4"/>
-          <p:cNvSpPr txBox="1"/>
-          <p:nvPr/>
-        </p:nvSpPr>
-        <p:spPr>
-          <a:xfrm>
-            <a:off x="2743200" y="3246120"/>
-            <a:ext cx="8229600" cy="457200"/>
-          </a:xfrm>
-          <a:prstGeom prst="rect">
-            <a:avLst/>
-          </a:prstGeom>
-          <a:noFill/>
-          <a:ln/>
-        </p:spPr>
-        <p:txBody>
-          <a:bodyPr wrap="square" lIns="0" tIns="0" rIns="0" bIns="0" rtlCol="0" anchor="t"/>
-          <a:lstStyle/>
-          <a:p>
-            <a:pPr marL="0" indent="0">
-              <a:buNone/>
-            </a:pPr>
-            <a:r>
-              <a:rPr lang="en-US" sz="2400" b="1" dirty="0">
-                <a:solidFill>
-                  <a:srgbClr val="C6A24C"/>
-                </a:solidFill>
-                <a:latin typeface="Calibri" pitchFamily="34" charset="0"/>
-                <a:ea typeface="Calibri" pitchFamily="34" charset="-122"/>
-                <a:cs typeface="Calibri" pitchFamily="34" charset="-120"/>
-              </a:rPr>
-              <a:t>Section learning outcomes</a:t>
-            </a:r>
-            <a:endParaRPr lang="en-US" sz="2400" dirty="0"/>
-          </a:p>
-        </p:txBody>
-      </p:sp>
-      <p:sp>
-        <p:nvSpPr>
-          <p:cNvPr id="7" name="Shape 5"/>
+          <p:cNvPr id="2" name="Shape 0"/>
           <p:cNvSpPr/>
           <p:nvPr/>
         </p:nvSpPr>
         <p:spPr>
           <a:xfrm>
-            <a:off x="2743200" y="3822192"/>
-            <a:ext cx="384048" cy="384048"/>
+            <a:off x="731520" y="1097280"/>
+            <a:ext cx="1097280" cy="1097280"/>
           </a:xfrm>
           <a:prstGeom prst="ellipse">
             <a:avLst/>
@@ -8338,7 +9706,7 @@
       </p:sp>
       <p:pic>
         <p:nvPicPr>
-          <p:cNvPr id="8" name="Image 0" descr="preencoded.png"/>
+          <p:cNvPr id="3" name="Image 0" descr="preencoded.png"/>
           <p:cNvPicPr>
             <a:picLocks noChangeAspect="1"/>
           </p:cNvPicPr>
@@ -8352,8 +9720,8 @@
         </p:blipFill>
         <p:spPr>
           <a:xfrm>
-            <a:off x="2839212" y="3918204"/>
-            <a:ext cx="192024" cy="192024"/>
+            <a:off x="1005840" y="1371600"/>
+            <a:ext cx="548640" cy="548640"/>
           </a:xfrm>
           <a:prstGeom prst="rect">
             <a:avLst/>
@@ -8362,14 +9730,14 @@
       </p:pic>
       <p:sp>
         <p:nvSpPr>
-          <p:cNvPr id="9" name="Text 6"/>
+          <p:cNvPr id="4" name="Text 1"/>
           <p:cNvSpPr txBox="1"/>
           <p:nvPr/>
         </p:nvSpPr>
         <p:spPr>
           <a:xfrm>
-            <a:off x="3291840" y="3749040"/>
-            <a:ext cx="8412480" cy="1097280"/>
+            <a:off x="2103120" y="1280160"/>
+            <a:ext cx="9144000" cy="640080"/>
           </a:xfrm>
           <a:prstGeom prst="rect">
             <a:avLst/>
@@ -8385,86 +9753,221 @@
               <a:buNone/>
             </a:pPr>
             <a:r>
-              <a:rPr lang="en-US" sz="2400" dirty="0">
-                <a:solidFill>
-                  <a:srgbClr val="FFFFFF"/>
+              <a:rPr lang="en-US" sz="2600" b="1" dirty="0">
+                <a:solidFill>
+                  <a:srgbClr val="C6A24C"/>
                 </a:solidFill>
                 <a:latin typeface="Calibri" pitchFamily="34" charset="0"/>
                 <a:ea typeface="Calibri" pitchFamily="34" charset="-122"/>
                 <a:cs typeface="Calibri" pitchFamily="34" charset="-120"/>
               </a:rPr>
-              <a:t>Exercise balanced judgement when performance differs from agreed expectations.</a:t>
+              <a:t>4.2 · The Accountability Loop role play</a:t>
+            </a:r>
+            <a:endParaRPr lang="en-US" sz="2600" dirty="0"/>
+          </a:p>
+        </p:txBody>
+      </p:sp>
+      <p:sp>
+        <p:nvSpPr>
+          <p:cNvPr id="5" name="Text 2"/>
+          <p:cNvSpPr txBox="1"/>
+          <p:nvPr/>
+        </p:nvSpPr>
+        <p:spPr>
+          <a:xfrm>
+            <a:off x="2103120" y="2103120"/>
+            <a:ext cx="9418320" cy="3474720"/>
+          </a:xfrm>
+          <a:prstGeom prst="rect">
+            <a:avLst/>
+          </a:prstGeom>
+          <a:noFill/>
+          <a:ln/>
+        </p:spPr>
+        <p:txBody>
+          <a:bodyPr wrap="square" lIns="0" tIns="0" rIns="0" bIns="0" rtlCol="0" anchor="t"/>
+          <a:lstStyle/>
+          <a:p>
+            <a:pPr marL="0" indent="0">
+              <a:buNone/>
+            </a:pPr>
+            <a:r>
+              <a:rPr lang="en-US" sz="3600" i="1" dirty="0">
+                <a:solidFill>
+                  <a:srgbClr val="FFFFFF"/>
+                </a:solidFill>
+                <a:latin typeface="Cambria" pitchFamily="34" charset="0"/>
+                <a:ea typeface="Cambria" pitchFamily="34" charset="-122"/>
+                <a:cs typeface="Cambria" pitchFamily="34" charset="-120"/>
+              </a:rPr>
+              <a:t>Complaint resolution has stalled at 36 hours against a 12-hour target, and alignment has fallen from 9.</a:t>
+            </a:r>
+            <a:endParaRPr lang="en-US" sz="3600" dirty="0"/>
+          </a:p>
+        </p:txBody>
+      </p:sp>
+      <p:sp>
+        <p:nvSpPr>
+          <p:cNvPr id="6" name="Text 3"/>
+          <p:cNvSpPr txBox="1"/>
+          <p:nvPr/>
+        </p:nvSpPr>
+        <p:spPr>
+          <a:xfrm>
+            <a:off x="2103120" y="5577840"/>
+            <a:ext cx="9418320" cy="822960"/>
+          </a:xfrm>
+          <a:prstGeom prst="rect">
+            <a:avLst/>
+          </a:prstGeom>
+          <a:noFill/>
+          <a:ln/>
+        </p:spPr>
+        <p:txBody>
+          <a:bodyPr wrap="square" lIns="0" tIns="0" rIns="0" bIns="0" rtlCol="0" anchor="t"/>
+          <a:lstStyle/>
+          <a:p>
+            <a:pPr marL="0" indent="0">
+              <a:buNone/>
+            </a:pPr>
+            <a:r>
+              <a:rPr lang="en-US" sz="2400" dirty="0">
+                <a:solidFill>
+                  <a:srgbClr val="DDE8DF"/>
+                </a:solidFill>
+                <a:latin typeface="Calibri" pitchFamily="34" charset="0"/>
+                <a:ea typeface="Calibri" pitchFamily="34" charset="-122"/>
+                <a:cs typeface="Calibri" pitchFamily="34" charset="-120"/>
+              </a:rPr>
+              <a:t>CXO · Team member · Observer. Role play the conversation using GROW.</a:t>
             </a:r>
             <a:endParaRPr lang="en-US" sz="2400" dirty="0"/>
           </a:p>
         </p:txBody>
       </p:sp>
-      <p:sp>
-        <p:nvSpPr>
-          <p:cNvPr id="10" name="Shape 7"/>
+    </p:spTree>
+  </p:cSld>
+  <p:clrMapOvr>
+    <a:masterClrMapping/>
+  </p:clrMapOvr>
+</p:sld>
+</file>
+
+<file path=ppt/slides/slide19.xml><?xml version="1.0" encoding="utf-8"?>
+<p:sld xmlns:a="http://schemas.openxmlformats.org/drawingml/2006/main" xmlns:r="http://schemas.openxmlformats.org/officeDocument/2006/relationships" xmlns:p="http://schemas.openxmlformats.org/presentationml/2006/main">
+  <p:cSld name="Slide 22">
+    <p:bg>
+      <p:bgPr>
+        <a:solidFill>
+          <a:srgbClr val="FFFFFF"/>
+        </a:solidFill>
+        <a:effectLst/>
+      </p:bgPr>
+    </p:bg>
+    <p:spTree>
+      <p:nvGrpSpPr>
+        <p:cNvPr id="1" name=""/>
+        <p:cNvGrpSpPr/>
+        <p:nvPr/>
+      </p:nvGrpSpPr>
+      <p:grpSpPr>
+        <a:xfrm>
+          <a:off x="0" y="0"/>
+          <a:ext cx="0" cy="0"/>
+          <a:chOff x="0" y="0"/>
+          <a:chExt cx="0" cy="0"/>
+        </a:xfrm>
+      </p:grpSpPr>
+      <p:sp>
+        <p:nvSpPr>
+          <p:cNvPr id="2" name="Text 0"/>
+          <p:cNvSpPr txBox="1"/>
+          <p:nvPr/>
+        </p:nvSpPr>
+        <p:spPr>
+          <a:xfrm>
+            <a:off x="548640" y="411480"/>
+            <a:ext cx="11064240" cy="868680"/>
+          </a:xfrm>
+          <a:prstGeom prst="rect">
+            <a:avLst/>
+          </a:prstGeom>
+          <a:noFill/>
+          <a:ln/>
+        </p:spPr>
+        <p:txBody>
+          <a:bodyPr wrap="square" lIns="0" tIns="0" rIns="0" bIns="0" rtlCol="0" anchor="ctr"/>
+          <a:lstStyle/>
+          <a:p>
+            <a:pPr marL="0" indent="0">
+              <a:buNone/>
+            </a:pPr>
+            <a:r>
+              <a:rPr lang="en-US" sz="3600" b="1" dirty="0">
+                <a:solidFill>
+                  <a:srgbClr val="1A5C2C"/>
+                </a:solidFill>
+                <a:latin typeface="Cambria" pitchFamily="34" charset="0"/>
+                <a:ea typeface="Cambria" pitchFamily="34" charset="-122"/>
+                <a:cs typeface="Cambria" pitchFamily="34" charset="-120"/>
+              </a:rPr>
+              <a:t>4.2 · Analysing the conversation with GROW</a:t>
+            </a:r>
+            <a:endParaRPr lang="en-US" sz="3600" dirty="0"/>
+          </a:p>
+        </p:txBody>
+      </p:sp>
+      <p:sp>
+        <p:nvSpPr>
+          <p:cNvPr id="3" name="Shape 1"/>
           <p:cNvSpPr/>
           <p:nvPr/>
         </p:nvSpPr>
         <p:spPr>
           <a:xfrm>
-            <a:off x="2743200" y="5010912"/>
-            <a:ext cx="384048" cy="384048"/>
+            <a:off x="548640" y="1691640"/>
+            <a:ext cx="640080" cy="640080"/>
           </a:xfrm>
           <a:prstGeom prst="ellipse">
             <a:avLst/>
           </a:prstGeom>
           <a:solidFill>
-            <a:srgbClr val="C6A24C"/>
+            <a:srgbClr val="1A5C2C"/>
           </a:solidFill>
           <a:ln w="12700">
             <a:solidFill>
-              <a:srgbClr val="C6A24C"/>
+              <a:srgbClr val="1A5C2C"/>
             </a:solidFill>
             <a:prstDash val="solid"/>
           </a:ln>
         </p:spPr>
         <p:txBody>
-          <a:bodyPr/>
-          <a:lstStyle/>
-          <a:p>
-            <a:endParaRPr lang="en-ZA"/>
-          </a:p>
-        </p:txBody>
-      </p:sp>
-      <p:pic>
-        <p:nvPicPr>
-          <p:cNvPr id="11" name="Image 1" descr="preencoded.png"/>
-          <p:cNvPicPr>
-            <a:picLocks noChangeAspect="1"/>
-          </p:cNvPicPr>
-          <p:nvPr/>
-        </p:nvPicPr>
-        <p:blipFill>
-          <a:blip r:embed="rId3"/>
-          <a:stretch>
-            <a:fillRect/>
-          </a:stretch>
-        </p:blipFill>
-        <p:spPr>
-          <a:xfrm>
-            <a:off x="2839212" y="5106924"/>
-            <a:ext cx="192024" cy="192024"/>
-          </a:xfrm>
-          <a:prstGeom prst="rect">
-            <a:avLst/>
-          </a:prstGeom>
-        </p:spPr>
-      </p:pic>
-      <p:sp>
-        <p:nvSpPr>
-          <p:cNvPr id="12" name="Text 8"/>
+          <a:bodyPr lIns="0" tIns="0" rIns="0" bIns="0" anchor="ctr"/>
+          <a:lstStyle/>
+          <a:p>
+            <a:pPr algn="ctr"/>
+            <a:r>
+              <a:rPr lang="en-GB" sz="2400" b="1">
+                <a:solidFill>
+                  <a:srgbClr val="FFFFFF"/>
+                </a:solidFill>
+                <a:latin typeface="Cambria"/>
+              </a:rPr>
+              <a:t>G</a:t>
+            </a:r>
+          </a:p>
+        </p:txBody>
+      </p:sp>
+      <p:sp>
+        <p:nvSpPr>
+          <p:cNvPr id="5" name="Text 2"/>
           <p:cNvSpPr txBox="1"/>
           <p:nvPr/>
         </p:nvSpPr>
         <p:spPr>
           <a:xfrm>
-            <a:off x="3291840" y="4937760"/>
-            <a:ext cx="8412480" cy="1097280"/>
+            <a:off x="1508760" y="1463040"/>
+            <a:ext cx="10131552" cy="1097280"/>
           </a:xfrm>
           <a:prstGeom prst="rect">
             <a:avLst/>
@@ -8473,24 +9976,308 @@
           <a:ln/>
         </p:spPr>
         <p:txBody>
-          <a:bodyPr wrap="square" lIns="0" tIns="0" rIns="0" bIns="0" rtlCol="0" anchor="t"/>
+          <a:bodyPr wrap="square" lIns="0" tIns="0" rIns="0" bIns="0" rtlCol="0" anchor="ctr"/>
           <a:lstStyle/>
           <a:p>
             <a:pPr marL="0" indent="0">
               <a:buNone/>
             </a:pPr>
             <a:r>
-              <a:rPr lang="en-US" sz="2400" dirty="0">
-                <a:solidFill>
-                  <a:srgbClr val="FFFFFF"/>
+              <a:rPr lang="en-US" sz="2600" b="1" dirty="0">
+                <a:solidFill>
+                  <a:srgbClr val="1A5C2C"/>
+                </a:solidFill>
+                <a:latin typeface="Cambria" pitchFamily="34" charset="0"/>
+                <a:ea typeface="Cambria" pitchFamily="34" charset="-122"/>
+                <a:cs typeface="Cambria" pitchFamily="34" charset="-120"/>
+              </a:rPr>
+              <a:t>Goal  </a:t>
+            </a:r>
+            <a:r>
+              <a:rPr lang="en-US" sz="2600" dirty="0">
+                <a:solidFill>
+                  <a:srgbClr val="1F2A22"/>
                 </a:solidFill>
                 <a:latin typeface="Calibri" pitchFamily="34" charset="0"/>
                 <a:ea typeface="Calibri" pitchFamily="34" charset="-122"/>
                 <a:cs typeface="Calibri" pitchFamily="34" charset="-120"/>
               </a:rPr>
-              <a:t>Determine the leadership decisions that protect the review discipline of the strategy.</a:t>
-            </a:r>
-            <a:endParaRPr lang="en-US" sz="2400" dirty="0"/>
+              <a:t>Ownership again: an alignment of 9 or 10.</a:t>
+            </a:r>
+            <a:endParaRPr lang="en-US" sz="2600" dirty="0"/>
+          </a:p>
+        </p:txBody>
+      </p:sp>
+      <p:sp>
+        <p:nvSpPr>
+          <p:cNvPr id="9" name="Shape 5"/>
+          <p:cNvSpPr/>
+          <p:nvPr/>
+        </p:nvSpPr>
+        <p:spPr>
+          <a:xfrm>
+            <a:off x="548640" y="3063240"/>
+            <a:ext cx="640080" cy="640080"/>
+          </a:xfrm>
+          <a:prstGeom prst="ellipse">
+            <a:avLst/>
+          </a:prstGeom>
+          <a:solidFill>
+            <a:srgbClr val="1A5C2C"/>
+          </a:solidFill>
+          <a:ln w="12700">
+            <a:solidFill>
+              <a:srgbClr val="1A5C2C"/>
+            </a:solidFill>
+            <a:prstDash val="solid"/>
+          </a:ln>
+        </p:spPr>
+        <p:txBody>
+          <a:bodyPr lIns="0" tIns="0" rIns="0" bIns="0" anchor="ctr"/>
+          <a:lstStyle/>
+          <a:p>
+            <a:pPr algn="ctr"/>
+            <a:r>
+              <a:rPr lang="en-GB" sz="2400" b="1">
+                <a:solidFill>
+                  <a:srgbClr val="FFFFFF"/>
+                </a:solidFill>
+                <a:latin typeface="Cambria"/>
+              </a:rPr>
+              <a:t>R</a:t>
+            </a:r>
+          </a:p>
+        </p:txBody>
+      </p:sp>
+      <p:sp>
+        <p:nvSpPr>
+          <p:cNvPr id="11" name="Text 6"/>
+          <p:cNvSpPr txBox="1"/>
+          <p:nvPr/>
+        </p:nvSpPr>
+        <p:spPr>
+          <a:xfrm>
+            <a:off x="1508760" y="2834640"/>
+            <a:ext cx="10131552" cy="1097280"/>
+          </a:xfrm>
+          <a:prstGeom prst="rect">
+            <a:avLst/>
+          </a:prstGeom>
+          <a:noFill/>
+          <a:ln/>
+        </p:spPr>
+        <p:txBody>
+          <a:bodyPr wrap="square" lIns="0" tIns="0" rIns="0" bIns="0" rtlCol="0" anchor="ctr"/>
+          <a:lstStyle/>
+          <a:p>
+            <a:pPr marL="0" indent="0">
+              <a:buNone/>
+            </a:pPr>
+            <a:r>
+              <a:rPr lang="en-US" sz="2600" b="1" dirty="0">
+                <a:solidFill>
+                  <a:srgbClr val="1A5C2C"/>
+                </a:solidFill>
+                <a:latin typeface="Cambria" pitchFamily="34" charset="0"/>
+                <a:ea typeface="Cambria" pitchFamily="34" charset="-122"/>
+                <a:cs typeface="Cambria" pitchFamily="34" charset="-120"/>
+              </a:rPr>
+              <a:t>Reality  </a:t>
+            </a:r>
+            <a:r>
+              <a:rPr lang="en-US" sz="2600" dirty="0">
+                <a:solidFill>
+                  <a:srgbClr val="1F2A22"/>
+                </a:solidFill>
+                <a:latin typeface="Calibri" pitchFamily="34" charset="0"/>
+                <a:ea typeface="Calibri" pitchFamily="34" charset="-122"/>
+                <a:cs typeface="Calibri" pitchFamily="34" charset="-120"/>
+              </a:rPr>
+              <a:t>What stands behind the score and the gap.</a:t>
+            </a:r>
+            <a:endParaRPr lang="en-US" sz="2600" dirty="0"/>
+          </a:p>
+        </p:txBody>
+      </p:sp>
+      <p:sp>
+        <p:nvSpPr>
+          <p:cNvPr id="12" name="Shape 7"/>
+          <p:cNvSpPr/>
+          <p:nvPr/>
+        </p:nvSpPr>
+        <p:spPr>
+          <a:xfrm>
+            <a:off x="548640" y="4434840"/>
+            <a:ext cx="640080" cy="640080"/>
+          </a:xfrm>
+          <a:prstGeom prst="ellipse">
+            <a:avLst/>
+          </a:prstGeom>
+          <a:solidFill>
+            <a:srgbClr val="1A5C2C"/>
+          </a:solidFill>
+          <a:ln w="12700">
+            <a:solidFill>
+              <a:srgbClr val="1A5C2C"/>
+            </a:solidFill>
+            <a:prstDash val="solid"/>
+          </a:ln>
+        </p:spPr>
+        <p:txBody>
+          <a:bodyPr lIns="0" tIns="0" rIns="0" bIns="0" anchor="ctr"/>
+          <a:lstStyle/>
+          <a:p>
+            <a:pPr algn="ctr"/>
+            <a:r>
+              <a:rPr lang="en-GB" sz="2400" b="1">
+                <a:solidFill>
+                  <a:srgbClr val="FFFFFF"/>
+                </a:solidFill>
+                <a:latin typeface="Cambria"/>
+              </a:rPr>
+              <a:t>O</a:t>
+            </a:r>
+          </a:p>
+        </p:txBody>
+      </p:sp>
+      <p:sp>
+        <p:nvSpPr>
+          <p:cNvPr id="14" name="Text 8"/>
+          <p:cNvSpPr txBox="1"/>
+          <p:nvPr/>
+        </p:nvSpPr>
+        <p:spPr>
+          <a:xfrm>
+            <a:off x="1508760" y="4206240"/>
+            <a:ext cx="10131552" cy="1097280"/>
+          </a:xfrm>
+          <a:prstGeom prst="rect">
+            <a:avLst/>
+          </a:prstGeom>
+          <a:noFill/>
+          <a:ln/>
+        </p:spPr>
+        <p:txBody>
+          <a:bodyPr wrap="square" lIns="0" tIns="0" rIns="0" bIns="0" rtlCol="0" anchor="ctr"/>
+          <a:lstStyle/>
+          <a:p>
+            <a:pPr marL="0" indent="0">
+              <a:buNone/>
+            </a:pPr>
+            <a:r>
+              <a:rPr lang="en-US" sz="2600" b="1" dirty="0">
+                <a:solidFill>
+                  <a:srgbClr val="1A5C2C"/>
+                </a:solidFill>
+                <a:latin typeface="Cambria" pitchFamily="34" charset="0"/>
+                <a:ea typeface="Cambria" pitchFamily="34" charset="-122"/>
+                <a:cs typeface="Cambria" pitchFamily="34" charset="-120"/>
+              </a:rPr>
+              <a:t>Options  </a:t>
+            </a:r>
+            <a:r>
+              <a:rPr lang="en-US" sz="2600" dirty="0">
+                <a:solidFill>
+                  <a:srgbClr val="1F2A22"/>
+                </a:solidFill>
+                <a:latin typeface="Calibri" pitchFamily="34" charset="0"/>
+                <a:ea typeface="Calibri" pitchFamily="34" charset="-122"/>
+                <a:cs typeface="Calibri" pitchFamily="34" charset="-120"/>
+              </a:rPr>
+              <a:t>The ways forward the owner generates.</a:t>
+            </a:r>
+            <a:endParaRPr lang="en-US" sz="2600" dirty="0"/>
+          </a:p>
+        </p:txBody>
+      </p:sp>
+      <p:sp>
+        <p:nvSpPr>
+          <p:cNvPr id="15" name="Shape 9"/>
+          <p:cNvSpPr/>
+          <p:nvPr/>
+        </p:nvSpPr>
+        <p:spPr>
+          <a:xfrm>
+            <a:off x="548640" y="5806440"/>
+            <a:ext cx="640080" cy="640080"/>
+          </a:xfrm>
+          <a:prstGeom prst="ellipse">
+            <a:avLst/>
+          </a:prstGeom>
+          <a:solidFill>
+            <a:srgbClr val="1A5C2C"/>
+          </a:solidFill>
+          <a:ln w="12700">
+            <a:solidFill>
+              <a:srgbClr val="1A5C2C"/>
+            </a:solidFill>
+            <a:prstDash val="solid"/>
+          </a:ln>
+        </p:spPr>
+        <p:txBody>
+          <a:bodyPr lIns="0" tIns="0" rIns="0" bIns="0" anchor="ctr"/>
+          <a:lstStyle/>
+          <a:p>
+            <a:pPr algn="ctr"/>
+            <a:r>
+              <a:rPr lang="en-GB" sz="2400" b="1">
+                <a:solidFill>
+                  <a:srgbClr val="FFFFFF"/>
+                </a:solidFill>
+                <a:latin typeface="Cambria"/>
+              </a:rPr>
+              <a:t>W</a:t>
+            </a:r>
+          </a:p>
+        </p:txBody>
+      </p:sp>
+      <p:sp>
+        <p:nvSpPr>
+          <p:cNvPr id="16" name="Text 10"/>
+          <p:cNvSpPr txBox="1"/>
+          <p:nvPr/>
+        </p:nvSpPr>
+        <p:spPr>
+          <a:xfrm>
+            <a:off x="1508760" y="5577840"/>
+            <a:ext cx="10131552" cy="1097280"/>
+          </a:xfrm>
+          <a:prstGeom prst="rect">
+            <a:avLst/>
+          </a:prstGeom>
+          <a:noFill/>
+          <a:ln/>
+        </p:spPr>
+        <p:txBody>
+          <a:bodyPr wrap="square" lIns="0" tIns="0" rIns="0" bIns="0" rtlCol="0" anchor="ctr"/>
+          <a:lstStyle/>
+          <a:p>
+            <a:pPr marL="0" indent="0">
+              <a:buNone/>
+            </a:pPr>
+            <a:r>
+              <a:rPr lang="en-US" sz="2600" b="1" dirty="0">
+                <a:solidFill>
+                  <a:srgbClr val="1A5C2C"/>
+                </a:solidFill>
+                <a:latin typeface="Cambria" pitchFamily="34" charset="0"/>
+                <a:ea typeface="Cambria" pitchFamily="34" charset="-122"/>
+                <a:cs typeface="Cambria" pitchFamily="34" charset="-120"/>
+              </a:rPr>
+              <a:t>Will  </a:t>
+            </a:r>
+            <a:r>
+              <a:rPr lang="en-US" sz="2600" dirty="0">
+                <a:solidFill>
+                  <a:srgbClr val="1F2A22"/>
+                </a:solidFill>
+                <a:latin typeface="Calibri" pitchFamily="34" charset="0"/>
+                <a:ea typeface="Calibri" pitchFamily="34" charset="-122"/>
+                <a:cs typeface="Calibri" pitchFamily="34" charset="-120"/>
+              </a:rPr>
+              <a:t>Actions, owner and follow-up; the alignment question again.</a:t>
+            </a:r>
+            <a:endParaRPr lang="en-US" sz="2600" dirty="0"/>
           </a:p>
         </p:txBody>
       </p:sp>
@@ -8954,13 +10741,403 @@
 </p:sld>
 </file>
 
-<file path=ppt/slides/slide21.xml><?xml version="1.0" encoding="utf-8"?>
-<p:sld xmlns:a="http://schemas.openxmlformats.org/drawingml/2006/main" xmlns:r="http://schemas.openxmlformats.org/officeDocument/2006/relationships" xmlns:p="http://schemas.openxmlformats.org/presentationml/2006/main">
-  <p:cSld name="Slide 21">
+<file path=ppt/slides/slide20.xml><?xml version="1.0" encoding="utf-8"?>
+<p:sld xmlns:a="http://schemas.openxmlformats.org/drawingml/2006/main" xmlns:p="http://schemas.openxmlformats.org/presentationml/2006/main" xmlns:r="http://schemas.openxmlformats.org/officeDocument/2006/relationships">
+  <p:cSld>
     <p:bg>
       <p:bgPr>
         <a:solidFill>
-          <a:srgbClr val="0F3B1C"/>
+          <a:srgbClr val="FFFFFF"/>
+        </a:solidFill>
+        <a:effectLst/>
+      </p:bgPr>
+    </p:bg>
+    <p:spTree>
+      <p:nvGrpSpPr>
+        <p:cNvPr id="1" name=""/>
+        <p:cNvGrpSpPr/>
+        <p:nvPr/>
+      </p:nvGrpSpPr>
+      <p:grpSpPr/>
+      <p:sp>
+        <p:nvSpPr>
+          <p:cNvPr id="2" name="Text 0"/>
+          <p:cNvSpPr txBox="1"/>
+          <p:nvPr/>
+        </p:nvSpPr>
+        <p:spPr>
+          <a:xfrm>
+            <a:off x="548640" y="411480"/>
+            <a:ext cx="11064240" cy="868680"/>
+          </a:xfrm>
+          <a:prstGeom prst="rect">
+            <a:avLst/>
+          </a:prstGeom>
+          <a:noFill/>
+          <a:ln/>
+        </p:spPr>
+        <p:txBody>
+          <a:bodyPr wrap="square" lIns="0" tIns="0" rIns="0" bIns="0" rtlCol="0" anchor="ctr"/>
+          <a:lstStyle/>
+          <a:p>
+            <a:pPr marL="0" indent="0">
+              <a:buNone/>
+            </a:pPr>
+            <a:r>
+              <a:rPr lang="en-US" sz="3600" b="1" dirty="0">
+                <a:solidFill>
+                  <a:srgbClr val="1A5C2C"/>
+                </a:solidFill>
+                <a:latin typeface="Cambria" pitchFamily="34" charset="0"/>
+                <a:ea typeface="Cambria" pitchFamily="34" charset="-122"/>
+                <a:cs typeface="Cambria" pitchFamily="34" charset="-120"/>
+              </a:rPr>
+              <a:t>Section 4 Reflections</a:t>
+            </a:r>
+            <a:endParaRPr lang="en-US" sz="3600" dirty="0"/>
+          </a:p>
+        </p:txBody>
+      </p:sp>
+      <p:pic>
+        <p:nvPicPr>
+          <p:cNvPr id="3" name="Reflection 4.1" descr="ref_4.1b.png"/>
+          <p:cNvPicPr>
+            <a:picLocks noChangeAspect="1"/>
+          </p:cNvPicPr>
+          <p:nvPr/>
+        </p:nvPicPr>
+        <p:blipFill>
+          <a:blip r:embed="rId8"/>
+          <a:stretch>
+            <a:fillRect/>
+          </a:stretch>
+        </p:blipFill>
+        <p:spPr>
+          <a:xfrm>
+            <a:off x="1691640" y="1463040"/>
+            <a:ext cx="10058400" cy="1002755"/>
+          </a:xfrm>
+          <a:prstGeom prst="rect">
+            <a:avLst/>
+          </a:prstGeom>
+        </p:spPr>
+      </p:pic>
+      <p:sp>
+        <p:nvSpPr>
+          <p:cNvPr id="4" name="Part 4.1"/>
+          <p:cNvSpPr/>
+          <p:nvPr/>
+        </p:nvSpPr>
+        <p:spPr>
+          <a:xfrm>
+            <a:off x="548640" y="1530077"/>
+            <a:ext cx="868680" cy="868680"/>
+          </a:xfrm>
+          <a:prstGeom prst="ellipse">
+            <a:avLst/>
+          </a:prstGeom>
+          <a:solidFill>
+            <a:srgbClr val="C6A24C"/>
+          </a:solidFill>
+          <a:ln>
+            <a:solidFill>
+              <a:srgbClr val="C6A24C"/>
+            </a:solidFill>
+          </a:ln>
+          <a:effectLst/>
+        </p:spPr>
+        <p:txBody>
+          <a:bodyPr wrap="none" lIns="0" tIns="0" rIns="0" bIns="0" rtlCol="0" anchor="ctr"/>
+          <a:lstStyle/>
+          <a:p>
+            <a:pPr algn="ctr"/>
+            <a:r>
+              <a:rPr lang="en-GB" sz="2400" b="1">
+                <a:solidFill>
+                  <a:srgbClr val="FFFFFF"/>
+                </a:solidFill>
+                <a:latin typeface="Calibri"/>
+              </a:rPr>
+              <a:t>4.1</a:t>
+            </a:r>
+          </a:p>
+        </p:txBody>
+      </p:sp>
+      <p:pic>
+        <p:nvPicPr>
+          <p:cNvPr id="5" name="Reflection 4.1" descr="ref_4.1c.png"/>
+          <p:cNvPicPr>
+            <a:picLocks noChangeAspect="1"/>
+          </p:cNvPicPr>
+          <p:nvPr/>
+        </p:nvPicPr>
+        <p:blipFill>
+          <a:blip r:embed="rId9"/>
+          <a:stretch>
+            <a:fillRect/>
+          </a:stretch>
+        </p:blipFill>
+        <p:spPr>
+          <a:xfrm>
+            <a:off x="1691640" y="2666962"/>
+            <a:ext cx="10058400" cy="1357575"/>
+          </a:xfrm>
+          <a:prstGeom prst="rect">
+            <a:avLst/>
+          </a:prstGeom>
+        </p:spPr>
+      </p:pic>
+      <p:sp>
+        <p:nvSpPr>
+          <p:cNvPr id="6" name="Part 4.1"/>
+          <p:cNvSpPr/>
+          <p:nvPr/>
+        </p:nvSpPr>
+        <p:spPr>
+          <a:xfrm>
+            <a:off x="548640" y="2911409"/>
+            <a:ext cx="868680" cy="868680"/>
+          </a:xfrm>
+          <a:prstGeom prst="ellipse">
+            <a:avLst/>
+          </a:prstGeom>
+          <a:solidFill>
+            <a:srgbClr val="C6A24C"/>
+          </a:solidFill>
+          <a:ln>
+            <a:solidFill>
+              <a:srgbClr val="C6A24C"/>
+            </a:solidFill>
+          </a:ln>
+          <a:effectLst/>
+        </p:spPr>
+        <p:txBody>
+          <a:bodyPr wrap="none" lIns="0" tIns="0" rIns="0" bIns="0" rtlCol="0" anchor="ctr"/>
+          <a:lstStyle/>
+          <a:p>
+            <a:pPr algn="ctr"/>
+            <a:r>
+              <a:rPr lang="en-GB" sz="2400" b="1">
+                <a:solidFill>
+                  <a:srgbClr val="FFFFFF"/>
+                </a:solidFill>
+                <a:latin typeface="Calibri"/>
+              </a:rPr>
+              <a:t>4.1</a:t>
+            </a:r>
+          </a:p>
+        </p:txBody>
+      </p:sp>
+    </p:spTree>
+  </p:cSld>
+  <p:clrMapOvr>
+    <a:masterClrMapping/>
+  </p:clrMapOvr>
+</p:sld>
+</file>
+
+<file path=ppt/slides/slide21.xml><?xml version="1.0" encoding="utf-8"?>
+<p:sld xmlns:a="http://schemas.openxmlformats.org/drawingml/2006/main" xmlns:p="http://schemas.openxmlformats.org/presentationml/2006/main" xmlns:r="http://schemas.openxmlformats.org/officeDocument/2006/relationships">
+  <p:cSld>
+    <p:bg>
+      <p:bgPr>
+        <a:solidFill>
+          <a:srgbClr val="FFFFFF"/>
+        </a:solidFill>
+        <a:effectLst/>
+      </p:bgPr>
+    </p:bg>
+    <p:spTree>
+      <p:nvGrpSpPr>
+        <p:cNvPr id="1" name=""/>
+        <p:cNvGrpSpPr/>
+        <p:nvPr/>
+      </p:nvGrpSpPr>
+      <p:grpSpPr/>
+      <p:sp>
+        <p:nvSpPr>
+          <p:cNvPr id="2" name="Text 0"/>
+          <p:cNvSpPr txBox="1"/>
+          <p:nvPr/>
+        </p:nvSpPr>
+        <p:spPr>
+          <a:xfrm>
+            <a:off x="548640" y="411480"/>
+            <a:ext cx="11064240" cy="868680"/>
+          </a:xfrm>
+          <a:prstGeom prst="rect">
+            <a:avLst/>
+          </a:prstGeom>
+          <a:noFill/>
+          <a:ln/>
+        </p:spPr>
+        <p:txBody>
+          <a:bodyPr wrap="square" lIns="0" tIns="0" rIns="0" bIns="0" rtlCol="0" anchor="ctr"/>
+          <a:lstStyle/>
+          <a:p>
+            <a:pPr marL="0" indent="0">
+              <a:buNone/>
+            </a:pPr>
+            <a:r>
+              <a:rPr lang="en-US" sz="3600" b="1" dirty="0">
+                <a:solidFill>
+                  <a:srgbClr val="1A5C2C"/>
+                </a:solidFill>
+                <a:latin typeface="Cambria" pitchFamily="34" charset="0"/>
+                <a:ea typeface="Cambria" pitchFamily="34" charset="-122"/>
+                <a:cs typeface="Cambria" pitchFamily="34" charset="-120"/>
+              </a:rPr>
+              <a:t>Section 4 Reflections</a:t>
+            </a:r>
+            <a:endParaRPr lang="en-US" sz="3600" dirty="0"/>
+          </a:p>
+        </p:txBody>
+      </p:sp>
+      <p:pic>
+        <p:nvPicPr>
+          <p:cNvPr id="3" name="Reflection 4.1" descr="ref_4.1a.png"/>
+          <p:cNvPicPr>
+            <a:picLocks noChangeAspect="1"/>
+          </p:cNvPicPr>
+          <p:nvPr/>
+        </p:nvPicPr>
+        <p:blipFill>
+          <a:blip r:embed="rId8"/>
+          <a:stretch>
+            <a:fillRect/>
+          </a:stretch>
+        </p:blipFill>
+        <p:spPr>
+          <a:xfrm>
+            <a:off x="1691640" y="1463040"/>
+            <a:ext cx="10058400" cy="1311339"/>
+          </a:xfrm>
+          <a:prstGeom prst="rect">
+            <a:avLst/>
+          </a:prstGeom>
+        </p:spPr>
+      </p:pic>
+      <p:sp>
+        <p:nvSpPr>
+          <p:cNvPr id="4" name="Part 4.1"/>
+          <p:cNvSpPr/>
+          <p:nvPr/>
+        </p:nvSpPr>
+        <p:spPr>
+          <a:xfrm>
+            <a:off x="548640" y="1684369"/>
+            <a:ext cx="868680" cy="868680"/>
+          </a:xfrm>
+          <a:prstGeom prst="ellipse">
+            <a:avLst/>
+          </a:prstGeom>
+          <a:solidFill>
+            <a:srgbClr val="C6A24C"/>
+          </a:solidFill>
+          <a:ln>
+            <a:solidFill>
+              <a:srgbClr val="C6A24C"/>
+            </a:solidFill>
+          </a:ln>
+          <a:effectLst/>
+        </p:spPr>
+        <p:txBody>
+          <a:bodyPr wrap="none" lIns="0" tIns="0" rIns="0" bIns="0" rtlCol="0" anchor="ctr"/>
+          <a:lstStyle/>
+          <a:p>
+            <a:pPr algn="ctr"/>
+            <a:r>
+              <a:rPr lang="en-GB" sz="2400" b="1">
+                <a:solidFill>
+                  <a:srgbClr val="FFFFFF"/>
+                </a:solidFill>
+                <a:latin typeface="Calibri"/>
+              </a:rPr>
+              <a:t>4.1</a:t>
+            </a:r>
+          </a:p>
+        </p:txBody>
+      </p:sp>
+      <p:pic>
+        <p:nvPicPr>
+          <p:cNvPr id="5" name="Reflection 4.2" descr="ref_4.2.png"/>
+          <p:cNvPicPr>
+            <a:picLocks noChangeAspect="1"/>
+          </p:cNvPicPr>
+          <p:nvPr/>
+        </p:nvPicPr>
+        <p:blipFill>
+          <a:blip r:embed="rId9"/>
+          <a:stretch>
+            <a:fillRect/>
+          </a:stretch>
+        </p:blipFill>
+        <p:spPr>
+          <a:xfrm>
+            <a:off x="1691640" y="2975546"/>
+            <a:ext cx="10058400" cy="3285552"/>
+          </a:xfrm>
+          <a:prstGeom prst="rect">
+            <a:avLst/>
+          </a:prstGeom>
+        </p:spPr>
+      </p:pic>
+      <p:sp>
+        <p:nvSpPr>
+          <p:cNvPr id="6" name="Part 4.2"/>
+          <p:cNvSpPr/>
+          <p:nvPr/>
+        </p:nvSpPr>
+        <p:spPr>
+          <a:xfrm>
+            <a:off x="548640" y="4183981"/>
+            <a:ext cx="868680" cy="868680"/>
+          </a:xfrm>
+          <a:prstGeom prst="ellipse">
+            <a:avLst/>
+          </a:prstGeom>
+          <a:solidFill>
+            <a:srgbClr val="C6A24C"/>
+          </a:solidFill>
+          <a:ln>
+            <a:solidFill>
+              <a:srgbClr val="C6A24C"/>
+            </a:solidFill>
+          </a:ln>
+          <a:effectLst/>
+        </p:spPr>
+        <p:txBody>
+          <a:bodyPr wrap="none" lIns="0" tIns="0" rIns="0" bIns="0" rtlCol="0" anchor="ctr"/>
+          <a:lstStyle/>
+          <a:p>
+            <a:pPr algn="ctr"/>
+            <a:r>
+              <a:rPr lang="en-GB" sz="2400" b="1">
+                <a:solidFill>
+                  <a:srgbClr val="FFFFFF"/>
+                </a:solidFill>
+                <a:latin typeface="Calibri"/>
+              </a:rPr>
+              <a:t>4.2</a:t>
+            </a:r>
+          </a:p>
+        </p:txBody>
+      </p:sp>
+    </p:spTree>
+  </p:cSld>
+  <p:clrMapOvr>
+    <a:masterClrMapping/>
+  </p:clrMapOvr>
+</p:sld>
+</file>
+
+<file path=ppt/slides/slide22.xml><?xml version="1.0" encoding="utf-8"?>
+<p:sld xmlns:a="http://schemas.openxmlformats.org/drawingml/2006/main" xmlns:r="http://schemas.openxmlformats.org/officeDocument/2006/relationships" xmlns:p="http://schemas.openxmlformats.org/presentationml/2006/main">
+  <p:cSld name="Slide 19">
+    <p:bg>
+      <p:bgPr>
+        <a:solidFill>
+          <a:srgbClr val="1A5C2C"/>
         </a:solidFill>
         <a:effectLst/>
       </p:bgPr>
@@ -8981,14 +11158,209 @@
       </p:grpSpPr>
       <p:sp>
         <p:nvSpPr>
-          <p:cNvPr id="2" name="Shape 0"/>
+          <p:cNvPr id="2" name="Text 0"/>
+          <p:cNvSpPr txBox="1"/>
+          <p:nvPr/>
+        </p:nvSpPr>
+        <p:spPr>
+          <a:xfrm>
+            <a:off x="457200" y="822960"/>
+            <a:ext cx="2103120" cy="2194560"/>
+          </a:xfrm>
+          <a:prstGeom prst="rect">
+            <a:avLst/>
+          </a:prstGeom>
+          <a:noFill/>
+          <a:ln/>
+        </p:spPr>
+        <p:txBody>
+          <a:bodyPr wrap="square" lIns="0" tIns="0" rIns="0" bIns="0" rtlCol="0" anchor="t"/>
+          <a:lstStyle/>
+          <a:p>
+            <a:pPr marL="0" indent="0">
+              <a:buNone/>
+            </a:pPr>
+            <a:r>
+              <a:rPr lang="en-US" sz="15000" b="1" dirty="0">
+                <a:solidFill>
+                  <a:srgbClr val="C6A24C"/>
+                </a:solidFill>
+                <a:latin typeface="Cambria" pitchFamily="34" charset="0"/>
+                <a:ea typeface="Cambria" pitchFamily="34" charset="-122"/>
+                <a:cs typeface="Cambria" pitchFamily="34" charset="-120"/>
+              </a:rPr>
+              <a:t>5</a:t>
+            </a:r>
+            <a:endParaRPr lang="en-US" sz="15000" dirty="0"/>
+          </a:p>
+        </p:txBody>
+      </p:sp>
+      <p:sp>
+        <p:nvSpPr>
+          <p:cNvPr id="3" name="Text 1"/>
+          <p:cNvSpPr txBox="1"/>
+          <p:nvPr/>
+        </p:nvSpPr>
+        <p:spPr>
+          <a:xfrm>
+            <a:off x="2743200" y="914400"/>
+            <a:ext cx="8229600" cy="457200"/>
+          </a:xfrm>
+          <a:prstGeom prst="rect">
+            <a:avLst/>
+          </a:prstGeom>
+          <a:noFill/>
+          <a:ln/>
+        </p:spPr>
+        <p:txBody>
+          <a:bodyPr wrap="square" lIns="0" tIns="0" rIns="0" bIns="0" rtlCol="0" anchor="t"/>
+          <a:lstStyle/>
+          <a:p>
+            <a:pPr marL="0" indent="0">
+              <a:buNone/>
+            </a:pPr>
+            <a:r>
+              <a:rPr lang="en-US" sz="2400" b="1" dirty="0">
+                <a:solidFill>
+                  <a:srgbClr val="E6D3A0"/>
+                </a:solidFill>
+                <a:latin typeface="Calibri" pitchFamily="34" charset="0"/>
+                <a:ea typeface="Calibri" pitchFamily="34" charset="-122"/>
+                <a:cs typeface="Calibri" pitchFamily="34" charset="-120"/>
+              </a:rPr>
+              <a:t>Section 5</a:t>
+            </a:r>
+            <a:endParaRPr lang="en-US" sz="2400" dirty="0"/>
+          </a:p>
+        </p:txBody>
+      </p:sp>
+      <p:sp>
+        <p:nvSpPr>
+          <p:cNvPr id="4" name="Text 2"/>
+          <p:cNvSpPr txBox="1"/>
+          <p:nvPr/>
+        </p:nvSpPr>
+        <p:spPr>
+          <a:xfrm>
+            <a:off x="2743200" y="1371600"/>
+            <a:ext cx="8961120" cy="868680"/>
+          </a:xfrm>
+          <a:prstGeom prst="rect">
+            <a:avLst/>
+          </a:prstGeom>
+          <a:noFill/>
+          <a:ln/>
+        </p:spPr>
+        <p:txBody>
+          <a:bodyPr wrap="square" lIns="0" tIns="0" rIns="0" bIns="0" rtlCol="0" anchor="t"/>
+          <a:lstStyle/>
+          <a:p>
+            <a:pPr marL="0" indent="0">
+              <a:buNone/>
+            </a:pPr>
+            <a:r>
+              <a:rPr lang="en-US" sz="4400" b="1" dirty="0">
+                <a:solidFill>
+                  <a:srgbClr val="FFFFFF"/>
+                </a:solidFill>
+                <a:latin typeface="Cambria" pitchFamily="34" charset="0"/>
+                <a:ea typeface="Cambria" pitchFamily="34" charset="-122"/>
+                <a:cs typeface="Cambria" pitchFamily="34" charset="-120"/>
+              </a:rPr>
+              <a:t>Application — In Practice</a:t>
+            </a:r>
+            <a:endParaRPr lang="en-US" sz="4400" dirty="0"/>
+          </a:p>
+        </p:txBody>
+      </p:sp>
+      <p:sp>
+        <p:nvSpPr>
+          <p:cNvPr id="5" name="Text 3"/>
+          <p:cNvSpPr txBox="1"/>
+          <p:nvPr/>
+        </p:nvSpPr>
+        <p:spPr>
+          <a:xfrm>
+            <a:off x="2743200" y="2240280"/>
+            <a:ext cx="8961120" cy="868680"/>
+          </a:xfrm>
+          <a:prstGeom prst="rect">
+            <a:avLst/>
+          </a:prstGeom>
+          <a:noFill/>
+          <a:ln/>
+        </p:spPr>
+        <p:txBody>
+          <a:bodyPr wrap="square" lIns="0" tIns="0" rIns="0" bIns="0" rtlCol="0" anchor="t"/>
+          <a:lstStyle/>
+          <a:p>
+            <a:pPr marL="0" indent="0">
+              <a:buNone/>
+            </a:pPr>
+            <a:r>
+              <a:rPr lang="en-US" sz="2600" i="1" dirty="0">
+                <a:solidFill>
+                  <a:srgbClr val="DDE8DF"/>
+                </a:solidFill>
+                <a:latin typeface="Calibri" pitchFamily="34" charset="0"/>
+                <a:ea typeface="Calibri" pitchFamily="34" charset="-122"/>
+                <a:cs typeface="Calibri" pitchFamily="34" charset="-120"/>
+              </a:rPr>
+              <a:t>Applying the Four Consequences of Weak Review Discipline</a:t>
+            </a:r>
+            <a:endParaRPr lang="en-US" sz="2600" dirty="0"/>
+          </a:p>
+        </p:txBody>
+      </p:sp>
+      <p:sp>
+        <p:nvSpPr>
+          <p:cNvPr id="6" name="Text 4"/>
+          <p:cNvSpPr txBox="1"/>
+          <p:nvPr/>
+        </p:nvSpPr>
+        <p:spPr>
+          <a:xfrm>
+            <a:off x="2743200" y="3246120"/>
+            <a:ext cx="8229600" cy="457200"/>
+          </a:xfrm>
+          <a:prstGeom prst="rect">
+            <a:avLst/>
+          </a:prstGeom>
+          <a:noFill/>
+          <a:ln/>
+        </p:spPr>
+        <p:txBody>
+          <a:bodyPr wrap="square" lIns="0" tIns="0" rIns="0" bIns="0" rtlCol="0" anchor="t"/>
+          <a:lstStyle/>
+          <a:p>
+            <a:pPr marL="0" indent="0">
+              <a:buNone/>
+            </a:pPr>
+            <a:r>
+              <a:rPr lang="en-US" sz="2400" b="1" dirty="0">
+                <a:solidFill>
+                  <a:srgbClr val="C6A24C"/>
+                </a:solidFill>
+                <a:latin typeface="Calibri" pitchFamily="34" charset="0"/>
+                <a:ea typeface="Calibri" pitchFamily="34" charset="-122"/>
+                <a:cs typeface="Calibri" pitchFamily="34" charset="-120"/>
+              </a:rPr>
+              <a:t>Section learning outcomes</a:t>
+            </a:r>
+            <a:endParaRPr lang="en-US" sz="2400" dirty="0"/>
+          </a:p>
+        </p:txBody>
+      </p:sp>
+      <p:sp>
+        <p:nvSpPr>
+          <p:cNvPr id="7" name="Shape 5"/>
           <p:cNvSpPr/>
           <p:nvPr/>
         </p:nvSpPr>
         <p:spPr>
           <a:xfrm>
-            <a:off x="731520" y="1097280"/>
-            <a:ext cx="1097280" cy="1097280"/>
+            <a:off x="2743200" y="3822192"/>
+            <a:ext cx="384048" cy="384048"/>
           </a:xfrm>
           <a:prstGeom prst="ellipse">
             <a:avLst/>
@@ -9013,7 +11385,7 @@
       </p:sp>
       <p:pic>
         <p:nvPicPr>
-          <p:cNvPr id="3" name="Image 0" descr="preencoded.png"/>
+          <p:cNvPr id="8" name="Image 0" descr="preencoded.png"/>
           <p:cNvPicPr>
             <a:picLocks noChangeAspect="1"/>
           </p:cNvPicPr>
@@ -9027,8 +11399,8 @@
         </p:blipFill>
         <p:spPr>
           <a:xfrm>
-            <a:off x="1005840" y="1371600"/>
-            <a:ext cx="548640" cy="548640"/>
+            <a:off x="2839212" y="3918204"/>
+            <a:ext cx="192024" cy="192024"/>
           </a:xfrm>
           <a:prstGeom prst="rect">
             <a:avLst/>
@@ -9037,14 +11409,14 @@
       </p:pic>
       <p:sp>
         <p:nvSpPr>
-          <p:cNvPr id="4" name="Text 1"/>
+          <p:cNvPr id="9" name="Text 6"/>
           <p:cNvSpPr txBox="1"/>
           <p:nvPr/>
         </p:nvSpPr>
         <p:spPr>
           <a:xfrm>
-            <a:off x="2103120" y="1280160"/>
-            <a:ext cx="9144000" cy="640080"/>
+            <a:off x="3291840" y="3749040"/>
+            <a:ext cx="8412480" cy="1097280"/>
           </a:xfrm>
           <a:prstGeom prst="rect">
             <a:avLst/>
@@ -9060,30 +11432,86 @@
               <a:buNone/>
             </a:pPr>
             <a:r>
-              <a:rPr lang="en-US" sz="2600" b="1" dirty="0">
-                <a:solidFill>
-                  <a:srgbClr val="C6A24C"/>
+              <a:rPr lang="en-US" sz="2400" dirty="0">
+                <a:solidFill>
+                  <a:srgbClr val="FFFFFF"/>
                 </a:solidFill>
                 <a:latin typeface="Calibri" pitchFamily="34" charset="0"/>
                 <a:ea typeface="Calibri" pitchFamily="34" charset="-122"/>
                 <a:cs typeface="Calibri" pitchFamily="34" charset="-120"/>
               </a:rPr>
-              <a:t>4.2 · The Accountability Loop role play</a:t>
-            </a:r>
-            <a:endParaRPr lang="en-US" sz="2600" dirty="0"/>
-          </a:p>
-        </p:txBody>
-      </p:sp>
-      <p:sp>
-        <p:nvSpPr>
-          <p:cNvPr id="5" name="Text 2"/>
+              <a:t>Exercise balanced judgement when performance differs from agreed expectations.</a:t>
+            </a:r>
+            <a:endParaRPr lang="en-US" sz="2400" dirty="0"/>
+          </a:p>
+        </p:txBody>
+      </p:sp>
+      <p:sp>
+        <p:nvSpPr>
+          <p:cNvPr id="10" name="Shape 7"/>
+          <p:cNvSpPr/>
+          <p:nvPr/>
+        </p:nvSpPr>
+        <p:spPr>
+          <a:xfrm>
+            <a:off x="2743200" y="5010912"/>
+            <a:ext cx="384048" cy="384048"/>
+          </a:xfrm>
+          <a:prstGeom prst="ellipse">
+            <a:avLst/>
+          </a:prstGeom>
+          <a:solidFill>
+            <a:srgbClr val="C6A24C"/>
+          </a:solidFill>
+          <a:ln w="12700">
+            <a:solidFill>
+              <a:srgbClr val="C6A24C"/>
+            </a:solidFill>
+            <a:prstDash val="solid"/>
+          </a:ln>
+        </p:spPr>
+        <p:txBody>
+          <a:bodyPr/>
+          <a:lstStyle/>
+          <a:p>
+            <a:endParaRPr lang="en-ZA"/>
+          </a:p>
+        </p:txBody>
+      </p:sp>
+      <p:pic>
+        <p:nvPicPr>
+          <p:cNvPr id="11" name="Image 1" descr="preencoded.png"/>
+          <p:cNvPicPr>
+            <a:picLocks noChangeAspect="1"/>
+          </p:cNvPicPr>
+          <p:nvPr/>
+        </p:nvPicPr>
+        <p:blipFill>
+          <a:blip r:embed="rId3"/>
+          <a:stretch>
+            <a:fillRect/>
+          </a:stretch>
+        </p:blipFill>
+        <p:spPr>
+          <a:xfrm>
+            <a:off x="2839212" y="5106924"/>
+            <a:ext cx="192024" cy="192024"/>
+          </a:xfrm>
+          <a:prstGeom prst="rect">
+            <a:avLst/>
+          </a:prstGeom>
+        </p:spPr>
+      </p:pic>
+      <p:sp>
+        <p:nvSpPr>
+          <p:cNvPr id="12" name="Text 8"/>
           <p:cNvSpPr txBox="1"/>
           <p:nvPr/>
         </p:nvSpPr>
         <p:spPr>
           <a:xfrm>
-            <a:off x="2103120" y="2103120"/>
-            <a:ext cx="9418320" cy="3474720"/>
+            <a:off x="3291840" y="4937760"/>
+            <a:ext cx="8412480" cy="1097280"/>
           </a:xfrm>
           <a:prstGeom prst="rect">
             <a:avLst/>
@@ -9099,54 +11527,15 @@
               <a:buNone/>
             </a:pPr>
             <a:r>
-              <a:rPr lang="en-US" sz="3600" i="1" dirty="0">
+              <a:rPr lang="en-US" sz="2400" dirty="0">
                 <a:solidFill>
                   <a:srgbClr val="FFFFFF"/>
-                </a:solidFill>
-                <a:latin typeface="Cambria" pitchFamily="34" charset="0"/>
-                <a:ea typeface="Cambria" pitchFamily="34" charset="-122"/>
-                <a:cs typeface="Cambria" pitchFamily="34" charset="-120"/>
-              </a:rPr>
-              <a:t>Complaint resolution is still averaging 36 hours against a 12-hour target, six weeks from the deadline.</a:t>
-            </a:r>
-            <a:endParaRPr lang="en-US" sz="3600" dirty="0"/>
-          </a:p>
-        </p:txBody>
-      </p:sp>
-      <p:sp>
-        <p:nvSpPr>
-          <p:cNvPr id="6" name="Text 3"/>
-          <p:cNvSpPr txBox="1"/>
-          <p:nvPr/>
-        </p:nvSpPr>
-        <p:spPr>
-          <a:xfrm>
-            <a:off x="2103120" y="5577840"/>
-            <a:ext cx="9418320" cy="822960"/>
-          </a:xfrm>
-          <a:prstGeom prst="rect">
-            <a:avLst/>
-          </a:prstGeom>
-          <a:noFill/>
-          <a:ln/>
-        </p:spPr>
-        <p:txBody>
-          <a:bodyPr wrap="square" lIns="0" tIns="0" rIns="0" bIns="0" rtlCol="0" anchor="t"/>
-          <a:lstStyle/>
-          <a:p>
-            <a:pPr marL="0" indent="0">
-              <a:buNone/>
-            </a:pPr>
-            <a:r>
-              <a:rPr lang="en-US" sz="2400" dirty="0">
-                <a:solidFill>
-                  <a:srgbClr val="DDE8DF"/>
                 </a:solidFill>
                 <a:latin typeface="Calibri" pitchFamily="34" charset="0"/>
                 <a:ea typeface="Calibri" pitchFamily="34" charset="-122"/>
                 <a:cs typeface="Calibri" pitchFamily="34" charset="-120"/>
               </a:rPr>
-              <a:t>Three roles: CXO · Team member · Observer. Diagnose before prescribing.</a:t>
+              <a:t>Determine the leadership decisions that protect the review discipline of the strategy.</a:t>
             </a:r>
             <a:endParaRPr lang="en-US" sz="2400" dirty="0"/>
           </a:p>
@@ -9160,9 +11549,9 @@
 </p:sld>
 </file>
 
-<file path=ppt/slides/slide22.xml><?xml version="1.0" encoding="utf-8"?>
-<p:sld xmlns:a="http://schemas.openxmlformats.org/drawingml/2006/main" xmlns:r="http://schemas.openxmlformats.org/officeDocument/2006/relationships" xmlns:p="http://schemas.openxmlformats.org/presentationml/2006/main">
-  <p:cSld name="Slide 22">
+<file path=ppt/slides/slide23.xml><?xml version="1.0" encoding="utf-8"?>
+<p:sld xmlns:a="http://schemas.openxmlformats.org/drawingml/2006/main" xmlns:p="http://schemas.openxmlformats.org/presentationml/2006/main" xmlns:r="http://schemas.openxmlformats.org/officeDocument/2006/relationships">
+  <p:cSld>
     <p:bg>
       <p:bgPr>
         <a:solidFill>
@@ -9177,14 +11566,7 @@
         <p:cNvGrpSpPr/>
         <p:nvPr/>
       </p:nvGrpSpPr>
-      <p:grpSpPr>
-        <a:xfrm>
-          <a:off x="0" y="0"/>
-          <a:ext cx="0" cy="0"/>
-          <a:chOff x="0" y="0"/>
-          <a:chExt cx="0" cy="0"/>
-        </a:xfrm>
-      </p:grpSpPr>
+      <p:grpSpPr/>
       <p:sp>
         <p:nvSpPr>
           <p:cNvPr id="2" name="Text 0"/>
@@ -9218,7 +11600,7 @@
                 <a:ea typeface="Cambria" pitchFamily="34" charset="-122"/>
                 <a:cs typeface="Cambria" pitchFamily="34" charset="-120"/>
               </a:rPr>
-              <a:t>4.2 · Evaluation criteria</a:t>
+              <a:t>5.1 · Decision points against the four consequences</a:t>
             </a:r>
             <a:endParaRPr lang="en-US" sz="3600" dirty="0"/>
           </a:p>
@@ -9265,7 +11647,7 @@
           <p:nvPr/>
         </p:nvPicPr>
         <p:blipFill>
-          <a:blip r:embed="rId3"/>
+          <a:blip r:embed="rId2"/>
           <a:stretch>
             <a:fillRect/>
           </a:stretch>
@@ -9324,7 +11706,7 @@
                 <a:ea typeface="Calibri" pitchFamily="34" charset="-122"/>
                 <a:cs typeface="Calibri" pitchFamily="34" charset="-120"/>
               </a:rPr>
-              <a:t>Evidence was used in the discussion</a:t>
+              <a:t>Early Warning Signals Are Missed  ·  2 decision points</a:t>
             </a:r>
             <a:endParaRPr lang="en-US" sz="2600" dirty="0"/>
           </a:p>
@@ -9332,13 +11714,13 @@
       </p:sp>
       <p:sp>
         <p:nvSpPr>
-          <p:cNvPr id="9" name="Shape 5"/>
+          <p:cNvPr id="6" name="Shape 3"/>
           <p:cNvSpPr/>
           <p:nvPr/>
         </p:nvSpPr>
         <p:spPr>
           <a:xfrm>
-            <a:off x="548640" y="3323235"/>
+            <a:off x="548640" y="3023235"/>
             <a:ext cx="640080" cy="640080"/>
           </a:xfrm>
           <a:prstGeom prst="ellipse">
@@ -9364,7 +11746,7 @@
       </p:sp>
       <p:pic>
         <p:nvPicPr>
-          <p:cNvPr id="10" name="Image 2" descr="preencoded.png"/>
+          <p:cNvPr id="7" name="Image 1" descr="preencoded.png"/>
           <p:cNvPicPr>
             <a:picLocks noChangeAspect="1"/>
           </p:cNvPicPr>
@@ -9378,7 +11760,7 @@
         </p:blipFill>
         <p:spPr>
           <a:xfrm>
-            <a:off x="708660" y="3483255"/>
+            <a:off x="708660" y="3183255"/>
             <a:ext cx="320040" cy="320040"/>
           </a:xfrm>
           <a:prstGeom prst="rect">
@@ -9388,13 +11770,13 @@
       </p:pic>
       <p:sp>
         <p:nvSpPr>
-          <p:cNvPr id="11" name="Text 6"/>
+          <p:cNvPr id="8" name="Text 4"/>
           <p:cNvSpPr txBox="1"/>
           <p:nvPr/>
         </p:nvSpPr>
         <p:spPr>
           <a:xfrm>
-            <a:off x="1508760" y="3031770"/>
+            <a:off x="1508760" y="2731770"/>
             <a:ext cx="10131552" cy="1223010"/>
           </a:xfrm>
           <a:prstGeom prst="rect">
@@ -9430,7 +11812,7 @@
                 <a:ea typeface="Calibri" pitchFamily="34" charset="-122"/>
                 <a:cs typeface="Calibri" pitchFamily="34" charset="-120"/>
               </a:rPr>
-              <a:t>Root cause was correctly identified</a:t>
+              <a:t>Gradual Diffusion of Accountability  ·  2 decision points</a:t>
             </a:r>
             <a:endParaRPr lang="en-US" sz="2600" dirty="0"/>
           </a:p>
@@ -9438,13 +11820,13 @@
       </p:sp>
       <p:sp>
         <p:nvSpPr>
-          <p:cNvPr id="12" name="Shape 7"/>
+          <p:cNvPr id="9" name="Shape 5"/>
           <p:cNvSpPr/>
           <p:nvPr/>
         </p:nvSpPr>
         <p:spPr>
           <a:xfrm>
-            <a:off x="548640" y="4846245"/>
+            <a:off x="548640" y="4246245"/>
             <a:ext cx="640080" cy="640080"/>
           </a:xfrm>
           <a:prstGeom prst="ellipse">
@@ -9470,6 +11852,112 @@
       </p:sp>
       <p:pic>
         <p:nvPicPr>
+          <p:cNvPr id="10" name="Image 2" descr="preencoded.png"/>
+          <p:cNvPicPr>
+            <a:picLocks noChangeAspect="1"/>
+          </p:cNvPicPr>
+          <p:nvPr/>
+        </p:nvPicPr>
+        <p:blipFill>
+          <a:blip r:embed="rId4"/>
+          <a:stretch>
+            <a:fillRect/>
+          </a:stretch>
+        </p:blipFill>
+        <p:spPr>
+          <a:xfrm>
+            <a:off x="708660" y="4406265"/>
+            <a:ext cx="320040" cy="320040"/>
+          </a:xfrm>
+          <a:prstGeom prst="rect">
+            <a:avLst/>
+          </a:prstGeom>
+        </p:spPr>
+      </p:pic>
+      <p:sp>
+        <p:nvSpPr>
+          <p:cNvPr id="11" name="Text 6"/>
+          <p:cNvSpPr txBox="1"/>
+          <p:nvPr/>
+        </p:nvSpPr>
+        <p:spPr>
+          <a:xfrm>
+            <a:off x="1508760" y="3954780"/>
+            <a:ext cx="10131552" cy="1223010"/>
+          </a:xfrm>
+          <a:prstGeom prst="rect">
+            <a:avLst/>
+          </a:prstGeom>
+          <a:noFill/>
+          <a:ln/>
+        </p:spPr>
+        <p:txBody>
+          <a:bodyPr wrap="square" lIns="0" tIns="0" rIns="0" bIns="0" rtlCol="0" anchor="ctr"/>
+          <a:lstStyle/>
+          <a:p>
+            <a:pPr marL="0" indent="0">
+              <a:buNone/>
+            </a:pPr>
+            <a:r>
+              <a:rPr lang="en-US" sz="2600" b="1" dirty="0">
+                <a:solidFill>
+                  <a:srgbClr val="1A5C2C"/>
+                </a:solidFill>
+                <a:latin typeface="Cambria" pitchFamily="34" charset="0"/>
+                <a:ea typeface="Cambria" pitchFamily="34" charset="-122"/>
+                <a:cs typeface="Cambria" pitchFamily="34" charset="-120"/>
+              </a:rPr>
+              <a:t>03  </a:t>
+            </a:r>
+            <a:r>
+              <a:rPr lang="en-US" sz="2600" dirty="0">
+                <a:solidFill>
+                  <a:srgbClr val="1F2A22"/>
+                </a:solidFill>
+                <a:latin typeface="Calibri" pitchFamily="34" charset="0"/>
+                <a:ea typeface="Calibri" pitchFamily="34" charset="-122"/>
+                <a:cs typeface="Calibri" pitchFamily="34" charset="-120"/>
+              </a:rPr>
+              <a:t>Loss of Organisational Learning  ·  2 decision points</a:t>
+            </a:r>
+            <a:endParaRPr lang="en-US" sz="2600" dirty="0"/>
+          </a:p>
+        </p:txBody>
+      </p:sp>
+      <p:sp>
+        <p:nvSpPr>
+          <p:cNvPr id="12" name="Shape 7"/>
+          <p:cNvSpPr/>
+          <p:nvPr/>
+        </p:nvSpPr>
+        <p:spPr>
+          <a:xfrm>
+            <a:off x="548640" y="5469255"/>
+            <a:ext cx="640080" cy="640080"/>
+          </a:xfrm>
+          <a:prstGeom prst="ellipse">
+            <a:avLst/>
+          </a:prstGeom>
+          <a:solidFill>
+            <a:srgbClr val="1A5C2C"/>
+          </a:solidFill>
+          <a:ln w="12700">
+            <a:solidFill>
+              <a:srgbClr val="1A5C2C"/>
+            </a:solidFill>
+            <a:prstDash val="solid"/>
+          </a:ln>
+        </p:spPr>
+        <p:txBody>
+          <a:bodyPr/>
+          <a:lstStyle/>
+          <a:p>
+            <a:endParaRPr lang="en-ZA"/>
+          </a:p>
+        </p:txBody>
+      </p:sp>
+      <p:pic>
+        <p:nvPicPr>
           <p:cNvPr id="13" name="Image 3" descr="preencoded.png"/>
           <p:cNvPicPr>
             <a:picLocks noChangeAspect="1"/>
@@ -9477,14 +11965,14 @@
           <p:nvPr/>
         </p:nvPicPr>
         <p:blipFill>
-          <a:blip r:embed="rId6"/>
+          <a:blip r:embed="rId3"/>
           <a:stretch>
             <a:fillRect/>
           </a:stretch>
         </p:blipFill>
         <p:spPr>
           <a:xfrm>
-            <a:off x="708660" y="5006265"/>
+            <a:off x="708660" y="5629275"/>
             <a:ext cx="320040" cy="320040"/>
           </a:xfrm>
           <a:prstGeom prst="rect">
@@ -9500,7 +11988,7 @@
         </p:nvSpPr>
         <p:spPr>
           <a:xfrm>
-            <a:off x="1508760" y="4554780"/>
+            <a:off x="1508760" y="5177790"/>
             <a:ext cx="10131552" cy="1223010"/>
           </a:xfrm>
           <a:prstGeom prst="rect">
@@ -9525,7 +12013,7 @@
                 <a:ea typeface="Cambria" pitchFamily="34" charset="-122"/>
                 <a:cs typeface="Cambria" pitchFamily="34" charset="-120"/>
               </a:rPr>
-              <a:t>03  </a:t>
+              <a:t>04  </a:t>
             </a:r>
             <a:r>
               <a:rPr lang="en-US" sz="2600" dirty="0">
@@ -9536,7 +12024,7 @@
                 <a:ea typeface="Calibri" pitchFamily="34" charset="-122"/>
                 <a:cs typeface="Calibri" pitchFamily="34" charset="-120"/>
               </a:rPr>
-              <a:t>Clear corrective actions were agreed</a:t>
+              <a:t>Erodes Leadership Credibility  ·  2 decision points</a:t>
             </a:r>
             <a:endParaRPr lang="en-US" sz="2600" dirty="0"/>
           </a:p>
@@ -9601,7 +12089,7 @@
                 <a:ea typeface="Cambria" pitchFamily="34" charset="-122"/>
                 <a:cs typeface="Cambria" pitchFamily="34" charset="-120"/>
               </a:rPr>
-              <a:t>Section 1 Reflections</a:t>
+              <a:t>Section 2 Reflections</a:t>
             </a:r>
             <a:endParaRPr lang="en-US" sz="3600" dirty="0"/>
           </a:p>
@@ -9609,14 +12097,14 @@
       </p:sp>
       <p:pic>
         <p:nvPicPr>
-          <p:cNvPr id="3" name="Reflection 1.1" descr="ref_1.1.png"/>
+          <p:cNvPr id="3" name="Reflection 2.1" descr="ref_2.1.png"/>
           <p:cNvPicPr>
             <a:picLocks noChangeAspect="1"/>
           </p:cNvPicPr>
           <p:nvPr/>
         </p:nvPicPr>
         <p:blipFill>
-          <a:blip r:embed="rId6"/>
+          <a:blip r:embed="rId8"/>
           <a:stretch>
             <a:fillRect/>
           </a:stretch>
@@ -9624,7 +12112,7 @@
         <p:spPr>
           <a:xfrm>
             <a:off x="1691640" y="1463040"/>
-            <a:ext cx="10058400" cy="1311339"/>
+            <a:ext cx="10058400" cy="2003034"/>
           </a:xfrm>
           <a:prstGeom prst="rect">
             <a:avLst/>
@@ -9633,13 +12121,13 @@
       </p:pic>
       <p:sp>
         <p:nvSpPr>
-          <p:cNvPr id="4" name="Part 1.1"/>
+          <p:cNvPr id="4" name="Part 2.1"/>
           <p:cNvSpPr/>
           <p:nvPr/>
         </p:nvSpPr>
         <p:spPr>
           <a:xfrm>
-            <a:off x="548640" y="1684369"/>
+            <a:off x="548640" y="2030216"/>
             <a:ext cx="868680" cy="868680"/>
           </a:xfrm>
           <a:prstGeom prst="ellipse">
@@ -9667,1819 +12155,8 @@
                 </a:solidFill>
                 <a:latin typeface="Calibri"/>
               </a:rPr>
-              <a:t>1.1</a:t>
-            </a:r>
-          </a:p>
-        </p:txBody>
-      </p:sp>
-      <p:pic>
-        <p:nvPicPr>
-          <p:cNvPr id="5" name="Reflection 1.4" descr="ref_1.4.png"/>
-          <p:cNvPicPr>
-            <a:picLocks noChangeAspect="1"/>
-          </p:cNvPicPr>
-          <p:nvPr/>
-        </p:nvPicPr>
-        <p:blipFill>
-          <a:blip r:embed="rId7"/>
-          <a:stretch>
-            <a:fillRect/>
-          </a:stretch>
-        </p:blipFill>
-        <p:spPr>
-          <a:xfrm>
-            <a:off x="1691640" y="2975546"/>
-            <a:ext cx="10058400" cy="1311339"/>
-          </a:xfrm>
-          <a:prstGeom prst="rect">
-            <a:avLst/>
-          </a:prstGeom>
-        </p:spPr>
-      </p:pic>
-      <p:sp>
-        <p:nvSpPr>
-          <p:cNvPr id="6" name="Part 1.4"/>
-          <p:cNvSpPr/>
-          <p:nvPr/>
-        </p:nvSpPr>
-        <p:spPr>
-          <a:xfrm>
-            <a:off x="548640" y="3196875"/>
-            <a:ext cx="868680" cy="868680"/>
-          </a:xfrm>
-          <a:prstGeom prst="ellipse">
-            <a:avLst/>
-          </a:prstGeom>
-          <a:solidFill>
-            <a:srgbClr val="C6A24C"/>
-          </a:solidFill>
-          <a:ln>
-            <a:solidFill>
-              <a:srgbClr val="C6A24C"/>
-            </a:solidFill>
-          </a:ln>
-          <a:effectLst/>
-        </p:spPr>
-        <p:txBody>
-          <a:bodyPr wrap="none" lIns="0" tIns="0" rIns="0" bIns="0" rtlCol="0" anchor="ctr"/>
-          <a:lstStyle/>
-          <a:p>
-            <a:pPr algn="ctr"/>
-            <a:r>
-              <a:rPr lang="en-GB" sz="2400" b="1">
-                <a:solidFill>
-                  <a:srgbClr val="FFFFFF"/>
-                </a:solidFill>
-                <a:latin typeface="Calibri"/>
-              </a:rPr>
-              <a:t>1.4</a:t>
-            </a:r>
-          </a:p>
-        </p:txBody>
-      </p:sp>
-    </p:spTree>
-  </p:cSld>
-  <p:clrMapOvr>
-    <a:masterClrMapping/>
-  </p:clrMapOvr>
-</p:sld>
-</file>
-
-<file path=ppt/slides/slide25.xml><?xml version="1.0" encoding="utf-8"?>
-<p:sld xmlns:a="http://schemas.openxmlformats.org/drawingml/2006/main" xmlns:p="http://schemas.openxmlformats.org/presentationml/2006/main" xmlns:r="http://schemas.openxmlformats.org/officeDocument/2006/relationships">
-  <p:cSld>
-    <p:bg>
-      <p:bgPr>
-        <a:solidFill>
-          <a:srgbClr val="FFFFFF"/>
-        </a:solidFill>
-        <a:effectLst/>
-      </p:bgPr>
-    </p:bg>
-    <p:spTree>
-      <p:nvGrpSpPr>
-        <p:cNvPr id="1" name=""/>
-        <p:cNvGrpSpPr/>
-        <p:nvPr/>
-      </p:nvGrpSpPr>
-      <p:grpSpPr/>
-      <p:sp>
-        <p:nvSpPr>
-          <p:cNvPr id="2" name="Text 0"/>
-          <p:cNvSpPr txBox="1"/>
-          <p:nvPr/>
-        </p:nvSpPr>
-        <p:spPr>
-          <a:xfrm>
-            <a:off x="548640" y="411480"/>
-            <a:ext cx="11064240" cy="868680"/>
-          </a:xfrm>
-          <a:prstGeom prst="rect">
-            <a:avLst/>
-          </a:prstGeom>
-          <a:noFill/>
-          <a:ln/>
-        </p:spPr>
-        <p:txBody>
-          <a:bodyPr wrap="square" lIns="0" tIns="0" rIns="0" bIns="0" rtlCol="0" anchor="ctr"/>
-          <a:lstStyle/>
-          <a:p>
-            <a:pPr marL="0" indent="0">
-              <a:buNone/>
-            </a:pPr>
-            <a:r>
-              <a:rPr lang="en-US" sz="3600" b="1" dirty="0">
-                <a:solidFill>
-                  <a:srgbClr val="1A5C2C"/>
-                </a:solidFill>
-                <a:latin typeface="Cambria" pitchFamily="34" charset="0"/>
-                <a:ea typeface="Cambria" pitchFamily="34" charset="-122"/>
-                <a:cs typeface="Cambria" pitchFamily="34" charset="-120"/>
-              </a:rPr>
-              <a:t>3.2 · The CXO performance gap contributors</a:t>
-            </a:r>
-            <a:endParaRPr lang="en-US" sz="3600" dirty="0"/>
-          </a:p>
-        </p:txBody>
-      </p:sp>
-      <p:sp>
-        <p:nvSpPr>
-          <p:cNvPr id="3" name="Shape 1"/>
-          <p:cNvSpPr/>
-          <p:nvPr/>
-        </p:nvSpPr>
-        <p:spPr>
-          <a:xfrm>
-            <a:off x="548640" y="1508760"/>
-            <a:ext cx="5408676" cy="2286000"/>
-          </a:xfrm>
-          <a:prstGeom prst="roundRect">
-            <a:avLst>
-              <a:gd name="adj" fmla="val 4000"/>
-            </a:avLst>
-          </a:prstGeom>
-          <a:solidFill>
-            <a:srgbClr val="EEF4EF"/>
-          </a:solidFill>
-          <a:ln w="12700">
-            <a:solidFill>
-              <a:srgbClr val="EEF4EF"/>
-            </a:solidFill>
-            <a:prstDash val="solid"/>
-          </a:ln>
-        </p:spPr>
-        <p:txBody>
-          <a:bodyPr/>
-          <a:lstStyle/>
-          <a:p>
-            <a:endParaRPr lang="en-ZA"/>
-          </a:p>
-        </p:txBody>
-      </p:sp>
-      <p:sp>
-        <p:nvSpPr>
-          <p:cNvPr id="4" name="Shape 2"/>
-          <p:cNvSpPr/>
-          <p:nvPr/>
-        </p:nvSpPr>
-        <p:spPr>
-          <a:xfrm>
-            <a:off x="777240" y="1737360"/>
-            <a:ext cx="548640" cy="548640"/>
-          </a:xfrm>
-          <a:prstGeom prst="ellipse">
-            <a:avLst/>
-          </a:prstGeom>
-          <a:solidFill>
-            <a:srgbClr val="1A5C2C"/>
-          </a:solidFill>
-          <a:ln w="12700">
-            <a:solidFill>
-              <a:srgbClr val="1A5C2C"/>
-            </a:solidFill>
-            <a:prstDash val="solid"/>
-          </a:ln>
-        </p:spPr>
-        <p:txBody>
-          <a:bodyPr/>
-          <a:lstStyle/>
-          <a:p>
-            <a:endParaRPr lang="en-ZA"/>
-          </a:p>
-        </p:txBody>
-      </p:sp>
-      <p:pic>
-        <p:nvPicPr>
-          <p:cNvPr id="5" name="Image 0" descr="preencoded.png"/>
-          <p:cNvPicPr>
-            <a:picLocks noChangeAspect="1"/>
-          </p:cNvPicPr>
-          <p:nvPr/>
-        </p:nvPicPr>
-        <p:blipFill>
-          <a:blip r:embed="rId2"/>
-          <a:stretch>
-            <a:fillRect/>
-          </a:stretch>
-        </p:blipFill>
-        <p:spPr>
-          <a:xfrm>
-            <a:off x="914400" y="1874520"/>
-            <a:ext cx="274320" cy="274320"/>
-          </a:xfrm>
-          <a:prstGeom prst="rect">
-            <a:avLst/>
-          </a:prstGeom>
-        </p:spPr>
-      </p:pic>
-      <p:sp>
-        <p:nvSpPr>
-          <p:cNvPr id="6" name="Text 3"/>
-          <p:cNvSpPr txBox="1"/>
-          <p:nvPr/>
-        </p:nvSpPr>
-        <p:spPr>
-          <a:xfrm>
-            <a:off x="1508760" y="1691640"/>
-            <a:ext cx="4219956" cy="923544"/>
-          </a:xfrm>
-          <a:prstGeom prst="rect">
-            <a:avLst/>
-          </a:prstGeom>
-          <a:noFill/>
-          <a:ln/>
-        </p:spPr>
-        <p:txBody>
-          <a:bodyPr wrap="square" lIns="0" tIns="0" rIns="0" bIns="0" rtlCol="0" anchor="ctr"/>
-          <a:lstStyle/>
-          <a:p>
-            <a:pPr marL="0" indent="0">
-              <a:buNone/>
-            </a:pPr>
-            <a:r>
-              <a:rPr lang="en-US" sz="2600" b="1" dirty="0">
-                <a:solidFill>
-                  <a:srgbClr val="1A5C2C"/>
-                </a:solidFill>
-                <a:latin typeface="Cambria" pitchFamily="34" charset="0"/>
-                <a:ea typeface="Cambria" pitchFamily="34" charset="-122"/>
-                <a:cs typeface="Cambria" pitchFamily="34" charset="-120"/>
-              </a:rPr>
-              <a:t>Gap 01 · Horizontal Coordination</a:t>
-            </a:r>
-            <a:endParaRPr lang="en-US" sz="2600" dirty="0"/>
-          </a:p>
-        </p:txBody>
-      </p:sp>
-      <p:sp>
-        <p:nvSpPr>
-          <p:cNvPr id="7" name="Text 4"/>
-          <p:cNvSpPr txBox="1"/>
-          <p:nvPr/>
-        </p:nvSpPr>
-        <p:spPr>
-          <a:xfrm>
-            <a:off x="777240" y="2752344"/>
-            <a:ext cx="4951476" cy="905256"/>
-          </a:xfrm>
-          <a:prstGeom prst="rect">
-            <a:avLst/>
-          </a:prstGeom>
-          <a:noFill/>
-          <a:ln/>
-        </p:spPr>
-        <p:txBody>
-          <a:bodyPr wrap="square" lIns="0" tIns="0" rIns="0" bIns="0" rtlCol="0" anchor="t"/>
-          <a:lstStyle/>
-          <a:p>
-            <a:pPr marL="0" indent="0">
-              <a:buNone/>
-            </a:pPr>
-            <a:r>
-              <a:rPr lang="en-US" sz="2400" dirty="0">
-                <a:solidFill>
-                  <a:srgbClr val="1F2A22"/>
-                </a:solidFill>
-                <a:latin typeface="Calibri" pitchFamily="34" charset="0"/>
-                <a:ea typeface="Calibri" pitchFamily="34" charset="-122"/>
-                <a:cs typeface="Calibri" pitchFamily="34" charset="-120"/>
-              </a:rPr>
-              <a:t>COO · CTO/CIO · CMO · CCO · CPO</a:t>
-            </a:r>
-            <a:endParaRPr lang="en-US" sz="2400" dirty="0"/>
-          </a:p>
-        </p:txBody>
-      </p:sp>
-      <p:sp>
-        <p:nvSpPr>
-          <p:cNvPr id="8" name="Shape 5"/>
-          <p:cNvSpPr/>
-          <p:nvPr/>
-        </p:nvSpPr>
-        <p:spPr>
-          <a:xfrm>
-            <a:off x="6231636" y="1508760"/>
-            <a:ext cx="5408676" cy="2286000"/>
-          </a:xfrm>
-          <a:prstGeom prst="roundRect">
-            <a:avLst>
-              <a:gd name="adj" fmla="val 4000"/>
-            </a:avLst>
-          </a:prstGeom>
-          <a:solidFill>
-            <a:srgbClr val="EEF4EF"/>
-          </a:solidFill>
-          <a:ln w="12700">
-            <a:solidFill>
-              <a:srgbClr val="EEF4EF"/>
-            </a:solidFill>
-            <a:prstDash val="solid"/>
-          </a:ln>
-        </p:spPr>
-        <p:txBody>
-          <a:bodyPr/>
-          <a:lstStyle/>
-          <a:p>
-            <a:endParaRPr lang="en-ZA"/>
-          </a:p>
-        </p:txBody>
-      </p:sp>
-      <p:sp>
-        <p:nvSpPr>
-          <p:cNvPr id="9" name="Shape 6"/>
-          <p:cNvSpPr/>
-          <p:nvPr/>
-        </p:nvSpPr>
-        <p:spPr>
-          <a:xfrm>
-            <a:off x="6460236" y="1737360"/>
-            <a:ext cx="548640" cy="548640"/>
-          </a:xfrm>
-          <a:prstGeom prst="ellipse">
-            <a:avLst/>
-          </a:prstGeom>
-          <a:solidFill>
-            <a:srgbClr val="1A5C2C"/>
-          </a:solidFill>
-          <a:ln w="12700">
-            <a:solidFill>
-              <a:srgbClr val="1A5C2C"/>
-            </a:solidFill>
-            <a:prstDash val="solid"/>
-          </a:ln>
-        </p:spPr>
-        <p:txBody>
-          <a:bodyPr/>
-          <a:lstStyle/>
-          <a:p>
-            <a:endParaRPr lang="en-ZA"/>
-          </a:p>
-        </p:txBody>
-      </p:sp>
-      <p:pic>
-        <p:nvPicPr>
-          <p:cNvPr id="10" name="Image 1" descr="preencoded.png"/>
-          <p:cNvPicPr>
-            <a:picLocks noChangeAspect="1"/>
-          </p:cNvPicPr>
-          <p:nvPr/>
-        </p:nvPicPr>
-        <p:blipFill>
-          <a:blip r:embed="rId5"/>
-          <a:stretch>
-            <a:fillRect/>
-          </a:stretch>
-        </p:blipFill>
-        <p:spPr>
-          <a:xfrm>
-            <a:off x="6597396" y="1874520"/>
-            <a:ext cx="274320" cy="274320"/>
-          </a:xfrm>
-          <a:prstGeom prst="rect">
-            <a:avLst/>
-          </a:prstGeom>
-        </p:spPr>
-      </p:pic>
-      <p:sp>
-        <p:nvSpPr>
-          <p:cNvPr id="11" name="Text 7"/>
-          <p:cNvSpPr txBox="1"/>
-          <p:nvPr/>
-        </p:nvSpPr>
-        <p:spPr>
-          <a:xfrm>
-            <a:off x="7191756" y="1691640"/>
-            <a:ext cx="4219956" cy="923544"/>
-          </a:xfrm>
-          <a:prstGeom prst="rect">
-            <a:avLst/>
-          </a:prstGeom>
-          <a:noFill/>
-          <a:ln/>
-        </p:spPr>
-        <p:txBody>
-          <a:bodyPr wrap="square" lIns="0" tIns="0" rIns="0" bIns="0" rtlCol="0" anchor="ctr"/>
-          <a:lstStyle/>
-          <a:p>
-            <a:pPr marL="0" indent="0">
-              <a:buNone/>
-            </a:pPr>
-            <a:r>
-              <a:rPr lang="en-US" sz="2600" b="1" dirty="0">
-                <a:solidFill>
-                  <a:srgbClr val="1A5C2C"/>
-                </a:solidFill>
-                <a:latin typeface="Cambria" pitchFamily="34" charset="0"/>
-                <a:ea typeface="Cambria" pitchFamily="34" charset="-122"/>
-                <a:cs typeface="Cambria" pitchFamily="34" charset="-120"/>
-              </a:rPr>
-              <a:t>Gap 02 · Evidence Quality</a:t>
-            </a:r>
-            <a:endParaRPr lang="en-US" sz="2600" dirty="0"/>
-          </a:p>
-        </p:txBody>
-      </p:sp>
-      <p:sp>
-        <p:nvSpPr>
-          <p:cNvPr id="12" name="Text 8"/>
-          <p:cNvSpPr txBox="1"/>
-          <p:nvPr/>
-        </p:nvSpPr>
-        <p:spPr>
-          <a:xfrm>
-            <a:off x="6460236" y="2752344"/>
-            <a:ext cx="4951476" cy="905256"/>
-          </a:xfrm>
-          <a:prstGeom prst="rect">
-            <a:avLst/>
-          </a:prstGeom>
-          <a:noFill/>
-          <a:ln/>
-        </p:spPr>
-        <p:txBody>
-          <a:bodyPr wrap="square" lIns="0" tIns="0" rIns="0" bIns="0" rtlCol="0" anchor="t"/>
-          <a:lstStyle/>
-          <a:p>
-            <a:pPr marL="0" indent="0">
-              <a:buNone/>
-            </a:pPr>
-            <a:r>
-              <a:rPr lang="en-US" sz="2400" dirty="0">
-                <a:solidFill>
-                  <a:srgbClr val="1F2A22"/>
-                </a:solidFill>
-                <a:latin typeface="Calibri" pitchFamily="34" charset="0"/>
-                <a:ea typeface="Calibri" pitchFamily="34" charset="-122"/>
-                <a:cs typeface="Calibri" pitchFamily="34" charset="-120"/>
-              </a:rPr>
-              <a:t>CFO · CHRO · CTO/CIO · CMO · CPO</a:t>
-            </a:r>
-            <a:endParaRPr lang="en-US" sz="2400" dirty="0"/>
-          </a:p>
-        </p:txBody>
-      </p:sp>
-      <p:sp>
-        <p:nvSpPr>
-          <p:cNvPr id="13" name="Shape 9"/>
-          <p:cNvSpPr/>
-          <p:nvPr/>
-        </p:nvSpPr>
-        <p:spPr>
-          <a:xfrm>
-            <a:off x="548640" y="4069080"/>
-            <a:ext cx="5408676" cy="2286000"/>
-          </a:xfrm>
-          <a:prstGeom prst="roundRect">
-            <a:avLst>
-              <a:gd name="adj" fmla="val 4000"/>
-            </a:avLst>
-          </a:prstGeom>
-          <a:solidFill>
-            <a:srgbClr val="EEF4EF"/>
-          </a:solidFill>
-          <a:ln w="12700">
-            <a:solidFill>
-              <a:srgbClr val="EEF4EF"/>
-            </a:solidFill>
-            <a:prstDash val="solid"/>
-          </a:ln>
-        </p:spPr>
-        <p:txBody>
-          <a:bodyPr/>
-          <a:lstStyle/>
-          <a:p>
-            <a:endParaRPr lang="en-ZA"/>
-          </a:p>
-        </p:txBody>
-      </p:sp>
-      <p:sp>
-        <p:nvSpPr>
-          <p:cNvPr id="14" name="Shape 10"/>
-          <p:cNvSpPr/>
-          <p:nvPr/>
-        </p:nvSpPr>
-        <p:spPr>
-          <a:xfrm>
-            <a:off x="777240" y="4297680"/>
-            <a:ext cx="548640" cy="548640"/>
-          </a:xfrm>
-          <a:prstGeom prst="ellipse">
-            <a:avLst/>
-          </a:prstGeom>
-          <a:solidFill>
-            <a:srgbClr val="1A5C2C"/>
-          </a:solidFill>
-          <a:ln w="12700">
-            <a:solidFill>
-              <a:srgbClr val="1A5C2C"/>
-            </a:solidFill>
-            <a:prstDash val="solid"/>
-          </a:ln>
-        </p:spPr>
-        <p:txBody>
-          <a:bodyPr/>
-          <a:lstStyle/>
-          <a:p>
-            <a:endParaRPr lang="en-ZA"/>
-          </a:p>
-        </p:txBody>
-      </p:sp>
-      <p:pic>
-        <p:nvPicPr>
-          <p:cNvPr id="15" name="Image 2" descr="preencoded.png"/>
-          <p:cNvPicPr>
-            <a:picLocks noChangeAspect="1"/>
-          </p:cNvPicPr>
-          <p:nvPr/>
-        </p:nvPicPr>
-        <p:blipFill>
-          <a:blip r:embed="rId4"/>
-          <a:stretch>
-            <a:fillRect/>
-          </a:stretch>
-        </p:blipFill>
-        <p:spPr>
-          <a:xfrm>
-            <a:off x="914400" y="4434840"/>
-            <a:ext cx="274320" cy="274320"/>
-          </a:xfrm>
-          <a:prstGeom prst="rect">
-            <a:avLst/>
-          </a:prstGeom>
-        </p:spPr>
-      </p:pic>
-      <p:sp>
-        <p:nvSpPr>
-          <p:cNvPr id="16" name="Text 11"/>
-          <p:cNvSpPr txBox="1"/>
-          <p:nvPr/>
-        </p:nvSpPr>
-        <p:spPr>
-          <a:xfrm>
-            <a:off x="1508760" y="4251960"/>
-            <a:ext cx="4219956" cy="923544"/>
-          </a:xfrm>
-          <a:prstGeom prst="rect">
-            <a:avLst/>
-          </a:prstGeom>
-          <a:noFill/>
-          <a:ln/>
-        </p:spPr>
-        <p:txBody>
-          <a:bodyPr wrap="square" lIns="0" tIns="0" rIns="0" bIns="0" rtlCol="0" anchor="ctr"/>
-          <a:lstStyle/>
-          <a:p>
-            <a:pPr marL="0" indent="0">
-              <a:buNone/>
-            </a:pPr>
-            <a:r>
-              <a:rPr lang="en-US" sz="2600" b="1" dirty="0">
-                <a:solidFill>
-                  <a:srgbClr val="1A5C2C"/>
-                </a:solidFill>
-                <a:latin typeface="Cambria" pitchFamily="34" charset="0"/>
-                <a:ea typeface="Cambria" pitchFamily="34" charset="-122"/>
-                <a:cs typeface="Cambria" pitchFamily="34" charset="-120"/>
-              </a:rPr>
-              <a:t>Gap 03 · Review Rhythm Breakdown</a:t>
-            </a:r>
-            <a:endParaRPr lang="en-US" sz="2600" dirty="0"/>
-          </a:p>
-        </p:txBody>
-      </p:sp>
-      <p:sp>
-        <p:nvSpPr>
-          <p:cNvPr id="17" name="Text 12"/>
-          <p:cNvSpPr txBox="1"/>
-          <p:nvPr/>
-        </p:nvSpPr>
-        <p:spPr>
-          <a:xfrm>
-            <a:off x="777240" y="5312664"/>
-            <a:ext cx="4951476" cy="905256"/>
-          </a:xfrm>
-          <a:prstGeom prst="rect">
-            <a:avLst/>
-          </a:prstGeom>
-          <a:noFill/>
-          <a:ln/>
-        </p:spPr>
-        <p:txBody>
-          <a:bodyPr wrap="square" lIns="0" tIns="0" rIns="0" bIns="0" rtlCol="0" anchor="t"/>
-          <a:lstStyle/>
-          <a:p>
-            <a:pPr marL="0" indent="0">
-              <a:buNone/>
-            </a:pPr>
-            <a:r>
-              <a:rPr lang="en-US" sz="2400" dirty="0">
-                <a:solidFill>
-                  <a:srgbClr val="1F2A22"/>
-                </a:solidFill>
-                <a:latin typeface="Calibri" pitchFamily="34" charset="0"/>
-                <a:ea typeface="Calibri" pitchFamily="34" charset="-122"/>
-                <a:cs typeface="Calibri" pitchFamily="34" charset="-120"/>
-              </a:rPr>
-              <a:t>CEO · CHRO · CRO · CSO</a:t>
-            </a:r>
-            <a:endParaRPr lang="en-US" sz="2400" dirty="0"/>
-          </a:p>
-        </p:txBody>
-      </p:sp>
-      <p:sp>
-        <p:nvSpPr>
-          <p:cNvPr id="18" name="Shape 13"/>
-          <p:cNvSpPr/>
-          <p:nvPr/>
-        </p:nvSpPr>
-        <p:spPr>
-          <a:xfrm>
-            <a:off x="6231636" y="4069080"/>
-            <a:ext cx="5408676" cy="2286000"/>
-          </a:xfrm>
-          <a:prstGeom prst="roundRect">
-            <a:avLst>
-              <a:gd name="adj" fmla="val 4000"/>
-            </a:avLst>
-          </a:prstGeom>
-          <a:solidFill>
-            <a:srgbClr val="EEF4EF"/>
-          </a:solidFill>
-          <a:ln w="12700">
-            <a:solidFill>
-              <a:srgbClr val="EEF4EF"/>
-            </a:solidFill>
-            <a:prstDash val="solid"/>
-          </a:ln>
-        </p:spPr>
-        <p:txBody>
-          <a:bodyPr/>
-          <a:lstStyle/>
-          <a:p>
-            <a:endParaRPr lang="en-ZA"/>
-          </a:p>
-        </p:txBody>
-      </p:sp>
-      <p:sp>
-        <p:nvSpPr>
-          <p:cNvPr id="19" name="Shape 14"/>
-          <p:cNvSpPr/>
-          <p:nvPr/>
-        </p:nvSpPr>
-        <p:spPr>
-          <a:xfrm>
-            <a:off x="6460236" y="4297680"/>
-            <a:ext cx="548640" cy="548640"/>
-          </a:xfrm>
-          <a:prstGeom prst="ellipse">
-            <a:avLst/>
-          </a:prstGeom>
-          <a:solidFill>
-            <a:srgbClr val="1A5C2C"/>
-          </a:solidFill>
-          <a:ln w="12700">
-            <a:solidFill>
-              <a:srgbClr val="1A5C2C"/>
-            </a:solidFill>
-            <a:prstDash val="solid"/>
-          </a:ln>
-        </p:spPr>
-        <p:txBody>
-          <a:bodyPr/>
-          <a:lstStyle/>
-          <a:p>
-            <a:endParaRPr lang="en-ZA"/>
-          </a:p>
-        </p:txBody>
-      </p:sp>
-      <p:pic>
-        <p:nvPicPr>
-          <p:cNvPr id="20" name="Image 3" descr="preencoded.png"/>
-          <p:cNvPicPr>
-            <a:picLocks noChangeAspect="1"/>
-          </p:cNvPicPr>
-          <p:nvPr/>
-        </p:nvPicPr>
-        <p:blipFill>
-          <a:blip r:embed="rId3"/>
-          <a:stretch>
-            <a:fillRect/>
-          </a:stretch>
-        </p:blipFill>
-        <p:spPr>
-          <a:xfrm>
-            <a:off x="6597396" y="4434840"/>
-            <a:ext cx="274320" cy="274320"/>
-          </a:xfrm>
-          <a:prstGeom prst="rect">
-            <a:avLst/>
-          </a:prstGeom>
-        </p:spPr>
-      </p:pic>
-      <p:sp>
-        <p:nvSpPr>
-          <p:cNvPr id="21" name="Text 15"/>
-          <p:cNvSpPr txBox="1"/>
-          <p:nvPr/>
-        </p:nvSpPr>
-        <p:spPr>
-          <a:xfrm>
-            <a:off x="7191756" y="4251960"/>
-            <a:ext cx="4219956" cy="923544"/>
-          </a:xfrm>
-          <a:prstGeom prst="rect">
-            <a:avLst/>
-          </a:prstGeom>
-          <a:noFill/>
-          <a:ln/>
-        </p:spPr>
-        <p:txBody>
-          <a:bodyPr wrap="square" lIns="0" tIns="0" rIns="0" bIns="0" rtlCol="0" anchor="ctr"/>
-          <a:lstStyle/>
-          <a:p>
-            <a:pPr marL="0" indent="0">
-              <a:buNone/>
-            </a:pPr>
-            <a:r>
-              <a:rPr lang="en-US" sz="2600" b="1" dirty="0">
-                <a:solidFill>
-                  <a:srgbClr val="1A5C2C"/>
-                </a:solidFill>
-                <a:latin typeface="Cambria" pitchFamily="34" charset="0"/>
-                <a:ea typeface="Cambria" pitchFamily="34" charset="-122"/>
-                <a:cs typeface="Cambria" pitchFamily="34" charset="-120"/>
-              </a:rPr>
-              <a:t>Gap 04 · Learning Suppression</a:t>
-            </a:r>
-            <a:endParaRPr lang="en-US" sz="2600" dirty="0"/>
-          </a:p>
-        </p:txBody>
-      </p:sp>
-      <p:sp>
-        <p:nvSpPr>
-          <p:cNvPr id="22" name="Text 16"/>
-          <p:cNvSpPr txBox="1"/>
-          <p:nvPr/>
-        </p:nvSpPr>
-        <p:spPr>
-          <a:xfrm>
-            <a:off x="6460236" y="5312664"/>
-            <a:ext cx="4951476" cy="905256"/>
-          </a:xfrm>
-          <a:prstGeom prst="rect">
-            <a:avLst/>
-          </a:prstGeom>
-          <a:noFill/>
-          <a:ln/>
-        </p:spPr>
-        <p:txBody>
-          <a:bodyPr wrap="square" lIns="0" tIns="0" rIns="0" bIns="0" rtlCol="0" anchor="t"/>
-          <a:lstStyle/>
-          <a:p>
-            <a:pPr marL="0" indent="0">
-              <a:buNone/>
-            </a:pPr>
-            <a:r>
-              <a:rPr lang="en-US" sz="2400" dirty="0">
-                <a:solidFill>
-                  <a:srgbClr val="1F2A22"/>
-                </a:solidFill>
-                <a:latin typeface="Calibri" pitchFamily="34" charset="0"/>
-                <a:ea typeface="Calibri" pitchFamily="34" charset="-122"/>
-                <a:cs typeface="Calibri" pitchFamily="34" charset="-120"/>
-              </a:rPr>
-              <a:t>CEO · CFO · CCO · CRO · CSO</a:t>
-            </a:r>
-            <a:endParaRPr lang="en-US" sz="2400" dirty="0"/>
-          </a:p>
-        </p:txBody>
-      </p:sp>
-    </p:spTree>
-  </p:cSld>
-  <p:clrMapOvr>
-    <a:masterClrMapping/>
-  </p:clrMapOvr>
-</p:sld>
-</file>
-
-<file path=ppt/slides/slide26.xml><?xml version="1.0" encoding="utf-8"?>
-<p:sld xmlns:a="http://schemas.openxmlformats.org/drawingml/2006/main" xmlns:p="http://schemas.openxmlformats.org/presentationml/2006/main" xmlns:r="http://schemas.openxmlformats.org/officeDocument/2006/relationships">
-  <p:cSld>
-    <p:bg>
-      <p:bgPr>
-        <a:solidFill>
-          <a:srgbClr val="FFFFFF"/>
-        </a:solidFill>
-        <a:effectLst/>
-      </p:bgPr>
-    </p:bg>
-    <p:spTree>
-      <p:nvGrpSpPr>
-        <p:cNvPr id="1" name=""/>
-        <p:cNvGrpSpPr/>
-        <p:nvPr/>
-      </p:nvGrpSpPr>
-      <p:grpSpPr/>
-      <p:sp>
-        <p:nvSpPr>
-          <p:cNvPr id="2" name="Text 0"/>
-          <p:cNvSpPr txBox="1"/>
-          <p:nvPr/>
-        </p:nvSpPr>
-        <p:spPr>
-          <a:xfrm>
-            <a:off x="548640" y="411480"/>
-            <a:ext cx="11064240" cy="868680"/>
-          </a:xfrm>
-          <a:prstGeom prst="rect">
-            <a:avLst/>
-          </a:prstGeom>
-          <a:noFill/>
-          <a:ln/>
-        </p:spPr>
-        <p:txBody>
-          <a:bodyPr wrap="square" lIns="0" tIns="0" rIns="0" bIns="0" rtlCol="0" anchor="ctr"/>
-          <a:lstStyle/>
-          <a:p>
-            <a:pPr marL="0" indent="0">
-              <a:buNone/>
-            </a:pPr>
-            <a:r>
-              <a:rPr lang="en-US" sz="3600" b="1" dirty="0">
-                <a:solidFill>
-                  <a:srgbClr val="1A5C2C"/>
-                </a:solidFill>
-                <a:latin typeface="Cambria" pitchFamily="34" charset="0"/>
-                <a:ea typeface="Cambria" pitchFamily="34" charset="-122"/>
-                <a:cs typeface="Cambria" pitchFamily="34" charset="-120"/>
-              </a:rPr>
-              <a:t>Section 3 Reflections</a:t>
-            </a:r>
-            <a:endParaRPr lang="en-US" sz="3600" dirty="0"/>
-          </a:p>
-        </p:txBody>
-      </p:sp>
-      <p:pic>
-        <p:nvPicPr>
-          <p:cNvPr id="3" name="Reflection 3.1" descr="ref_3.1.png"/>
-          <p:cNvPicPr>
-            <a:picLocks noChangeAspect="1"/>
-          </p:cNvPicPr>
-          <p:nvPr/>
-        </p:nvPicPr>
-        <p:blipFill>
-          <a:blip r:embed="rId6"/>
-          <a:stretch>
-            <a:fillRect/>
-          </a:stretch>
-        </p:blipFill>
-        <p:spPr>
-          <a:xfrm>
-            <a:off x="1691640" y="1463040"/>
-            <a:ext cx="10058400" cy="965491"/>
-          </a:xfrm>
-          <a:prstGeom prst="rect">
-            <a:avLst/>
-          </a:prstGeom>
-        </p:spPr>
-      </p:pic>
-      <p:sp>
-        <p:nvSpPr>
-          <p:cNvPr id="4" name="Part 3.1"/>
-          <p:cNvSpPr/>
-          <p:nvPr/>
-        </p:nvSpPr>
-        <p:spPr>
-          <a:xfrm>
-            <a:off x="548640" y="1511445"/>
-            <a:ext cx="868680" cy="868680"/>
-          </a:xfrm>
-          <a:prstGeom prst="ellipse">
-            <a:avLst/>
-          </a:prstGeom>
-          <a:solidFill>
-            <a:srgbClr val="C6A24C"/>
-          </a:solidFill>
-          <a:ln>
-            <a:solidFill>
-              <a:srgbClr val="C6A24C"/>
-            </a:solidFill>
-          </a:ln>
-          <a:effectLst/>
-        </p:spPr>
-        <p:txBody>
-          <a:bodyPr wrap="none" lIns="0" tIns="0" rIns="0" bIns="0" rtlCol="0" anchor="ctr"/>
-          <a:lstStyle/>
-          <a:p>
-            <a:pPr algn="ctr"/>
-            <a:r>
-              <a:rPr lang="en-GB" sz="2400" b="1">
-                <a:solidFill>
-                  <a:srgbClr val="FFFFFF"/>
-                </a:solidFill>
-                <a:latin typeface="Calibri"/>
-              </a:rPr>
-              <a:t>3.1</a:t>
-            </a:r>
-          </a:p>
-        </p:txBody>
-      </p:sp>
-    </p:spTree>
-  </p:cSld>
-  <p:clrMapOvr>
-    <a:masterClrMapping/>
-  </p:clrMapOvr>
-</p:sld>
-</file>
-
-<file path=ppt/slides/slide27.xml><?xml version="1.0" encoding="utf-8"?>
-<p:sld xmlns:a="http://schemas.openxmlformats.org/drawingml/2006/main" xmlns:p="http://schemas.openxmlformats.org/presentationml/2006/main" xmlns:r="http://schemas.openxmlformats.org/officeDocument/2006/relationships">
-  <p:cSld>
-    <p:bg>
-      <p:bgPr>
-        <a:solidFill>
-          <a:srgbClr val="FFFFFF"/>
-        </a:solidFill>
-        <a:effectLst/>
-      </p:bgPr>
-    </p:bg>
-    <p:spTree>
-      <p:nvGrpSpPr>
-        <p:cNvPr id="1" name=""/>
-        <p:cNvGrpSpPr/>
-        <p:nvPr/>
-      </p:nvGrpSpPr>
-      <p:grpSpPr/>
-      <p:sp>
-        <p:nvSpPr>
-          <p:cNvPr id="2" name="Text 0"/>
-          <p:cNvSpPr txBox="1"/>
-          <p:nvPr/>
-        </p:nvSpPr>
-        <p:spPr>
-          <a:xfrm>
-            <a:off x="548640" y="411480"/>
-            <a:ext cx="11064240" cy="868680"/>
-          </a:xfrm>
-          <a:prstGeom prst="rect">
-            <a:avLst/>
-          </a:prstGeom>
-          <a:noFill/>
-          <a:ln/>
-        </p:spPr>
-        <p:txBody>
-          <a:bodyPr wrap="square" lIns="0" tIns="0" rIns="0" bIns="0" rtlCol="0" anchor="ctr"/>
-          <a:lstStyle/>
-          <a:p>
-            <a:pPr marL="0" indent="0">
-              <a:buNone/>
-            </a:pPr>
-            <a:r>
-              <a:rPr lang="en-US" sz="3600" b="1" dirty="0">
-                <a:solidFill>
-                  <a:srgbClr val="1A5C2C"/>
-                </a:solidFill>
-                <a:latin typeface="Cambria" pitchFamily="34" charset="0"/>
-                <a:ea typeface="Cambria" pitchFamily="34" charset="-122"/>
-                <a:cs typeface="Cambria" pitchFamily="34" charset="-120"/>
-              </a:rPr>
-              <a:t>Section 4 Reflections</a:t>
-            </a:r>
-            <a:endParaRPr lang="en-US" sz="3600" dirty="0"/>
-          </a:p>
-        </p:txBody>
-      </p:sp>
-      <p:pic>
-        <p:nvPicPr>
-          <p:cNvPr id="3" name="Reflection 4.1" descr="ref_4.1a.png"/>
-          <p:cNvPicPr>
-            <a:picLocks noChangeAspect="1"/>
-          </p:cNvPicPr>
-          <p:nvPr/>
-        </p:nvPicPr>
-        <p:blipFill>
-          <a:blip r:embed="rId6"/>
-          <a:stretch>
-            <a:fillRect/>
-          </a:stretch>
-        </p:blipFill>
-        <p:spPr>
-          <a:xfrm>
-            <a:off x="1691640" y="1463040"/>
-            <a:ext cx="10058400" cy="1357575"/>
-          </a:xfrm>
-          <a:prstGeom prst="rect">
-            <a:avLst/>
-          </a:prstGeom>
-        </p:spPr>
-      </p:pic>
-      <p:sp>
-        <p:nvSpPr>
-          <p:cNvPr id="4" name="Part 4.1"/>
-          <p:cNvSpPr/>
-          <p:nvPr/>
-        </p:nvSpPr>
-        <p:spPr>
-          <a:xfrm>
-            <a:off x="548640" y="1707487"/>
-            <a:ext cx="868680" cy="868680"/>
-          </a:xfrm>
-          <a:prstGeom prst="ellipse">
-            <a:avLst/>
-          </a:prstGeom>
-          <a:solidFill>
-            <a:srgbClr val="C6A24C"/>
-          </a:solidFill>
-          <a:ln>
-            <a:solidFill>
-              <a:srgbClr val="C6A24C"/>
-            </a:solidFill>
-          </a:ln>
-          <a:effectLst/>
-        </p:spPr>
-        <p:txBody>
-          <a:bodyPr wrap="none" lIns="0" tIns="0" rIns="0" bIns="0" rtlCol="0" anchor="ctr"/>
-          <a:lstStyle/>
-          <a:p>
-            <a:pPr algn="ctr"/>
-            <a:r>
-              <a:rPr lang="en-GB" sz="2400" b="1">
-                <a:solidFill>
-                  <a:srgbClr val="FFFFFF"/>
-                </a:solidFill>
-                <a:latin typeface="Calibri"/>
-              </a:rPr>
-              <a:t>4.1</a:t>
-            </a:r>
-          </a:p>
-        </p:txBody>
-      </p:sp>
-      <p:pic>
-        <p:nvPicPr>
-          <p:cNvPr id="5" name="Reflection 4.1" descr="ref_4.1b.png"/>
-          <p:cNvPicPr>
-            <a:picLocks noChangeAspect="1"/>
-          </p:cNvPicPr>
-          <p:nvPr/>
-        </p:nvPicPr>
-        <p:blipFill>
-          <a:blip r:embed="rId7"/>
-          <a:stretch>
-            <a:fillRect/>
-          </a:stretch>
-        </p:blipFill>
-        <p:spPr>
-          <a:xfrm>
-            <a:off x="1691640" y="3021783"/>
-            <a:ext cx="10058400" cy="1002755"/>
-          </a:xfrm>
-          <a:prstGeom prst="rect">
-            <a:avLst/>
-          </a:prstGeom>
-        </p:spPr>
-      </p:pic>
-      <p:sp>
-        <p:nvSpPr>
-          <p:cNvPr id="6" name="Part 4.1"/>
-          <p:cNvSpPr/>
-          <p:nvPr/>
-        </p:nvSpPr>
-        <p:spPr>
-          <a:xfrm>
-            <a:off x="548640" y="3088820"/>
-            <a:ext cx="868680" cy="868680"/>
-          </a:xfrm>
-          <a:prstGeom prst="ellipse">
-            <a:avLst/>
-          </a:prstGeom>
-          <a:solidFill>
-            <a:srgbClr val="C6A24C"/>
-          </a:solidFill>
-          <a:ln>
-            <a:solidFill>
-              <a:srgbClr val="C6A24C"/>
-            </a:solidFill>
-          </a:ln>
-          <a:effectLst/>
-        </p:spPr>
-        <p:txBody>
-          <a:bodyPr wrap="none" lIns="0" tIns="0" rIns="0" bIns="0" rtlCol="0" anchor="ctr"/>
-          <a:lstStyle/>
-          <a:p>
-            <a:pPr algn="ctr"/>
-            <a:r>
-              <a:rPr lang="en-GB" sz="2400" b="1">
-                <a:solidFill>
-                  <a:srgbClr val="FFFFFF"/>
-                </a:solidFill>
-                <a:latin typeface="Calibri"/>
-              </a:rPr>
-              <a:t>4.1</a:t>
-            </a:r>
-          </a:p>
-        </p:txBody>
-      </p:sp>
-    </p:spTree>
-  </p:cSld>
-  <p:clrMapOvr>
-    <a:masterClrMapping/>
-  </p:clrMapOvr>
-</p:sld>
-</file>
-
-<file path=ppt/slides/slide28.xml><?xml version="1.0" encoding="utf-8"?>
-<p:sld xmlns:a="http://schemas.openxmlformats.org/drawingml/2006/main" xmlns:p="http://schemas.openxmlformats.org/presentationml/2006/main" xmlns:r="http://schemas.openxmlformats.org/officeDocument/2006/relationships">
-  <p:cSld>
-    <p:bg>
-      <p:bgPr>
-        <a:solidFill>
-          <a:srgbClr val="FFFFFF"/>
-        </a:solidFill>
-        <a:effectLst/>
-      </p:bgPr>
-    </p:bg>
-    <p:spTree>
-      <p:nvGrpSpPr>
-        <p:cNvPr id="1" name=""/>
-        <p:cNvGrpSpPr/>
-        <p:nvPr/>
-      </p:nvGrpSpPr>
-      <p:grpSpPr/>
-      <p:sp>
-        <p:nvSpPr>
-          <p:cNvPr id="2" name="Text 0"/>
-          <p:cNvSpPr txBox="1"/>
-          <p:nvPr/>
-        </p:nvSpPr>
-        <p:spPr>
-          <a:xfrm>
-            <a:off x="548640" y="411480"/>
-            <a:ext cx="11064240" cy="868680"/>
-          </a:xfrm>
-          <a:prstGeom prst="rect">
-            <a:avLst/>
-          </a:prstGeom>
-          <a:noFill/>
-          <a:ln/>
-        </p:spPr>
-        <p:txBody>
-          <a:bodyPr wrap="square" lIns="0" tIns="0" rIns="0" bIns="0" rtlCol="0" anchor="ctr"/>
-          <a:lstStyle/>
-          <a:p>
-            <a:pPr marL="0" indent="0">
-              <a:buNone/>
-            </a:pPr>
-            <a:r>
-              <a:rPr lang="en-US" sz="3600" b="1" dirty="0">
-                <a:solidFill>
-                  <a:srgbClr val="1A5C2C"/>
-                </a:solidFill>
-                <a:latin typeface="Cambria" pitchFamily="34" charset="0"/>
-                <a:ea typeface="Cambria" pitchFamily="34" charset="-122"/>
-                <a:cs typeface="Cambria" pitchFamily="34" charset="-120"/>
-              </a:rPr>
-              <a:t>Section 4 Reflections</a:t>
-            </a:r>
-            <a:endParaRPr lang="en-US" sz="3600" dirty="0"/>
-          </a:p>
-        </p:txBody>
-      </p:sp>
-      <p:pic>
-        <p:nvPicPr>
-          <p:cNvPr id="3" name="Reflection 4.1" descr="ref_4.1c.png"/>
-          <p:cNvPicPr>
-            <a:picLocks noChangeAspect="1"/>
-          </p:cNvPicPr>
-          <p:nvPr/>
-        </p:nvPicPr>
-        <p:blipFill>
-          <a:blip r:embed="rId6"/>
-          <a:stretch>
-            <a:fillRect/>
-          </a:stretch>
-        </p:blipFill>
-        <p:spPr>
-          <a:xfrm>
-            <a:off x="1691640" y="1463040"/>
-            <a:ext cx="10058400" cy="1357575"/>
-          </a:xfrm>
-          <a:prstGeom prst="rect">
-            <a:avLst/>
-          </a:prstGeom>
-        </p:spPr>
-      </p:pic>
-      <p:sp>
-        <p:nvSpPr>
-          <p:cNvPr id="4" name="Part 4.1"/>
-          <p:cNvSpPr/>
-          <p:nvPr/>
-        </p:nvSpPr>
-        <p:spPr>
-          <a:xfrm>
-            <a:off x="548640" y="1707487"/>
-            <a:ext cx="868680" cy="868680"/>
-          </a:xfrm>
-          <a:prstGeom prst="ellipse">
-            <a:avLst/>
-          </a:prstGeom>
-          <a:solidFill>
-            <a:srgbClr val="C6A24C"/>
-          </a:solidFill>
-          <a:ln>
-            <a:solidFill>
-              <a:srgbClr val="C6A24C"/>
-            </a:solidFill>
-          </a:ln>
-          <a:effectLst/>
-        </p:spPr>
-        <p:txBody>
-          <a:bodyPr wrap="none" lIns="0" tIns="0" rIns="0" bIns="0" rtlCol="0" anchor="ctr"/>
-          <a:lstStyle/>
-          <a:p>
-            <a:pPr algn="ctr"/>
-            <a:r>
-              <a:rPr lang="en-GB" sz="2400" b="1">
-                <a:solidFill>
-                  <a:srgbClr val="FFFFFF"/>
-                </a:solidFill>
-                <a:latin typeface="Calibri"/>
-              </a:rPr>
-              <a:t>4.1</a:t>
-            </a:r>
-          </a:p>
-        </p:txBody>
-      </p:sp>
-      <p:pic>
-        <p:nvPicPr>
-          <p:cNvPr id="5" name="Reflection 4.2" descr="ref_4.2.png"/>
-          <p:cNvPicPr>
-            <a:picLocks noChangeAspect="1"/>
-          </p:cNvPicPr>
-          <p:nvPr/>
-        </p:nvPicPr>
-        <p:blipFill>
-          <a:blip r:embed="rId7"/>
-          <a:stretch>
-            <a:fillRect/>
-          </a:stretch>
-        </p:blipFill>
-        <p:spPr>
-          <a:xfrm>
-            <a:off x="1691640" y="3021783"/>
-            <a:ext cx="10058400" cy="2565036"/>
-          </a:xfrm>
-          <a:prstGeom prst="rect">
-            <a:avLst/>
-          </a:prstGeom>
-        </p:spPr>
-      </p:pic>
-      <p:sp>
-        <p:nvSpPr>
-          <p:cNvPr id="6" name="Part 4.2"/>
-          <p:cNvSpPr/>
-          <p:nvPr/>
-        </p:nvSpPr>
-        <p:spPr>
-          <a:xfrm>
-            <a:off x="548640" y="3869961"/>
-            <a:ext cx="868680" cy="868680"/>
-          </a:xfrm>
-          <a:prstGeom prst="ellipse">
-            <a:avLst/>
-          </a:prstGeom>
-          <a:solidFill>
-            <a:srgbClr val="C6A24C"/>
-          </a:solidFill>
-          <a:ln>
-            <a:solidFill>
-              <a:srgbClr val="C6A24C"/>
-            </a:solidFill>
-          </a:ln>
-          <a:effectLst/>
-        </p:spPr>
-        <p:txBody>
-          <a:bodyPr wrap="none" lIns="0" tIns="0" rIns="0" bIns="0" rtlCol="0" anchor="ctr"/>
-          <a:lstStyle/>
-          <a:p>
-            <a:pPr algn="ctr"/>
-            <a:r>
-              <a:rPr lang="en-GB" sz="2400" b="1">
-                <a:solidFill>
-                  <a:srgbClr val="FFFFFF"/>
-                </a:solidFill>
-                <a:latin typeface="Calibri"/>
-              </a:rPr>
-              <a:t>4.2</a:t>
-            </a:r>
-          </a:p>
-        </p:txBody>
-      </p:sp>
-    </p:spTree>
-  </p:cSld>
-  <p:clrMapOvr>
-    <a:masterClrMapping/>
-  </p:clrMapOvr>
-</p:sld>
-</file>
-
-<file path=ppt/slides/slide29.xml><?xml version="1.0" encoding="utf-8"?>
-<p:sld xmlns:a="http://schemas.openxmlformats.org/drawingml/2006/main" xmlns:p="http://schemas.openxmlformats.org/presentationml/2006/main" xmlns:r="http://schemas.openxmlformats.org/officeDocument/2006/relationships">
-  <p:cSld>
-    <p:bg>
-      <p:bgPr>
-        <a:solidFill>
-          <a:srgbClr val="FFFFFF"/>
-        </a:solidFill>
-        <a:effectLst/>
-      </p:bgPr>
-    </p:bg>
-    <p:spTree>
-      <p:nvGrpSpPr>
-        <p:cNvPr id="1" name=""/>
-        <p:cNvGrpSpPr/>
-        <p:nvPr/>
-      </p:nvGrpSpPr>
-      <p:grpSpPr/>
-      <p:sp>
-        <p:nvSpPr>
-          <p:cNvPr id="2" name="Text 0"/>
-          <p:cNvSpPr txBox="1"/>
-          <p:nvPr/>
-        </p:nvSpPr>
-        <p:spPr>
-          <a:xfrm>
-            <a:off x="548640" y="411480"/>
-            <a:ext cx="11064240" cy="868680"/>
-          </a:xfrm>
-          <a:prstGeom prst="rect">
-            <a:avLst/>
-          </a:prstGeom>
-          <a:noFill/>
-          <a:ln/>
-        </p:spPr>
-        <p:txBody>
-          <a:bodyPr wrap="square" lIns="0" tIns="0" rIns="0" bIns="0" rtlCol="0" anchor="ctr"/>
-          <a:lstStyle/>
-          <a:p>
-            <a:pPr marL="0" indent="0">
-              <a:buNone/>
-            </a:pPr>
-            <a:r>
-              <a:rPr lang="en-US" sz="3600" b="1" dirty="0">
-                <a:solidFill>
-                  <a:srgbClr val="1A5C2C"/>
-                </a:solidFill>
-                <a:latin typeface="Cambria" pitchFamily="34" charset="0"/>
-                <a:ea typeface="Cambria" pitchFamily="34" charset="-122"/>
-                <a:cs typeface="Cambria" pitchFamily="34" charset="-120"/>
-              </a:rPr>
-              <a:t>5.1 · Decision points against the four consequences</a:t>
-            </a:r>
-            <a:endParaRPr lang="en-US" sz="3600" dirty="0"/>
-          </a:p>
-        </p:txBody>
-      </p:sp>
-      <p:sp>
-        <p:nvSpPr>
-          <p:cNvPr id="3" name="Shape 1"/>
-          <p:cNvSpPr/>
-          <p:nvPr/>
-        </p:nvSpPr>
-        <p:spPr>
-          <a:xfrm>
-            <a:off x="548640" y="1800225"/>
-            <a:ext cx="640080" cy="640080"/>
-          </a:xfrm>
-          <a:prstGeom prst="ellipse">
-            <a:avLst/>
-          </a:prstGeom>
-          <a:solidFill>
-            <a:srgbClr val="1A5C2C"/>
-          </a:solidFill>
-          <a:ln w="12700">
-            <a:solidFill>
-              <a:srgbClr val="1A5C2C"/>
-            </a:solidFill>
-            <a:prstDash val="solid"/>
-          </a:ln>
-        </p:spPr>
-        <p:txBody>
-          <a:bodyPr/>
-          <a:lstStyle/>
-          <a:p>
-            <a:endParaRPr lang="en-ZA"/>
-          </a:p>
-        </p:txBody>
-      </p:sp>
-      <p:pic>
-        <p:nvPicPr>
-          <p:cNvPr id="4" name="Image 0" descr="preencoded.png"/>
-          <p:cNvPicPr>
-            <a:picLocks noChangeAspect="1"/>
-          </p:cNvPicPr>
-          <p:nvPr/>
-        </p:nvPicPr>
-        <p:blipFill>
-          <a:blip r:embed="rId2"/>
-          <a:stretch>
-            <a:fillRect/>
-          </a:stretch>
-        </p:blipFill>
-        <p:spPr>
-          <a:xfrm>
-            <a:off x="708660" y="1960245"/>
-            <a:ext cx="320040" cy="320040"/>
-          </a:xfrm>
-          <a:prstGeom prst="rect">
-            <a:avLst/>
-          </a:prstGeom>
-        </p:spPr>
-      </p:pic>
-      <p:sp>
-        <p:nvSpPr>
-          <p:cNvPr id="5" name="Text 2"/>
-          <p:cNvSpPr txBox="1"/>
-          <p:nvPr/>
-        </p:nvSpPr>
-        <p:spPr>
-          <a:xfrm>
-            <a:off x="1508760" y="1508760"/>
-            <a:ext cx="10131552" cy="1223010"/>
-          </a:xfrm>
-          <a:prstGeom prst="rect">
-            <a:avLst/>
-          </a:prstGeom>
-          <a:noFill/>
-          <a:ln/>
-        </p:spPr>
-        <p:txBody>
-          <a:bodyPr wrap="square" lIns="0" tIns="0" rIns="0" bIns="0" rtlCol="0" anchor="ctr"/>
-          <a:lstStyle/>
-          <a:p>
-            <a:pPr marL="0" indent="0">
-              <a:buNone/>
-            </a:pPr>
-            <a:r>
-              <a:rPr lang="en-US" sz="2600" b="1" dirty="0">
-                <a:solidFill>
-                  <a:srgbClr val="1A5C2C"/>
-                </a:solidFill>
-                <a:latin typeface="Cambria" pitchFamily="34" charset="0"/>
-                <a:ea typeface="Cambria" pitchFamily="34" charset="-122"/>
-                <a:cs typeface="Cambria" pitchFamily="34" charset="-120"/>
-              </a:rPr>
-              <a:t>01  </a:t>
-            </a:r>
-            <a:r>
-              <a:rPr lang="en-US" sz="2600" dirty="0">
-                <a:solidFill>
-                  <a:srgbClr val="1F2A22"/>
-                </a:solidFill>
-                <a:latin typeface="Calibri" pitchFamily="34" charset="0"/>
-                <a:ea typeface="Calibri" pitchFamily="34" charset="-122"/>
-                <a:cs typeface="Calibri" pitchFamily="34" charset="-120"/>
-              </a:rPr>
-              <a:t>Early Warning Signals Are Missed  ·  2 decision points</a:t>
-            </a:r>
-            <a:endParaRPr lang="en-US" sz="2600" dirty="0"/>
-          </a:p>
-        </p:txBody>
-      </p:sp>
-      <p:sp>
-        <p:nvSpPr>
-          <p:cNvPr id="6" name="Shape 3"/>
-          <p:cNvSpPr/>
-          <p:nvPr/>
-        </p:nvSpPr>
-        <p:spPr>
-          <a:xfrm>
-            <a:off x="548640" y="3023235"/>
-            <a:ext cx="640080" cy="640080"/>
-          </a:xfrm>
-          <a:prstGeom prst="ellipse">
-            <a:avLst/>
-          </a:prstGeom>
-          <a:solidFill>
-            <a:srgbClr val="1A5C2C"/>
-          </a:solidFill>
-          <a:ln w="12700">
-            <a:solidFill>
-              <a:srgbClr val="1A5C2C"/>
-            </a:solidFill>
-            <a:prstDash val="solid"/>
-          </a:ln>
-        </p:spPr>
-        <p:txBody>
-          <a:bodyPr/>
-          <a:lstStyle/>
-          <a:p>
-            <a:endParaRPr lang="en-ZA"/>
-          </a:p>
-        </p:txBody>
-      </p:sp>
-      <p:pic>
-        <p:nvPicPr>
-          <p:cNvPr id="7" name="Image 1" descr="preencoded.png"/>
-          <p:cNvPicPr>
-            <a:picLocks noChangeAspect="1"/>
-          </p:cNvPicPr>
-          <p:nvPr/>
-        </p:nvPicPr>
-        <p:blipFill>
-          <a:blip r:embed="rId5"/>
-          <a:stretch>
-            <a:fillRect/>
-          </a:stretch>
-        </p:blipFill>
-        <p:spPr>
-          <a:xfrm>
-            <a:off x="708660" y="3183255"/>
-            <a:ext cx="320040" cy="320040"/>
-          </a:xfrm>
-          <a:prstGeom prst="rect">
-            <a:avLst/>
-          </a:prstGeom>
-        </p:spPr>
-      </p:pic>
-      <p:sp>
-        <p:nvSpPr>
-          <p:cNvPr id="8" name="Text 4"/>
-          <p:cNvSpPr txBox="1"/>
-          <p:nvPr/>
-        </p:nvSpPr>
-        <p:spPr>
-          <a:xfrm>
-            <a:off x="1508760" y="2731770"/>
-            <a:ext cx="10131552" cy="1223010"/>
-          </a:xfrm>
-          <a:prstGeom prst="rect">
-            <a:avLst/>
-          </a:prstGeom>
-          <a:noFill/>
-          <a:ln/>
-        </p:spPr>
-        <p:txBody>
-          <a:bodyPr wrap="square" lIns="0" tIns="0" rIns="0" bIns="0" rtlCol="0" anchor="ctr"/>
-          <a:lstStyle/>
-          <a:p>
-            <a:pPr marL="0" indent="0">
-              <a:buNone/>
-            </a:pPr>
-            <a:r>
-              <a:rPr lang="en-US" sz="2600" b="1" dirty="0">
-                <a:solidFill>
-                  <a:srgbClr val="1A5C2C"/>
-                </a:solidFill>
-                <a:latin typeface="Cambria" pitchFamily="34" charset="0"/>
-                <a:ea typeface="Cambria" pitchFamily="34" charset="-122"/>
-                <a:cs typeface="Cambria" pitchFamily="34" charset="-120"/>
-              </a:rPr>
-              <a:t>02  </a:t>
-            </a:r>
-            <a:r>
-              <a:rPr lang="en-US" sz="2600" dirty="0">
-                <a:solidFill>
-                  <a:srgbClr val="1F2A22"/>
-                </a:solidFill>
-                <a:latin typeface="Calibri" pitchFamily="34" charset="0"/>
-                <a:ea typeface="Calibri" pitchFamily="34" charset="-122"/>
-                <a:cs typeface="Calibri" pitchFamily="34" charset="-120"/>
-              </a:rPr>
-              <a:t>Gradual Diffusion of Accountability  ·  2 decision points</a:t>
-            </a:r>
-            <a:endParaRPr lang="en-US" sz="2600" dirty="0"/>
-          </a:p>
-        </p:txBody>
-      </p:sp>
-      <p:sp>
-        <p:nvSpPr>
-          <p:cNvPr id="9" name="Shape 5"/>
-          <p:cNvSpPr/>
-          <p:nvPr/>
-        </p:nvSpPr>
-        <p:spPr>
-          <a:xfrm>
-            <a:off x="548640" y="4246245"/>
-            <a:ext cx="640080" cy="640080"/>
-          </a:xfrm>
-          <a:prstGeom prst="ellipse">
-            <a:avLst/>
-          </a:prstGeom>
-          <a:solidFill>
-            <a:srgbClr val="1A5C2C"/>
-          </a:solidFill>
-          <a:ln w="12700">
-            <a:solidFill>
-              <a:srgbClr val="1A5C2C"/>
-            </a:solidFill>
-            <a:prstDash val="solid"/>
-          </a:ln>
-        </p:spPr>
-        <p:txBody>
-          <a:bodyPr/>
-          <a:lstStyle/>
-          <a:p>
-            <a:endParaRPr lang="en-ZA"/>
-          </a:p>
-        </p:txBody>
-      </p:sp>
-      <p:pic>
-        <p:nvPicPr>
-          <p:cNvPr id="10" name="Image 2" descr="preencoded.png"/>
-          <p:cNvPicPr>
-            <a:picLocks noChangeAspect="1"/>
-          </p:cNvPicPr>
-          <p:nvPr/>
-        </p:nvPicPr>
-        <p:blipFill>
-          <a:blip r:embed="rId4"/>
-          <a:stretch>
-            <a:fillRect/>
-          </a:stretch>
-        </p:blipFill>
-        <p:spPr>
-          <a:xfrm>
-            <a:off x="708660" y="4406265"/>
-            <a:ext cx="320040" cy="320040"/>
-          </a:xfrm>
-          <a:prstGeom prst="rect">
-            <a:avLst/>
-          </a:prstGeom>
-        </p:spPr>
-      </p:pic>
-      <p:sp>
-        <p:nvSpPr>
-          <p:cNvPr id="11" name="Text 6"/>
-          <p:cNvSpPr txBox="1"/>
-          <p:nvPr/>
-        </p:nvSpPr>
-        <p:spPr>
-          <a:xfrm>
-            <a:off x="1508760" y="3954780"/>
-            <a:ext cx="10131552" cy="1223010"/>
-          </a:xfrm>
-          <a:prstGeom prst="rect">
-            <a:avLst/>
-          </a:prstGeom>
-          <a:noFill/>
-          <a:ln/>
-        </p:spPr>
-        <p:txBody>
-          <a:bodyPr wrap="square" lIns="0" tIns="0" rIns="0" bIns="0" rtlCol="0" anchor="ctr"/>
-          <a:lstStyle/>
-          <a:p>
-            <a:pPr marL="0" indent="0">
-              <a:buNone/>
-            </a:pPr>
-            <a:r>
-              <a:rPr lang="en-US" sz="2600" b="1" dirty="0">
-                <a:solidFill>
-                  <a:srgbClr val="1A5C2C"/>
-                </a:solidFill>
-                <a:latin typeface="Cambria" pitchFamily="34" charset="0"/>
-                <a:ea typeface="Cambria" pitchFamily="34" charset="-122"/>
-                <a:cs typeface="Cambria" pitchFamily="34" charset="-120"/>
-              </a:rPr>
-              <a:t>03  </a:t>
-            </a:r>
-            <a:r>
-              <a:rPr lang="en-US" sz="2600" dirty="0">
-                <a:solidFill>
-                  <a:srgbClr val="1F2A22"/>
-                </a:solidFill>
-                <a:latin typeface="Calibri" pitchFamily="34" charset="0"/>
-                <a:ea typeface="Calibri" pitchFamily="34" charset="-122"/>
-                <a:cs typeface="Calibri" pitchFamily="34" charset="-120"/>
-              </a:rPr>
-              <a:t>Loss of Organisational Learning  ·  2 decision points</a:t>
-            </a:r>
-            <a:endParaRPr lang="en-US" sz="2600" dirty="0"/>
-          </a:p>
-        </p:txBody>
-      </p:sp>
-      <p:sp>
-        <p:nvSpPr>
-          <p:cNvPr id="12" name="Shape 7"/>
-          <p:cNvSpPr/>
-          <p:nvPr/>
-        </p:nvSpPr>
-        <p:spPr>
-          <a:xfrm>
-            <a:off x="548640" y="5469255"/>
-            <a:ext cx="640080" cy="640080"/>
-          </a:xfrm>
-          <a:prstGeom prst="ellipse">
-            <a:avLst/>
-          </a:prstGeom>
-          <a:solidFill>
-            <a:srgbClr val="1A5C2C"/>
-          </a:solidFill>
-          <a:ln w="12700">
-            <a:solidFill>
-              <a:srgbClr val="1A5C2C"/>
-            </a:solidFill>
-            <a:prstDash val="solid"/>
-          </a:ln>
-        </p:spPr>
-        <p:txBody>
-          <a:bodyPr/>
-          <a:lstStyle/>
-          <a:p>
-            <a:endParaRPr lang="en-ZA"/>
-          </a:p>
-        </p:txBody>
-      </p:sp>
-      <p:pic>
-        <p:nvPicPr>
-          <p:cNvPr id="13" name="Image 3" descr="preencoded.png"/>
-          <p:cNvPicPr>
-            <a:picLocks noChangeAspect="1"/>
-          </p:cNvPicPr>
-          <p:nvPr/>
-        </p:nvPicPr>
-        <p:blipFill>
-          <a:blip r:embed="rId3"/>
-          <a:stretch>
-            <a:fillRect/>
-          </a:stretch>
-        </p:blipFill>
-        <p:spPr>
-          <a:xfrm>
-            <a:off x="708660" y="5629275"/>
-            <a:ext cx="320040" cy="320040"/>
-          </a:xfrm>
-          <a:prstGeom prst="rect">
-            <a:avLst/>
-          </a:prstGeom>
-        </p:spPr>
-      </p:pic>
-      <p:sp>
-        <p:nvSpPr>
-          <p:cNvPr id="14" name="Text 8"/>
-          <p:cNvSpPr txBox="1"/>
-          <p:nvPr/>
-        </p:nvSpPr>
-        <p:spPr>
-          <a:xfrm>
-            <a:off x="1508760" y="5177790"/>
-            <a:ext cx="10131552" cy="1223010"/>
-          </a:xfrm>
-          <a:prstGeom prst="rect">
-            <a:avLst/>
-          </a:prstGeom>
-          <a:noFill/>
-          <a:ln/>
-        </p:spPr>
-        <p:txBody>
-          <a:bodyPr wrap="square" lIns="0" tIns="0" rIns="0" bIns="0" rtlCol="0" anchor="ctr"/>
-          <a:lstStyle/>
-          <a:p>
-            <a:pPr marL="0" indent="0">
-              <a:buNone/>
-            </a:pPr>
-            <a:r>
-              <a:rPr lang="en-US" sz="2600" b="1" dirty="0">
-                <a:solidFill>
-                  <a:srgbClr val="1A5C2C"/>
-                </a:solidFill>
-                <a:latin typeface="Cambria" pitchFamily="34" charset="0"/>
-                <a:ea typeface="Cambria" pitchFamily="34" charset="-122"/>
-                <a:cs typeface="Cambria" pitchFamily="34" charset="-120"/>
-              </a:rPr>
-              <a:t>04  </a:t>
-            </a:r>
-            <a:r>
-              <a:rPr lang="en-US" sz="2600" dirty="0">
-                <a:solidFill>
-                  <a:srgbClr val="1F2A22"/>
-                </a:solidFill>
-                <a:latin typeface="Calibri" pitchFamily="34" charset="0"/>
-                <a:ea typeface="Calibri" pitchFamily="34" charset="-122"/>
-                <a:cs typeface="Calibri" pitchFamily="34" charset="-120"/>
-              </a:rPr>
-              <a:t>Erodes Leadership Credibility  ·  2 decision points</a:t>
-            </a:r>
-            <a:endParaRPr lang="en-US" sz="2600" dirty="0"/>
+              <a:t>2.1</a:t>
+            </a:r>
           </a:p>
         </p:txBody>
       </p:sp>
@@ -14267,6 +14944,26 @@
             </a:r>
             <a:endParaRPr lang="en-US" sz="2400" dirty="0"/>
           </a:p>
+          <a:p>
+            <a:pPr marL="0" indent="0">
+              <a:spcBef>
+                <a:spcPts val="1200"/>
+              </a:spcBef>
+              <a:buNone/>
+            </a:pPr>
+            <a:r>
+              <a:rPr lang="en-US" sz="2400" dirty="0" b="1">
+                <a:solidFill>
+                  <a:srgbClr val="1A5C2C"/>
+                </a:solidFill>
+                <a:latin typeface="Calibri" pitchFamily="34" charset="0"/>
+                <a:ea typeface="Calibri" pitchFamily="34" charset="-122"/>
+                <a:cs typeface="Calibri" pitchFamily="34" charset="-120"/>
+              </a:rPr>
+              <a:t>Achieved through GROW.</a:t>
+            </a:r>
+            <a:endParaRPr lang="en-US" sz="2400" dirty="0"/>
+          </a:p>
         </p:txBody>
       </p:sp>
       <p:sp>
@@ -14435,6 +15132,26 @@
             </a:r>
             <a:endParaRPr lang="en-US" sz="2400" dirty="0"/>
           </a:p>
+          <a:p>
+            <a:pPr marL="0" indent="0">
+              <a:spcBef>
+                <a:spcPts val="1200"/>
+              </a:spcBef>
+              <a:buNone/>
+            </a:pPr>
+            <a:r>
+              <a:rPr lang="en-US" sz="2400" dirty="0" b="1">
+                <a:solidFill>
+                  <a:srgbClr val="1A5C2C"/>
+                </a:solidFill>
+                <a:latin typeface="Calibri" pitchFamily="34" charset="0"/>
+                <a:ea typeface="Calibri" pitchFamily="34" charset="-122"/>
+                <a:cs typeface="Calibri" pitchFamily="34" charset="-120"/>
+              </a:rPr>
+              <a:t>Achieved through GROW.</a:t>
+            </a:r>
+            <a:endParaRPr lang="en-US" sz="2400" dirty="0"/>
+          </a:p>
         </p:txBody>
       </p:sp>
       <p:sp>
@@ -14603,6 +15320,26 @@
             </a:r>
             <a:endParaRPr lang="en-US" sz="2400" dirty="0"/>
           </a:p>
+          <a:p>
+            <a:pPr marL="0" indent="0">
+              <a:spcBef>
+                <a:spcPts val="1200"/>
+              </a:spcBef>
+              <a:buNone/>
+            </a:pPr>
+            <a:r>
+              <a:rPr lang="en-US" sz="2400" dirty="0" b="1">
+                <a:solidFill>
+                  <a:srgbClr val="1A5C2C"/>
+                </a:solidFill>
+                <a:latin typeface="Calibri" pitchFamily="34" charset="0"/>
+                <a:ea typeface="Calibri" pitchFamily="34" charset="-122"/>
+                <a:cs typeface="Calibri" pitchFamily="34" charset="-120"/>
+              </a:rPr>
+              <a:t>Achieved through GROW.</a:t>
+            </a:r>
+            <a:endParaRPr lang="en-US" sz="2400" dirty="0"/>
+          </a:p>
         </p:txBody>
       </p:sp>
       <p:sp>
@@ -14687,12 +15424,12 @@
 </file>
 
 <file path=ppt/slides/slide9.xml><?xml version="1.0" encoding="utf-8"?>
-<p:sld xmlns:a="http://schemas.openxmlformats.org/drawingml/2006/main" xmlns:r="http://schemas.openxmlformats.org/officeDocument/2006/relationships" xmlns:p="http://schemas.openxmlformats.org/presentationml/2006/main">
-  <p:cSld name="Slide 9">
+<p:sld xmlns:a="http://schemas.openxmlformats.org/drawingml/2006/main" xmlns:p="http://schemas.openxmlformats.org/presentationml/2006/main" xmlns:r="http://schemas.openxmlformats.org/officeDocument/2006/relationships">
+  <p:cSld>
     <p:bg>
       <p:bgPr>
         <a:solidFill>
-          <a:srgbClr val="1A5C2C"/>
+          <a:srgbClr val="FFFFFF"/>
         </a:solidFill>
         <a:effectLst/>
       </p:bgPr>
@@ -14703,14 +15440,7 @@
         <p:cNvGrpSpPr/>
         <p:nvPr/>
       </p:nvGrpSpPr>
-      <p:grpSpPr>
-        <a:xfrm>
-          <a:off x="0" y="0"/>
-          <a:ext cx="0" cy="0"/>
-          <a:chOff x="0" y="0"/>
-          <a:chExt cx="0" cy="0"/>
-        </a:xfrm>
-      </p:grpSpPr>
+      <p:grpSpPr/>
       <p:sp>
         <p:nvSpPr>
           <p:cNvPr id="2" name="Text 0"/>
@@ -14719,8 +15449,8 @@
         </p:nvSpPr>
         <p:spPr>
           <a:xfrm>
-            <a:off x="457200" y="822960"/>
-            <a:ext cx="2103120" cy="2194560"/>
+            <a:off x="548640" y="411480"/>
+            <a:ext cx="11064240" cy="868680"/>
           </a:xfrm>
           <a:prstGeom prst="rect">
             <a:avLst/>
@@ -14729,233 +15459,45 @@
           <a:ln/>
         </p:spPr>
         <p:txBody>
-          <a:bodyPr wrap="square" lIns="0" tIns="0" rIns="0" bIns="0" rtlCol="0" anchor="t"/>
+          <a:bodyPr wrap="square" lIns="0" tIns="0" rIns="0" bIns="0" rtlCol="0" anchor="ctr"/>
           <a:lstStyle/>
           <a:p>
             <a:pPr marL="0" indent="0">
               <a:buNone/>
             </a:pPr>
             <a:r>
-              <a:rPr lang="en-US" sz="15000" b="1" dirty="0">
-                <a:solidFill>
-                  <a:srgbClr val="C6A24C"/>
+              <a:rPr lang="en-US" sz="3600" b="1" dirty="0">
+                <a:solidFill>
+                  <a:srgbClr val="1A5C2C"/>
                 </a:solidFill>
                 <a:latin typeface="Cambria" pitchFamily="34" charset="0"/>
                 <a:ea typeface="Cambria" pitchFamily="34" charset="-122"/>
                 <a:cs typeface="Cambria" pitchFamily="34" charset="-120"/>
               </a:rPr>
-              <a:t>2</a:t>
-            </a:r>
-            <a:endParaRPr lang="en-US" sz="15000" dirty="0"/>
-          </a:p>
-        </p:txBody>
-      </p:sp>
-      <p:sp>
-        <p:nvSpPr>
-          <p:cNvPr id="3" name="Text 1"/>
-          <p:cNvSpPr txBox="1"/>
-          <p:nvPr/>
-        </p:nvSpPr>
-        <p:spPr>
-          <a:xfrm>
-            <a:off x="2743200" y="914400"/>
-            <a:ext cx="8229600" cy="457200"/>
-          </a:xfrm>
-          <a:prstGeom prst="rect">
-            <a:avLst/>
-          </a:prstGeom>
-          <a:noFill/>
-          <a:ln/>
-        </p:spPr>
-        <p:txBody>
-          <a:bodyPr wrap="square" lIns="0" tIns="0" rIns="0" bIns="0" rtlCol="0" anchor="t"/>
-          <a:lstStyle/>
-          <a:p>
-            <a:pPr marL="0" indent="0">
-              <a:buNone/>
-            </a:pPr>
-            <a:r>
-              <a:rPr lang="en-US" sz="2400" b="1" dirty="0">
-                <a:solidFill>
-                  <a:srgbClr val="E6D3A0"/>
-                </a:solidFill>
-                <a:latin typeface="Calibri" pitchFamily="34" charset="0"/>
-                <a:ea typeface="Calibri" pitchFamily="34" charset="-122"/>
-                <a:cs typeface="Calibri" pitchFamily="34" charset="-120"/>
-              </a:rPr>
-              <a:t>Section 2</a:t>
-            </a:r>
-            <a:endParaRPr lang="en-US" sz="2400" dirty="0"/>
-          </a:p>
-        </p:txBody>
-      </p:sp>
-      <p:sp>
-        <p:nvSpPr>
-          <p:cNvPr id="4" name="Text 2"/>
-          <p:cNvSpPr txBox="1"/>
-          <p:nvPr/>
-        </p:nvSpPr>
-        <p:spPr>
-          <a:xfrm>
-            <a:off x="2743200" y="1371600"/>
-            <a:ext cx="8961120" cy="868680"/>
-          </a:xfrm>
-          <a:prstGeom prst="rect">
-            <a:avLst/>
-          </a:prstGeom>
-          <a:noFill/>
-          <a:ln/>
-        </p:spPr>
-        <p:txBody>
-          <a:bodyPr wrap="square" lIns="0" tIns="0" rIns="0" bIns="0" rtlCol="0" anchor="t"/>
-          <a:lstStyle/>
-          <a:p>
-            <a:pPr marL="0" indent="0">
-              <a:buNone/>
-            </a:pPr>
-            <a:r>
-              <a:rPr lang="en-US" sz="4400" b="1" dirty="0">
-                <a:solidFill>
-                  <a:srgbClr val="FFFFFF"/>
-                </a:solidFill>
-                <a:latin typeface="Cambria" pitchFamily="34" charset="0"/>
-                <a:ea typeface="Cambria" pitchFamily="34" charset="-122"/>
-                <a:cs typeface="Cambria" pitchFamily="34" charset="-120"/>
-              </a:rPr>
-              <a:t>Intelligence — Why</a:t>
-            </a:r>
-            <a:endParaRPr lang="en-US" sz="4400" dirty="0"/>
-          </a:p>
-        </p:txBody>
-      </p:sp>
-      <p:sp>
-        <p:nvSpPr>
-          <p:cNvPr id="5" name="Text 3"/>
-          <p:cNvSpPr txBox="1"/>
-          <p:nvPr/>
-        </p:nvSpPr>
-        <p:spPr>
-          <a:xfrm>
-            <a:off x="2743200" y="2240280"/>
-            <a:ext cx="8961120" cy="868680"/>
-          </a:xfrm>
-          <a:prstGeom prst="rect">
-            <a:avLst/>
-          </a:prstGeom>
-          <a:noFill/>
-          <a:ln/>
-        </p:spPr>
-        <p:txBody>
-          <a:bodyPr wrap="square" lIns="0" tIns="0" rIns="0" bIns="0" rtlCol="0" anchor="t"/>
-          <a:lstStyle/>
-          <a:p>
-            <a:pPr marL="0" indent="0">
-              <a:buNone/>
-            </a:pPr>
-            <a:r>
-              <a:rPr lang="en-US" sz="2600" i="1" dirty="0">
-                <a:solidFill>
-                  <a:srgbClr val="DDE8DF"/>
-                </a:solidFill>
-                <a:latin typeface="Calibri" pitchFamily="34" charset="0"/>
-                <a:ea typeface="Calibri" pitchFamily="34" charset="-122"/>
-                <a:cs typeface="Calibri" pitchFamily="34" charset="-120"/>
-              </a:rPr>
-              <a:t>Why Performance Measurement Determines Execution Velocity</a:t>
-            </a:r>
-            <a:endParaRPr lang="en-US" sz="2600" dirty="0"/>
-          </a:p>
-        </p:txBody>
-      </p:sp>
-      <p:sp>
-        <p:nvSpPr>
-          <p:cNvPr id="6" name="Text 4"/>
-          <p:cNvSpPr txBox="1"/>
-          <p:nvPr/>
-        </p:nvSpPr>
-        <p:spPr>
-          <a:xfrm>
-            <a:off x="2743200" y="3246120"/>
-            <a:ext cx="8229600" cy="457200"/>
-          </a:xfrm>
-          <a:prstGeom prst="rect">
-            <a:avLst/>
-          </a:prstGeom>
-          <a:noFill/>
-          <a:ln/>
-        </p:spPr>
-        <p:txBody>
-          <a:bodyPr wrap="square" lIns="0" tIns="0" rIns="0" bIns="0" rtlCol="0" anchor="t"/>
-          <a:lstStyle/>
-          <a:p>
-            <a:pPr marL="0" indent="0">
-              <a:buNone/>
-            </a:pPr>
-            <a:r>
-              <a:rPr lang="en-US" sz="2400" b="1" dirty="0">
-                <a:solidFill>
-                  <a:srgbClr val="C6A24C"/>
-                </a:solidFill>
-                <a:latin typeface="Calibri" pitchFamily="34" charset="0"/>
-                <a:ea typeface="Calibri" pitchFamily="34" charset="-122"/>
-                <a:cs typeface="Calibri" pitchFamily="34" charset="-120"/>
-              </a:rPr>
-              <a:t>Section learning outcomes</a:t>
-            </a:r>
-            <a:endParaRPr lang="en-US" sz="2400" dirty="0"/>
-          </a:p>
-        </p:txBody>
-      </p:sp>
-      <p:sp>
-        <p:nvSpPr>
-          <p:cNvPr id="7" name="Shape 5"/>
-          <p:cNvSpPr/>
-          <p:nvPr/>
-        </p:nvSpPr>
-        <p:spPr>
-          <a:xfrm>
-            <a:off x="2743200" y="3822192"/>
-            <a:ext cx="384048" cy="384048"/>
-          </a:xfrm>
-          <a:prstGeom prst="ellipse">
-            <a:avLst/>
-          </a:prstGeom>
-          <a:solidFill>
-            <a:srgbClr val="C6A24C"/>
-          </a:solidFill>
-          <a:ln w="12700">
-            <a:solidFill>
-              <a:srgbClr val="C6A24C"/>
-            </a:solidFill>
-            <a:prstDash val="solid"/>
-          </a:ln>
-        </p:spPr>
-        <p:txBody>
-          <a:bodyPr/>
-          <a:lstStyle/>
-          <a:p>
-            <a:endParaRPr lang="en-ZA"/>
+              <a:t>Section 1 Reflections</a:t>
+            </a:r>
+            <a:endParaRPr lang="en-US" sz="3600" dirty="0"/>
           </a:p>
         </p:txBody>
       </p:sp>
       <p:pic>
         <p:nvPicPr>
-          <p:cNvPr id="8" name="Image 0" descr="preencoded.png"/>
+          <p:cNvPr id="3" name="Reflection 1.1" descr="ref_1.1.png"/>
           <p:cNvPicPr>
             <a:picLocks noChangeAspect="1"/>
           </p:cNvPicPr>
           <p:nvPr/>
         </p:nvPicPr>
         <p:blipFill>
-          <a:blip r:embed="rId3"/>
+          <a:blip r:embed="rId6"/>
           <a:stretch>
             <a:fillRect/>
           </a:stretch>
         </p:blipFill>
         <p:spPr>
           <a:xfrm>
-            <a:off x="2839212" y="3918204"/>
-            <a:ext cx="192024" cy="192024"/>
+            <a:off x="1691640" y="1463040"/>
+            <a:ext cx="10058400" cy="1311339"/>
           </a:xfrm>
           <a:prstGeom prst="rect">
             <a:avLst/>
@@ -14964,53 +15506,14 @@
       </p:pic>
       <p:sp>
         <p:nvSpPr>
-          <p:cNvPr id="9" name="Text 6"/>
-          <p:cNvSpPr txBox="1"/>
-          <p:nvPr/>
-        </p:nvSpPr>
-        <p:spPr>
-          <a:xfrm>
-            <a:off x="3291840" y="3749040"/>
-            <a:ext cx="8412480" cy="1097280"/>
-          </a:xfrm>
-          <a:prstGeom prst="rect">
-            <a:avLst/>
-          </a:prstGeom>
-          <a:noFill/>
-          <a:ln/>
-        </p:spPr>
-        <p:txBody>
-          <a:bodyPr wrap="square" lIns="0" tIns="0" rIns="0" bIns="0" rtlCol="0" anchor="t"/>
-          <a:lstStyle/>
-          <a:p>
-            <a:pPr marL="0" indent="0">
-              <a:buNone/>
-            </a:pPr>
-            <a:r>
-              <a:rPr lang="en-US" sz="2400" dirty="0">
-                <a:solidFill>
-                  <a:srgbClr val="FFFFFF"/>
-                </a:solidFill>
-                <a:latin typeface="Calibri" pitchFamily="34" charset="0"/>
-                <a:ea typeface="Calibri" pitchFamily="34" charset="-122"/>
-                <a:cs typeface="Calibri" pitchFamily="34" charset="-120"/>
-              </a:rPr>
-              <a:t>Explain why review discipline determines the pace of execution.</a:t>
-            </a:r>
-            <a:endParaRPr lang="en-US" sz="2400" dirty="0"/>
-          </a:p>
-        </p:txBody>
-      </p:sp>
-      <p:sp>
-        <p:nvSpPr>
-          <p:cNvPr id="10" name="Shape 7"/>
+          <p:cNvPr id="4" name="Part 1.1"/>
           <p:cNvSpPr/>
           <p:nvPr/>
         </p:nvSpPr>
         <p:spPr>
           <a:xfrm>
-            <a:off x="2743200" y="5010912"/>
-            <a:ext cx="384048" cy="384048"/>
+            <a:off x="548640" y="1684369"/>
+            <a:ext cx="868680" cy="868680"/>
           </a:xfrm>
           <a:prstGeom prst="ellipse">
             <a:avLst/>
@@ -15018,39 +15521,48 @@
           <a:solidFill>
             <a:srgbClr val="C6A24C"/>
           </a:solidFill>
-          <a:ln w="12700">
+          <a:ln>
             <a:solidFill>
               <a:srgbClr val="C6A24C"/>
             </a:solidFill>
-            <a:prstDash val="solid"/>
           </a:ln>
-        </p:spPr>
-        <p:txBody>
-          <a:bodyPr/>
-          <a:lstStyle/>
-          <a:p>
-            <a:endParaRPr lang="en-ZA"/>
+          <a:effectLst/>
+        </p:spPr>
+        <p:txBody>
+          <a:bodyPr wrap="none" lIns="0" tIns="0" rIns="0" bIns="0" rtlCol="0" anchor="ctr"/>
+          <a:lstStyle/>
+          <a:p>
+            <a:pPr algn="ctr"/>
+            <a:r>
+              <a:rPr lang="en-GB" sz="2400" b="1">
+                <a:solidFill>
+                  <a:srgbClr val="FFFFFF"/>
+                </a:solidFill>
+                <a:latin typeface="Calibri"/>
+              </a:rPr>
+              <a:t>1.1</a:t>
+            </a:r>
           </a:p>
         </p:txBody>
       </p:sp>
       <p:pic>
         <p:nvPicPr>
-          <p:cNvPr id="11" name="Image 1" descr="preencoded.png"/>
+          <p:cNvPr id="5" name="Reflection 1.4" descr="ref_1.4.png"/>
           <p:cNvPicPr>
             <a:picLocks noChangeAspect="1"/>
           </p:cNvPicPr>
           <p:nvPr/>
         </p:nvPicPr>
         <p:blipFill>
-          <a:blip r:embed="rId3"/>
+          <a:blip r:embed="rId7"/>
           <a:stretch>
             <a:fillRect/>
           </a:stretch>
         </p:blipFill>
         <p:spPr>
           <a:xfrm>
-            <a:off x="2839212" y="5106924"/>
-            <a:ext cx="192024" cy="192024"/>
+            <a:off x="1691640" y="2975546"/>
+            <a:ext cx="10058400" cy="1311339"/>
           </a:xfrm>
           <a:prstGeom prst="rect">
             <a:avLst/>
@@ -15059,40 +15571,42 @@
       </p:pic>
       <p:sp>
         <p:nvSpPr>
-          <p:cNvPr id="12" name="Text 8"/>
-          <p:cNvSpPr txBox="1"/>
-          <p:nvPr/>
-        </p:nvSpPr>
-        <p:spPr>
-          <a:xfrm>
-            <a:off x="3291840" y="4937760"/>
-            <a:ext cx="8412480" cy="1097280"/>
-          </a:xfrm>
-          <a:prstGeom prst="rect">
-            <a:avLst/>
-          </a:prstGeom>
-          <a:noFill/>
-          <a:ln/>
-        </p:spPr>
-        <p:txBody>
-          <a:bodyPr wrap="square" lIns="0" tIns="0" rIns="0" bIns="0" rtlCol="0" anchor="t"/>
-          <a:lstStyle/>
-          <a:p>
-            <a:pPr marL="0" indent="0">
-              <a:buNone/>
-            </a:pPr>
-            <a:r>
-              <a:rPr lang="en-US" sz="2400" dirty="0">
+          <p:cNvPr id="6" name="Part 1.4"/>
+          <p:cNvSpPr/>
+          <p:nvPr/>
+        </p:nvSpPr>
+        <p:spPr>
+          <a:xfrm>
+            <a:off x="548640" y="3196875"/>
+            <a:ext cx="868680" cy="868680"/>
+          </a:xfrm>
+          <a:prstGeom prst="ellipse">
+            <a:avLst/>
+          </a:prstGeom>
+          <a:solidFill>
+            <a:srgbClr val="C6A24C"/>
+          </a:solidFill>
+          <a:ln>
+            <a:solidFill>
+              <a:srgbClr val="C6A24C"/>
+            </a:solidFill>
+          </a:ln>
+          <a:effectLst/>
+        </p:spPr>
+        <p:txBody>
+          <a:bodyPr wrap="none" lIns="0" tIns="0" rIns="0" bIns="0" rtlCol="0" anchor="ctr"/>
+          <a:lstStyle/>
+          <a:p>
+            <a:pPr algn="ctr"/>
+            <a:r>
+              <a:rPr lang="en-GB" sz="2400" b="1">
                 <a:solidFill>
                   <a:srgbClr val="FFFFFF"/>
                 </a:solidFill>
-                <a:latin typeface="Calibri" pitchFamily="34" charset="0"/>
-                <a:ea typeface="Calibri" pitchFamily="34" charset="-122"/>
-                <a:cs typeface="Calibri" pitchFamily="34" charset="-120"/>
-              </a:rPr>
-              <a:t>Recognise the early signs that review discipline is weakening and the cost each carries.</a:t>
-            </a:r>
-            <a:endParaRPr lang="en-US" sz="2400" dirty="0"/>
+                <a:latin typeface="Calibri"/>
+              </a:rPr>
+              <a:t>1.4</a:t>
+            </a:r>
           </a:p>
         </p:txBody>
       </p:sp>

--- a/Unit decks/Unit 08 - Performance Measurement.pptx
+++ b/Unit decks/Unit 08 - Performance Measurement.pptx
@@ -1932,7 +1932,7 @@
           <a:p>
             <a:r>
               <a:rPr lang="en-GB" dirty="0"/>
-              <a:t>After class, participants complete personal Portfolio work in part 4.2 of their own file. They read a scripted conversation on a different case, in which the root cause is never named. They deduce which of the three root causes is evident and the lines that rule out the other two, write how they would use GROW to resolve it and move the alignment close to 10, and judge how the CXO applied the Accountability Loop against the GROW model.</a:t>
+              <a:t>After class, participants complete personal Portfolio work in part 4.2 of their own file. They read a scripted conversation on a different case, in which the root cause is never named. They deduce which of the three root causes is evident and the lines that rule out the other two, work out how GROW was used to resolve it and move the alignment close to 10, and judge how the CXO applied the Accountability Loop against the GROW model.</a:t>
             </a:r>
           </a:p>
         </p:txBody>
@@ -2133,7 +2133,7 @@
           <a:p>
             <a:r>
               <a:rPr lang="en-GB" dirty="0"/>
-              <a:t>After class, in part 4.2 of their own file, participants deduce the root cause in a scripted conversation, use GROW to plan its resolution, and judge how the CXO applied the Accountability Loop.</a:t>
+              <a:t>After class, in part 4.2 of their own file, participants deduce the root cause in a scripted conversation, work out how GROW was used to resolve it, and judge how the CXO applied the Accountability Loop.</a:t>
             </a:r>
           </a:p>
         </p:txBody>
@@ -3155,7 +3155,7 @@
           <a:p>
             <a:r>
               <a:rPr lang="en-GB" dirty="0"/>
-              <a:t>Say: "In 4.2, you read a full Accountability Loop conversation on a different case from the role play. The conversation never names the root cause: you deduce which of the three it is, write how you would use GROW to resolve it and move the alignment close to 10, and judge how the CXO applied the loop against GROW. This is personal work, and it builds your learning portfolio."</a:t>
+              <a:t>Say: "In 4.2, you read a full Accountability Loop conversation on a different case from the role play. The conversation never names the root cause: you deduce which of the three it is, work out how GROW was used to resolve it and move the alignment close to 10, and judge how the CXO applied the loop against GROW. This is personal work, and it builds your learning portfolio."</a:t>
             </a:r>
           </a:p>
           <a:p>

--- a/Unit decks/Unit 08 - Performance Measurement.pptx
+++ b/Unit decks/Unit 08 - Performance Measurement.pptx
@@ -305,14 +305,39 @@
           <a:lstStyle/>
           <a:p>
             <a:r>
-              <a:rPr lang="en-US" dirty="0"/>
-              <a:t>UNIT 8 · PERFORMANCE MEASUREMENT
-Module 3 · Influence · Unit 8
-Unit intent (Facilitator Guide):
-Unit 8 closes the loop opened by Units 6 and 7. KPIs have been established, targets have been set, and expectations have been secured. Now the most important discipline of execution begins: the performance review conversation. This unit makes that conversation structured, honest, and useful: a genuine dialogue about execution reality.
-The centrepiece is the Review–Realign–Restore Cycle. Leaders must leave this unit understanding that measurement is an execution recovery system. The Accountability Loop role play in part 4.2 is where the conceptual work becomes a leadership skill, and Section 5 applies the four consequences of weak review discipline to the group’s own strategy.
-The Integration section raises the focus to enterprise level through the Enterprise Performance Intelligence Circle (EPIC), shifting leaders from functional reporting to shared execution intelligence.
-Unit overview (facilitator file): Strategy fails when progress is not consistently examined. This unit establishes the review discipline that keeps strategy execution visible, surfaces early warning signals, and converts performance data into organisational intelligence through the Review–Realign–Restore cycle.</a:t>
+              <a:t>UNIT 8 · PERFORMANCE MEASUREMENT</a:t>
+            </a:r>
+          </a:p>
+          <a:p>
+            <a:r>
+              <a:t>Module 3 · Influence · Unit 8</a:t>
+            </a:r>
+          </a:p>
+          <a:p/>
+          <a:p>
+            <a:r>
+              <a:t>Unit intent (Facilitator Guide):</a:t>
+            </a:r>
+          </a:p>
+          <a:p>
+            <a:r>
+              <a:t>Unit 8 closes the loop opened by Units 6 and 7. KPIs have been established, targets have been set, and expectations have been secured. Now the most important discipline of execution begins: the performance review conversation. Each review examines two things: the progress of what individuals and teams deliver, and whether the organisational conditions support the execution of their tasks. This unit makes that conversation structured, honest, and useful: a genuine dialogue about execution reality.</a:t>
+            </a:r>
+          </a:p>
+          <a:p>
+            <a:r>
+              <a:t>The centrepiece is the Review–Realign–Restore Cycle. Leaders must leave this unit understanding that measurement is an execution recovery system. The Accountability Loop role play in part 4.2 is where the conceptual work becomes a leadership skill, and Section 5 applies the four consequences of weak review discipline to the group’s own strategy.</a:t>
+            </a:r>
+          </a:p>
+          <a:p>
+            <a:r>
+              <a:t>The Integration section raises the focus to enterprise level through the Enterprise Performance Intelligence Circle (EPIC), shifting leaders from functional reporting to shared execution intelligence.</a:t>
+            </a:r>
+          </a:p>
+          <a:p/>
+          <a:p>
+            <a:r>
+              <a:t>Unit overview (facilitator file): Strategy fails when progress is not consistently examined. This unit establishes the review discipline that keeps strategy execution visible, surfaces early warning signals, and converts performance data into organisational intelligence through the Review–Realign–Restore cycle.</a:t>
             </a:r>
           </a:p>
         </p:txBody>
@@ -398,198 +423,309 @@
           <a:lstStyle/>
           <a:p>
             <a:r>
-              <a:rPr lang="en-US" dirty="0"/>
-              <a:t>2.1 — FOUR CONSEQUENCES OF WEAK REVIEW DISCIPLINE
-What determines the velocity of the flight?</a:t>
-            </a:r>
-            <a:r>
-              <a:rPr lang="en-ZA" b="1" dirty="0"/>
-              <a:t/>
-            </a:r>
-          </a:p>
-          <a:p>
-            <a:r>
-              <a:rPr lang="en-ZA" dirty="0"/>
+              <a:t>2.1 — FOUR CONSEQUENCES OF WEAK REVIEW DISCIPLINE</a:t>
+            </a:r>
+          </a:p>
+          <a:p/>
+          <a:p>
+            <a:r>
+              <a:t>What determines the velocity of the flight?</a:t>
+            </a:r>
+          </a:p>
+          <a:p>
+            <a:r>
               <a:t>An aircraft's progress depends on continuously interpreting evidence and acting at the appropriate time. A changing wind condition, fuel concern, missed altitude restriction or unstable approach calls for a different decision.</a:t>
             </a:r>
           </a:p>
           <a:p>
             <a:r>
-              <a:rPr lang="en-ZA" dirty="0"/>
               <a:t>These decisions cannot all be deferred until landing. By then, the opportunity to respond to an earlier condition may have passed.</a:t>
             </a:r>
           </a:p>
           <a:p>
             <a:r>
-              <a:rPr lang="en-ZA" dirty="0"/>
               <a:t>The same principle applies to strategy execution.</a:t>
             </a:r>
           </a:p>
           <a:p>
             <a:r>
-              <a:rPr lang="en-ZA" dirty="0"/>
               <a:t>Execution velocity is the rate at which an organisation converts strategic intent into measurable results. That rate is shaped by how quickly leaders detect progress or deviation, understand its causes, make decisions and translate those decisions into action.</a:t>
             </a:r>
           </a:p>
           <a:p>
             <a:r>
-              <a:rPr lang="en-ZA" dirty="0"/>
               <a:t>Performance measurement provides the evidence. Review discipline converts that evidence into timely decisions.</a:t>
             </a:r>
           </a:p>
           <a:p>
             <a:r>
-              <a:rPr lang="en-ZA" dirty="0"/>
               <a:t>This is why organisations can have well-designed strategies, clearly assigned KPIs and detailed execution plans, yet still experience slow progress. The measures may exist, but the rhythm of examining them, resolving constraints and adjusting execution may be weak.</a:t>
             </a:r>
           </a:p>
           <a:p>
             <a:r>
-              <a:rPr lang="en-ZA" b="1" dirty="0"/>
               <a:t>2 — Four Consequences of Weak Review Discipline</a:t>
             </a:r>
           </a:p>
           <a:p>
             <a:r>
-              <a:rPr lang="en-ZA" dirty="0"/>
               <a:t>When performance reviews become irregular or superficial, the organisation loses the discipline that keeps execution moving. Four predictable consequences emerge.</a:t>
             </a:r>
           </a:p>
           <a:p>
             <a:r>
-              <a:rPr lang="en-ZA" dirty="0"/>
               <a:t>Consequence 01 — Early Warning Signals Are Missed</a:t>
             </a:r>
           </a:p>
           <a:p>
             <a:r>
-              <a:rPr lang="en-ZA" dirty="0"/>
               <a:t>Execution problems usually begin with small deviations: a missed milestone, a growing bottleneck or a capability gap. In aviation, these are comparable to performance indications that require attention well before the aircraft reaches a critical decision point.</a:t>
             </a:r>
           </a:p>
           <a:p>
             <a:r>
-              <a:rPr lang="en-ZA" dirty="0"/>
               <a:t>When leaders review performance too late, minor deviations become major delivery problems. The organisation loses valuable time to intervene.</a:t>
             </a:r>
           </a:p>
           <a:p>
             <a:r>
-              <a:rPr lang="en-ZA" dirty="0"/>
               <a:t>Velocity impact: Corrections become slower, more expensive and more disruptive.</a:t>
             </a:r>
           </a:p>
           <a:p>
             <a:r>
-              <a:rPr lang="en-ZA" dirty="0"/>
               <a:t>Facilitator prompt: "How long does it usually take your organisation to recognise and act on an execution problem? What happens to momentum during that delay?"</a:t>
             </a:r>
           </a:p>
           <a:p>
             <a:r>
-              <a:rPr lang="en-ZA" dirty="0"/>
               <a:t>Consequence 02 — Accountability Gradually Weakens</a:t>
             </a:r>
           </a:p>
           <a:p>
             <a:r>
-              <a:rPr lang="en-ZA" dirty="0"/>
               <a:t>In aviation, responsibilities and procedures remain active throughout the journey. The crew cannot treat the flight plan as an intention that no longer requires attention.</a:t>
             </a:r>
           </a:p>
           <a:p>
             <a:r>
-              <a:rPr lang="en-ZA" dirty="0"/>
               <a:t>Similarly, KPIs lose their operational force when leaders stop discussing them. Owners begin to interpret the absence of review as reduced priority. Commitments remain documented, but the urgency to deliver fades.</a:t>
             </a:r>
           </a:p>
           <a:p>
             <a:r>
-              <a:rPr lang="en-ZA" dirty="0"/>
               <a:t>Velocity impact: Follow-through weakens, decisions are delayed and delivery commitments begin to slip.</a:t>
             </a:r>
           </a:p>
           <a:p>
             <a:r>
-              <a:rPr lang="en-ZA" dirty="0"/>
               <a:t>Facilitator prompt: "Which KPIs in your organisation are actively managed, and which are simply recorded on a scorecard?"</a:t>
             </a:r>
           </a:p>
           <a:p>
             <a:r>
-              <a:rPr lang="en-ZA" dirty="0"/>
               <a:t>Consequence 03 — Organisational Learning Is Lost</a:t>
             </a:r>
           </a:p>
           <a:p>
             <a:r>
-              <a:rPr lang="en-ZA" dirty="0"/>
               <a:t>Flight crews and airlines use operational data and post-flight reviews to understand deviations and improve future performance.</a:t>
             </a:r>
           </a:p>
           <a:p>
             <a:r>
-              <a:rPr lang="en-ZA" dirty="0"/>
               <a:t>Organisations also generate learning through execution. Each review can reveal which methods are working, where dependencies are failing and what adjustments improve results. When reviews become reporting exercises, this knowledge is seldom translated into better decisions or routines.</a:t>
             </a:r>
           </a:p>
           <a:p>
             <a:r>
-              <a:rPr lang="en-ZA" dirty="0"/>
               <a:t>Velocity impact: Teams repeat avoidable mistakes and execution capability improves slowly.</a:t>
             </a:r>
           </a:p>
           <a:p>
             <a:r>
-              <a:rPr lang="en-ZA" dirty="0"/>
               <a:t>Facilitator prompt: "What have your performance reviews taught your organisation about how to improve execution over the past year?"</a:t>
             </a:r>
           </a:p>
           <a:p>
             <a:r>
-              <a:rPr lang="en-ZA" dirty="0"/>
               <a:t>Consequence 04 — Leadership Credibility Erodes</a:t>
             </a:r>
           </a:p>
           <a:p>
             <a:r>
-              <a:rPr lang="en-ZA" dirty="0"/>
               <a:t>A flight plan is credible because the crew actively manages the journey against it. Every stage requires attention to the destination, operating conditions and agreed procedures.</a:t>
             </a:r>
           </a:p>
           <a:p>
             <a:r>
-              <a:rPr lang="en-ZA" dirty="0"/>
               <a:t>Strategic commitments work similarly. When leaders announce priorities but rarely return to them in performance discussions, teams learn that the organisation's stated ambitions do not consistently shape management attention.</a:t>
             </a:r>
           </a:p>
           <a:p>
             <a:r>
-              <a:rPr lang="en-ZA" dirty="0"/>
               <a:t>Velocity impact: Strategic urgency declines, cross-functional commitment weakens and execution loses collective momentum.</a:t>
             </a:r>
           </a:p>
           <a:p>
             <a:r>
-              <a:rPr lang="en-ZA"/>
               <a:t>Facilitator prompt: "What do your teams learn about strategic priorities from what leadership consistently reviews?"</a:t>
             </a:r>
           </a:p>
-          <a:p>
-            <a:endParaRPr dirty="0"/>
-          </a:p>
-          <a:p>
-            <a:endParaRPr lang="en-GB" dirty="0"/>
-          </a:p>
-          <a:p>
-            <a:r>
-              <a:rPr lang="en-GB" b="1" dirty="0"/>
+          <a:p/>
+          <a:p/>
+          <a:p>
+            <a:r>
+              <a:t>THE HUMAN SIDE AND THE ORGANISATION SIDE OF EACH CONSEQUENCE:</a:t>
+            </a:r>
+          </a:p>
+          <a:p/>
+          <a:p>
+            <a:r>
+              <a:t>01 · Early Warning Signals Are Missed</a:t>
+            </a:r>
+          </a:p>
+          <a:p>
+            <a:r>
+              <a:t>Human side: early warnings on the human side show in the review conversation before they show in the KPI. Three patterns recur. The quality of evidence falls: results give way to explanations, and percentages arrive without the evidence behind them. Alignment drifts: the individual who rated alignment at 9 when the target was agreed now gives short, guarded answers about the target, and no one asks the alignment question again. Effort migrates: the individual's time moves to work that senior leaders ask about, and the KPI receives what is left. Each pattern leads a missed KPI by weeks. A leader who reviews monthly sees it as a trend across two or three conversations; a leader who reviews at quarter end sees the result alone. The difference is the recovery available: a capability gap seen in week four can be met with coaching; the same gap seen in week twelve leaves a revised target.</a:t>
+            </a:r>
+          </a:p>
+          <a:p>
+            <a:r>
+              <a:t>Organisation side: an early warning on the organisation side is evidence that an organisational condition has started to weaken in its support for the individuals' tasks. It seldom carries a number of its own, so the review sees it only when it asks for it.</a:t>
+            </a:r>
+          </a:p>
+          <a:p>
+            <a:r>
+              <a:t>Resources · workforce capacity. A contact centre carries a customer-retention Key Result. Two agents resign and their posts stay open for a quarter. The remaining team covers the volume through overtime, and resolution times hold for six weeks, then fall sharply as absenteeism rises. The vacancy and the overtime were on record weeks before the KPI moved.</a:t>
+            </a:r>
+          </a:p>
+          <a:p>
+            <a:r>
+              <a:t>Environment · psychological safety. In a function where raising a problem in front of senior leaders has carried a cost, team leads report amber milestones as green. The review sees on-track ratings until a milestone is missed. The warning was there all along: months without a single amber rating.</a:t>
+            </a:r>
+          </a:p>
+          <a:p>
+            <a:r>
+              <a:t>Systems · data integrity. Sales, operations and finance each report from their own platform, and every cross-functional figure is consolidated by hand. The executive review works on information a week old, and a slipping delivery reaches the review after customers have already escalated it.</a:t>
+            </a:r>
+          </a:p>
+          <a:p>
+            <a:r>
+              <a:t>Measures or evidence of readiness for each condition give these signals a place in the review. When the review does not ask for them, the condition shows itself through the KPI it was meant to support.</a:t>
+            </a:r>
+          </a:p>
+          <a:p/>
+          <a:p>
+            <a:r>
+              <a:t>02 · Gradual Diffusion of Accountability</a:t>
+            </a:r>
+          </a:p>
+          <a:p>
+            <a:r>
+              <a:t>Human side: individuals read priority from the review agenda. When a KPI is absent from three reviews in a row, the conclusion is reasonable: leadership attention has moved. Accountability then weakens in three ways. The KPI is managed for appearance: updates are written to reassure, and risks are held until they can no longer be hidden. Ownership of a shared KPI spreads thin: each individual assumes another is carrying the result, and the dependencies between them belong to no one. The commitment loses its force: the commitment given when the target was agreed has not been tested since. When the gap finally surfaces, the review becomes a search for who was responsible. The Accountability Loop cannot diagnose a commitment no one has been asked about.</a:t>
+            </a:r>
+          </a:p>
+          <a:p>
+            <a:r>
+              <a:t>Organisation side: leaders make commitments on organisational conditions when targets are agreed. These commitments seldom appear on any scorecard, so they diffuse first.</a:t>
+            </a:r>
+          </a:p>
+          <a:p>
+            <a:r>
+              <a:t>Resources · capability alignment. A new procurement system is introduced with the promise that every buyer will be trained. Three months later half the buyers are untrained and purchase orders take twice as long. The buyers' cycle-time KPI is reviewed every month; the training commitment has never been raised.</a:t>
+            </a:r>
+          </a:p>
+          <a:p>
+            <a:r>
+              <a:t>Governance · clear accountability. A regional manager is accountable for a margin Key Result, yet every discount above a set level still needs head-office sign-off. The change to the delegation was approved in principle and never issued. The manager carries the accountability without the authority to deliver it.</a:t>
+            </a:r>
+          </a:p>
+          <a:p>
+            <a:r>
+              <a:t>Individuals remain held to their targets while the support they were promised quietly lapses. Mutual accountability becomes one-sided, and individuals protect themselves: they commit to less, document more and move from commitment to compliance.</a:t>
+            </a:r>
+          </a:p>
+          <a:p/>
+          <a:p>
+            <a:r>
+              <a:t>03 · Loss of Organisational Learning</a:t>
+            </a:r>
+          </a:p>
+          <a:p>
+            <a:r>
+              <a:t>Human side: every review produces evidence on how results are achieved, and that evidence is the raw material of the organisation's performance capability. Practices that accelerate progress: one regional team meets its targets because its manager runs a short daily huddle on the Key Result. Recorded and examined, the practice can be taught to other teams. Unexamined, it stays one manager's habit and leaves when that manager leaves. Capability gaps that recur: when the same skill gap appears in reviews across several functions, it signals a development need at enterprise level. Behaviours that strengthen ownership: reviews show which leaders' teams surface problems early and which conceal them. When reviews only record results, talent decisions, development plans and succession rest on ratings with no evidence of how the results were achieved. The organisation keeps rewarding outcomes it cannot reproduce.</a:t>
+            </a:r>
+          </a:p>
+          <a:p>
+            <a:r>
+              <a:t>Organisation side: reviews also show how the organisational conditions behave as the strategy places weight on them. The learning is cumulative: the same constraint appearing in several reviews is evidence that a condition is not yet equal to the strategy.</a:t>
+            </a:r>
+          </a:p>
+          <a:p>
+            <a:r>
+              <a:t>Systems · process clarity. Three functions each report delays at the handover between sales order and dispatch. Reviewed function by function, each delay looks local. Reviewed together, they show one handover that no one is responsible for.</a:t>
+            </a:r>
+          </a:p>
+          <a:p>
+            <a:r>
+              <a:t>Resources · financial support. For two years running, the budget for strategic initiatives is released in the second quarter, and each year the initiatives deliver in the second half alone. The pattern becomes visible only when reviews are compared across cycles.</a:t>
+            </a:r>
+          </a:p>
+          <a:p>
+            <a:r>
+              <a:t>Governance · decision authority. Capital requests above a set value wait a month on average for an executive decision, and every Key Result that depends on one slips by about the same margin.</a:t>
+            </a:r>
+          </a:p>
+          <a:p>
+            <a:r>
+              <a:t>When reviews do not capture this learning, the organisation sets its next strategy on the same conditions. Targets rise, the conditions stay where they were, and the same constraints slow execution again. This learning is the evidence the executive team needs to judge whether the organisation can carry its next level of ambition.</a:t>
+            </a:r>
+          </a:p>
+          <a:p/>
+          <a:p>
+            <a:r>
+              <a:t>04 · Erodes Leadership Credibility</a:t>
+            </a:r>
+          </a:p>
+          <a:p>
+            <a:r>
+              <a:t>Human side: credibility is built in the review. A leader who asks for evidence every month, recognises progress and addresses shortfalls consistently shows that the priority is real. Two patterns erode it. Priorities that fade: a strategic KPI launched with energy disappears from the review agenda, and individuals conclude the announcement was symbolic. High performers, who invest most in strategic commitments, become the most sceptical, and the organisation learns to wait and see whether a priority survives its first quarter. Standards applied unevenly: some individuals' KPIs are examined closely while others are excused, often by seniority. Individuals read this as unfairness, and commitment falls across the whole team.</a:t>
+            </a:r>
+          </a:p>
+          <a:p>
+            <a:r>
+              <a:t>Organisation side: leaders make commitments when they agree organisational conditions, and individuals track these closely because their own delivery depends on them. Credibility on this side is a test of fairness.</a:t>
+            </a:r>
+          </a:p>
+          <a:p>
+            <a:r>
+              <a:t>Environment · values and consequences. The organisation states accountability as a value. A junior manager is challenged in the review for a missed milestone, while a senior executive's missed commitment to release staff for the same project is never raised.</a:t>
+            </a:r>
+          </a:p>
+          <a:p>
+            <a:r>
+              <a:t>Environment · psychological safety. Leaders invite open reporting of risks, and the first person to raise a delivery risk in a review is questioned in front of peers. From then on, risks reach the review late.</a:t>
+            </a:r>
+          </a:p>
+          <a:p>
+            <a:r>
+              <a:t>Governance · execution oversight. The executive team commits to a monthly decision forum to clear constraints, then postpones it twice in one quarter while the decisions wait.</a:t>
+            </a:r>
+          </a:p>
+          <a:p>
+            <a:r>
+              <a:t>When leaders review individuals' targets and leave their own commitments unreviewed, individuals see accountability running one way. Reviewing both, to the same evidence standard, shows that leaders hold themselves to the standard they set for others.</a:t>
+            </a:r>
+          </a:p>
+          <a:p/>
+          <a:p>
+            <a:r>
               <a:t>ON THE PORTAL, AFTER THE TEACHING:</a:t>
             </a:r>
           </a:p>
           <a:p>
             <a:r>
-              <a:rPr lang="en-GB" dirty="0"/>
               <a:t>Participants write the reflection at the foot of part 2.1: where they have seen the velocity gap in their own setting, the point where it opened (detecting the deviation, understanding its cause, making the decision or translating it into action), the consequence that followed and what the delay cost.</a:t>
             </a:r>
           </a:p>
@@ -676,89 +812,83 @@
           <a:lstStyle/>
           <a:p>
             <a:r>
-              <a:rPr lang="en-GB" b="1" dirty="0"/>
               <a:t>SECTION 3 · EXTRAPOLATING — WHERE</a:t>
             </a:r>
           </a:p>
           <a:p>
             <a:r>
-              <a:rPr lang="en-GB" dirty="0"/>
               <a:t>Where Does Performance Measurement Break Down Across Functions?</a:t>
             </a:r>
           </a:p>
-          <a:p>
-            <a:endParaRPr lang="en-GB" dirty="0"/>
-          </a:p>
-          <a:p>
-            <a:r>
-              <a:rPr lang="en-GB" b="1" dirty="0"/>
+          <a:p/>
+          <a:p>
+            <a:r>
               <a:t>SECTION LEARNING OUTCOMES:</a:t>
             </a:r>
           </a:p>
           <a:p>
             <a:r>
-              <a:rPr lang="en-GB" dirty="0"/>
               <a:t>1. Identify where the review and interpretation of performance evidence break down across functions.</a:t>
             </a:r>
           </a:p>
           <a:p>
             <a:r>
-              <a:rPr lang="en-GB" dirty="0"/>
               <a:t>2. Assess which breakdown is most prevalent in their own organisation.</a:t>
             </a:r>
           </a:p>
-          <a:p>
-            <a:endParaRPr lang="en-GB" dirty="0"/>
-          </a:p>
-          <a:p>
-            <a:r>
-              <a:rPr lang="en-GB" b="1" dirty="0"/>
+          <a:p/>
+          <a:p>
+            <a:r>
               <a:t>HOW TO OPEN THE SECTION:</a:t>
             </a:r>
           </a:p>
-          <a:p>
-            <a:endParaRPr lang="en-GB" dirty="0"/>
-          </a:p>
-          <a:p>
-            <a:r>
-              <a:rPr lang="en-GB" b="1" dirty="0"/>
+          <a:p/>
+          <a:p>
+            <a:r>
               <a:t>1. Give the provocation.</a:t>
             </a:r>
           </a:p>
           <a:p>
             <a:r>
-              <a:rPr lang="en-GB" dirty="0"/>
               <a:t>Say: "Most modern organisations have agreed goals and KPIs, dashboards, reporting tools, and performance frameworks. The breakdown usually occurs in how leaders review and interpret the measurement together."</a:t>
             </a:r>
           </a:p>
-          <a:p>
-            <a:endParaRPr lang="en-GB" dirty="0"/>
-          </a:p>
-          <a:p>
-            <a:r>
-              <a:rPr lang="en-GB" b="1" dirty="0"/>
+          <a:p/>
+          <a:p>
+            <a:r>
               <a:t>2. Say what the section holds.</a:t>
             </a:r>
           </a:p>
           <a:p>
             <a:r>
-              <a:rPr lang="en-GB" dirty="0"/>
               <a:t>Say: "Part 3.1 gives the four gaps. Part 3.2 shows which executive roles most often feed each gap."</a:t>
             </a:r>
           </a:p>
-          <a:p>
-            <a:endParaRPr lang="en-GB" dirty="0"/>
-          </a:p>
-          <a:p>
-            <a:r>
-              <a:rPr lang="en-GB" b="1" dirty="0"/>
+          <a:p/>
+          <a:p>
+            <a:r>
               <a:t>3. Name the question that runs through it.</a:t>
             </a:r>
           </a:p>
           <a:p>
             <a:r>
-              <a:rPr lang="en-GB" dirty="0"/>
               <a:t>Say: "The question for this section is: Is the chain of execution across our functions holding together?"</a:t>
+            </a:r>
+          </a:p>
+          <a:p/>
+          <a:p>
+            <a:r>
+              <a:t>TEACHING NOTES FROM THE FACILITATOR GUIDE:</a:t>
+            </a:r>
+          </a:p>
+          <a:p>
+            <a:r>
+              <a:t>3.1 · Four Fractures in Performance Measurement. Teach the four gaps as observable patterns and invite participants to place their organisation honestly on each one, each with its implication for human performance and for organisational performance. The Horizontal Coordination Gap is typically the most impactful but least visible: each function may report strong progress while the enterprise outcome remains inconsistent. The Learning Suppression Gap is often the most culturally embedded and the hardest to shift, because it requires leaders to move from a judgement posture to a curiosity posture.</a:t>
+            </a:r>
+          </a:p>
+          <a:p>
+            <a:r>
+              <a:t>3.2 · The CXO Performance Gap Contributors. Teach the logic of the cards first: how the role reviews performance (its meetings and its evidence), what the role does in those reviews, and what happens as a result, which opens one of the four fractures of part 3.1. Then take each participant's own role first and the two roles closest to it. Participants complete the reflection on the fracture they are most prone to as Portfolio work.</a:t>
             </a:r>
           </a:p>
         </p:txBody>
@@ -844,47 +974,147 @@
           <a:lstStyle/>
           <a:p>
             <a:r>
-              <a:rPr lang="en-US" dirty="0"/>
-              <a:t>3.1 — FOUR FRACTURES IN PERFORMANCE MEASUREMENT
-Content:
-Performance measurement is ultimately a leadership conversation discipline. When that discipline weakens, several predictable fractures appear across the organisation. Select each gap below to examine where it occurs and what it costs.
-Gap 01
-The Horizontal Coordination Gap
-One of the most common breakdowns occurs when performance reviews happen inside functions, with no cross-functional view. Each department reviews its KPIs independently. Finance examines financial indicators. Operations reviews throughput. Marketing examines campaign performance. Individually, these conversations may be rigorous and technically sound.
-But strategy execution rarely moves through a single function. Enterprise outcomes depend on interdependent execution across multiple functions. When performance reviews remain confined within functional boundaries, leaders see partial performance signals and miss the full execution pattern. Each function may report strong progress while the overall strategic outcome remains inconsistent.
-The leadership team, acting as the collective intelligence for execution discipline, closes this gap by introducing periodic cross-functional performance reviews where the executive team collectively examines how the KPIs across functions interact to produce enterprise outcomes.
-Facilitator question: “Name a strategic outcome in your organisation that required three or more functions to execute successfully. Where did the handoffs break down — and would a cross-functional review have caught it earlier?”
-Gap 02
-The Evidence Quality Gap
-Performance measurement loses power when review conversations rely on weak or inconsistent evidence. In some cases KPI owners present narrative explanations with no verifiable indicators. In others, the evidence reflects activity alone, with no evidence of progress toward the outcome. Sometimes information arrives too late to support timely decisions.
-When evidence quality declines, review conversations shift away from execution insight and toward interpretation debates. Leaders begin discussing whether the data can be trusted, and the review loses sight of what the data reveals about progress. Over time, the credibility of the performance system weakens.
-Closing this gap requires the leadership team, acting as the collective intelligence for execution discipline, to reinforce a simple but powerful principle: every performance review must be anchored in verifiable evidence that shows observable movement toward the outcome, is timely enough to inform decisions, and is clearly connected to the KPI, target, or Key Result being assessed.
-Facilitator question: “In your last performance review, what percentage of the conversation was spent debating the data versus acting on it? That ratio is a proxy for your evidence quality gap.”
-Gap 03
-The Review Rhythm Breakdown
-Even well-designed performance systems weaken if the organisation does not maintain a consistent rhythm of review conversations. Strategy execution unfolds over time. Progress appears gradually through incremental movement across weeks and months. If review conversations occur too infrequently, leaders lose visibility into the trajectory of that movement. Small deviations accumulate unnoticed until they become significant performance gaps.
-Irregular review cycles also weaken behavioural discipline. KPI owners begin to treat measurement as a reporting event.
-Healthy performance measurement requires a predictable organisational rhythm. Leaders know when reviews will occur. KPI owners know when evidence must be prepared. Teams expect progress to be examined regularly. This rhythm creates a cultural signal: execution progress is observed continuously.
-Facilitator question: “How predictable is your organisation’s review rhythm? If a KPI owner was asked to describe the review schedule without referring to a calendar, could they?”
-Gap 04
-The Learning Suppression Gap
-A subtle but corrosive breakdown appears when performance reviews focus exclusively on evaluation. If review conversations concentrate only on whether targets were achieved, teams often become cautious about discussing obstacles openly. People instinctively defend results and leave the deeper causes unexplored. This dynamic suppresses organisational learning.
-Yet strategy execution is inherently experimental. Organisations are constantly discovering what works, where friction exists, and how coordination across functions actually unfolds. Healthy performance reviews therefore balance accountability with curiosity. Leaders examine evidence rigorously, yet they also explore what the organisation is learning from execution patterns.
-Questions shift from “Why was the target missed?” to “What is the system teaching us about how execution actually works?” When this learning dimension becomes part of review conversations, performance measurement evolves from a scoring mechanism into a capability-building system.
-Facilitator question: “What is the dominant mood in your organisation’s performance review meetings — defence or curiosity? What would shift it?”</a:t>
-            </a:r>
-          </a:p>
-          <a:p>
-            <a:endParaRPr lang="en-US" dirty="0"/>
-          </a:p>
+              <a:t>3.1 — FOUR FRACTURES IN PERFORMANCE MEASUREMENT</a:t>
+            </a:r>
+          </a:p>
+          <a:p/>
+          <a:p>
+            <a:r>
+              <a:t>Content:</a:t>
+            </a:r>
+          </a:p>
+          <a:p>
+            <a:r>
+              <a:t>Performance measurement is ultimately a leadership conversation discipline. When that discipline weakens, several predictable fractures appear across the organisation. Select each gap below to examine where it occurs and what it costs.</a:t>
+            </a:r>
+          </a:p>
+          <a:p>
+            <a:r>
+              <a:t>Gap 01</a:t>
+            </a:r>
+          </a:p>
+          <a:p>
+            <a:r>
+              <a:t>The Horizontal Coordination Gap</a:t>
+            </a:r>
+          </a:p>
+          <a:p>
+            <a:r>
+              <a:t>One of the most common breakdowns occurs when performance reviews happen inside functions, with no cross-functional view. Each department reviews its KPIs independently. Finance examines financial indicators. Operations reviews throughput. Marketing examines campaign performance. Individually, these conversations may be rigorous and technically sound.</a:t>
+            </a:r>
+          </a:p>
+          <a:p>
+            <a:r>
+              <a:t>But strategy execution rarely moves through a single function. Enterprise outcomes depend on interdependent execution across multiple functions. When performance reviews remain confined within functional boundaries, leaders see partial performance signals and miss the full execution pattern. Each function may report strong progress while the overall strategic outcome remains inconsistent.</a:t>
+            </a:r>
+          </a:p>
+          <a:p>
+            <a:r>
+              <a:t>The leadership team, acting as the collective intelligence for execution discipline, closes this gap by introducing periodic cross-functional performance reviews where the executive team collectively examines how the KPIs across functions interact to produce enterprise outcomes.</a:t>
+            </a:r>
+          </a:p>
+          <a:p>
+            <a:r>
+              <a:t>Facilitator question: “Name a strategic outcome in your organisation that required three or more functions to execute successfully. Where did the handoffs break down — and would a cross-functional review have caught it earlier?”</a:t>
+            </a:r>
+          </a:p>
+          <a:p>
+            <a:r>
+              <a:t>Gap 02</a:t>
+            </a:r>
+          </a:p>
+          <a:p>
+            <a:r>
+              <a:t>The Evidence Quality Gap</a:t>
+            </a:r>
+          </a:p>
+          <a:p>
+            <a:r>
+              <a:t>Performance measurement loses power when review conversations rely on weak or inconsistent evidence. In some cases KPI owners present narrative explanations with no verifiable indicators. In others, the evidence reflects activity alone, with no evidence of progress toward the outcome. Sometimes information arrives too late to support timely decisions.</a:t>
+            </a:r>
+          </a:p>
+          <a:p>
+            <a:r>
+              <a:t>When evidence quality declines, review conversations shift away from execution insight and toward interpretation debates. Leaders begin discussing whether the data can be trusted, and the review loses sight of what the data reveals about progress. Over time, the credibility of the performance system weakens.</a:t>
+            </a:r>
+          </a:p>
+          <a:p>
+            <a:r>
+              <a:t>Closing this gap requires the leadership team, acting as the collective intelligence for execution discipline, to reinforce a simple but powerful principle: every performance review must be anchored in verifiable evidence that shows observable movement toward the outcome, is timely enough to inform decisions, and is clearly connected to the KPI, target, or Key Result being assessed.</a:t>
+            </a:r>
+          </a:p>
+          <a:p>
+            <a:r>
+              <a:t>Facilitator question: “In your last performance review, what percentage of the conversation was spent debating the data versus acting on it? That ratio is a proxy for your evidence quality gap.”</a:t>
+            </a:r>
+          </a:p>
+          <a:p>
+            <a:r>
+              <a:t>Gap 03</a:t>
+            </a:r>
+          </a:p>
+          <a:p>
+            <a:r>
+              <a:t>The Review Rhythm Breakdown</a:t>
+            </a:r>
+          </a:p>
+          <a:p>
+            <a:r>
+              <a:t>Even well-designed performance systems weaken if the organisation does not maintain a consistent rhythm of review conversations. Strategy execution unfolds over time. Progress appears gradually through incremental movement across weeks and months. If review conversations occur too infrequently, leaders lose visibility into the trajectory of that movement. Small deviations accumulate unnoticed until they become significant performance gaps.</a:t>
+            </a:r>
+          </a:p>
+          <a:p>
+            <a:r>
+              <a:t>Irregular review cycles also weaken behavioural discipline. KPI owners begin to treat measurement as a reporting event.</a:t>
+            </a:r>
+          </a:p>
+          <a:p>
+            <a:r>
+              <a:t>Healthy performance measurement requires a predictable organisational rhythm. Leaders know when reviews will occur. KPI owners know when evidence must be prepared. Teams expect progress to be examined regularly. This rhythm creates a cultural signal: execution progress is observed continuously.</a:t>
+            </a:r>
+          </a:p>
+          <a:p>
+            <a:r>
+              <a:t>Facilitator question: “How predictable is your organisation’s review rhythm? If a KPI owner was asked to describe the review schedule without referring to a calendar, could they?”</a:t>
+            </a:r>
+          </a:p>
+          <a:p>
+            <a:r>
+              <a:t>Gap 04</a:t>
+            </a:r>
+          </a:p>
+          <a:p>
+            <a:r>
+              <a:t>The Learning Suppression Gap</a:t>
+            </a:r>
+          </a:p>
+          <a:p>
+            <a:r>
+              <a:t>A subtle but corrosive breakdown appears when performance reviews focus exclusively on evaluation. If review conversations concentrate only on whether targets were achieved, teams often become cautious about discussing obstacles openly. People instinctively defend results and leave the deeper causes unexplored. This dynamic suppresses organisational learning.</a:t>
+            </a:r>
+          </a:p>
+          <a:p>
+            <a:r>
+              <a:t>Yet strategy execution is inherently experimental. Organisations are constantly discovering what works, where friction exists, and how coordination across functions actually unfolds. Healthy performance reviews therefore balance accountability with curiosity. Leaders examine evidence rigorously, yet they also explore what the organisation is learning from execution patterns.</a:t>
+            </a:r>
+          </a:p>
+          <a:p>
+            <a:r>
+              <a:t>Questions shift from “Why was the target missed?” to “What is the system teaching us about how execution actually works?” When this learning dimension becomes part of review conversations, performance measurement evolves from a scoring mechanism into a capability-building system.</a:t>
+            </a:r>
+          </a:p>
+          <a:p>
+            <a:r>
+              <a:t>Facilitator question: “What is the dominant mood in your organisation’s performance review meetings — defence or curiosity? What would shift it?”</a:t>
+            </a:r>
+          </a:p>
+          <a:p/>
           <a:p>
             <a:r>
               <a:t>Source detail (S2R® manuscript):</a:t>
             </a:r>
           </a:p>
-          <a:p>
-            <a:endParaRPr/>
-          </a:p>
+          <a:p/>
           <a:p>
             <a:r>
               <a:t>Further detail for each gap:</a:t>
@@ -915,17 +1145,148 @@
               <a:t>Gap 04 · Learning Suppression: Over time the organisation becomes more effective at measuring performance and at improving how performance is produced.</a:t>
             </a:r>
           </a:p>
-          <a:p>
-            <a:endParaRPr/>
-          </a:p>
+          <a:p/>
+          <a:p>
+            <a:r>
+              <a:t>IMPLICATIONS FOR HUMAN PERFORMANCE AND FOR ORGANISATIONAL PERFORMANCE:</a:t>
+            </a:r>
+          </a:p>
+          <a:p/>
+          <a:p>
+            <a:r>
+              <a:t>Gap 01 · The Horizontal Coordination Gap</a:t>
+            </a:r>
+          </a:p>
+          <a:p>
+            <a:r>
+              <a:t>Human performance: when each function reviews its own KPIs, individuals are judged on the part of the result they control, and the hand-offs between functions are never examined. An operations planner meets every internal measure while customer orders wait at the boundary with sales. Individuals learn to optimise their own measure, and the commitments they made to other functions go unreviewed: no one is asked whether they delivered what another function needed from them. Individuals whose work depends on another function are held to results they cannot complete alone, and the review sees their shortfall without the dependency behind it.</a:t>
+            </a:r>
+          </a:p>
+          <a:p>
+            <a:r>
+              <a:t>Organisational performance: the organisational conditions that span functions fall between the reviews.</a:t>
+            </a:r>
+          </a:p>
+          <a:p>
+            <a:r>
+              <a:t>Systems · process clarity. The order-to-cash process runs through sales, credit control, the warehouse and finance. Each function reviews its own step and reports it on time. No review sees the end-to-end cycle, which is where the customer experiences the delay.</a:t>
+            </a:r>
+          </a:p>
+          <a:p>
+            <a:r>
+              <a:t>Governance · decision authority. A non-standard customer contract needs approval from legal, finance and operations. Each reports its own turnaround as acceptable; end to end, the decision takes three weeks, and the sales Key Result absorbs the wait.</a:t>
+            </a:r>
+          </a:p>
+          <a:p>
+            <a:r>
+              <a:t>The executive team sees each function's conditions as adequate while the conditions at the boundaries hold back the enterprise result.</a:t>
+            </a:r>
+          </a:p>
+          <a:p/>
+          <a:p>
+            <a:r>
+              <a:t>Gap 02 · The Evidence Quality Gap</a:t>
+            </a:r>
+          </a:p>
+          <a:p>
+            <a:r>
+              <a:t>Human performance: weak evidence harms individuals in two ways. Strong performers cannot show what their contribution changed, and weak delivery stays hidden behind narrative. When the evidence offered is activity, such as training attended or meetings held, the review rates effort. Ratings lose credibility with the individuals themselves, and the performance standard agreed at the start of the period loses its anchor. Over time, individuals learn that the persuasive account is rewarded.</a:t>
+            </a:r>
+          </a:p>
+          <a:p>
+            <a:r>
+              <a:t>Organisational performance: most reviews hold no evidence at all on organisational conditions. Their state is asserted: the system is stable, the roles are filled, the budget is available.</a:t>
+            </a:r>
+          </a:p>
+          <a:p>
+            <a:r>
+              <a:t>Resources · workforce capacity. HR reports headcount at budget. The review does not see that a third of the roles in the unit carrying the Key Result are held by new staff still in training. The evidence that matters is productive capacity: how many of those roles can carry the work today.</a:t>
+            </a:r>
+          </a:p>
+          <a:p>
+            <a:r>
+              <a:t>Systems · workflow visibility. IT reports system availability at 99 per cent. The finance team reports that the month-end report takes three days to run. The first figure describes the system; the second describes whether it supports the tasks.</a:t>
+            </a:r>
+          </a:p>
+          <a:p>
+            <a:r>
+              <a:t>With no evidence standard for the conditions, the review cannot tell whether they support the individuals' tasks, and the discussion settles on the individuals' numbers, the only evidence in the room.</a:t>
+            </a:r>
+          </a:p>
+          <a:p/>
+          <a:p>
+            <a:r>
+              <a:t>Gap 03 · The Review Rhythm Breakdown</a:t>
+            </a:r>
+          </a:p>
+          <a:p>
+            <a:r>
+              <a:t>Human performance: the rhythm of review sets the individuals' planning horizon. Reviewed quarterly, individuals work in quarterly bursts: a slow start, a surge before the period closes and figures prepared for the review. Reviewed irregularly, evidence is assembled in a hurry and the conversation is spent reconstructing what happened. The recoveries of the Accountability Loop need a rhythm short enough for coaching, development or a structural change to take effect within the period.</a:t>
+            </a:r>
+          </a:p>
+          <a:p>
+            <a:r>
+              <a:t>Organisational performance: organisational conditions often have no rhythm of review at all; they reach the agenda when something fails.</a:t>
+            </a:r>
+          </a:p>
+          <a:p>
+            <a:r>
+              <a:t>Governance · execution oversight. Capital and risk decisions follow the board calendar, so a decision on a condition a Key Result depends on can wait up to three months.</a:t>
+            </a:r>
+          </a:p>
+          <a:p>
+            <a:r>
+              <a:t>Resources · financial support. Budgets are reallocated only at the mid-year forecast. An initiative found short of funds in its second month waits until its sixth.</a:t>
+            </a:r>
+          </a:p>
+          <a:p>
+            <a:r>
+              <a:t>Environment · employee sustainability. Workload is seen through the annual engagement survey, so overload in a critical team shows first in resignations.</a:t>
+            </a:r>
+          </a:p>
+          <a:p>
+            <a:r>
+              <a:t>When the conditions are reviewed on a slower rhythm than the KPIs they support, the conditions lag the work they are meant to enable.</a:t>
+            </a:r>
+          </a:p>
+          <a:p/>
+          <a:p>
+            <a:r>
+              <a:t>Gap 04 · The Learning Suppression Gap</a:t>
+            </a:r>
+          </a:p>
+          <a:p>
+            <a:r>
+              <a:t>Human performance: when reviews judge, individuals defend. They bring the explanation and hold back the obstacle, and in the next cycle they propose targets they are sure to meet. Learning moves out of the review into corridors and private conversations. The organisation loses the individuals' first-hand knowledge of what is slowing execution, the most current intelligence it has.</a:t>
+            </a:r>
+          </a:p>
+          <a:p>
+            <a:r>
+              <a:t>Organisational performance: suppression falls hardest on the conditions, because naming a condition often means naming a senior leader's area.</a:t>
+            </a:r>
+          </a:p>
+          <a:p>
+            <a:r>
+              <a:t>Environment · psychological safety. A team lead knows the approval process is the real constraint on the Key Result and does not say so, because the approval sits with the executive who chairs the review.</a:t>
+            </a:r>
+          </a:p>
+          <a:p>
+            <a:r>
+              <a:t>Governance · consistent consequences. Shortfalls in individual KPIs are examined closely, while a condition failure in a senior leader's area passes without examination. People conclude that the conditions are off limits.</a:t>
+            </a:r>
+          </a:p>
+          <a:p>
+            <a:r>
+              <a:t>The review then hears one side of every gap, and the organisation never learns which of its conditions the strategy is outgrowing.</a:t>
+            </a:r>
+          </a:p>
+          <a:p/>
           <a:p>
             <a:r>
               <a:t>Professional insights:</a:t>
             </a:r>
           </a:p>
-          <a:p>
-            <a:endParaRPr/>
-          </a:p>
+          <a:p/>
           <a:p>
             <a:r>
               <a:t>Gap 02 · Evidence Quality: The most corrosive pattern is the gap between advertised and actual performance: dashboards that look green and reports that signal health with no results underneath. Make it safer to disclose a thin harvest than to perform a false one.</a:t>
@@ -936,9 +1297,7 @@
               <a:t>Source: Journal, 27 May 2026 — Professional Insights: Culture</a:t>
             </a:r>
           </a:p>
-          <a:p>
-            <a:endParaRPr/>
-          </a:p>
+          <a:p/>
           <a:p>
             <a:r>
               <a:t>Gap 04 · Learning Suppression: Formal systems can exist while actual behaviour contradicts their purpose. Strategic reviews should examine lived practice alongside formal compliance.</a:t>
@@ -1032,74 +1391,72 @@
           <a:lstStyle/>
           <a:p>
             <a:r>
-              <a:rPr lang="en-GB" b="1" dirty="0"/>
               <a:t>SECTION 4 · INTEGRATION — COLLECTIVE</a:t>
             </a:r>
           </a:p>
           <a:p>
             <a:r>
-              <a:rPr lang="en-GB" dirty="0"/>
               <a:t>Cross-Leadership Performance Intelligence</a:t>
             </a:r>
           </a:p>
-          <a:p>
-            <a:endParaRPr lang="en-GB" dirty="0"/>
-          </a:p>
-          <a:p>
-            <a:r>
-              <a:rPr lang="en-GB" b="1" dirty="0"/>
+          <a:p/>
+          <a:p>
+            <a:r>
               <a:t>SECTION LEARNING OUTCOMES:</a:t>
             </a:r>
           </a:p>
           <a:p>
             <a:r>
-              <a:rPr lang="en-GB" dirty="0"/>
               <a:t>1. Interpret individual performance signals within a shared enterprise view of progress.</a:t>
             </a:r>
           </a:p>
           <a:p>
             <a:r>
-              <a:rPr lang="en-GB" dirty="0"/>
               <a:t>2. Determine the root cause of underperformance and the leadership action it requires.</a:t>
             </a:r>
           </a:p>
-          <a:p>
-            <a:endParaRPr lang="en-GB" dirty="0"/>
-          </a:p>
-          <a:p>
-            <a:r>
-              <a:rPr lang="en-GB" b="1" dirty="0"/>
+          <a:p/>
+          <a:p>
+            <a:r>
               <a:t>HOW TO OPEN THE SECTION:</a:t>
             </a:r>
           </a:p>
-          <a:p>
-            <a:endParaRPr lang="en-GB" dirty="0"/>
-          </a:p>
-          <a:p>
-            <a:r>
-              <a:rPr lang="en-GB" b="1" dirty="0"/>
+          <a:p/>
+          <a:p>
+            <a:r>
               <a:t>1. Name the shift.</a:t>
             </a:r>
           </a:p>
           <a:p>
             <a:r>
-              <a:rPr lang="en-GB" dirty="0"/>
               <a:t>Say: "This section moves from function to enterprise. The question that guides it is the question of part 3.2: Is the chain of execution across our functions holding together?"</a:t>
             </a:r>
           </a:p>
-          <a:p>
-            <a:endParaRPr lang="en-GB" dirty="0"/>
-          </a:p>
-          <a:p>
-            <a:r>
-              <a:rPr lang="en-GB" b="1" dirty="0"/>
+          <a:p/>
+          <a:p>
+            <a:r>
               <a:t>2. Say what the section holds.</a:t>
             </a:r>
           </a:p>
           <a:p>
             <a:r>
-              <a:rPr lang="en-GB" dirty="0"/>
               <a:t>Say: "Part 4.1 teaches the Enterprise Performance Intelligence Circle, EPIC: the three signals each leader brings from their PM review sheet. Part 4.2 takes one Key Result through the Accountability Loop in a role play."</a:t>
+            </a:r>
+          </a:p>
+          <a:p/>
+          <a:p>
+            <a:r>
+              <a:t>TEACHING NOTES FROM THE FACILITATOR GUIDE:</a:t>
+            </a:r>
+          </a:p>
+          <a:p>
+            <a:r>
+              <a:t>4.1 · The Enterprise Performance Intelligence Circle (EPIC). Teach what EPIC is for before its detail: it turns the separate PM reviews of each function into one shared view of enterprise execution. Then teach the three signals each leader brings from their PM review sheet, each by the question it answers: progress, "Where are we on execution?"; early warnings, "What is starting to break?"; execution learning, "What is execution teaching us?" For each signal, teach what the leader brings, the sentence the leader uses and what the executive team sees. Progress comes first because it gives the other two their meaning. Teach the evidence rule with the examples of each signal: every signal names the PM review evidence behind it. This single discipline separates EPIC from an opinion forum.</a:t>
+            </a:r>
+          </a:p>
+          <a:p>
+            <a:r>
+              <a:t>4.2 · The Accountability Loop Role Play. Run the role play in groups of three: leader, team member and observer. The observer deduces how the conversation went through GROW and which root cause it revealed.</a:t>
             </a:r>
           </a:p>
         </p:txBody>
@@ -1479,133 +1836,92 @@
           <a:lstStyle/>
           <a:p>
             <a:r>
-              <a:rPr lang="en-GB" b="1" dirty="0"/>
               <a:t>SECTION 5 · APPLICATION — IN PRACTICE</a:t>
             </a:r>
           </a:p>
           <a:p>
             <a:r>
-              <a:rPr lang="en-GB" dirty="0"/>
               <a:t>Applying the Four Consequences of Weak Review Discipline</a:t>
             </a:r>
           </a:p>
-          <a:p>
-            <a:endParaRPr lang="en-GB" dirty="0"/>
-          </a:p>
-          <a:p>
-            <a:r>
-              <a:rPr lang="en-GB" b="1" dirty="0"/>
+          <a:p/>
+          <a:p>
+            <a:r>
               <a:t>SECTION LEARNING OUTCOMES:</a:t>
             </a:r>
           </a:p>
           <a:p>
             <a:r>
-              <a:rPr lang="en-GB" dirty="0"/>
               <a:t>1. Exercise balanced judgement when performance differs from agreed expectations.</a:t>
             </a:r>
           </a:p>
           <a:p>
             <a:r>
-              <a:rPr lang="en-GB" dirty="0"/>
               <a:t>2. Determine the leadership decisions that protect the review discipline of the strategy.</a:t>
             </a:r>
           </a:p>
-          <a:p>
-            <a:endParaRPr lang="en-GB" dirty="0"/>
-          </a:p>
-          <a:p>
-            <a:r>
-              <a:rPr lang="en-GB" b="1" dirty="0"/>
+          <a:p/>
+          <a:p>
+            <a:r>
               <a:t>HOW THIS SECTION RUNS:</a:t>
             </a:r>
           </a:p>
           <a:p>
             <a:r>
-              <a:rPr lang="en-GB" dirty="0"/>
-              <a:t>This is group work and Capstone work. Section 2 taught the four consequences of weak review discipline. Here, each group guards the strategy in its Capstone Blueprint against each of them.</a:t>
-            </a:r>
-          </a:p>
-          <a:p>
-            <a:r>
-              <a:rPr lang="en-GB" dirty="0"/>
-              <a:t>The group takes the four consequences one at a time, each on its own tab. The lesson from part 2.1 sits above the boxes.</a:t>
-            </a:r>
-          </a:p>
-          <a:p>
-            <a:r>
-              <a:rPr lang="en-GB" dirty="0"/>
-              <a:t>For each consequence, the group writes two decision points. A decision point names the signal the executive team watches for, the decision it takes when the signal appears and who takes it.</a:t>
-            </a:r>
-          </a:p>
-          <a:p>
-            <a:r>
-              <a:rPr lang="en-GB" dirty="0"/>
-              <a:t>Each decision point is one sentence: “If [the signal appears], then [the decision], taken by [who].” For example: “If a Key Result shows no movement across two monthly reviews, its owner presents a recovery plan at the next executive review.”</a:t>
-            </a:r>
-          </a:p>
-          <a:p>
-            <a:r>
-              <a:rPr lang="en-GB" dirty="0"/>
-              <a:t>The group agrees each entry and one member acts as scribe. Every member then types the agreed entries into their own page, in the session or after it.</a:t>
-            </a:r>
-          </a:p>
-          <a:p>
-            <a:r>
-              <a:rPr lang="en-GB" dirty="0"/>
-              <a:t>Each member then reads the group’s record at the foot of the section and selects Confirm. The confirmed record feeds the team’s Capstone Blueprint.</a:t>
-            </a:r>
-          </a:p>
-          <a:p>
-            <a:endParaRPr lang="en-GB" dirty="0"/>
-          </a:p>
-          <a:p>
-            <a:r>
-              <a:rPr lang="en-GB" b="1" dirty="0"/>
+              <a:t>This is group work and Capstone work. For each of the four consequences of weak review discipline, each group:</a:t>
+            </a:r>
+          </a:p>
+          <a:p>
+            <a:r>
+              <a:t>1. Simulates a potential gap in the performance of individuals, and a potential gap in the organisational conditions of its strategy.</a:t>
+            </a:r>
+          </a:p>
+          <a:p>
+            <a:r>
+              <a:t>2. Writes a decision point for recovery for each gap: the decision the executive team takes when the gap appears, and who takes it.</a:t>
+            </a:r>
+          </a:p>
+          <a:p>
+            <a:r>
+              <a:t>The group agrees each entry and one member acts as scribe. Every member types the agreed entries into their own page, then selects Confirm. The confirmed record feeds the team’s Capstone Blueprint.</a:t>
+            </a:r>
+          </a:p>
+          <a:p/>
+          <a:p>
+            <a:r>
               <a:t>HOW TO OPEN THE SECTION:</a:t>
             </a:r>
           </a:p>
-          <a:p>
-            <a:endParaRPr lang="en-GB" dirty="0"/>
-          </a:p>
-          <a:p>
-            <a:r>
-              <a:rPr lang="en-GB" b="1" dirty="0"/>
+          <a:p/>
+          <a:p>
+            <a:r>
               <a:t>1. Say what the section does.</a:t>
             </a:r>
           </a:p>
           <a:p>
             <a:r>
-              <a:rPr lang="en-GB" dirty="0"/>
-              <a:t>Say: "Your group sets two decision points against each of the four consequences of weak review discipline, for the strategy in your team’s Capstone Blueprint."</a:t>
-            </a:r>
-          </a:p>
-          <a:p>
-            <a:endParaRPr lang="en-GB" dirty="0"/>
-          </a:p>
-          <a:p>
-            <a:r>
-              <a:rPr lang="en-GB" b="1" dirty="0"/>
+              <a:t>Say: "For each of the four consequences of weak review discipline, your group simulates a potential gap in the performance of individuals and in the organisational conditions of the strategy in your team’s Capstone Blueprint, and sets a decision point for recovery for each."</a:t>
+            </a:r>
+          </a:p>
+          <a:p/>
+          <a:p>
+            <a:r>
               <a:t>2. Say how the group works.</a:t>
             </a:r>
           </a:p>
           <a:p>
             <a:r>
-              <a:rPr lang="en-GB" dirty="0"/>
               <a:t>Say: "This is group work. Your group agrees each entry. One member acts as scribe. Every member then types the agreed entries into their own page, in the session or after it."</a:t>
             </a:r>
           </a:p>
-          <a:p>
-            <a:endParaRPr lang="en-GB" dirty="0"/>
-          </a:p>
-          <a:p>
-            <a:r>
-              <a:rPr lang="en-GB" b="1" dirty="0"/>
+          <a:p/>
+          <a:p>
+            <a:r>
               <a:t>3. Say where the work goes.</a:t>
             </a:r>
           </a:p>
           <a:p>
             <a:r>
-              <a:rPr lang="en-GB" dirty="0"/>
               <a:t>Say: "This is Capstone work. You read your group’s record at the foot of the section and select Confirm. Your confirmed record feeds your team’s Capstone Blueprint."</a:t>
             </a:r>
           </a:p>
@@ -1784,155 +2100,120 @@
           <a:lstStyle/>
           <a:p>
             <a:r>
-              <a:rPr lang="en-GB" b="1" dirty="0"/>
               <a:t>4.2 — THE ACCOUNTABILITY LOOP ROLE PLAY (PRACTICE IN CLASS)</a:t>
             </a:r>
           </a:p>
-          <a:p>
-            <a:endParaRPr lang="en-GB" dirty="0"/>
-          </a:p>
-          <a:p>
-            <a:r>
-              <a:rPr lang="en-GB" b="1" dirty="0"/>
+          <a:p/>
+          <a:p>
+            <a:r>
               <a:t>HOW TO TEACH IT:</a:t>
             </a:r>
           </a:p>
-          <a:p>
-            <a:endParaRPr lang="en-GB" dirty="0"/>
-          </a:p>
-          <a:p>
-            <a:r>
-              <a:rPr lang="en-GB" b="1" dirty="0"/>
+          <a:p/>
+          <a:p>
+            <a:r>
               <a:t>1. Give the case.</a:t>
             </a:r>
           </a:p>
           <a:p>
             <a:r>
-              <a:rPr lang="en-GB" dirty="0"/>
-              <a:t>Say: "You are a CXO responsible for the Objective and Key Result (OKR): “Reduce customer complaint resolution time from 48 hours to 12 hours.” The Key Result supports the enterprise Objective of improving customer retention. At the start of the quarter, in the Alignment Dialogue, the Head of Customer Service rated their alignment with this Key Result at 9. The latest Review of the Review–Realign–Restore Cycle shows that progress has stalled at 36 hours, six weeks before the deadline, and that alignment has fallen. You must now activate the Accountability Loop to determine which of the three root causes is behind the gap."</a:t>
-            </a:r>
-          </a:p>
-          <a:p>
-            <a:endParaRPr lang="en-GB" dirty="0"/>
-          </a:p>
-          <a:p>
-            <a:r>
-              <a:rPr lang="en-GB" b="1" dirty="0"/>
-              <a:t>2. Assign the three roles.</a:t>
-            </a:r>
-          </a:p>
-          <a:p>
-            <a:r>
-              <a:rPr lang="en-GB" dirty="0"/>
-              <a:t>CXO: "Conducts the accountability conversation on the case. Opens with the evidence and the alignment score, then works through the GROW model with the team member: Goal, Reality, Options and Will. Aims to move the alignment close to 10."</a:t>
-            </a:r>
-          </a:p>
-          <a:p>
-            <a:r>
-              <a:rPr lang="en-GB" dirty="0"/>
-              <a:t>Team Member: "Owns the Key Result. Responds authentically to the conversation, and may show defensiveness, uncertainty or genuine constraint."</a:t>
-            </a:r>
-          </a:p>
-          <a:p>
-            <a:r>
-              <a:rPr lang="en-GB" dirty="0"/>
-              <a:t>Observer: "Notes how the CXO used each stage of the GROW model. Gives feedback after the role play and does not intervene during it."</a:t>
-            </a:r>
-          </a:p>
-          <a:p>
-            <a:r>
-              <a:rPr lang="en-GB" dirty="0"/>
-              <a:t>Give the team member this brief privately: "You own the complaint resolution Key Result and you want the 12-hour target: customers tell you every week that waiting two days is why they leave. You check the numbers every day, and you and your team have been clearing the backlog by hand over weekends. The people and the new ticketing system are in place, and running the team is what you do well. The triage redesign is behind because you cannot tell from the routing reports which complaint types cause the delays, and you have never redesigned a process from data. Share this only when the CXO’s questions bring it out."</a:t>
-            </a:r>
-          </a:p>
-          <a:p>
-            <a:r>
-              <a:rPr lang="en-GB" dirty="0"/>
-              <a:t>The role play case is built on a lack of skill. The Portfolio case participants analyse after class is built on a different root cause.</a:t>
-            </a:r>
-          </a:p>
-          <a:p>
-            <a:r>
-              <a:rPr lang="en-GB" dirty="0"/>
-              <a:t>Brief the CXO with this line: "The leader who receives honest feedback about a genuine problem and responds with honesty before justification, and action before communication, creates the conditions for real leadership." (Journal, 29 June 2026, Professional Insights: Leadership)</a:t>
-            </a:r>
-          </a:p>
-          <a:p>
-            <a:endParaRPr lang="en-GB" dirty="0"/>
-          </a:p>
-          <a:p>
-            <a:r>
-              <a:rPr lang="en-GB" b="1" dirty="0"/>
-              <a:t>3. Run the conversation using GROW.</a:t>
-            </a:r>
-          </a:p>
-          <a:p>
-            <a:r>
-              <a:rPr lang="en-GB" dirty="0"/>
-              <a:t>The CXO opens with the evidence and asks the alignment question, then works through Goal, Reality, Options and Will with the team member.</a:t>
-            </a:r>
-          </a:p>
-          <a:p>
-            <a:r>
-              <a:rPr lang="en-GB" dirty="0"/>
-              <a:t>If the CXO defaults to pressure, pause and redirect: "You have identified the gap. Now ask about the reality behind it before you move to options."</a:t>
-            </a:r>
-          </a:p>
-          <a:p>
-            <a:endParaRPr lang="en-GB" dirty="0"/>
-          </a:p>
-          <a:p>
-            <a:r>
-              <a:rPr lang="en-GB" b="1" dirty="0"/>
-              <a:t>4. Close the conversation.</a:t>
-            </a:r>
-          </a:p>
-          <a:p>
-            <a:r>
-              <a:rPr lang="en-GB" dirty="0"/>
-              <a:t>The CXO closes with the actions, the follow-up and the alignment question asked again, aiming close to 10.</a:t>
-            </a:r>
-          </a:p>
-          <a:p>
-            <a:r>
-              <a:rPr lang="en-GB" dirty="0"/>
+              <a:t>Say: "The Head of Customer Service is responsible for the Key Result: Reduce the average time to resolve customer complaints from 10 working days to 5 by the end of the quarter. It supports the enterprise Objective of improving customer retention. The Complaints Team Leader leads a team of eight agents and was fully committed to the Key Result when it was agreed at the start of the quarter. Seven weeks into the quarter, the latest Review shows that resolution time fell from 10 days to 8 in the first month and has not moved since. The Complaints Team Leader missed the last two weekly check-ins, and their written updates have become short. The Head of Customer Service calls a conversation to establish what lies behind the gap."</a:t>
+            </a:r>
+          </a:p>
+          <a:p/>
+          <a:p>
+            <a:r>
+              <a:t>2. Form the groups of three.</a:t>
+            </a:r>
+          </a:p>
+          <a:p>
+            <a:r>
+              <a:t>Put participants into breakout rooms of three: the leader, the team member and the observer.</a:t>
+            </a:r>
+          </a:p>
+          <a:p>
+            <a:r>
+              <a:t>The leader (Head of Customer Service): decides the goal of the conversation, then works through Reality, Options and Will to reach it.</a:t>
+            </a:r>
+          </a:p>
+          <a:p>
+            <a:r>
+              <a:t>The team member (Complaints Team Leader): responds as the person behind the stalled Key Result, from the root cause they chose.</a:t>
+            </a:r>
+          </a:p>
+          <a:p>
+            <a:r>
+              <a:t>The observer: says nothing during the conversation and completes the observation sheet.</a:t>
+            </a:r>
+          </a:p>
+          <a:p/>
+          <a:p>
+            <a:r>
+              <a:t>3. The team member chooses the root cause.</a:t>
+            </a:r>
+          </a:p>
+          <a:p>
+            <a:r>
+              <a:t>Say: "Team member, before the conversation, choose privately one of the three root causes as the reason behind the gap: Lack of Accountability, Lack of Skill, or Misfit of Role or Structural Constraint. Play the conversation from that position, drawing on your own experience, and tell no one which one you chose."</a:t>
+            </a:r>
+          </a:p>
+          <a:p/>
+          <a:p>
+            <a:r>
+              <a:t>4. Run the conversation.</a:t>
+            </a:r>
+          </a:p>
+          <a:p>
+            <a:r>
+              <a:t>The leader decides what the conversation must achieve and runs it through the GROW model.</a:t>
+            </a:r>
+          </a:p>
+          <a:p>
+            <a:r>
+              <a:t>Brief the leader with this line: "The leader who receives honest feedback about a genuine problem and responds with honesty before justification, and action before communication, creates the conditions for real leadership." (Journal, 29 June 2026, Professional Insights: Leadership)</a:t>
+            </a:r>
+          </a:p>
+          <a:p>
+            <a:r>
+              <a:t>The observer completes the observation sheet: the goal the leader set and whether it was clear; the questions that opened up what is really happening; the root cause and the lines that rule out the other two; who generated the options and whether they matched the root cause; what was agreed, by whom and when it will be reviewed; whether the conversation reached its goal.</a:t>
+            </a:r>
+          </a:p>
+          <a:p>
+            <a:r>
+              <a:t>If the leader defaults to pressure, pause and redirect: "You have identified the gap. Now ask about the reality behind it before you move to options."</a:t>
+            </a:r>
+          </a:p>
+          <a:p/>
+          <a:p>
+            <a:r>
+              <a:t>5. Debrief.</a:t>
+            </a:r>
+          </a:p>
+          <a:p>
+            <a:r>
+              <a:t>The observer reports first: what the leader set out to achieve, how the conversation went at each GROW stage, and which root cause it revealed. The team member then says which root cause they chose. The leader closes with what they would do differently.</a:t>
+            </a:r>
+          </a:p>
+          <a:p>
+            <a:r>
               <a:t>Say: "Accountability without a pathway back becomes punishment. Correct firmly where necessary, and deliberately restore trust, contribution and dignity when change is evident." (Journal, 16 September 2026, Professional Insights: Leadership)</a:t>
             </a:r>
           </a:p>
-          <a:p>
-            <a:endParaRPr lang="en-GB" dirty="0"/>
-          </a:p>
-          <a:p>
-            <a:r>
-              <a:rPr lang="en-GB" b="1" dirty="0"/>
-              <a:t>5. Debrief.</a:t>
-            </a:r>
-          </a:p>
-          <a:p>
-            <a:r>
-              <a:rPr lang="en-GB" dirty="0"/>
-              <a:t>The observer posts in the chat how the CXO used each stage of GROW and the root cause that surfaced.</a:t>
-            </a:r>
-          </a:p>
-          <a:p>
-            <a:r>
-              <a:rPr lang="en-GB" dirty="0"/>
-              <a:t>Ask the CXO: "If you ran this conversation again, what would you change first?"</a:t>
-            </a:r>
-          </a:p>
-          <a:p>
-            <a:endParaRPr lang="en-GB" dirty="0"/>
-          </a:p>
-          <a:p>
-            <a:r>
-              <a:rPr lang="en-GB" b="1" dirty="0"/>
+          <a:p/>
+          <a:p>
+            <a:r>
+              <a:t>This is class practice. Nothing is entered on the portal during the role play.</a:t>
+            </a:r>
+          </a:p>
+          <a:p/>
+          <a:p>
+            <a:r>
               <a:t>ON THE PORTAL, AFTER THE TEACHING:</a:t>
             </a:r>
           </a:p>
           <a:p>
             <a:r>
-              <a:rPr lang="en-GB" dirty="0"/>
-              <a:t>After class, participants complete personal Portfolio work in part 4.2 of their own file. They read a scripted conversation on a different case, in which the root cause is never named. They deduce which of the three root causes is evident and the lines that rule out the other two, work out how GROW was used to resolve it and move the alignment close to 10, and judge how the CXO applied the Accountability Loop against the GROW model.</a:t>
+              <a:t>After class, participants complete personal Portfolio work in part 4.2 of their own file. They read the conversation between the Chief Financial Officer and the Credit Control Manager, in which the root cause is never named. They work out which of the three root causes is evident and the lines that rule out the other two, the goal of the conversation and how Reality, Options and Will led to it, and how well the leader ran the conversation.</a:t>
             </a:r>
           </a:p>
         </p:txBody>
@@ -2018,122 +2299,93 @@
           <a:lstStyle/>
           <a:p>
             <a:r>
-              <a:rPr lang="en-GB" b="1" dirty="0"/>
-              <a:t>4.2 — ANALYSING THE CONVERSATION WITH GROW</a:t>
-            </a:r>
-          </a:p>
-          <a:p>
-            <a:endParaRPr lang="en-GB" dirty="0"/>
-          </a:p>
-          <a:p>
-            <a:r>
-              <a:rPr lang="en-GB" b="1" dirty="0"/>
+              <a:t>4.2 — THE GROW CONVERSATION</a:t>
+            </a:r>
+          </a:p>
+          <a:p/>
+          <a:p>
+            <a:r>
               <a:t>HOW TO USE THIS SLIDE:</a:t>
             </a:r>
           </a:p>
-          <a:p>
-            <a:endParaRPr lang="en-GB" dirty="0"/>
-          </a:p>
-          <a:p>
-            <a:r>
-              <a:rPr lang="en-GB" b="1" dirty="0"/>
-              <a:t>1. Recall GROW from Unit 7.</a:t>
-            </a:r>
-          </a:p>
-          <a:p>
-            <a:r>
-              <a:rPr lang="en-GB" dirty="0"/>
-              <a:t>Say: "The GROW model of Unit 7 is the basis for analysing the conversation. Each stage asks a question, and the individual does the thinking, so the answers reached are their own."</a:t>
-            </a:r>
-          </a:p>
-          <a:p>
-            <a:endParaRPr lang="en-GB" dirty="0"/>
-          </a:p>
-          <a:p>
-            <a:r>
-              <a:rPr lang="en-GB" b="1" dirty="0"/>
+          <a:p/>
+          <a:p>
+            <a:r>
+              <a:t>1. Recall GROW.</a:t>
+            </a:r>
+          </a:p>
+          <a:p>
+            <a:r>
+              <a:t>Say: "The GROW model guides a conversation with an end in mind. Each stage asks a question, and the team member does the thinking, so the answers reached are their own."</a:t>
+            </a:r>
+          </a:p>
+          <a:p/>
+          <a:p>
+            <a:r>
               <a:t>2. Teach each stage as it works in the Accountability Loop.</a:t>
             </a:r>
           </a:p>
           <a:p>
             <a:r>
-              <a:rPr lang="en-GB" dirty="0"/>
-              <a:t>G · Goal: "What the individual wants to reach. In the Accountability Loop: ownership of the Key Result again, an alignment score of 9 or 10." Question: “What would a 9 or 10 look like for you on this Key Result?”</a:t>
-            </a:r>
-          </a:p>
-          <a:p>
-            <a:r>
-              <a:rPr lang="en-GB" dirty="0"/>
-              <a:t>R · Reality: "What is true today. The leader explores what stands behind the score and the gap, and listens without defending the target." Question: “What has moved your alignment from where it was?”</a:t>
-            </a:r>
-          </a:p>
-          <a:p>
-            <a:r>
-              <a:rPr lang="en-GB" dirty="0"/>
-              <a:t>O · Options: "What could be done. The individual generates the ways forward, matched to the root cause." Question: “What could you do? What support would make the difference?”</a:t>
-            </a:r>
-          </a:p>
-          <a:p>
-            <a:r>
-              <a:rPr lang="en-GB" dirty="0"/>
-              <a:t>W · Will: "What will be done, and by whom. The actions, the owner and the follow-up are agreed, and the alignment question is asked again." Question: “With that agreed, where is your alignment now, on the scale of 1–10?”</a:t>
-            </a:r>
-          </a:p>
-          <a:p>
-            <a:endParaRPr lang="en-GB" dirty="0"/>
-          </a:p>
-          <a:p>
-            <a:r>
-              <a:rPr lang="en-GB" b="1" dirty="0"/>
+              <a:t>G · Goal: "What the leader aims to achieve in the conversation. It may be identifying the root cause of the gap, restoring alignment with the Key Result, or both." Question: "What do we want to have agreed by the end of this conversation?"</a:t>
+            </a:r>
+          </a:p>
+          <a:p>
+            <a:r>
+              <a:t>R · Reality: "What is true today. The leader explores what stands behind the gap and listens without defending the target." Question: "What is happening on this Key Result, and what makes it hard?"</a:t>
+            </a:r>
+          </a:p>
+          <a:p>
+            <a:r>
+              <a:t>O · Options: "What could be done. The team member generates the ways forward, matched to the root cause." Question: "What could change? What support would make the difference?"</a:t>
+            </a:r>
+          </a:p>
+          <a:p>
+            <a:r>
+              <a:t>W · Will: "What will be done, by whom and by when, and when it will be reviewed." Question: "What will you do, and when shall we look at it again?"</a:t>
+            </a:r>
+          </a:p>
+          <a:p/>
+          <a:p>
+            <a:r>
               <a:t>3. Brief the observer before the role play.</a:t>
             </a:r>
           </a:p>
           <a:p>
             <a:r>
-              <a:rPr lang="en-GB" dirty="0"/>
-              <a:t>Say: "Note how the CXO used each stage of GROW: did the CXO agree the goal, explore the reality, let the owner generate the options, and close with the will and the alignment question asked again?"</a:t>
-            </a:r>
-          </a:p>
-          <a:p>
-            <a:endParaRPr lang="en-GB" dirty="0"/>
-          </a:p>
-          <a:p>
-            <a:r>
-              <a:rPr lang="en-GB" b="1" dirty="0"/>
+              <a:t>Say: "Note what the leader set out to achieve, and how each stage of GROW moved the conversation toward it: did the leader explore the reality before the options, let the team member generate the options, and close with what will be done, by whom and when it will be reviewed?"</a:t>
+            </a:r>
+          </a:p>
+          <a:p/>
+          <a:p>
+            <a:r>
               <a:t>4. Use GROW in the debrief.</a:t>
             </a:r>
           </a:p>
           <a:p>
             <a:r>
-              <a:rPr lang="en-GB" dirty="0"/>
-              <a:t>The observer posts how the CXO used each stage. Ask the room which stage was hardest to hold, and why.</a:t>
-            </a:r>
-          </a:p>
-          <a:p>
-            <a:r>
-              <a:rPr lang="en-GB" dirty="0"/>
+              <a:t>The observer reports how the leader used each stage. Ask the group which stage was hardest to hold, and why.</a:t>
+            </a:r>
+          </a:p>
+          <a:p>
+            <a:r>
               <a:t>Say: "Leaders who either conceal failure or weaponise it prevent learning. Mature accountability names what went wrong, understands why it happened and moves people toward responsible change." (Journal, 10 August 2026, Professional Insights: Leadership)</a:t>
             </a:r>
           </a:p>
           <a:p>
             <a:r>
-              <a:rPr lang="en-GB" dirty="0"/>
               <a:t>Say: "Holding people accountable for outcomes without considering intent produces a culture of blame. Intent matters." (Journal, 17 March 2026, Professional Insights)</a:t>
             </a:r>
           </a:p>
-          <a:p>
-            <a:endParaRPr lang="en-GB" dirty="0"/>
-          </a:p>
-          <a:p>
-            <a:r>
-              <a:rPr lang="en-GB" b="1" dirty="0"/>
+          <a:p/>
+          <a:p>
+            <a:r>
               <a:t>ON THE PORTAL, AFTER THE TEACHING:</a:t>
             </a:r>
           </a:p>
           <a:p>
             <a:r>
-              <a:rPr lang="en-GB" dirty="0"/>
-              <a:t>After class, in part 4.2 of their own file, participants deduce the root cause in a scripted conversation, work out how GROW was used to resolve it, and judge how the CXO applied the Accountability Loop.</a:t>
+              <a:t>After class, in part 4.2 of their own file, participants work out the root cause in a full conversation on a new case, the goal of the conversation and how Reality, Options and Will led to it, and how well the leader ran the conversation.</a:t>
             </a:r>
           </a:p>
         </p:txBody>
@@ -2219,91 +2471,67 @@
           <a:lstStyle/>
           <a:p>
             <a:r>
-              <a:rPr lang="en-GB" b="1" dirty="0"/>
               <a:t>SECTION 2 REFLECTIONS</a:t>
             </a:r>
           </a:p>
-          <a:p>
-            <a:endParaRPr lang="en-GB" dirty="0"/>
-          </a:p>
-          <a:p>
-            <a:r>
-              <a:rPr lang="en-GB" b="1" dirty="0"/>
+          <a:p/>
+          <a:p>
+            <a:r>
               <a:t>HOW TO USE THIS SLIDE:</a:t>
             </a:r>
           </a:p>
-          <a:p>
-            <a:endParaRPr lang="en-GB" dirty="0"/>
-          </a:p>
-          <a:p>
-            <a:r>
-              <a:rPr lang="en-GB" b="1" dirty="0"/>
+          <a:p/>
+          <a:p>
+            <a:r>
               <a:t>1. Show the slide and read the prompt aloud.</a:t>
             </a:r>
           </a:p>
           <a:p>
             <a:r>
-              <a:rPr lang="en-GB" dirty="0"/>
-              <a:t>2.1 Reflection — Where You Have Seen the Velocity Gap: "The velocity gap is the distance between the pace of progress you planned and the pace you achieved. Think of a strategic priority in your own setting that moved more slowly than planned while its measures were in place. Where did the velocity gap open: in detecting the deviation, understanding its cause, making the decision or translating the decision into action? Which of the four consequences followed, and what did the delay cost?"</a:t>
-            </a:r>
-          </a:p>
-          <a:p>
-            <a:endParaRPr lang="en-GB" dirty="0"/>
-          </a:p>
-          <a:p>
-            <a:r>
-              <a:rPr lang="en-GB" b="1" dirty="0"/>
+              <a:t>2.1 Reflection — Where You Have Seen the Velocity Gap: "The velocity gap is the distance between the pace of progress you planned and the pace you achieved. Think of a strategic priority in your own setting that moved more slowly than planned while its measures were in place. Where did the velocity gap open: in detecting the deviation, understanding its cause, making the decision or translating the decision into action? Which of the four consequences followed, and what did the delay cost? Did an organisational condition play a part in the delay?"</a:t>
+            </a:r>
+          </a:p>
+          <a:p/>
+          <a:p>
+            <a:r>
               <a:t>2. Say what the reflection is for.</a:t>
             </a:r>
           </a:p>
           <a:p>
             <a:r>
-              <a:rPr lang="en-GB" dirty="0"/>
               <a:t>Say: "Execution velocity is the rate at which an organisation converts strategic intent into measurable results. In this reflection, you name one place in your own setting where the pace fell behind the plan, and the point where the gap opened."</a:t>
             </a:r>
           </a:p>
-          <a:p>
-            <a:endParaRPr lang="en-GB" dirty="0"/>
-          </a:p>
-          <a:p>
-            <a:r>
-              <a:rPr lang="en-GB" b="1" dirty="0"/>
+          <a:p/>
+          <a:p>
+            <a:r>
               <a:t>3. Set the standard.</a:t>
             </a:r>
           </a:p>
           <a:p>
             <a:r>
-              <a:rPr lang="en-GB" dirty="0"/>
               <a:t>Say: "Name a real priority, the real point of delay and what it cost."</a:t>
             </a:r>
           </a:p>
-          <a:p>
-            <a:endParaRPr lang="en-GB" dirty="0"/>
-          </a:p>
-          <a:p>
-            <a:r>
-              <a:rPr lang="en-GB" b="1" dirty="0"/>
+          <a:p/>
+          <a:p>
+            <a:r>
               <a:t>4. Bridge to Section 3.</a:t>
             </a:r>
           </a:p>
           <a:p>
             <a:r>
-              <a:rPr lang="en-GB" dirty="0"/>
               <a:t>Say: "You have seen what weak review discipline costs. Section 3 shows where the review of performance breaks down across functions."</a:t>
             </a:r>
           </a:p>
-          <a:p>
-            <a:endParaRPr lang="en-GB" dirty="0"/>
-          </a:p>
-          <a:p>
-            <a:r>
-              <a:rPr lang="en-GB" b="1" dirty="0"/>
+          <a:p/>
+          <a:p>
+            <a:r>
               <a:t>ON THE PORTAL, AFTER THE TEACHING:</a:t>
             </a:r>
           </a:p>
           <a:p>
             <a:r>
-              <a:rPr lang="en-GB" dirty="0"/>
               <a:t>Participants write this reflection in Section 2 of the participant file, at the foot of part 2.1.</a:t>
             </a:r>
           </a:p>
@@ -2385,97 +2613,72 @@
           <a:lstStyle/>
           <a:p>
             <a:r>
-              <a:rPr lang="en-GB" b="1" dirty="0"/>
               <a:t>SECTION 1 REFLECTIONS</a:t>
             </a:r>
           </a:p>
-          <a:p>
-            <a:endParaRPr lang="en-GB" dirty="0"/>
-          </a:p>
-          <a:p>
-            <a:r>
-              <a:rPr lang="en-GB" b="1" dirty="0"/>
+          <a:p/>
+          <a:p>
+            <a:r>
               <a:t>HOW TO USE THIS SLIDE:</a:t>
             </a:r>
           </a:p>
-          <a:p>
-            <a:endParaRPr lang="en-GB" dirty="0"/>
-          </a:p>
-          <a:p>
-            <a:r>
-              <a:rPr lang="en-GB" b="1" dirty="0"/>
+          <a:p/>
+          <a:p>
+            <a:r>
               <a:t>1. Show the slide and read the two prompts aloud.</a:t>
             </a:r>
           </a:p>
           <a:p>
             <a:r>
-              <a:rPr lang="en-GB" dirty="0"/>
-              <a:t>1.1 Reflection — Activity vs Progress: "In your function, what are you currently measuring that reflects activity? What would reflect genuine progress toward your strategic outcome?"</a:t>
-            </a:r>
-          </a:p>
-          <a:p>
-            <a:r>
-              <a:rPr lang="en-GB" dirty="0"/>
+              <a:t>1.1 Reflection — Activity vs Progress: "In your function, what are you currently measuring that reflects activity? What would reflect genuine progress toward your strategic outcome? What evidence do you hold on whether the organisational conditions support the tasks behind that progress?"</a:t>
+            </a:r>
+          </a:p>
+          <a:p>
+            <a:r>
               <a:t>1.4 Reflection — The Cycle and the Loop in Your Organisation: "Think of a current performance gap in your function. Which stage of the Review–Realign–Restore Cycle is it in? If you activated the Accountability Loop, which root cause would you most likely be diagnosing, and why?"</a:t>
             </a:r>
           </a:p>
-          <a:p>
-            <a:endParaRPr lang="en-GB" dirty="0"/>
-          </a:p>
-          <a:p>
-            <a:r>
-              <a:rPr lang="en-GB" b="1" dirty="0"/>
+          <a:p/>
+          <a:p>
+            <a:r>
               <a:t>2. Say what the reflections are for.</a:t>
             </a:r>
           </a:p>
           <a:p>
             <a:r>
-              <a:rPr lang="en-GB" dirty="0"/>
               <a:t>Say: "You write these reflections on the portal after the teaching, with as much depth as you can. They build the learning portfolio you receive at the end of the programme."</a:t>
             </a:r>
           </a:p>
-          <a:p>
-            <a:endParaRPr lang="en-GB" dirty="0"/>
-          </a:p>
-          <a:p>
-            <a:r>
-              <a:rPr lang="en-GB" b="1" dirty="0"/>
+          <a:p/>
+          <a:p>
+            <a:r>
               <a:t>3. Set the standard.</a:t>
             </a:r>
           </a:p>
           <a:p>
             <a:r>
-              <a:rPr lang="en-GB" dirty="0"/>
               <a:t>Say: "Name a real measure, a real gap and a real root cause from your own function."</a:t>
             </a:r>
           </a:p>
-          <a:p>
-            <a:endParaRPr lang="en-GB" dirty="0"/>
-          </a:p>
-          <a:p>
-            <a:r>
-              <a:rPr lang="en-GB" b="1" dirty="0"/>
+          <a:p/>
+          <a:p>
+            <a:r>
               <a:t>4. Bridge to Section 2.</a:t>
             </a:r>
           </a:p>
           <a:p>
             <a:r>
-              <a:rPr lang="en-GB" dirty="0"/>
               <a:t>Say: "You have seen how measurement makes execution visible and how the cycle restores it. Section 2 shows what happens when the review rhythm weakens."</a:t>
             </a:r>
           </a:p>
-          <a:p>
-            <a:endParaRPr lang="en-GB" dirty="0"/>
-          </a:p>
-          <a:p>
-            <a:r>
-              <a:rPr lang="en-GB" b="1" dirty="0"/>
+          <a:p/>
+          <a:p>
+            <a:r>
               <a:t>ON THE PORTAL, AFTER THE TEACHING:</a:t>
             </a:r>
           </a:p>
           <a:p>
             <a:r>
-              <a:rPr lang="en-GB" dirty="0"/>
               <a:t>Participants write these reflections in Section 1 of the participant file, at the foot of parts 1.1 and 1.4.</a:t>
             </a:r>
           </a:p>
@@ -2557,185 +2760,144 @@
           <a:lstStyle/>
           <a:p>
             <a:r>
-              <a:rPr lang="en-GB" b="1" dirty="0"/>
               <a:t>3.2 — THE CXO PERFORMANCE GAP CONTRIBUTORS</a:t>
             </a:r>
           </a:p>
           <a:p>
             <a:r>
-              <a:rPr lang="en-GB" dirty="0"/>
               <a:t>Is the chain of execution across our functions holding together?</a:t>
             </a:r>
           </a:p>
-          <a:p>
-            <a:endParaRPr lang="en-GB" dirty="0"/>
-          </a:p>
-          <a:p>
-            <a:r>
-              <a:rPr lang="en-GB" b="1" dirty="0"/>
+          <a:p/>
+          <a:p>
+            <a:r>
               <a:t>HOW TO TEACH IT:</a:t>
             </a:r>
           </a:p>
-          <a:p>
-            <a:endParaRPr lang="en-GB" dirty="0"/>
-          </a:p>
-          <a:p>
-            <a:r>
-              <a:rPr lang="en-GB" b="1" dirty="0"/>
+          <a:p/>
+          <a:p>
+            <a:r>
               <a:t>1. Set up the part.</a:t>
             </a:r>
           </a:p>
           <a:p>
             <a:r>
-              <a:rPr lang="en-GB" dirty="0"/>
               <a:t>Say: "The four fractures of part 3.1 rarely begin with one leader. Each executive role reviews performance in its own meetings and with its own evidence, and the habits in those reviews open one or two of the fractures. When these habits are not seen together, the chain of execution across functions weakens without anyone noticing."</a:t>
             </a:r>
           </a:p>
-          <a:p>
-            <a:endParaRPr lang="en-GB" dirty="0"/>
-          </a:p>
-          <a:p>
-            <a:r>
-              <a:rPr lang="en-GB" b="1" dirty="0"/>
+          <a:p/>
+          <a:p>
+            <a:r>
               <a:t>2. Teach the map on the slide.</a:t>
             </a:r>
           </a:p>
           <a:p>
             <a:r>
-              <a:rPr lang="en-GB" dirty="0"/>
               <a:t>Horizontal Coordination Gap: COO, CTO/CIO, CMO, CCO, CPO.</a:t>
             </a:r>
           </a:p>
           <a:p>
             <a:r>
-              <a:rPr lang="en-GB" dirty="0"/>
               <a:t>Evidence Quality Gap: CFO, CHRO, CTO/CIO, CMO, CPO.</a:t>
             </a:r>
           </a:p>
           <a:p>
             <a:r>
-              <a:rPr lang="en-GB" dirty="0"/>
               <a:t>Review Rhythm Breakdown: CEO, CHRO, CRO, CSO.</a:t>
             </a:r>
           </a:p>
           <a:p>
             <a:r>
-              <a:rPr lang="en-GB" dirty="0"/>
               <a:t>Learning Suppression Gap: CEO, CFO, CCO, CRO, CSO.</a:t>
             </a:r>
           </a:p>
-          <a:p>
-            <a:endParaRPr lang="en-GB" dirty="0"/>
-          </a:p>
-          <a:p>
-            <a:r>
-              <a:rPr lang="en-GB" b="1" dirty="0"/>
+          <a:p/>
+          <a:p>
+            <a:r>
               <a:t>3. Teach each role: how it reviews performance, what it does in those reviews and what happens as a result. Take the participants' own roles first.</a:t>
             </a:r>
           </a:p>
           <a:p>
             <a:r>
-              <a:rPr lang="en-GB" dirty="0"/>
               <a:t>The CEO chairs the executive review: the meeting where the executive team reports progress on the Key Results of the strategy.. What the CEO does: When the board, investors or a crisis crowd the diary, the CEO postpones or shortens the executive review. What happens as a result: Executives see that the executive review can slip, so they let the reviews with their own teams slip too. Weeks pass without anyone examining progress, and a small delay grows into a missed target before it is discussed. (Review Rhythm Breakdown) What the CEO does: When a target is missed, the CEO’s first question in the review is: “Why did you miss it?” What happens as a result: Executives come to the review ready to defend their numbers. They hold back the obstacles they face, so the executive team never examines what caused the miss or what must change. (Learning Suppression Gap)</a:t>
             </a:r>
           </a:p>
           <a:p>
             <a:r>
-              <a:rPr lang="en-GB" dirty="0"/>
               <a:t>The CFO reviews performance through the monthly management accounts: actual results against budget and forecast.. What the CFO does: The CFO uses financial results as the main evidence of progress. What happens as a result: Financial results are available only after the month or quarter has closed. By the time the review sees a shortfall, the period is over and it is too late to correct it. (Evidence Quality Gap) What the CFO does: The CFO asks each budget holder to explain every variance. What happens as a result: Budget holders prepare explanations for the number. The discussion stays on justifying the past, and the operational cause of the variance is never examined. (Learning Suppression Gap)</a:t>
             </a:r>
           </a:p>
           <a:p>
             <a:r>
-              <a:rPr lang="en-GB" dirty="0"/>
               <a:t>The COO holds weekly operations reviews with the heads of operations, using strong data on throughput, service levels and process efficiency.. What the COO does: Only operations attends the review. Sales, technology, procurement and HR, the functions operations depends on, are not in the room. What happens as a result: When a delay comes from another function, for example a late system change or a supplier problem, the operations review can neither see it nor resolve it. Operations reports its own measures as on track while the enterprise result falls behind. (Horizontal Coordination Gap)</a:t>
             </a:r>
           </a:p>
           <a:p>
             <a:r>
-              <a:rPr lang="en-GB" dirty="0"/>
               <a:t>The CHRO reviews people performance through the annual engagement survey and the twice-yearly talent review.. What the CHRO does: The CHRO reports engagement scores and training completed, with no link to a Key Result. What happens as a result: The executive team cannot tell whether people measures help or hinder the delivery of the strategy, so the review debates what the survey means. (Evidence Quality Gap) What the CHRO does: The CHRO reviews people measures once or twice a year. What happens as a result: A skills gap that will delay a milestone is seen only at the next survey or talent review, after the milestone has already slipped. (Review Rhythm Breakdown)</a:t>
             </a:r>
           </a:p>
           <a:p>
             <a:r>
-              <a:rPr lang="en-GB" dirty="0"/>
               <a:t>The CTO or CIO reviews technology projects against plan: milestones delivered, system uptime and budget.. What the CTO or CIO does: The CTO or CIO reports a system going live as progress. What happens as a result: Going live is activity. Whether the business uses the system to deliver its Key Result is never checked, so the review reports success while the result does not move. (Evidence Quality Gap) What the CTO or CIO does: The CTO or CIO reviews technology projects in the technology forum, without the business owner of the result. What happens as a result: Technology reports the project on track and the business reports the result off track, and no review puts the two together. (Horizontal Coordination Gap)</a:t>
             </a:r>
           </a:p>
           <a:p>
             <a:r>
-              <a:rPr lang="en-GB" dirty="0"/>
               <a:t>The CMO reviews marketing through campaign reports: reach, leads, brand measures and market share.. What the CMO does: The CMO reports campaign reach and leads as progress toward the market Key Result. What happens as a result: Reach and leads show marketing activity. They do not show whether customers bought or stayed, so the review cannot see whether the Key Result is moving. (Evidence Quality Gap) What the CMO does: The campaigns promise delivery times and service levels that operations and sales must deliver, and they review their own measures elsewhere. What happens as a result: Marketing meets its campaign targets while customers receive a different experience, and no single review sees the broken promise. (Horizontal Coordination Gap)</a:t>
             </a:r>
           </a:p>
           <a:p>
             <a:r>
-              <a:rPr lang="en-GB" dirty="0"/>
               <a:t>The CCO holds weekly sales reviews on pipeline, orders and revenue against target.. What the CCO does: The CCO reviews sales commitments without operations in the room. What happens as a result: Sales signs volumes that operations has not confirmed it can deliver. The gap appears only when orders arrive late and customers complain. (Horizontal Coordination Gap) What the CCO does: Every sales review puts pressure on the number. What happens as a result: Sales managers stop raising obstacles, such as pricing or stock problems, until the quarter is already lost. (Learning Suppression Gap)</a:t>
             </a:r>
           </a:p>
           <a:p>
             <a:r>
-              <a:rPr lang="en-GB" dirty="0"/>
               <a:t>The CPO reviews procurement through supplier scorecards, savings achieved and contract compliance.. What the CPO does: The CPO reviews supplier performance in the procurement forum, apart from the functions that depend on supply. What happens as a result: A late delivery from a supplier reaches a Key Result in operations before anyone connects the two. (Horizontal Coordination Gap) What the CPO does: The CPO reports savings achieved as procurement progress. What happens as a result: The review rewards a cheaper contract without checking whether slower or lower-quality supply is now delaying delivery. (Evidence Quality Gap)</a:t>
             </a:r>
           </a:p>
           <a:p>
             <a:r>
-              <a:rPr lang="en-GB" dirty="0"/>
               <a:t>The CRO reviews risk through the risk register, incident reports and compliance audits, on the board’s governance calendar.. What the CRO does: The CRO treats a reported breach as a failure to be punished. What happens as a result: Teams stop reporting near misses, so the organisation loses the early information that would let it prevent the next incident. (Learning Suppression Gap) What the CRO does: The CRO reviews risks quarterly for the board committee, apart from the strategy reviews. What happens as a result: A risk that rises against a Key Result between quarters is not discussed until the next committee meeting. (Review Rhythm Breakdown)</a:t>
             </a:r>
           </a:p>
           <a:p>
             <a:r>
-              <a:rPr lang="en-GB" dirty="0"/>
               <a:t>The CSO runs the planning calendar: the annual strategy review and the quarterly OKR updates.. What the CSO does: The CSO examines Key Results mainly at the quarterly and annual planning points. What happens as a result: Three months pass between two looks at the same Key Result: too long to see whether it is moving or stalling. (Review Rhythm Breakdown) What the CSO does: The planning sessions update the targets and plans for the next period. What happens as a result: The plan is changed without first asking what the last period of execution taught the organisation, so the same mistakes repeat. (Learning Suppression Gap)</a:t>
             </a:r>
           </a:p>
-          <a:p>
-            <a:endParaRPr lang="en-GB" dirty="0"/>
-          </a:p>
-          <a:p>
-            <a:r>
-              <a:rPr lang="en-GB" b="1" dirty="0"/>
+          <a:p/>
+          <a:p>
+            <a:r>
               <a:t>4. Close the part.</a:t>
             </a:r>
           </a:p>
           <a:p>
             <a:r>
-              <a:rPr lang="en-GB" dirty="0"/>
               <a:t>Say: "No single role opens a fracture alone. The leadership team, acting as the collective intelligence for execution discipline, closes the four fractures when each leader sees how the habits in their own reviews feed them, and the executive team reviews the chain of execution together."</a:t>
             </a:r>
           </a:p>
-          <a:p>
-            <a:endParaRPr lang="en-GB" dirty="0"/>
-          </a:p>
-          <a:p>
-            <a:r>
-              <a:rPr lang="en-GB" b="1" dirty="0"/>
+          <a:p/>
+          <a:p>
+            <a:r>
               <a:t>5. Ask, now that the roles are taught.</a:t>
             </a:r>
           </a:p>
           <a:p>
             <a:r>
-              <a:rPr lang="en-GB" dirty="0"/>
               <a:t>Ask: "What is one habit in your own reviews, and which fracture does it open?" Ask participants to post their answer in the chat.</a:t>
             </a:r>
           </a:p>
-          <a:p>
-            <a:endParaRPr lang="en-GB" dirty="0"/>
-          </a:p>
-          <a:p>
-            <a:r>
-              <a:rPr lang="en-GB" b="1" dirty="0"/>
+          <a:p/>
+          <a:p>
+            <a:r>
               <a:t>ON THE PORTAL, AFTER THE TEACHING:</a:t>
             </a:r>
           </a:p>
           <a:p>
             <a:r>
-              <a:rPr lang="en-GB" dirty="0"/>
-              <a:t>Participants read the ten role cards in part 3.2 of their own file, their own role first, and answer the question on their own card for themselves.</a:t>
+              <a:t>Participants read the ten role cards in part 3.2 of their own file, their own role first, and answer the question on their own card for themselves. They then complete a personal reflection as Portfolio work: the fracture their own review habits are most prone to open, in the way they review individuals and the organisational conditions they are responsible for, the remedial action they will take and the evidence that will show it is working.</a:t>
             </a:r>
           </a:p>
         </p:txBody>
@@ -2816,77 +2978,62 @@
           <a:lstStyle/>
           <a:p>
             <a:r>
-              <a:rPr lang="en-GB" b="1" dirty="0"/>
               <a:t>SECTION 3 REFLECTIONS</a:t>
             </a:r>
           </a:p>
-          <a:p>
-            <a:endParaRPr lang="en-GB" dirty="0"/>
-          </a:p>
-          <a:p>
-            <a:r>
-              <a:rPr lang="en-GB" b="1" dirty="0"/>
+          <a:p/>
+          <a:p>
+            <a:r>
               <a:t>HOW TO USE THIS SLIDE:</a:t>
             </a:r>
           </a:p>
-          <a:p>
-            <a:endParaRPr lang="en-GB" dirty="0"/>
-          </a:p>
-          <a:p>
-            <a:r>
-              <a:rPr lang="en-GB" b="1" dirty="0"/>
-              <a:t>1. Show the slide and read the prompt aloud.</a:t>
-            </a:r>
-          </a:p>
-          <a:p>
-            <a:r>
-              <a:rPr lang="en-GB" dirty="0"/>
+          <a:p/>
+          <a:p>
+            <a:r>
+              <a:t>1. Show the slide and read the two prompts aloud.</a:t>
+            </a:r>
+          </a:p>
+          <a:p>
+            <a:r>
               <a:t>3.1 Reflection — Which Gap Is Most Prevalent in Your Organisation?: "Rate each gap in your organisation (1 = rare, 5 = common). Then name the gap you are most responsible for closing and your first action."</a:t>
             </a:r>
           </a:p>
           <a:p>
-            <a:endParaRPr lang="en-GB" dirty="0"/>
-          </a:p>
-          <a:p>
-            <a:r>
-              <a:rPr lang="en-GB" b="1" dirty="0"/>
+            <a:r>
+              <a:t>3.2 Reflection — The Fracture You Are Most Prone To (Portfolio work): "Which of the four fractures are your own review habits most prone to open, in the way you review individuals and the organisational conditions you are responsible for? What remedial action will you take, and what evidence will show it is working?"</a:t>
+            </a:r>
+          </a:p>
+          <a:p/>
+          <a:p>
+            <a:r>
               <a:t>2. Say what the reflection is for.</a:t>
             </a:r>
           </a:p>
           <a:p>
             <a:r>
-              <a:rPr lang="en-GB" dirty="0"/>
               <a:t>Say: "You write this reflection on the portal after the teaching. Rate each gap honestly, then name the gap you are most responsible for closing."</a:t>
             </a:r>
           </a:p>
-          <a:p>
-            <a:endParaRPr lang="en-GB" dirty="0"/>
-          </a:p>
-          <a:p>
-            <a:r>
-              <a:rPr lang="en-GB" b="1" dirty="0"/>
+          <a:p/>
+          <a:p>
+            <a:r>
               <a:t>3. Bridge to Section 4.</a:t>
             </a:r>
           </a:p>
           <a:p>
             <a:r>
-              <a:rPr lang="en-GB" dirty="0"/>
               <a:t>Say: "You have seen where the review of performance breaks down, and which roles feed each gap. Section 4 brings the executive team together around one view of enterprise execution."</a:t>
             </a:r>
           </a:p>
-          <a:p>
-            <a:endParaRPr lang="en-GB" dirty="0"/>
-          </a:p>
-          <a:p>
-            <a:r>
-              <a:rPr lang="en-GB" b="1" dirty="0"/>
+          <a:p/>
+          <a:p>
+            <a:r>
               <a:t>ON THE PORTAL, AFTER THE TEACHING:</a:t>
             </a:r>
           </a:p>
           <a:p>
             <a:r>
-              <a:rPr lang="en-GB" dirty="0"/>
-              <a:t>Participants complete this reflection in Section 3 of the participant file, at the foot of part 3.1.</a:t>
+              <a:t>Participants complete these reflections in Section 3 of the participant file, at the foot of parts 3.1 and 3.2.</a:t>
             </a:r>
           </a:p>
         </p:txBody>
@@ -3109,82 +3256,61 @@
           <a:lstStyle/>
           <a:p>
             <a:r>
-              <a:rPr lang="en-GB" b="1" dirty="0"/>
               <a:t>SECTION 4 REFLECTIONS (2 OF 2)</a:t>
             </a:r>
           </a:p>
-          <a:p>
-            <a:endParaRPr lang="en-GB" dirty="0"/>
-          </a:p>
-          <a:p>
-            <a:r>
-              <a:rPr lang="en-GB" b="1" dirty="0"/>
+          <a:p/>
+          <a:p>
+            <a:r>
               <a:t>HOW TO USE THIS SLIDE:</a:t>
             </a:r>
           </a:p>
-          <a:p>
-            <a:endParaRPr lang="en-GB" dirty="0"/>
-          </a:p>
-          <a:p>
-            <a:r>
-              <a:rPr lang="en-GB" b="1" dirty="0"/>
+          <a:p/>
+          <a:p>
+            <a:r>
               <a:t>1. Show the slide and read the prompt and the Portfolio work aloud.</a:t>
             </a:r>
           </a:p>
           <a:p>
             <a:r>
-              <a:rPr lang="en-GB" dirty="0"/>
               <a:t>4.1 Reflection — The Conversation Type Most Difficult for Your Team: "Which conversation type is most difficult for you and your team: reporting progress against evidence, naming an early warning, or sharing an execution learning? What makes it difficult, and what would make it easier?"</a:t>
             </a:r>
           </a:p>
           <a:p>
             <a:r>
-              <a:rPr lang="en-GB" dirty="0"/>
               <a:t>4.2 Portfolio work: the Accountability Loop case, read and analysed alone.</a:t>
             </a:r>
           </a:p>
-          <a:p>
-            <a:endParaRPr lang="en-GB" dirty="0"/>
-          </a:p>
-          <a:p>
-            <a:r>
-              <a:rPr lang="en-GB" b="1" dirty="0"/>
+          <a:p/>
+          <a:p>
+            <a:r>
               <a:t>2. Say what the work is for.</a:t>
             </a:r>
           </a:p>
           <a:p>
             <a:r>
-              <a:rPr lang="en-GB" dirty="0"/>
-              <a:t>Say: "In 4.2, you read a full Accountability Loop conversation on a different case from the role play. The conversation never names the root cause: you deduce which of the three it is, work out how GROW was used to resolve it and move the alignment close to 10, and judge how the CXO applied the loop against GROW. This is personal work, and it builds your learning portfolio."</a:t>
-            </a:r>
-          </a:p>
-          <a:p>
-            <a:endParaRPr lang="en-GB" dirty="0"/>
-          </a:p>
-          <a:p>
-            <a:r>
-              <a:rPr lang="en-GB" b="1" dirty="0"/>
+              <a:t>Say: "In 4.2, you read a full Accountability Loop conversation on a new case: the Chief Financial Officer and the Credit Control Manager. The conversation never names the root cause: you work out which of the three it is, the goal of the conversation and how Reality, Options and Will led to it, and how well the leader ran the conversation. This is personal work, and it builds your learning portfolio."</a:t>
+            </a:r>
+          </a:p>
+          <a:p/>
+          <a:p>
+            <a:r>
               <a:t>3. Bridge to Section 5.</a:t>
             </a:r>
           </a:p>
           <a:p>
             <a:r>
-              <a:rPr lang="en-GB" dirty="0"/>
               <a:t>Say: "You have seen the enterprise view and practised the loop on one Key Result. Section 5 brings back the four consequences of weak review discipline, and your group guards its own strategy against them."</a:t>
             </a:r>
           </a:p>
-          <a:p>
-            <a:endParaRPr lang="en-GB" dirty="0"/>
-          </a:p>
-          <a:p>
-            <a:r>
-              <a:rPr lang="en-GB" b="1" dirty="0"/>
+          <a:p/>
+          <a:p>
+            <a:r>
               <a:t>ON THE PORTAL, AFTER THE TEACHING:</a:t>
             </a:r>
           </a:p>
           <a:p>
             <a:r>
-              <a:rPr lang="en-GB" dirty="0"/>
               <a:t>Participants write the reflection at the foot of part 4.1, and complete the Portfolio work of part 4.2.</a:t>
             </a:r>
           </a:p>
@@ -3266,116 +3392,88 @@
           <a:lstStyle/>
           <a:p>
             <a:r>
-              <a:rPr lang="en-GB" b="1" dirty="0"/>
               <a:t>5.1 — DECISION POINTS AGAINST THE FOUR CONSEQUENCES (CAPSTONE WORK)</a:t>
             </a:r>
           </a:p>
-          <a:p>
-            <a:endParaRPr lang="en-GB" dirty="0"/>
-          </a:p>
-          <a:p>
-            <a:r>
-              <a:rPr lang="en-GB" b="1" dirty="0"/>
+          <a:p/>
+          <a:p>
+            <a:r>
               <a:t>HOW TO TEACH IT:</a:t>
             </a:r>
           </a:p>
-          <a:p>
-            <a:endParaRPr lang="en-GB" dirty="0"/>
-          </a:p>
-          <a:p>
-            <a:r>
-              <a:rPr lang="en-GB" b="1" dirty="0"/>
+          <a:p/>
+          <a:p>
+            <a:r>
               <a:t>1. Recall the four consequences of part 2.1.</a:t>
             </a:r>
           </a:p>
           <a:p>
             <a:r>
-              <a:rPr lang="en-GB" dirty="0"/>
-              <a:t>Say: "Missed early warning signals. Gradual diffusion of accountability. Loss of organisational learning. Eroded leadership credibility. Each begins with signals that can be seen early."</a:t>
-            </a:r>
-          </a:p>
-          <a:p>
-            <a:endParaRPr lang="en-GB" dirty="0"/>
-          </a:p>
-          <a:p>
-            <a:r>
-              <a:rPr lang="en-GB" b="1" dirty="0"/>
-              <a:t>2. Say what a decision point is.</a:t>
-            </a:r>
-          </a:p>
-          <a:p>
-            <a:r>
-              <a:rPr lang="en-GB" dirty="0"/>
-              <a:t>Say: "A decision point names the signal the executive team watches for, the decision it takes when the signal appears and who takes it. Write it as one sentence: If the signal appears, then the decision, taken by whom."</a:t>
-            </a:r>
-          </a:p>
-          <a:p>
-            <a:endParaRPr lang="en-GB" dirty="0"/>
-          </a:p>
-          <a:p>
-            <a:r>
-              <a:rPr lang="en-GB" b="1" dirty="0"/>
+              <a:t>Say: "Missed early warning signals. Gradual diffusion of accountability. Loss of organisational learning. Eroded leadership credibility. Each shows in the performance of individuals and in the organisational conditions."</a:t>
+            </a:r>
+          </a:p>
+          <a:p/>
+          <a:p>
+            <a:r>
+              <a:t>2. Say what the group completes for each consequence.</a:t>
+            </a:r>
+          </a:p>
+          <a:p>
+            <a:r>
+              <a:t>Say: "Simulate a potential gap in your strategy: one in the performance of individuals and one in the organisational conditions. For each gap, write the decision point for recovery: the decision the executive team takes when the gap appears, and who takes it. Write it as one sentence: If the gap appears, then the recovery decision, taken by whom."</a:t>
+            </a:r>
+          </a:p>
+          <a:p/>
+          <a:p>
+            <a:r>
               <a:t>3. Give one example for each consequence.</a:t>
             </a:r>
           </a:p>
           <a:p>
             <a:r>
-              <a:rPr lang="en-GB" dirty="0"/>
-              <a:t>Early Warning Signals Are Missed: "If a Key Result shows no movement across two monthly reviews, its owner presents a recovery plan at the next executive review."</a:t>
-            </a:r>
-          </a:p>
-          <a:p>
-            <a:r>
-              <a:rPr lang="en-GB" dirty="0"/>
-              <a:t>Gradual Diffusion of Accountability: "If a Key Result has not been discussed in an executive review for a full month, the CEO places it first on the agenda of the next review, with its owner present."</a:t>
-            </a:r>
-          </a:p>
-          <a:p>
-            <a:r>
-              <a:rPr lang="en-GB" dirty="0"/>
-              <a:t>Loss of Organisational Learning: "If the same obstacle is reported in two functions in one quarter, the executive team names the cause and records what it changes in the way the strategy is executed."</a:t>
-            </a:r>
-          </a:p>
-          <a:p>
-            <a:r>
-              <a:rPr lang="en-GB" dirty="0"/>
-              <a:t>Erodes Leadership Credibility: "If a strategic priority is announced, the executive team fixes the date of its first review and the evidence to be brought to it in the same meeting."</a:t>
-            </a:r>
-          </a:p>
-          <a:p>
-            <a:endParaRPr lang="en-GB" dirty="0"/>
-          </a:p>
-          <a:p>
-            <a:r>
-              <a:rPr lang="en-GB" b="1" dirty="0"/>
+              <a:t>Early Warning Signals Are Missed: "If a Key Result shows no movement across two monthly reviews, then a recovery plan is presented at the next executive review, taken by the executive accountable for the Key Result."</a:t>
+            </a:r>
+          </a:p>
+          <a:p>
+            <a:r>
+              <a:t>Gradual Diffusion of Accountability: "If a Key Result has not been discussed in an executive review for a full month, then it goes first on the agenda of the next review, with the individuals delivering it present, taken by the CEO."</a:t>
+            </a:r>
+          </a:p>
+          <a:p>
+            <a:r>
+              <a:t>Loss of Organisational Learning: "If the same obstacle is reported in two functions in one quarter, then the executive team names the cause and records what it changes in the way the strategy is executed, taken by the CEO."</a:t>
+            </a:r>
+          </a:p>
+          <a:p>
+            <a:r>
+              <a:t>Erodes Leadership Credibility: "If a strategic priority is announced with no date for its first review, then the date and the evidence to be brought to it are fixed in the same meeting, taken by the CEO."</a:t>
+            </a:r>
+          </a:p>
+          <a:p/>
+          <a:p>
+            <a:r>
               <a:t>4. Say how the group completes it.</a:t>
             </a:r>
           </a:p>
           <a:p>
             <a:r>
-              <a:rPr lang="en-GB" dirty="0"/>
-              <a:t>Say: "Take the four consequences one at a time. For each, agree the two signals your executive team is most likely to miss in your strategy, and write one decision point for each."</a:t>
-            </a:r>
-          </a:p>
-          <a:p>
-            <a:endParaRPr lang="en-GB" dirty="0"/>
-          </a:p>
-          <a:p>
-            <a:r>
-              <a:rPr lang="en-GB" b="1" dirty="0"/>
+              <a:t>Say: "Take the four consequences one at a time, each on its own tab. The lesson for each sits above the boxes."</a:t>
+            </a:r>
+          </a:p>
+          <a:p/>
+          <a:p>
+            <a:r>
               <a:t>ON THE PORTAL, AFTER THE TEACHING:</a:t>
             </a:r>
           </a:p>
           <a:p>
             <a:r>
-              <a:rPr lang="en-GB" dirty="0"/>
               <a:t>Participants work as a group in part 5.1 of their own file. This is Capstone work. The group agrees each entry and one member acts as scribe. Every member then types the agreed entries into their own page, in the session or after it.</a:t>
             </a:r>
           </a:p>
           <a:p>
             <a:r>
-              <a:rPr lang="en-GB" dirty="0"/>
-              <a:t>Each group writes two decision points for each of the four consequences: for each, the signal, the decision the executive team takes when it appears and who takes it.</a:t>
+              <a:t>For each of the four consequences, each group writes a potential gap in the performance of individuals and in the organisational conditions, and a decision point for recovery for each: the decision the executive team takes when the gap appears, and who takes it.</a:t>
             </a:r>
           </a:p>
         </p:txBody>
@@ -3740,48 +3838,80 @@
           <a:lstStyle/>
           <a:p>
             <a:r>
-              <a:rPr lang="en-US" b="1" dirty="0"/>
               <a:t>SECTION 1 · AWARENESS — WHAT</a:t>
             </a:r>
-            <a:r>
-              <a:rPr lang="en-US" dirty="0"/>
-              <a:t>
-What is Performance Measurement?
-Establishing performance measurement as an execution visibility discipline — and introducing the Review–Realign–Restore Cycle as the mechanism that keeps strategy correctable.
-</a:t>
-            </a:r>
-            <a:r>
-              <a:rPr lang="en-US" b="1" dirty="0"/>
+          </a:p>
+          <a:p>
+            <a:r>
+              <a:t>What is Performance Measurement?</a:t>
+            </a:r>
+          </a:p>
+          <a:p>
+            <a:r>
+              <a:t>Establishing performance measurement as an execution visibility discipline — and introducing the Review–Realign–Restore Cycle as the mechanism that keeps strategy correctable.</a:t>
+            </a:r>
+          </a:p>
+          <a:p/>
+          <a:p>
+            <a:r>
               <a:t>Section learning outcomes:</a:t>
             </a:r>
-            <a:r>
-              <a:rPr lang="en-US" dirty="0"/>
-              <a:t>
-1. Distinguish meaningful strategic progress from activity.
-2. Explain how performance evidence converts into realignment and corrective action.
-</a:t>
-            </a:r>
-            <a:r>
-              <a:rPr lang="en-US" b="1" dirty="0"/>
+          </a:p>
+          <a:p>
+            <a:r>
+              <a:t>1. Distinguish meaningful strategic progress from activity.</a:t>
+            </a:r>
+          </a:p>
+          <a:p>
+            <a:r>
+              <a:t>2. Explain how performance evidence converts into realignment and corrective action.</a:t>
+            </a:r>
+          </a:p>
+          <a:p/>
+          <a:p>
+            <a:r>
               <a:t>FACILITATOR GUIDANCE — Awareness</a:t>
             </a:r>
-            <a:r>
-              <a:rPr lang="en-US" dirty="0"/>
-              <a:t>
-Open with the core provocation: "Work is happening. Teams are busy. Initiatives are underway. </a:t>
-            </a:r>
-          </a:p>
-          <a:p>
-            <a:r>
-              <a:rPr lang="en-US" dirty="0"/>
+          </a:p>
+          <a:p>
+            <a:r>
+              <a:t>Open with the core provocation: "Work is happening. Teams are busy. Initiatives are underway. </a:t>
+            </a:r>
+          </a:p>
+          <a:p>
+            <a:r>
               <a:t>But can you confidently say the work being done is actually advancing the strategy?" </a:t>
             </a:r>
           </a:p>
           <a:p>
             <a:r>
-              <a:rPr lang="en-US" dirty="0"/>
-              <a:t>This question unlocks the gap that this entire unit addresses — the difference between activity visibility and progress visibility.
-</a:t>
+              <a:t>This question unlocks the gap that this entire unit addresses — the difference between activity visibility and progress visibility.</a:t>
+            </a:r>
+          </a:p>
+          <a:p/>
+          <a:p>
+            <a:r>
+              <a:t>TEACHING NOTES FROM THE FACILITATOR GUIDE:</a:t>
+            </a:r>
+          </a:p>
+          <a:p>
+            <a:r>
+              <a:t>1.1 · The Execution Visibility Infrastructure. Open with the provocation: "Work is happening. Teams are busy. Initiatives are underway. But can you confidently say the work being done is actually advancing the strategy?" Then teach performance measurement as the visibility infrastructure of the strategy: without it, strategy stays interpretive, each function develops its own sense of progress and activity is mistaken for advancement. The shift to land is from "What work was done?" to "What changed because of the work?", from the human side and the organisation side.</a:t>
+            </a:r>
+          </a:p>
+          <a:p>
+            <a:r>
+              <a:t>1.2 · The Four Strategic Purposes. Teach execution rhythm first: regular reviews reveal the subtle signals early and prevent the most common leadership surprise, discovering failure at the end of the reporting period. Then teach the four purposes one card at a time, each from both sides. Most leaders can name visibility and accountability; fewer name execution intelligence (data interpreted into decision insight through disciplined conversation) and timely correction.</a:t>
+            </a:r>
+          </a:p>
+          <a:p>
+            <a:r>
+              <a:t>1.3 · From Performance Measurement to Execution Recovery. Link the four purposes to the Review–Realign–Restore Cycle (R3): Review brings together visibility, accountability and execution intelligence; Realign diagnoses the gap; Restore activates timely correction. Teach each stage for both operating systems. Name the outcome of each stage, and close on how the cycle stays continuous: the next Review checks whether the corrective actions worked.</a:t>
+            </a:r>
+          </a:p>
+          <a:p>
+            <a:r>
+              <a:t>1.4 · The Accountability Loop. Start from the default response to a gap: pushing harder. The key facilitation moment is when leaders understand that most performance gaps have a diagnosable cause, and that the three root causes (accountability, skill, structural misfit) require different responses. Help leaders distinguish between team members who cannot perform and those who will not: inability needs development, and unwillingness needs accountability. Then teach how each recovery is achieved through the GROW model of Unit 7 (Goal, Reality, Options, Will). Close on keeping the performance conversation separate from the role conversation.</a:t>
             </a:r>
           </a:p>
         </p:txBody>
@@ -3867,163 +3997,168 @@
           <a:lstStyle/>
           <a:p>
             <a:r>
-              <a:rPr lang="en-US" b="1" dirty="0"/>
-              <a:t>1.1 — THE EXECUTION VISIBILITY INFRASTRUCTURE (Core concept)
-Content:
-The performance management system has been set and mechanisms for establishing performance are in place. </a:t>
-            </a:r>
-            <a:r>
-              <a:rPr lang="en-US" dirty="0"/>
-              <a:t/>
-            </a:r>
-            <a:r>
-              <a:rPr lang="en-US" b="1" dirty="0"/>
-              <a:t/>
-            </a:r>
-            <a:r>
-              <a:rPr lang="en-US" dirty="0"/>
-              <a:t/>
-            </a:r>
-          </a:p>
-          <a:p>
-            <a:r>
-              <a:rPr lang="en-US" dirty="0"/>
-              <a:t>Commitments have been secured. Now the most important discipline of execution begins.
-Strategy execution fails at the level of visibility. </a:t>
-            </a:r>
-          </a:p>
-          <a:p>
-            <a:r>
-              <a:rPr lang="en-US" dirty="0"/>
-              <a:t>Performance measurement is the discipline that makes execution visible. It answers a simple but decisive question:
-Are we actually moving closer to our Success in Practice? It is the execution visibility infrastructure!
-</a:t>
-            </a:r>
-          </a:p>
-          <a:p>
-            <a:endParaRPr lang="en-US" dirty="0"/>
-          </a:p>
-          <a:p>
-            <a:r>
-              <a:rPr lang="en-GB" b="1" dirty="0"/>
-              <a:t>The visibility infrastructure</a:t>
-            </a:r>
-            <a:r>
-              <a:rPr lang="en-GB" dirty="0"/>
-              <a:t>: </a:t>
-            </a:r>
-          </a:p>
-          <a:p>
-            <a:r>
-              <a:rPr lang="en-GB" dirty="0"/>
+              <a:t>1.1 — THE EXECUTION VISIBILITY INFRASTRUCTURE (Core concept)</a:t>
+            </a:r>
+          </a:p>
+          <a:p/>
+          <a:p>
+            <a:r>
+              <a:t>Content:</a:t>
+            </a:r>
+          </a:p>
+          <a:p>
+            <a:r>
+              <a:t>The performance management system has been set and mechanisms for establishing performance are in place. </a:t>
+            </a:r>
+          </a:p>
+          <a:p>
+            <a:r>
+              <a:t>Commitments have been secured. Now the most important discipline of execution begins.</a:t>
+            </a:r>
+          </a:p>
+          <a:p>
+            <a:r>
+              <a:t>Strategy execution fails at the level of visibility. </a:t>
+            </a:r>
+          </a:p>
+          <a:p>
+            <a:r>
+              <a:t>Performance measurement is the discipline that makes execution visible. It answers a simple but decisive question:</a:t>
+            </a:r>
+          </a:p>
+          <a:p>
+            <a:r>
+              <a:t>Are we actually moving closer to our Success in Practice? It is the execution visibility infrastructure!</a:t>
+            </a:r>
+          </a:p>
+          <a:p/>
+          <a:p/>
+          <a:p>
+            <a:r>
+              <a:t>The visibility infrastructure: </a:t>
+            </a:r>
+          </a:p>
+          <a:p>
+            <a:r>
               <a:t>Performance measurement creates the visibility infrastructure that allows leaders to observe whether the organisation is genuinely progressing toward its strategic outcomes. Without this infrastructure, strategy remains largely interpretive. </a:t>
             </a:r>
           </a:p>
           <a:p>
             <a:r>
-              <a:rPr lang="en-GB" dirty="0"/>
               <a:t>Each function develops its own sense of progress. </a:t>
             </a:r>
           </a:p>
           <a:p>
             <a:r>
-              <a:rPr lang="en-GB" dirty="0"/>
               <a:t>Activity becomes mistaken for advancement. Energy is expended, but the connection to the enterprise result becomes difficult to see.</a:t>
             </a:r>
           </a:p>
           <a:p>
             <a:r>
-              <a:rPr lang="en-GB" dirty="0"/>
               <a:t>Performance measurement restores that line of sight. </a:t>
             </a:r>
           </a:p>
           <a:p>
             <a:r>
-              <a:rPr lang="en-GB" dirty="0"/>
               <a:t>It allows the organisation to move from activity visibility to progress visibility.</a:t>
             </a:r>
           </a:p>
-          <a:p>
-            <a:endParaRPr lang="en-US" dirty="0"/>
-          </a:p>
-          <a:p>
-            <a:r>
-              <a:rPr lang="en-US" dirty="0"/>
+          <a:p/>
+          <a:p>
+            <a:r>
               <a:t>Most organisations are extremely good at measuring activity: how many projects were launched, how many meetings were held, how many deliverables were completed. </a:t>
             </a:r>
           </a:p>
           <a:p>
             <a:r>
-              <a:rPr lang="en-US" dirty="0"/>
-              <a:t>These indicators provide evidence that work is occurring. But activity alone does not indicate whether the organisation is actually moving closer to the strategic outcome it set out to achieve.
-</a:t>
-            </a:r>
-          </a:p>
-          <a:p>
-            <a:r>
-              <a:rPr lang="en-US" dirty="0"/>
+              <a:t>These indicators provide evidence that work is occurring. But activity alone does not indicate whether the organisation is actually moving closer to the strategic outcome it set out to achieve.</a:t>
+            </a:r>
+          </a:p>
+          <a:p/>
+          <a:p>
+            <a:r>
               <a:t>Performance measurement therefore asks a different set of questions. </a:t>
             </a:r>
           </a:p>
           <a:p>
             <a:r>
-              <a:rPr lang="en-US" dirty="0"/>
               <a:t>The question moves from "What work was done?" to "What changed because of the work?“</a:t>
             </a:r>
           </a:p>
           <a:p>
             <a:r>
-              <a:rPr lang="en-US" dirty="0"/>
-              <a:t> The organisation examines evidence of progress. This shift transforms performance management from an administrative reporting exercise into an execution intelligence system.
-</a:t>
-            </a:r>
-            <a:endParaRPr dirty="0"/>
-          </a:p>
-          <a:p>
-            <a:endParaRPr dirty="0"/>
-          </a:p>
-          <a:p>
-            <a:r>
-              <a:rPr dirty="0"/>
+              <a:t> The organisation examines evidence of progress. This shift transforms performance management from an administrative reporting exercise into an execution intelligence system.</a:t>
+            </a:r>
+          </a:p>
+          <a:p/>
+          <a:p/>
+          <a:p/>
+          <a:p>
+            <a:r>
+              <a:t>THE HUMAN SIDE AND THE ORGANISATION SIDE:</a:t>
+            </a:r>
+          </a:p>
+          <a:p>
+            <a:r>
+              <a:t>The visibility infrastructure.</a:t>
+            </a:r>
+          </a:p>
+          <a:p>
+            <a:r>
+              <a:t>From the human side: leaders see whether individuals and teams are moving their KPIs, OKRs and behaviours toward the enterprise result.</a:t>
+            </a:r>
+          </a:p>
+          <a:p>
+            <a:r>
+              <a:t>From the organisation side: leaders see whether the organisational conditions support the execution of the individuals' tasks. These conditions are the Environment, Systems, Resources and Governance (ESRG) agreed in Unit 6.</a:t>
+            </a:r>
+          </a:p>
+          <a:p>
+            <a:r>
+              <a:t>From activity to progress.</a:t>
+            </a:r>
+          </a:p>
+          <a:p>
+            <a:r>
+              <a:t>From the human side: the question moves from "How busy are our people?" to "What has their work changed in the Key Result?"</a:t>
+            </a:r>
+          </a:p>
+          <a:p>
+            <a:r>
+              <a:t>From the organisation side: the question moves from "Has the support been put in place?" to "Does the support enable the individuals' tasks to move the Key Result?"</a:t>
+            </a:r>
+          </a:p>
+          <a:p/>
+          <a:p>
+            <a:r>
               <a:t>What activity measures give: Counts of projects launched, meetings held, campaigns executed and deliverables completed create a sense of operational movement.</a:t>
             </a:r>
           </a:p>
-          <a:p>
-            <a:endParaRPr dirty="0"/>
-          </a:p>
-          <a:p>
-            <a:r>
-              <a:rPr dirty="0"/>
+          <a:p/>
+          <a:p>
+            <a:r>
               <a:t>Professional insights:</a:t>
             </a:r>
           </a:p>
-          <a:p>
-            <a:endParaRPr dirty="0"/>
-          </a:p>
-          <a:p>
-            <a:r>
-              <a:rPr dirty="0"/>
+          <a:p/>
+          <a:p>
+            <a:r>
               <a:t>Finished or settled: Many costly strategic decisions are made quietly mid-execution, when the team decides that what has been done is probably enough. Audit the exits: where exactly did we decide to stop, and why? The gap between results and potential often sits at that point.</a:t>
             </a:r>
           </a:p>
           <a:p>
             <a:r>
-              <a:rPr dirty="0"/>
               <a:t>Source: Journal, 25 June 2026 — Professional Insights: Strategy</a:t>
             </a:r>
           </a:p>
-          <a:p>
-            <a:endParaRPr dirty="0"/>
-          </a:p>
-          <a:p>
-            <a:r>
-              <a:rPr dirty="0"/>
+          <a:p/>
+          <a:p>
+            <a:r>
               <a:t>Understanding and action: A culture that rewards understanding without requiring corresponding action trains people to be articulate more than effective. Check whether people acted on what they understood.</a:t>
             </a:r>
           </a:p>
           <a:p>
             <a:r>
-              <a:rPr dirty="0"/>
               <a:t>Source: Journal, 8 June 2026 — Professional Insights: Culture</a:t>
             </a:r>
           </a:p>
@@ -4110,210 +4245,195 @@
           <a:lstStyle/>
           <a:p>
             <a:r>
-              <a:rPr lang="en-US" b="1" dirty="0"/>
               <a:t>1.2 — THE FOUR STRATEGIC PURPOSES OF PERFORMANCE MEASUREMENT</a:t>
             </a:r>
-            <a:r>
-              <a:rPr lang="en-US" dirty="0"/>
-              <a:t>
-</a:t>
-            </a:r>
-            <a:r>
-              <a:rPr lang="en-US" b="1" dirty="0"/>
+          </a:p>
+          <a:p/>
+          <a:p>
+            <a:r>
               <a:t>Content:</a:t>
             </a:r>
-            <a:r>
-              <a:rPr lang="en-US" dirty="0"/>
-              <a:t>
-</a:t>
-            </a:r>
-            <a:r>
-              <a:rPr lang="en-GB" dirty="0"/>
+          </a:p>
+          <a:p>
+            <a:r>
               <a:t>Performance measurement creates execution rhythm. Most strategic outcomes are the result of cumulative progress built over time. </a:t>
             </a:r>
-            <a:endParaRPr lang="en-US" dirty="0"/>
-          </a:p>
-          <a:p>
-            <a:r>
-              <a:rPr lang="en-GB" dirty="0"/>
+          </a:p>
+          <a:p>
+            <a:r>
               <a:t>Regular review cycles allow leaders to notice the subtle signals that indicate whether execution is strengthening or weakening. </a:t>
             </a:r>
           </a:p>
           <a:p>
             <a:r>
-              <a:rPr lang="en-GB" dirty="0"/>
               <a:t>Momentum may begin to accelerate in one area while slowing in another. </a:t>
             </a:r>
           </a:p>
           <a:p>
             <a:r>
-              <a:rPr lang="en-GB" dirty="0"/>
               <a:t>Resource constraints may appear. Decision bottlenecks may surface. </a:t>
             </a:r>
           </a:p>
           <a:p>
             <a:r>
-              <a:rPr lang="en-GB" dirty="0"/>
               <a:t>Capability gaps may become visible. When these signals are visible early, leaders can respond while the situation is still manageable.</a:t>
             </a:r>
           </a:p>
           <a:p>
             <a:r>
-              <a:rPr lang="en-GB" dirty="0"/>
               <a:t>This rhythm prevents the most common leadership surprise in organisations: discovering performance failure only at the end of the reporting period. Performance measurement ensures that strategy is observed while it is unfolding, as well as evaluated after the fact.</a:t>
             </a:r>
           </a:p>
-          <a:p>
-            <a:endParaRPr lang="en-US" dirty="0"/>
-          </a:p>
-          <a:p>
-            <a:r>
-              <a:rPr lang="en-US" dirty="0"/>
-              <a:t>At its core, performance measurement serves four strategic purposes within the organisation. Select each to explore.
-</a:t>
-            </a:r>
-          </a:p>
-          <a:p>
-            <a:r>
-              <a:rPr lang="en-US" b="1" dirty="0"/>
+          <a:p/>
+          <a:p>
+            <a:r>
+              <a:t>At its core, performance measurement serves four strategic purposes within the organisation. Select each to explore.</a:t>
+            </a:r>
+          </a:p>
+          <a:p/>
+          <a:p>
+            <a:r>
               <a:t>Purpose 01 - Creates Visibility</a:t>
             </a:r>
-            <a:r>
-              <a:rPr lang="en-US" dirty="0"/>
-              <a:t>
-Leaders can observe where the organisation is gaining momentum and where it is stalling. </a:t>
-            </a:r>
-          </a:p>
-          <a:p>
-            <a:r>
-              <a:rPr lang="en-US" dirty="0"/>
+          </a:p>
+          <a:p>
+            <a:r>
+              <a:t>Leaders can observe where the organisation is gaining momentum and where it is stalling. </a:t>
+            </a:r>
+          </a:p>
+          <a:p>
+            <a:r>
               <a:t>Strategic priorities that once existed only as intentions begin to appear as measurable progress signals. </a:t>
             </a:r>
           </a:p>
           <a:p>
             <a:r>
-              <a:rPr lang="en-US" dirty="0"/>
-              <a:t>Without measurement, leaders are flying blind — confident in effort but uncertain about direction.
-Facilitator prompt: “Where in your organisation does execution happen in the dark? </a:t>
-            </a:r>
-          </a:p>
-          <a:p>
-            <a:r>
-              <a:rPr lang="en-US" dirty="0"/>
-              <a:t>Where are you most likely to be surprised at the end of a reporting period?”
-</a:t>
-            </a:r>
-          </a:p>
-          <a:p>
-            <a:r>
-              <a:rPr lang="en-US" b="1" dirty="0"/>
+              <a:t>Without measurement, leaders are flying blind — confident in effort but uncertain about direction.</a:t>
+            </a:r>
+          </a:p>
+          <a:p>
+            <a:r>
+              <a:t>Facilitator prompt: “Where in your organisation does execution happen in the dark? </a:t>
+            </a:r>
+          </a:p>
+          <a:p>
+            <a:r>
+              <a:t>Where are you most likely to be surprised at the end of a reporting period?”</a:t>
+            </a:r>
+          </a:p>
+          <a:p/>
+          <a:p>
+            <a:r>
               <a:t>Purpose 02- Establishes Accountability</a:t>
             </a:r>
-            <a:r>
-              <a:rPr lang="en-US" dirty="0"/>
-              <a:t>
-</a:t>
-            </a:r>
-            <a:r>
-              <a:rPr lang="en-GB" dirty="0"/>
+          </a:p>
+          <a:p>
+            <a:r>
               <a:t>Strategic completion requires tracking every component of the declared goal, including the parts that bring no visible victory. Record what has been accomplished as evidence that commitments are being kept.</a:t>
             </a:r>
           </a:p>
           <a:p>
             <a:r>
-              <a:rPr lang="en-US" dirty="0"/>
               <a:t>Leaders and teams understand which part of the strategy they are responsible for advancing. </a:t>
             </a:r>
           </a:p>
           <a:p>
             <a:r>
-              <a:rPr lang="en-US" dirty="0"/>
-              <a:t>Accountability without measurement is aspiration without a feedback loop — it depends entirely on personal commitment, with no organisational structure behind it.
-Facilitator prompt: “If your KPIs disappeared from your scorecard but the targets remained unchanged — how many would still be actively owned?”
-</a:t>
-            </a:r>
-          </a:p>
-          <a:p>
-            <a:r>
-              <a:rPr lang="en-US" b="1" dirty="0"/>
-              <a:t>Purpose 03- </a:t>
-            </a:r>
-            <a:r>
-              <a:rPr lang="en-GB" b="1" dirty="0"/>
-              <a:t>Execution intelligence: </a:t>
-            </a:r>
-            <a:r>
-              <a:rPr lang="en-US" dirty="0"/>
-              <a:t>
-</a:t>
-            </a:r>
-            <a:r>
-              <a:rPr lang="en-GB" dirty="0"/>
+              <a:t>Accountability without measurement is aspiration without a feedback loop — it depends entirely on personal commitment, with no organisational structure behind it.</a:t>
+            </a:r>
+          </a:p>
+          <a:p>
+            <a:r>
+              <a:t>Facilitator prompt: “If your KPIs disappeared from your scorecard but the targets remained unchanged — how many would still be actively owned?”</a:t>
+            </a:r>
+          </a:p>
+          <a:p/>
+          <a:p>
+            <a:r>
+              <a:t>Purpose 03- Execution intelligence: </a:t>
+            </a:r>
+          </a:p>
+          <a:p>
+            <a:r>
               <a:t>At this point, performance measurement begins to evolve beyond data collection. It becomes execution intelligence. Data on its own rarely improves performance. Numbers simply describe what has happened. Insight emerges only when those numbers are interpreted through disciplined conversation. Performance measurement therefore transforms data into decision insight.</a:t>
             </a:r>
           </a:p>
           <a:p>
             <a:r>
-              <a:rPr lang="en-GB" dirty="0"/>
               <a:t>Each review cycle helps leaders answer three essential questions:</a:t>
             </a:r>
           </a:p>
           <a:p>
             <a:r>
-              <a:rPr lang="en-GB" dirty="0"/>
               <a:t>1. What progress has been achieved since the last review?</a:t>
             </a:r>
           </a:p>
           <a:p>
             <a:r>
-              <a:rPr lang="en-GB" dirty="0"/>
               <a:t>2. What obstacles are preventing further progress?</a:t>
             </a:r>
           </a:p>
           <a:p>
             <a:r>
-              <a:rPr lang="en-GB" dirty="0"/>
               <a:t>3. What adjustment will restore momentum toward the target?</a:t>
             </a:r>
           </a:p>
           <a:p>
             <a:r>
-              <a:rPr lang="en-GB" dirty="0"/>
               <a:t>Through these conversations, performance management becomes a learning system. Teams develop a deeper understanding of how strategy unfolds in practice. Leaders strengthen their ability to guide execution through uncertainty and complexity.</a:t>
             </a:r>
           </a:p>
-          <a:p>
-            <a:endParaRPr lang="en-US" dirty="0"/>
-          </a:p>
-          <a:p>
-            <a:r>
-              <a:rPr lang="en-US" b="1" dirty="0"/>
-              <a:t>Purpose 04- Enables Timely Correction
-Early signals allow teams to intervene while progress is still recoverable. </a:t>
-            </a:r>
-            <a:r>
-              <a:rPr lang="en-US" dirty="0"/>
-              <a:t/>
-            </a:r>
-          </a:p>
-          <a:p>
-            <a:r>
-              <a:rPr lang="en-US" dirty="0"/>
+          <a:p/>
+          <a:p>
+            <a:r>
+              <a:t>Purpose 04- Enables Timely Correction</a:t>
+            </a:r>
+          </a:p>
+          <a:p>
+            <a:r>
+              <a:t>Early signals allow teams to intervene while progress is still recoverable. </a:t>
+            </a:r>
+          </a:p>
+          <a:p>
+            <a:r>
               <a:t>Problems are addressed when they are small enough to resolve. </a:t>
             </a:r>
           </a:p>
           <a:p>
             <a:r>
-              <a:rPr lang="en-US" dirty="0"/>
-              <a:t>This purpose is why measurement frequency matters: a signal detected in week four is fundamentally different from the same signal detected in week twelve.
-Facilitator prompt: “What is the average gap in your organisation between when a performance problem begins and when leadership first becomes aware of it? What does that gap cost?”</a:t>
-            </a:r>
-          </a:p>
-          <a:p>
-            <a:endParaRPr lang="en-US" dirty="0"/>
-          </a:p>
-          <a:p>
-            <a:endParaRPr dirty="0"/>
+              <a:t>This purpose is why measurement frequency matters: a signal detected in week four is fundamentally different from the same signal detected in week twelve.</a:t>
+            </a:r>
+          </a:p>
+          <a:p>
+            <a:r>
+              <a:t>Facilitator prompt: “What is the average gap in your organisation between when a performance problem begins and when leadership first becomes aware of it? What does that gap cost?”</a:t>
+            </a:r>
+          </a:p>
+          <a:p/>
+          <a:p>
+            <a:r>
+              <a:t>THE HUMAN SIDE AND THE ORGANISATION SIDE OF EACH PURPOSE:</a:t>
+            </a:r>
+          </a:p>
+          <a:p>
+            <a:r>
+              <a:t>01 · Creates Visibility. Human side: where individuals' and teams' KPIs are gaining momentum and where they are stalling. Organisation side: where the organisational conditions are supporting the execution of the tasks, and where they are holding it back.</a:t>
+            </a:r>
+          </a:p>
+          <a:p>
+            <a:r>
+              <a:t>02 · Establishes Accountability. Human side: individuals and teams know which part of the strategy they are responsible for advancing, and their delivery is recorded as evidence. Organisation side: leaders account for whether the organisational conditions they undertook to provide in Unit 7 support the execution of the individuals' tasks.</a:t>
+            </a:r>
+          </a:p>
+          <a:p>
+            <a:r>
+              <a:t>03 · Execution Intelligence. Human side: the review learns what accelerates and what slows the progress of individuals and teams. Organisation side: the review learns which organisational conditions enable execution and which constrain it.</a:t>
+            </a:r>
+          </a:p>
+          <a:p>
+            <a:r>
+              <a:t>04 · Enables Timely Correction. Human side: an early signal in an individual's progress lets the leader intervene while the KPI is still recoverable. Organisation side: an early signal in an organisational condition, such as a system outage, a capacity shortfall or a delayed decision, lets the leader responsible act before the individuals' delivery is affected.</a:t>
+            </a:r>
           </a:p>
         </p:txBody>
       </p:sp>
@@ -4398,258 +4518,225 @@
           <a:lstStyle/>
           <a:p>
             <a:r>
-              <a:rPr lang="en-US" dirty="0"/>
-              <a:t>1.3 — FROM PERFORMANCE MEASUREMENT TO EXECUTION RECOVERY (the Review–Realign–Restore Cycle, R3)
-In Section 1.2, we established that performance measurement serves four strategic purposes: creating visibility, establishing accountability, generating execution intelligence and enabling timely correction.</a:t>
-            </a:r>
-            <a:r>
-              <a:rPr lang="en-ZA" dirty="0"/>
-              <a:t/>
-            </a:r>
-          </a:p>
-          <a:p>
-            <a:endParaRPr lang="en-ZA" dirty="0"/>
-          </a:p>
-          <a:p>
-            <a:r>
-              <a:rPr lang="en-ZA" dirty="0"/>
+              <a:t>1.3 — FROM PERFORMANCE MEASUREMENT TO EXECUTION RECOVERY (the Review–Realign–Restore Cycle, R3)</a:t>
+            </a:r>
+          </a:p>
+          <a:p/>
+          <a:p>
+            <a:r>
+              <a:t>In Section 1.2, we established that performance measurement serves four strategic purposes: creating visibility, establishing accountability, generating execution intelligence and enabling timely correction.</a:t>
+            </a:r>
+          </a:p>
+          <a:p/>
+          <a:p>
+            <a:r>
               <a:t>These four purposes work together to help leaders understand how strategy is progressing and where intervention is required.</a:t>
             </a:r>
           </a:p>
           <a:p>
             <a:r>
-              <a:rPr lang="en-ZA" dirty="0"/>
               <a:t>But identifying a performance gap does not automatically resolve it. </a:t>
             </a:r>
           </a:p>
           <a:p>
             <a:r>
-              <a:rPr lang="en-ZA" dirty="0"/>
               <a:t>Leaders need a disciplined process for interpreting what the evidence reveals, identifying what needs attention and ensuring that corrective decisions translate into improved execution.</a:t>
             </a:r>
           </a:p>
-          <a:p>
-            <a:endParaRPr lang="en-ZA" dirty="0"/>
-          </a:p>
-          <a:p>
-            <a:r>
-              <a:rPr lang="en-ZA" b="1" dirty="0"/>
+          <a:p/>
+          <a:p>
+            <a:r>
               <a:t>Within the S2R® system, this process is called the Review–Realign–Restore Cycle (R3).</a:t>
             </a:r>
           </a:p>
           <a:p>
             <a:r>
-              <a:rPr lang="en-ZA" dirty="0"/>
               <a:t>The cycle provides a recurring leadership rhythm through which performance evidence is examined, execution gaps are addressed and progress is restored.</a:t>
             </a:r>
           </a:p>
           <a:p>
             <a:r>
-              <a:rPr lang="en-ZA" b="1" dirty="0"/>
               <a:t>Stage 1 — Review: Establish Execution Reality</a:t>
             </a:r>
           </a:p>
           <a:p>
             <a:r>
-              <a:rPr lang="en-ZA" dirty="0"/>
               <a:t>Review brings together the first three purposes of performance measurement: visibility, accountability and execution intelligence.</a:t>
             </a:r>
           </a:p>
           <a:p>
             <a:r>
-              <a:rPr lang="en-ZA" dirty="0"/>
               <a:t>The KPI owner assesses progress against agreed targets and submits evidence of what has been achieved. </a:t>
             </a:r>
           </a:p>
           <a:p>
             <a:r>
-              <a:rPr lang="en-ZA" dirty="0"/>
               <a:t>The leader independently reviews the same KPI, bringing a broader organisational perspective.</a:t>
             </a:r>
           </a:p>
           <a:p>
             <a:r>
-              <a:rPr lang="en-ZA" dirty="0"/>
               <a:t>Together, they establish a shared understanding of execution reality.</a:t>
             </a:r>
           </a:p>
           <a:p>
             <a:r>
-              <a:rPr lang="en-ZA" dirty="0"/>
               <a:t>Three questions guide the conversation:</a:t>
             </a:r>
           </a:p>
           <a:p>
-            <a:pPr lvl="0"/>
-            <a:r>
-              <a:rPr lang="en-ZA" dirty="0"/>
+            <a:r>
               <a:t>What progress has been achieved against the agreed target?</a:t>
             </a:r>
           </a:p>
           <a:p>
-            <a:pPr lvl="0"/>
-            <a:r>
-              <a:rPr lang="en-ZA" dirty="0"/>
+            <a:r>
               <a:t>What does the evidence tell us about performance?</a:t>
             </a:r>
           </a:p>
           <a:p>
-            <a:pPr lvl="0"/>
-            <a:r>
-              <a:rPr lang="en-ZA" dirty="0"/>
+            <a:r>
               <a:t>Where is actual progress falling short of expectations?</a:t>
             </a:r>
           </a:p>
           <a:p>
             <a:r>
-              <a:rPr lang="en-ZA" dirty="0"/>
               <a:t>Outcome: A shared, evidence-based understanding of progress and any emerging performance gaps.</a:t>
             </a:r>
           </a:p>
-          <a:p>
-            <a:endParaRPr lang="en-ZA" b="1" dirty="0"/>
-          </a:p>
-          <a:p>
-            <a:r>
-              <a:rPr lang="en-ZA" b="1" dirty="0"/>
+          <a:p/>
+          <a:p>
+            <a:r>
               <a:t>Stage 2 — Realign: Diagnose and Address Execution Gaps</a:t>
             </a:r>
           </a:p>
           <a:p>
             <a:r>
-              <a:rPr lang="en-ZA" dirty="0"/>
               <a:t>Once Review establishes where progress is falling short, Realign determines what is preventing the expected performance.</a:t>
             </a:r>
           </a:p>
           <a:p>
             <a:r>
-              <a:rPr lang="en-ZA" dirty="0"/>
               <a:t>The leader activates the S2R® Accountability Loop to investigate whether the gap arises from:</a:t>
             </a:r>
           </a:p>
           <a:p>
-            <a:pPr lvl="0"/>
-            <a:r>
-              <a:rPr lang="en-ZA" dirty="0"/>
+            <a:r>
               <a:t>Ownership: The individual understands the responsibility but has lost connection to its purpose or accountability.</a:t>
             </a:r>
           </a:p>
           <a:p>
-            <a:pPr lvl="0"/>
-            <a:r>
-              <a:rPr lang="en-ZA" dirty="0"/>
+            <a:r>
               <a:t>Capability: The individual is committed but lacks the skills or support required to deliver.</a:t>
             </a:r>
           </a:p>
           <a:p>
-            <a:pPr lvl="0"/>
-            <a:r>
-              <a:rPr lang="en-ZA" dirty="0"/>
+            <a:r>
               <a:t>Role or structural constraints: The responsibilities, resources or organisational conditions are preventing effective execution.</a:t>
             </a:r>
           </a:p>
           <a:p>
             <a:r>
-              <a:rPr lang="en-ZA" dirty="0"/>
               <a:t>The leader and KPI owner identify an appropriate intervention, which may include renewed ownership, coaching, additional support or structural adjustments.</a:t>
             </a:r>
           </a:p>
           <a:p>
             <a:r>
-              <a:rPr lang="en-ZA" dirty="0"/>
               <a:t>Outcome: A clear understanding of the underlying performance constraint and an agreed corrective response.</a:t>
             </a:r>
           </a:p>
-          <a:p>
-            <a:endParaRPr lang="en-ZA" b="1" dirty="0"/>
-          </a:p>
-          <a:p>
-            <a:r>
-              <a:rPr lang="en-ZA" b="1" dirty="0"/>
+          <a:p/>
+          <a:p>
+            <a:r>
               <a:t>Stage 3 — Restore: Rebuild Execution Momentum</a:t>
             </a:r>
           </a:p>
           <a:p>
             <a:r>
-              <a:rPr lang="en-ZA" dirty="0"/>
               <a:t>Restore activates the fourth purpose of performance measurement: timely correction.</a:t>
             </a:r>
           </a:p>
           <a:p>
             <a:r>
-              <a:rPr lang="en-ZA" dirty="0"/>
               <a:t>The agreed intervention is translated into concrete execution commitments. </a:t>
             </a:r>
           </a:p>
           <a:p>
             <a:r>
-              <a:rPr lang="en-ZA" dirty="0"/>
               <a:t>The leader and KPI owner establish what must happen next, who is responsible and when progress will be reviewed.</a:t>
             </a:r>
           </a:p>
           <a:p>
             <a:r>
-              <a:rPr lang="en-ZA" dirty="0"/>
               <a:t>At this stage, they:</a:t>
             </a:r>
           </a:p>
           <a:p>
-            <a:pPr lvl="0"/>
-            <a:r>
-              <a:rPr lang="en-ZA" dirty="0"/>
+            <a:r>
               <a:t>Agree on corrective actions and expected progress.</a:t>
             </a:r>
           </a:p>
           <a:p>
-            <a:pPr lvl="0"/>
-            <a:r>
-              <a:rPr lang="en-ZA" dirty="0"/>
+            <a:r>
               <a:t>Reaffirm responsibilities and accountability.</a:t>
             </a:r>
           </a:p>
           <a:p>
-            <a:pPr lvl="0"/>
-            <a:r>
-              <a:rPr lang="en-ZA" dirty="0"/>
+            <a:r>
               <a:t>Establish follow-up timelines and support requirements.</a:t>
             </a:r>
           </a:p>
           <a:p>
-            <a:pPr lvl="0"/>
-            <a:r>
-              <a:rPr lang="en-ZA" dirty="0"/>
+            <a:r>
               <a:t>Update the KPI alignment state to reflect whether clarity, capability and ownership have been restored.</a:t>
             </a:r>
           </a:p>
           <a:p>
             <a:r>
-              <a:rPr lang="en-ZA" dirty="0"/>
               <a:t>Restoring momentum requires renewed commitment to the intended outcome, supported by the conditions necessary to achieve it.</a:t>
             </a:r>
           </a:p>
           <a:p>
             <a:r>
-              <a:rPr lang="en-ZA" dirty="0"/>
               <a:t>Outcome: A clear recovery pathway, renewed execution ownership and agreed follow-through.</a:t>
             </a:r>
           </a:p>
-          <a:p>
-            <a:endParaRPr lang="en-ZA" b="1" dirty="0"/>
-          </a:p>
-          <a:p>
-            <a:r>
-              <a:rPr lang="en-ZA" b="1" dirty="0"/>
+          <a:p/>
+          <a:p>
+            <a:r>
               <a:t>How the Cycle Remains Continuous</a:t>
             </a:r>
           </a:p>
           <a:p>
             <a:r>
-              <a:rPr lang="en-ZA" dirty="0"/>
               <a:t>The next Review examines whether the corrective actions have produced the expected improvement. If gaps remain, the cycle continues until execution returns to the required trajectory.</a:t>
             </a:r>
           </a:p>
-          <a:p>
-            <a:endParaRPr dirty="0"/>
+          <a:p/>
+          <a:p>
+            <a:r>
+              <a:t>THE CYCLE APPLIES TO BOTH OPERATING SYSTEMS:</a:t>
+            </a:r>
+          </a:p>
+          <a:p>
+            <a:r>
+              <a:t>Review. Human side: the individual and the leader establish the progress made against the agreed target. Organisation side: the leader brings the agreed measures or evidence of readiness for the organisational conditions, and the review establishes whether those conditions support the execution of the individuals' tasks.</a:t>
+            </a:r>
+          </a:p>
+          <a:p>
+            <a:r>
+              <a:t>Realign. Human side: the Accountability Loop (part 1.4) diagnoses what is preventing the individual's expected performance. Organisation side: the leader determines what is preventing an organisational condition from supporting the execution of the individuals' tasks, and agrees the response.</a:t>
+            </a:r>
+          </a:p>
+          <a:p>
+            <a:r>
+              <a:t>Restore. Human side: the individual commits to the corrective actions and the follow-up dates. Organisation side: the leader responsible commits to the actions on the organisational conditions, each with a review date.</a:t>
+            </a:r>
+          </a:p>
+          <a:p>
+            <a:r>
+              <a:t>How the cycle remains continuous: the next Review examines both: the individuals' progress, and whether the organisational conditions now support their tasks.</a:t>
+            </a:r>
           </a:p>
         </p:txBody>
       </p:sp>
@@ -4989,89 +5076,83 @@
           <a:lstStyle/>
           <a:p>
             <a:r>
-              <a:rPr lang="en-GB" b="1" dirty="0"/>
               <a:t>SECTION 2 · INTELLIGENCE — WHY</a:t>
             </a:r>
           </a:p>
           <a:p>
             <a:r>
-              <a:rPr lang="en-GB" dirty="0"/>
               <a:t>Why Performance Measurement Determines Execution Velocity</a:t>
             </a:r>
           </a:p>
-          <a:p>
-            <a:endParaRPr lang="en-GB" dirty="0"/>
-          </a:p>
-          <a:p>
-            <a:r>
-              <a:rPr lang="en-GB" b="1" dirty="0"/>
+          <a:p/>
+          <a:p>
+            <a:r>
               <a:t>SECTION LEARNING OUTCOMES:</a:t>
             </a:r>
           </a:p>
           <a:p>
             <a:r>
-              <a:rPr lang="en-GB" dirty="0"/>
               <a:t>1. Explain why review discipline determines the pace of execution.</a:t>
             </a:r>
           </a:p>
           <a:p>
             <a:r>
-              <a:rPr lang="en-GB" dirty="0"/>
               <a:t>2. Recognise the early signs that review discipline is weakening and the cost each carries.</a:t>
             </a:r>
           </a:p>
-          <a:p>
-            <a:endParaRPr lang="en-GB" dirty="0"/>
-          </a:p>
-          <a:p>
-            <a:r>
-              <a:rPr lang="en-GB" b="1" dirty="0"/>
+          <a:p/>
+          <a:p>
+            <a:r>
               <a:t>HOW TO OPEN THE SECTION:</a:t>
             </a:r>
           </a:p>
-          <a:p>
-            <a:endParaRPr lang="en-GB" dirty="0"/>
-          </a:p>
-          <a:p>
-            <a:r>
-              <a:rPr lang="en-GB" b="1" dirty="0"/>
+          <a:p/>
+          <a:p>
+            <a:r>
               <a:t>1. Name the shift.</a:t>
             </a:r>
           </a:p>
           <a:p>
             <a:r>
-              <a:rPr lang="en-GB" dirty="0"/>
               <a:t>Say: "This section moves from measurement as a tool to measurement as a leadership discipline. The rhythm of review conversations is itself a strategic capability."</a:t>
             </a:r>
           </a:p>
-          <a:p>
-            <a:endParaRPr lang="en-GB" dirty="0"/>
-          </a:p>
-          <a:p>
-            <a:r>
-              <a:rPr lang="en-GB" b="1" dirty="0"/>
+          <a:p/>
+          <a:p>
+            <a:r>
               <a:t>2. Preview the chain.</a:t>
             </a:r>
           </a:p>
           <a:p>
             <a:r>
-              <a:rPr lang="en-GB" dirty="0"/>
               <a:t>Say: "When that rhythm weakens, four consequences follow, and they are cumulative. Missed early warnings lead to diffused accountability; diffused accountability suppresses learning; suppressed learning erodes leadership credibility."</a:t>
             </a:r>
           </a:p>
-          <a:p>
-            <a:endParaRPr lang="en-GB" dirty="0"/>
-          </a:p>
-          <a:p>
-            <a:r>
-              <a:rPr lang="en-GB" b="1" dirty="0"/>
+          <a:p/>
+          <a:p>
+            <a:r>
               <a:t>3. Say where it goes.</a:t>
             </a:r>
           </a:p>
           <a:p>
             <a:r>
-              <a:rPr lang="en-GB" dirty="0"/>
               <a:t>Say: "Section 5 returns to these four consequences. There, your group sets the decision points that guard against them."</a:t>
+            </a:r>
+          </a:p>
+          <a:p/>
+          <a:p>
+            <a:r>
+              <a:t>TEACHING NOTES FROM THE FACILITATOR GUIDE:</a:t>
+            </a:r>
+          </a:p>
+          <a:p>
+            <a:r>
+              <a:t>2.1 · Execution velocity. Open with the question "What determines the velocity of the flight?" and teach execution velocity: the rate at which an organisation converts strategic intent into measurable results, shaped by how quickly leaders detect, understand, decide and act. Performance measurement provides the evidence; review discipline converts it into timely decisions.</a:t>
+            </a:r>
+          </a:p>
+          <a:p>
+            <a:r>
+              <a:t>2.1 · Four Consequences of Weak Review Discipline. Teach the four consequences as one chain, one card at a time, each from the human side and the organisation side. Ask the question on each card once the card is taught, so participants recognise the chain in their own organisations.</a:t>
             </a:r>
           </a:p>
         </p:txBody>
@@ -6552,6 +6633,136 @@
 </file>
 
 <file path=ppt/slides/slide12.xml><?xml version="1.0" encoding="utf-8"?>
+<p:sld xmlns:a="http://schemas.openxmlformats.org/drawingml/2006/main" xmlns:p="http://schemas.openxmlformats.org/presentationml/2006/main" xmlns:r="http://schemas.openxmlformats.org/officeDocument/2006/relationships">
+  <p:cSld>
+    <p:bg>
+      <p:bgPr>
+        <a:solidFill>
+          <a:srgbClr val="FFFFFF"/>
+        </a:solidFill>
+        <a:effectLst/>
+      </p:bgPr>
+    </p:bg>
+    <p:spTree>
+      <p:nvGrpSpPr>
+        <p:cNvPr id="1" name=""/>
+        <p:cNvGrpSpPr/>
+        <p:nvPr/>
+      </p:nvGrpSpPr>
+      <p:grpSpPr/>
+      <p:sp>
+        <p:nvSpPr>
+          <p:cNvPr id="2" name="Text 0"/>
+          <p:cNvSpPr txBox="1"/>
+          <p:nvPr/>
+        </p:nvSpPr>
+        <p:spPr>
+          <a:xfrm>
+            <a:off x="548640" y="411480"/>
+            <a:ext cx="11064240" cy="868680"/>
+          </a:xfrm>
+          <a:prstGeom prst="rect">
+            <a:avLst/>
+          </a:prstGeom>
+          <a:noFill/>
+          <a:ln/>
+        </p:spPr>
+        <p:txBody>
+          <a:bodyPr wrap="square" lIns="0" tIns="0" rIns="0" bIns="0" rtlCol="0" anchor="ctr"/>
+          <a:lstStyle/>
+          <a:p>
+            <a:pPr marL="0" indent="0">
+              <a:buNone/>
+            </a:pPr>
+            <a:r>
+              <a:rPr lang="en-US" sz="3600" b="1" dirty="0">
+                <a:solidFill>
+                  <a:srgbClr val="1A5C2C"/>
+                </a:solidFill>
+                <a:latin typeface="Cambria" pitchFamily="34" charset="0"/>
+                <a:ea typeface="Cambria" pitchFamily="34" charset="-122"/>
+                <a:cs typeface="Cambria" pitchFamily="34" charset="-120"/>
+              </a:rPr>
+              <a:t>Section 2 Reflections</a:t>
+            </a:r>
+            <a:endParaRPr lang="en-US" sz="3600" dirty="0"/>
+          </a:p>
+        </p:txBody>
+      </p:sp>
+      <p:pic>
+        <p:nvPicPr>
+          <p:cNvPr id="3" name="Reflection 2.1" descr="ref_2.1.png"/>
+          <p:cNvPicPr>
+            <a:picLocks noChangeAspect="1"/>
+          </p:cNvPicPr>
+          <p:nvPr/>
+        </p:nvPicPr>
+        <p:blipFill>
+          <a:blip r:embed="rId9"/>
+          <a:stretch>
+            <a:fillRect/>
+          </a:stretch>
+        </p:blipFill>
+        <p:spPr>
+          <a:xfrm>
+            <a:off x="1691640" y="1463040"/>
+            <a:ext cx="10058400" cy="1988623"/>
+          </a:xfrm>
+          <a:prstGeom prst="rect">
+            <a:avLst/>
+          </a:prstGeom>
+        </p:spPr>
+      </p:pic>
+      <p:sp>
+        <p:nvSpPr>
+          <p:cNvPr id="4" name="Part 2.1"/>
+          <p:cNvSpPr/>
+          <p:nvPr/>
+        </p:nvSpPr>
+        <p:spPr>
+          <a:xfrm>
+            <a:off x="548640" y="2030216"/>
+            <a:ext cx="868680" cy="868680"/>
+          </a:xfrm>
+          <a:prstGeom prst="ellipse">
+            <a:avLst/>
+          </a:prstGeom>
+          <a:solidFill>
+            <a:srgbClr val="C6A24C"/>
+          </a:solidFill>
+          <a:ln>
+            <a:solidFill>
+              <a:srgbClr val="C6A24C"/>
+            </a:solidFill>
+          </a:ln>
+          <a:effectLst/>
+        </p:spPr>
+        <p:txBody>
+          <a:bodyPr wrap="none" lIns="0" tIns="0" rIns="0" bIns="0" rtlCol="0" anchor="ctr"/>
+          <a:lstStyle/>
+          <a:p>
+            <a:pPr algn="ctr"/>
+            <a:r>
+              <a:rPr lang="en-GB" sz="2400" b="1">
+                <a:solidFill>
+                  <a:srgbClr val="FFFFFF"/>
+                </a:solidFill>
+                <a:latin typeface="Calibri"/>
+              </a:rPr>
+              <a:t>2.1</a:t>
+            </a:r>
+          </a:p>
+        </p:txBody>
+      </p:sp>
+    </p:spTree>
+  </p:cSld>
+  <p:clrMapOvr>
+    <a:masterClrMapping/>
+  </p:clrMapOvr>
+</p:sld>
+</file>
+
+<file path=ppt/slides/slide13.xml><?xml version="1.0" encoding="utf-8"?>
 <p:sld xmlns:a="http://schemas.openxmlformats.org/drawingml/2006/main" xmlns:r="http://schemas.openxmlformats.org/officeDocument/2006/relationships" xmlns:p="http://schemas.openxmlformats.org/presentationml/2006/main">
   <p:cSld name="Slide 13">
     <p:bg>
@@ -6969,7 +7180,7 @@
 </p:sld>
 </file>
 
-<file path=ppt/slides/slide13.xml><?xml version="1.0" encoding="utf-8"?>
+<file path=ppt/slides/slide14.xml><?xml version="1.0" encoding="utf-8"?>
 <p:sld xmlns:a="http://schemas.openxmlformats.org/drawingml/2006/main" xmlns:r="http://schemas.openxmlformats.org/officeDocument/2006/relationships" xmlns:p="http://schemas.openxmlformats.org/presentationml/2006/main">
   <p:cSld name="Slide 14">
     <p:bg>
@@ -7700,743 +7911,6 @@
                 <a:cs typeface="Calibri" pitchFamily="34" charset="-120"/>
               </a:rPr>
               <a:t>Reviews focus only on evaluation.</a:t>
-            </a:r>
-            <a:endParaRPr lang="en-US" sz="2400" dirty="0"/>
-          </a:p>
-        </p:txBody>
-      </p:sp>
-    </p:spTree>
-  </p:cSld>
-  <p:clrMapOvr>
-    <a:masterClrMapping/>
-  </p:clrMapOvr>
-</p:sld>
-</file>
-
-<file path=ppt/slides/slide14.xml><?xml version="1.0" encoding="utf-8"?>
-<p:sld xmlns:a="http://schemas.openxmlformats.org/drawingml/2006/main" xmlns:p="http://schemas.openxmlformats.org/presentationml/2006/main" xmlns:r="http://schemas.openxmlformats.org/officeDocument/2006/relationships">
-  <p:cSld>
-    <p:bg>
-      <p:bgPr>
-        <a:solidFill>
-          <a:srgbClr val="FFFFFF"/>
-        </a:solidFill>
-        <a:effectLst/>
-      </p:bgPr>
-    </p:bg>
-    <p:spTree>
-      <p:nvGrpSpPr>
-        <p:cNvPr id="1" name=""/>
-        <p:cNvGrpSpPr/>
-        <p:nvPr/>
-      </p:nvGrpSpPr>
-      <p:grpSpPr/>
-      <p:sp>
-        <p:nvSpPr>
-          <p:cNvPr id="2" name="Text 0"/>
-          <p:cNvSpPr txBox="1"/>
-          <p:nvPr/>
-        </p:nvSpPr>
-        <p:spPr>
-          <a:xfrm>
-            <a:off x="548640" y="411480"/>
-            <a:ext cx="11064240" cy="868680"/>
-          </a:xfrm>
-          <a:prstGeom prst="rect">
-            <a:avLst/>
-          </a:prstGeom>
-          <a:noFill/>
-          <a:ln/>
-        </p:spPr>
-        <p:txBody>
-          <a:bodyPr wrap="square" lIns="0" tIns="0" rIns="0" bIns="0" rtlCol="0" anchor="ctr"/>
-          <a:lstStyle/>
-          <a:p>
-            <a:pPr marL="0" indent="0">
-              <a:buNone/>
-            </a:pPr>
-            <a:r>
-              <a:rPr lang="en-US" sz="3600" b="1" dirty="0">
-                <a:solidFill>
-                  <a:srgbClr val="1A5C2C"/>
-                </a:solidFill>
-                <a:latin typeface="Cambria" pitchFamily="34" charset="0"/>
-                <a:ea typeface="Cambria" pitchFamily="34" charset="-122"/>
-                <a:cs typeface="Cambria" pitchFamily="34" charset="-120"/>
-              </a:rPr>
-              <a:t>3.2 · The CXO performance gap contributors</a:t>
-            </a:r>
-            <a:endParaRPr lang="en-US" sz="3600" dirty="0"/>
-          </a:p>
-        </p:txBody>
-      </p:sp>
-      <p:sp>
-        <p:nvSpPr>
-          <p:cNvPr id="3" name="Shape 1"/>
-          <p:cNvSpPr/>
-          <p:nvPr/>
-        </p:nvSpPr>
-        <p:spPr>
-          <a:xfrm>
-            <a:off x="548640" y="1508760"/>
-            <a:ext cx="5408676" cy="2286000"/>
-          </a:xfrm>
-          <a:prstGeom prst="roundRect">
-            <a:avLst>
-              <a:gd name="adj" fmla="val 4000"/>
-            </a:avLst>
-          </a:prstGeom>
-          <a:solidFill>
-            <a:srgbClr val="EEF4EF"/>
-          </a:solidFill>
-          <a:ln w="12700">
-            <a:solidFill>
-              <a:srgbClr val="EEF4EF"/>
-            </a:solidFill>
-            <a:prstDash val="solid"/>
-          </a:ln>
-        </p:spPr>
-        <p:txBody>
-          <a:bodyPr/>
-          <a:lstStyle/>
-          <a:p>
-            <a:endParaRPr lang="en-ZA"/>
-          </a:p>
-        </p:txBody>
-      </p:sp>
-      <p:sp>
-        <p:nvSpPr>
-          <p:cNvPr id="4" name="Shape 2"/>
-          <p:cNvSpPr/>
-          <p:nvPr/>
-        </p:nvSpPr>
-        <p:spPr>
-          <a:xfrm>
-            <a:off x="777240" y="1737360"/>
-            <a:ext cx="548640" cy="548640"/>
-          </a:xfrm>
-          <a:prstGeom prst="ellipse">
-            <a:avLst/>
-          </a:prstGeom>
-          <a:solidFill>
-            <a:srgbClr val="1A5C2C"/>
-          </a:solidFill>
-          <a:ln w="12700">
-            <a:solidFill>
-              <a:srgbClr val="1A5C2C"/>
-            </a:solidFill>
-            <a:prstDash val="solid"/>
-          </a:ln>
-        </p:spPr>
-        <p:txBody>
-          <a:bodyPr/>
-          <a:lstStyle/>
-          <a:p>
-            <a:endParaRPr lang="en-ZA"/>
-          </a:p>
-        </p:txBody>
-      </p:sp>
-      <p:pic>
-        <p:nvPicPr>
-          <p:cNvPr id="5" name="Image 0" descr="preencoded.png"/>
-          <p:cNvPicPr>
-            <a:picLocks noChangeAspect="1"/>
-          </p:cNvPicPr>
-          <p:nvPr/>
-        </p:nvPicPr>
-        <p:blipFill>
-          <a:blip r:embed="rId2"/>
-          <a:stretch>
-            <a:fillRect/>
-          </a:stretch>
-        </p:blipFill>
-        <p:spPr>
-          <a:xfrm>
-            <a:off x="914400" y="1874520"/>
-            <a:ext cx="274320" cy="274320"/>
-          </a:xfrm>
-          <a:prstGeom prst="rect">
-            <a:avLst/>
-          </a:prstGeom>
-        </p:spPr>
-      </p:pic>
-      <p:sp>
-        <p:nvSpPr>
-          <p:cNvPr id="6" name="Text 3"/>
-          <p:cNvSpPr txBox="1"/>
-          <p:nvPr/>
-        </p:nvSpPr>
-        <p:spPr>
-          <a:xfrm>
-            <a:off x="1508760" y="1691640"/>
-            <a:ext cx="4219956" cy="923544"/>
-          </a:xfrm>
-          <a:prstGeom prst="rect">
-            <a:avLst/>
-          </a:prstGeom>
-          <a:noFill/>
-          <a:ln/>
-        </p:spPr>
-        <p:txBody>
-          <a:bodyPr wrap="square" lIns="0" tIns="0" rIns="0" bIns="0" rtlCol="0" anchor="ctr"/>
-          <a:lstStyle/>
-          <a:p>
-            <a:pPr marL="0" indent="0">
-              <a:buNone/>
-            </a:pPr>
-            <a:r>
-              <a:rPr lang="en-US" sz="2600" b="1" dirty="0">
-                <a:solidFill>
-                  <a:srgbClr val="1A5C2C"/>
-                </a:solidFill>
-                <a:latin typeface="Cambria" pitchFamily="34" charset="0"/>
-                <a:ea typeface="Cambria" pitchFamily="34" charset="-122"/>
-                <a:cs typeface="Cambria" pitchFamily="34" charset="-120"/>
-              </a:rPr>
-              <a:t>Gap 01 · Horizontal Coordination</a:t>
-            </a:r>
-            <a:endParaRPr lang="en-US" sz="2600" dirty="0"/>
-          </a:p>
-        </p:txBody>
-      </p:sp>
-      <p:sp>
-        <p:nvSpPr>
-          <p:cNvPr id="7" name="Text 4"/>
-          <p:cNvSpPr txBox="1"/>
-          <p:nvPr/>
-        </p:nvSpPr>
-        <p:spPr>
-          <a:xfrm>
-            <a:off x="777240" y="2752344"/>
-            <a:ext cx="4951476" cy="905256"/>
-          </a:xfrm>
-          <a:prstGeom prst="rect">
-            <a:avLst/>
-          </a:prstGeom>
-          <a:noFill/>
-          <a:ln/>
-        </p:spPr>
-        <p:txBody>
-          <a:bodyPr wrap="square" lIns="0" tIns="0" rIns="0" bIns="0" rtlCol="0" anchor="t"/>
-          <a:lstStyle/>
-          <a:p>
-            <a:pPr marL="0" indent="0">
-              <a:buNone/>
-            </a:pPr>
-            <a:r>
-              <a:rPr lang="en-US" sz="2400" dirty="0">
-                <a:solidFill>
-                  <a:srgbClr val="1F2A22"/>
-                </a:solidFill>
-                <a:latin typeface="Calibri" pitchFamily="34" charset="0"/>
-                <a:ea typeface="Calibri" pitchFamily="34" charset="-122"/>
-                <a:cs typeface="Calibri" pitchFamily="34" charset="-120"/>
-              </a:rPr>
-              <a:t>COO · CTO/CIO · CMO · CCO · CPO</a:t>
-            </a:r>
-            <a:endParaRPr lang="en-US" sz="2400" dirty="0"/>
-          </a:p>
-        </p:txBody>
-      </p:sp>
-      <p:sp>
-        <p:nvSpPr>
-          <p:cNvPr id="8" name="Shape 5"/>
-          <p:cNvSpPr/>
-          <p:nvPr/>
-        </p:nvSpPr>
-        <p:spPr>
-          <a:xfrm>
-            <a:off x="6231636" y="1508760"/>
-            <a:ext cx="5408676" cy="2286000"/>
-          </a:xfrm>
-          <a:prstGeom prst="roundRect">
-            <a:avLst>
-              <a:gd name="adj" fmla="val 4000"/>
-            </a:avLst>
-          </a:prstGeom>
-          <a:solidFill>
-            <a:srgbClr val="EEF4EF"/>
-          </a:solidFill>
-          <a:ln w="12700">
-            <a:solidFill>
-              <a:srgbClr val="EEF4EF"/>
-            </a:solidFill>
-            <a:prstDash val="solid"/>
-          </a:ln>
-        </p:spPr>
-        <p:txBody>
-          <a:bodyPr/>
-          <a:lstStyle/>
-          <a:p>
-            <a:endParaRPr lang="en-ZA"/>
-          </a:p>
-        </p:txBody>
-      </p:sp>
-      <p:sp>
-        <p:nvSpPr>
-          <p:cNvPr id="9" name="Shape 6"/>
-          <p:cNvSpPr/>
-          <p:nvPr/>
-        </p:nvSpPr>
-        <p:spPr>
-          <a:xfrm>
-            <a:off x="6460236" y="1737360"/>
-            <a:ext cx="548640" cy="548640"/>
-          </a:xfrm>
-          <a:prstGeom prst="ellipse">
-            <a:avLst/>
-          </a:prstGeom>
-          <a:solidFill>
-            <a:srgbClr val="1A5C2C"/>
-          </a:solidFill>
-          <a:ln w="12700">
-            <a:solidFill>
-              <a:srgbClr val="1A5C2C"/>
-            </a:solidFill>
-            <a:prstDash val="solid"/>
-          </a:ln>
-        </p:spPr>
-        <p:txBody>
-          <a:bodyPr/>
-          <a:lstStyle/>
-          <a:p>
-            <a:endParaRPr lang="en-ZA"/>
-          </a:p>
-        </p:txBody>
-      </p:sp>
-      <p:pic>
-        <p:nvPicPr>
-          <p:cNvPr id="10" name="Image 1" descr="preencoded.png"/>
-          <p:cNvPicPr>
-            <a:picLocks noChangeAspect="1"/>
-          </p:cNvPicPr>
-          <p:nvPr/>
-        </p:nvPicPr>
-        <p:blipFill>
-          <a:blip r:embed="rId5"/>
-          <a:stretch>
-            <a:fillRect/>
-          </a:stretch>
-        </p:blipFill>
-        <p:spPr>
-          <a:xfrm>
-            <a:off x="6597396" y="1874520"/>
-            <a:ext cx="274320" cy="274320"/>
-          </a:xfrm>
-          <a:prstGeom prst="rect">
-            <a:avLst/>
-          </a:prstGeom>
-        </p:spPr>
-      </p:pic>
-      <p:sp>
-        <p:nvSpPr>
-          <p:cNvPr id="11" name="Text 7"/>
-          <p:cNvSpPr txBox="1"/>
-          <p:nvPr/>
-        </p:nvSpPr>
-        <p:spPr>
-          <a:xfrm>
-            <a:off x="7191756" y="1691640"/>
-            <a:ext cx="4219956" cy="923544"/>
-          </a:xfrm>
-          <a:prstGeom prst="rect">
-            <a:avLst/>
-          </a:prstGeom>
-          <a:noFill/>
-          <a:ln/>
-        </p:spPr>
-        <p:txBody>
-          <a:bodyPr wrap="square" lIns="0" tIns="0" rIns="0" bIns="0" rtlCol="0" anchor="ctr"/>
-          <a:lstStyle/>
-          <a:p>
-            <a:pPr marL="0" indent="0">
-              <a:buNone/>
-            </a:pPr>
-            <a:r>
-              <a:rPr lang="en-US" sz="2600" b="1" dirty="0">
-                <a:solidFill>
-                  <a:srgbClr val="1A5C2C"/>
-                </a:solidFill>
-                <a:latin typeface="Cambria" pitchFamily="34" charset="0"/>
-                <a:ea typeface="Cambria" pitchFamily="34" charset="-122"/>
-                <a:cs typeface="Cambria" pitchFamily="34" charset="-120"/>
-              </a:rPr>
-              <a:t>Gap 02 · Evidence Quality</a:t>
-            </a:r>
-            <a:endParaRPr lang="en-US" sz="2600" dirty="0"/>
-          </a:p>
-        </p:txBody>
-      </p:sp>
-      <p:sp>
-        <p:nvSpPr>
-          <p:cNvPr id="12" name="Text 8"/>
-          <p:cNvSpPr txBox="1"/>
-          <p:nvPr/>
-        </p:nvSpPr>
-        <p:spPr>
-          <a:xfrm>
-            <a:off x="6460236" y="2752344"/>
-            <a:ext cx="4951476" cy="905256"/>
-          </a:xfrm>
-          <a:prstGeom prst="rect">
-            <a:avLst/>
-          </a:prstGeom>
-          <a:noFill/>
-          <a:ln/>
-        </p:spPr>
-        <p:txBody>
-          <a:bodyPr wrap="square" lIns="0" tIns="0" rIns="0" bIns="0" rtlCol="0" anchor="t"/>
-          <a:lstStyle/>
-          <a:p>
-            <a:pPr marL="0" indent="0">
-              <a:buNone/>
-            </a:pPr>
-            <a:r>
-              <a:rPr lang="en-US" sz="2400" dirty="0">
-                <a:solidFill>
-                  <a:srgbClr val="1F2A22"/>
-                </a:solidFill>
-                <a:latin typeface="Calibri" pitchFamily="34" charset="0"/>
-                <a:ea typeface="Calibri" pitchFamily="34" charset="-122"/>
-                <a:cs typeface="Calibri" pitchFamily="34" charset="-120"/>
-              </a:rPr>
-              <a:t>CFO · CHRO · CTO/CIO · CMO · CPO</a:t>
-            </a:r>
-            <a:endParaRPr lang="en-US" sz="2400" dirty="0"/>
-          </a:p>
-        </p:txBody>
-      </p:sp>
-      <p:sp>
-        <p:nvSpPr>
-          <p:cNvPr id="13" name="Shape 9"/>
-          <p:cNvSpPr/>
-          <p:nvPr/>
-        </p:nvSpPr>
-        <p:spPr>
-          <a:xfrm>
-            <a:off x="548640" y="4069080"/>
-            <a:ext cx="5408676" cy="2286000"/>
-          </a:xfrm>
-          <a:prstGeom prst="roundRect">
-            <a:avLst>
-              <a:gd name="adj" fmla="val 4000"/>
-            </a:avLst>
-          </a:prstGeom>
-          <a:solidFill>
-            <a:srgbClr val="EEF4EF"/>
-          </a:solidFill>
-          <a:ln w="12700">
-            <a:solidFill>
-              <a:srgbClr val="EEF4EF"/>
-            </a:solidFill>
-            <a:prstDash val="solid"/>
-          </a:ln>
-        </p:spPr>
-        <p:txBody>
-          <a:bodyPr/>
-          <a:lstStyle/>
-          <a:p>
-            <a:endParaRPr lang="en-ZA"/>
-          </a:p>
-        </p:txBody>
-      </p:sp>
-      <p:sp>
-        <p:nvSpPr>
-          <p:cNvPr id="14" name="Shape 10"/>
-          <p:cNvSpPr/>
-          <p:nvPr/>
-        </p:nvSpPr>
-        <p:spPr>
-          <a:xfrm>
-            <a:off x="777240" y="4297680"/>
-            <a:ext cx="548640" cy="548640"/>
-          </a:xfrm>
-          <a:prstGeom prst="ellipse">
-            <a:avLst/>
-          </a:prstGeom>
-          <a:solidFill>
-            <a:srgbClr val="1A5C2C"/>
-          </a:solidFill>
-          <a:ln w="12700">
-            <a:solidFill>
-              <a:srgbClr val="1A5C2C"/>
-            </a:solidFill>
-            <a:prstDash val="solid"/>
-          </a:ln>
-        </p:spPr>
-        <p:txBody>
-          <a:bodyPr/>
-          <a:lstStyle/>
-          <a:p>
-            <a:endParaRPr lang="en-ZA"/>
-          </a:p>
-        </p:txBody>
-      </p:sp>
-      <p:pic>
-        <p:nvPicPr>
-          <p:cNvPr id="15" name="Image 2" descr="preencoded.png"/>
-          <p:cNvPicPr>
-            <a:picLocks noChangeAspect="1"/>
-          </p:cNvPicPr>
-          <p:nvPr/>
-        </p:nvPicPr>
-        <p:blipFill>
-          <a:blip r:embed="rId4"/>
-          <a:stretch>
-            <a:fillRect/>
-          </a:stretch>
-        </p:blipFill>
-        <p:spPr>
-          <a:xfrm>
-            <a:off x="914400" y="4434840"/>
-            <a:ext cx="274320" cy="274320"/>
-          </a:xfrm>
-          <a:prstGeom prst="rect">
-            <a:avLst/>
-          </a:prstGeom>
-        </p:spPr>
-      </p:pic>
-      <p:sp>
-        <p:nvSpPr>
-          <p:cNvPr id="16" name="Text 11"/>
-          <p:cNvSpPr txBox="1"/>
-          <p:nvPr/>
-        </p:nvSpPr>
-        <p:spPr>
-          <a:xfrm>
-            <a:off x="1508760" y="4251960"/>
-            <a:ext cx="4219956" cy="923544"/>
-          </a:xfrm>
-          <a:prstGeom prst="rect">
-            <a:avLst/>
-          </a:prstGeom>
-          <a:noFill/>
-          <a:ln/>
-        </p:spPr>
-        <p:txBody>
-          <a:bodyPr wrap="square" lIns="0" tIns="0" rIns="0" bIns="0" rtlCol="0" anchor="ctr"/>
-          <a:lstStyle/>
-          <a:p>
-            <a:pPr marL="0" indent="0">
-              <a:buNone/>
-            </a:pPr>
-            <a:r>
-              <a:rPr lang="en-US" sz="2600" b="1" dirty="0">
-                <a:solidFill>
-                  <a:srgbClr val="1A5C2C"/>
-                </a:solidFill>
-                <a:latin typeface="Cambria" pitchFamily="34" charset="0"/>
-                <a:ea typeface="Cambria" pitchFamily="34" charset="-122"/>
-                <a:cs typeface="Cambria" pitchFamily="34" charset="-120"/>
-              </a:rPr>
-              <a:t>Gap 03 · Review Rhythm Breakdown</a:t>
-            </a:r>
-            <a:endParaRPr lang="en-US" sz="2600" dirty="0"/>
-          </a:p>
-        </p:txBody>
-      </p:sp>
-      <p:sp>
-        <p:nvSpPr>
-          <p:cNvPr id="17" name="Text 12"/>
-          <p:cNvSpPr txBox="1"/>
-          <p:nvPr/>
-        </p:nvSpPr>
-        <p:spPr>
-          <a:xfrm>
-            <a:off x="777240" y="5312664"/>
-            <a:ext cx="4951476" cy="905256"/>
-          </a:xfrm>
-          <a:prstGeom prst="rect">
-            <a:avLst/>
-          </a:prstGeom>
-          <a:noFill/>
-          <a:ln/>
-        </p:spPr>
-        <p:txBody>
-          <a:bodyPr wrap="square" lIns="0" tIns="0" rIns="0" bIns="0" rtlCol="0" anchor="t"/>
-          <a:lstStyle/>
-          <a:p>
-            <a:pPr marL="0" indent="0">
-              <a:buNone/>
-            </a:pPr>
-            <a:r>
-              <a:rPr lang="en-US" sz="2400" dirty="0">
-                <a:solidFill>
-                  <a:srgbClr val="1F2A22"/>
-                </a:solidFill>
-                <a:latin typeface="Calibri" pitchFamily="34" charset="0"/>
-                <a:ea typeface="Calibri" pitchFamily="34" charset="-122"/>
-                <a:cs typeface="Calibri" pitchFamily="34" charset="-120"/>
-              </a:rPr>
-              <a:t>CEO · CHRO · CRO · CSO</a:t>
-            </a:r>
-            <a:endParaRPr lang="en-US" sz="2400" dirty="0"/>
-          </a:p>
-        </p:txBody>
-      </p:sp>
-      <p:sp>
-        <p:nvSpPr>
-          <p:cNvPr id="18" name="Shape 13"/>
-          <p:cNvSpPr/>
-          <p:nvPr/>
-        </p:nvSpPr>
-        <p:spPr>
-          <a:xfrm>
-            <a:off x="6231636" y="4069080"/>
-            <a:ext cx="5408676" cy="2286000"/>
-          </a:xfrm>
-          <a:prstGeom prst="roundRect">
-            <a:avLst>
-              <a:gd name="adj" fmla="val 4000"/>
-            </a:avLst>
-          </a:prstGeom>
-          <a:solidFill>
-            <a:srgbClr val="EEF4EF"/>
-          </a:solidFill>
-          <a:ln w="12700">
-            <a:solidFill>
-              <a:srgbClr val="EEF4EF"/>
-            </a:solidFill>
-            <a:prstDash val="solid"/>
-          </a:ln>
-        </p:spPr>
-        <p:txBody>
-          <a:bodyPr/>
-          <a:lstStyle/>
-          <a:p>
-            <a:endParaRPr lang="en-ZA"/>
-          </a:p>
-        </p:txBody>
-      </p:sp>
-      <p:sp>
-        <p:nvSpPr>
-          <p:cNvPr id="19" name="Shape 14"/>
-          <p:cNvSpPr/>
-          <p:nvPr/>
-        </p:nvSpPr>
-        <p:spPr>
-          <a:xfrm>
-            <a:off x="6460236" y="4297680"/>
-            <a:ext cx="548640" cy="548640"/>
-          </a:xfrm>
-          <a:prstGeom prst="ellipse">
-            <a:avLst/>
-          </a:prstGeom>
-          <a:solidFill>
-            <a:srgbClr val="1A5C2C"/>
-          </a:solidFill>
-          <a:ln w="12700">
-            <a:solidFill>
-              <a:srgbClr val="1A5C2C"/>
-            </a:solidFill>
-            <a:prstDash val="solid"/>
-          </a:ln>
-        </p:spPr>
-        <p:txBody>
-          <a:bodyPr/>
-          <a:lstStyle/>
-          <a:p>
-            <a:endParaRPr lang="en-ZA"/>
-          </a:p>
-        </p:txBody>
-      </p:sp>
-      <p:pic>
-        <p:nvPicPr>
-          <p:cNvPr id="20" name="Image 3" descr="preencoded.png"/>
-          <p:cNvPicPr>
-            <a:picLocks noChangeAspect="1"/>
-          </p:cNvPicPr>
-          <p:nvPr/>
-        </p:nvPicPr>
-        <p:blipFill>
-          <a:blip r:embed="rId3"/>
-          <a:stretch>
-            <a:fillRect/>
-          </a:stretch>
-        </p:blipFill>
-        <p:spPr>
-          <a:xfrm>
-            <a:off x="6597396" y="4434840"/>
-            <a:ext cx="274320" cy="274320"/>
-          </a:xfrm>
-          <a:prstGeom prst="rect">
-            <a:avLst/>
-          </a:prstGeom>
-        </p:spPr>
-      </p:pic>
-      <p:sp>
-        <p:nvSpPr>
-          <p:cNvPr id="21" name="Text 15"/>
-          <p:cNvSpPr txBox="1"/>
-          <p:nvPr/>
-        </p:nvSpPr>
-        <p:spPr>
-          <a:xfrm>
-            <a:off x="7191756" y="4251960"/>
-            <a:ext cx="4219956" cy="923544"/>
-          </a:xfrm>
-          <a:prstGeom prst="rect">
-            <a:avLst/>
-          </a:prstGeom>
-          <a:noFill/>
-          <a:ln/>
-        </p:spPr>
-        <p:txBody>
-          <a:bodyPr wrap="square" lIns="0" tIns="0" rIns="0" bIns="0" rtlCol="0" anchor="ctr"/>
-          <a:lstStyle/>
-          <a:p>
-            <a:pPr marL="0" indent="0">
-              <a:buNone/>
-            </a:pPr>
-            <a:r>
-              <a:rPr lang="en-US" sz="2600" b="1" dirty="0">
-                <a:solidFill>
-                  <a:srgbClr val="1A5C2C"/>
-                </a:solidFill>
-                <a:latin typeface="Cambria" pitchFamily="34" charset="0"/>
-                <a:ea typeface="Cambria" pitchFamily="34" charset="-122"/>
-                <a:cs typeface="Cambria" pitchFamily="34" charset="-120"/>
-              </a:rPr>
-              <a:t>Gap 04 · Learning Suppression</a:t>
-            </a:r>
-            <a:endParaRPr lang="en-US" sz="2600" dirty="0"/>
-          </a:p>
-        </p:txBody>
-      </p:sp>
-      <p:sp>
-        <p:nvSpPr>
-          <p:cNvPr id="22" name="Text 16"/>
-          <p:cNvSpPr txBox="1"/>
-          <p:nvPr/>
-        </p:nvSpPr>
-        <p:spPr>
-          <a:xfrm>
-            <a:off x="6460236" y="5312664"/>
-            <a:ext cx="4951476" cy="905256"/>
-          </a:xfrm>
-          <a:prstGeom prst="rect">
-            <a:avLst/>
-          </a:prstGeom>
-          <a:noFill/>
-          <a:ln/>
-        </p:spPr>
-        <p:txBody>
-          <a:bodyPr wrap="square" lIns="0" tIns="0" rIns="0" bIns="0" rtlCol="0" anchor="t"/>
-          <a:lstStyle/>
-          <a:p>
-            <a:pPr marL="0" indent="0">
-              <a:buNone/>
-            </a:pPr>
-            <a:r>
-              <a:rPr lang="en-US" sz="2400" dirty="0">
-                <a:solidFill>
-                  <a:srgbClr val="1F2A22"/>
-                </a:solidFill>
-                <a:latin typeface="Calibri" pitchFamily="34" charset="0"/>
-                <a:ea typeface="Calibri" pitchFamily="34" charset="-122"/>
-                <a:cs typeface="Calibri" pitchFamily="34" charset="-120"/>
-              </a:rPr>
-              <a:t>CEO · CFO · CCO · CRO · CSO</a:t>
             </a:r>
             <a:endParaRPr lang="en-US" sz="2400" dirty="0"/>
           </a:p>
@@ -8501,6 +7975,743 @@
                 <a:ea typeface="Cambria" pitchFamily="34" charset="-122"/>
                 <a:cs typeface="Cambria" pitchFamily="34" charset="-120"/>
               </a:rPr>
+              <a:t>3.2 · The CXO performance gap contributors</a:t>
+            </a:r>
+            <a:endParaRPr lang="en-US" sz="3600" dirty="0"/>
+          </a:p>
+        </p:txBody>
+      </p:sp>
+      <p:sp>
+        <p:nvSpPr>
+          <p:cNvPr id="3" name="Shape 1"/>
+          <p:cNvSpPr/>
+          <p:nvPr/>
+        </p:nvSpPr>
+        <p:spPr>
+          <a:xfrm>
+            <a:off x="548640" y="1508760"/>
+            <a:ext cx="5408676" cy="2286000"/>
+          </a:xfrm>
+          <a:prstGeom prst="roundRect">
+            <a:avLst>
+              <a:gd name="adj" fmla="val 4000"/>
+            </a:avLst>
+          </a:prstGeom>
+          <a:solidFill>
+            <a:srgbClr val="EEF4EF"/>
+          </a:solidFill>
+          <a:ln w="12700">
+            <a:solidFill>
+              <a:srgbClr val="EEF4EF"/>
+            </a:solidFill>
+            <a:prstDash val="solid"/>
+          </a:ln>
+        </p:spPr>
+        <p:txBody>
+          <a:bodyPr/>
+          <a:lstStyle/>
+          <a:p>
+            <a:endParaRPr lang="en-ZA"/>
+          </a:p>
+        </p:txBody>
+      </p:sp>
+      <p:sp>
+        <p:nvSpPr>
+          <p:cNvPr id="4" name="Shape 2"/>
+          <p:cNvSpPr/>
+          <p:nvPr/>
+        </p:nvSpPr>
+        <p:spPr>
+          <a:xfrm>
+            <a:off x="777240" y="1737360"/>
+            <a:ext cx="548640" cy="548640"/>
+          </a:xfrm>
+          <a:prstGeom prst="ellipse">
+            <a:avLst/>
+          </a:prstGeom>
+          <a:solidFill>
+            <a:srgbClr val="1A5C2C"/>
+          </a:solidFill>
+          <a:ln w="12700">
+            <a:solidFill>
+              <a:srgbClr val="1A5C2C"/>
+            </a:solidFill>
+            <a:prstDash val="solid"/>
+          </a:ln>
+        </p:spPr>
+        <p:txBody>
+          <a:bodyPr/>
+          <a:lstStyle/>
+          <a:p>
+            <a:endParaRPr lang="en-ZA"/>
+          </a:p>
+        </p:txBody>
+      </p:sp>
+      <p:pic>
+        <p:nvPicPr>
+          <p:cNvPr id="5" name="Image 0" descr="preencoded.png"/>
+          <p:cNvPicPr>
+            <a:picLocks noChangeAspect="1"/>
+          </p:cNvPicPr>
+          <p:nvPr/>
+        </p:nvPicPr>
+        <p:blipFill>
+          <a:blip r:embed="rId2"/>
+          <a:stretch>
+            <a:fillRect/>
+          </a:stretch>
+        </p:blipFill>
+        <p:spPr>
+          <a:xfrm>
+            <a:off x="914400" y="1874520"/>
+            <a:ext cx="274320" cy="274320"/>
+          </a:xfrm>
+          <a:prstGeom prst="rect">
+            <a:avLst/>
+          </a:prstGeom>
+        </p:spPr>
+      </p:pic>
+      <p:sp>
+        <p:nvSpPr>
+          <p:cNvPr id="6" name="Text 3"/>
+          <p:cNvSpPr txBox="1"/>
+          <p:nvPr/>
+        </p:nvSpPr>
+        <p:spPr>
+          <a:xfrm>
+            <a:off x="1508760" y="1691640"/>
+            <a:ext cx="4219956" cy="923544"/>
+          </a:xfrm>
+          <a:prstGeom prst="rect">
+            <a:avLst/>
+          </a:prstGeom>
+          <a:noFill/>
+          <a:ln/>
+        </p:spPr>
+        <p:txBody>
+          <a:bodyPr wrap="square" lIns="0" tIns="0" rIns="0" bIns="0" rtlCol="0" anchor="ctr"/>
+          <a:lstStyle/>
+          <a:p>
+            <a:pPr marL="0" indent="0">
+              <a:buNone/>
+            </a:pPr>
+            <a:r>
+              <a:rPr lang="en-US" sz="2600" b="1" dirty="0">
+                <a:solidFill>
+                  <a:srgbClr val="1A5C2C"/>
+                </a:solidFill>
+                <a:latin typeface="Cambria" pitchFamily="34" charset="0"/>
+                <a:ea typeface="Cambria" pitchFamily="34" charset="-122"/>
+                <a:cs typeface="Cambria" pitchFamily="34" charset="-120"/>
+              </a:rPr>
+              <a:t>1 · How you review performance</a:t>
+            </a:r>
+            <a:endParaRPr lang="en-US" sz="2600" dirty="0"/>
+          </a:p>
+        </p:txBody>
+      </p:sp>
+      <p:sp>
+        <p:nvSpPr>
+          <p:cNvPr id="7" name="Text 4"/>
+          <p:cNvSpPr txBox="1"/>
+          <p:nvPr/>
+        </p:nvSpPr>
+        <p:spPr>
+          <a:xfrm>
+            <a:off x="777240" y="2752344"/>
+            <a:ext cx="4951476" cy="905256"/>
+          </a:xfrm>
+          <a:prstGeom prst="rect">
+            <a:avLst/>
+          </a:prstGeom>
+          <a:noFill/>
+          <a:ln/>
+        </p:spPr>
+        <p:txBody>
+          <a:bodyPr wrap="square" lIns="0" tIns="0" rIns="0" bIns="0" rtlCol="0" anchor="t"/>
+          <a:lstStyle/>
+          <a:p>
+            <a:pPr marL="0" indent="0">
+              <a:buNone/>
+            </a:pPr>
+            <a:r>
+              <a:rPr lang="en-US" sz="2400" dirty="0">
+                <a:solidFill>
+                  <a:srgbClr val="1F2A22"/>
+                </a:solidFill>
+                <a:latin typeface="Calibri" pitchFamily="34" charset="0"/>
+                <a:ea typeface="Calibri" pitchFamily="34" charset="-122"/>
+                <a:cs typeface="Calibri" pitchFamily="34" charset="-120"/>
+              </a:rPr>
+              <a:t>Your meetings and your evidence.</a:t>
+            </a:r>
+            <a:endParaRPr lang="en-US" sz="2400" dirty="0"/>
+          </a:p>
+        </p:txBody>
+      </p:sp>
+      <p:sp>
+        <p:nvSpPr>
+          <p:cNvPr id="8" name="Shape 5"/>
+          <p:cNvSpPr/>
+          <p:nvPr/>
+        </p:nvSpPr>
+        <p:spPr>
+          <a:xfrm>
+            <a:off x="6231636" y="1508760"/>
+            <a:ext cx="5408676" cy="2286000"/>
+          </a:xfrm>
+          <a:prstGeom prst="roundRect">
+            <a:avLst>
+              <a:gd name="adj" fmla="val 4000"/>
+            </a:avLst>
+          </a:prstGeom>
+          <a:solidFill>
+            <a:srgbClr val="EEF4EF"/>
+          </a:solidFill>
+          <a:ln w="12700">
+            <a:solidFill>
+              <a:srgbClr val="EEF4EF"/>
+            </a:solidFill>
+            <a:prstDash val="solid"/>
+          </a:ln>
+        </p:spPr>
+        <p:txBody>
+          <a:bodyPr/>
+          <a:lstStyle/>
+          <a:p>
+            <a:endParaRPr lang="en-ZA"/>
+          </a:p>
+        </p:txBody>
+      </p:sp>
+      <p:sp>
+        <p:nvSpPr>
+          <p:cNvPr id="9" name="Shape 6"/>
+          <p:cNvSpPr/>
+          <p:nvPr/>
+        </p:nvSpPr>
+        <p:spPr>
+          <a:xfrm>
+            <a:off x="6460236" y="1737360"/>
+            <a:ext cx="548640" cy="548640"/>
+          </a:xfrm>
+          <a:prstGeom prst="ellipse">
+            <a:avLst/>
+          </a:prstGeom>
+          <a:solidFill>
+            <a:srgbClr val="1A5C2C"/>
+          </a:solidFill>
+          <a:ln w="12700">
+            <a:solidFill>
+              <a:srgbClr val="1A5C2C"/>
+            </a:solidFill>
+            <a:prstDash val="solid"/>
+          </a:ln>
+        </p:spPr>
+        <p:txBody>
+          <a:bodyPr/>
+          <a:lstStyle/>
+          <a:p>
+            <a:endParaRPr lang="en-ZA"/>
+          </a:p>
+        </p:txBody>
+      </p:sp>
+      <p:pic>
+        <p:nvPicPr>
+          <p:cNvPr id="10" name="Image 1" descr="preencoded.png"/>
+          <p:cNvPicPr>
+            <a:picLocks noChangeAspect="1"/>
+          </p:cNvPicPr>
+          <p:nvPr/>
+        </p:nvPicPr>
+        <p:blipFill>
+          <a:blip r:embed="rId5"/>
+          <a:stretch>
+            <a:fillRect/>
+          </a:stretch>
+        </p:blipFill>
+        <p:spPr>
+          <a:xfrm>
+            <a:off x="6597396" y="1874520"/>
+            <a:ext cx="274320" cy="274320"/>
+          </a:xfrm>
+          <a:prstGeom prst="rect">
+            <a:avLst/>
+          </a:prstGeom>
+        </p:spPr>
+      </p:pic>
+      <p:sp>
+        <p:nvSpPr>
+          <p:cNvPr id="11" name="Text 7"/>
+          <p:cNvSpPr txBox="1"/>
+          <p:nvPr/>
+        </p:nvSpPr>
+        <p:spPr>
+          <a:xfrm>
+            <a:off x="7191756" y="1691640"/>
+            <a:ext cx="4219956" cy="923544"/>
+          </a:xfrm>
+          <a:prstGeom prst="rect">
+            <a:avLst/>
+          </a:prstGeom>
+          <a:noFill/>
+          <a:ln/>
+        </p:spPr>
+        <p:txBody>
+          <a:bodyPr wrap="square" lIns="0" tIns="0" rIns="0" bIns="0" rtlCol="0" anchor="ctr"/>
+          <a:lstStyle/>
+          <a:p>
+            <a:pPr marL="0" indent="0">
+              <a:buNone/>
+            </a:pPr>
+            <a:r>
+              <a:rPr lang="en-US" sz="2600" b="1" dirty="0">
+                <a:solidFill>
+                  <a:srgbClr val="1A5C2C"/>
+                </a:solidFill>
+                <a:latin typeface="Cambria" pitchFamily="34" charset="0"/>
+                <a:ea typeface="Cambria" pitchFamily="34" charset="-122"/>
+                <a:cs typeface="Cambria" pitchFamily="34" charset="-120"/>
+              </a:rPr>
+              <a:t>2 · What you do</a:t>
+            </a:r>
+            <a:endParaRPr lang="en-US" sz="2600" dirty="0"/>
+          </a:p>
+        </p:txBody>
+      </p:sp>
+      <p:sp>
+        <p:nvSpPr>
+          <p:cNvPr id="12" name="Text 8"/>
+          <p:cNvSpPr txBox="1"/>
+          <p:nvPr/>
+        </p:nvSpPr>
+        <p:spPr>
+          <a:xfrm>
+            <a:off x="6460236" y="2752344"/>
+            <a:ext cx="4951476" cy="905256"/>
+          </a:xfrm>
+          <a:prstGeom prst="rect">
+            <a:avLst/>
+          </a:prstGeom>
+          <a:noFill/>
+          <a:ln/>
+        </p:spPr>
+        <p:txBody>
+          <a:bodyPr wrap="square" lIns="0" tIns="0" rIns="0" bIns="0" rtlCol="0" anchor="t"/>
+          <a:lstStyle/>
+          <a:p>
+            <a:pPr marL="0" indent="0">
+              <a:buNone/>
+            </a:pPr>
+            <a:r>
+              <a:rPr lang="en-US" sz="2400" dirty="0">
+                <a:solidFill>
+                  <a:srgbClr val="1F2A22"/>
+                </a:solidFill>
+                <a:latin typeface="Calibri" pitchFamily="34" charset="0"/>
+                <a:ea typeface="Calibri" pitchFamily="34" charset="-122"/>
+                <a:cs typeface="Calibri" pitchFamily="34" charset="-120"/>
+              </a:rPr>
+              <a:t>A habit in those reviews.</a:t>
+            </a:r>
+            <a:endParaRPr lang="en-US" sz="2400" dirty="0"/>
+          </a:p>
+        </p:txBody>
+      </p:sp>
+      <p:sp>
+        <p:nvSpPr>
+          <p:cNvPr id="13" name="Shape 9"/>
+          <p:cNvSpPr/>
+          <p:nvPr/>
+        </p:nvSpPr>
+        <p:spPr>
+          <a:xfrm>
+            <a:off x="548640" y="4069080"/>
+            <a:ext cx="5408676" cy="2286000"/>
+          </a:xfrm>
+          <a:prstGeom prst="roundRect">
+            <a:avLst>
+              <a:gd name="adj" fmla="val 4000"/>
+            </a:avLst>
+          </a:prstGeom>
+          <a:solidFill>
+            <a:srgbClr val="EEF4EF"/>
+          </a:solidFill>
+          <a:ln w="12700">
+            <a:solidFill>
+              <a:srgbClr val="EEF4EF"/>
+            </a:solidFill>
+            <a:prstDash val="solid"/>
+          </a:ln>
+        </p:spPr>
+        <p:txBody>
+          <a:bodyPr/>
+          <a:lstStyle/>
+          <a:p>
+            <a:endParaRPr lang="en-ZA"/>
+          </a:p>
+        </p:txBody>
+      </p:sp>
+      <p:sp>
+        <p:nvSpPr>
+          <p:cNvPr id="14" name="Shape 10"/>
+          <p:cNvSpPr/>
+          <p:nvPr/>
+        </p:nvSpPr>
+        <p:spPr>
+          <a:xfrm>
+            <a:off x="777240" y="4297680"/>
+            <a:ext cx="548640" cy="548640"/>
+          </a:xfrm>
+          <a:prstGeom prst="ellipse">
+            <a:avLst/>
+          </a:prstGeom>
+          <a:solidFill>
+            <a:srgbClr val="1A5C2C"/>
+          </a:solidFill>
+          <a:ln w="12700">
+            <a:solidFill>
+              <a:srgbClr val="1A5C2C"/>
+            </a:solidFill>
+            <a:prstDash val="solid"/>
+          </a:ln>
+        </p:spPr>
+        <p:txBody>
+          <a:bodyPr/>
+          <a:lstStyle/>
+          <a:p>
+            <a:endParaRPr lang="en-ZA"/>
+          </a:p>
+        </p:txBody>
+      </p:sp>
+      <p:pic>
+        <p:nvPicPr>
+          <p:cNvPr id="15" name="Image 2" descr="preencoded.png"/>
+          <p:cNvPicPr>
+            <a:picLocks noChangeAspect="1"/>
+          </p:cNvPicPr>
+          <p:nvPr/>
+        </p:nvPicPr>
+        <p:blipFill>
+          <a:blip r:embed="rId4"/>
+          <a:stretch>
+            <a:fillRect/>
+          </a:stretch>
+        </p:blipFill>
+        <p:spPr>
+          <a:xfrm>
+            <a:off x="914400" y="4434840"/>
+            <a:ext cx="274320" cy="274320"/>
+          </a:xfrm>
+          <a:prstGeom prst="rect">
+            <a:avLst/>
+          </a:prstGeom>
+        </p:spPr>
+      </p:pic>
+      <p:sp>
+        <p:nvSpPr>
+          <p:cNvPr id="16" name="Text 11"/>
+          <p:cNvSpPr txBox="1"/>
+          <p:nvPr/>
+        </p:nvSpPr>
+        <p:spPr>
+          <a:xfrm>
+            <a:off x="1508760" y="4251960"/>
+            <a:ext cx="4219956" cy="923544"/>
+          </a:xfrm>
+          <a:prstGeom prst="rect">
+            <a:avLst/>
+          </a:prstGeom>
+          <a:noFill/>
+          <a:ln/>
+        </p:spPr>
+        <p:txBody>
+          <a:bodyPr wrap="square" lIns="0" tIns="0" rIns="0" bIns="0" rtlCol="0" anchor="ctr"/>
+          <a:lstStyle/>
+          <a:p>
+            <a:pPr marL="0" indent="0">
+              <a:buNone/>
+            </a:pPr>
+            <a:r>
+              <a:rPr lang="en-US" sz="2600" b="1" dirty="0">
+                <a:solidFill>
+                  <a:srgbClr val="1A5C2C"/>
+                </a:solidFill>
+                <a:latin typeface="Cambria" pitchFamily="34" charset="0"/>
+                <a:ea typeface="Cambria" pitchFamily="34" charset="-122"/>
+                <a:cs typeface="Cambria" pitchFamily="34" charset="-120"/>
+              </a:rPr>
+              <a:t>3 · What happens as a result</a:t>
+            </a:r>
+            <a:endParaRPr lang="en-US" sz="2600" dirty="0"/>
+          </a:p>
+        </p:txBody>
+      </p:sp>
+      <p:sp>
+        <p:nvSpPr>
+          <p:cNvPr id="17" name="Text 12"/>
+          <p:cNvSpPr txBox="1"/>
+          <p:nvPr/>
+        </p:nvSpPr>
+        <p:spPr>
+          <a:xfrm>
+            <a:off x="777240" y="5312664"/>
+            <a:ext cx="4951476" cy="905256"/>
+          </a:xfrm>
+          <a:prstGeom prst="rect">
+            <a:avLst/>
+          </a:prstGeom>
+          <a:noFill/>
+          <a:ln/>
+        </p:spPr>
+        <p:txBody>
+          <a:bodyPr wrap="square" lIns="0" tIns="0" rIns="0" bIns="0" rtlCol="0" anchor="t"/>
+          <a:lstStyle/>
+          <a:p>
+            <a:pPr marL="0" indent="0">
+              <a:buNone/>
+            </a:pPr>
+            <a:r>
+              <a:rPr lang="en-US" sz="2400" dirty="0">
+                <a:solidFill>
+                  <a:srgbClr val="1F2A22"/>
+                </a:solidFill>
+                <a:latin typeface="Calibri" pitchFamily="34" charset="0"/>
+                <a:ea typeface="Calibri" pitchFamily="34" charset="-122"/>
+                <a:cs typeface="Calibri" pitchFamily="34" charset="-120"/>
+              </a:rPr>
+              <a:t>The habit opens a fracture of 3.1.</a:t>
+            </a:r>
+            <a:endParaRPr lang="en-US" sz="2400" dirty="0"/>
+          </a:p>
+        </p:txBody>
+      </p:sp>
+      <p:sp>
+        <p:nvSpPr>
+          <p:cNvPr id="18" name="Shape 13"/>
+          <p:cNvSpPr/>
+          <p:nvPr/>
+        </p:nvSpPr>
+        <p:spPr>
+          <a:xfrm>
+            <a:off x="6231636" y="4069080"/>
+            <a:ext cx="5408676" cy="2286000"/>
+          </a:xfrm>
+          <a:prstGeom prst="roundRect">
+            <a:avLst>
+              <a:gd name="adj" fmla="val 4000"/>
+            </a:avLst>
+          </a:prstGeom>
+          <a:solidFill>
+            <a:srgbClr val="EEF4EF"/>
+          </a:solidFill>
+          <a:ln w="12700">
+            <a:solidFill>
+              <a:srgbClr val="EEF4EF"/>
+            </a:solidFill>
+            <a:prstDash val="solid"/>
+          </a:ln>
+        </p:spPr>
+        <p:txBody>
+          <a:bodyPr/>
+          <a:lstStyle/>
+          <a:p>
+            <a:endParaRPr lang="en-ZA"/>
+          </a:p>
+        </p:txBody>
+      </p:sp>
+      <p:sp>
+        <p:nvSpPr>
+          <p:cNvPr id="19" name="Shape 14"/>
+          <p:cNvSpPr/>
+          <p:nvPr/>
+        </p:nvSpPr>
+        <p:spPr>
+          <a:xfrm>
+            <a:off x="6460236" y="4297680"/>
+            <a:ext cx="548640" cy="548640"/>
+          </a:xfrm>
+          <a:prstGeom prst="ellipse">
+            <a:avLst/>
+          </a:prstGeom>
+          <a:solidFill>
+            <a:srgbClr val="1A5C2C"/>
+          </a:solidFill>
+          <a:ln w="12700">
+            <a:solidFill>
+              <a:srgbClr val="1A5C2C"/>
+            </a:solidFill>
+            <a:prstDash val="solid"/>
+          </a:ln>
+        </p:spPr>
+        <p:txBody>
+          <a:bodyPr/>
+          <a:lstStyle/>
+          <a:p>
+            <a:endParaRPr lang="en-ZA"/>
+          </a:p>
+        </p:txBody>
+      </p:sp>
+      <p:pic>
+        <p:nvPicPr>
+          <p:cNvPr id="20" name="Image 3" descr="preencoded.png"/>
+          <p:cNvPicPr>
+            <a:picLocks noChangeAspect="1"/>
+          </p:cNvPicPr>
+          <p:nvPr/>
+        </p:nvPicPr>
+        <p:blipFill>
+          <a:blip r:embed="rId3"/>
+          <a:stretch>
+            <a:fillRect/>
+          </a:stretch>
+        </p:blipFill>
+        <p:spPr>
+          <a:xfrm>
+            <a:off x="6597396" y="4434840"/>
+            <a:ext cx="274320" cy="274320"/>
+          </a:xfrm>
+          <a:prstGeom prst="rect">
+            <a:avLst/>
+          </a:prstGeom>
+        </p:spPr>
+      </p:pic>
+      <p:sp>
+        <p:nvSpPr>
+          <p:cNvPr id="21" name="Text 15"/>
+          <p:cNvSpPr txBox="1"/>
+          <p:nvPr/>
+        </p:nvSpPr>
+        <p:spPr>
+          <a:xfrm>
+            <a:off x="7191756" y="4251960"/>
+            <a:ext cx="4219956" cy="923544"/>
+          </a:xfrm>
+          <a:prstGeom prst="rect">
+            <a:avLst/>
+          </a:prstGeom>
+          <a:noFill/>
+          <a:ln/>
+        </p:spPr>
+        <p:txBody>
+          <a:bodyPr wrap="square" lIns="0" tIns="0" rIns="0" bIns="0" rtlCol="0" anchor="ctr"/>
+          <a:lstStyle/>
+          <a:p>
+            <a:pPr marL="0" indent="0">
+              <a:buNone/>
+            </a:pPr>
+            <a:r>
+              <a:rPr lang="en-US" sz="2600" b="1" dirty="0">
+                <a:solidFill>
+                  <a:srgbClr val="1A5C2C"/>
+                </a:solidFill>
+                <a:latin typeface="Cambria" pitchFamily="34" charset="0"/>
+                <a:ea typeface="Cambria" pitchFamily="34" charset="-122"/>
+                <a:cs typeface="Cambria" pitchFamily="34" charset="-120"/>
+              </a:rPr>
+              <a:t>4 · Your own role first</a:t>
+            </a:r>
+            <a:endParaRPr lang="en-US" sz="2600" dirty="0"/>
+          </a:p>
+        </p:txBody>
+      </p:sp>
+      <p:sp>
+        <p:nvSpPr>
+          <p:cNvPr id="22" name="Text 16"/>
+          <p:cNvSpPr txBox="1"/>
+          <p:nvPr/>
+        </p:nvSpPr>
+        <p:spPr>
+          <a:xfrm>
+            <a:off x="6460236" y="5312664"/>
+            <a:ext cx="4951476" cy="905256"/>
+          </a:xfrm>
+          <a:prstGeom prst="rect">
+            <a:avLst/>
+          </a:prstGeom>
+          <a:noFill/>
+          <a:ln/>
+        </p:spPr>
+        <p:txBody>
+          <a:bodyPr wrap="square" lIns="0" tIns="0" rIns="0" bIns="0" rtlCol="0" anchor="t"/>
+          <a:lstStyle/>
+          <a:p>
+            <a:pPr marL="0" indent="0">
+              <a:buNone/>
+            </a:pPr>
+            <a:r>
+              <a:rPr lang="en-US" sz="2400" dirty="0">
+                <a:solidFill>
+                  <a:srgbClr val="1F2A22"/>
+                </a:solidFill>
+                <a:latin typeface="Calibri" pitchFamily="34" charset="0"/>
+                <a:ea typeface="Calibri" pitchFamily="34" charset="-122"/>
+                <a:cs typeface="Calibri" pitchFamily="34" charset="-120"/>
+              </a:rPr>
+              <a:t>Then the two roles closest to yours.</a:t>
+            </a:r>
+            <a:endParaRPr lang="en-US" sz="2400" dirty="0"/>
+          </a:p>
+        </p:txBody>
+      </p:sp>
+    </p:spTree>
+  </p:cSld>
+  <p:clrMapOvr>
+    <a:masterClrMapping/>
+  </p:clrMapOvr>
+</p:sld>
+</file>
+
+<file path=ppt/slides/slide16.xml><?xml version="1.0" encoding="utf-8"?>
+<p:sld xmlns:a="http://schemas.openxmlformats.org/drawingml/2006/main" xmlns:p="http://schemas.openxmlformats.org/presentationml/2006/main" xmlns:r="http://schemas.openxmlformats.org/officeDocument/2006/relationships">
+  <p:cSld>
+    <p:bg>
+      <p:bgPr>
+        <a:solidFill>
+          <a:srgbClr val="FFFFFF"/>
+        </a:solidFill>
+        <a:effectLst/>
+      </p:bgPr>
+    </p:bg>
+    <p:spTree>
+      <p:nvGrpSpPr>
+        <p:cNvPr id="1" name=""/>
+        <p:cNvGrpSpPr/>
+        <p:nvPr/>
+      </p:nvGrpSpPr>
+      <p:grpSpPr/>
+      <p:sp>
+        <p:nvSpPr>
+          <p:cNvPr id="2" name="Text 0"/>
+          <p:cNvSpPr txBox="1"/>
+          <p:nvPr/>
+        </p:nvSpPr>
+        <p:spPr>
+          <a:xfrm>
+            <a:off x="548640" y="411480"/>
+            <a:ext cx="11064240" cy="868680"/>
+          </a:xfrm>
+          <a:prstGeom prst="rect">
+            <a:avLst/>
+          </a:prstGeom>
+          <a:noFill/>
+          <a:ln/>
+        </p:spPr>
+        <p:txBody>
+          <a:bodyPr wrap="square" lIns="0" tIns="0" rIns="0" bIns="0" rtlCol="0" anchor="ctr"/>
+          <a:lstStyle/>
+          <a:p>
+            <a:pPr marL="0" indent="0">
+              <a:buNone/>
+            </a:pPr>
+            <a:r>
+              <a:rPr lang="en-US" sz="3600" b="1" dirty="0">
+                <a:solidFill>
+                  <a:srgbClr val="1A5C2C"/>
+                </a:solidFill>
+                <a:latin typeface="Cambria" pitchFamily="34" charset="0"/>
+                <a:ea typeface="Cambria" pitchFamily="34" charset="-122"/>
+                <a:cs typeface="Cambria" pitchFamily="34" charset="-120"/>
+              </a:rPr>
               <a:t>Section 3 Reflections</a:t>
             </a:r>
             <a:endParaRPr lang="en-US" sz="3600" dirty="0"/>
@@ -8572,6 +8783,71 @@
           </a:p>
         </p:txBody>
       </p:sp>
+      <p:pic>
+        <p:nvPicPr>
+          <p:cNvPr id="5" name="Reflection 3.2" descr="r32.png"/>
+          <p:cNvPicPr>
+            <a:picLocks noChangeAspect="1"/>
+          </p:cNvPicPr>
+          <p:nvPr/>
+        </p:nvPicPr>
+        <p:blipFill>
+          <a:blip r:embed="rId7"/>
+          <a:stretch>
+            <a:fillRect/>
+          </a:stretch>
+        </p:blipFill>
+        <p:spPr>
+          <a:xfrm>
+            <a:off x="1691640" y="2977171"/>
+            <a:ext cx="10058400" cy="1642775"/>
+          </a:xfrm>
+          <a:prstGeom prst="rect">
+            <a:avLst/>
+          </a:prstGeom>
+        </p:spPr>
+      </p:pic>
+      <p:sp>
+        <p:nvSpPr>
+          <p:cNvPr id="4" name="Part 3.2"/>
+          <p:cNvSpPr/>
+          <p:nvPr/>
+        </p:nvSpPr>
+        <p:spPr>
+          <a:xfrm>
+            <a:off x="548640" y="3364218"/>
+            <a:ext cx="868680" cy="868680"/>
+          </a:xfrm>
+          <a:prstGeom prst="ellipse">
+            <a:avLst/>
+          </a:prstGeom>
+          <a:solidFill>
+            <a:srgbClr val="C6A24C"/>
+          </a:solidFill>
+          <a:ln>
+            <a:solidFill>
+              <a:srgbClr val="C6A24C"/>
+            </a:solidFill>
+          </a:ln>
+          <a:effectLst/>
+        </p:spPr>
+        <p:txBody>
+          <a:bodyPr wrap="none" lIns="0" tIns="0" rIns="0" bIns="0" rtlCol="0" anchor="ctr"/>
+          <a:lstStyle/>
+          <a:p>
+            <a:pPr algn="ctr"/>
+            <a:r>
+              <a:rPr lang="en-GB" sz="2400" b="1">
+                <a:solidFill>
+                  <a:srgbClr val="FFFFFF"/>
+                </a:solidFill>
+                <a:latin typeface="Calibri"/>
+              </a:rPr>
+              <a:t>3.2</a:t>
+            </a:r>
+          </a:p>
+        </p:txBody>
+      </p:sp>
     </p:spTree>
   </p:cSld>
   <p:clrMapOvr>
@@ -8580,7 +8856,7 @@
 </p:sld>
 </file>
 
-<file path=ppt/slides/slide16.xml><?xml version="1.0" encoding="utf-8"?>
+<file path=ppt/slides/slide17.xml><?xml version="1.0" encoding="utf-8"?>
 <p:sld xmlns:a="http://schemas.openxmlformats.org/drawingml/2006/main" xmlns:r="http://schemas.openxmlformats.org/officeDocument/2006/relationships" xmlns:p="http://schemas.openxmlformats.org/presentationml/2006/main">
   <p:cSld name="Slide 15">
     <p:bg>
@@ -8998,7 +9274,7 @@
 </p:sld>
 </file>
 
-<file path=ppt/slides/slide17.xml><?xml version="1.0" encoding="utf-8"?>
+<file path=ppt/slides/slide18.xml><?xml version="1.0" encoding="utf-8"?>
 <p:sld xmlns:a="http://schemas.openxmlformats.org/drawingml/2006/main" xmlns:r="http://schemas.openxmlformats.org/officeDocument/2006/relationships" xmlns:p="http://schemas.openxmlformats.org/presentationml/2006/main">
   <p:cSld name="Slide 17">
     <p:bg>
@@ -9647,7 +9923,7 @@
 </p:sld>
 </file>
 
-<file path=ppt/slides/slide18.xml><?xml version="1.0" encoding="utf-8"?>
+<file path=ppt/slides/slide19.xml><?xml version="1.0" encoding="utf-8"?>
 <p:sld xmlns:a="http://schemas.openxmlformats.org/drawingml/2006/main" xmlns:r="http://schemas.openxmlformats.org/officeDocument/2006/relationships" xmlns:p="http://schemas.openxmlformats.org/presentationml/2006/main">
   <p:cSld name="Slide 21">
     <p:bg>
@@ -9800,7 +10076,7 @@
                 <a:ea typeface="Cambria" pitchFamily="34" charset="-122"/>
                 <a:cs typeface="Cambria" pitchFamily="34" charset="-120"/>
               </a:rPr>
-              <a:t>Complaint resolution has stalled at 36 hours against a 12-hour target, and alignment has fallen from 9.</a:t>
+              <a:t>Complaint resolution fell from 10 days to 8, then stalled, against a target of 5.</a:t>
             </a:r>
             <a:endParaRPr lang="en-US" sz="3600" dirty="0"/>
           </a:p>
@@ -9839,445 +10115,9 @@
                 <a:ea typeface="Calibri" pitchFamily="34" charset="-122"/>
                 <a:cs typeface="Calibri" pitchFamily="34" charset="-120"/>
               </a:rPr>
-              <a:t>CXO · Team member · Observer. Role play the conversation using GROW.</a:t>
+              <a:t>Leader · Team member · Observer. The team member privately chooses the root cause.</a:t>
             </a:r>
             <a:endParaRPr lang="en-US" sz="2400" dirty="0"/>
-          </a:p>
-        </p:txBody>
-      </p:sp>
-    </p:spTree>
-  </p:cSld>
-  <p:clrMapOvr>
-    <a:masterClrMapping/>
-  </p:clrMapOvr>
-</p:sld>
-</file>
-
-<file path=ppt/slides/slide19.xml><?xml version="1.0" encoding="utf-8"?>
-<p:sld xmlns:a="http://schemas.openxmlformats.org/drawingml/2006/main" xmlns:r="http://schemas.openxmlformats.org/officeDocument/2006/relationships" xmlns:p="http://schemas.openxmlformats.org/presentationml/2006/main">
-  <p:cSld name="Slide 22">
-    <p:bg>
-      <p:bgPr>
-        <a:solidFill>
-          <a:srgbClr val="FFFFFF"/>
-        </a:solidFill>
-        <a:effectLst/>
-      </p:bgPr>
-    </p:bg>
-    <p:spTree>
-      <p:nvGrpSpPr>
-        <p:cNvPr id="1" name=""/>
-        <p:cNvGrpSpPr/>
-        <p:nvPr/>
-      </p:nvGrpSpPr>
-      <p:grpSpPr>
-        <a:xfrm>
-          <a:off x="0" y="0"/>
-          <a:ext cx="0" cy="0"/>
-          <a:chOff x="0" y="0"/>
-          <a:chExt cx="0" cy="0"/>
-        </a:xfrm>
-      </p:grpSpPr>
-      <p:sp>
-        <p:nvSpPr>
-          <p:cNvPr id="2" name="Text 0"/>
-          <p:cNvSpPr txBox="1"/>
-          <p:nvPr/>
-        </p:nvSpPr>
-        <p:spPr>
-          <a:xfrm>
-            <a:off x="548640" y="411480"/>
-            <a:ext cx="11064240" cy="868680"/>
-          </a:xfrm>
-          <a:prstGeom prst="rect">
-            <a:avLst/>
-          </a:prstGeom>
-          <a:noFill/>
-          <a:ln/>
-        </p:spPr>
-        <p:txBody>
-          <a:bodyPr wrap="square" lIns="0" tIns="0" rIns="0" bIns="0" rtlCol="0" anchor="ctr"/>
-          <a:lstStyle/>
-          <a:p>
-            <a:pPr marL="0" indent="0">
-              <a:buNone/>
-            </a:pPr>
-            <a:r>
-              <a:rPr lang="en-US" sz="3600" b="1" dirty="0">
-                <a:solidFill>
-                  <a:srgbClr val="1A5C2C"/>
-                </a:solidFill>
-                <a:latin typeface="Cambria" pitchFamily="34" charset="0"/>
-                <a:ea typeface="Cambria" pitchFamily="34" charset="-122"/>
-                <a:cs typeface="Cambria" pitchFamily="34" charset="-120"/>
-              </a:rPr>
-              <a:t>4.2 · Analysing the conversation with GROW</a:t>
-            </a:r>
-            <a:endParaRPr lang="en-US" sz="3600" dirty="0"/>
-          </a:p>
-        </p:txBody>
-      </p:sp>
-      <p:sp>
-        <p:nvSpPr>
-          <p:cNvPr id="3" name="Shape 1"/>
-          <p:cNvSpPr/>
-          <p:nvPr/>
-        </p:nvSpPr>
-        <p:spPr>
-          <a:xfrm>
-            <a:off x="548640" y="1691640"/>
-            <a:ext cx="640080" cy="640080"/>
-          </a:xfrm>
-          <a:prstGeom prst="ellipse">
-            <a:avLst/>
-          </a:prstGeom>
-          <a:solidFill>
-            <a:srgbClr val="1A5C2C"/>
-          </a:solidFill>
-          <a:ln w="12700">
-            <a:solidFill>
-              <a:srgbClr val="1A5C2C"/>
-            </a:solidFill>
-            <a:prstDash val="solid"/>
-          </a:ln>
-        </p:spPr>
-        <p:txBody>
-          <a:bodyPr lIns="0" tIns="0" rIns="0" bIns="0" anchor="ctr"/>
-          <a:lstStyle/>
-          <a:p>
-            <a:pPr algn="ctr"/>
-            <a:r>
-              <a:rPr lang="en-GB" sz="2400" b="1">
-                <a:solidFill>
-                  <a:srgbClr val="FFFFFF"/>
-                </a:solidFill>
-                <a:latin typeface="Cambria"/>
-              </a:rPr>
-              <a:t>G</a:t>
-            </a:r>
-          </a:p>
-        </p:txBody>
-      </p:sp>
-      <p:sp>
-        <p:nvSpPr>
-          <p:cNvPr id="5" name="Text 2"/>
-          <p:cNvSpPr txBox="1"/>
-          <p:nvPr/>
-        </p:nvSpPr>
-        <p:spPr>
-          <a:xfrm>
-            <a:off x="1508760" y="1463040"/>
-            <a:ext cx="10131552" cy="1097280"/>
-          </a:xfrm>
-          <a:prstGeom prst="rect">
-            <a:avLst/>
-          </a:prstGeom>
-          <a:noFill/>
-          <a:ln/>
-        </p:spPr>
-        <p:txBody>
-          <a:bodyPr wrap="square" lIns="0" tIns="0" rIns="0" bIns="0" rtlCol="0" anchor="ctr"/>
-          <a:lstStyle/>
-          <a:p>
-            <a:pPr marL="0" indent="0">
-              <a:buNone/>
-            </a:pPr>
-            <a:r>
-              <a:rPr lang="en-US" sz="2600" b="1" dirty="0">
-                <a:solidFill>
-                  <a:srgbClr val="1A5C2C"/>
-                </a:solidFill>
-                <a:latin typeface="Cambria" pitchFamily="34" charset="0"/>
-                <a:ea typeface="Cambria" pitchFamily="34" charset="-122"/>
-                <a:cs typeface="Cambria" pitchFamily="34" charset="-120"/>
-              </a:rPr>
-              <a:t>Goal  </a:t>
-            </a:r>
-            <a:r>
-              <a:rPr lang="en-US" sz="2600" dirty="0">
-                <a:solidFill>
-                  <a:srgbClr val="1F2A22"/>
-                </a:solidFill>
-                <a:latin typeface="Calibri" pitchFamily="34" charset="0"/>
-                <a:ea typeface="Calibri" pitchFamily="34" charset="-122"/>
-                <a:cs typeface="Calibri" pitchFamily="34" charset="-120"/>
-              </a:rPr>
-              <a:t>Ownership again: an alignment of 9 or 10.</a:t>
-            </a:r>
-            <a:endParaRPr lang="en-US" sz="2600" dirty="0"/>
-          </a:p>
-        </p:txBody>
-      </p:sp>
-      <p:sp>
-        <p:nvSpPr>
-          <p:cNvPr id="9" name="Shape 5"/>
-          <p:cNvSpPr/>
-          <p:nvPr/>
-        </p:nvSpPr>
-        <p:spPr>
-          <a:xfrm>
-            <a:off x="548640" y="3063240"/>
-            <a:ext cx="640080" cy="640080"/>
-          </a:xfrm>
-          <a:prstGeom prst="ellipse">
-            <a:avLst/>
-          </a:prstGeom>
-          <a:solidFill>
-            <a:srgbClr val="1A5C2C"/>
-          </a:solidFill>
-          <a:ln w="12700">
-            <a:solidFill>
-              <a:srgbClr val="1A5C2C"/>
-            </a:solidFill>
-            <a:prstDash val="solid"/>
-          </a:ln>
-        </p:spPr>
-        <p:txBody>
-          <a:bodyPr lIns="0" tIns="0" rIns="0" bIns="0" anchor="ctr"/>
-          <a:lstStyle/>
-          <a:p>
-            <a:pPr algn="ctr"/>
-            <a:r>
-              <a:rPr lang="en-GB" sz="2400" b="1">
-                <a:solidFill>
-                  <a:srgbClr val="FFFFFF"/>
-                </a:solidFill>
-                <a:latin typeface="Cambria"/>
-              </a:rPr>
-              <a:t>R</a:t>
-            </a:r>
-          </a:p>
-        </p:txBody>
-      </p:sp>
-      <p:sp>
-        <p:nvSpPr>
-          <p:cNvPr id="11" name="Text 6"/>
-          <p:cNvSpPr txBox="1"/>
-          <p:nvPr/>
-        </p:nvSpPr>
-        <p:spPr>
-          <a:xfrm>
-            <a:off x="1508760" y="2834640"/>
-            <a:ext cx="10131552" cy="1097280"/>
-          </a:xfrm>
-          <a:prstGeom prst="rect">
-            <a:avLst/>
-          </a:prstGeom>
-          <a:noFill/>
-          <a:ln/>
-        </p:spPr>
-        <p:txBody>
-          <a:bodyPr wrap="square" lIns="0" tIns="0" rIns="0" bIns="0" rtlCol="0" anchor="ctr"/>
-          <a:lstStyle/>
-          <a:p>
-            <a:pPr marL="0" indent="0">
-              <a:buNone/>
-            </a:pPr>
-            <a:r>
-              <a:rPr lang="en-US" sz="2600" b="1" dirty="0">
-                <a:solidFill>
-                  <a:srgbClr val="1A5C2C"/>
-                </a:solidFill>
-                <a:latin typeface="Cambria" pitchFamily="34" charset="0"/>
-                <a:ea typeface="Cambria" pitchFamily="34" charset="-122"/>
-                <a:cs typeface="Cambria" pitchFamily="34" charset="-120"/>
-              </a:rPr>
-              <a:t>Reality  </a:t>
-            </a:r>
-            <a:r>
-              <a:rPr lang="en-US" sz="2600" dirty="0">
-                <a:solidFill>
-                  <a:srgbClr val="1F2A22"/>
-                </a:solidFill>
-                <a:latin typeface="Calibri" pitchFamily="34" charset="0"/>
-                <a:ea typeface="Calibri" pitchFamily="34" charset="-122"/>
-                <a:cs typeface="Calibri" pitchFamily="34" charset="-120"/>
-              </a:rPr>
-              <a:t>What stands behind the score and the gap.</a:t>
-            </a:r>
-            <a:endParaRPr lang="en-US" sz="2600" dirty="0"/>
-          </a:p>
-        </p:txBody>
-      </p:sp>
-      <p:sp>
-        <p:nvSpPr>
-          <p:cNvPr id="12" name="Shape 7"/>
-          <p:cNvSpPr/>
-          <p:nvPr/>
-        </p:nvSpPr>
-        <p:spPr>
-          <a:xfrm>
-            <a:off x="548640" y="4434840"/>
-            <a:ext cx="640080" cy="640080"/>
-          </a:xfrm>
-          <a:prstGeom prst="ellipse">
-            <a:avLst/>
-          </a:prstGeom>
-          <a:solidFill>
-            <a:srgbClr val="1A5C2C"/>
-          </a:solidFill>
-          <a:ln w="12700">
-            <a:solidFill>
-              <a:srgbClr val="1A5C2C"/>
-            </a:solidFill>
-            <a:prstDash val="solid"/>
-          </a:ln>
-        </p:spPr>
-        <p:txBody>
-          <a:bodyPr lIns="0" tIns="0" rIns="0" bIns="0" anchor="ctr"/>
-          <a:lstStyle/>
-          <a:p>
-            <a:pPr algn="ctr"/>
-            <a:r>
-              <a:rPr lang="en-GB" sz="2400" b="1">
-                <a:solidFill>
-                  <a:srgbClr val="FFFFFF"/>
-                </a:solidFill>
-                <a:latin typeface="Cambria"/>
-              </a:rPr>
-              <a:t>O</a:t>
-            </a:r>
-          </a:p>
-        </p:txBody>
-      </p:sp>
-      <p:sp>
-        <p:nvSpPr>
-          <p:cNvPr id="14" name="Text 8"/>
-          <p:cNvSpPr txBox="1"/>
-          <p:nvPr/>
-        </p:nvSpPr>
-        <p:spPr>
-          <a:xfrm>
-            <a:off x="1508760" y="4206240"/>
-            <a:ext cx="10131552" cy="1097280"/>
-          </a:xfrm>
-          <a:prstGeom prst="rect">
-            <a:avLst/>
-          </a:prstGeom>
-          <a:noFill/>
-          <a:ln/>
-        </p:spPr>
-        <p:txBody>
-          <a:bodyPr wrap="square" lIns="0" tIns="0" rIns="0" bIns="0" rtlCol="0" anchor="ctr"/>
-          <a:lstStyle/>
-          <a:p>
-            <a:pPr marL="0" indent="0">
-              <a:buNone/>
-            </a:pPr>
-            <a:r>
-              <a:rPr lang="en-US" sz="2600" b="1" dirty="0">
-                <a:solidFill>
-                  <a:srgbClr val="1A5C2C"/>
-                </a:solidFill>
-                <a:latin typeface="Cambria" pitchFamily="34" charset="0"/>
-                <a:ea typeface="Cambria" pitchFamily="34" charset="-122"/>
-                <a:cs typeface="Cambria" pitchFamily="34" charset="-120"/>
-              </a:rPr>
-              <a:t>Options  </a:t>
-            </a:r>
-            <a:r>
-              <a:rPr lang="en-US" sz="2600" dirty="0">
-                <a:solidFill>
-                  <a:srgbClr val="1F2A22"/>
-                </a:solidFill>
-                <a:latin typeface="Calibri" pitchFamily="34" charset="0"/>
-                <a:ea typeface="Calibri" pitchFamily="34" charset="-122"/>
-                <a:cs typeface="Calibri" pitchFamily="34" charset="-120"/>
-              </a:rPr>
-              <a:t>The ways forward the owner generates.</a:t>
-            </a:r>
-            <a:endParaRPr lang="en-US" sz="2600" dirty="0"/>
-          </a:p>
-        </p:txBody>
-      </p:sp>
-      <p:sp>
-        <p:nvSpPr>
-          <p:cNvPr id="15" name="Shape 9"/>
-          <p:cNvSpPr/>
-          <p:nvPr/>
-        </p:nvSpPr>
-        <p:spPr>
-          <a:xfrm>
-            <a:off x="548640" y="5806440"/>
-            <a:ext cx="640080" cy="640080"/>
-          </a:xfrm>
-          <a:prstGeom prst="ellipse">
-            <a:avLst/>
-          </a:prstGeom>
-          <a:solidFill>
-            <a:srgbClr val="1A5C2C"/>
-          </a:solidFill>
-          <a:ln w="12700">
-            <a:solidFill>
-              <a:srgbClr val="1A5C2C"/>
-            </a:solidFill>
-            <a:prstDash val="solid"/>
-          </a:ln>
-        </p:spPr>
-        <p:txBody>
-          <a:bodyPr lIns="0" tIns="0" rIns="0" bIns="0" anchor="ctr"/>
-          <a:lstStyle/>
-          <a:p>
-            <a:pPr algn="ctr"/>
-            <a:r>
-              <a:rPr lang="en-GB" sz="2400" b="1">
-                <a:solidFill>
-                  <a:srgbClr val="FFFFFF"/>
-                </a:solidFill>
-                <a:latin typeface="Cambria"/>
-              </a:rPr>
-              <a:t>W</a:t>
-            </a:r>
-          </a:p>
-        </p:txBody>
-      </p:sp>
-      <p:sp>
-        <p:nvSpPr>
-          <p:cNvPr id="16" name="Text 10"/>
-          <p:cNvSpPr txBox="1"/>
-          <p:nvPr/>
-        </p:nvSpPr>
-        <p:spPr>
-          <a:xfrm>
-            <a:off x="1508760" y="5577840"/>
-            <a:ext cx="10131552" cy="1097280"/>
-          </a:xfrm>
-          <a:prstGeom prst="rect">
-            <a:avLst/>
-          </a:prstGeom>
-          <a:noFill/>
-          <a:ln/>
-        </p:spPr>
-        <p:txBody>
-          <a:bodyPr wrap="square" lIns="0" tIns="0" rIns="0" bIns="0" rtlCol="0" anchor="ctr"/>
-          <a:lstStyle/>
-          <a:p>
-            <a:pPr marL="0" indent="0">
-              <a:buNone/>
-            </a:pPr>
-            <a:r>
-              <a:rPr lang="en-US" sz="2600" b="1" dirty="0">
-                <a:solidFill>
-                  <a:srgbClr val="1A5C2C"/>
-                </a:solidFill>
-                <a:latin typeface="Cambria" pitchFamily="34" charset="0"/>
-                <a:ea typeface="Cambria" pitchFamily="34" charset="-122"/>
-                <a:cs typeface="Cambria" pitchFamily="34" charset="-120"/>
-              </a:rPr>
-              <a:t>Will  </a:t>
-            </a:r>
-            <a:r>
-              <a:rPr lang="en-US" sz="2600" dirty="0">
-                <a:solidFill>
-                  <a:srgbClr val="1F2A22"/>
-                </a:solidFill>
-                <a:latin typeface="Calibri" pitchFamily="34" charset="0"/>
-                <a:ea typeface="Calibri" pitchFamily="34" charset="-122"/>
-                <a:cs typeface="Calibri" pitchFamily="34" charset="-120"/>
-              </a:rPr>
-              <a:t>Actions, owner and follow-up; the alignment question again.</a:t>
-            </a:r>
-            <a:endParaRPr lang="en-US" sz="2600" dirty="0"/>
           </a:p>
         </p:txBody>
       </p:sp>
@@ -10742,8 +10582,8 @@
 </file>
 
 <file path=ppt/slides/slide20.xml><?xml version="1.0" encoding="utf-8"?>
-<p:sld xmlns:a="http://schemas.openxmlformats.org/drawingml/2006/main" xmlns:p="http://schemas.openxmlformats.org/presentationml/2006/main" xmlns:r="http://schemas.openxmlformats.org/officeDocument/2006/relationships">
-  <p:cSld>
+<p:sld xmlns:a="http://schemas.openxmlformats.org/drawingml/2006/main" xmlns:r="http://schemas.openxmlformats.org/officeDocument/2006/relationships" xmlns:p="http://schemas.openxmlformats.org/presentationml/2006/main">
+  <p:cSld name="Slide 22">
     <p:bg>
       <p:bgPr>
         <a:solidFill>
@@ -10758,7 +10598,14 @@
         <p:cNvGrpSpPr/>
         <p:nvPr/>
       </p:nvGrpSpPr>
-      <p:grpSpPr/>
+      <p:grpSpPr>
+        <a:xfrm>
+          <a:off x="0" y="0"/>
+          <a:ext cx="0" cy="0"/>
+          <a:chOff x="0" y="0"/>
+          <a:chExt cx="0" cy="0"/>
+        </a:xfrm>
+      </p:grpSpPr>
       <p:sp>
         <p:nvSpPr>
           <p:cNvPr id="2" name="Text 0"/>
@@ -10792,62 +10639,38 @@
                 <a:ea typeface="Cambria" pitchFamily="34" charset="-122"/>
                 <a:cs typeface="Cambria" pitchFamily="34" charset="-120"/>
               </a:rPr>
-              <a:t>Section 4 Reflections</a:t>
+              <a:t>4.2 · Analysing the conversation with GROW</a:t>
             </a:r>
             <a:endParaRPr lang="en-US" sz="3600" dirty="0"/>
           </a:p>
         </p:txBody>
       </p:sp>
-      <p:pic>
-        <p:nvPicPr>
-          <p:cNvPr id="3" name="Reflection 4.1" descr="ref_4.1b.png"/>
-          <p:cNvPicPr>
-            <a:picLocks noChangeAspect="1"/>
-          </p:cNvPicPr>
-          <p:nvPr/>
-        </p:nvPicPr>
-        <p:blipFill>
-          <a:blip r:embed="rId8"/>
-          <a:stretch>
-            <a:fillRect/>
-          </a:stretch>
-        </p:blipFill>
-        <p:spPr>
-          <a:xfrm>
-            <a:off x="1691640" y="1463040"/>
-            <a:ext cx="10058400" cy="1002755"/>
-          </a:xfrm>
-          <a:prstGeom prst="rect">
-            <a:avLst/>
-          </a:prstGeom>
-        </p:spPr>
-      </p:pic>
-      <p:sp>
-        <p:nvSpPr>
-          <p:cNvPr id="4" name="Part 4.1"/>
+      <p:sp>
+        <p:nvSpPr>
+          <p:cNvPr id="3" name="Shape 1"/>
           <p:cNvSpPr/>
           <p:nvPr/>
         </p:nvSpPr>
         <p:spPr>
           <a:xfrm>
-            <a:off x="548640" y="1530077"/>
-            <a:ext cx="868680" cy="868680"/>
+            <a:off x="548640" y="1691640"/>
+            <a:ext cx="640080" cy="640080"/>
           </a:xfrm>
           <a:prstGeom prst="ellipse">
             <a:avLst/>
           </a:prstGeom>
           <a:solidFill>
-            <a:srgbClr val="C6A24C"/>
+            <a:srgbClr val="1A5C2C"/>
           </a:solidFill>
-          <a:ln>
+          <a:ln w="12700">
             <a:solidFill>
-              <a:srgbClr val="C6A24C"/>
+              <a:srgbClr val="1A5C2C"/>
             </a:solidFill>
+            <a:prstDash val="solid"/>
           </a:ln>
-          <a:effectLst/>
-        </p:spPr>
-        <p:txBody>
-          <a:bodyPr wrap="none" lIns="0" tIns="0" rIns="0" bIns="0" rtlCol="0" anchor="ctr"/>
+        </p:spPr>
+        <p:txBody>
+          <a:bodyPr lIns="0" tIns="0" rIns="0" bIns="0" anchor="ctr"/>
           <a:lstStyle/>
           <a:p>
             <a:pPr algn="ctr"/>
@@ -10856,63 +10679,89 @@
                 <a:solidFill>
                   <a:srgbClr val="FFFFFF"/>
                 </a:solidFill>
-                <a:latin typeface="Calibri"/>
-              </a:rPr>
-              <a:t>4.1</a:t>
-            </a:r>
-          </a:p>
-        </p:txBody>
-      </p:sp>
-      <p:pic>
-        <p:nvPicPr>
-          <p:cNvPr id="5" name="Reflection 4.1" descr="ref_4.1c.png"/>
-          <p:cNvPicPr>
-            <a:picLocks noChangeAspect="1"/>
-          </p:cNvPicPr>
-          <p:nvPr/>
-        </p:nvPicPr>
-        <p:blipFill>
-          <a:blip r:embed="rId9"/>
-          <a:stretch>
-            <a:fillRect/>
-          </a:stretch>
-        </p:blipFill>
-        <p:spPr>
-          <a:xfrm>
-            <a:off x="1691640" y="2666962"/>
-            <a:ext cx="10058400" cy="1357575"/>
-          </a:xfrm>
-          <a:prstGeom prst="rect">
-            <a:avLst/>
-          </a:prstGeom>
-        </p:spPr>
-      </p:pic>
-      <p:sp>
-        <p:nvSpPr>
-          <p:cNvPr id="6" name="Part 4.1"/>
+                <a:latin typeface="Cambria"/>
+              </a:rPr>
+              <a:t>G</a:t>
+            </a:r>
+          </a:p>
+        </p:txBody>
+      </p:sp>
+      <p:sp>
+        <p:nvSpPr>
+          <p:cNvPr id="5" name="Text 2"/>
+          <p:cNvSpPr txBox="1"/>
+          <p:nvPr/>
+        </p:nvSpPr>
+        <p:spPr>
+          <a:xfrm>
+            <a:off x="1508760" y="1463040"/>
+            <a:ext cx="10131552" cy="1097280"/>
+          </a:xfrm>
+          <a:prstGeom prst="rect">
+            <a:avLst/>
+          </a:prstGeom>
+          <a:noFill/>
+          <a:ln/>
+        </p:spPr>
+        <p:txBody>
+          <a:bodyPr wrap="square" lIns="0" tIns="0" rIns="0" bIns="0" rtlCol="0" anchor="ctr"/>
+          <a:lstStyle/>
+          <a:p>
+            <a:pPr marL="0" indent="0">
+              <a:buNone/>
+            </a:pPr>
+            <a:r>
+              <a:rPr lang="en-US" sz="2600" b="1" dirty="0">
+                <a:solidFill>
+                  <a:srgbClr val="1A5C2C"/>
+                </a:solidFill>
+                <a:latin typeface="Cambria" pitchFamily="34" charset="0"/>
+                <a:ea typeface="Cambria" pitchFamily="34" charset="-122"/>
+                <a:cs typeface="Cambria" pitchFamily="34" charset="-120"/>
+              </a:rPr>
+              <a:t>Goal  </a:t>
+            </a:r>
+            <a:r>
+              <a:rPr lang="en-US" sz="2600" dirty="0">
+                <a:solidFill>
+                  <a:srgbClr val="1F2A22"/>
+                </a:solidFill>
+                <a:latin typeface="Calibri" pitchFamily="34" charset="0"/>
+                <a:ea typeface="Calibri" pitchFamily="34" charset="-122"/>
+                <a:cs typeface="Calibri" pitchFamily="34" charset="-120"/>
+              </a:rPr>
+              <a:t>What the leader aims to achieve: the root cause, alignment, or both.</a:t>
+            </a:r>
+            <a:endParaRPr lang="en-US" sz="2600" dirty="0"/>
+          </a:p>
+        </p:txBody>
+      </p:sp>
+      <p:sp>
+        <p:nvSpPr>
+          <p:cNvPr id="9" name="Shape 5"/>
           <p:cNvSpPr/>
           <p:nvPr/>
         </p:nvSpPr>
         <p:spPr>
           <a:xfrm>
-            <a:off x="548640" y="2911409"/>
-            <a:ext cx="868680" cy="868680"/>
+            <a:off x="548640" y="3063240"/>
+            <a:ext cx="640080" cy="640080"/>
           </a:xfrm>
           <a:prstGeom prst="ellipse">
             <a:avLst/>
           </a:prstGeom>
           <a:solidFill>
-            <a:srgbClr val="C6A24C"/>
+            <a:srgbClr val="1A5C2C"/>
           </a:solidFill>
-          <a:ln>
+          <a:ln w="12700">
             <a:solidFill>
-              <a:srgbClr val="C6A24C"/>
+              <a:srgbClr val="1A5C2C"/>
             </a:solidFill>
+            <a:prstDash val="solid"/>
           </a:ln>
-          <a:effectLst/>
-        </p:spPr>
-        <p:txBody>
-          <a:bodyPr wrap="none" lIns="0" tIns="0" rIns="0" bIns="0" rtlCol="0" anchor="ctr"/>
+        </p:spPr>
+        <p:txBody>
+          <a:bodyPr lIns="0" tIns="0" rIns="0" bIns="0" anchor="ctr"/>
           <a:lstStyle/>
           <a:p>
             <a:pPr algn="ctr"/>
@@ -10921,10 +10770,242 @@
                 <a:solidFill>
                   <a:srgbClr val="FFFFFF"/>
                 </a:solidFill>
-                <a:latin typeface="Calibri"/>
-              </a:rPr>
-              <a:t>4.1</a:t>
-            </a:r>
+                <a:latin typeface="Cambria"/>
+              </a:rPr>
+              <a:t>R</a:t>
+            </a:r>
+          </a:p>
+        </p:txBody>
+      </p:sp>
+      <p:sp>
+        <p:nvSpPr>
+          <p:cNvPr id="11" name="Text 6"/>
+          <p:cNvSpPr txBox="1"/>
+          <p:nvPr/>
+        </p:nvSpPr>
+        <p:spPr>
+          <a:xfrm>
+            <a:off x="1508760" y="2834640"/>
+            <a:ext cx="10131552" cy="1097280"/>
+          </a:xfrm>
+          <a:prstGeom prst="rect">
+            <a:avLst/>
+          </a:prstGeom>
+          <a:noFill/>
+          <a:ln/>
+        </p:spPr>
+        <p:txBody>
+          <a:bodyPr wrap="square" lIns="0" tIns="0" rIns="0" bIns="0" rtlCol="0" anchor="ctr"/>
+          <a:lstStyle/>
+          <a:p>
+            <a:pPr marL="0" indent="0">
+              <a:buNone/>
+            </a:pPr>
+            <a:r>
+              <a:rPr lang="en-US" sz="2600" b="1" dirty="0">
+                <a:solidFill>
+                  <a:srgbClr val="1A5C2C"/>
+                </a:solidFill>
+                <a:latin typeface="Cambria" pitchFamily="34" charset="0"/>
+                <a:ea typeface="Cambria" pitchFamily="34" charset="-122"/>
+                <a:cs typeface="Cambria" pitchFamily="34" charset="-120"/>
+              </a:rPr>
+              <a:t>Reality  </a:t>
+            </a:r>
+            <a:r>
+              <a:rPr lang="en-US" sz="2600" dirty="0">
+                <a:solidFill>
+                  <a:srgbClr val="1F2A22"/>
+                </a:solidFill>
+                <a:latin typeface="Calibri" pitchFamily="34" charset="0"/>
+                <a:ea typeface="Calibri" pitchFamily="34" charset="-122"/>
+                <a:cs typeface="Calibri" pitchFamily="34" charset="-120"/>
+              </a:rPr>
+              <a:t>What stands behind the gap.</a:t>
+            </a:r>
+            <a:endParaRPr lang="en-US" sz="2600" dirty="0"/>
+          </a:p>
+        </p:txBody>
+      </p:sp>
+      <p:sp>
+        <p:nvSpPr>
+          <p:cNvPr id="12" name="Shape 7"/>
+          <p:cNvSpPr/>
+          <p:nvPr/>
+        </p:nvSpPr>
+        <p:spPr>
+          <a:xfrm>
+            <a:off x="548640" y="4434840"/>
+            <a:ext cx="640080" cy="640080"/>
+          </a:xfrm>
+          <a:prstGeom prst="ellipse">
+            <a:avLst/>
+          </a:prstGeom>
+          <a:solidFill>
+            <a:srgbClr val="1A5C2C"/>
+          </a:solidFill>
+          <a:ln w="12700">
+            <a:solidFill>
+              <a:srgbClr val="1A5C2C"/>
+            </a:solidFill>
+            <a:prstDash val="solid"/>
+          </a:ln>
+        </p:spPr>
+        <p:txBody>
+          <a:bodyPr lIns="0" tIns="0" rIns="0" bIns="0" anchor="ctr"/>
+          <a:lstStyle/>
+          <a:p>
+            <a:pPr algn="ctr"/>
+            <a:r>
+              <a:rPr lang="en-GB" sz="2400" b="1">
+                <a:solidFill>
+                  <a:srgbClr val="FFFFFF"/>
+                </a:solidFill>
+                <a:latin typeface="Cambria"/>
+              </a:rPr>
+              <a:t>O</a:t>
+            </a:r>
+          </a:p>
+        </p:txBody>
+      </p:sp>
+      <p:sp>
+        <p:nvSpPr>
+          <p:cNvPr id="14" name="Text 8"/>
+          <p:cNvSpPr txBox="1"/>
+          <p:nvPr/>
+        </p:nvSpPr>
+        <p:spPr>
+          <a:xfrm>
+            <a:off x="1508760" y="4206240"/>
+            <a:ext cx="10131552" cy="1097280"/>
+          </a:xfrm>
+          <a:prstGeom prst="rect">
+            <a:avLst/>
+          </a:prstGeom>
+          <a:noFill/>
+          <a:ln/>
+        </p:spPr>
+        <p:txBody>
+          <a:bodyPr wrap="square" lIns="0" tIns="0" rIns="0" bIns="0" rtlCol="0" anchor="ctr"/>
+          <a:lstStyle/>
+          <a:p>
+            <a:pPr marL="0" indent="0">
+              <a:buNone/>
+            </a:pPr>
+            <a:r>
+              <a:rPr lang="en-US" sz="2600" b="1" dirty="0">
+                <a:solidFill>
+                  <a:srgbClr val="1A5C2C"/>
+                </a:solidFill>
+                <a:latin typeface="Cambria" pitchFamily="34" charset="0"/>
+                <a:ea typeface="Cambria" pitchFamily="34" charset="-122"/>
+                <a:cs typeface="Cambria" pitchFamily="34" charset="-120"/>
+              </a:rPr>
+              <a:t>Options  </a:t>
+            </a:r>
+            <a:r>
+              <a:rPr lang="en-US" sz="2600" dirty="0">
+                <a:solidFill>
+                  <a:srgbClr val="1F2A22"/>
+                </a:solidFill>
+                <a:latin typeface="Calibri" pitchFamily="34" charset="0"/>
+                <a:ea typeface="Calibri" pitchFamily="34" charset="-122"/>
+                <a:cs typeface="Calibri" pitchFamily="34" charset="-120"/>
+              </a:rPr>
+              <a:t>The ways forward the team member generates.</a:t>
+            </a:r>
+            <a:endParaRPr lang="en-US" sz="2600" dirty="0"/>
+          </a:p>
+        </p:txBody>
+      </p:sp>
+      <p:sp>
+        <p:nvSpPr>
+          <p:cNvPr id="15" name="Shape 9"/>
+          <p:cNvSpPr/>
+          <p:nvPr/>
+        </p:nvSpPr>
+        <p:spPr>
+          <a:xfrm>
+            <a:off x="548640" y="5806440"/>
+            <a:ext cx="640080" cy="640080"/>
+          </a:xfrm>
+          <a:prstGeom prst="ellipse">
+            <a:avLst/>
+          </a:prstGeom>
+          <a:solidFill>
+            <a:srgbClr val="1A5C2C"/>
+          </a:solidFill>
+          <a:ln w="12700">
+            <a:solidFill>
+              <a:srgbClr val="1A5C2C"/>
+            </a:solidFill>
+            <a:prstDash val="solid"/>
+          </a:ln>
+        </p:spPr>
+        <p:txBody>
+          <a:bodyPr lIns="0" tIns="0" rIns="0" bIns="0" anchor="ctr"/>
+          <a:lstStyle/>
+          <a:p>
+            <a:pPr algn="ctr"/>
+            <a:r>
+              <a:rPr lang="en-GB" sz="2400" b="1">
+                <a:solidFill>
+                  <a:srgbClr val="FFFFFF"/>
+                </a:solidFill>
+                <a:latin typeface="Cambria"/>
+              </a:rPr>
+              <a:t>W</a:t>
+            </a:r>
+          </a:p>
+        </p:txBody>
+      </p:sp>
+      <p:sp>
+        <p:nvSpPr>
+          <p:cNvPr id="16" name="Text 10"/>
+          <p:cNvSpPr txBox="1"/>
+          <p:nvPr/>
+        </p:nvSpPr>
+        <p:spPr>
+          <a:xfrm>
+            <a:off x="1508760" y="5577840"/>
+            <a:ext cx="10131552" cy="1097280"/>
+          </a:xfrm>
+          <a:prstGeom prst="rect">
+            <a:avLst/>
+          </a:prstGeom>
+          <a:noFill/>
+          <a:ln/>
+        </p:spPr>
+        <p:txBody>
+          <a:bodyPr wrap="square" lIns="0" tIns="0" rIns="0" bIns="0" rtlCol="0" anchor="ctr"/>
+          <a:lstStyle/>
+          <a:p>
+            <a:pPr marL="0" indent="0">
+              <a:buNone/>
+            </a:pPr>
+            <a:r>
+              <a:rPr lang="en-US" sz="2600" b="1" dirty="0">
+                <a:solidFill>
+                  <a:srgbClr val="1A5C2C"/>
+                </a:solidFill>
+                <a:latin typeface="Cambria" pitchFamily="34" charset="0"/>
+                <a:ea typeface="Cambria" pitchFamily="34" charset="-122"/>
+                <a:cs typeface="Cambria" pitchFamily="34" charset="-120"/>
+              </a:rPr>
+              <a:t>Will  </a:t>
+            </a:r>
+            <a:r>
+              <a:rPr lang="en-US" sz="2600" dirty="0">
+                <a:solidFill>
+                  <a:srgbClr val="1F2A22"/>
+                </a:solidFill>
+                <a:latin typeface="Calibri" pitchFamily="34" charset="0"/>
+                <a:ea typeface="Calibri" pitchFamily="34" charset="-122"/>
+                <a:cs typeface="Calibri" pitchFamily="34" charset="-120"/>
+              </a:rPr>
+              <a:t>What, by whom, by when, and the review date.</a:t>
+            </a:r>
+            <a:endParaRPr lang="en-US" sz="2600" dirty="0"/>
           </a:p>
         </p:txBody>
       </p:sp>
@@ -10995,7 +11076,7 @@
       </p:sp>
       <p:pic>
         <p:nvPicPr>
-          <p:cNvPr id="3" name="Reflection 4.1" descr="ref_4.1a.png"/>
+          <p:cNvPr id="3" name="Reflection 4.1" descr="ref_4.1b.png"/>
           <p:cNvPicPr>
             <a:picLocks noChangeAspect="1"/>
           </p:cNvPicPr>
@@ -11010,7 +11091,7 @@
         <p:spPr>
           <a:xfrm>
             <a:off x="1691640" y="1463040"/>
-            <a:ext cx="10058400" cy="1311339"/>
+            <a:ext cx="10058400" cy="1002755"/>
           </a:xfrm>
           <a:prstGeom prst="rect">
             <a:avLst/>
@@ -11025,7 +11106,7 @@
         </p:nvSpPr>
         <p:spPr>
           <a:xfrm>
-            <a:off x="548640" y="1684369"/>
+            <a:off x="548640" y="1530077"/>
             <a:ext cx="868680" cy="868680"/>
           </a:xfrm>
           <a:prstGeom prst="ellipse">
@@ -11060,7 +11141,7 @@
       </p:sp>
       <p:pic>
         <p:nvPicPr>
-          <p:cNvPr id="5" name="Reflection 4.2" descr="ref_4.2.png"/>
+          <p:cNvPr id="5" name="Reflection 4.1" descr="ref_4.1c.png"/>
           <p:cNvPicPr>
             <a:picLocks noChangeAspect="1"/>
           </p:cNvPicPr>
@@ -11074,8 +11155,8 @@
         </p:blipFill>
         <p:spPr>
           <a:xfrm>
-            <a:off x="1691640" y="2975546"/>
-            <a:ext cx="10058400" cy="3285552"/>
+            <a:off x="1691640" y="2666962"/>
+            <a:ext cx="10058400" cy="1357575"/>
           </a:xfrm>
           <a:prstGeom prst="rect">
             <a:avLst/>
@@ -11084,13 +11165,13 @@
       </p:pic>
       <p:sp>
         <p:nvSpPr>
-          <p:cNvPr id="6" name="Part 4.2"/>
+          <p:cNvPr id="6" name="Part 4.1"/>
           <p:cNvSpPr/>
           <p:nvPr/>
         </p:nvSpPr>
         <p:spPr>
           <a:xfrm>
-            <a:off x="548640" y="4183981"/>
+            <a:off x="548640" y="2911409"/>
             <a:ext cx="868680" cy="868680"/>
           </a:xfrm>
           <a:prstGeom prst="ellipse">
@@ -11118,7 +11199,7 @@
                 </a:solidFill>
                 <a:latin typeface="Calibri"/>
               </a:rPr>
-              <a:t>4.2</a:t>
+              <a:t>4.1</a:t>
             </a:r>
           </a:p>
         </p:txBody>
@@ -11132,6 +11213,201 @@
 </file>
 
 <file path=ppt/slides/slide22.xml><?xml version="1.0" encoding="utf-8"?>
+<p:sld xmlns:a="http://schemas.openxmlformats.org/drawingml/2006/main" xmlns:p="http://schemas.openxmlformats.org/presentationml/2006/main" xmlns:r="http://schemas.openxmlformats.org/officeDocument/2006/relationships">
+  <p:cSld>
+    <p:bg>
+      <p:bgPr>
+        <a:solidFill>
+          <a:srgbClr val="FFFFFF"/>
+        </a:solidFill>
+        <a:effectLst/>
+      </p:bgPr>
+    </p:bg>
+    <p:spTree>
+      <p:nvGrpSpPr>
+        <p:cNvPr id="1" name=""/>
+        <p:cNvGrpSpPr/>
+        <p:nvPr/>
+      </p:nvGrpSpPr>
+      <p:grpSpPr/>
+      <p:sp>
+        <p:nvSpPr>
+          <p:cNvPr id="2" name="Text 0"/>
+          <p:cNvSpPr txBox="1"/>
+          <p:nvPr/>
+        </p:nvSpPr>
+        <p:spPr>
+          <a:xfrm>
+            <a:off x="548640" y="411480"/>
+            <a:ext cx="11064240" cy="868680"/>
+          </a:xfrm>
+          <a:prstGeom prst="rect">
+            <a:avLst/>
+          </a:prstGeom>
+          <a:noFill/>
+          <a:ln/>
+        </p:spPr>
+        <p:txBody>
+          <a:bodyPr wrap="square" lIns="0" tIns="0" rIns="0" bIns="0" rtlCol="0" anchor="ctr"/>
+          <a:lstStyle/>
+          <a:p>
+            <a:pPr marL="0" indent="0">
+              <a:buNone/>
+            </a:pPr>
+            <a:r>
+              <a:rPr lang="en-US" sz="3600" b="1" dirty="0">
+                <a:solidFill>
+                  <a:srgbClr val="1A5C2C"/>
+                </a:solidFill>
+                <a:latin typeface="Cambria" pitchFamily="34" charset="0"/>
+                <a:ea typeface="Cambria" pitchFamily="34" charset="-122"/>
+                <a:cs typeface="Cambria" pitchFamily="34" charset="-120"/>
+              </a:rPr>
+              <a:t>Section 4 Reflections</a:t>
+            </a:r>
+            <a:endParaRPr lang="en-US" sz="3600" dirty="0"/>
+          </a:p>
+        </p:txBody>
+      </p:sp>
+      <p:pic>
+        <p:nvPicPr>
+          <p:cNvPr id="3" name="Reflection 4.1" descr="ref_4.1a.png"/>
+          <p:cNvPicPr>
+            <a:picLocks noChangeAspect="1"/>
+          </p:cNvPicPr>
+          <p:nvPr/>
+        </p:nvPicPr>
+        <p:blipFill>
+          <a:blip r:embed="rId8"/>
+          <a:stretch>
+            <a:fillRect/>
+          </a:stretch>
+        </p:blipFill>
+        <p:spPr>
+          <a:xfrm>
+            <a:off x="1691640" y="1463040"/>
+            <a:ext cx="10058400" cy="1311339"/>
+          </a:xfrm>
+          <a:prstGeom prst="rect">
+            <a:avLst/>
+          </a:prstGeom>
+        </p:spPr>
+      </p:pic>
+      <p:sp>
+        <p:nvSpPr>
+          <p:cNvPr id="4" name="Part 4.1"/>
+          <p:cNvSpPr/>
+          <p:nvPr/>
+        </p:nvSpPr>
+        <p:spPr>
+          <a:xfrm>
+            <a:off x="548640" y="1684369"/>
+            <a:ext cx="868680" cy="868680"/>
+          </a:xfrm>
+          <a:prstGeom prst="ellipse">
+            <a:avLst/>
+          </a:prstGeom>
+          <a:solidFill>
+            <a:srgbClr val="C6A24C"/>
+          </a:solidFill>
+          <a:ln>
+            <a:solidFill>
+              <a:srgbClr val="C6A24C"/>
+            </a:solidFill>
+          </a:ln>
+          <a:effectLst/>
+        </p:spPr>
+        <p:txBody>
+          <a:bodyPr wrap="none" lIns="0" tIns="0" rIns="0" bIns="0" rtlCol="0" anchor="ctr"/>
+          <a:lstStyle/>
+          <a:p>
+            <a:pPr algn="ctr"/>
+            <a:r>
+              <a:rPr lang="en-GB" sz="2400" b="1">
+                <a:solidFill>
+                  <a:srgbClr val="FFFFFF"/>
+                </a:solidFill>
+                <a:latin typeface="Calibri"/>
+              </a:rPr>
+              <a:t>4.1</a:t>
+            </a:r>
+          </a:p>
+        </p:txBody>
+      </p:sp>
+      <p:pic>
+        <p:nvPicPr>
+          <p:cNvPr id="5" name="Reflection 4.2" descr="ref_4.2.png"/>
+          <p:cNvPicPr>
+            <a:picLocks noChangeAspect="1"/>
+          </p:cNvPicPr>
+          <p:nvPr/>
+        </p:nvPicPr>
+        <p:blipFill>
+          <a:blip r:embed="rId9"/>
+          <a:stretch>
+            <a:fillRect/>
+          </a:stretch>
+        </p:blipFill>
+        <p:spPr>
+          <a:xfrm>
+            <a:off x="1691640" y="2975546"/>
+            <a:ext cx="10058400" cy="3285552"/>
+          </a:xfrm>
+          <a:prstGeom prst="rect">
+            <a:avLst/>
+          </a:prstGeom>
+        </p:spPr>
+      </p:pic>
+      <p:sp>
+        <p:nvSpPr>
+          <p:cNvPr id="6" name="Part 4.2"/>
+          <p:cNvSpPr/>
+          <p:nvPr/>
+        </p:nvSpPr>
+        <p:spPr>
+          <a:xfrm>
+            <a:off x="548640" y="4183981"/>
+            <a:ext cx="868680" cy="868680"/>
+          </a:xfrm>
+          <a:prstGeom prst="ellipse">
+            <a:avLst/>
+          </a:prstGeom>
+          <a:solidFill>
+            <a:srgbClr val="C6A24C"/>
+          </a:solidFill>
+          <a:ln>
+            <a:solidFill>
+              <a:srgbClr val="C6A24C"/>
+            </a:solidFill>
+          </a:ln>
+          <a:effectLst/>
+        </p:spPr>
+        <p:txBody>
+          <a:bodyPr wrap="none" lIns="0" tIns="0" rIns="0" bIns="0" rtlCol="0" anchor="ctr"/>
+          <a:lstStyle/>
+          <a:p>
+            <a:pPr algn="ctr"/>
+            <a:r>
+              <a:rPr lang="en-GB" sz="2400" b="1">
+                <a:solidFill>
+                  <a:srgbClr val="FFFFFF"/>
+                </a:solidFill>
+                <a:latin typeface="Calibri"/>
+              </a:rPr>
+              <a:t>4.2</a:t>
+            </a:r>
+          </a:p>
+        </p:txBody>
+      </p:sp>
+    </p:spTree>
+  </p:cSld>
+  <p:clrMapOvr>
+    <a:masterClrMapping/>
+  </p:clrMapOvr>
+</p:sld>
+</file>
+
+<file path=ppt/slides/slide23.xml><?xml version="1.0" encoding="utf-8"?>
 <p:sld xmlns:a="http://schemas.openxmlformats.org/drawingml/2006/main" xmlns:r="http://schemas.openxmlformats.org/officeDocument/2006/relationships" xmlns:p="http://schemas.openxmlformats.org/presentationml/2006/main">
   <p:cSld name="Slide 19">
     <p:bg>
@@ -11538,495 +11814,6 @@
               <a:t>Determine the leadership decisions that protect the review discipline of the strategy.</a:t>
             </a:r>
             <a:endParaRPr lang="en-US" sz="2400" dirty="0"/>
-          </a:p>
-        </p:txBody>
-      </p:sp>
-    </p:spTree>
-  </p:cSld>
-  <p:clrMapOvr>
-    <a:masterClrMapping/>
-  </p:clrMapOvr>
-</p:sld>
-</file>
-
-<file path=ppt/slides/slide23.xml><?xml version="1.0" encoding="utf-8"?>
-<p:sld xmlns:a="http://schemas.openxmlformats.org/drawingml/2006/main" xmlns:p="http://schemas.openxmlformats.org/presentationml/2006/main" xmlns:r="http://schemas.openxmlformats.org/officeDocument/2006/relationships">
-  <p:cSld>
-    <p:bg>
-      <p:bgPr>
-        <a:solidFill>
-          <a:srgbClr val="FFFFFF"/>
-        </a:solidFill>
-        <a:effectLst/>
-      </p:bgPr>
-    </p:bg>
-    <p:spTree>
-      <p:nvGrpSpPr>
-        <p:cNvPr id="1" name=""/>
-        <p:cNvGrpSpPr/>
-        <p:nvPr/>
-      </p:nvGrpSpPr>
-      <p:grpSpPr/>
-      <p:sp>
-        <p:nvSpPr>
-          <p:cNvPr id="2" name="Text 0"/>
-          <p:cNvSpPr txBox="1"/>
-          <p:nvPr/>
-        </p:nvSpPr>
-        <p:spPr>
-          <a:xfrm>
-            <a:off x="548640" y="411480"/>
-            <a:ext cx="11064240" cy="868680"/>
-          </a:xfrm>
-          <a:prstGeom prst="rect">
-            <a:avLst/>
-          </a:prstGeom>
-          <a:noFill/>
-          <a:ln/>
-        </p:spPr>
-        <p:txBody>
-          <a:bodyPr wrap="square" lIns="0" tIns="0" rIns="0" bIns="0" rtlCol="0" anchor="ctr"/>
-          <a:lstStyle/>
-          <a:p>
-            <a:pPr marL="0" indent="0">
-              <a:buNone/>
-            </a:pPr>
-            <a:r>
-              <a:rPr lang="en-US" sz="3600" b="1" dirty="0">
-                <a:solidFill>
-                  <a:srgbClr val="1A5C2C"/>
-                </a:solidFill>
-                <a:latin typeface="Cambria" pitchFamily="34" charset="0"/>
-                <a:ea typeface="Cambria" pitchFamily="34" charset="-122"/>
-                <a:cs typeface="Cambria" pitchFamily="34" charset="-120"/>
-              </a:rPr>
-              <a:t>5.1 · Decision points against the four consequences</a:t>
-            </a:r>
-            <a:endParaRPr lang="en-US" sz="3600" dirty="0"/>
-          </a:p>
-        </p:txBody>
-      </p:sp>
-      <p:sp>
-        <p:nvSpPr>
-          <p:cNvPr id="3" name="Shape 1"/>
-          <p:cNvSpPr/>
-          <p:nvPr/>
-        </p:nvSpPr>
-        <p:spPr>
-          <a:xfrm>
-            <a:off x="548640" y="1800225"/>
-            <a:ext cx="640080" cy="640080"/>
-          </a:xfrm>
-          <a:prstGeom prst="ellipse">
-            <a:avLst/>
-          </a:prstGeom>
-          <a:solidFill>
-            <a:srgbClr val="1A5C2C"/>
-          </a:solidFill>
-          <a:ln w="12700">
-            <a:solidFill>
-              <a:srgbClr val="1A5C2C"/>
-            </a:solidFill>
-            <a:prstDash val="solid"/>
-          </a:ln>
-        </p:spPr>
-        <p:txBody>
-          <a:bodyPr/>
-          <a:lstStyle/>
-          <a:p>
-            <a:endParaRPr lang="en-ZA"/>
-          </a:p>
-        </p:txBody>
-      </p:sp>
-      <p:pic>
-        <p:nvPicPr>
-          <p:cNvPr id="4" name="Image 0" descr="preencoded.png"/>
-          <p:cNvPicPr>
-            <a:picLocks noChangeAspect="1"/>
-          </p:cNvPicPr>
-          <p:nvPr/>
-        </p:nvPicPr>
-        <p:blipFill>
-          <a:blip r:embed="rId2"/>
-          <a:stretch>
-            <a:fillRect/>
-          </a:stretch>
-        </p:blipFill>
-        <p:spPr>
-          <a:xfrm>
-            <a:off x="708660" y="1960245"/>
-            <a:ext cx="320040" cy="320040"/>
-          </a:xfrm>
-          <a:prstGeom prst="rect">
-            <a:avLst/>
-          </a:prstGeom>
-        </p:spPr>
-      </p:pic>
-      <p:sp>
-        <p:nvSpPr>
-          <p:cNvPr id="5" name="Text 2"/>
-          <p:cNvSpPr txBox="1"/>
-          <p:nvPr/>
-        </p:nvSpPr>
-        <p:spPr>
-          <a:xfrm>
-            <a:off x="1508760" y="1508760"/>
-            <a:ext cx="10131552" cy="1223010"/>
-          </a:xfrm>
-          <a:prstGeom prst="rect">
-            <a:avLst/>
-          </a:prstGeom>
-          <a:noFill/>
-          <a:ln/>
-        </p:spPr>
-        <p:txBody>
-          <a:bodyPr wrap="square" lIns="0" tIns="0" rIns="0" bIns="0" rtlCol="0" anchor="ctr"/>
-          <a:lstStyle/>
-          <a:p>
-            <a:pPr marL="0" indent="0">
-              <a:buNone/>
-            </a:pPr>
-            <a:r>
-              <a:rPr lang="en-US" sz="2600" b="1" dirty="0">
-                <a:solidFill>
-                  <a:srgbClr val="1A5C2C"/>
-                </a:solidFill>
-                <a:latin typeface="Cambria" pitchFamily="34" charset="0"/>
-                <a:ea typeface="Cambria" pitchFamily="34" charset="-122"/>
-                <a:cs typeface="Cambria" pitchFamily="34" charset="-120"/>
-              </a:rPr>
-              <a:t>01  </a:t>
-            </a:r>
-            <a:r>
-              <a:rPr lang="en-US" sz="2600" dirty="0">
-                <a:solidFill>
-                  <a:srgbClr val="1F2A22"/>
-                </a:solidFill>
-                <a:latin typeface="Calibri" pitchFamily="34" charset="0"/>
-                <a:ea typeface="Calibri" pitchFamily="34" charset="-122"/>
-                <a:cs typeface="Calibri" pitchFamily="34" charset="-120"/>
-              </a:rPr>
-              <a:t>Early Warning Signals Are Missed  ·  2 decision points</a:t>
-            </a:r>
-            <a:endParaRPr lang="en-US" sz="2600" dirty="0"/>
-          </a:p>
-        </p:txBody>
-      </p:sp>
-      <p:sp>
-        <p:nvSpPr>
-          <p:cNvPr id="6" name="Shape 3"/>
-          <p:cNvSpPr/>
-          <p:nvPr/>
-        </p:nvSpPr>
-        <p:spPr>
-          <a:xfrm>
-            <a:off x="548640" y="3023235"/>
-            <a:ext cx="640080" cy="640080"/>
-          </a:xfrm>
-          <a:prstGeom prst="ellipse">
-            <a:avLst/>
-          </a:prstGeom>
-          <a:solidFill>
-            <a:srgbClr val="1A5C2C"/>
-          </a:solidFill>
-          <a:ln w="12700">
-            <a:solidFill>
-              <a:srgbClr val="1A5C2C"/>
-            </a:solidFill>
-            <a:prstDash val="solid"/>
-          </a:ln>
-        </p:spPr>
-        <p:txBody>
-          <a:bodyPr/>
-          <a:lstStyle/>
-          <a:p>
-            <a:endParaRPr lang="en-ZA"/>
-          </a:p>
-        </p:txBody>
-      </p:sp>
-      <p:pic>
-        <p:nvPicPr>
-          <p:cNvPr id="7" name="Image 1" descr="preencoded.png"/>
-          <p:cNvPicPr>
-            <a:picLocks noChangeAspect="1"/>
-          </p:cNvPicPr>
-          <p:nvPr/>
-        </p:nvPicPr>
-        <p:blipFill>
-          <a:blip r:embed="rId5"/>
-          <a:stretch>
-            <a:fillRect/>
-          </a:stretch>
-        </p:blipFill>
-        <p:spPr>
-          <a:xfrm>
-            <a:off x="708660" y="3183255"/>
-            <a:ext cx="320040" cy="320040"/>
-          </a:xfrm>
-          <a:prstGeom prst="rect">
-            <a:avLst/>
-          </a:prstGeom>
-        </p:spPr>
-      </p:pic>
-      <p:sp>
-        <p:nvSpPr>
-          <p:cNvPr id="8" name="Text 4"/>
-          <p:cNvSpPr txBox="1"/>
-          <p:nvPr/>
-        </p:nvSpPr>
-        <p:spPr>
-          <a:xfrm>
-            <a:off x="1508760" y="2731770"/>
-            <a:ext cx="10131552" cy="1223010"/>
-          </a:xfrm>
-          <a:prstGeom prst="rect">
-            <a:avLst/>
-          </a:prstGeom>
-          <a:noFill/>
-          <a:ln/>
-        </p:spPr>
-        <p:txBody>
-          <a:bodyPr wrap="square" lIns="0" tIns="0" rIns="0" bIns="0" rtlCol="0" anchor="ctr"/>
-          <a:lstStyle/>
-          <a:p>
-            <a:pPr marL="0" indent="0">
-              <a:buNone/>
-            </a:pPr>
-            <a:r>
-              <a:rPr lang="en-US" sz="2600" b="1" dirty="0">
-                <a:solidFill>
-                  <a:srgbClr val="1A5C2C"/>
-                </a:solidFill>
-                <a:latin typeface="Cambria" pitchFamily="34" charset="0"/>
-                <a:ea typeface="Cambria" pitchFamily="34" charset="-122"/>
-                <a:cs typeface="Cambria" pitchFamily="34" charset="-120"/>
-              </a:rPr>
-              <a:t>02  </a:t>
-            </a:r>
-            <a:r>
-              <a:rPr lang="en-US" sz="2600" dirty="0">
-                <a:solidFill>
-                  <a:srgbClr val="1F2A22"/>
-                </a:solidFill>
-                <a:latin typeface="Calibri" pitchFamily="34" charset="0"/>
-                <a:ea typeface="Calibri" pitchFamily="34" charset="-122"/>
-                <a:cs typeface="Calibri" pitchFamily="34" charset="-120"/>
-              </a:rPr>
-              <a:t>Gradual Diffusion of Accountability  ·  2 decision points</a:t>
-            </a:r>
-            <a:endParaRPr lang="en-US" sz="2600" dirty="0"/>
-          </a:p>
-        </p:txBody>
-      </p:sp>
-      <p:sp>
-        <p:nvSpPr>
-          <p:cNvPr id="9" name="Shape 5"/>
-          <p:cNvSpPr/>
-          <p:nvPr/>
-        </p:nvSpPr>
-        <p:spPr>
-          <a:xfrm>
-            <a:off x="548640" y="4246245"/>
-            <a:ext cx="640080" cy="640080"/>
-          </a:xfrm>
-          <a:prstGeom prst="ellipse">
-            <a:avLst/>
-          </a:prstGeom>
-          <a:solidFill>
-            <a:srgbClr val="1A5C2C"/>
-          </a:solidFill>
-          <a:ln w="12700">
-            <a:solidFill>
-              <a:srgbClr val="1A5C2C"/>
-            </a:solidFill>
-            <a:prstDash val="solid"/>
-          </a:ln>
-        </p:spPr>
-        <p:txBody>
-          <a:bodyPr/>
-          <a:lstStyle/>
-          <a:p>
-            <a:endParaRPr lang="en-ZA"/>
-          </a:p>
-        </p:txBody>
-      </p:sp>
-      <p:pic>
-        <p:nvPicPr>
-          <p:cNvPr id="10" name="Image 2" descr="preencoded.png"/>
-          <p:cNvPicPr>
-            <a:picLocks noChangeAspect="1"/>
-          </p:cNvPicPr>
-          <p:nvPr/>
-        </p:nvPicPr>
-        <p:blipFill>
-          <a:blip r:embed="rId4"/>
-          <a:stretch>
-            <a:fillRect/>
-          </a:stretch>
-        </p:blipFill>
-        <p:spPr>
-          <a:xfrm>
-            <a:off x="708660" y="4406265"/>
-            <a:ext cx="320040" cy="320040"/>
-          </a:xfrm>
-          <a:prstGeom prst="rect">
-            <a:avLst/>
-          </a:prstGeom>
-        </p:spPr>
-      </p:pic>
-      <p:sp>
-        <p:nvSpPr>
-          <p:cNvPr id="11" name="Text 6"/>
-          <p:cNvSpPr txBox="1"/>
-          <p:nvPr/>
-        </p:nvSpPr>
-        <p:spPr>
-          <a:xfrm>
-            <a:off x="1508760" y="3954780"/>
-            <a:ext cx="10131552" cy="1223010"/>
-          </a:xfrm>
-          <a:prstGeom prst="rect">
-            <a:avLst/>
-          </a:prstGeom>
-          <a:noFill/>
-          <a:ln/>
-        </p:spPr>
-        <p:txBody>
-          <a:bodyPr wrap="square" lIns="0" tIns="0" rIns="0" bIns="0" rtlCol="0" anchor="ctr"/>
-          <a:lstStyle/>
-          <a:p>
-            <a:pPr marL="0" indent="0">
-              <a:buNone/>
-            </a:pPr>
-            <a:r>
-              <a:rPr lang="en-US" sz="2600" b="1" dirty="0">
-                <a:solidFill>
-                  <a:srgbClr val="1A5C2C"/>
-                </a:solidFill>
-                <a:latin typeface="Cambria" pitchFamily="34" charset="0"/>
-                <a:ea typeface="Cambria" pitchFamily="34" charset="-122"/>
-                <a:cs typeface="Cambria" pitchFamily="34" charset="-120"/>
-              </a:rPr>
-              <a:t>03  </a:t>
-            </a:r>
-            <a:r>
-              <a:rPr lang="en-US" sz="2600" dirty="0">
-                <a:solidFill>
-                  <a:srgbClr val="1F2A22"/>
-                </a:solidFill>
-                <a:latin typeface="Calibri" pitchFamily="34" charset="0"/>
-                <a:ea typeface="Calibri" pitchFamily="34" charset="-122"/>
-                <a:cs typeface="Calibri" pitchFamily="34" charset="-120"/>
-              </a:rPr>
-              <a:t>Loss of Organisational Learning  ·  2 decision points</a:t>
-            </a:r>
-            <a:endParaRPr lang="en-US" sz="2600" dirty="0"/>
-          </a:p>
-        </p:txBody>
-      </p:sp>
-      <p:sp>
-        <p:nvSpPr>
-          <p:cNvPr id="12" name="Shape 7"/>
-          <p:cNvSpPr/>
-          <p:nvPr/>
-        </p:nvSpPr>
-        <p:spPr>
-          <a:xfrm>
-            <a:off x="548640" y="5469255"/>
-            <a:ext cx="640080" cy="640080"/>
-          </a:xfrm>
-          <a:prstGeom prst="ellipse">
-            <a:avLst/>
-          </a:prstGeom>
-          <a:solidFill>
-            <a:srgbClr val="1A5C2C"/>
-          </a:solidFill>
-          <a:ln w="12700">
-            <a:solidFill>
-              <a:srgbClr val="1A5C2C"/>
-            </a:solidFill>
-            <a:prstDash val="solid"/>
-          </a:ln>
-        </p:spPr>
-        <p:txBody>
-          <a:bodyPr/>
-          <a:lstStyle/>
-          <a:p>
-            <a:endParaRPr lang="en-ZA"/>
-          </a:p>
-        </p:txBody>
-      </p:sp>
-      <p:pic>
-        <p:nvPicPr>
-          <p:cNvPr id="13" name="Image 3" descr="preencoded.png"/>
-          <p:cNvPicPr>
-            <a:picLocks noChangeAspect="1"/>
-          </p:cNvPicPr>
-          <p:nvPr/>
-        </p:nvPicPr>
-        <p:blipFill>
-          <a:blip r:embed="rId3"/>
-          <a:stretch>
-            <a:fillRect/>
-          </a:stretch>
-        </p:blipFill>
-        <p:spPr>
-          <a:xfrm>
-            <a:off x="708660" y="5629275"/>
-            <a:ext cx="320040" cy="320040"/>
-          </a:xfrm>
-          <a:prstGeom prst="rect">
-            <a:avLst/>
-          </a:prstGeom>
-        </p:spPr>
-      </p:pic>
-      <p:sp>
-        <p:nvSpPr>
-          <p:cNvPr id="14" name="Text 8"/>
-          <p:cNvSpPr txBox="1"/>
-          <p:nvPr/>
-        </p:nvSpPr>
-        <p:spPr>
-          <a:xfrm>
-            <a:off x="1508760" y="5177790"/>
-            <a:ext cx="10131552" cy="1223010"/>
-          </a:xfrm>
-          <a:prstGeom prst="rect">
-            <a:avLst/>
-          </a:prstGeom>
-          <a:noFill/>
-          <a:ln/>
-        </p:spPr>
-        <p:txBody>
-          <a:bodyPr wrap="square" lIns="0" tIns="0" rIns="0" bIns="0" rtlCol="0" anchor="ctr"/>
-          <a:lstStyle/>
-          <a:p>
-            <a:pPr marL="0" indent="0">
-              <a:buNone/>
-            </a:pPr>
-            <a:r>
-              <a:rPr lang="en-US" sz="2600" b="1" dirty="0">
-                <a:solidFill>
-                  <a:srgbClr val="1A5C2C"/>
-                </a:solidFill>
-                <a:latin typeface="Cambria" pitchFamily="34" charset="0"/>
-                <a:ea typeface="Cambria" pitchFamily="34" charset="-122"/>
-                <a:cs typeface="Cambria" pitchFamily="34" charset="-120"/>
-              </a:rPr>
-              <a:t>04  </a:t>
-            </a:r>
-            <a:r>
-              <a:rPr lang="en-US" sz="2600" dirty="0">
-                <a:solidFill>
-                  <a:srgbClr val="1F2A22"/>
-                </a:solidFill>
-                <a:latin typeface="Calibri" pitchFamily="34" charset="0"/>
-                <a:ea typeface="Calibri" pitchFamily="34" charset="-122"/>
-                <a:cs typeface="Calibri" pitchFamily="34" charset="-120"/>
-              </a:rPr>
-              <a:t>Erodes Leadership Credibility  ·  2 decision points</a:t>
-            </a:r>
-            <a:endParaRPr lang="en-US" sz="2600" dirty="0"/>
           </a:p>
         </p:txBody>
       </p:sp>
@@ -12089,30 +11876,62 @@
                 <a:ea typeface="Cambria" pitchFamily="34" charset="-122"/>
                 <a:cs typeface="Cambria" pitchFamily="34" charset="-120"/>
               </a:rPr>
-              <a:t>Section 2 Reflections</a:t>
+              <a:t>5.1 · Decision points against the four consequences</a:t>
             </a:r>
             <a:endParaRPr lang="en-US" sz="3600" dirty="0"/>
+          </a:p>
+        </p:txBody>
+      </p:sp>
+      <p:sp>
+        <p:nvSpPr>
+          <p:cNvPr id="3" name="Shape 1"/>
+          <p:cNvSpPr/>
+          <p:nvPr/>
+        </p:nvSpPr>
+        <p:spPr>
+          <a:xfrm>
+            <a:off x="548640" y="1800225"/>
+            <a:ext cx="640080" cy="640080"/>
+          </a:xfrm>
+          <a:prstGeom prst="ellipse">
+            <a:avLst/>
+          </a:prstGeom>
+          <a:solidFill>
+            <a:srgbClr val="1A5C2C"/>
+          </a:solidFill>
+          <a:ln w="12700">
+            <a:solidFill>
+              <a:srgbClr val="1A5C2C"/>
+            </a:solidFill>
+            <a:prstDash val="solid"/>
+          </a:ln>
+        </p:spPr>
+        <p:txBody>
+          <a:bodyPr/>
+          <a:lstStyle/>
+          <a:p>
+            <a:endParaRPr lang="en-ZA"/>
           </a:p>
         </p:txBody>
       </p:sp>
       <p:pic>
         <p:nvPicPr>
-          <p:cNvPr id="3" name="Reflection 2.1" descr="ref_2.1.png"/>
+          <p:cNvPr id="4" name="Image 0" descr="preencoded.png"/>
           <p:cNvPicPr>
             <a:picLocks noChangeAspect="1"/>
           </p:cNvPicPr>
           <p:nvPr/>
         </p:nvPicPr>
         <p:blipFill>
-          <a:blip r:embed="rId8"/>
+          <a:blip r:embed="rId2"/>
           <a:stretch>
             <a:fillRect/>
           </a:stretch>
         </p:blipFill>
         <p:spPr>
           <a:xfrm>
-            <a:off x="1691640" y="1463040"/>
-            <a:ext cx="10058400" cy="2003034"/>
+            <a:off x="708660" y="1960245"/>
+            <a:ext cx="320040" cy="320040"/>
           </a:xfrm>
           <a:prstGeom prst="rect">
             <a:avLst/>
@@ -12121,42 +11940,369 @@
       </p:pic>
       <p:sp>
         <p:nvSpPr>
-          <p:cNvPr id="4" name="Part 2.1"/>
+          <p:cNvPr id="5" name="Text 2"/>
+          <p:cNvSpPr txBox="1"/>
+          <p:nvPr/>
+        </p:nvSpPr>
+        <p:spPr>
+          <a:xfrm>
+            <a:off x="1508760" y="1508760"/>
+            <a:ext cx="10131552" cy="1223010"/>
+          </a:xfrm>
+          <a:prstGeom prst="rect">
+            <a:avLst/>
+          </a:prstGeom>
+          <a:noFill/>
+          <a:ln/>
+        </p:spPr>
+        <p:txBody>
+          <a:bodyPr wrap="square" lIns="0" tIns="0" rIns="0" bIns="0" rtlCol="0" anchor="ctr"/>
+          <a:lstStyle/>
+          <a:p>
+            <a:pPr marL="0" indent="0">
+              <a:buNone/>
+            </a:pPr>
+            <a:r>
+              <a:rPr lang="en-US" sz="2600" b="1" dirty="0">
+                <a:solidFill>
+                  <a:srgbClr val="1A5C2C"/>
+                </a:solidFill>
+                <a:latin typeface="Cambria" pitchFamily="34" charset="0"/>
+                <a:ea typeface="Cambria" pitchFamily="34" charset="-122"/>
+                <a:cs typeface="Cambria" pitchFamily="34" charset="-120"/>
+              </a:rPr>
+              <a:t>01  </a:t>
+            </a:r>
+            <a:r>
+              <a:rPr lang="en-US" sz="2600" dirty="0">
+                <a:solidFill>
+                  <a:srgbClr val="1F2A22"/>
+                </a:solidFill>
+                <a:latin typeface="Calibri" pitchFamily="34" charset="0"/>
+                <a:ea typeface="Calibri" pitchFamily="34" charset="-122"/>
+                <a:cs typeface="Calibri" pitchFamily="34" charset="-120"/>
+              </a:rPr>
+              <a:t>Early Warning Signals Are Missed  ·  individuals · conditions</a:t>
+            </a:r>
+            <a:endParaRPr lang="en-US" sz="2600" dirty="0"/>
+          </a:p>
+        </p:txBody>
+      </p:sp>
+      <p:sp>
+        <p:nvSpPr>
+          <p:cNvPr id="6" name="Shape 3"/>
           <p:cNvSpPr/>
           <p:nvPr/>
         </p:nvSpPr>
         <p:spPr>
           <a:xfrm>
-            <a:off x="548640" y="2030216"/>
-            <a:ext cx="868680" cy="868680"/>
+            <a:off x="548640" y="3023235"/>
+            <a:ext cx="640080" cy="640080"/>
           </a:xfrm>
           <a:prstGeom prst="ellipse">
             <a:avLst/>
           </a:prstGeom>
           <a:solidFill>
-            <a:srgbClr val="C6A24C"/>
+            <a:srgbClr val="1A5C2C"/>
           </a:solidFill>
-          <a:ln>
+          <a:ln w="12700">
             <a:solidFill>
-              <a:srgbClr val="C6A24C"/>
+              <a:srgbClr val="1A5C2C"/>
             </a:solidFill>
+            <a:prstDash val="solid"/>
           </a:ln>
-          <a:effectLst/>
-        </p:spPr>
-        <p:txBody>
-          <a:bodyPr wrap="none" lIns="0" tIns="0" rIns="0" bIns="0" rtlCol="0" anchor="ctr"/>
-          <a:lstStyle/>
-          <a:p>
-            <a:pPr algn="ctr"/>
-            <a:r>
-              <a:rPr lang="en-GB" sz="2400" b="1">
-                <a:solidFill>
-                  <a:srgbClr val="FFFFFF"/>
-                </a:solidFill>
-                <a:latin typeface="Calibri"/>
-              </a:rPr>
-              <a:t>2.1</a:t>
-            </a:r>
+        </p:spPr>
+        <p:txBody>
+          <a:bodyPr/>
+          <a:lstStyle/>
+          <a:p>
+            <a:endParaRPr lang="en-ZA"/>
+          </a:p>
+        </p:txBody>
+      </p:sp>
+      <p:pic>
+        <p:nvPicPr>
+          <p:cNvPr id="7" name="Image 1" descr="preencoded.png"/>
+          <p:cNvPicPr>
+            <a:picLocks noChangeAspect="1"/>
+          </p:cNvPicPr>
+          <p:nvPr/>
+        </p:nvPicPr>
+        <p:blipFill>
+          <a:blip r:embed="rId5"/>
+          <a:stretch>
+            <a:fillRect/>
+          </a:stretch>
+        </p:blipFill>
+        <p:spPr>
+          <a:xfrm>
+            <a:off x="708660" y="3183255"/>
+            <a:ext cx="320040" cy="320040"/>
+          </a:xfrm>
+          <a:prstGeom prst="rect">
+            <a:avLst/>
+          </a:prstGeom>
+        </p:spPr>
+      </p:pic>
+      <p:sp>
+        <p:nvSpPr>
+          <p:cNvPr id="8" name="Text 4"/>
+          <p:cNvSpPr txBox="1"/>
+          <p:nvPr/>
+        </p:nvSpPr>
+        <p:spPr>
+          <a:xfrm>
+            <a:off x="1508760" y="2731770"/>
+            <a:ext cx="10131552" cy="1223010"/>
+          </a:xfrm>
+          <a:prstGeom prst="rect">
+            <a:avLst/>
+          </a:prstGeom>
+          <a:noFill/>
+          <a:ln/>
+        </p:spPr>
+        <p:txBody>
+          <a:bodyPr wrap="square" lIns="0" tIns="0" rIns="0" bIns="0" rtlCol="0" anchor="ctr"/>
+          <a:lstStyle/>
+          <a:p>
+            <a:pPr marL="0" indent="0">
+              <a:buNone/>
+            </a:pPr>
+            <a:r>
+              <a:rPr lang="en-US" sz="2600" b="1" dirty="0">
+                <a:solidFill>
+                  <a:srgbClr val="1A5C2C"/>
+                </a:solidFill>
+                <a:latin typeface="Cambria" pitchFamily="34" charset="0"/>
+                <a:ea typeface="Cambria" pitchFamily="34" charset="-122"/>
+                <a:cs typeface="Cambria" pitchFamily="34" charset="-120"/>
+              </a:rPr>
+              <a:t>02  </a:t>
+            </a:r>
+            <a:r>
+              <a:rPr lang="en-US" sz="2600" dirty="0">
+                <a:solidFill>
+                  <a:srgbClr val="1F2A22"/>
+                </a:solidFill>
+                <a:latin typeface="Calibri" pitchFamily="34" charset="0"/>
+                <a:ea typeface="Calibri" pitchFamily="34" charset="-122"/>
+                <a:cs typeface="Calibri" pitchFamily="34" charset="-120"/>
+              </a:rPr>
+              <a:t>Gradual Diffusion of Accountability  ·  individuals · conditions</a:t>
+            </a:r>
+            <a:endParaRPr lang="en-US" sz="2600" dirty="0"/>
+          </a:p>
+        </p:txBody>
+      </p:sp>
+      <p:sp>
+        <p:nvSpPr>
+          <p:cNvPr id="9" name="Shape 5"/>
+          <p:cNvSpPr/>
+          <p:nvPr/>
+        </p:nvSpPr>
+        <p:spPr>
+          <a:xfrm>
+            <a:off x="548640" y="4246245"/>
+            <a:ext cx="640080" cy="640080"/>
+          </a:xfrm>
+          <a:prstGeom prst="ellipse">
+            <a:avLst/>
+          </a:prstGeom>
+          <a:solidFill>
+            <a:srgbClr val="1A5C2C"/>
+          </a:solidFill>
+          <a:ln w="12700">
+            <a:solidFill>
+              <a:srgbClr val="1A5C2C"/>
+            </a:solidFill>
+            <a:prstDash val="solid"/>
+          </a:ln>
+        </p:spPr>
+        <p:txBody>
+          <a:bodyPr/>
+          <a:lstStyle/>
+          <a:p>
+            <a:endParaRPr lang="en-ZA"/>
+          </a:p>
+        </p:txBody>
+      </p:sp>
+      <p:pic>
+        <p:nvPicPr>
+          <p:cNvPr id="10" name="Image 2" descr="preencoded.png"/>
+          <p:cNvPicPr>
+            <a:picLocks noChangeAspect="1"/>
+          </p:cNvPicPr>
+          <p:nvPr/>
+        </p:nvPicPr>
+        <p:blipFill>
+          <a:blip r:embed="rId4"/>
+          <a:stretch>
+            <a:fillRect/>
+          </a:stretch>
+        </p:blipFill>
+        <p:spPr>
+          <a:xfrm>
+            <a:off x="708660" y="4406265"/>
+            <a:ext cx="320040" cy="320040"/>
+          </a:xfrm>
+          <a:prstGeom prst="rect">
+            <a:avLst/>
+          </a:prstGeom>
+        </p:spPr>
+      </p:pic>
+      <p:sp>
+        <p:nvSpPr>
+          <p:cNvPr id="11" name="Text 6"/>
+          <p:cNvSpPr txBox="1"/>
+          <p:nvPr/>
+        </p:nvSpPr>
+        <p:spPr>
+          <a:xfrm>
+            <a:off x="1508760" y="3954780"/>
+            <a:ext cx="10131552" cy="1223010"/>
+          </a:xfrm>
+          <a:prstGeom prst="rect">
+            <a:avLst/>
+          </a:prstGeom>
+          <a:noFill/>
+          <a:ln/>
+        </p:spPr>
+        <p:txBody>
+          <a:bodyPr wrap="square" lIns="0" tIns="0" rIns="0" bIns="0" rtlCol="0" anchor="ctr"/>
+          <a:lstStyle/>
+          <a:p>
+            <a:pPr marL="0" indent="0">
+              <a:buNone/>
+            </a:pPr>
+            <a:r>
+              <a:rPr lang="en-US" sz="2600" b="1" dirty="0">
+                <a:solidFill>
+                  <a:srgbClr val="1A5C2C"/>
+                </a:solidFill>
+                <a:latin typeface="Cambria" pitchFamily="34" charset="0"/>
+                <a:ea typeface="Cambria" pitchFamily="34" charset="-122"/>
+                <a:cs typeface="Cambria" pitchFamily="34" charset="-120"/>
+              </a:rPr>
+              <a:t>03  </a:t>
+            </a:r>
+            <a:r>
+              <a:rPr lang="en-US" sz="2600" dirty="0">
+                <a:solidFill>
+                  <a:srgbClr val="1F2A22"/>
+                </a:solidFill>
+                <a:latin typeface="Calibri" pitchFamily="34" charset="0"/>
+                <a:ea typeface="Calibri" pitchFamily="34" charset="-122"/>
+                <a:cs typeface="Calibri" pitchFamily="34" charset="-120"/>
+              </a:rPr>
+              <a:t>Loss of Organisational Learning  ·  individuals · conditions</a:t>
+            </a:r>
+            <a:endParaRPr lang="en-US" sz="2600" dirty="0"/>
+          </a:p>
+        </p:txBody>
+      </p:sp>
+      <p:sp>
+        <p:nvSpPr>
+          <p:cNvPr id="12" name="Shape 7"/>
+          <p:cNvSpPr/>
+          <p:nvPr/>
+        </p:nvSpPr>
+        <p:spPr>
+          <a:xfrm>
+            <a:off x="548640" y="5469255"/>
+            <a:ext cx="640080" cy="640080"/>
+          </a:xfrm>
+          <a:prstGeom prst="ellipse">
+            <a:avLst/>
+          </a:prstGeom>
+          <a:solidFill>
+            <a:srgbClr val="1A5C2C"/>
+          </a:solidFill>
+          <a:ln w="12700">
+            <a:solidFill>
+              <a:srgbClr val="1A5C2C"/>
+            </a:solidFill>
+            <a:prstDash val="solid"/>
+          </a:ln>
+        </p:spPr>
+        <p:txBody>
+          <a:bodyPr/>
+          <a:lstStyle/>
+          <a:p>
+            <a:endParaRPr lang="en-ZA"/>
+          </a:p>
+        </p:txBody>
+      </p:sp>
+      <p:pic>
+        <p:nvPicPr>
+          <p:cNvPr id="13" name="Image 3" descr="preencoded.png"/>
+          <p:cNvPicPr>
+            <a:picLocks noChangeAspect="1"/>
+          </p:cNvPicPr>
+          <p:nvPr/>
+        </p:nvPicPr>
+        <p:blipFill>
+          <a:blip r:embed="rId3"/>
+          <a:stretch>
+            <a:fillRect/>
+          </a:stretch>
+        </p:blipFill>
+        <p:spPr>
+          <a:xfrm>
+            <a:off x="708660" y="5629275"/>
+            <a:ext cx="320040" cy="320040"/>
+          </a:xfrm>
+          <a:prstGeom prst="rect">
+            <a:avLst/>
+          </a:prstGeom>
+        </p:spPr>
+      </p:pic>
+      <p:sp>
+        <p:nvSpPr>
+          <p:cNvPr id="14" name="Text 8"/>
+          <p:cNvSpPr txBox="1"/>
+          <p:nvPr/>
+        </p:nvSpPr>
+        <p:spPr>
+          <a:xfrm>
+            <a:off x="1508760" y="5177790"/>
+            <a:ext cx="10131552" cy="1223010"/>
+          </a:xfrm>
+          <a:prstGeom prst="rect">
+            <a:avLst/>
+          </a:prstGeom>
+          <a:noFill/>
+          <a:ln/>
+        </p:spPr>
+        <p:txBody>
+          <a:bodyPr wrap="square" lIns="0" tIns="0" rIns="0" bIns="0" rtlCol="0" anchor="ctr"/>
+          <a:lstStyle/>
+          <a:p>
+            <a:pPr marL="0" indent="0">
+              <a:buNone/>
+            </a:pPr>
+            <a:r>
+              <a:rPr lang="en-US" sz="2600" b="1" dirty="0">
+                <a:solidFill>
+                  <a:srgbClr val="1A5C2C"/>
+                </a:solidFill>
+                <a:latin typeface="Cambria" pitchFamily="34" charset="0"/>
+                <a:ea typeface="Cambria" pitchFamily="34" charset="-122"/>
+                <a:cs typeface="Cambria" pitchFamily="34" charset="-120"/>
+              </a:rPr>
+              <a:t>04  </a:t>
+            </a:r>
+            <a:r>
+              <a:rPr lang="en-US" sz="2600" dirty="0">
+                <a:solidFill>
+                  <a:srgbClr val="1F2A22"/>
+                </a:solidFill>
+                <a:latin typeface="Calibri" pitchFamily="34" charset="0"/>
+                <a:ea typeface="Calibri" pitchFamily="34" charset="-122"/>
+                <a:cs typeface="Calibri" pitchFamily="34" charset="-120"/>
+              </a:rPr>
+              <a:t>Erodes Leadership Credibility  ·  individuals · conditions</a:t>
+            </a:r>
+            <a:endParaRPr lang="en-US" sz="2600" dirty="0"/>
           </a:p>
         </p:txBody>
       </p:sp>
@@ -15489,7 +15635,7 @@
           <p:nvPr/>
         </p:nvPicPr>
         <p:blipFill>
-          <a:blip r:embed="rId6"/>
+          <a:blip r:embed="rId8"/>
           <a:stretch>
             <a:fillRect/>
           </a:stretch>
@@ -15497,7 +15643,7 @@
         <p:spPr>
           <a:xfrm>
             <a:off x="1691640" y="1463040"/>
-            <a:ext cx="10058400" cy="1311339"/>
+            <a:ext cx="10058400" cy="1642775"/>
           </a:xfrm>
           <a:prstGeom prst="rect">
             <a:avLst/>
@@ -15561,7 +15707,7 @@
         </p:blipFill>
         <p:spPr>
           <a:xfrm>
-            <a:off x="1691640" y="2975546"/>
+            <a:off x="1691640" y="3306982"/>
             <a:ext cx="10058400" cy="1311339"/>
           </a:xfrm>
           <a:prstGeom prst="rect">
@@ -15577,7 +15723,7 @@
         </p:nvSpPr>
         <p:spPr>
           <a:xfrm>
-            <a:off x="548640" y="3196875"/>
+            <a:off x="548640" y="3528311"/>
             <a:ext cx="868680" cy="868680"/>
           </a:xfrm>
           <a:prstGeom prst="ellipse">

--- a/Unit decks/Unit 08 - Performance Measurement.pptx
+++ b/Unit decks/Unit 08 - Performance Measurement.pptx
@@ -3864,7 +3864,7 @@
           </a:p>
           <a:p>
             <a:r>
-              <a:t>2. Explain how performance evidence converts into realignment and corrective action.</a:t>
+              <a:t>2. Convert performance evidence into realignment and corrective action.</a:t>
             </a:r>
           </a:p>
           <a:p/>
@@ -5092,7 +5092,7 @@
           </a:p>
           <a:p>
             <a:r>
-              <a:t>1. Explain why review discipline determines the pace of execution.</a:t>
+              <a:t>1. Sustain the review discipline that sets the pace of execution.</a:t>
             </a:r>
           </a:p>
           <a:p>
@@ -6027,7 +6027,7 @@
                 <a:ea typeface="Calibri" pitchFamily="34" charset="-122"/>
                 <a:cs typeface="Calibri" pitchFamily="34" charset="-120"/>
               </a:rPr>
-              <a:t>Explain why review discipline determines the pace of execution.</a:t>
+              <a:t>Sustain the review discipline that sets the pace of execution.</a:t>
             </a:r>
             <a:endParaRPr lang="en-US" sz="2400" dirty="0"/>
           </a:p>
@@ -13320,7 +13320,7 @@
                 <a:ea typeface="Calibri" pitchFamily="34" charset="-122"/>
                 <a:cs typeface="Calibri" pitchFamily="34" charset="-120"/>
               </a:rPr>
-              <a:t>Explain how performance evidence converts into realignment and corrective action.</a:t>
+              <a:t>Convert performance evidence into realignment and corrective action.</a:t>
             </a:r>
             <a:endParaRPr lang="en-US" sz="2400" dirty="0"/>
           </a:p>

--- a/Unit decks/Unit 08 - Performance Measurement.pptx
+++ b/Unit decks/Unit 08 - Performance Measurement.pptx
@@ -576,7 +576,7 @@
           <a:p/>
           <a:p>
             <a:r>
-              <a:t>THE HUMAN SIDE AND THE ORGANISATION SIDE OF EACH CONSEQUENCE:</a:t>
+              <a:t>PEOPLE PERFORMANCE AND ORGANISATIONAL PERFORMANCE IN EACH CONSEQUENCE:</a:t>
             </a:r>
           </a:p>
           <a:p/>
@@ -587,12 +587,12 @@
           </a:p>
           <a:p>
             <a:r>
-              <a:t>Human side: early warnings on the human side show in the review conversation before they show in the KPI. Three patterns recur. The quality of evidence falls: results give way to explanations, and percentages arrive without the evidence behind them. Alignment drifts: the individual who rated alignment at 9 when the target was agreed now gives short, guarded answers about the target, and no one asks the alignment question again. Effort migrates: the individual's time moves to work that senior leaders ask about, and the KPI receives what is left. Each pattern leads a missed KPI by weeks. A leader who reviews monthly sees it as a trend across two or three conversations; a leader who reviews at quarter end sees the result alone. The difference is the recovery available: a capability gap seen in week four can be met with coaching; the same gap seen in week twelve leaves a revised target.</a:t>
-            </a:r>
-          </a:p>
-          <a:p>
-            <a:r>
-              <a:t>Organisation side: an early warning on the organisation side is evidence that an organisational condition has started to weaken in its support for the individuals' tasks. It seldom carries a number of its own, so the review sees it only when it asks for it.</a:t>
+              <a:t>People performance: early warnings in people performance show in the review conversation before they show in the KPI. Three patterns recur. The quality of evidence falls: results give way to explanations, and percentages arrive without the evidence behind them. Alignment drifts: the individual who rated alignment at 9 when the target was agreed now gives short, guarded answers about the target, and no one asks the alignment question again. Effort migrates: the individual's time moves to work that senior leaders ask about, and the KPI receives what is left. Each pattern leads a missed KPI by weeks. A leader who reviews monthly sees it as a trend across two or three conversations; a leader who reviews at quarter end sees the result alone. The difference is the recovery available: a capability gap seen in week four can be met with coaching; the same gap seen in week twelve leaves a revised target.</a:t>
+            </a:r>
+          </a:p>
+          <a:p>
+            <a:r>
+              <a:t>Organisational performance: an early warning in organisational performance is evidence that an organisational condition has started to weaken in its support for the individuals' tasks. It seldom carries a number of its own, so the review sees it only when it asks for it.</a:t>
             </a:r>
           </a:p>
           <a:p>
@@ -623,12 +623,12 @@
           </a:p>
           <a:p>
             <a:r>
-              <a:t>Human side: individuals read priority from the review agenda. When a KPI is absent from three reviews in a row, the conclusion is reasonable: leadership attention has moved. Accountability then weakens in three ways. The KPI is managed for appearance: updates are written to reassure, and risks are held until they can no longer be hidden. Ownership of a shared KPI spreads thin: each individual assumes another is carrying the result, and the dependencies between them belong to no one. The commitment loses its force: the commitment given when the target was agreed has not been tested since. When the gap finally surfaces, the review becomes a search for who was responsible. The Accountability Loop cannot diagnose a commitment no one has been asked about.</a:t>
-            </a:r>
-          </a:p>
-          <a:p>
-            <a:r>
-              <a:t>Organisation side: leaders make commitments on organisational conditions when targets are agreed. These commitments seldom appear on any scorecard, so they diffuse first.</a:t>
+              <a:t>People performance: individuals read priority from the review agenda. When a KPI is absent from three reviews in a row, the conclusion is reasonable: leadership attention has moved. Accountability then weakens in three ways. The KPI is managed for appearance: updates are written to reassure, and risks are held until they can no longer be hidden. Ownership of a shared KPI spreads thin: each individual assumes another is carrying the result, and the dependencies between them belong to no one. The commitment loses its force: the commitment given when the target was agreed has not been tested since. When the gap finally surfaces, the review becomes a search for who was responsible. The Accountability Loop cannot diagnose a commitment no one has been asked about.</a:t>
+            </a:r>
+          </a:p>
+          <a:p>
+            <a:r>
+              <a:t>Organisational performance: leaders make commitments on organisational conditions when targets are agreed. These commitments seldom appear on any scorecard, so they diffuse first.</a:t>
             </a:r>
           </a:p>
           <a:p>
@@ -654,12 +654,12 @@
           </a:p>
           <a:p>
             <a:r>
-              <a:t>Human side: every review produces evidence on how results are achieved, and that evidence is the raw material of the organisation's performance capability. Practices that accelerate progress: one regional team meets its targets because its manager runs a short daily huddle on the Key Result. Recorded and examined, the practice can be taught to other teams. Unexamined, it stays one manager's habit and leaves when that manager leaves. Capability gaps that recur: when the same skill gap appears in reviews across several functions, it signals a development need at enterprise level. Behaviours that strengthen ownership: reviews show which leaders' teams surface problems early and which conceal them. When reviews only record results, talent decisions, development plans and succession rest on ratings with no evidence of how the results were achieved. The organisation keeps rewarding outcomes it cannot reproduce.</a:t>
-            </a:r>
-          </a:p>
-          <a:p>
-            <a:r>
-              <a:t>Organisation side: reviews also show how the organisational conditions behave as the strategy places weight on them. The learning is cumulative: the same constraint appearing in several reviews is evidence that a condition is not yet equal to the strategy.</a:t>
+              <a:t>People performance: every review produces evidence on how results are achieved, and that evidence is the raw material of the organisation's performance capability. Practices that accelerate progress: one regional team meets its targets because its manager runs a short daily huddle on the Key Result. Recorded and examined, the practice can be taught to other teams. Unexamined, it stays one manager's habit and leaves when that manager leaves. Capability gaps that recur: when the same skill gap appears in reviews across several functions, it signals a development need at enterprise level. Behaviours that strengthen ownership: reviews show which leaders' teams surface problems early and which conceal them. When reviews only record results, talent decisions, development plans and succession rest on ratings with no evidence of how the results were achieved. The organisation keeps rewarding outcomes it cannot reproduce.</a:t>
+            </a:r>
+          </a:p>
+          <a:p>
+            <a:r>
+              <a:t>Organisational performance: reviews also show how the organisational conditions behave as the strategy places weight on them. The learning is cumulative: the same constraint appearing in several reviews is evidence that a condition is not yet equal to the strategy.</a:t>
             </a:r>
           </a:p>
           <a:p>
@@ -690,12 +690,12 @@
           </a:p>
           <a:p>
             <a:r>
-              <a:t>Human side: credibility is built in the review. A leader who asks for evidence every month, recognises progress and addresses shortfalls consistently shows that the priority is real. Two patterns erode it. Priorities that fade: a strategic KPI launched with energy disappears from the review agenda, and individuals conclude the announcement was symbolic. High performers, who invest most in strategic commitments, become the most sceptical, and the organisation learns to wait and see whether a priority survives its first quarter. Standards applied unevenly: some individuals' KPIs are examined closely while others are excused, often by seniority. Individuals read this as unfairness, and commitment falls across the whole team.</a:t>
-            </a:r>
-          </a:p>
-          <a:p>
-            <a:r>
-              <a:t>Organisation side: leaders make commitments when they agree organisational conditions, and individuals track these closely because their own delivery depends on them. Credibility on this side is a test of fairness.</a:t>
+              <a:t>People performance: credibility is built in the review. A leader who asks for evidence every month, recognises progress and addresses shortfalls consistently shows that the priority is real. Two patterns erode it. Priorities that fade: a strategic KPI launched with energy disappears from the review agenda, and individuals conclude the announcement was symbolic. High performers, who invest most in strategic commitments, become the most sceptical, and the organisation learns to wait and see whether a priority survives its first quarter. Standards applied unevenly: some individuals' KPIs are examined closely while others are excused, often by seniority. Individuals read this as unfairness, and commitment falls across the whole team.</a:t>
+            </a:r>
+          </a:p>
+          <a:p>
+            <a:r>
+              <a:t>Organisational performance: leaders make commitments when they agree organisational conditions, and individuals track these closely because their own delivery depends on them. Credibility in organisational performance is a test of fairness.</a:t>
             </a:r>
           </a:p>
           <a:p>
@@ -883,7 +883,7 @@
           </a:p>
           <a:p>
             <a:r>
-              <a:t>3.1 · Four Fractures in Performance Measurement. Teach the four gaps as observable patterns and invite participants to place their organisation honestly on each one, each with its implication for human performance and for organisational performance. The Horizontal Coordination Gap is typically the most impactful but least visible: each function may report strong progress while the enterprise outcome remains inconsistent. The Learning Suppression Gap is often the most culturally embedded and the hardest to shift, because it requires leaders to move from a judgement posture to a curiosity posture.</a:t>
+              <a:t>3.1 · Four Fractures in Performance Measurement. Teach the four gaps as observable patterns and invite participants to place their organisation honestly on each one, each with its implication for people performance and for organisational performance. The Horizontal Coordination Gap is typically the most impactful but least visible: each function may report strong progress while the enterprise outcome remains inconsistent. The Learning Suppression Gap is often the most culturally embedded and the hardest to shift, because it requires leaders to move from a judgement posture to a curiosity posture.</a:t>
             </a:r>
           </a:p>
           <a:p>
@@ -1148,7 +1148,7 @@
           <a:p/>
           <a:p>
             <a:r>
-              <a:t>IMPLICATIONS FOR HUMAN PERFORMANCE AND FOR ORGANISATIONAL PERFORMANCE:</a:t>
+              <a:t>IMPLICATIONS FOR PEOPLE PERFORMANCE AND FOR ORGANISATIONAL PERFORMANCE:</a:t>
             </a:r>
           </a:p>
           <a:p/>
@@ -1159,7 +1159,7 @@
           </a:p>
           <a:p>
             <a:r>
-              <a:t>Human performance: when each function reviews its own KPIs, individuals are judged on the part of the result they control, and the hand-offs between functions are never examined. An operations planner meets every internal measure while customer orders wait at the boundary with sales. Individuals learn to optimise their own measure, and the commitments they made to other functions go unreviewed: no one is asked whether they delivered what another function needed from them. Individuals whose work depends on another function are held to results they cannot complete alone, and the review sees their shortfall without the dependency behind it.</a:t>
+              <a:t>People performance: when each function reviews its own KPIs, individuals are judged on the part of the result they control, and the hand-offs between functions are never examined. An operations planner meets every internal measure while customer orders wait at the boundary with sales. Individuals learn to optimise their own measure, and the commitments they made to other functions go unreviewed: no one is asked whether they delivered what another function needed from them. Individuals whose work depends on another function are held to results they cannot complete alone, and the review sees their shortfall without the dependency behind it.</a:t>
             </a:r>
           </a:p>
           <a:p>
@@ -1190,7 +1190,7 @@
           </a:p>
           <a:p>
             <a:r>
-              <a:t>Human performance: weak evidence harms individuals in two ways. Strong performers cannot show what their contribution changed, and weak delivery stays hidden behind narrative. When the evidence offered is activity, such as training attended or meetings held, the review rates effort. Ratings lose credibility with the individuals themselves, and the performance standard agreed at the start of the period loses its anchor. Over time, individuals learn that the persuasive account is rewarded.</a:t>
+              <a:t>People performance: weak evidence harms individuals in two ways. Strong performers cannot show what their contribution changed, and weak delivery stays hidden behind narrative. When the evidence offered is activity, such as training attended or meetings held, the review rates effort. Ratings lose credibility with the individuals themselves, and the performance standard agreed at the start of the period loses its anchor. Over time, individuals learn that the persuasive account is rewarded.</a:t>
             </a:r>
           </a:p>
           <a:p>
@@ -1221,7 +1221,7 @@
           </a:p>
           <a:p>
             <a:r>
-              <a:t>Human performance: the rhythm of review sets the individuals' planning horizon. Reviewed quarterly, individuals work in quarterly bursts: a slow start, a surge before the period closes and figures prepared for the review. Reviewed irregularly, evidence is assembled in a hurry and the conversation is spent reconstructing what happened. The recoveries of the Accountability Loop need a rhythm short enough for coaching, development or a structural change to take effect within the period.</a:t>
+              <a:t>People performance: the rhythm of review sets the individuals' planning horizon. Reviewed quarterly, individuals work in quarterly bursts: a slow start, a surge before the period closes and figures prepared for the review. Reviewed irregularly, evidence is assembled in a hurry and the conversation is spent reconstructing what happened. The recoveries of the Accountability Loop need a rhythm short enough for coaching, development or a structural change to take effect within the period.</a:t>
             </a:r>
           </a:p>
           <a:p>
@@ -1257,7 +1257,7 @@
           </a:p>
           <a:p>
             <a:r>
-              <a:t>Human performance: when reviews judge, individuals defend. They bring the explanation and hold back the obstacle, and in the next cycle they propose targets they are sure to meet. Learning moves out of the review into corridors and private conversations. The organisation loses the individuals' first-hand knowledge of what is slowing execution, the most current intelligence it has.</a:t>
+              <a:t>People performance: when reviews judge, individuals defend. They bring the explanation and hold back the obstacle, and in the next cycle they propose targets they are sure to meet. Learning moves out of the review into corridors and private conversations. The organisation loses the individuals' first-hand knowledge of what is slowing execution, the most current intelligence it has.</a:t>
             </a:r>
           </a:p>
           <a:p>
@@ -3870,7 +3870,7 @@
           <a:p/>
           <a:p>
             <a:r>
-              <a:t>FACILITATOR GUIDANCE — Awareness</a:t>
+              <a:t>HOW TO TEACH THE SECTION:</a:t>
             </a:r>
           </a:p>
           <a:p>
@@ -3896,7 +3896,7 @@
           </a:p>
           <a:p>
             <a:r>
-              <a:t>1.1 · The Execution Visibility Infrastructure. Open with the provocation: "Work is happening. Teams are busy. Initiatives are underway. But can you confidently say the work being done is actually advancing the strategy?" Then teach performance measurement as the visibility infrastructure of the strategy: without it, strategy stays interpretive, each function develops its own sense of progress and activity is mistaken for advancement. The shift to land is from "What work was done?" to "What changed because of the work?", from the human side and the organisation side.</a:t>
+              <a:t>1.1 · The Execution Visibility Infrastructure. Open with the provocation: "Work is happening. Teams are busy. Initiatives are underway. But can you confidently say the work being done is actually advancing the strategy?" Then teach performance measurement as the visibility infrastructure of the strategy: without it, strategy stays interpretive, each function develops its own sense of progress and activity is mistaken for advancement. The shift to land is from "What work was done?" to "What changed because of the work?", in people performance and in organisational performance.</a:t>
             </a:r>
           </a:p>
           <a:p>
@@ -3906,7 +3906,7 @@
           </a:p>
           <a:p>
             <a:r>
-              <a:t>1.3 · From Performance Measurement to Execution Recovery. Link the four purposes to the Review–Realign–Restore Cycle (R3): Review brings together visibility, accountability and execution intelligence; Realign diagnoses the gap; Restore activates timely correction. Teach each stage for both operating systems. Name the outcome of each stage, and close on how the cycle stays continuous: the next Review checks whether the corrective actions worked.</a:t>
+              <a:t>1.3 · From Performance Measurement to Execution Recovery. Link the four purposes to the Review–Realign–Restore Cycle (R3): Review brings together visibility, accountability and execution intelligence; Realign diagnoses the gap; Restore activates timely correction. Teach each stage for people performance and organisational performance. Name the outcome of each stage, and close on how the cycle stays continuous: the next Review checks whether the corrective actions worked.</a:t>
             </a:r>
           </a:p>
           <a:p>
@@ -4095,7 +4095,7 @@
           <a:p/>
           <a:p>
             <a:r>
-              <a:t>THE HUMAN SIDE AND THE ORGANISATION SIDE:</a:t>
+              <a:t>PEOPLE PERFORMANCE AND ORGANISATIONAL PERFORMANCE:</a:t>
             </a:r>
           </a:p>
           <a:p>
@@ -4105,12 +4105,12 @@
           </a:p>
           <a:p>
             <a:r>
-              <a:t>From the human side: leaders see whether individuals and teams are moving their KPIs, OKRs and behaviours toward the enterprise result.</a:t>
-            </a:r>
-          </a:p>
-          <a:p>
-            <a:r>
-              <a:t>From the organisation side: leaders see whether the organisational conditions support the execution of the individuals' tasks. These conditions are the Environment, Systems, Resources and Governance (ESRG) agreed in Unit 6.</a:t>
+              <a:t>People performance: leaders see whether individuals and teams are moving their KPIs, OKRs and behaviours toward the enterprise result.</a:t>
+            </a:r>
+          </a:p>
+          <a:p>
+            <a:r>
+              <a:t>Organisational performance: leaders see whether the organisational conditions support the execution of the individuals' tasks. These conditions are the Environment, Systems, Resources and Governance (ESRG) agreed in Unit 6.</a:t>
             </a:r>
           </a:p>
           <a:p>
@@ -4120,12 +4120,12 @@
           </a:p>
           <a:p>
             <a:r>
-              <a:t>From the human side: the question moves from "How busy are our people?" to "What has their work changed in the Key Result?"</a:t>
-            </a:r>
-          </a:p>
-          <a:p>
-            <a:r>
-              <a:t>From the organisation side: the question moves from "Has the support been put in place?" to "Does the support enable the individuals' tasks to move the Key Result?"</a:t>
+              <a:t>People performance: the question moves from "How busy are our people?" to "What has their work changed in the Key Result?"</a:t>
+            </a:r>
+          </a:p>
+          <a:p>
+            <a:r>
+              <a:t>Organisational performance: the question moves from "Has the support been put in place?" to "Does the support enable the individuals' tasks to move the Key Result?"</a:t>
             </a:r>
           </a:p>
           <a:p/>
@@ -4412,27 +4412,27 @@
           <a:p/>
           <a:p>
             <a:r>
-              <a:t>THE HUMAN SIDE AND THE ORGANISATION SIDE OF EACH PURPOSE:</a:t>
-            </a:r>
-          </a:p>
-          <a:p>
-            <a:r>
-              <a:t>01 · Creates Visibility. Human side: where individuals' and teams' KPIs are gaining momentum and where they are stalling. Organisation side: where the organisational conditions are supporting the execution of the tasks, and where they are holding it back.</a:t>
-            </a:r>
-          </a:p>
-          <a:p>
-            <a:r>
-              <a:t>02 · Establishes Accountability. Human side: individuals and teams know which part of the strategy they are responsible for advancing, and their delivery is recorded as evidence. Organisation side: leaders account for whether the organisational conditions they undertook to provide in Unit 7 support the execution of the individuals' tasks.</a:t>
-            </a:r>
-          </a:p>
-          <a:p>
-            <a:r>
-              <a:t>03 · Execution Intelligence. Human side: the review learns what accelerates and what slows the progress of individuals and teams. Organisation side: the review learns which organisational conditions enable execution and which constrain it.</a:t>
-            </a:r>
-          </a:p>
-          <a:p>
-            <a:r>
-              <a:t>04 · Enables Timely Correction. Human side: an early signal in an individual's progress lets the leader intervene while the KPI is still recoverable. Organisation side: an early signal in an organisational condition, such as a system outage, a capacity shortfall or a delayed decision, lets the leader responsible act before the individuals' delivery is affected.</a:t>
+              <a:t>PEOPLE PERFORMANCE AND ORGANISATIONAL PERFORMANCE IN EACH PURPOSE:</a:t>
+            </a:r>
+          </a:p>
+          <a:p>
+            <a:r>
+              <a:t>01 · Creates Visibility. People performance: where individuals' and teams' KPIs are gaining momentum and where they are stalling. Organisational performance: where the organisational conditions are supporting the execution of the tasks, and where they are holding it back.</a:t>
+            </a:r>
+          </a:p>
+          <a:p>
+            <a:r>
+              <a:t>02 · Establishes Accountability. People performance: individuals and teams know which part of the strategy they are responsible for advancing, and their delivery is recorded as evidence. Organisational performance: leaders account for whether the organisational conditions they undertook to provide in Unit 7 support the execution of the individuals' tasks.</a:t>
+            </a:r>
+          </a:p>
+          <a:p>
+            <a:r>
+              <a:t>03 · Execution Intelligence. People performance: the review learns what accelerates and what slows the progress of individuals and teams. Organisational performance: the review learns which organisational conditions enable execution and which constrain it.</a:t>
+            </a:r>
+          </a:p>
+          <a:p>
+            <a:r>
+              <a:t>04 · Enables Timely Correction. People performance: an early signal in an individual's progress lets the leader intervene while the KPI is still recoverable. Organisational performance: an early signal in an organisational condition, such as a system outage, a capacity shortfall or a delayed decision, lets the leader responsible act before the individuals' delivery is affected.</a:t>
             </a:r>
           </a:p>
         </p:txBody>
@@ -4715,22 +4715,22 @@
           <a:p/>
           <a:p>
             <a:r>
-              <a:t>THE CYCLE APPLIES TO BOTH OPERATING SYSTEMS:</a:t>
-            </a:r>
-          </a:p>
-          <a:p>
-            <a:r>
-              <a:t>Review. Human side: the individual and the leader establish the progress made against the agreed target. Organisation side: the leader brings the agreed measures or evidence of readiness for the organisational conditions, and the review establishes whether those conditions support the execution of the individuals' tasks.</a:t>
-            </a:r>
-          </a:p>
-          <a:p>
-            <a:r>
-              <a:t>Realign. Human side: the Accountability Loop (part 1.4) diagnoses what is preventing the individual's expected performance. Organisation side: the leader determines what is preventing an organisational condition from supporting the execution of the individuals' tasks, and agrees the response.</a:t>
-            </a:r>
-          </a:p>
-          <a:p>
-            <a:r>
-              <a:t>Restore. Human side: the individual commits to the corrective actions and the follow-up dates. Organisation side: the leader responsible commits to the actions on the organisational conditions, each with a review date.</a:t>
+              <a:t>THE CYCLE APPLIES TO PEOPLE PERFORMANCE AND ORGANISATIONAL PERFORMANCE:</a:t>
+            </a:r>
+          </a:p>
+          <a:p>
+            <a:r>
+              <a:t>Review. People performance: the individual and the leader establish the progress made against the agreed target. Organisational performance: the leader brings the agreed measures or evidence of readiness for the organisational conditions, and the review establishes whether those conditions support the execution of the individuals' tasks.</a:t>
+            </a:r>
+          </a:p>
+          <a:p>
+            <a:r>
+              <a:t>Realign. People performance: the Accountability Loop (part 1.4) diagnoses what is preventing the individual's expected performance. Organisational performance: the leader determines what is preventing an organisational condition from supporting the execution of the individuals' tasks, and agrees the response.</a:t>
+            </a:r>
+          </a:p>
+          <a:p>
+            <a:r>
+              <a:t>Restore. People performance: the individual commits to the corrective actions and the follow-up dates. Organisational performance: the leader responsible commits to the actions on the organisational conditions, each with a review date.</a:t>
             </a:r>
           </a:p>
           <a:p>
@@ -5152,7 +5152,7 @@
           </a:p>
           <a:p>
             <a:r>
-              <a:t>2.1 · Four Consequences of Weak Review Discipline. Teach the four consequences as one chain, one card at a time, each from the human side and the organisation side. Ask the question on each card once the card is taught, so participants recognise the chain in their own organisations.</a:t>
+              <a:t>2.1 · Four Consequences of Weak Review Discipline. Teach the four consequences as one chain, one card at a time, each in people performance and in organisational performance. Ask the question on each card once the card is taught, so participants recognise the chain in their own organisations.</a:t>
             </a:r>
           </a:p>
         </p:txBody>

--- a/Unit decks/Unit 08 - Performance Measurement.pptx
+++ b/Unit decks/Unit 08 - Performance Measurement.pptx
@@ -828,12 +828,12 @@
           </a:p>
           <a:p>
             <a:r>
-              <a:t>1. Identify where the review and interpretation of performance evidence break down across functions.</a:t>
-            </a:r>
-          </a:p>
-          <a:p>
-            <a:r>
-              <a:t>2. Assess which breakdown is most prevalent in their own organisation.</a:t>
+              <a:t>1. Diagnose cross-functional breakdowns in reviewing and interpreting performance evidence.</a:t>
+            </a:r>
+          </a:p>
+          <a:p>
+            <a:r>
+              <a:t>2. Prioritise corrective action against the organisation’s most consequential measurement breakdown.</a:t>
             </a:r>
           </a:p>
           <a:p/>
@@ -1407,12 +1407,12 @@
           </a:p>
           <a:p>
             <a:r>
-              <a:t>1. Interpret individual performance signals within a shared enterprise view of progress.</a:t>
-            </a:r>
-          </a:p>
-          <a:p>
-            <a:r>
-              <a:t>2. Determine the root cause of underperformance and the leadership action it requires.</a:t>
+              <a:t>1. Integrate individual performance signals into an enterprise-wide assessment of progress.</a:t>
+            </a:r>
+          </a:p>
+          <a:p>
+            <a:r>
+              <a:t>2. Diagnose root causes of underperformance and select proportionate leadership responses.</a:t>
             </a:r>
           </a:p>
           <a:p/>
@@ -1852,12 +1852,12 @@
           </a:p>
           <a:p>
             <a:r>
-              <a:t>1. Exercise balanced judgement when performance differs from agreed expectations.</a:t>
-            </a:r>
-          </a:p>
-          <a:p>
-            <a:r>
-              <a:t>2. Determine the leadership decisions that protect the review discipline of the strategy.</a:t>
+              <a:t>1. Make evidence-based recovery decisions when results depart from expectations.</a:t>
+            </a:r>
+          </a:p>
+          <a:p>
+            <a:r>
+              <a:t>2. Establish executive decisions and routines that protect sustained review discipline.</a:t>
             </a:r>
           </a:p>
           <a:p/>
@@ -2010,10 +2010,10 @@
             <a:r>
               <a:rPr lang="en-US" dirty="0"/>
               <a:t>KEY LEARNING OUTCOMES (identical in the participant and facilitator files)
-1. Interpret performance evidence in relation to strategic objectives and the wider organisational context.
-2. Distinguish meaningful strategic progress from activity, compliance and short-term fluctuation.
-3. Exercise balanced executive judgement when performance differs from agreed expectations.
-4. Derive relevant decisions, organisational learning and leadership action from performance evidence.
+1. Interpret performance evidence in relation to strategic objectives and organisational context.
+2. Discriminate meaningful strategic progress from activity, compliance and temporary variation.
+3. Exercise balanced executive judgement when performance diverges from expectations.
+4. Translate performance evidence into decisions, learning and corrective leadership action.
 Each section slide carries that section’s two learning outcomes.</a:t>
             </a:r>
           </a:p>
@@ -3859,12 +3859,12 @@
           </a:p>
           <a:p>
             <a:r>
-              <a:t>1. Distinguish meaningful strategic progress from activity.</a:t>
-            </a:r>
-          </a:p>
-          <a:p>
-            <a:r>
-              <a:t>2. Convert performance evidence into realignment and corrective action.</a:t>
+              <a:t>1. Evaluate whether reported activity demonstrates genuine strategic progress.</a:t>
+            </a:r>
+          </a:p>
+          <a:p>
+            <a:r>
+              <a:t>2. Use performance evidence to determine timely realignment and corrective action.</a:t>
             </a:r>
           </a:p>
           <a:p/>
@@ -5092,12 +5092,12 @@
           </a:p>
           <a:p>
             <a:r>
-              <a:t>1. Sustain the review discipline that sets the pace of execution.</a:t>
-            </a:r>
-          </a:p>
-          <a:p>
-            <a:r>
-              <a:t>2. Recognise the early signs that review discipline is weakening and the cost each carries.</a:t>
+              <a:t>1. Lead a consistent review rhythm that sustains execution momentum.</a:t>
+            </a:r>
+          </a:p>
+          <a:p>
+            <a:r>
+              <a:t>2. Detect weakening review discipline and intervene before performance deteriorates.</a:t>
             </a:r>
           </a:p>
           <a:p/>
@@ -6027,7 +6027,7 @@
                 <a:ea typeface="Calibri" pitchFamily="34" charset="-122"/>
                 <a:cs typeface="Calibri" pitchFamily="34" charset="-120"/>
               </a:rPr>
-              <a:t>Sustain the review discipline that sets the pace of execution.</a:t>
+              <a:t>Lead a consistent review rhythm that sustains execution momentum.</a:t>
             </a:r>
             <a:endParaRPr lang="en-US" sz="2400" dirty="0"/>
           </a:p>
@@ -6122,7 +6122,7 @@
                 <a:ea typeface="Calibri" pitchFamily="34" charset="-122"/>
                 <a:cs typeface="Calibri" pitchFamily="34" charset="-120"/>
               </a:rPr>
-              <a:t>Recognise the early signs that review discipline is weakening and the cost each carries.</a:t>
+              <a:t>Detect weakening review discipline and intervene before performance deteriorates.</a:t>
             </a:r>
             <a:endParaRPr lang="en-US" sz="2400" dirty="0"/>
           </a:p>
@@ -7071,7 +7071,7 @@
                 <a:ea typeface="Calibri" pitchFamily="34" charset="-122"/>
                 <a:cs typeface="Calibri" pitchFamily="34" charset="-120"/>
               </a:rPr>
-              <a:t>Identify where the review and interpretation of performance evidence break down across functions.</a:t>
+              <a:t>Diagnose cross-functional breakdowns in reviewing and interpreting performance evidence.</a:t>
             </a:r>
             <a:endParaRPr lang="en-US" sz="2400" dirty="0"/>
           </a:p>
@@ -7166,7 +7166,7 @@
                 <a:ea typeface="Calibri" pitchFamily="34" charset="-122"/>
                 <a:cs typeface="Calibri" pitchFamily="34" charset="-120"/>
               </a:rPr>
-              <a:t>Assess which breakdown is most prevalent in their own organisation.</a:t>
+              <a:t>Prioritise corrective action against the organisation’s most consequential measurement breakdown.</a:t>
             </a:r>
             <a:endParaRPr lang="en-US" sz="2400" dirty="0"/>
           </a:p>
@@ -9165,7 +9165,7 @@
                 <a:ea typeface="Calibri" pitchFamily="34" charset="-122"/>
                 <a:cs typeface="Calibri" pitchFamily="34" charset="-120"/>
               </a:rPr>
-              <a:t>Interpret individual performance signals within a shared enterprise view of progress.</a:t>
+              <a:t>Integrate individual performance signals into an enterprise-wide assessment of progress.</a:t>
             </a:r>
             <a:endParaRPr lang="en-US" sz="2400" dirty="0"/>
           </a:p>
@@ -9260,7 +9260,7 @@
                 <a:ea typeface="Calibri" pitchFamily="34" charset="-122"/>
                 <a:cs typeface="Calibri" pitchFamily="34" charset="-120"/>
               </a:rPr>
-              <a:t>Determine the root cause of underperformance and the leadership action it requires.</a:t>
+              <a:t>Diagnose root causes of underperformance and select proportionate leadership responses.</a:t>
             </a:r>
             <a:endParaRPr lang="en-US" sz="2400" dirty="0"/>
           </a:p>
@@ -10282,7 +10282,7 @@
                 <a:ea typeface="Calibri" pitchFamily="34" charset="-122"/>
                 <a:cs typeface="Calibri" pitchFamily="34" charset="-120"/>
               </a:rPr>
-              <a:t>Interpret performance evidence in relation to strategic objectives and the wider organisational context.</a:t>
+              <a:t>Interpret performance evidence in relation to strategic objectives and organisational context.</a:t>
             </a:r>
             <a:endParaRPr lang="en-US" sz="2400" dirty="0"/>
           </a:p>
@@ -10377,7 +10377,7 @@
                 <a:ea typeface="Calibri" pitchFamily="34" charset="-122"/>
                 <a:cs typeface="Calibri" pitchFamily="34" charset="-120"/>
               </a:rPr>
-              <a:t>Distinguish meaningful strategic progress from activity, compliance and short-term fluctuation.</a:t>
+              <a:t>Discriminate meaningful strategic progress from activity, compliance and temporary variation.</a:t>
             </a:r>
             <a:endParaRPr lang="en-US" sz="2400" dirty="0"/>
           </a:p>
@@ -10472,7 +10472,7 @@
                 <a:ea typeface="Calibri" pitchFamily="34" charset="-122"/>
                 <a:cs typeface="Calibri" pitchFamily="34" charset="-120"/>
               </a:rPr>
-              <a:t>Exercise balanced executive judgement when performance differs from agreed expectations.</a:t>
+              <a:t>Exercise balanced executive judgement when performance diverges from expectations.</a:t>
             </a:r>
             <a:endParaRPr lang="en-US" sz="2400" dirty="0"/>
           </a:p>
@@ -10567,7 +10567,7 @@
                 <a:ea typeface="Calibri" pitchFamily="34" charset="-122"/>
                 <a:cs typeface="Calibri" pitchFamily="34" charset="-120"/>
               </a:rPr>
-              <a:t>Derive relevant decisions, organisational learning and leadership action from performance evidence.</a:t>
+              <a:t>Translate performance evidence into decisions, learning and corrective leadership action.</a:t>
             </a:r>
             <a:endParaRPr lang="en-US" sz="2400" dirty="0"/>
           </a:p>
@@ -11716,7 +11716,7 @@
                 <a:ea typeface="Calibri" pitchFamily="34" charset="-122"/>
                 <a:cs typeface="Calibri" pitchFamily="34" charset="-120"/>
               </a:rPr>
-              <a:t>Exercise balanced judgement when performance differs from agreed expectations.</a:t>
+              <a:t>Make evidence-based recovery decisions when results depart from expectations.</a:t>
             </a:r>
             <a:endParaRPr lang="en-US" sz="2400" dirty="0"/>
           </a:p>
@@ -11811,7 +11811,7 @@
                 <a:ea typeface="Calibri" pitchFamily="34" charset="-122"/>
                 <a:cs typeface="Calibri" pitchFamily="34" charset="-120"/>
               </a:rPr>
-              <a:t>Determine the leadership decisions that protect the review discipline of the strategy.</a:t>
+              <a:t>Establish executive decisions and routines that protect sustained review discipline.</a:t>
             </a:r>
             <a:endParaRPr lang="en-US" sz="2400" dirty="0"/>
           </a:p>
@@ -13225,7 +13225,7 @@
                 <a:ea typeface="Calibri" pitchFamily="34" charset="-122"/>
                 <a:cs typeface="Calibri" pitchFamily="34" charset="-120"/>
               </a:rPr>
-              <a:t>Distinguish meaningful strategic progress from activity.</a:t>
+              <a:t>Evaluate whether reported activity demonstrates genuine strategic progress.</a:t>
             </a:r>
             <a:endParaRPr lang="en-US" sz="2400" dirty="0"/>
           </a:p>
@@ -13320,7 +13320,7 @@
                 <a:ea typeface="Calibri" pitchFamily="34" charset="-122"/>
                 <a:cs typeface="Calibri" pitchFamily="34" charset="-120"/>
               </a:rPr>
-              <a:t>Convert performance evidence into realignment and corrective action.</a:t>
+              <a:t>Use performance evidence to determine timely realignment and corrective action.</a:t>
             </a:r>
             <a:endParaRPr lang="en-US" sz="2400" dirty="0"/>
           </a:p>

--- a/Unit decks/Unit 08 - Performance Measurement.pptx
+++ b/Unit decks/Unit 08 - Performance Measurement.pptx
@@ -1883,7 +1883,7 @@
           </a:p>
           <a:p>
             <a:r>
-              <a:t>The group agrees each entry and one member acts as scribe. Every member types the agreed entries into their own page, then selects Confirm. The confirmed record feeds the team’s Capstone Blueprint.</a:t>
+              <a:t>The group chooses its scribe for this work. The scribe types what the group agrees, and the entries appear on every member’s page. Each member then selects Agree. When every member has agreed, the record feeds the team’s Capstone Blueprint.</a:t>
             </a:r>
           </a:p>
           <a:p/>
@@ -1911,7 +1911,7 @@
           </a:p>
           <a:p>
             <a:r>
-              <a:t>Say: "This is group work. Your group agrees each entry. One member acts as scribe. Every member then types the agreed entries into their own page, in the session or after it."</a:t>
+              <a:t>Say: "This is group work. Your group agrees each entry and chooses its scribe for this work. The scribe types, and the entries appear on every member’s page."</a:t>
             </a:r>
           </a:p>
           <a:p/>
@@ -1922,7 +1922,7 @@
           </a:p>
           <a:p>
             <a:r>
-              <a:t>Say: "This is Capstone work. You read your group’s record at the foot of the section and select Confirm. Your confirmed record feeds your team’s Capstone Blueprint."</a:t>
+              <a:t>Say: "This is Capstone work. You read your group’s record at the foot of the section and select Agree. When every member has agreed, your record feeds your team’s Capstone Blueprint."</a:t>
             </a:r>
           </a:p>
         </p:txBody>
@@ -3468,7 +3468,7 @@
           </a:p>
           <a:p>
             <a:r>
-              <a:t>Participants work as a group in part 5.1 of their own file. This is Capstone work. The group agrees each entry and one member acts as scribe. Every member then types the agreed entries into their own page, in the session or after it.</a:t>
+              <a:t>Participants work as a group in part 5.1 of their own file. This is Capstone work. The group chooses its scribe for this work. The scribe types what the group agrees, and the entries appear on every member’s page.</a:t>
             </a:r>
           </a:p>
           <a:p>

--- a/Unit decks/Unit 08 - Performance Measurement.pptx
+++ b/Unit decks/Unit 08 - Performance Measurement.pptx
@@ -32,6 +32,7 @@
     <p:sldId id="283" r:id="rId34"/>
     <p:sldId id="274" r:id="rId20"/>
     <p:sldId id="284" r:id="rId35"/>
+    <p:sldId id="286" r:id="rId21"/>
   </p:sldIdLst>
   <p:sldSz cx="12192000" cy="6858000"/>
   <p:notesSz cx="6858000" cy="12192000"/>
@@ -1836,92 +1837,127 @@
           <a:lstStyle/>
           <a:p>
             <a:r>
+              <a:rPr lang="en-GB"/>
               <a:t>SECTION 5 · APPLICATION — IN PRACTICE</a:t>
             </a:r>
           </a:p>
           <a:p>
             <a:r>
+              <a:rPr lang="en-GB"/>
               <a:t>Applying the Four Consequences of Weak Review Discipline</a:t>
             </a:r>
           </a:p>
-          <a:p/>
-          <a:p>
-            <a:r>
+          <a:p>
+            <a:endParaRPr lang="en-GB"/>
+          </a:p>
+          <a:p>
+            <a:r>
+              <a:rPr lang="en-GB"/>
               <a:t>SECTION LEARNING OUTCOMES:</a:t>
             </a:r>
           </a:p>
           <a:p>
             <a:r>
+              <a:rPr lang="en-GB"/>
               <a:t>1. Make evidence-based recovery decisions when results depart from expectations.</a:t>
             </a:r>
           </a:p>
           <a:p>
             <a:r>
+              <a:rPr lang="en-GB"/>
               <a:t>2. Establish executive decisions and routines that protect sustained review discipline.</a:t>
             </a:r>
           </a:p>
-          <a:p/>
-          <a:p>
-            <a:r>
+          <a:p>
+            <a:endParaRPr lang="en-GB"/>
+          </a:p>
+          <a:p>
+            <a:r>
+              <a:rPr lang="en-GB"/>
               <a:t>HOW THIS SECTION RUNS:</a:t>
             </a:r>
           </a:p>
           <a:p>
             <a:r>
+              <a:rPr lang="en-GB"/>
               <a:t>This is group work and Capstone work. For each of the four consequences of weak review discipline, each group:</a:t>
             </a:r>
           </a:p>
           <a:p>
             <a:r>
+              <a:rPr lang="en-GB"/>
               <a:t>1. Simulates a potential gap in the performance of individuals, and a potential gap in the organisational conditions of its strategy.</a:t>
             </a:r>
           </a:p>
           <a:p>
             <a:r>
+              <a:rPr lang="en-GB"/>
               <a:t>2. Writes a decision point for recovery for each gap: the decision the executive team takes when the gap appears, and who takes it.</a:t>
             </a:r>
           </a:p>
           <a:p>
             <a:r>
+              <a:rPr lang="en-GB"/>
+              <a:t>In part 5.2 each group tests the WARD check-up it set for its enterprise Key Result in Unit 6: the alert fires, and the group runs the recovery.</a:t>
+            </a:r>
+          </a:p>
+          <a:p>
+            <a:r>
+              <a:rPr lang="en-GB"/>
               <a:t>The group chooses its scribe for this work. The scribe types what the group agrees, and the entries appear on every member’s page. Each member then selects Agree. When every member has agreed, the record feeds the team’s Capstone Blueprint.</a:t>
             </a:r>
           </a:p>
-          <a:p/>
-          <a:p>
-            <a:r>
+          <a:p>
+            <a:endParaRPr lang="en-GB"/>
+          </a:p>
+          <a:p>
+            <a:r>
+              <a:rPr lang="en-GB"/>
               <a:t>HOW TO OPEN THE SECTION:</a:t>
             </a:r>
           </a:p>
-          <a:p/>
-          <a:p>
-            <a:r>
+          <a:p>
+            <a:endParaRPr lang="en-GB"/>
+          </a:p>
+          <a:p>
+            <a:r>
+              <a:rPr lang="en-GB"/>
               <a:t>1. Say what the section does.</a:t>
             </a:r>
           </a:p>
           <a:p>
             <a:r>
-              <a:t>Say: "For each of the four consequences of weak review discipline, your group simulates a potential gap in the performance of individuals and in the organisational conditions of the strategy in your team’s Capstone Blueprint, and sets a decision point for recovery for each."</a:t>
-            </a:r>
-          </a:p>
-          <a:p/>
-          <a:p>
-            <a:r>
+              <a:rPr lang="en-GB"/>
+              <a:t>Say: "For each of the four consequences of weak review discipline, your group simulates a potential gap in the performance of individuals and in the organisational conditions of the strategy in your team’s Capstone Blueprint, and sets a decision point for recovery for each. Then your group tests the WARD check-up it set in Unit 6: the alert fires, and you run the recovery."</a:t>
+            </a:r>
+          </a:p>
+          <a:p>
+            <a:endParaRPr lang="en-GB"/>
+          </a:p>
+          <a:p>
+            <a:r>
+              <a:rPr lang="en-GB"/>
               <a:t>2. Say how the group works.</a:t>
             </a:r>
           </a:p>
           <a:p>
             <a:r>
+              <a:rPr lang="en-GB"/>
               <a:t>Say: "This is group work. Your group agrees each entry and chooses its scribe for this work. The scribe types, and the entries appear on every member’s page."</a:t>
             </a:r>
           </a:p>
-          <a:p/>
-          <a:p>
-            <a:r>
+          <a:p>
+            <a:endParaRPr lang="en-GB"/>
+          </a:p>
+          <a:p>
+            <a:r>
+              <a:rPr lang="en-GB"/>
               <a:t>3. Say where the work goes.</a:t>
             </a:r>
           </a:p>
           <a:p>
             <a:r>
+              <a:rPr lang="en-GB"/>
               <a:t>Say: "This is Capstone work. You read your group’s record at the foot of the section and select Agree. When every member has agreed, your record feeds your team’s Capstone Blueprint."</a:t>
             </a:r>
           </a:p>
@@ -2048,6 +2084,241 @@
         <p14:creationId xmlns:p14="http://schemas.microsoft.com/office/powerpoint/2010/main" val="1024086991"/>
       </p:ext>
     </p:extLst>
+  </p:cSld>
+  <p:clrMapOvr>
+    <a:masterClrMapping/>
+  </p:clrMapOvr>
+</p:notes>
+</file>
+
+<file path=ppt/notesSlides/notesSlide20.xml><?xml version="1.0" encoding="utf-8"?>
+<p:notes xmlns:a="http://schemas.openxmlformats.org/drawingml/2006/main" xmlns:p="http://schemas.openxmlformats.org/presentationml/2006/main" xmlns:r="http://schemas.openxmlformats.org/officeDocument/2006/relationships">
+  <p:cSld>
+    <p:spTree>
+      <p:nvGrpSpPr>
+        <p:cNvPr id="1" name=""/>
+        <p:cNvGrpSpPr/>
+        <p:nvPr/>
+      </p:nvGrpSpPr>
+      <p:grpSpPr>
+        <a:xfrm>
+          <a:off x="0" y="0"/>
+          <a:ext cx="0" cy="0"/>
+          <a:chOff x="0" y="0"/>
+          <a:chExt cx="0" cy="0"/>
+        </a:xfrm>
+      </p:grpSpPr>
+      <p:sp>
+        <p:nvSpPr>
+          <p:cNvPr id="2" name="Slide Image Placeholder 1"/>
+          <p:cNvSpPr>
+            <a:spLocks noGrp="1" noRot="1" noChangeAspect="1"/>
+          </p:cNvSpPr>
+          <p:nvPr>
+            <p:ph type="sldImg"/>
+          </p:nvPr>
+        </p:nvSpPr>
+        <p:spPr/>
+      </p:sp>
+      <p:sp>
+        <p:nvSpPr>
+          <p:cNvPr id="3" name="Notes Placeholder 2"/>
+          <p:cNvSpPr>
+            <a:spLocks noGrp="1"/>
+          </p:cNvSpPr>
+          <p:nvPr>
+            <p:ph type="body" idx="1"/>
+          </p:nvPr>
+        </p:nvSpPr>
+        <p:spPr/>
+        <p:txBody>
+          <a:bodyPr/>
+          <a:lstStyle/>
+          <a:p>
+            <a:r>
+              <a:rPr lang="en-GB"/>
+              <a:t>5.2 — TESTING YOUR WARD (CAPSTONE WORK)</a:t>
+            </a:r>
+          </a:p>
+          <a:p>
+            <a:endParaRPr lang="en-GB"/>
+          </a:p>
+          <a:p>
+            <a:r>
+              <a:rPr lang="en-GB"/>
+              <a:t>HOW TO TEACH IT:</a:t>
+            </a:r>
+          </a:p>
+          <a:p>
+            <a:endParaRPr lang="en-GB"/>
+          </a:p>
+          <a:p>
+            <a:r>
+              <a:rPr lang="en-GB"/>
+              <a:t>1. Recall the check-up.</a:t>
+            </a:r>
+          </a:p>
+          <a:p>
+            <a:r>
+              <a:rPr lang="en-GB"/>
+              <a:t>Say: "In Unit 6 your group set the WARD check-up for its enterprise Key Result: the waypoints, the alert, the recovery and the decider. It was set while the Key Result was on track. Today the alert fires."</a:t>
+            </a:r>
+          </a:p>
+          <a:p>
+            <a:endParaRPr lang="en-GB"/>
+          </a:p>
+          <a:p>
+            <a:r>
+              <a:rPr lang="en-GB"/>
+              <a:t>2. Fire the alert.</a:t>
+            </a:r>
+          </a:p>
+          <a:p>
+            <a:r>
+              <a:rPr lang="en-GB"/>
+              <a:t>Say: "Choose one of your waypoints and write the result your executive team reads at that review, beyond the alert."</a:t>
+            </a:r>
+          </a:p>
+          <a:p>
+            <a:endParaRPr lang="en-GB"/>
+          </a:p>
+          <a:p>
+            <a:r>
+              <a:rPr lang="en-GB"/>
+              <a:t>3. Run the recovery.</a:t>
+            </a:r>
+          </a:p>
+          <a:p>
+            <a:r>
+              <a:rPr lang="en-GB"/>
+              <a:t>Ask: "What explains the gap in the individuals and in the organisational conditions? Which recovery do you run, who decides, and when do you check the result again?"</a:t>
+            </a:r>
+          </a:p>
+          <a:p>
+            <a:r>
+              <a:rPr lang="en-GB"/>
+              <a:t>Guide the groups to use the evidence in their Contribution Map and the recovery they set in advance.</a:t>
+            </a:r>
+          </a:p>
+          <a:p>
+            <a:endParaRPr lang="en-GB"/>
+          </a:p>
+          <a:p>
+            <a:r>
+              <a:rPr lang="en-GB"/>
+              <a:t>4. Give the example from the Unit 6 worked example.</a:t>
+            </a:r>
+          </a:p>
+          <a:p>
+            <a:r>
+              <a:rPr lang="en-GB"/>
+              <a:t>Enterprise Key Result: Increase customer enquiries resolved within 48 hours from 65% to 90% by year-end. Waypoint: 80% by the end of June. Alert: more than three percentage points below a waypoint.</a:t>
+            </a:r>
+          </a:p>
+          <a:p>
+            <a:r>
+              <a:rPr lang="en-GB"/>
+              <a:t>The red flag: At the end of June, 74% of enquiries are resolved within 48 hours against the 80% waypoint: six points below, beyond the alert.</a:t>
+            </a:r>
+          </a:p>
+          <a:p>
+            <a:r>
+              <a:rPr lang="en-GB"/>
+              <a:t>Individuals · what explains the gap: Two teams follow up fewer than 85% of outstanding enquiries on time.</a:t>
+            </a:r>
+          </a:p>
+          <a:p>
+            <a:r>
+              <a:rPr lang="en-GB"/>
+              <a:t>Organisational conditions · what explains the gap: System availability fell to 96% in May, and enquiries waited for the system to return.</a:t>
+            </a:r>
+          </a:p>
+          <a:p>
+            <a:r>
+              <a:rPr lang="en-GB"/>
+              <a:t>The recovery: Team leaders review open enquiries with each owner every morning; IT restores availability to 99% within four weeks; the Customer Service Executive decides and checks the result at the end of July.</a:t>
+            </a:r>
+          </a:p>
+          <a:p>
+            <a:endParaRPr lang="en-GB"/>
+          </a:p>
+          <a:p>
+            <a:r>
+              <a:rPr lang="en-GB"/>
+              <a:t>ON THE PORTAL, AFTER THE TEACHING:</a:t>
+            </a:r>
+          </a:p>
+          <a:p>
+            <a:r>
+              <a:rPr lang="en-GB"/>
+              <a:t>Participants work as a group in part 5.2 of their own file. This is Capstone work. The group’s WARD from Unit 6 is shown on each page; if it is missing, the group selects Bring in from my Unit 6 page.</a:t>
+            </a:r>
+          </a:p>
+          <a:p>
+            <a:r>
+              <a:rPr lang="en-GB"/>
+              <a:t>1. The group writes the red flag: the waypoint and the result that raises the alert.</a:t>
+            </a:r>
+          </a:p>
+          <a:p>
+            <a:r>
+              <a:rPr lang="en-GB"/>
+              <a:t>2. The group states what explains the gap in the performance of individuals and in the organisational conditions.</a:t>
+            </a:r>
+          </a:p>
+          <a:p>
+            <a:r>
+              <a:rPr lang="en-GB"/>
+              <a:t>3. The group states the recovery: what is done, who decides and when the result is checked again.</a:t>
+            </a:r>
+          </a:p>
+          <a:p>
+            <a:r>
+              <a:rPr lang="en-GB"/>
+              <a:t>4. Each participant reads the record and selects Agree.</a:t>
+            </a:r>
+          </a:p>
+          <a:p>
+            <a:endParaRPr lang="en-GB"/>
+          </a:p>
+          <a:p>
+            <a:r>
+              <a:rPr lang="en-GB"/>
+              <a:t>AFTER THE SESSION:</a:t>
+            </a:r>
+          </a:p>
+          <a:p>
+            <a:r>
+              <a:rPr lang="en-GB"/>
+              <a:t>The record reaches you with each participant’s submission, under the heading of Section 5. The agreed record feeds the Unit 8 boxes of the team’s Capstone Blueprint: the four consequences in 8A to 8D and the WARD test in 8E.</a:t>
+            </a:r>
+          </a:p>
+        </p:txBody>
+      </p:sp>
+      <p:sp>
+        <p:nvSpPr>
+          <p:cNvPr id="4" name="Slide Number Placeholder 3"/>
+          <p:cNvSpPr>
+            <a:spLocks noGrp="1"/>
+          </p:cNvSpPr>
+          <p:nvPr>
+            <p:ph type="sldNum" sz="quarter" idx="10"/>
+          </p:nvPr>
+        </p:nvSpPr>
+        <p:spPr/>
+        <p:txBody>
+          <a:bodyPr/>
+          <a:lstStyle/>
+          <a:p>
+            <a:fld id="{F7021451-1387-4CA6-816F-3879F97B5CBC}" type="slidenum">
+              <a:rPr lang="en-US"/>
+              <a:t>11</a:t>
+            </a:fld>
+            <a:endParaRPr lang="en-US"/>
+          </a:p>
+        </p:txBody>
+      </p:sp>
+    </p:spTree>
   </p:cSld>
   <p:clrMapOvr>
     <a:masterClrMapping/>
@@ -12301,6 +12572,389 @@
                 <a:cs typeface="Calibri" pitchFamily="34" charset="-120"/>
               </a:rPr>
               <a:t>Erodes Leadership Credibility  ·  individuals · conditions</a:t>
+            </a:r>
+            <a:endParaRPr lang="en-US" sz="2600" dirty="0"/>
+          </a:p>
+        </p:txBody>
+      </p:sp>
+    </p:spTree>
+  </p:cSld>
+  <p:clrMapOvr>
+    <a:masterClrMapping/>
+  </p:clrMapOvr>
+</p:sld>
+</file>
+
+<file path=ppt/slides/slide25.xml><?xml version="1.0" encoding="utf-8"?>
+<p:sld xmlns:a="http://schemas.openxmlformats.org/drawingml/2006/main" xmlns:p="http://schemas.openxmlformats.org/presentationml/2006/main" xmlns:r="http://schemas.openxmlformats.org/officeDocument/2006/relationships">
+  <p:cSld>
+    <p:bg>
+      <p:bgPr>
+        <a:solidFill>
+          <a:srgbClr val="FFFFFF"/>
+        </a:solidFill>
+        <a:effectLst/>
+      </p:bgPr>
+    </p:bg>
+    <p:spTree>
+      <p:nvGrpSpPr>
+        <p:cNvPr id="1" name=""/>
+        <p:cNvGrpSpPr/>
+        <p:nvPr/>
+      </p:nvGrpSpPr>
+      <p:grpSpPr/>
+      <p:sp>
+        <p:nvSpPr>
+          <p:cNvPr id="2" name="Text 0"/>
+          <p:cNvSpPr txBox="1"/>
+          <p:nvPr/>
+        </p:nvSpPr>
+        <p:spPr>
+          <a:xfrm>
+            <a:off x="548640" y="411480"/>
+            <a:ext cx="11064240" cy="868680"/>
+          </a:xfrm>
+          <a:prstGeom prst="rect">
+            <a:avLst/>
+          </a:prstGeom>
+          <a:noFill/>
+          <a:ln/>
+        </p:spPr>
+        <p:txBody>
+          <a:bodyPr wrap="square" lIns="0" tIns="0" rIns="0" bIns="0" rtlCol="0" anchor="ctr"/>
+          <a:lstStyle/>
+          <a:p>
+            <a:pPr marL="0" indent="0">
+              <a:buNone/>
+            </a:pPr>
+            <a:r>
+              <a:rPr lang="en-US" sz="3600" b="1" dirty="0">
+                <a:solidFill>
+                  <a:srgbClr val="1A5C2C"/>
+                </a:solidFill>
+                <a:latin typeface="Cambria" pitchFamily="34" charset="0"/>
+                <a:ea typeface="Cambria" pitchFamily="34" charset="-122"/>
+                <a:cs typeface="Cambria" pitchFamily="34" charset="-120"/>
+              </a:rPr>
+              <a:t>5.2 · Testing your WARD</a:t>
+            </a:r>
+            <a:endParaRPr lang="en-US" sz="3600" dirty="0"/>
+          </a:p>
+        </p:txBody>
+      </p:sp>
+      <p:sp>
+        <p:nvSpPr>
+          <p:cNvPr id="3" name="Shape 1"/>
+          <p:cNvSpPr/>
+          <p:nvPr/>
+        </p:nvSpPr>
+        <p:spPr>
+          <a:xfrm>
+            <a:off x="548640" y="1800225"/>
+            <a:ext cx="640080" cy="640080"/>
+          </a:xfrm>
+          <a:prstGeom prst="ellipse">
+            <a:avLst/>
+          </a:prstGeom>
+          <a:solidFill>
+            <a:srgbClr val="1A5C2C"/>
+          </a:solidFill>
+          <a:ln w="12700">
+            <a:solidFill>
+              <a:srgbClr val="1A5C2C"/>
+            </a:solidFill>
+            <a:prstDash val="solid"/>
+          </a:ln>
+        </p:spPr>
+        <p:txBody>
+          <a:bodyPr/>
+          <a:lstStyle/>
+          <a:p>
+            <a:endParaRPr lang="en-ZA"/>
+          </a:p>
+        </p:txBody>
+      </p:sp>
+      <p:pic>
+        <p:nvPicPr>
+          <p:cNvPr id="4" name="Image 0" descr="preencoded.png"/>
+          <p:cNvPicPr>
+            <a:picLocks noChangeAspect="1"/>
+          </p:cNvPicPr>
+          <p:nvPr/>
+        </p:nvPicPr>
+        <p:blipFill>
+          <a:blip r:embed="rId7"/>
+          <a:stretch>
+            <a:fillRect/>
+          </a:stretch>
+        </p:blipFill>
+        <p:spPr>
+          <a:xfrm>
+            <a:off x="708660" y="1960245"/>
+            <a:ext cx="320040" cy="320040"/>
+          </a:xfrm>
+          <a:prstGeom prst="rect">
+            <a:avLst/>
+          </a:prstGeom>
+        </p:spPr>
+      </p:pic>
+      <p:sp>
+        <p:nvSpPr>
+          <p:cNvPr id="5" name="Text 2"/>
+          <p:cNvSpPr txBox="1"/>
+          <p:nvPr/>
+        </p:nvSpPr>
+        <p:spPr>
+          <a:xfrm>
+            <a:off x="1508760" y="1508760"/>
+            <a:ext cx="10131552" cy="1223010"/>
+          </a:xfrm>
+          <a:prstGeom prst="rect">
+            <a:avLst/>
+          </a:prstGeom>
+          <a:noFill/>
+          <a:ln/>
+        </p:spPr>
+        <p:txBody>
+          <a:bodyPr wrap="square" lIns="0" tIns="0" rIns="0" bIns="0" rtlCol="0" anchor="ctr"/>
+          <a:lstStyle/>
+          <a:p>
+            <a:pPr marL="0" indent="0">
+              <a:buNone/>
+            </a:pPr>
+            <a:r>
+              <a:rPr lang="en-US" sz="2600" b="1" dirty="0">
+                <a:solidFill>
+                  <a:srgbClr val="1A5C2C"/>
+                </a:solidFill>
+                <a:latin typeface="Cambria" pitchFamily="34" charset="0"/>
+                <a:ea typeface="Cambria" pitchFamily="34" charset="-122"/>
+                <a:cs typeface="Cambria" pitchFamily="34" charset="-120"/>
+              </a:rPr>
+              <a:t>01  </a:t>
+            </a:r>
+            <a:r>
+              <a:rPr lang="en-US" sz="2600" dirty="0">
+                <a:solidFill>
+                  <a:srgbClr val="1F2A22"/>
+                </a:solidFill>
+                <a:latin typeface="Calibri" pitchFamily="34" charset="0"/>
+                <a:ea typeface="Calibri" pitchFamily="34" charset="-122"/>
+                <a:cs typeface="Calibri" pitchFamily="34" charset="-120"/>
+              </a:rPr>
+              <a:t>The red flag  ·  one waypoint, beyond the alert</a:t>
+            </a:r>
+            <a:endParaRPr lang="en-US" sz="2600" dirty="0"/>
+          </a:p>
+        </p:txBody>
+      </p:sp>
+      <p:sp>
+        <p:nvSpPr>
+          <p:cNvPr id="6" name="Shape 3"/>
+          <p:cNvSpPr/>
+          <p:nvPr/>
+        </p:nvSpPr>
+        <p:spPr>
+          <a:xfrm>
+            <a:off x="548640" y="3023235"/>
+            <a:ext cx="640080" cy="640080"/>
+          </a:xfrm>
+          <a:prstGeom prst="ellipse">
+            <a:avLst/>
+          </a:prstGeom>
+          <a:solidFill>
+            <a:srgbClr val="1A5C2C"/>
+          </a:solidFill>
+          <a:ln w="12700">
+            <a:solidFill>
+              <a:srgbClr val="1A5C2C"/>
+            </a:solidFill>
+            <a:prstDash val="solid"/>
+          </a:ln>
+        </p:spPr>
+        <p:txBody>
+          <a:bodyPr/>
+          <a:lstStyle/>
+          <a:p>
+            <a:endParaRPr lang="en-ZA"/>
+          </a:p>
+        </p:txBody>
+      </p:sp>
+      <p:pic>
+        <p:nvPicPr>
+          <p:cNvPr id="7" name="Image 1" descr="preencoded.png"/>
+          <p:cNvPicPr>
+            <a:picLocks noChangeAspect="1"/>
+          </p:cNvPicPr>
+          <p:nvPr/>
+        </p:nvPicPr>
+        <p:blipFill>
+          <a:blip r:embed="rId8"/>
+          <a:stretch>
+            <a:fillRect/>
+          </a:stretch>
+        </p:blipFill>
+        <p:spPr>
+          <a:xfrm>
+            <a:off x="708660" y="3183255"/>
+            <a:ext cx="320040" cy="320040"/>
+          </a:xfrm>
+          <a:prstGeom prst="rect">
+            <a:avLst/>
+          </a:prstGeom>
+        </p:spPr>
+      </p:pic>
+      <p:sp>
+        <p:nvSpPr>
+          <p:cNvPr id="8" name="Text 4"/>
+          <p:cNvSpPr txBox="1"/>
+          <p:nvPr/>
+        </p:nvSpPr>
+        <p:spPr>
+          <a:xfrm>
+            <a:off x="1508760" y="2731770"/>
+            <a:ext cx="10131552" cy="1223010"/>
+          </a:xfrm>
+          <a:prstGeom prst="rect">
+            <a:avLst/>
+          </a:prstGeom>
+          <a:noFill/>
+          <a:ln/>
+        </p:spPr>
+        <p:txBody>
+          <a:bodyPr wrap="square" lIns="0" tIns="0" rIns="0" bIns="0" rtlCol="0" anchor="ctr"/>
+          <a:lstStyle/>
+          <a:p>
+            <a:pPr marL="0" indent="0">
+              <a:buNone/>
+            </a:pPr>
+            <a:r>
+              <a:rPr lang="en-US" sz="2600" b="1" dirty="0">
+                <a:solidFill>
+                  <a:srgbClr val="1A5C2C"/>
+                </a:solidFill>
+                <a:latin typeface="Cambria" pitchFamily="34" charset="0"/>
+                <a:ea typeface="Cambria" pitchFamily="34" charset="-122"/>
+                <a:cs typeface="Cambria" pitchFamily="34" charset="-120"/>
+              </a:rPr>
+              <a:t>02  </a:t>
+            </a:r>
+            <a:r>
+              <a:rPr lang="en-US" sz="2600" dirty="0">
+                <a:solidFill>
+                  <a:srgbClr val="1F2A22"/>
+                </a:solidFill>
+                <a:latin typeface="Calibri" pitchFamily="34" charset="0"/>
+                <a:ea typeface="Calibri" pitchFamily="34" charset="-122"/>
+                <a:cs typeface="Calibri" pitchFamily="34" charset="-120"/>
+              </a:rPr>
+              <a:t>What explains the gap  ·  individuals · conditions</a:t>
+            </a:r>
+            <a:endParaRPr lang="en-US" sz="2600" dirty="0"/>
+          </a:p>
+        </p:txBody>
+      </p:sp>
+      <p:sp>
+        <p:nvSpPr>
+          <p:cNvPr id="9" name="Shape 5"/>
+          <p:cNvSpPr/>
+          <p:nvPr/>
+        </p:nvSpPr>
+        <p:spPr>
+          <a:xfrm>
+            <a:off x="548640" y="4246245"/>
+            <a:ext cx="640080" cy="640080"/>
+          </a:xfrm>
+          <a:prstGeom prst="ellipse">
+            <a:avLst/>
+          </a:prstGeom>
+          <a:solidFill>
+            <a:srgbClr val="1A5C2C"/>
+          </a:solidFill>
+          <a:ln w="12700">
+            <a:solidFill>
+              <a:srgbClr val="1A5C2C"/>
+            </a:solidFill>
+            <a:prstDash val="solid"/>
+          </a:ln>
+        </p:spPr>
+        <p:txBody>
+          <a:bodyPr/>
+          <a:lstStyle/>
+          <a:p>
+            <a:endParaRPr lang="en-ZA"/>
+          </a:p>
+        </p:txBody>
+      </p:sp>
+      <p:pic>
+        <p:nvPicPr>
+          <p:cNvPr id="10" name="Image 2" descr="preencoded.png"/>
+          <p:cNvPicPr>
+            <a:picLocks noChangeAspect="1"/>
+          </p:cNvPicPr>
+          <p:nvPr/>
+        </p:nvPicPr>
+        <p:blipFill>
+          <a:blip r:embed="rId9"/>
+          <a:stretch>
+            <a:fillRect/>
+          </a:stretch>
+        </p:blipFill>
+        <p:spPr>
+          <a:xfrm>
+            <a:off x="708660" y="4406265"/>
+            <a:ext cx="320040" cy="320040"/>
+          </a:xfrm>
+          <a:prstGeom prst="rect">
+            <a:avLst/>
+          </a:prstGeom>
+        </p:spPr>
+      </p:pic>
+      <p:sp>
+        <p:nvSpPr>
+          <p:cNvPr id="11" name="Text 6"/>
+          <p:cNvSpPr txBox="1"/>
+          <p:nvPr/>
+        </p:nvSpPr>
+        <p:spPr>
+          <a:xfrm>
+            <a:off x="1508760" y="3954780"/>
+            <a:ext cx="10131552" cy="1223010"/>
+          </a:xfrm>
+          <a:prstGeom prst="rect">
+            <a:avLst/>
+          </a:prstGeom>
+          <a:noFill/>
+          <a:ln/>
+        </p:spPr>
+        <p:txBody>
+          <a:bodyPr wrap="square" lIns="0" tIns="0" rIns="0" bIns="0" rtlCol="0" anchor="ctr"/>
+          <a:lstStyle/>
+          <a:p>
+            <a:pPr marL="0" indent="0">
+              <a:buNone/>
+            </a:pPr>
+            <a:r>
+              <a:rPr lang="en-US" sz="2600" b="1" dirty="0">
+                <a:solidFill>
+                  <a:srgbClr val="1A5C2C"/>
+                </a:solidFill>
+                <a:latin typeface="Cambria" pitchFamily="34" charset="0"/>
+                <a:ea typeface="Cambria" pitchFamily="34" charset="-122"/>
+                <a:cs typeface="Cambria" pitchFamily="34" charset="-120"/>
+              </a:rPr>
+              <a:t>03  </a:t>
+            </a:r>
+            <a:r>
+              <a:rPr lang="en-US" sz="2600" dirty="0">
+                <a:solidFill>
+                  <a:srgbClr val="1F2A22"/>
+                </a:solidFill>
+                <a:latin typeface="Calibri" pitchFamily="34" charset="0"/>
+                <a:ea typeface="Calibri" pitchFamily="34" charset="-122"/>
+                <a:cs typeface="Calibri" pitchFamily="34" charset="-120"/>
+              </a:rPr>
+              <a:t>The recovery  ·  what, who decides, when checked again</a:t>
             </a:r>
             <a:endParaRPr lang="en-US" sz="2600" dirty="0"/>
           </a:p>

--- a/Unit decks/Unit 08 - Performance Measurement.pptx
+++ b/Unit decks/Unit 08 - Performance Measurement.pptx
@@ -1904,7 +1904,7 @@
           <a:p>
             <a:r>
               <a:rPr lang="en-GB"/>
-              <a:t>The group chooses its scribe for this work. The scribe types what the group agrees, and the entries appear on every member’s page. Each member then selects Agree. When every member has agreed, the record feeds the team’s Capstone Blueprint.</a:t>
+              <a:t>The group chooses its scribe for this work. The scribe types what the group agrees, and the entries appear on every member’s page. Each member then selects Agree. When every member has agreed, the record feeds the team’s Capstone S2R Blueprint.</a:t>
             </a:r>
           </a:p>
           <a:p>
@@ -1928,7 +1928,7 @@
           <a:p>
             <a:r>
               <a:rPr lang="en-GB"/>
-              <a:t>Say: "For each of the four consequences of weak review discipline, your group simulates a potential gap in the performance of individuals and in the organisational conditions of the strategy in your team’s Capstone Blueprint, and sets a decision point for recovery for each. Then your group tests the WARD check-up it set in Unit 6: the alert fires, and you run the recovery."</a:t>
+              <a:t>Say: "For each of the four consequences of weak review discipline, your group simulates a potential gap in the performance of individuals and in the organisational conditions of the strategy in your team’s Capstone S2R Blueprint, and sets a decision point for recovery for each. Then your group tests the WARD check-up it set in Unit 6: the alert fires, and you run the recovery."</a:t>
             </a:r>
           </a:p>
           <a:p>
@@ -1958,7 +1958,7 @@
           <a:p>
             <a:r>
               <a:rPr lang="en-GB"/>
-              <a:t>Say: "This is Capstone work. You read your group’s record at the foot of the section and select Agree. When every member has agreed, your record feeds your team’s Capstone Blueprint."</a:t>
+              <a:t>Say: "This is Capstone work. You read your group’s record at the foot of the section and select Agree. When every member has agreed, your record feeds your team’s Capstone S2R Blueprint."</a:t>
             </a:r>
           </a:p>
         </p:txBody>
@@ -2290,7 +2290,7 @@
           <a:p>
             <a:r>
               <a:rPr lang="en-GB"/>
-              <a:t>The record reaches you with each participant’s submission, under the heading of Section 5. The agreed record feeds the Unit 8 boxes of the team’s Capstone Blueprint: the four consequences in 8A to 8D and the WARD test in 8E.</a:t>
+              <a:t>The record reaches you with each participant’s submission, under the heading of Section 5. The agreed record feeds the Unit 8 boxes of the team’s Capstone S2R Blueprint: the four consequences in 8A to 8D and the WARD test in 8E.</a:t>
             </a:r>
           </a:p>
         </p:txBody>

--- a/Unit decks/Unit 08 - Performance Measurement.pptx
+++ b/Unit decks/Unit 08 - Performance Measurement.pptx
@@ -306,6 +306,7 @@
           <a:lstStyle/>
           <a:p>
             <a:r>
+              <a:rPr b="1"/>
               <a:t>UNIT 8 · PERFORMANCE MEASUREMENT</a:t>
             </a:r>
           </a:p>
@@ -317,17 +318,18 @@
           <a:p/>
           <a:p>
             <a:r>
-              <a:t>Unit intent (Facilitator Guide):</a:t>
-            </a:r>
-          </a:p>
-          <a:p>
-            <a:r>
-              <a:t>Unit 8 closes the loop opened by Units 6 and 7. KPIs have been established, targets have been set, and expectations have been secured. Now the most important discipline of execution begins: the performance review conversation. Each review examines two things: the progress of what individuals and teams deliver, and whether the organisational conditions support the execution of their tasks. This unit makes that conversation structured, honest, and useful: a genuine dialogue about execution reality.</a:t>
-            </a:r>
-          </a:p>
-          <a:p>
-            <a:r>
-              <a:t>The centrepiece is the Review–Realign–Restore Cycle. Leaders must leave this unit understanding that measurement is an execution recovery system. The Accountability Loop role play in part 4.2 is where the conceptual work becomes a leadership skill, and Section 5 applies the four consequences of weak review discipline to the group’s own strategy.</a:t>
+              <a:rPr b="1"/>
+              <a:t>UNIT INTENT:</a:t>
+            </a:r>
+          </a:p>
+          <a:p>
+            <a:r>
+              <a:t>Unit 8 closes the loop opened by Units 6 and 7. Key performance indicators (KPIs) have been established, targets have been set, and expectations have been secured. Now the most important discipline of execution begins: the performance review conversation. Each review examines two things: the progress of what individuals and teams deliver, and whether the organisational conditions support the execution of their tasks. This unit makes that conversation structured, honest and useful: a genuine dialogue about execution reality.</a:t>
+            </a:r>
+          </a:p>
+          <a:p>
+            <a:r>
+              <a:t>The centrepiece is the Review–Realign–Restore Cycle. Leaders must leave this unit understanding that measurement is an execution recovery system. The Accountability Loop role play in part 4.2 is where the conceptual work becomes a leadership skill, and Section 5 applies the four consequences of weak review discipline to the group's own strategy.</a:t>
             </a:r>
           </a:p>
           <a:p>
@@ -338,7 +340,100 @@
           <a:p/>
           <a:p>
             <a:r>
-              <a:t>Unit overview (facilitator file): Strategy fails when progress is not consistently examined. This unit establishes the review discipline that keeps strategy execution visible, surfaces early warning signals, and converts performance data into organisational intelligence through the Review–Realign–Restore cycle.</a:t>
+              <a:rPr b="1"/>
+              <a:t>WHERE THE UNIT SITS:</a:t>
+            </a:r>
+          </a:p>
+          <a:p>
+            <a:r>
+              <a:t>Module 3 · Influence runs from Unit 5 — Aligning Heart &amp; Mind (people alignment), to Unit 6 — Performance Management Setup (performance architecture), Unit 7 — Establishing Performance Expectations (owned commitments), Unit 8 — Performance Measurement (review discipline) and Unit 9 — Strategic Unclogging (flow of execution).</a:t>
+            </a:r>
+          </a:p>
+          <a:p/>
+          <a:p>
+            <a:r>
+              <a:rPr b="1"/>
+              <a:t>HOW THE UNIT RUNS:</a:t>
+            </a:r>
+          </a:p>
+          <a:p>
+            <a:r>
+              <a:t>1. You teach the whole unit from this deck first, from Section 1 to the last slide of Section 5. The deck is the teaching material.</a:t>
+            </a:r>
+          </a:p>
+          <a:p>
+            <a:r>
+              <a:t>2. Part 4.2 includes a role play in groups of three that you run in class. Nothing is entered on the portal during the role play.</a:t>
+            </a:r>
+          </a:p>
+          <a:p>
+            <a:r>
+              <a:t>3. Participants then complete their own page on the portal, in the session or after it: the reflections, the Portfolio work of parts 3.2 and 4.2, and the group work of Section 5.</a:t>
+            </a:r>
+          </a:p>
+          <a:p>
+            <a:r>
+              <a:t>4. Section 5 is group work and Capstone work. Each group chooses its scribe for this work; the scribe types what the group agrees, and the entries appear on every member's page. Each member then selects Agree.</a:t>
+            </a:r>
+          </a:p>
+          <a:p/>
+          <a:p>
+            <a:r>
+              <a:rPr b="1"/>
+              <a:t>HOW TO OPEN THE UNIT:</a:t>
+            </a:r>
+          </a:p>
+          <a:p/>
+          <a:p>
+            <a:r>
+              <a:rPr b="1"/>
+              <a:t>1. Connect to Units 6 and 7.</a:t>
+            </a:r>
+          </a:p>
+          <a:p>
+            <a:r>
+              <a:t>Say: "In Unit 6 you built the performance architecture. In Unit 7 you established the expectations that go with it. The commitments are secured. Now the most important discipline of execution begins: the review."</a:t>
+            </a:r>
+          </a:p>
+          <a:p/>
+          <a:p>
+            <a:r>
+              <a:rPr b="1"/>
+              <a:t>2. Ask the opening question.</a:t>
+            </a:r>
+          </a:p>
+          <a:p>
+            <a:r>
+              <a:t>Ask: "Think of the last significant performance gap your organisation experienced. When did you first see it coming? What would have had to be true for you to see it three months earlier?"</a:t>
+            </a:r>
+          </a:p>
+          <a:p>
+            <a:r>
+              <a:t>Take two answers. Listen for: the gap seen only at the end of a reporting period, signals that were there and not asked for.</a:t>
+            </a:r>
+          </a:p>
+          <a:p/>
+          <a:p>
+            <a:r>
+              <a:rPr b="1"/>
+              <a:t>3. Name what the unit does.</a:t>
+            </a:r>
+          </a:p>
+          <a:p>
+            <a:r>
+              <a:t>Say: "This unit makes the review conversation the place where execution becomes visible, diagnosable and correctable, for the people delivering the result and for the organisational conditions that support them."</a:t>
+            </a:r>
+          </a:p>
+          <a:p/>
+          <a:p>
+            <a:r>
+              <a:rPr b="1"/>
+              <a:t>WHERE THE OUTPUTS GO:</a:t>
+            </a:r>
+          </a:p>
+          <a:p>
+            <a:r>
+              <a:t>When every member has agreed, the Section 5 record feeds boxes 8A to 8E of the team's Capstone S2R® Blueprint.</a:t>
             </a:r>
           </a:p>
         </p:txBody>
@@ -424,310 +519,241 @@
           <a:lstStyle/>
           <a:p>
             <a:r>
+              <a:rPr b="1"/>
               <a:t>2.1 — FOUR CONSEQUENCES OF WEAK REVIEW DISCIPLINE</a:t>
             </a:r>
           </a:p>
           <a:p/>
           <a:p>
             <a:r>
-              <a:t>What determines the velocity of the flight?</a:t>
-            </a:r>
-          </a:p>
-          <a:p>
-            <a:r>
-              <a:t>An aircraft's progress depends on continuously interpreting evidence and acting at the appropriate time. A changing wind condition, fuel concern, missed altitude restriction or unstable approach calls for a different decision.</a:t>
-            </a:r>
-          </a:p>
-          <a:p>
-            <a:r>
-              <a:t>These decisions cannot all be deferred until landing. By then, the opportunity to respond to an earlier condition may have passed.</a:t>
-            </a:r>
-          </a:p>
-          <a:p>
-            <a:r>
-              <a:t>The same principle applies to strategy execution.</a:t>
-            </a:r>
-          </a:p>
-          <a:p>
-            <a:r>
-              <a:t>Execution velocity is the rate at which an organisation converts strategic intent into measurable results. That rate is shaped by how quickly leaders detect progress or deviation, understand its causes, make decisions and translate those decisions into action.</a:t>
-            </a:r>
-          </a:p>
-          <a:p>
-            <a:r>
-              <a:t>Performance measurement provides the evidence. Review discipline converts that evidence into timely decisions.</a:t>
-            </a:r>
-          </a:p>
-          <a:p>
-            <a:r>
-              <a:t>This is why organisations can have well-designed strategies, clearly assigned KPIs and detailed execution plans, yet still experience slow progress. The measures may exist, but the rhythm of examining them, resolving constraints and adjusting execution may be weak.</a:t>
-            </a:r>
-          </a:p>
-          <a:p>
-            <a:r>
-              <a:t>2 — Four Consequences of Weak Review Discipline</a:t>
-            </a:r>
-          </a:p>
-          <a:p>
-            <a:r>
-              <a:t>When performance reviews become irregular or superficial, the organisation loses the discipline that keeps execution moving. Four predictable consequences emerge.</a:t>
-            </a:r>
-          </a:p>
-          <a:p>
-            <a:r>
-              <a:t>Consequence 01 — Early Warning Signals Are Missed</a:t>
-            </a:r>
-          </a:p>
-          <a:p>
-            <a:r>
-              <a:t>Execution problems usually begin with small deviations: a missed milestone, a growing bottleneck or a capability gap. In aviation, these are comparable to performance indications that require attention well before the aircraft reaches a critical decision point.</a:t>
-            </a:r>
-          </a:p>
-          <a:p>
-            <a:r>
-              <a:t>When leaders review performance too late, minor deviations become major delivery problems. The organisation loses valuable time to intervene.</a:t>
-            </a:r>
-          </a:p>
-          <a:p>
-            <a:r>
-              <a:t>Velocity impact: Corrections become slower, more expensive and more disruptive.</a:t>
-            </a:r>
-          </a:p>
-          <a:p>
-            <a:r>
-              <a:t>Facilitator prompt: "How long does it usually take your organisation to recognise and act on an execution problem? What happens to momentum during that delay?"</a:t>
-            </a:r>
-          </a:p>
-          <a:p>
-            <a:r>
-              <a:t>Consequence 02 — Accountability Gradually Weakens</a:t>
-            </a:r>
-          </a:p>
-          <a:p>
-            <a:r>
-              <a:t>In aviation, responsibilities and procedures remain active throughout the journey. The crew cannot treat the flight plan as an intention that no longer requires attention.</a:t>
-            </a:r>
-          </a:p>
-          <a:p>
-            <a:r>
-              <a:t>Similarly, KPIs lose their operational force when leaders stop discussing them. Owners begin to interpret the absence of review as reduced priority. Commitments remain documented, but the urgency to deliver fades.</a:t>
-            </a:r>
-          </a:p>
-          <a:p>
-            <a:r>
-              <a:t>Velocity impact: Follow-through weakens, decisions are delayed and delivery commitments begin to slip.</a:t>
-            </a:r>
-          </a:p>
-          <a:p>
-            <a:r>
-              <a:t>Facilitator prompt: "Which KPIs in your organisation are actively managed, and which are simply recorded on a scorecard?"</a:t>
-            </a:r>
-          </a:p>
-          <a:p>
-            <a:r>
-              <a:t>Consequence 03 — Organisational Learning Is Lost</a:t>
-            </a:r>
-          </a:p>
-          <a:p>
-            <a:r>
-              <a:t>Flight crews and airlines use operational data and post-flight reviews to understand deviations and improve future performance.</a:t>
-            </a:r>
-          </a:p>
-          <a:p>
-            <a:r>
-              <a:t>Organisations also generate learning through execution. Each review can reveal which methods are working, where dependencies are failing and what adjustments improve results. When reviews become reporting exercises, this knowledge is seldom translated into better decisions or routines.</a:t>
-            </a:r>
-          </a:p>
-          <a:p>
-            <a:r>
-              <a:t>Velocity impact: Teams repeat avoidable mistakes and execution capability improves slowly.</a:t>
-            </a:r>
-          </a:p>
-          <a:p>
-            <a:r>
-              <a:t>Facilitator prompt: "What have your performance reviews taught your organisation about how to improve execution over the past year?"</a:t>
-            </a:r>
-          </a:p>
-          <a:p>
-            <a:r>
-              <a:t>Consequence 04 — Leadership Credibility Erodes</a:t>
-            </a:r>
-          </a:p>
-          <a:p>
-            <a:r>
-              <a:t>A flight plan is credible because the crew actively manages the journey against it. Every stage requires attention to the destination, operating conditions and agreed procedures.</a:t>
-            </a:r>
-          </a:p>
-          <a:p>
-            <a:r>
-              <a:t>Strategic commitments work similarly. When leaders announce priorities but rarely return to them in performance discussions, teams learn that the organisation's stated ambitions do not consistently shape management attention.</a:t>
-            </a:r>
-          </a:p>
-          <a:p>
-            <a:r>
-              <a:t>Velocity impact: Strategic urgency declines, cross-functional commitment weakens and execution loses collective momentum.</a:t>
-            </a:r>
-          </a:p>
-          <a:p>
-            <a:r>
-              <a:t>Facilitator prompt: "What do your teams learn about strategic priorities from what leadership consistently reviews?"</a:t>
+              <a:rPr b="1"/>
+              <a:t>HOW TO TEACH IT:</a:t>
             </a:r>
           </a:p>
           <a:p/>
+          <a:p>
+            <a:r>
+              <a:rPr b="1"/>
+              <a:t>1. Open with the flight.</a:t>
+            </a:r>
+          </a:p>
+          <a:p>
+            <a:r>
+              <a:t>Ask: "What determines the velocity of a flight?"</a:t>
+            </a:r>
+          </a:p>
+          <a:p>
+            <a:r>
+              <a:t>Say: "An aircraft's progress depends on continuously interpreting evidence and acting at the right time. A changing wind, a fuel concern, a missed altitude restriction or an unstable approach each calls for a different decision. These decisions cannot all be deferred until landing. By then, the opportunity to respond to an earlier condition may have passed. The same principle applies to strategy execution."</a:t>
+            </a:r>
+          </a:p>
           <a:p/>
           <a:p>
             <a:r>
-              <a:t>PEOPLE PERFORMANCE AND ORGANISATIONAL PERFORMANCE IN EACH CONSEQUENCE:</a:t>
+              <a:rPr b="1"/>
+              <a:t>2. Teach execution velocity.</a:t>
+            </a:r>
+          </a:p>
+          <a:p>
+            <a:r>
+              <a:t>Say: "Execution velocity is the rate at which an organisation converts strategic intent into measurable results. That rate is shaped by how quickly leaders detect progress or deviation, understand its causes, make decisions and translate those decisions into action. Performance measurement provides the evidence. Review discipline converts that evidence into timely decisions.</a:t>
+            </a:r>
+          </a:p>
+          <a:p>
+            <a:r>
+              <a:t>This is why organisations can have well-designed strategies, clearly assigned KPIs and detailed execution plans, and still experience slow progress. The measures may exist, and the rhythm of examining them, resolving constraints and adjusting execution may be weak."</a:t>
+            </a:r>
+          </a:p>
+          <a:p>
+            <a:r>
+              <a:t>Say: "When performance reviews occur inconsistently or superficially, four predictable consequences emerge. Take them as one chain."</a:t>
             </a:r>
           </a:p>
           <a:p/>
           <a:p>
             <a:r>
-              <a:t>01 · Early Warning Signals Are Missed</a:t>
-            </a:r>
-          </a:p>
-          <a:p>
-            <a:r>
-              <a:t>People performance: early warnings in people performance show in the review conversation before they show in the KPI. Three patterns recur. The quality of evidence falls: results give way to explanations, and percentages arrive without the evidence behind them. Alignment drifts: the individual who rated alignment at 9 when the target was agreed now gives short, guarded answers about the target, and no one asks the alignment question again. Effort migrates: the individual's time moves to work that senior leaders ask about, and the KPI receives what is left. Each pattern leads a missed KPI by weeks. A leader who reviews monthly sees it as a trend across two or three conversations; a leader who reviews at quarter end sees the result alone. The difference is the recovery available: a capability gap seen in week four can be met with coaching; the same gap seen in week twelve leaves a revised target.</a:t>
-            </a:r>
-          </a:p>
-          <a:p>
-            <a:r>
-              <a:t>Organisational performance: an early warning in organisational performance is evidence that an organisational condition has started to weaken in its support for the individuals' tasks. It seldom carries a number of its own, so the review sees it only when it asks for it.</a:t>
-            </a:r>
-          </a:p>
-          <a:p>
-            <a:r>
-              <a:t>Resources · workforce capacity. A contact centre carries a customer-retention Key Result. Two agents resign and their posts stay open for a quarter. The remaining team covers the volume through overtime, and resolution times hold for six weeks, then fall sharply as absenteeism rises. The vacancy and the overtime were on record weeks before the KPI moved.</a:t>
-            </a:r>
-          </a:p>
-          <a:p>
-            <a:r>
-              <a:t>Environment · psychological safety. In a function where raising a problem in front of senior leaders has carried a cost, team leads report amber milestones as green. The review sees on-track ratings until a milestone is missed. The warning was there all along: months without a single amber rating.</a:t>
-            </a:r>
-          </a:p>
-          <a:p>
-            <a:r>
-              <a:t>Systems · data integrity. Sales, operations and finance each report from their own platform, and every cross-functional figure is consolidated by hand. The executive review works on information a week old, and a slipping delivery reaches the review after customers have already escalated it.</a:t>
-            </a:r>
-          </a:p>
-          <a:p>
-            <a:r>
-              <a:t>Measures or evidence of readiness for each condition give these signals a place in the review. When the review does not ask for them, the condition shows itself through the KPI it was meant to support.</a:t>
+              <a:rPr b="1"/>
+              <a:t>3. Consequence 01 · Early Warning Signals Are Missed.</a:t>
+            </a:r>
+          </a:p>
+          <a:p>
+            <a:r>
+              <a:t>Say: "Execution rarely collapses suddenly. Deterioration begins with small indicators: a milestone that slips by a few days, a process bottleneck beginning to slow delivery, a capability gap emerging in one team, a dependency between functions that introduces unexpected delays. These signals often appear months before the final KPI target is at risk. If leaders are not regularly examining performance evidence, the signals remain invisible, and by the end of the reporting period the opportunity for early intervention has gone."</a:t>
+            </a:r>
+          </a:p>
+          <a:p>
+            <a:r>
+              <a:t>People performance, say: "Early warnings in people performance show in the review conversation before they show in the KPI. Three patterns recur. The quality of evidence falls: results give way to explanations, and percentages arrive without the evidence behind them. Alignment drifts: the individual who rated alignment at 9 when the target was agreed now gives short, guarded answers, and no one asks the alignment question again. Effort migrates: the individual's time moves to work that senior leaders ask about, and the KPI receives what is left. Each pattern leads a missed KPI by weeks. A capability gap seen in week four can be met with coaching; the same gap seen in week twelve leaves a revised target."</a:t>
+            </a:r>
+          </a:p>
+          <a:p>
+            <a:r>
+              <a:t>Give the people examples: Workforce capacity. A contact centre carries a customer-retention Key Result. Two agents resign and their posts stay open for a quarter. The team covers the volume through overtime, resolution times hold for six weeks, then fall sharply as absenteeism rises. The vacancy and the overtime were on record weeks before the KPI moved. Psychological safety. Where raising a problem in front of senior leaders has carried a cost, team leads report amber milestones as green. The warning was there all along: months without a single amber rating.</a:t>
+            </a:r>
+          </a:p>
+          <a:p>
+            <a:r>
+              <a:t>Organisational performance, say: "An early warning in organisational performance is evidence that a condition has started to weaken in its support for the individuals' tasks. It seldom carries a number of its own, so the review sees it only when it asks for it."</a:t>
+            </a:r>
+          </a:p>
+          <a:p>
+            <a:r>
+              <a:t>Give the organisational examples: Systems · Integration. Sales, operations and finance each report from their own platform, and every cross-functional figure is consolidated by hand. The executive review works on information a week old, and a slipping delivery reaches the review after customers have escalated it. Environment · Infrastructure. Power outages at the main depot rise from one a month to one a week. Dispatch holds on backup generators until fuel costs exceed the budget; the outage log showed the trend weeks before the delivery KPI moved.</a:t>
+            </a:r>
+          </a:p>
+          <a:p>
+            <a:r>
+              <a:t>Say: "Measures or evidence of readiness for each condition give these signals a place in the review."</a:t>
+            </a:r>
+          </a:p>
+          <a:p>
+            <a:r>
+              <a:t>Ask: "In your experience, what is the typical lag between when a performance problem begins and when leadership acts? What would closing that lag by half be worth to your organisation?"</a:t>
             </a:r>
           </a:p>
           <a:p/>
           <a:p>
             <a:r>
-              <a:t>02 · Gradual Diffusion of Accountability</a:t>
-            </a:r>
-          </a:p>
-          <a:p>
-            <a:r>
-              <a:t>People performance: individuals read priority from the review agenda. When a KPI is absent from three reviews in a row, the conclusion is reasonable: leadership attention has moved. Accountability then weakens in three ways. The KPI is managed for appearance: updates are written to reassure, and risks are held until they can no longer be hidden. Ownership of a shared KPI spreads thin: each individual assumes another is carrying the result, and the dependencies between them belong to no one. The commitment loses its force: the commitment given when the target was agreed has not been tested since. When the gap finally surfaces, the review becomes a search for who was responsible. The Accountability Loop cannot diagnose a commitment no one has been asked about.</a:t>
-            </a:r>
-          </a:p>
-          <a:p>
-            <a:r>
-              <a:t>Organisational performance: leaders make commitments on organisational conditions when targets are agreed. These commitments seldom appear on any scorecard, so they diffuse first.</a:t>
-            </a:r>
-          </a:p>
-          <a:p>
-            <a:r>
-              <a:t>Resources · capability alignment. A new procurement system is introduced with the promise that every buyer will be trained. Three months later half the buyers are untrained and purchase orders take twice as long. The buyers' cycle-time KPI is reviewed every month; the training commitment has never been raised.</a:t>
-            </a:r>
-          </a:p>
-          <a:p>
-            <a:r>
-              <a:t>Governance · clear accountability. A regional manager is accountable for a margin Key Result, yet every discount above a set level still needs head-office sign-off. The change to the delegation was approved in principle and never issued. The manager carries the accountability without the authority to deliver it.</a:t>
-            </a:r>
-          </a:p>
-          <a:p>
-            <a:r>
-              <a:t>Individuals remain held to their targets while the support they were promised quietly lapses. Mutual accountability becomes one-sided, and individuals protect themselves: they commit to less, document more and move from commitment to compliance.</a:t>
+              <a:rPr b="1"/>
+              <a:t>4. Consequence 02 · Gradual Diffusion of Accountability.</a:t>
+            </a:r>
+          </a:p>
+          <a:p>
+            <a:r>
+              <a:t>Say: "Accountability is sustained through visibility. When review conversations disappear or become irregular, the signal shifts. Targets remain on the scorecard and no longer appear in leadership dialogue. KPI owners read the absence of review as a sign that the target is no longer an active priority. The KPI quietly moves from operational to aspirational. People assume progress is happening somewhere in the system, and no one feels the immediate responsibility to make sure it is."</a:t>
+            </a:r>
+          </a:p>
+          <a:p>
+            <a:r>
+              <a:t>People performance, say: "Individuals read priority from the review agenda. When a KPI is absent from three reviews in a row, they conclude that leadership attention has moved. Accountability then weakens in three ways. The KPI is managed for appearance: updates are written to reassure, and risks are held until they can no longer be hidden. Ownership of a shared KPI spreads thin: each individual assumes another is carrying the result. The commitment loses its force: it has not been tested since the target was agreed. When the gap finally surfaces, the review becomes a search for who was responsible. The Accountability Loop cannot diagnose a commitment no one has been asked about."</a:t>
+            </a:r>
+          </a:p>
+          <a:p>
+            <a:r>
+              <a:t>Give the people example: Capability. A new procurement system is introduced with the promise that every buyer will be trained. Three months later half the buyers are untrained and purchase orders take twice as long. The buyers' cycle-time KPI is reviewed every month; the training commitment has never been raised.</a:t>
+            </a:r>
+          </a:p>
+          <a:p>
+            <a:r>
+              <a:t>Organisational performance, say: "Leaders make commitments on organisational conditions when targets are agreed. These commitments seldom appear on any scorecard, so they diffuse first."</a:t>
+            </a:r>
+          </a:p>
+          <a:p>
+            <a:r>
+              <a:t>Give the organisational examples: Governance · Authority. A regional manager is accountable for a margin Key Result, and every discount above a set level still needs head-office sign-off. The change to the delegation was approved in principle and never issued. Resources · Investment. The upgrade budget for the delivery fleet is approved in the plan and never released. The fleet-availability commitment is reported as on track every month until the vehicles are needed.</a:t>
+            </a:r>
+          </a:p>
+          <a:p>
+            <a:r>
+              <a:t>Say: "Individuals remain held to their targets while the support they were promised quietly lapses. Mutual accountability becomes one-sided, and individuals protect themselves: they commit to less, document more and move from commitment to compliance."</a:t>
+            </a:r>
+          </a:p>
+          <a:p>
+            <a:r>
+              <a:t>Ask: "Which KPIs in your current scorecard are operational, and which have quietly become aspirational? What made the difference?"</a:t>
             </a:r>
           </a:p>
           <a:p/>
           <a:p>
             <a:r>
-              <a:t>03 · Loss of Organisational Learning</a:t>
-            </a:r>
-          </a:p>
-          <a:p>
-            <a:r>
-              <a:t>People performance: every review produces evidence on how results are achieved, and that evidence is the raw material of the organisation's performance capability. Practices that accelerate progress: one regional team meets its targets because its manager runs a short daily huddle on the Key Result. Recorded and examined, the practice can be taught to other teams. Unexamined, it stays one manager's habit and leaves when that manager leaves. Capability gaps that recur: when the same skill gap appears in reviews across several functions, it signals a development need at enterprise level. Behaviours that strengthen ownership: reviews show which leaders' teams surface problems early and which conceal them. When reviews only record results, talent decisions, development plans and succession rest on ratings with no evidence of how the results were achieved. The organisation keeps rewarding outcomes it cannot reproduce.</a:t>
-            </a:r>
-          </a:p>
-          <a:p>
-            <a:r>
-              <a:t>Organisational performance: reviews also show how the organisational conditions behave as the strategy places weight on them. The learning is cumulative: the same constraint appearing in several reviews is evidence that a condition is not yet equal to the strategy.</a:t>
-            </a:r>
-          </a:p>
-          <a:p>
-            <a:r>
-              <a:t>Systems · process clarity. Three functions each report delays at the handover between sales order and dispatch. Reviewed function by function, each delay looks local. Reviewed together, they show one handover that no one is responsible for.</a:t>
-            </a:r>
-          </a:p>
-          <a:p>
-            <a:r>
-              <a:t>Resources · financial support. For two years running, the budget for strategic initiatives is released in the second quarter, and each year the initiatives deliver in the second half alone. The pattern becomes visible only when reviews are compared across cycles.</a:t>
-            </a:r>
-          </a:p>
-          <a:p>
-            <a:r>
-              <a:t>Governance · decision authority. Capital requests above a set value wait a month on average for an executive decision, and every Key Result that depends on one slips by about the same margin.</a:t>
-            </a:r>
-          </a:p>
-          <a:p>
-            <a:r>
-              <a:t>When reviews do not capture this learning, the organisation sets its next strategy on the same conditions. Targets rise, the conditions stay where they were, and the same constraints slow execution again. This learning is the evidence the executive team needs to judge whether the organisation can carry its next level of ambition.</a:t>
+              <a:rPr b="1"/>
+              <a:t>5. Consequence 03 · Loss of Organisational Learning.</a:t>
+            </a:r>
+          </a:p>
+          <a:p>
+            <a:r>
+              <a:t>Say: "Every review conversation holds insight about which approaches accelerate progress, where friction exists and which dependencies are working. When reviews are reduced to occasional reporting, results are recorded and the organisation never pauses to understand why they occurred. Without reflection, improvement becomes accidental. Execution capability stagnates even as strategic ambition grows."</a:t>
+            </a:r>
+          </a:p>
+          <a:p>
+            <a:r>
+              <a:t>People performance, say: "Every review produces evidence on how results are achieved: practices that accelerate progress, capability gaps that recur, behaviours that strengthen ownership. One regional team meets its targets because its manager runs a short daily huddle on the Key Result. Recorded and examined, the practice can be taught to other teams. Unexamined, it stays one manager's habit and leaves when that manager leaves. When reviews only record results, talent decisions and succession rest on ratings with no evidence of how results were achieved, and the organisation keeps rewarding outcomes it cannot reproduce."</a:t>
+            </a:r>
+          </a:p>
+          <a:p>
+            <a:r>
+              <a:t>Organisational performance, say: "Reviews also show how the conditions behave as the strategy places weight on them. The same constraint appearing in several reviews is evidence that a condition is not yet equal to the strategy."</a:t>
+            </a:r>
+          </a:p>
+          <a:p>
+            <a:r>
+              <a:t>Give the organisational examples: Systems · Integration. Three functions each report delays at the handover between sales order and dispatch. Reviewed one by one, each delay looks local; reviewed together, they show one handover no one is responsible for. Resources · Investment. For two years running, the budget for strategic initiatives is released in the second quarter, and the initiatives deliver in the second half alone. Governance · Authority. Capital requests above a set value wait a month on average for a decision, and every Key Result that depends on one slips by about the same margin.</a:t>
+            </a:r>
+          </a:p>
+          <a:p>
+            <a:r>
+              <a:t>Say: "When reviews do not capture this learning, the next strategy is set on the same conditions. Targets rise, the conditions stay where they were, and the same constraints slow execution again."</a:t>
+            </a:r>
+          </a:p>
+          <a:p>
+            <a:r>
+              <a:t>Ask: "What does your organisation know now about how execution works inside your system that it did not know eighteen months ago? If the answer is 'not much', that is a review discipline signal."</a:t>
             </a:r>
           </a:p>
           <a:p/>
           <a:p>
             <a:r>
-              <a:t>04 · Erodes Leadership Credibility</a:t>
-            </a:r>
-          </a:p>
-          <a:p>
-            <a:r>
-              <a:t>People performance: credibility is built in the review. A leader who asks for evidence every month, recognises progress and addresses shortfalls consistently shows that the priority is real. Two patterns erode it. Priorities that fade: a strategic KPI launched with energy disappears from the review agenda, and individuals conclude the announcement was symbolic. High performers, who invest most in strategic commitments, become the most sceptical, and the organisation learns to wait and see whether a priority survives its first quarter. Standards applied unevenly: some individuals' KPIs are examined closely while others are excused, often by seniority. Individuals read this as unfairness, and commitment falls across the whole team.</a:t>
-            </a:r>
-          </a:p>
-          <a:p>
-            <a:r>
-              <a:t>Organisational performance: leaders make commitments when they agree organisational conditions, and individuals track these closely because their own delivery depends on them. Credibility in organisational performance is a test of fairness.</a:t>
-            </a:r>
-          </a:p>
-          <a:p>
-            <a:r>
-              <a:t>Environment · values and consequences. The organisation states accountability as a value. A junior manager is challenged in the review for a missed milestone, while a senior executive's missed commitment to release staff for the same project is never raised.</a:t>
-            </a:r>
-          </a:p>
-          <a:p>
-            <a:r>
-              <a:t>Environment · psychological safety. Leaders invite open reporting of risks, and the first person to raise a delivery risk in a review is questioned in front of peers. From then on, risks reach the review late.</a:t>
-            </a:r>
-          </a:p>
-          <a:p>
-            <a:r>
-              <a:t>Governance · execution oversight. The executive team commits to a monthly decision forum to clear constraints, then postpones it twice in one quarter while the decisions wait.</a:t>
-            </a:r>
-          </a:p>
-          <a:p>
-            <a:r>
-              <a:t>When leaders review individuals' targets and leave their own commitments unreviewed, individuals see accountability running one way. Reviewing both, to the same evidence standard, shows that leaders hold themselves to the standard they set for others.</a:t>
+              <a:rPr b="1"/>
+              <a:t>6. Consequence 04 · Erodes Leadership Credibility.</a:t>
+            </a:r>
+          </a:p>
+          <a:p>
+            <a:r>
+              <a:t>Say: "When leaders set ambitious targets and announce priorities, they create an expectation that those priorities will stay visible in the leadership conversation. If they are not revisited, a message spreads: the announcement was more symbolic than operational. Teams become less attentive to new commitments because they have learned that priorities quietly fade. Consistent reviews show that strategic priorities are ongoing leadership commitments."</a:t>
+            </a:r>
+          </a:p>
+          <a:p>
+            <a:r>
+              <a:t>People performance, say: "Credibility is built in the review. Two patterns erode it. Priorities that fade: a strategic KPI launched with energy disappears from the agenda, and high performers, who invest most in strategic commitments, become the most sceptical. Standards applied unevenly: some individuals' KPIs are examined closely while others are excused, often by seniority, and commitment falls across the whole team."</a:t>
+            </a:r>
+          </a:p>
+          <a:p>
+            <a:r>
+              <a:t>Give the people examples: Values and consequences. A junior manager is challenged in the review for a missed milestone, while a senior executive's missed commitment to release staff for the same project is never raised. Psychological safety. The first person to raise a delivery risk in a review is questioned in front of peers. From then on, risks reach the review late.</a:t>
+            </a:r>
+          </a:p>
+          <a:p>
+            <a:r>
+              <a:t>Organisational performance, say: "Individuals track leaders' commitments on the conditions closely, because their own delivery depends on them. Credibility in organisational performance is a test of fairness."</a:t>
+            </a:r>
+          </a:p>
+          <a:p>
+            <a:r>
+              <a:t>Give the organisational examples: Governance · Risk Management. The executive team commits to a monthly decision forum to clear constraints, then postpones it twice in one quarter while the decisions wait. Governance · Policies &amp; Procedures. The review procedure requires evidence for every individual KPI and none for the organisational conditions, so a failed condition never reaches the agenda.</a:t>
+            </a:r>
+          </a:p>
+          <a:p>
+            <a:r>
+              <a:t>Say: "Reviewing both sides to the same evidence standard shows that leaders hold themselves to the standard they set for others."</a:t>
+            </a:r>
+          </a:p>
+          <a:p>
+            <a:r>
+              <a:t>Ask: "What is the current level of strategic commitment in your organisation? How much of it is shaped by what leaders consistently review, and how much by what they announce?"</a:t>
             </a:r>
           </a:p>
           <a:p/>
           <a:p>
             <a:r>
+              <a:rPr b="1"/>
+              <a:t>7. Bridge to the reflection.</a:t>
+            </a:r>
+          </a:p>
+          <a:p>
+            <a:r>
+              <a:t>Say: "Review discipline sustains execution momentum. When it weakens, warning signals, accountability, learning and credibility weaken with it."</a:t>
+            </a:r>
+          </a:p>
+          <a:p/>
+          <a:p>
+            <a:r>
+              <a:rPr b="1"/>
               <a:t>ON THE PORTAL, AFTER THE TEACHING:</a:t>
             </a:r>
           </a:p>
           <a:p>
             <a:r>
-              <a:t>Participants write the reflection at the foot of part 2.1: where they have seen the velocity gap in their own setting, the point where it opened (detecting the deviation, understanding its cause, making the decision or translating it into action), the consequence that followed and what the delay cost.</a:t>
+              <a:t>Participants write the reflection at the foot of part 2.1: where they have seen the velocity gap in their own setting, the point where it opened, the consequence that followed, what the delay cost and whether an organisational condition played a part.</a:t>
             </a:r>
           </a:p>
         </p:txBody>
@@ -813,6 +839,7 @@
           <a:lstStyle/>
           <a:p>
             <a:r>
+              <a:rPr b="1"/>
               <a:t>SECTION 3 · EXTRAPOLATING — WHERE</a:t>
             </a:r>
           </a:p>
@@ -824,6 +851,30 @@
           <a:p/>
           <a:p>
             <a:r>
+              <a:rPr b="1"/>
+              <a:t>HOW THIS SECTION RUNS:</a:t>
+            </a:r>
+          </a:p>
+          <a:p>
+            <a:r>
+              <a:t>1. 3.1 Four fractures in performance measurement, each with its implication for people performance and organisational performance.</a:t>
+            </a:r>
+          </a:p>
+          <a:p>
+            <a:r>
+              <a:t>2. 3.2 The CXO performance gap contributors: which executive roles most often feed each fracture.</a:t>
+            </a:r>
+          </a:p>
+          <a:p>
+            <a:r>
+              <a:rPr b="1"/>
+              <a:t>3. The Section 3 Reflections slide.</a:t>
+            </a:r>
+          </a:p>
+          <a:p/>
+          <a:p>
+            <a:r>
+              <a:rPr b="1"/>
               <a:t>SECTION LEARNING OUTCOMES:</a:t>
             </a:r>
           </a:p>
@@ -834,62 +885,50 @@
           </a:p>
           <a:p>
             <a:r>
-              <a:t>2. Prioritise corrective action against the organisation’s most consequential measurement breakdown.</a:t>
+              <a:t>2. Prioritise corrective action against the organisation's most consequential measurement breakdown.</a:t>
             </a:r>
           </a:p>
           <a:p/>
           <a:p>
             <a:r>
+              <a:rPr b="1"/>
               <a:t>HOW TO OPEN THE SECTION:</a:t>
             </a:r>
           </a:p>
           <a:p/>
           <a:p>
             <a:r>
-              <a:t>1. Give the provocation.</a:t>
-            </a:r>
-          </a:p>
-          <a:p>
-            <a:r>
-              <a:t>Say: "Most modern organisations have agreed goals and KPIs, dashboards, reporting tools, and performance frameworks. The breakdown usually occurs in how leaders review and interpret the measurement together."</a:t>
+              <a:rPr b="1"/>
+              <a:t>1. Give the observation.</a:t>
+            </a:r>
+          </a:p>
+          <a:p>
+            <a:r>
+              <a:t>Say: "Most modern organisations have agreed goals and KPIs, dashboards, reporting tools and performance frameworks. The breakdown usually occurs in how leaders review and interpret the measurement together."</a:t>
             </a:r>
           </a:p>
           <a:p/>
           <a:p>
             <a:r>
+              <a:rPr b="1"/>
               <a:t>2. Say what the section holds.</a:t>
             </a:r>
           </a:p>
           <a:p>
             <a:r>
-              <a:t>Say: "Part 3.1 gives the four gaps. Part 3.2 shows which executive roles most often feed each gap."</a:t>
+              <a:t>Say: "Part 3.1 gives the four fractures. Part 3.2 shows which executive roles most often feed each one."</a:t>
             </a:r>
           </a:p>
           <a:p/>
           <a:p>
             <a:r>
+              <a:rPr b="1"/>
               <a:t>3. Name the question that runs through it.</a:t>
             </a:r>
           </a:p>
           <a:p>
             <a:r>
-              <a:t>Say: "The question for this section is: Is the chain of execution across our functions holding together?"</a:t>
-            </a:r>
-          </a:p>
-          <a:p/>
-          <a:p>
-            <a:r>
-              <a:t>TEACHING NOTES FROM THE FACILITATOR GUIDE:</a:t>
-            </a:r>
-          </a:p>
-          <a:p>
-            <a:r>
-              <a:t>3.1 · Four Fractures in Performance Measurement. Teach the four gaps as observable patterns and invite participants to place their organisation honestly on each one, each with its implication for people performance and for organisational performance. The Horizontal Coordination Gap is typically the most impactful but least visible: each function may report strong progress while the enterprise outcome remains inconsistent. The Learning Suppression Gap is often the most culturally embedded and the hardest to shift, because it requires leaders to move from a judgement posture to a curiosity posture.</a:t>
-            </a:r>
-          </a:p>
-          <a:p>
-            <a:r>
-              <a:t>3.2 · The CXO Performance Gap Contributors. Teach the logic of the cards first: how the role reviews performance (its meetings and its evidence), what the role does in those reviews, and what happens as a result, which opens one of the four fractures of part 3.1. Then take each participant's own role first and the two roles closest to it. Participants complete the reflection on the fracture they are most prone to as Portfolio work.</a:t>
+              <a:t>Say: "The question for this section is: is the chain of execution across our functions holding together?"</a:t>
             </a:r>
           </a:p>
         </p:txBody>
@@ -975,338 +1014,229 @@
           <a:lstStyle/>
           <a:p>
             <a:r>
+              <a:rPr b="1"/>
               <a:t>3.1 — FOUR FRACTURES IN PERFORMANCE MEASUREMENT</a:t>
             </a:r>
           </a:p>
           <a:p/>
           <a:p>
             <a:r>
-              <a:t>Content:</a:t>
-            </a:r>
-          </a:p>
-          <a:p>
-            <a:r>
-              <a:t>Performance measurement is ultimately a leadership conversation discipline. When that discipline weakens, several predictable fractures appear across the organisation. Select each gap below to examine where it occurs and what it costs.</a:t>
-            </a:r>
-          </a:p>
-          <a:p>
-            <a:r>
-              <a:t>Gap 01</a:t>
-            </a:r>
-          </a:p>
-          <a:p>
-            <a:r>
-              <a:t>The Horizontal Coordination Gap</a:t>
-            </a:r>
-          </a:p>
-          <a:p>
-            <a:r>
-              <a:t>One of the most common breakdowns occurs when performance reviews happen inside functions, with no cross-functional view. Each department reviews its KPIs independently. Finance examines financial indicators. Operations reviews throughput. Marketing examines campaign performance. Individually, these conversations may be rigorous and technically sound.</a:t>
-            </a:r>
-          </a:p>
-          <a:p>
-            <a:r>
-              <a:t>But strategy execution rarely moves through a single function. Enterprise outcomes depend on interdependent execution across multiple functions. When performance reviews remain confined within functional boundaries, leaders see partial performance signals and miss the full execution pattern. Each function may report strong progress while the overall strategic outcome remains inconsistent.</a:t>
-            </a:r>
-          </a:p>
-          <a:p>
-            <a:r>
-              <a:t>The leadership team, acting as the collective intelligence for execution discipline, closes this gap by introducing periodic cross-functional performance reviews where the executive team collectively examines how the KPIs across functions interact to produce enterprise outcomes.</a:t>
-            </a:r>
-          </a:p>
-          <a:p>
-            <a:r>
-              <a:t>Facilitator question: “Name a strategic outcome in your organisation that required three or more functions to execute successfully. Where did the handoffs break down — and would a cross-functional review have caught it earlier?”</a:t>
-            </a:r>
-          </a:p>
-          <a:p>
-            <a:r>
-              <a:t>Gap 02</a:t>
-            </a:r>
-          </a:p>
-          <a:p>
-            <a:r>
-              <a:t>The Evidence Quality Gap</a:t>
-            </a:r>
-          </a:p>
-          <a:p>
-            <a:r>
-              <a:t>Performance measurement loses power when review conversations rely on weak or inconsistent evidence. In some cases KPI owners present narrative explanations with no verifiable indicators. In others, the evidence reflects activity alone, with no evidence of progress toward the outcome. Sometimes information arrives too late to support timely decisions.</a:t>
-            </a:r>
-          </a:p>
-          <a:p>
-            <a:r>
-              <a:t>When evidence quality declines, review conversations shift away from execution insight and toward interpretation debates. Leaders begin discussing whether the data can be trusted, and the review loses sight of what the data reveals about progress. Over time, the credibility of the performance system weakens.</a:t>
-            </a:r>
-          </a:p>
-          <a:p>
-            <a:r>
-              <a:t>Closing this gap requires the leadership team, acting as the collective intelligence for execution discipline, to reinforce a simple but powerful principle: every performance review must be anchored in verifiable evidence that shows observable movement toward the outcome, is timely enough to inform decisions, and is clearly connected to the KPI, target, or Key Result being assessed.</a:t>
-            </a:r>
-          </a:p>
-          <a:p>
-            <a:r>
-              <a:t>Facilitator question: “In your last performance review, what percentage of the conversation was spent debating the data versus acting on it? That ratio is a proxy for your evidence quality gap.”</a:t>
-            </a:r>
-          </a:p>
-          <a:p>
-            <a:r>
-              <a:t>Gap 03</a:t>
-            </a:r>
-          </a:p>
-          <a:p>
-            <a:r>
-              <a:t>The Review Rhythm Breakdown</a:t>
-            </a:r>
-          </a:p>
-          <a:p>
-            <a:r>
-              <a:t>Even well-designed performance systems weaken if the organisation does not maintain a consistent rhythm of review conversations. Strategy execution unfolds over time. Progress appears gradually through incremental movement across weeks and months. If review conversations occur too infrequently, leaders lose visibility into the trajectory of that movement. Small deviations accumulate unnoticed until they become significant performance gaps.</a:t>
-            </a:r>
-          </a:p>
-          <a:p>
-            <a:r>
-              <a:t>Irregular review cycles also weaken behavioural discipline. KPI owners begin to treat measurement as a reporting event.</a:t>
-            </a:r>
-          </a:p>
-          <a:p>
-            <a:r>
-              <a:t>Healthy performance measurement requires a predictable organisational rhythm. Leaders know when reviews will occur. KPI owners know when evidence must be prepared. Teams expect progress to be examined regularly. This rhythm creates a cultural signal: execution progress is observed continuously.</a:t>
-            </a:r>
-          </a:p>
-          <a:p>
-            <a:r>
-              <a:t>Facilitator question: “How predictable is your organisation’s review rhythm? If a KPI owner was asked to describe the review schedule without referring to a calendar, could they?”</a:t>
-            </a:r>
-          </a:p>
-          <a:p>
-            <a:r>
-              <a:t>Gap 04</a:t>
-            </a:r>
-          </a:p>
-          <a:p>
-            <a:r>
-              <a:t>The Learning Suppression Gap</a:t>
-            </a:r>
-          </a:p>
-          <a:p>
-            <a:r>
-              <a:t>A subtle but corrosive breakdown appears when performance reviews focus exclusively on evaluation. If review conversations concentrate only on whether targets were achieved, teams often become cautious about discussing obstacles openly. People instinctively defend results and leave the deeper causes unexplored. This dynamic suppresses organisational learning.</a:t>
-            </a:r>
-          </a:p>
-          <a:p>
-            <a:r>
-              <a:t>Yet strategy execution is inherently experimental. Organisations are constantly discovering what works, where friction exists, and how coordination across functions actually unfolds. Healthy performance reviews therefore balance accountability with curiosity. Leaders examine evidence rigorously, yet they also explore what the organisation is learning from execution patterns.</a:t>
-            </a:r>
-          </a:p>
-          <a:p>
-            <a:r>
-              <a:t>Questions shift from “Why was the target missed?” to “What is the system teaching us about how execution actually works?” When this learning dimension becomes part of review conversations, performance measurement evolves from a scoring mechanism into a capability-building system.</a:t>
-            </a:r>
-          </a:p>
-          <a:p>
-            <a:r>
-              <a:t>Facilitator question: “What is the dominant mood in your organisation’s performance review meetings — defence or curiosity? What would shift it?”</a:t>
+              <a:rPr b="1"/>
+              <a:t>HOW TO TEACH IT:</a:t>
             </a:r>
           </a:p>
           <a:p/>
           <a:p>
             <a:r>
-              <a:t>Source detail (S2R® manuscript):</a:t>
+              <a:rPr b="1"/>
+              <a:t>1. Frame the fractures.</a:t>
+            </a:r>
+          </a:p>
+          <a:p>
+            <a:r>
+              <a:t>Say: "Performance measurement is ultimately a leadership conversation discipline. When that discipline weakens, four predictable fractures appear across the organisation. Take them as observable patterns, and place your own organisation honestly on each."</a:t>
             </a:r>
           </a:p>
           <a:p/>
           <a:p>
             <a:r>
-              <a:t>Further detail for each gap:</a:t>
-            </a:r>
-          </a:p>
-          <a:p>
-            <a:r>
-              <a:t>Gap 01 · Horizontal Coordination: In the functional reviews, Technology evaluates system delivery. Customer experience depends on marketing promises, operational delivery, technology reliability, and service responsiveness. Revenue growth depends on sales capability, product readiness, pricing discipline, and operational fulfilment.</a:t>
-            </a:r>
-          </a:p>
-          <a:p>
-            <a:r>
-              <a:t>The cross-functional sessions sit alongside the functional reviews and serve a different purpose. The conversation shifts from “How is my function performing?” to “How is the execution system performing?” When leaders observe performance through this collective perspective, interdependencies become visible and coordination improves.</a:t>
-            </a:r>
-          </a:p>
-          <a:p>
-            <a:r>
-              <a:t>Gap 02 · Evidence Quality: When the evidence standard becomes consistent across functions, performance conversations regain their diagnostic power. Leaders spend less time debating data and more time improving execution.</a:t>
-            </a:r>
-          </a:p>
-          <a:p>
-            <a:r>
-              <a:t>Gap 03 · Review Rhythm Breakdown: Measurement is a continuous execution responsibility for KPI/KR owners. The leadership team, acting as the collective intelligence for execution discipline, protects the rhythm by ensuring that review conversations occur with the consistency required to detect early signals of drift.</a:t>
-            </a:r>
-          </a:p>
-          <a:p>
-            <a:r>
-              <a:t>Gap 04 · Learning Suppression: Over time the organisation becomes more effective at measuring performance and at improving how performance is produced.</a:t>
+              <a:rPr b="1"/>
+              <a:t>2. Gap 01 · The Horizontal Coordination Gap.</a:t>
+            </a:r>
+          </a:p>
+          <a:p>
+            <a:r>
+              <a:t>Say: "One of the most common breakdowns occurs when reviews happen inside functions, with no cross-functional view. Finance examines financial indicators. Operations reviews throughput. Marketing examines campaign performance. Each conversation may be rigorous. Strategy execution rarely moves through a single function, so leaders see partial signals and miss the full execution pattern. Each function may report strong progress while the enterprise outcome remains inconsistent. The leadership team, acting as the collective intelligence for execution discipline, closes this gap with periodic cross-functional reviews, where the executive team examines how the KPIs across functions interact to produce enterprise outcomes."</a:t>
+            </a:r>
+          </a:p>
+          <a:p>
+            <a:r>
+              <a:t>Add: "In those sessions the conversation moves from 'How is my function performing?' to 'How is the execution system performing?' Customer experience depends on marketing promises, operational delivery, technology reliability and service responsiveness; revenue growth depends on sales capability, product readiness, pricing discipline and operational fulfilment."</a:t>
+            </a:r>
+          </a:p>
+          <a:p>
+            <a:r>
+              <a:t>People performance, say: "Individuals are judged on the part of the result they control, and the hand-offs between functions are never examined. An operations planner meets every internal measure while customer orders wait at the boundary with sales. Individuals whose work depends on another function are held to results they cannot complete alone."</a:t>
+            </a:r>
+          </a:p>
+          <a:p>
+            <a:r>
+              <a:t>Organisational performance, say: "The conditions that span functions fall between the reviews."</a:t>
+            </a:r>
+          </a:p>
+          <a:p>
+            <a:r>
+              <a:t>Give the examples: Systems · Integration. The order-to-cash process runs through sales, credit control, the warehouse and finance. Each reviews its own step and reports it on time; no review sees the end-to-end cycle, where the customer experiences the delay. Governance · Authority. A non-standard contract needs approval from legal, finance and operations. Each reports its turnaround as acceptable; end to end, the decision takes three weeks, and the sales Key Result absorbs the wait.</a:t>
+            </a:r>
+          </a:p>
+          <a:p>
+            <a:r>
+              <a:t>Say: "This gap is typically the most impactful and the least visible."</a:t>
+            </a:r>
+          </a:p>
+          <a:p>
+            <a:r>
+              <a:t>Ask: "Name a strategic outcome in your organisation that required three or more functions to execute. Where did the handoffs break down, and would a cross-functional review have caught it earlier?"</a:t>
             </a:r>
           </a:p>
           <a:p/>
           <a:p>
             <a:r>
-              <a:t>IMPLICATIONS FOR PEOPLE PERFORMANCE AND FOR ORGANISATIONAL PERFORMANCE:</a:t>
+              <a:rPr b="1"/>
+              <a:t>3. Gap 02 · The Evidence Quality Gap.</a:t>
+            </a:r>
+          </a:p>
+          <a:p>
+            <a:r>
+              <a:t>Say: "Measurement loses power when reviews rely on weak or inconsistent evidence: narrative with no verifiable indicators, evidence of activity with no evidence of progress, or information that arrives too late to support decisions. Reviews then shift to interpretation debates, and leaders discuss whether the data can be trusted. The principle that closes this gap: every review is anchored in verifiable evidence that shows observable movement towards the outcome, is timely enough to inform decisions, and is clearly connected to the KPI, target or Key Result being assessed. When the evidence standard is consistent across functions, leaders spend less time debating data and more time improving execution."</a:t>
+            </a:r>
+          </a:p>
+          <a:p>
+            <a:r>
+              <a:t>People performance, say: "Strong performers cannot show what their contribution changed, and weak delivery stays hidden behind narrative. When the evidence offered is activity, such as training attended or meetings held, the review rates effort. Over time, individuals learn that the persuasive account is rewarded."</a:t>
+            </a:r>
+          </a:p>
+          <a:p>
+            <a:r>
+              <a:t>Give the people example: Workforce capacity. HR reports headcount at budget. The review does not see that a third of the roles in the unit carrying the Key Result are held by new staff still in training. The evidence that matters is productive capacity.</a:t>
+            </a:r>
+          </a:p>
+          <a:p>
+            <a:r>
+              <a:t>Organisational performance, say: "Most reviews hold no evidence at all on organisational conditions. Their state is asserted: the system is stable, the roles are filled, the budget is available."</a:t>
+            </a:r>
+          </a:p>
+          <a:p>
+            <a:r>
+              <a:t>Give the organisational examples: Environment · Technology. IT reports system availability at 99 per cent; the finance team reports that the month-end report takes three days to run. The first figure describes the system; the second describes whether it supports the tasks. Resources · Asset Availability. The asset register shows every delivery vehicle in service; a third are off the road awaiting parts.</a:t>
+            </a:r>
+          </a:p>
+          <a:p>
+            <a:r>
+              <a:t>Deepen, say: "The most corrosive pattern is the gap between advertised and actual performance: dashboards that look green with no results underneath. Make it safer to disclose a thin harvest than to perform a false one."</a:t>
+            </a:r>
+          </a:p>
+          <a:p>
+            <a:r>
+              <a:t>(Insight: Advertised and actual. Source: Journal, 27 May 2026 — Professional Insights: Culture)</a:t>
+            </a:r>
+          </a:p>
+          <a:p>
+            <a:r>
+              <a:t>Ask: "In your last performance review, what share of the conversation was spent debating the data, and what share acting on it? That ratio is a proxy for your evidence quality gap."</a:t>
             </a:r>
           </a:p>
           <a:p/>
           <a:p>
             <a:r>
-              <a:t>Gap 01 · The Horizontal Coordination Gap</a:t>
-            </a:r>
-          </a:p>
-          <a:p>
-            <a:r>
-              <a:t>People performance: when each function reviews its own KPIs, individuals are judged on the part of the result they control, and the hand-offs between functions are never examined. An operations planner meets every internal measure while customer orders wait at the boundary with sales. Individuals learn to optimise their own measure, and the commitments they made to other functions go unreviewed: no one is asked whether they delivered what another function needed from them. Individuals whose work depends on another function are held to results they cannot complete alone, and the review sees their shortfall without the dependency behind it.</a:t>
-            </a:r>
-          </a:p>
-          <a:p>
-            <a:r>
-              <a:t>Organisational performance: the organisational conditions that span functions fall between the reviews.</a:t>
-            </a:r>
-          </a:p>
-          <a:p>
-            <a:r>
-              <a:t>Systems · process clarity. The order-to-cash process runs through sales, credit control, the warehouse and finance. Each function reviews its own step and reports it on time. No review sees the end-to-end cycle, which is where the customer experiences the delay.</a:t>
-            </a:r>
-          </a:p>
-          <a:p>
-            <a:r>
-              <a:t>Governance · decision authority. A non-standard customer contract needs approval from legal, finance and operations. Each reports its own turnaround as acceptable; end to end, the decision takes three weeks, and the sales Key Result absorbs the wait.</a:t>
-            </a:r>
-          </a:p>
-          <a:p>
-            <a:r>
-              <a:t>The executive team sees each function's conditions as adequate while the conditions at the boundaries hold back the enterprise result.</a:t>
+              <a:rPr b="1"/>
+              <a:t>4. Gap 03 · The Review Rhythm Breakdown.</a:t>
+            </a:r>
+          </a:p>
+          <a:p>
+            <a:r>
+              <a:t>Say: "Even well-designed systems weaken without a consistent rhythm of review. Progress appears gradually across weeks and months. If reviews occur too infrequently, leaders lose sight of the trajectory, and small deviations accumulate into significant gaps. Irregular cycles also weaken behavioural discipline: KPI owners treat measurement as a reporting event. Healthy measurement has a predictable rhythm: leaders know when reviews occur, KPI owners know when evidence must be prepared, and teams expect progress to be examined regularly. Measurement is a continuous responsibility of the KPI and Key Result owners, and the leadership team protects the rhythm."</a:t>
+            </a:r>
+          </a:p>
+          <a:p>
+            <a:r>
+              <a:t>People performance, say: "The rhythm sets the individuals' planning horizon. Reviewed quarterly, people work in quarterly bursts. Reviewed irregularly, evidence is assembled in a hurry. The recoveries of the Accountability Loop need a rhythm short enough for coaching, development or structural change to take effect within the period."</a:t>
+            </a:r>
+          </a:p>
+          <a:p>
+            <a:r>
+              <a:t>Give the people example: Employee sustainability. Workload is seen through the annual engagement survey, so overload in a critical team shows first in resignations.</a:t>
+            </a:r>
+          </a:p>
+          <a:p>
+            <a:r>
+              <a:t>Organisational performance, say: "Conditions often have no rhythm of review at all; they reach the agenda when something fails."</a:t>
+            </a:r>
+          </a:p>
+          <a:p>
+            <a:r>
+              <a:t>Give the organisational examples: Governance · Authority. Capital and risk decisions follow the board calendar, so a decision a Key Result depends on can wait up to three months. Resources · Resource Utilisation. Budgets are reallocated only at the mid-year forecast; an initiative short of funds in its second month waits until its sixth.</a:t>
+            </a:r>
+          </a:p>
+          <a:p>
+            <a:r>
+              <a:t>Ask: "How predictable is your organisation's review rhythm? If a KPI owner were asked to describe the review schedule without a calendar, could they?"</a:t>
             </a:r>
           </a:p>
           <a:p/>
           <a:p>
             <a:r>
-              <a:t>Gap 02 · The Evidence Quality Gap</a:t>
-            </a:r>
-          </a:p>
-          <a:p>
-            <a:r>
-              <a:t>People performance: weak evidence harms individuals in two ways. Strong performers cannot show what their contribution changed, and weak delivery stays hidden behind narrative. When the evidence offered is activity, such as training attended or meetings held, the review rates effort. Ratings lose credibility with the individuals themselves, and the performance standard agreed at the start of the period loses its anchor. Over time, individuals learn that the persuasive account is rewarded.</a:t>
-            </a:r>
-          </a:p>
-          <a:p>
-            <a:r>
-              <a:t>Organisational performance: most reviews hold no evidence at all on organisational conditions. Their state is asserted: the system is stable, the roles are filled, the budget is available.</a:t>
-            </a:r>
-          </a:p>
-          <a:p>
-            <a:r>
-              <a:t>Resources · workforce capacity. HR reports headcount at budget. The review does not see that a third of the roles in the unit carrying the Key Result are held by new staff still in training. The evidence that matters is productive capacity: how many of those roles can carry the work today.</a:t>
-            </a:r>
-          </a:p>
-          <a:p>
-            <a:r>
-              <a:t>Systems · workflow visibility. IT reports system availability at 99 per cent. The finance team reports that the month-end report takes three days to run. The first figure describes the system; the second describes whether it supports the tasks.</a:t>
-            </a:r>
-          </a:p>
-          <a:p>
-            <a:r>
-              <a:t>With no evidence standard for the conditions, the review cannot tell whether they support the individuals' tasks, and the discussion settles on the individuals' numbers, the only evidence in the room.</a:t>
+              <a:rPr b="1"/>
+              <a:t>5. Gap 04 · The Learning Suppression Gap.</a:t>
+            </a:r>
+          </a:p>
+          <a:p>
+            <a:r>
+              <a:t>Say: "A subtle, corrosive breakdown appears when reviews focus only on evaluation. If the conversation concentrates on whether targets were achieved, teams become cautious about discussing obstacles, defend results and leave causes unexplored. Execution is inherently experimental, so healthy reviews balance accountability with curiosity. Questions shift from 'Why was the target missed?' to 'What is the system teaching us about how execution actually works?' Measurement then evolves from a scoring mechanism into a capability-building system."</a:t>
+            </a:r>
+          </a:p>
+          <a:p>
+            <a:r>
+              <a:t>Say: "This gap is often the most culturally embedded and the hardest to shift, because it asks leaders to move from a judgement posture to a curiosity posture."</a:t>
+            </a:r>
+          </a:p>
+          <a:p>
+            <a:r>
+              <a:t>People performance, say: "When reviews judge, individuals defend. They bring the explanation and hold back the obstacle, and next cycle they propose targets they are sure to meet. Learning moves into corridors."</a:t>
+            </a:r>
+          </a:p>
+          <a:p>
+            <a:r>
+              <a:t>Give the people example: Psychological safety. A team lead knows the approval process is the real constraint on the Key Result and does not say so, because the approval sits with the executive who chairs the review.</a:t>
+            </a:r>
+          </a:p>
+          <a:p>
+            <a:r>
+              <a:t>Organisational performance, say: "Suppression falls hardest on the conditions, because naming a condition often means naming a senior leader's area."</a:t>
+            </a:r>
+          </a:p>
+          <a:p>
+            <a:r>
+              <a:t>Give the organisational examples: Governance · Policies &amp; Procedures. Shortfalls in individual KPIs are examined closely, while a condition failure in a senior leader's area passes without examination. Governance · Risk Management. The risk register lists the approval process as a delivery risk, and no review has examined it since it was logged.</a:t>
+            </a:r>
+          </a:p>
+          <a:p>
+            <a:r>
+              <a:t>Deepen, say: "Formal systems can exist while actual behaviour contradicts their purpose. Strategic reviews should examine lived practice alongside formal compliance."</a:t>
+            </a:r>
+          </a:p>
+          <a:p>
+            <a:r>
+              <a:t>(Insight: Lived practice. Source: Journal, 8 September 2026 — Professional Insights: Strategy)</a:t>
+            </a:r>
+          </a:p>
+          <a:p>
+            <a:r>
+              <a:t>Ask: "What is the dominant mood in your organisation's performance review meetings: defence or curiosity? What would shift it?"</a:t>
             </a:r>
           </a:p>
           <a:p/>
           <a:p>
             <a:r>
-              <a:t>Gap 03 · The Review Rhythm Breakdown</a:t>
-            </a:r>
-          </a:p>
-          <a:p>
-            <a:r>
-              <a:t>People performance: the rhythm of review sets the individuals' planning horizon. Reviewed quarterly, individuals work in quarterly bursts: a slow start, a surge before the period closes and figures prepared for the review. Reviewed irregularly, evidence is assembled in a hurry and the conversation is spent reconstructing what happened. The recoveries of the Accountability Loop need a rhythm short enough for coaching, development or a structural change to take effect within the period.</a:t>
-            </a:r>
-          </a:p>
-          <a:p>
-            <a:r>
-              <a:t>Organisational performance: organisational conditions often have no rhythm of review at all; they reach the agenda when something fails.</a:t>
-            </a:r>
-          </a:p>
-          <a:p>
-            <a:r>
-              <a:t>Governance · execution oversight. Capital and risk decisions follow the board calendar, so a decision on a condition a Key Result depends on can wait up to three months.</a:t>
-            </a:r>
-          </a:p>
-          <a:p>
-            <a:r>
-              <a:t>Resources · financial support. Budgets are reallocated only at the mid-year forecast. An initiative found short of funds in its second month waits until its sixth.</a:t>
-            </a:r>
-          </a:p>
-          <a:p>
-            <a:r>
-              <a:t>Environment · employee sustainability. Workload is seen through the annual engagement survey, so overload in a critical team shows first in resignations.</a:t>
-            </a:r>
-          </a:p>
-          <a:p>
-            <a:r>
-              <a:t>When the conditions are reviewed on a slower rhythm than the KPIs they support, the conditions lag the work they are meant to enable.</a:t>
+              <a:rPr b="1"/>
+              <a:t>6. Bridge to 3.2.</a:t>
+            </a:r>
+          </a:p>
+          <a:p>
+            <a:r>
+              <a:t>Say: "The four fractures rarely begin with one leader. The next slide shows how each executive role feeds them."</a:t>
             </a:r>
           </a:p>
           <a:p/>
           <a:p>
             <a:r>
-              <a:t>Gap 04 · The Learning Suppression Gap</a:t>
-            </a:r>
-          </a:p>
-          <a:p>
-            <a:r>
-              <a:t>People performance: when reviews judge, individuals defend. They bring the explanation and hold back the obstacle, and in the next cycle they propose targets they are sure to meet. Learning moves out of the review into corridors and private conversations. The organisation loses the individuals' first-hand knowledge of what is slowing execution, the most current intelligence it has.</a:t>
-            </a:r>
-          </a:p>
-          <a:p>
-            <a:r>
-              <a:t>Organisational performance: suppression falls hardest on the conditions, because naming a condition often means naming a senior leader's area.</a:t>
-            </a:r>
-          </a:p>
-          <a:p>
-            <a:r>
-              <a:t>Environment · psychological safety. A team lead knows the approval process is the real constraint on the Key Result and does not say so, because the approval sits with the executive who chairs the review.</a:t>
-            </a:r>
-          </a:p>
-          <a:p>
-            <a:r>
-              <a:t>Governance · consistent consequences. Shortfalls in individual KPIs are examined closely, while a condition failure in a senior leader's area passes without examination. People conclude that the conditions are off limits.</a:t>
-            </a:r>
-          </a:p>
-          <a:p>
-            <a:r>
-              <a:t>The review then hears one side of every gap, and the organisation never learns which of its conditions the strategy is outgrowing.</a:t>
-            </a:r>
-          </a:p>
-          <a:p/>
-          <a:p>
-            <a:r>
-              <a:t>Professional insights:</a:t>
-            </a:r>
-          </a:p>
-          <a:p/>
-          <a:p>
-            <a:r>
-              <a:t>Gap 02 · Evidence Quality: The most corrosive pattern is the gap between advertised and actual performance: dashboards that look green and reports that signal health with no results underneath. Make it safer to disclose a thin harvest than to perform a false one.</a:t>
-            </a:r>
-          </a:p>
-          <a:p>
-            <a:r>
-              <a:t>Source: Journal, 27 May 2026 — Professional Insights: Culture</a:t>
-            </a:r>
-          </a:p>
-          <a:p/>
-          <a:p>
-            <a:r>
-              <a:t>Gap 04 · Learning Suppression: Formal systems can exist while actual behaviour contradicts their purpose. Strategic reviews should examine lived practice alongside formal compliance.</a:t>
-            </a:r>
-          </a:p>
-          <a:p>
-            <a:r>
-              <a:t>Source: Journal, 8 September 2026 — Professional Insights: Strategy</a:t>
+              <a:rPr b="1"/>
+              <a:t>ON THE PORTAL, AFTER THE TEACHING:</a:t>
+            </a:r>
+          </a:p>
+          <a:p>
+            <a:r>
+              <a:t>Participants write the reflection at the foot of part 3.1: a rating of each of the four gaps in their organisation, from 1 (rare) to 5 (common), the gap they are most responsible for closing and their first action.</a:t>
             </a:r>
           </a:p>
         </p:txBody>
@@ -1392,6 +1322,7 @@
           <a:lstStyle/>
           <a:p>
             <a:r>
+              <a:rPr b="1"/>
               <a:t>SECTION 4 · INTEGRATION — COLLECTIVE</a:t>
             </a:r>
           </a:p>
@@ -1403,6 +1334,29 @@
           <a:p/>
           <a:p>
             <a:r>
+              <a:rPr b="1"/>
+              <a:t>HOW THIS SECTION RUNS:</a:t>
+            </a:r>
+          </a:p>
+          <a:p>
+            <a:r>
+              <a:t>1. 4.1 The Enterprise Performance Intelligence Circle (EPIC): the three signals each leader brings from their PM review sheet.</a:t>
+            </a:r>
+          </a:p>
+          <a:p>
+            <a:r>
+              <a:t>2. 4.2 The Accountability Loop role play, in groups of three, and the GROW conversation that guides it. Nothing is entered on the portal during the role play.</a:t>
+            </a:r>
+          </a:p>
+          <a:p>
+            <a:r>
+              <a:t>3. Two Section 4 Reflections slides, the second with the Portfolio work of part 4.2.</a:t>
+            </a:r>
+          </a:p>
+          <a:p/>
+          <a:p>
+            <a:r>
+              <a:rPr b="1"/>
               <a:t>SECTION LEARNING OUTCOMES:</a:t>
             </a:r>
           </a:p>
@@ -1419,23 +1373,26 @@
           <a:p/>
           <a:p>
             <a:r>
+              <a:rPr b="1"/>
               <a:t>HOW TO OPEN THE SECTION:</a:t>
             </a:r>
           </a:p>
           <a:p/>
           <a:p>
             <a:r>
+              <a:rPr b="1"/>
               <a:t>1. Name the shift.</a:t>
             </a:r>
           </a:p>
           <a:p>
             <a:r>
-              <a:t>Say: "This section moves from function to enterprise. The question that guides it is the question of part 3.2: Is the chain of execution across our functions holding together?"</a:t>
+              <a:t>Say: "This section moves from function to enterprise. The question that guides it is the question of part 3.2: is the chain of execution across our functions holding together?"</a:t>
             </a:r>
           </a:p>
           <a:p/>
           <a:p>
             <a:r>
+              <a:rPr b="1"/>
               <a:t>2. Say what the section holds.</a:t>
             </a:r>
           </a:p>
@@ -1447,17 +1404,13 @@
           <a:p/>
           <a:p>
             <a:r>
-              <a:t>TEACHING NOTES FROM THE FACILITATOR GUIDE:</a:t>
-            </a:r>
-          </a:p>
-          <a:p>
-            <a:r>
-              <a:t>4.1 · The Enterprise Performance Intelligence Circle (EPIC). Teach what EPIC is for before its detail: it turns the separate PM reviews of each function into one shared view of enterprise execution. Then teach the three signals each leader brings from their PM review sheet, each by the question it answers: progress, "Where are we on execution?"; early warnings, "What is starting to break?"; execution learning, "What is execution teaching us?" For each signal, teach what the leader brings, the sentence the leader uses and what the executive team sees. Progress comes first because it gives the other two their meaning. Teach the evidence rule with the examples of each signal: every signal names the PM review evidence behind it. This single discipline separates EPIC from an opinion forum.</a:t>
-            </a:r>
-          </a:p>
-          <a:p>
-            <a:r>
-              <a:t>4.2 · The Accountability Loop Role Play. Run the role play in groups of three: leader, team member and observer. The observer deduces how the conversation went through GROW and which root cause it revealed.</a:t>
+              <a:rPr b="1"/>
+              <a:t>3. Name the posture.</a:t>
+            </a:r>
+          </a:p>
+          <a:p>
+            <a:r>
+              <a:t>Say: "Read every signal horizontally: what it means for the other functions. EPIC exists to surface cross-functional dependencies."</a:t>
             </a:r>
           </a:p>
         </p:txBody>
@@ -1543,214 +1496,172 @@
           <a:lstStyle/>
           <a:p>
             <a:r>
-              <a:rPr lang="en-GB" b="1" dirty="0"/>
+              <a:rPr b="1"/>
               <a:t>4.1 — THE ENTERPRISE PERFORMANCE INTELLIGENCE CIRCLE (EPIC)</a:t>
             </a:r>
           </a:p>
-          <a:p>
-            <a:r>
-              <a:rPr lang="en-GB" dirty="0"/>
-              <a:t>Select each signal</a:t>
-            </a:r>
-          </a:p>
-          <a:p>
-            <a:endParaRPr lang="en-GB" dirty="0"/>
-          </a:p>
-          <a:p>
-            <a:r>
-              <a:rPr lang="en-GB" b="1" dirty="0"/>
+          <a:p/>
+          <a:p>
+            <a:r>
+              <a:rPr b="1"/>
               <a:t>HOW TO TEACH IT:</a:t>
             </a:r>
           </a:p>
-          <a:p>
-            <a:endParaRPr lang="en-GB" dirty="0"/>
-          </a:p>
-          <a:p>
-            <a:r>
-              <a:rPr lang="en-GB" b="1" dirty="0"/>
+          <a:p/>
+          <a:p>
+            <a:r>
+              <a:rPr b="1"/>
               <a:t>1. Say what EPIC is for.</a:t>
             </a:r>
           </a:p>
           <a:p>
             <a:r>
-              <a:rPr lang="en-GB" dirty="0"/>
               <a:t>Say: "The Enterprise Performance Intelligence Circle (EPIC) is the executive team’s structured review of enterprise execution. The question that guides EPIC is: “Is the chain of execution across our functions holding together?”"</a:t>
             </a:r>
           </a:p>
           <a:p>
             <a:r>
-              <a:rPr lang="en-GB" dirty="0"/>
               <a:t>Say: "Many organisations conduct performance reviews. Few organisations convert those reviews into collective strategic intelligence. EPIC ensures that insights emerging from PM review sheets are brought together across functions in a structured conversation that allows the leadership team, acting as the collective intelligence for execution discipline, to observe execution as a living system."</a:t>
             </a:r>
           </a:p>
-          <a:p>
-            <a:endParaRPr lang="en-GB" dirty="0"/>
-          </a:p>
-          <a:p>
-            <a:r>
-              <a:rPr lang="en-GB" b="1" dirty="0"/>
+          <a:p/>
+          <a:p>
+            <a:r>
+              <a:rPr b="1"/>
               <a:t>2. Say what each leader brings.</a:t>
             </a:r>
           </a:p>
           <a:p>
             <a:r>
-              <a:rPr lang="en-GB" dirty="0"/>
               <a:t>Say: "In EPIC, each member of the executive team brings three signals from their own PM review sheet: where their Key Results stand, what is starting to break, and what execution is teaching them. Each signal answers one question, and the three are shared in that order. Progress comes first because it gives the warnings their context and the learning a system to learn about."</a:t>
             </a:r>
           </a:p>
-          <a:p>
-            <a:endParaRPr lang="en-GB" dirty="0"/>
-          </a:p>
-          <a:p>
-            <a:r>
-              <a:rPr lang="en-GB" b="1" dirty="0"/>
+          <a:p/>
+          <a:p>
+            <a:r>
+              <a:rPr b="1"/>
               <a:t>3. Signal 1 · Collective Trajectory: "Where are we on execution?"</a:t>
             </a:r>
           </a:p>
           <a:p>
             <a:r>
-              <a:rPr lang="en-GB" dirty="0"/>
-              <a:t>Say: "Each leader brings: The current percentage progress toward their Key Results and KPIs, taken from the PM ratings and evidence in their PM review sheet, and whether momentum is accelerating, stable or slowing. The percentage involves no estimate and no narrative opinion."</a:t>
-            </a:r>
-          </a:p>
-          <a:p>
-            <a:r>
-              <a:rPr lang="en-GB" dirty="0"/>
+              <a:t>Say: "Each leader brings: The current percentage progress towards their Key Results and KPIs, taken from the PM ratings and evidence in their PM review sheet, and whether momentum is accelerating, stable or slowing. The percentage involves no estimate and no narrative opinion."</a:t>
+            </a:r>
+          </a:p>
+          <a:p>
+            <a:r>
               <a:t>Say: "Each leader says it like this: “We are at [X]% progress, supported by [evidence], and momentum is [accelerating, stable or slowing].”"</a:t>
             </a:r>
           </a:p>
           <a:p>
             <a:r>
-              <a:rPr lang="en-GB" dirty="0"/>
-              <a:t>Example: The COO reports that operational readiness KPIs show 72% progress toward the strategic Key Result, supported by throughput improvements and cycle-time reductions documented in the review sheets.</a:t>
-            </a:r>
-          </a:p>
-          <a:p>
-            <a:r>
-              <a:rPr lang="en-GB" dirty="0"/>
+              <a:t>Examples: The COO reports that operational readiness KPIs show 72% progress towards the strategic Key Result, supported by throughput improvements and cycle-time reductions documented in the review sheets. The CFO reports that financial indicators show 65% progress towards the quarterly profitability milestone, supported by margin improvements and cost optimisation evidence.</a:t>
+            </a:r>
+          </a:p>
+          <a:p>
+            <a:r>
               <a:t>Say: "What the executive team sees: Which functions show strong forward momentum and which show slower movement. The executive team sees the collective trajectory of strategy execution, and uneven progress becomes visible at once."</a:t>
             </a:r>
           </a:p>
-          <a:p>
-            <a:endParaRPr lang="en-GB" dirty="0"/>
-          </a:p>
-          <a:p>
-            <a:r>
-              <a:rPr lang="en-GB" b="1" dirty="0"/>
+          <a:p/>
+          <a:p>
+            <a:r>
+              <a:rPr b="1"/>
               <a:t>4. Signal 2 · Early Warnings: "What is starting to break?"</a:t>
             </a:r>
           </a:p>
           <a:p>
             <a:r>
-              <a:rPr lang="en-GB" dirty="0"/>
               <a:t>Say: "Each leader brings: One or two warning signals that emerged in their PM review conversations, with the evidence from the review sheets. An early warning appears before a KPI or Key Result is formally off target."</a:t>
             </a:r>
           </a:p>
           <a:p>
             <a:r>
-              <a:rPr lang="en-GB" dirty="0"/>
               <a:t>Say: "Each leader says it like this: “An emerging risk is [signal], supported by [evidence].”"</a:t>
             </a:r>
           </a:p>
           <a:p>
             <a:r>
-              <a:rPr lang="en-GB" dirty="0"/>
-              <a:t>Example: An operational process beginning to slow delivery times</a:t>
-            </a:r>
-          </a:p>
-          <a:p>
-            <a:r>
-              <a:rPr lang="en-GB" dirty="0"/>
+              <a:t>Examples: an operational process beginning to slow delivery times; a capability gap that may affect upcoming milestones; a supply constraint that could delay implementation of strategic initiatives; a change in customer feedback signalling emerging dissatisfaction.</a:t>
+            </a:r>
+          </a:p>
+          <a:p>
+            <a:r>
               <a:t>Say: "What the executive team sees: Where a signal in one function is connected to activity in another. What looked like an isolated operational issue shows itself as a cross-functional execution dependency, and the leadership team, acting as the collective intelligence for execution discipline, can act on it before it becomes a measurable performance gap."</a:t>
             </a:r>
           </a:p>
-          <a:p>
-            <a:endParaRPr lang="en-GB" dirty="0"/>
-          </a:p>
-          <a:p>
-            <a:r>
-              <a:rPr lang="en-GB" b="1" dirty="0"/>
+          <a:p/>
+          <a:p>
+            <a:r>
+              <a:rPr b="1"/>
               <a:t>5. Signal 3 · Execution Learning: "What is execution teaching us?"</a:t>
             </a:r>
           </a:p>
           <a:p>
             <a:r>
-              <a:rPr lang="en-GB" dirty="0"/>
               <a:t>Say: "Each leader brings: One key learning from their PM reviews, with the evidence behind it: a capability insight, a coordination improvement, a leadership practice that strengthened execution, or a structural obstacle that slowed progress."</a:t>
             </a:r>
           </a:p>
           <a:p>
             <a:r>
-              <a:rPr lang="en-GB" dirty="0"/>
               <a:t>Say: "Each leader says it like this: “A key execution learning is [insight], supported by [evidence].”"</a:t>
             </a:r>
           </a:p>
           <a:p>
             <a:r>
-              <a:rPr lang="en-GB" dirty="0"/>
-              <a:t>Example: The CHRO highlights that performance review discussions revealed a leadership capability gap affecting accountability conversations.</a:t>
-            </a:r>
-          </a:p>
-          <a:p>
-            <a:r>
-              <a:rPr lang="en-GB" dirty="0"/>
+              <a:t>Examples: The CHRO highlights that performance review discussions revealed a leadership capability gap affecting accountability conversations. The CTO shares that system visibility improvements significantly accelerated operational decision-making. The CMO highlights a pattern in customer experience data that revealed which service interactions most strongly influence trust.</a:t>
+            </a:r>
+          </a:p>
+          <a:p>
+            <a:r>
               <a:t>Say: "What the executive team sees: How execution actually works inside the organisation. Over time, the organisation builds a body of practical execution intelligence that improves how strategy is implemented."</a:t>
             </a:r>
           </a:p>
-          <a:p>
-            <a:endParaRPr lang="en-GB" dirty="0"/>
-          </a:p>
-          <a:p>
-            <a:r>
-              <a:rPr lang="en-GB" b="1" dirty="0"/>
+          <a:p/>
+          <a:p>
+            <a:r>
+              <a:rPr b="1"/>
               <a:t>6. Close on what EPIC produces.</a:t>
             </a:r>
           </a:p>
           <a:p>
             <a:r>
-              <a:rPr lang="en-GB" dirty="0"/>
-              <a:t>1. A clear snapshot of enterprise progress toward the strategic Key Results.</a:t>
-            </a:r>
-          </a:p>
-          <a:p>
-            <a:r>
-              <a:rPr lang="en-GB" dirty="0"/>
+              <a:rPr b="1"/>
+              <a:t>1. A clear snapshot of enterprise progress towards the strategic Key Results.</a:t>
+            </a:r>
+          </a:p>
+          <a:p>
+            <a:r>
+              <a:rPr b="1"/>
               <a:t>2. Emerging risks visible early enough for coordinated intervention.</a:t>
             </a:r>
           </a:p>
           <a:p>
             <a:r>
-              <a:rPr lang="en-GB" dirty="0"/>
+              <a:rPr b="1"/>
               <a:t>3. Execution learning captured to strengthen future performance.</a:t>
             </a:r>
           </a:p>
           <a:p>
             <a:r>
-              <a:rPr lang="en-GB" dirty="0"/>
               <a:t>Say: "Through this practice, performance measurement becomes the organisation’s radar system for strategy execution."</a:t>
             </a:r>
           </a:p>
-          <a:p>
-            <a:endParaRPr lang="en-GB" dirty="0"/>
-          </a:p>
-          <a:p>
-            <a:r>
-              <a:rPr lang="en-GB" dirty="0"/>
+          <a:p/>
+          <a:p>
+            <a:r>
               <a:t>Say: "Healthy organisations create conditions in which differentiated strengths work together. The test of collective culture: when one part suffers, others respond; when one succeeds, others celebrate." (Journal, 9 September 2026, Professional Insights: Culture)</a:t>
             </a:r>
           </a:p>
-          <a:p>
-            <a:endParaRPr lang="en-GB" dirty="0"/>
-          </a:p>
-          <a:p>
-            <a:r>
-              <a:rPr lang="en-GB" b="1" dirty="0"/>
+          <a:p/>
+          <a:p>
+            <a:r>
+              <a:rPr b="1"/>
               <a:t>ON THE PORTAL, AFTER THE TEACHING:</a:t>
             </a:r>
           </a:p>
           <a:p>
             <a:r>
-              <a:rPr lang="en-GB" dirty="0"/>
               <a:t>Participants write their early warning signal and their execution learning at the foot of the second and third tabs of part 4.1, from their own Key Results and KPIs. At the foot of part 4.1, they name the conversation type most difficult for them and their team.</a:t>
             </a:r>
           </a:p>
@@ -1837,128 +1748,105 @@
           <a:lstStyle/>
           <a:p>
             <a:r>
-              <a:rPr lang="en-GB"/>
+              <a:rPr b="1"/>
               <a:t>SECTION 5 · APPLICATION — IN PRACTICE</a:t>
             </a:r>
           </a:p>
           <a:p>
             <a:r>
-              <a:rPr lang="en-GB"/>
               <a:t>Applying the Four Consequences of Weak Review Discipline</a:t>
             </a:r>
           </a:p>
-          <a:p>
-            <a:endParaRPr lang="en-GB"/>
-          </a:p>
-          <a:p>
-            <a:r>
-              <a:rPr lang="en-GB"/>
+          <a:p/>
+          <a:p>
+            <a:r>
+              <a:rPr b="1"/>
               <a:t>SECTION LEARNING OUTCOMES:</a:t>
             </a:r>
           </a:p>
           <a:p>
             <a:r>
-              <a:rPr lang="en-GB"/>
               <a:t>1. Make evidence-based recovery decisions when results depart from expectations.</a:t>
             </a:r>
           </a:p>
           <a:p>
             <a:r>
-              <a:rPr lang="en-GB"/>
               <a:t>2. Establish executive decisions and routines that protect sustained review discipline.</a:t>
             </a:r>
           </a:p>
-          <a:p>
-            <a:endParaRPr lang="en-GB"/>
-          </a:p>
-          <a:p>
-            <a:r>
-              <a:rPr lang="en-GB"/>
+          <a:p/>
+          <a:p>
+            <a:r>
+              <a:rPr b="1"/>
               <a:t>HOW THIS SECTION RUNS:</a:t>
             </a:r>
           </a:p>
           <a:p>
             <a:r>
-              <a:rPr lang="en-GB"/>
               <a:t>This is group work and Capstone work. For each of the four consequences of weak review discipline, each group:</a:t>
             </a:r>
           </a:p>
           <a:p>
             <a:r>
-              <a:rPr lang="en-GB"/>
               <a:t>1. Simulates a potential gap in the performance of individuals, and a potential gap in the organisational conditions of its strategy.</a:t>
             </a:r>
           </a:p>
           <a:p>
             <a:r>
-              <a:rPr lang="en-GB"/>
               <a:t>2. Writes a decision point for recovery for each gap: the decision the executive team takes when the gap appears, and who takes it.</a:t>
             </a:r>
           </a:p>
           <a:p>
             <a:r>
-              <a:rPr lang="en-GB"/>
               <a:t>In part 5.2 each group tests the WARD check-up it set for its enterprise Key Result in Unit 6: the alert fires, and the group runs the recovery.</a:t>
             </a:r>
           </a:p>
           <a:p>
             <a:r>
-              <a:rPr lang="en-GB"/>
-              <a:t>The group chooses its scribe for this work. The scribe types what the group agrees, and the entries appear on every member’s page. Each member then selects Agree. When every member has agreed, the record feeds the team’s Capstone S2R Blueprint.</a:t>
-            </a:r>
-          </a:p>
-          <a:p>
-            <a:endParaRPr lang="en-GB"/>
-          </a:p>
-          <a:p>
-            <a:r>
-              <a:rPr lang="en-GB"/>
+              <a:t>The group chooses its scribe for this work. The scribe types what the group agrees, and the entries appear on every member’s page. Each member then selects Agree. When every member has agreed, the record feeds the team’s Capstone S2R® Blueprint.</a:t>
+            </a:r>
+          </a:p>
+          <a:p/>
+          <a:p>
+            <a:r>
+              <a:rPr b="1"/>
               <a:t>HOW TO OPEN THE SECTION:</a:t>
             </a:r>
           </a:p>
-          <a:p>
-            <a:endParaRPr lang="en-GB"/>
-          </a:p>
-          <a:p>
-            <a:r>
-              <a:rPr lang="en-GB"/>
+          <a:p/>
+          <a:p>
+            <a:r>
+              <a:rPr b="1"/>
               <a:t>1. Say what the section does.</a:t>
             </a:r>
           </a:p>
           <a:p>
             <a:r>
-              <a:rPr lang="en-GB"/>
-              <a:t>Say: "For each of the four consequences of weak review discipline, your group simulates a potential gap in the performance of individuals and in the organisational conditions of the strategy in your team’s Capstone S2R Blueprint, and sets a decision point for recovery for each. Then your group tests the WARD check-up it set in Unit 6: the alert fires, and you run the recovery."</a:t>
-            </a:r>
-          </a:p>
-          <a:p>
-            <a:endParaRPr lang="en-GB"/>
-          </a:p>
-          <a:p>
-            <a:r>
-              <a:rPr lang="en-GB"/>
+              <a:t>Say: "For each of the four consequences of weak review discipline, your group simulates a potential gap in the performance of individuals and in the organisational conditions of the strategy in your team’s Capstone S2R® Blueprint, and sets a decision point for recovery for each. Then your group tests the WARD check-up it set in Unit 6: the alert fires, and you run the recovery."</a:t>
+            </a:r>
+          </a:p>
+          <a:p/>
+          <a:p>
+            <a:r>
+              <a:rPr b="1"/>
               <a:t>2. Say how the group works.</a:t>
             </a:r>
           </a:p>
           <a:p>
             <a:r>
-              <a:rPr lang="en-GB"/>
               <a:t>Say: "This is group work. Your group agrees each entry and chooses its scribe for this work. The scribe types, and the entries appear on every member’s page."</a:t>
             </a:r>
           </a:p>
-          <a:p>
-            <a:endParaRPr lang="en-GB"/>
-          </a:p>
-          <a:p>
-            <a:r>
-              <a:rPr lang="en-GB"/>
+          <a:p/>
+          <a:p>
+            <a:r>
+              <a:rPr b="1"/>
               <a:t>3. Say where the work goes.</a:t>
             </a:r>
           </a:p>
           <a:p>
             <a:r>
-              <a:rPr lang="en-GB"/>
-              <a:t>Say: "This is Capstone work. You read your group’s record at the foot of the section and select Agree. When every member has agreed, your record feeds your team’s Capstone S2R Blueprint."</a:t>
+              <a:t>Say: "This is Capstone work. You read your group’s record at the foot of the section and select Agree. When every member has agreed, your record feeds your team’s Capstone S2R® Blueprint."</a:t>
             </a:r>
           </a:p>
         </p:txBody>
@@ -2044,13 +1932,92 @@
           <a:lstStyle/>
           <a:p>
             <a:r>
-              <a:rPr lang="en-US" dirty="0"/>
-              <a:t>KEY LEARNING OUTCOMES (identical in the participant and facilitator files)
-1. Interpret performance evidence in relation to strategic objectives and organisational context.
-2. Discriminate meaningful strategic progress from activity, compliance and temporary variation.
-3. Exercise balanced executive judgement when performance diverges from expectations.
-4. Translate performance evidence into decisions, learning and corrective leadership action.
-Each section slide carries that section’s two learning outcomes.</a:t>
+              <a:rPr b="1"/>
+              <a:t>KEY LEARNING OUTCOMES</a:t>
+            </a:r>
+          </a:p>
+          <a:p/>
+          <a:p>
+            <a:r>
+              <a:rPr b="1"/>
+              <a:t>HOW TO USE THIS SLIDE:</a:t>
+            </a:r>
+          </a:p>
+          <a:p/>
+          <a:p>
+            <a:r>
+              <a:rPr b="1"/>
+              <a:t>1. Read the four outcomes aloud.</a:t>
+            </a:r>
+          </a:p>
+          <a:p>
+            <a:r>
+              <a:t>1. Interpret performance evidence in relation to strategic objectives and organisational context.</a:t>
+            </a:r>
+          </a:p>
+          <a:p>
+            <a:r>
+              <a:t>2. Discriminate meaningful strategic progress from activity, compliance and temporary variation.</a:t>
+            </a:r>
+          </a:p>
+          <a:p>
+            <a:r>
+              <a:t>3. Exercise balanced executive judgement when performance diverges from expectations.</a:t>
+            </a:r>
+          </a:p>
+          <a:p>
+            <a:r>
+              <a:t>4. Translate performance evidence into decisions, learning and corrective leadership action.</a:t>
+            </a:r>
+          </a:p>
+          <a:p/>
+          <a:p>
+            <a:r>
+              <a:rPr b="1"/>
+              <a:t>2. Say where the unit delivers each one.</a:t>
+            </a:r>
+          </a:p>
+          <a:p>
+            <a:r>
+              <a:t>Outcome 1 is taught in 1.1 and 1.2, and practised in EPIC in 4.1, where each leader brings evidence from their PM review sheet.</a:t>
+            </a:r>
+          </a:p>
+          <a:p>
+            <a:r>
+              <a:t>Outcome 2 is taught in 1.1, the move from activity to progress, and in 3.1, the Evidence Quality Gap.</a:t>
+            </a:r>
+          </a:p>
+          <a:p>
+            <a:r>
+              <a:t>Outcome 3 is taught in 1.3 and 1.4, the Review–Realign–Restore Cycle and the Accountability Loop, and practised in the role play of 4.2.</a:t>
+            </a:r>
+          </a:p>
+          <a:p>
+            <a:r>
+              <a:t>Outcome 4 is taught in Section 2, the four consequences of weak review discipline, and applied in Section 5, where each group sets decision points for recovery and tests its WARD check-up.</a:t>
+            </a:r>
+          </a:p>
+          <a:p/>
+          <a:p>
+            <a:r>
+              <a:rPr b="1"/>
+              <a:t>3. Ask, now that the outcomes are read.</a:t>
+            </a:r>
+          </a:p>
+          <a:p>
+            <a:r>
+              <a:t>Ask: "Which of these four outcomes would make the largest difference to how your leadership team reviews performance today?"</a:t>
+            </a:r>
+          </a:p>
+          <a:p>
+            <a:r>
+              <a:t>Take two or three answers.</a:t>
+            </a:r>
+          </a:p>
+          <a:p/>
+          <a:p>
+            <a:r>
+              <a:t>Each section slide carries that section's two learning outcomes.</a:t>
             </a:r>
           </a:p>
         </p:txBody>
@@ -2136,161 +2103,149 @@
           <a:lstStyle/>
           <a:p>
             <a:r>
-              <a:rPr lang="en-GB"/>
+              <a:rPr b="1"/>
               <a:t>5.2 — TESTING YOUR WARD (CAPSTONE WORK)</a:t>
             </a:r>
           </a:p>
-          <a:p>
-            <a:endParaRPr lang="en-GB"/>
-          </a:p>
-          <a:p>
-            <a:r>
-              <a:rPr lang="en-GB"/>
+          <a:p/>
+          <a:p>
+            <a:r>
+              <a:rPr b="1"/>
               <a:t>HOW TO TEACH IT:</a:t>
             </a:r>
           </a:p>
-          <a:p>
-            <a:endParaRPr lang="en-GB"/>
-          </a:p>
-          <a:p>
-            <a:r>
-              <a:rPr lang="en-GB"/>
+          <a:p/>
+          <a:p>
+            <a:r>
+              <a:rPr b="1"/>
               <a:t>1. Recall the check-up.</a:t>
             </a:r>
           </a:p>
           <a:p>
             <a:r>
-              <a:rPr lang="en-GB"/>
               <a:t>Say: "In Unit 6 your group set the WARD check-up for its enterprise Key Result: the waypoints, the alert, the recovery and the decider. It was set while the Key Result was on track. Today the alert fires."</a:t>
             </a:r>
           </a:p>
-          <a:p>
-            <a:endParaRPr lang="en-GB"/>
-          </a:p>
-          <a:p>
-            <a:r>
-              <a:rPr lang="en-GB"/>
+          <a:p/>
+          <a:p>
+            <a:r>
+              <a:rPr b="1"/>
               <a:t>2. Fire the alert.</a:t>
             </a:r>
           </a:p>
           <a:p>
             <a:r>
-              <a:rPr lang="en-GB"/>
               <a:t>Say: "Choose one of your waypoints and write the result your executive team reads at that review, beyond the alert."</a:t>
             </a:r>
           </a:p>
-          <a:p>
-            <a:endParaRPr lang="en-GB"/>
-          </a:p>
-          <a:p>
-            <a:r>
-              <a:rPr lang="en-GB"/>
+          <a:p/>
+          <a:p>
+            <a:r>
+              <a:rPr b="1"/>
               <a:t>3. Run the recovery.</a:t>
             </a:r>
           </a:p>
           <a:p>
             <a:r>
-              <a:rPr lang="en-GB"/>
               <a:t>Ask: "What explains the gap in the individuals and in the organisational conditions? Which recovery do you run, who decides, and when do you check the result again?"</a:t>
             </a:r>
           </a:p>
           <a:p>
             <a:r>
-              <a:rPr lang="en-GB"/>
               <a:t>Guide the groups to use the evidence in their Contribution Map and the recovery they set in advance.</a:t>
             </a:r>
           </a:p>
-          <a:p>
-            <a:endParaRPr lang="en-GB"/>
-          </a:p>
-          <a:p>
-            <a:r>
-              <a:rPr lang="en-GB"/>
+          <a:p/>
+          <a:p>
+            <a:r>
+              <a:rPr b="1"/>
               <a:t>4. Give the example from the Unit 6 worked example.</a:t>
             </a:r>
           </a:p>
           <a:p>
             <a:r>
-              <a:rPr lang="en-GB"/>
               <a:t>Enterprise Key Result: Increase customer enquiries resolved within 48 hours from 65% to 90% by year-end. Waypoint: 80% by the end of June. Alert: more than three percentage points below a waypoint.</a:t>
             </a:r>
           </a:p>
           <a:p>
             <a:r>
-              <a:rPr lang="en-GB"/>
               <a:t>The red flag: At the end of June, 74% of enquiries are resolved within 48 hours against the 80% waypoint: six points below, beyond the alert.</a:t>
             </a:r>
           </a:p>
           <a:p>
             <a:r>
-              <a:rPr lang="en-GB"/>
               <a:t>Individuals · what explains the gap: Two teams follow up fewer than 85% of outstanding enquiries on time.</a:t>
             </a:r>
           </a:p>
           <a:p>
             <a:r>
-              <a:rPr lang="en-GB"/>
               <a:t>Organisational conditions · what explains the gap: System availability fell to 96% in May, and enquiries waited for the system to return.</a:t>
             </a:r>
           </a:p>
           <a:p>
             <a:r>
-              <a:rPr lang="en-GB"/>
               <a:t>The recovery: Team leaders review open enquiries with each owner every morning; IT restores availability to 99% within four weeks; the Customer Service Executive decides and checks the result at the end of July.</a:t>
             </a:r>
           </a:p>
-          <a:p>
-            <a:endParaRPr lang="en-GB"/>
-          </a:p>
-          <a:p>
-            <a:r>
-              <a:rPr lang="en-GB"/>
+          <a:p/>
+          <a:p>
+            <a:r>
+              <a:rPr b="1"/>
               <a:t>ON THE PORTAL, AFTER THE TEACHING:</a:t>
             </a:r>
           </a:p>
           <a:p>
             <a:r>
-              <a:rPr lang="en-GB"/>
               <a:t>Participants work as a group in part 5.2 of their own file. This is Capstone work. The group’s WARD from Unit 6 is shown on each page; if it is missing, the group selects Bring in from my Unit 6 page.</a:t>
             </a:r>
           </a:p>
           <a:p>
             <a:r>
-              <a:rPr lang="en-GB"/>
               <a:t>1. The group writes the red flag: the waypoint and the result that raises the alert.</a:t>
             </a:r>
           </a:p>
           <a:p>
             <a:r>
-              <a:rPr lang="en-GB"/>
               <a:t>2. The group states what explains the gap in the performance of individuals and in the organisational conditions.</a:t>
             </a:r>
           </a:p>
           <a:p>
             <a:r>
-              <a:rPr lang="en-GB"/>
               <a:t>3. The group states the recovery: what is done, who decides and when the result is checked again.</a:t>
             </a:r>
           </a:p>
           <a:p>
             <a:r>
-              <a:rPr lang="en-GB"/>
               <a:t>4. Each participant reads the record and selects Agree.</a:t>
             </a:r>
           </a:p>
-          <a:p>
-            <a:endParaRPr lang="en-GB"/>
-          </a:p>
-          <a:p>
-            <a:r>
-              <a:rPr lang="en-GB"/>
-              <a:t>AFTER THE SESSION:</a:t>
-            </a:r>
-          </a:p>
-          <a:p>
-            <a:r>
-              <a:rPr lang="en-GB"/>
-              <a:t>The record reaches you with each participant’s submission, under the heading of Section 5. The agreed record feeds the Unit 8 boxes of the team’s Capstone S2R Blueprint: the four consequences in 8A to 8D and the WARD test in 8E.</a:t>
+          <a:p/>
+          <a:p>
+            <a:r>
+              <a:rPr b="1"/>
+              <a:t>WHERE THE WORK GOES:</a:t>
+            </a:r>
+          </a:p>
+          <a:p>
+            <a:r>
+              <a:t>When every member has agreed, the record feeds the Unit 8 boxes of the team’s Capstone S2R® Blueprint: the four consequences in 8A to 8D and the WARD test in 8E. The Capstone work is reviewed independently at graduation.</a:t>
+            </a:r>
+          </a:p>
+          <a:p/>
+          <a:p>
+            <a:r>
+              <a:rPr b="1"/>
+              <a:t>CLOSE THE UNIT:</a:t>
+            </a:r>
+          </a:p>
+          <a:p>
+            <a:r>
+              <a:t>Say: "Measurement becomes an execution recovery system when evidence is reviewed, gaps are diagnosed and momentum is restored. The result is an organisation that continuously restores performance."</a:t>
+            </a:r>
+          </a:p>
+          <a:p>
+            <a:r>
+              <a:t>Say: "Each group’s decision points now set when and how the team acts on each consequence of weak review discipline. Unit 9 addresses the blockages that remain when review shows execution has stalled."</a:t>
             </a:r>
           </a:p>
         </p:txBody>
@@ -2570,18 +2525,21 @@
           <a:lstStyle/>
           <a:p>
             <a:r>
+              <a:rPr b="1"/>
               <a:t>4.2 — THE GROW CONVERSATION</a:t>
             </a:r>
           </a:p>
           <a:p/>
           <a:p>
             <a:r>
+              <a:rPr b="1"/>
               <a:t>HOW TO USE THIS SLIDE:</a:t>
             </a:r>
           </a:p>
           <a:p/>
           <a:p>
             <a:r>
+              <a:rPr b="1"/>
               <a:t>1. Recall GROW.</a:t>
             </a:r>
           </a:p>
@@ -2593,6 +2551,7 @@
           <a:p/>
           <a:p>
             <a:r>
+              <a:rPr b="1"/>
               <a:t>2. Teach each stage as it works in the Accountability Loop.</a:t>
             </a:r>
           </a:p>
@@ -2619,17 +2578,19 @@
           <a:p/>
           <a:p>
             <a:r>
+              <a:rPr b="1"/>
               <a:t>3. Brief the observer before the role play.</a:t>
             </a:r>
           </a:p>
           <a:p>
             <a:r>
-              <a:t>Say: "Note what the leader set out to achieve, and how each stage of GROW moved the conversation toward it: did the leader explore the reality before the options, let the team member generate the options, and close with what will be done, by whom and when it will be reviewed?"</a:t>
+              <a:t>Say: "Note what the leader set out to achieve, and how each stage of GROW moved the conversation towards it: did the leader explore the reality before the options, let the team member generate the options, and close with what will be done, by whom and when it will be reviewed?"</a:t>
             </a:r>
           </a:p>
           <a:p/>
           <a:p>
             <a:r>
+              <a:rPr b="1"/>
               <a:t>4. Use GROW in the debrief.</a:t>
             </a:r>
           </a:p>
@@ -2640,7 +2601,7 @@
           </a:p>
           <a:p>
             <a:r>
-              <a:t>Say: "Leaders who either conceal failure or weaponise it prevent learning. Mature accountability names what went wrong, understands why it happened and moves people toward responsible change." (Journal, 10 August 2026, Professional Insights: Leadership)</a:t>
+              <a:t>Say: "Leaders who either conceal failure or weaponise it prevent learning. Mature accountability names what went wrong, understands why it happened and moves people towards responsible change." (Journal, 10 August 2026, Professional Insights: Leadership)</a:t>
             </a:r>
           </a:p>
           <a:p>
@@ -2651,6 +2612,7 @@
           <a:p/>
           <a:p>
             <a:r>
+              <a:rPr b="1"/>
               <a:t>ON THE PORTAL, AFTER THE TEACHING:</a:t>
             </a:r>
           </a:p>
@@ -2884,24 +2846,27 @@
           <a:lstStyle/>
           <a:p>
             <a:r>
+              <a:rPr b="1"/>
               <a:t>SECTION 1 REFLECTIONS</a:t>
             </a:r>
           </a:p>
           <a:p/>
           <a:p>
             <a:r>
+              <a:rPr b="1"/>
               <a:t>HOW TO USE THIS SLIDE:</a:t>
             </a:r>
           </a:p>
           <a:p/>
           <a:p>
             <a:r>
+              <a:rPr b="1"/>
               <a:t>1. Show the slide and read the two prompts aloud.</a:t>
             </a:r>
           </a:p>
           <a:p>
             <a:r>
-              <a:t>1.1 Reflection — Activity vs Progress: "In your function, what are you currently measuring that reflects activity? What would reflect genuine progress toward your strategic outcome? What evidence do you hold on whether the organisational conditions support the tasks behind that progress?"</a:t>
+              <a:t>1.1 Reflection — Activity vs Progress: "In your function, what are you currently measuring that reflects activity? What would reflect genuine progress towards your strategic outcome? What evidence do you hold on whether the organisational conditions support the tasks behind that progress?"</a:t>
             </a:r>
           </a:p>
           <a:p>
@@ -2912,6 +2877,7 @@
           <a:p/>
           <a:p>
             <a:r>
+              <a:rPr b="1"/>
               <a:t>2. Say what the reflections are for.</a:t>
             </a:r>
           </a:p>
@@ -2923,6 +2889,7 @@
           <a:p/>
           <a:p>
             <a:r>
+              <a:rPr b="1"/>
               <a:t>3. Set the standard.</a:t>
             </a:r>
           </a:p>
@@ -2934,6 +2901,7 @@
           <a:p/>
           <a:p>
             <a:r>
+              <a:rPr b="1"/>
               <a:t>4. Bridge to Section 2.</a:t>
             </a:r>
           </a:p>
@@ -2945,6 +2913,7 @@
           <a:p/>
           <a:p>
             <a:r>
+              <a:rPr b="1"/>
               <a:t>ON THE PORTAL, AFTER THE TEACHING:</a:t>
             </a:r>
           </a:p>
@@ -3031,6 +3000,7 @@
           <a:lstStyle/>
           <a:p>
             <a:r>
+              <a:rPr b="1"/>
               <a:t>3.2 — THE CXO PERFORMANCE GAP CONTRIBUTORS</a:t>
             </a:r>
           </a:p>
@@ -3042,12 +3012,14 @@
           <a:p/>
           <a:p>
             <a:r>
+              <a:rPr b="1"/>
               <a:t>HOW TO TEACH IT:</a:t>
             </a:r>
           </a:p>
           <a:p/>
           <a:p>
             <a:r>
+              <a:rPr b="1"/>
               <a:t>1. Set up the part.</a:t>
             </a:r>
           </a:p>
@@ -3059,6 +3031,7 @@
           <a:p/>
           <a:p>
             <a:r>
+              <a:rPr b="1"/>
               <a:t>2. Teach the map on the slide.</a:t>
             </a:r>
           </a:p>
@@ -3090,57 +3063,58 @@
           </a:p>
           <a:p>
             <a:r>
-              <a:t>The CEO chairs the executive review: the meeting where the executive team reports progress on the Key Results of the strategy.. What the CEO does: When the board, investors or a crisis crowd the diary, the CEO postpones or shortens the executive review. What happens as a result: Executives see that the executive review can slip, so they let the reviews with their own teams slip too. Weeks pass without anyone examining progress, and a small delay grows into a missed target before it is discussed. (Review Rhythm Breakdown) What the CEO does: When a target is missed, the CEO’s first question in the review is: “Why did you miss it?” What happens as a result: Executives come to the review ready to defend their numbers. They hold back the obstacles they face, so the executive team never examines what caused the miss or what must change. (Learning Suppression Gap)</a:t>
-            </a:r>
-          </a:p>
-          <a:p>
-            <a:r>
-              <a:t>The CFO reviews performance through the monthly management accounts: actual results against budget and forecast.. What the CFO does: The CFO uses financial results as the main evidence of progress. What happens as a result: Financial results are available only after the month or quarter has closed. By the time the review sees a shortfall, the period is over and it is too late to correct it. (Evidence Quality Gap) What the CFO does: The CFO asks each budget holder to explain every variance. What happens as a result: Budget holders prepare explanations for the number. The discussion stays on justifying the past, and the operational cause of the variance is never examined. (Learning Suppression Gap)</a:t>
-            </a:r>
-          </a:p>
-          <a:p>
-            <a:r>
-              <a:t>The COO holds weekly operations reviews with the heads of operations, using strong data on throughput, service levels and process efficiency.. What the COO does: Only operations attends the review. Sales, technology, procurement and HR, the functions operations depends on, are not in the room. What happens as a result: When a delay comes from another function, for example a late system change or a supplier problem, the operations review can neither see it nor resolve it. Operations reports its own measures as on track while the enterprise result falls behind. (Horizontal Coordination Gap)</a:t>
-            </a:r>
-          </a:p>
-          <a:p>
-            <a:r>
-              <a:t>The CHRO reviews people performance through the annual engagement survey and the twice-yearly talent review.. What the CHRO does: The CHRO reports engagement scores and training completed, with no link to a Key Result. What happens as a result: The executive team cannot tell whether people measures help or hinder the delivery of the strategy, so the review debates what the survey means. (Evidence Quality Gap) What the CHRO does: The CHRO reviews people measures once or twice a year. What happens as a result: A skills gap that will delay a milestone is seen only at the next survey or talent review, after the milestone has already slipped. (Review Rhythm Breakdown)</a:t>
-            </a:r>
-          </a:p>
-          <a:p>
-            <a:r>
-              <a:t>The CTO or CIO reviews technology projects against plan: milestones delivered, system uptime and budget.. What the CTO or CIO does: The CTO or CIO reports a system going live as progress. What happens as a result: Going live is activity. Whether the business uses the system to deliver its Key Result is never checked, so the review reports success while the result does not move. (Evidence Quality Gap) What the CTO or CIO does: The CTO or CIO reviews technology projects in the technology forum, without the business owner of the result. What happens as a result: Technology reports the project on track and the business reports the result off track, and no review puts the two together. (Horizontal Coordination Gap)</a:t>
-            </a:r>
-          </a:p>
-          <a:p>
-            <a:r>
-              <a:t>The CMO reviews marketing through campaign reports: reach, leads, brand measures and market share.. What the CMO does: The CMO reports campaign reach and leads as progress toward the market Key Result. What happens as a result: Reach and leads show marketing activity. They do not show whether customers bought or stayed, so the review cannot see whether the Key Result is moving. (Evidence Quality Gap) What the CMO does: The campaigns promise delivery times and service levels that operations and sales must deliver, and they review their own measures elsewhere. What happens as a result: Marketing meets its campaign targets while customers receive a different experience, and no single review sees the broken promise. (Horizontal Coordination Gap)</a:t>
-            </a:r>
-          </a:p>
-          <a:p>
-            <a:r>
-              <a:t>The CCO holds weekly sales reviews on pipeline, orders and revenue against target.. What the CCO does: The CCO reviews sales commitments without operations in the room. What happens as a result: Sales signs volumes that operations has not confirmed it can deliver. The gap appears only when orders arrive late and customers complain. (Horizontal Coordination Gap) What the CCO does: Every sales review puts pressure on the number. What happens as a result: Sales managers stop raising obstacles, such as pricing or stock problems, until the quarter is already lost. (Learning Suppression Gap)</a:t>
-            </a:r>
-          </a:p>
-          <a:p>
-            <a:r>
-              <a:t>The CPO reviews procurement through supplier scorecards, savings achieved and contract compliance.. What the CPO does: The CPO reviews supplier performance in the procurement forum, apart from the functions that depend on supply. What happens as a result: A late delivery from a supplier reaches a Key Result in operations before anyone connects the two. (Horizontal Coordination Gap) What the CPO does: The CPO reports savings achieved as procurement progress. What happens as a result: The review rewards a cheaper contract without checking whether slower or lower-quality supply is now delaying delivery. (Evidence Quality Gap)</a:t>
-            </a:r>
-          </a:p>
-          <a:p>
-            <a:r>
-              <a:t>The CRO reviews risk through the risk register, incident reports and compliance audits, on the board’s governance calendar.. What the CRO does: The CRO treats a reported breach as a failure to be punished. What happens as a result: Teams stop reporting near misses, so the organisation loses the early information that would let it prevent the next incident. (Learning Suppression Gap) What the CRO does: The CRO reviews risks quarterly for the board committee, apart from the strategy reviews. What happens as a result: A risk that rises against a Key Result between quarters is not discussed until the next committee meeting. (Review Rhythm Breakdown)</a:t>
-            </a:r>
-          </a:p>
-          <a:p>
-            <a:r>
-              <a:t>The CSO runs the planning calendar: the annual strategy review and the quarterly OKR updates.. What the CSO does: The CSO examines Key Results mainly at the quarterly and annual planning points. What happens as a result: Three months pass between two looks at the same Key Result: too long to see whether it is moving or stalling. (Review Rhythm Breakdown) What the CSO does: The planning sessions update the targets and plans for the next period. What happens as a result: The plan is changed without first asking what the last period of execution taught the organisation, so the same mistakes repeat. (Learning Suppression Gap)</a:t>
+              <a:t>The CEO chairs the executive review: the meeting where the executive team reports progress on the Key Results of the strategy. What the CEO does: When the board, investors or a crisis crowd the diary, the CEO postpones or shortens the executive review. What happens as a result: Executives see that the executive review can slip, so they let the reviews with their own teams slip too. Weeks pass without anyone examining progress, and a small delay grows into a missed target before it is discussed. (Review Rhythm Breakdown) What the CEO does: When a target is missed, the CEO’s first question in the review is: “Why did you miss it?” What happens as a result: Executives come to the review ready to defend their numbers. They hold back the obstacles they face, so the executive team never examines what caused the miss or what must change. (Learning Suppression Gap)</a:t>
+            </a:r>
+          </a:p>
+          <a:p>
+            <a:r>
+              <a:t>The CFO reviews performance through the monthly management accounts: actual results against budget and forecast. What the CFO does: The CFO uses financial results as the main evidence of progress. What happens as a result: Financial results are available only after the month or quarter has closed. By the time the review sees a shortfall, the period is over and it is too late to correct it. (Evidence Quality Gap) What the CFO does: The CFO asks each budget holder to explain every variance. What happens as a result: Budget holders prepare explanations for the number. The discussion stays on justifying the past, and the operational cause of the variance is never examined. (Learning Suppression Gap)</a:t>
+            </a:r>
+          </a:p>
+          <a:p>
+            <a:r>
+              <a:t>The COO holds weekly operations reviews with the heads of operations, using strong data on throughput, service levels and process efficiency. What the COO does: Only operations attends the review. Sales, technology, procurement and HR, the functions operations depends on, are not in the room. What happens as a result: When a delay comes from another function, for example a late system change or a supplier problem, the operations review can neither see it nor resolve it. Operations reports its own measures as on track while the enterprise result falls behind. (Horizontal Coordination Gap)</a:t>
+            </a:r>
+          </a:p>
+          <a:p>
+            <a:r>
+              <a:t>The CHRO reviews people performance through the annual engagement survey and the twice-yearly talent review. What the CHRO does: The CHRO reports engagement scores and training completed, with no link to a Key Result. What happens as a result: The executive team cannot tell whether people measures help or hinder the delivery of the strategy, so the review debates what the survey means. (Evidence Quality Gap) What the CHRO does: The CHRO reviews people measures once or twice a year. What happens as a result: A skills gap that will delay a milestone is seen only at the next survey or talent review, after the milestone has already slipped. (Review Rhythm Breakdown)</a:t>
+            </a:r>
+          </a:p>
+          <a:p>
+            <a:r>
+              <a:t>The CTO or CIO reviews technology projects against plan: milestones delivered, system uptime and budget. What the CTO or CIO does: The CTO or CIO reports a system going live as progress. What happens as a result: Going live is activity. Whether the business uses the system to deliver its Key Result is never checked, so the review reports success while the result does not move. (Evidence Quality Gap) What the CTO or CIO does: The CTO or CIO reviews technology projects in the technology forum, without the business owner of the result. What happens as a result: Technology reports the project on track and the business reports the result off track, and no review puts the two together. (Horizontal Coordination Gap)</a:t>
+            </a:r>
+          </a:p>
+          <a:p>
+            <a:r>
+              <a:t>The CMO reviews marketing through campaign reports: reach, leads, brand measures and market share. What the CMO does: The CMO reports campaign reach and leads as progress towards the market Key Result. What happens as a result: Reach and leads show marketing activity. They do not show whether customers bought or stayed, so the review cannot see whether the Key Result is moving. (Evidence Quality Gap) What the CMO does: The campaigns promise delivery times and service levels that operations and sales must deliver, and they review their own measures elsewhere. What happens as a result: Marketing meets its campaign targets while customers receive a different experience, and no single review sees the broken promise. (Horizontal Coordination Gap)</a:t>
+            </a:r>
+          </a:p>
+          <a:p>
+            <a:r>
+              <a:t>The CCO holds weekly sales reviews on pipeline, orders and revenue against target. What the CCO does: The CCO reviews sales commitments without operations in the room. What happens as a result: Sales signs volumes that operations has not confirmed it can deliver. The gap appears only when orders arrive late and customers complain. (Horizontal Coordination Gap) What the CCO does: Every sales review puts pressure on the number. What happens as a result: Sales managers stop raising obstacles, such as pricing or stock problems, until the quarter is already lost. (Learning Suppression Gap)</a:t>
+            </a:r>
+          </a:p>
+          <a:p>
+            <a:r>
+              <a:t>The CPO reviews procurement through supplier scorecards, savings achieved and contract compliance. What the CPO does: The CPO reviews supplier performance in the procurement forum, apart from the functions that depend on supply. What happens as a result: A late delivery from a supplier reaches a Key Result in operations before anyone connects the two. (Horizontal Coordination Gap) What the CPO does: The CPO reports savings achieved as procurement progress. What happens as a result: The review rewards a cheaper contract without checking whether slower or lower-quality supply is now delaying delivery. (Evidence Quality Gap)</a:t>
+            </a:r>
+          </a:p>
+          <a:p>
+            <a:r>
+              <a:t>The CRO reviews risk through the risk register, incident reports and compliance audits, on the board’s governance calendar. What the CRO does: The CRO treats a reported breach as a failure to be punished. What happens as a result: Teams stop reporting near misses, so the organisation loses the early information that would let it prevent the next incident. (Learning Suppression Gap) What the CRO does: The CRO reviews risks quarterly for the board committee, apart from the strategy reviews. What happens as a result: A risk that rises against a Key Result between quarters is not discussed until the next committee meeting. (Review Rhythm Breakdown)</a:t>
+            </a:r>
+          </a:p>
+          <a:p>
+            <a:r>
+              <a:t>The CSO runs the planning calendar: the annual strategy review and the quarterly OKR updates. What the CSO does: The CSO examines Key Results mainly at the quarterly and annual planning points. What happens as a result: Three months pass between two looks at the same Key Result: too long to see whether it is moving or stalling. (Review Rhythm Breakdown) What the CSO does: The planning sessions update the targets and plans for the next period. What happens as a result: The plan is changed without first asking what the last period of execution taught the organisation, so the same mistakes repeat. (Learning Suppression Gap)</a:t>
             </a:r>
           </a:p>
           <a:p/>
           <a:p>
             <a:r>
+              <a:rPr b="1"/>
               <a:t>4. Close the part.</a:t>
             </a:r>
           </a:p>
@@ -3152,6 +3126,7 @@
           <a:p/>
           <a:p>
             <a:r>
+              <a:rPr b="1"/>
               <a:t>5. Ask, now that the roles are taught.</a:t>
             </a:r>
           </a:p>
@@ -3163,6 +3138,7 @@
           <a:p/>
           <a:p>
             <a:r>
+              <a:rPr b="1"/>
               <a:t>ON THE PORTAL, AFTER THE TEACHING:</a:t>
             </a:r>
           </a:p>
@@ -3249,18 +3225,21 @@
           <a:lstStyle/>
           <a:p>
             <a:r>
+              <a:rPr b="1"/>
               <a:t>SECTION 3 REFLECTIONS</a:t>
             </a:r>
           </a:p>
           <a:p/>
           <a:p>
             <a:r>
+              <a:rPr b="1"/>
               <a:t>HOW TO USE THIS SLIDE:</a:t>
             </a:r>
           </a:p>
           <a:p/>
           <a:p>
             <a:r>
+              <a:rPr b="1"/>
               <a:t>1. Show the slide and read the two prompts aloud.</a:t>
             </a:r>
           </a:p>
@@ -3277,18 +3256,42 @@
           <a:p/>
           <a:p>
             <a:r>
-              <a:t>2. Say what the reflection is for.</a:t>
-            </a:r>
-          </a:p>
-          <a:p>
-            <a:r>
-              <a:t>Say: "You write this reflection on the portal after the teaching. Rate each gap honestly, then name the gap you are most responsible for closing."</a:t>
+              <a:rPr b="1"/>
+              <a:t>2. Say what the reflections are for.</a:t>
+            </a:r>
+          </a:p>
+          <a:p>
+            <a:r>
+              <a:t>Point learners to the portal section that they will be required to complete with as much depth as possible.</a:t>
+            </a:r>
+          </a:p>
+          <a:p>
+            <a:r>
+              <a:t>The reflections build the learning portfolio they receive at the end of the programme.</a:t>
+            </a:r>
+          </a:p>
+          <a:p>
+            <a:r>
+              <a:t>Say: "You write these reflections on the portal after the teaching. Rate each gap honestly, then name the gap you are most responsible for closing. The 3.2 reflection is Portfolio work."</a:t>
             </a:r>
           </a:p>
           <a:p/>
           <a:p>
             <a:r>
-              <a:t>3. Bridge to Section 4.</a:t>
+              <a:rPr b="1"/>
+              <a:t>3. Set the standard.</a:t>
+            </a:r>
+          </a:p>
+          <a:p>
+            <a:r>
+              <a:t>Say: "Name one habit in your own reviews, the fracture it opens, one remedial action and the evidence that will show it is working."</a:t>
+            </a:r>
+          </a:p>
+          <a:p/>
+          <a:p>
+            <a:r>
+              <a:rPr b="1"/>
+              <a:t>4. Bridge to Section 4.</a:t>
             </a:r>
           </a:p>
           <a:p>
@@ -3299,6 +3302,7 @@
           <a:p/>
           <a:p>
             <a:r>
+              <a:rPr b="1"/>
               <a:t>ON THE PORTAL, AFTER THE TEACHING:</a:t>
             </a:r>
           </a:p>
@@ -3825,206 +3829,68 @@
           <a:lstStyle/>
           <a:p>
             <a:r>
-              <a:rPr lang="en-US" dirty="0"/>
-              <a:t>FACILITATOR GUIDE · SESSION OVERVIEW
-</a:t>
-            </a:r>
-            <a:r>
-              <a:rPr lang="en-ZA" sz="1200" b="1" i="0" kern="1200" cap="all" dirty="0">
-                <a:solidFill>
-                  <a:schemeClr val="tx1"/>
-                </a:solidFill>
-                <a:effectLst/>
-                <a:latin typeface="+mn-lt"/>
-                <a:ea typeface="+mn-ea"/>
-                <a:cs typeface="+mn-cs"/>
-              </a:rPr>
-              <a:t>Awareness — What</a:t>
-            </a:r>
-          </a:p>
-          <a:p>
-            <a:r>
-              <a:rPr lang="en-ZA" sz="1200" b="0" i="0" kern="1200" dirty="0">
-                <a:solidFill>
-                  <a:schemeClr val="tx1"/>
-                </a:solidFill>
-                <a:effectLst/>
-                <a:latin typeface="+mn-lt"/>
-                <a:ea typeface="+mn-ea"/>
-                <a:cs typeface="+mn-cs"/>
-              </a:rPr>
-              <a:t>What is Performance Measurement? - an execution visibility discipline</a:t>
-            </a:r>
-          </a:p>
-          <a:p>
-            <a:endParaRPr lang="en-ZA" sz="1200" b="0" i="0" kern="1200" dirty="0">
-              <a:solidFill>
-                <a:schemeClr val="tx1"/>
-              </a:solidFill>
-              <a:effectLst/>
-              <a:latin typeface="+mn-lt"/>
-              <a:ea typeface="+mn-ea"/>
-              <a:cs typeface="+mn-cs"/>
-            </a:endParaRPr>
-          </a:p>
-          <a:p>
-            <a:r>
-              <a:rPr lang="en-ZA" sz="1200" b="1" i="0" kern="1200" cap="all" dirty="0">
-                <a:solidFill>
-                  <a:schemeClr val="tx1"/>
-                </a:solidFill>
-                <a:effectLst/>
-                <a:latin typeface="+mn-lt"/>
-                <a:ea typeface="+mn-ea"/>
-                <a:cs typeface="+mn-cs"/>
-              </a:rPr>
-              <a:t>Intelligence — Why</a:t>
-            </a:r>
-          </a:p>
-          <a:p>
-            <a:r>
-              <a:rPr lang="en-ZA" sz="1200" b="0" i="0" kern="1200" dirty="0">
-                <a:solidFill>
-                  <a:schemeClr val="tx1"/>
-                </a:solidFill>
-                <a:effectLst/>
-                <a:latin typeface="+mn-lt"/>
-                <a:ea typeface="+mn-ea"/>
-                <a:cs typeface="+mn-cs"/>
-              </a:rPr>
-              <a:t>Why Performance Measurement Determines Execution Velocity</a:t>
-            </a:r>
-          </a:p>
-          <a:p>
-            <a:endParaRPr lang="en-ZA" sz="1200" b="0" i="0" kern="1200" dirty="0">
-              <a:solidFill>
-                <a:schemeClr val="tx1"/>
-              </a:solidFill>
-              <a:effectLst/>
-              <a:latin typeface="+mn-lt"/>
-              <a:ea typeface="+mn-ea"/>
-              <a:cs typeface="+mn-cs"/>
-            </a:endParaRPr>
-          </a:p>
-          <a:p>
-            <a:r>
-              <a:rPr lang="en-ZA" sz="1200" b="1" i="0" kern="1200" cap="all" dirty="0">
-                <a:solidFill>
-                  <a:schemeClr val="tx1"/>
-                </a:solidFill>
-                <a:effectLst/>
-                <a:latin typeface="+mn-lt"/>
-                <a:ea typeface="+mn-ea"/>
-                <a:cs typeface="+mn-cs"/>
-              </a:rPr>
-              <a:t>Extrapolating — Where</a:t>
-            </a:r>
-          </a:p>
-          <a:p>
-            <a:r>
-              <a:rPr lang="en-ZA" sz="1200" b="0" i="0" kern="1200" dirty="0">
-                <a:solidFill>
-                  <a:schemeClr val="tx1"/>
-                </a:solidFill>
-                <a:effectLst/>
-                <a:latin typeface="+mn-lt"/>
-                <a:ea typeface="+mn-ea"/>
-                <a:cs typeface="+mn-cs"/>
-              </a:rPr>
-              <a:t>Where Does Performance Measurement Break Down Across Functions?</a:t>
-            </a:r>
-          </a:p>
-          <a:p>
-            <a:endParaRPr lang="en-ZA" sz="1200" b="0" i="0" kern="1200" dirty="0">
-              <a:solidFill>
-                <a:schemeClr val="tx1"/>
-              </a:solidFill>
-              <a:effectLst/>
-              <a:latin typeface="+mn-lt"/>
-              <a:ea typeface="+mn-ea"/>
-              <a:cs typeface="+mn-cs"/>
-            </a:endParaRPr>
-          </a:p>
-          <a:p>
-            <a:r>
-              <a:rPr lang="en-ZA" sz="1200" b="1" i="0" kern="1200" cap="all" dirty="0">
-                <a:solidFill>
-                  <a:schemeClr val="tx1"/>
-                </a:solidFill>
-                <a:effectLst/>
-                <a:latin typeface="+mn-lt"/>
-                <a:ea typeface="+mn-ea"/>
-                <a:cs typeface="+mn-cs"/>
-              </a:rPr>
-              <a:t>Integration — Collective</a:t>
-            </a:r>
-          </a:p>
-          <a:p>
-            <a:r>
-              <a:rPr lang="en-ZA" sz="1200" b="0" i="0" kern="1200" dirty="0">
-                <a:solidFill>
-                  <a:schemeClr val="tx1"/>
-                </a:solidFill>
-                <a:effectLst/>
-                <a:latin typeface="+mn-lt"/>
-                <a:ea typeface="+mn-ea"/>
-                <a:cs typeface="+mn-cs"/>
-              </a:rPr>
-              <a:t>Cross-Leadership Performance Intelligence</a:t>
-            </a:r>
-          </a:p>
-          <a:p>
-            <a:endParaRPr lang="en-ZA" sz="1200" b="0" i="0" kern="1200" dirty="0">
-              <a:solidFill>
-                <a:schemeClr val="tx1"/>
-              </a:solidFill>
-              <a:effectLst/>
-              <a:latin typeface="+mn-lt"/>
-              <a:ea typeface="+mn-ea"/>
-              <a:cs typeface="+mn-cs"/>
-            </a:endParaRPr>
-          </a:p>
-          <a:p>
-            <a:r>
-              <a:rPr lang="en-ZA" sz="1200" b="1" i="0" kern="1200" cap="all" dirty="0">
-                <a:solidFill>
-                  <a:schemeClr val="tx1"/>
-                </a:solidFill>
-                <a:effectLst/>
-                <a:latin typeface="+mn-lt"/>
-                <a:ea typeface="+mn-ea"/>
-                <a:cs typeface="+mn-cs"/>
-              </a:rPr>
-              <a:t>Application — In Practice</a:t>
-            </a:r>
-          </a:p>
-          <a:p>
-            <a:r>
-              <a:rPr lang="en-ZA" sz="1200" b="0" i="0" kern="1200" dirty="0">
-                <a:solidFill>
-                  <a:schemeClr val="tx1"/>
-                </a:solidFill>
-                <a:effectLst/>
-                <a:latin typeface="+mn-lt"/>
-                <a:ea typeface="+mn-ea"/>
-                <a:cs typeface="+mn-cs"/>
-              </a:rPr>
-              <a:t>Applying the Four Consequences of Weak Review Discipline</a:t>
-            </a:r>
-          </a:p>
-          <a:p>
-            <a:endParaRPr lang="en-ZA" sz="1200" b="0" i="0" kern="1200" dirty="0">
-              <a:solidFill>
-                <a:schemeClr val="tx1"/>
-              </a:solidFill>
-              <a:effectLst/>
-              <a:latin typeface="+mn-lt"/>
-              <a:ea typeface="+mn-ea"/>
-              <a:cs typeface="+mn-cs"/>
-            </a:endParaRPr>
-          </a:p>
-          <a:p>
-            <a:endParaRPr lang="en-US" dirty="0"/>
+              <a:rPr b="1"/>
+              <a:t>FACILITATOR GUIDE · SESSION OVERVIEW</a:t>
+            </a:r>
+          </a:p>
+          <a:p/>
+          <a:p>
+            <a:r>
+              <a:rPr b="1"/>
+              <a:t>HOW TO USE THIS SLIDE:</a:t>
+            </a:r>
+          </a:p>
+          <a:p>
+            <a:r>
+              <a:rPr b="1"/>
+              <a:t>1. Walk the five sections in one sentence each, using the list below.</a:t>
+            </a:r>
+          </a:p>
+          <a:p>
+            <a:r>
+              <a:t>2. Say that Section 1 builds the review discipline, Sections 2 and 3 show what weakens it, Section 4 lifts it to enterprise level, and Section 5 applies it to the group's own strategy.</a:t>
+            </a:r>
+          </a:p>
+          <a:p>
+            <a:r>
+              <a:t>3. Tell participants how the unit runs: you teach all five sections from the deck first, and they then complete the unit on the portal, in the session or after it.</a:t>
+            </a:r>
+          </a:p>
+          <a:p/>
+          <a:p>
+            <a:r>
+              <a:rPr b="1"/>
+              <a:t>THE FIVE SECTIONS:</a:t>
+            </a:r>
+          </a:p>
+          <a:p>
+            <a:r>
+              <a:t>- Section 1 · Awareness — What: establishing performance measurement as an execution visibility discipline, and introducing the Review–Realign–Restore Cycle as the mechanism that keeps strategy correctable.</a:t>
+            </a:r>
+          </a:p>
+          <a:p/>
+          <a:p>
+            <a:r>
+              <a:t>- Section 2 · Intelligence — Why: why the discipline of review conversations is the factor that determines whether strategy execution sustains momentum or quietly stalls.</a:t>
+            </a:r>
+          </a:p>
+          <a:p/>
+          <a:p>
+            <a:r>
+              <a:t>- Section 3 · Extrapolating — Where: where the collective intelligence for execution discipline of the leadership team unintentionally weakens the performance measurement discipline, through four characteristic fractures.</a:t>
+            </a:r>
+          </a:p>
+          <a:p/>
+          <a:p>
+            <a:r>
+              <a:t>- Section 4 · Integration — Collective: building the Enterprise Performance Intelligence Circle (EPIC), the mechanism through which the executive leadership team turns individual performance management (PM) review signals into a shared view of enterprise execution momentum.</a:t>
+            </a:r>
+          </a:p>
+          <a:p/>
+          <a:p>
+            <a:r>
+              <a:t>- Section 5 · Application — In Practice: each group sets two decision points against each of the four consequences of weak review discipline, for the strategy in its team's Capstone S2R® Blueprint, then tests the WARD check-up it set in Unit 6.</a:t>
+            </a:r>
           </a:p>
         </p:txBody>
       </p:sp>
@@ -4109,6 +3975,7 @@
           <a:lstStyle/>
           <a:p>
             <a:r>
+              <a:rPr b="1"/>
               <a:t>SECTION 1 · AWARENESS — WHAT</a:t>
             </a:r>
           </a:p>
@@ -4117,15 +3984,46 @@
               <a:t>What is Performance Measurement?</a:t>
             </a:r>
           </a:p>
-          <a:p>
-            <a:r>
-              <a:t>Establishing performance measurement as an execution visibility discipline — and introducing the Review–Realign–Restore Cycle as the mechanism that keeps strategy correctable.</a:t>
-            </a:r>
-          </a:p>
           <a:p/>
           <a:p>
             <a:r>
-              <a:t>Section learning outcomes:</a:t>
+              <a:rPr b="1"/>
+              <a:t>HOW THIS SECTION RUNS:</a:t>
+            </a:r>
+          </a:p>
+          <a:p>
+            <a:r>
+              <a:rPr b="1"/>
+              <a:t>1. 1.1 The execution visibility infrastructure: from activity to progress.</a:t>
+            </a:r>
+          </a:p>
+          <a:p>
+            <a:r>
+              <a:rPr b="1"/>
+              <a:t>2. 1.2 The four strategic purposes of measurement, each from both sides.</a:t>
+            </a:r>
+          </a:p>
+          <a:p>
+            <a:r>
+              <a:t>3. 1.3 From performance measurement to execution recovery: the Review–Realign–Restore Cycle (R3).</a:t>
+            </a:r>
+          </a:p>
+          <a:p>
+            <a:r>
+              <a:t>4. 1.4 The Accountability Loop: the three root causes and how GROW achieves each recovery.</a:t>
+            </a:r>
+          </a:p>
+          <a:p>
+            <a:r>
+              <a:rPr b="1"/>
+              <a:t>5. The Section 1 Reflections slide.</a:t>
+            </a:r>
+          </a:p>
+          <a:p/>
+          <a:p>
+            <a:r>
+              <a:rPr b="1"/>
+              <a:t>SECTION LEARNING OUTCOMES:</a:t>
             </a:r>
           </a:p>
           <a:p>
@@ -4141,48 +4039,54 @@
           <a:p/>
           <a:p>
             <a:r>
-              <a:t>HOW TO TEACH THE SECTION:</a:t>
-            </a:r>
-          </a:p>
-          <a:p>
-            <a:r>
-              <a:t>Open with the core provocation: "Work is happening. Teams are busy. Initiatives are underway. </a:t>
-            </a:r>
-          </a:p>
-          <a:p>
-            <a:r>
-              <a:t>But can you confidently say the work being done is actually advancing the strategy?" </a:t>
-            </a:r>
-          </a:p>
-          <a:p>
-            <a:r>
-              <a:t>This question unlocks the gap that this entire unit addresses — the difference between activity visibility and progress visibility.</a:t>
+              <a:rPr b="1"/>
+              <a:t>HOW TO OPEN THE SECTION:</a:t>
             </a:r>
           </a:p>
           <a:p/>
           <a:p>
             <a:r>
-              <a:t>TEACHING NOTES FROM THE FACILITATOR GUIDE:</a:t>
-            </a:r>
-          </a:p>
-          <a:p>
-            <a:r>
-              <a:t>1.1 · The Execution Visibility Infrastructure. Open with the provocation: "Work is happening. Teams are busy. Initiatives are underway. But can you confidently say the work being done is actually advancing the strategy?" Then teach performance measurement as the visibility infrastructure of the strategy: without it, strategy stays interpretive, each function develops its own sense of progress and activity is mistaken for advancement. The shift to land is from "What work was done?" to "What changed because of the work?", in people performance and in organisational performance.</a:t>
-            </a:r>
-          </a:p>
-          <a:p>
-            <a:r>
-              <a:t>1.2 · The Four Strategic Purposes. Teach execution rhythm first: regular reviews reveal the subtle signals early and prevent the most common leadership surprise, discovering failure at the end of the reporting period. Then teach the four purposes one card at a time, each from both sides. Most leaders can name visibility and accountability; fewer name execution intelligence (data interpreted into decision insight through disciplined conversation) and timely correction.</a:t>
-            </a:r>
-          </a:p>
-          <a:p>
-            <a:r>
-              <a:t>1.3 · From Performance Measurement to Execution Recovery. Link the four purposes to the Review–Realign–Restore Cycle (R3): Review brings together visibility, accountability and execution intelligence; Realign diagnoses the gap; Restore activates timely correction. Teach each stage for people performance and organisational performance. Name the outcome of each stage, and close on how the cycle stays continuous: the next Review checks whether the corrective actions worked.</a:t>
-            </a:r>
-          </a:p>
-          <a:p>
-            <a:r>
-              <a:t>1.4 · The Accountability Loop. Start from the default response to a gap: pushing harder. The key facilitation moment is when leaders understand that most performance gaps have a diagnosable cause, and that the three root causes (accountability, skill, structural misfit) require different responses. Help leaders distinguish between team members who cannot perform and those who will not: inability needs development, and unwillingness needs accountability. Then teach how each recovery is achieved through the GROW model of Unit 7 (Goal, Reality, Options, Will). Close on keeping the performance conversation separate from the role conversation.</a:t>
+              <a:rPr b="1"/>
+              <a:t>1. Describe the pattern.</a:t>
+            </a:r>
+          </a:p>
+          <a:p>
+            <a:r>
+              <a:t>Say: "In many organisations, enormous effort goes into designing strategy. Leaders invest months clarifying direction, defining Objectives and Key Results, setting targets and aligning teams around ambitious outcomes. Scorecards are built. KPIs are cascaded. Performance frameworks are communicated."</a:t>
+            </a:r>
+          </a:p>
+          <a:p/>
+          <a:p>
+            <a:r>
+              <a:rPr b="1"/>
+              <a:t>2. Give the provocation.</a:t>
+            </a:r>
+          </a:p>
+          <a:p>
+            <a:r>
+              <a:t>Say: "Several months later, when leadership teams pause and reflect, the same uncertainty often appears. Work is happening. Teams are busy. Initiatives are underway."</a:t>
+            </a:r>
+          </a:p>
+          <a:p>
+            <a:r>
+              <a:t>Ask: "Can you confidently say the work being done is actually advancing the strategy?"</a:t>
+            </a:r>
+          </a:p>
+          <a:p>
+            <a:r>
+              <a:t>Let the room sit with it. This question opens the gap the whole unit addresses: the difference between activity visibility and progress visibility.</a:t>
+            </a:r>
+          </a:p>
+          <a:p/>
+          <a:p>
+            <a:r>
+              <a:rPr b="1"/>
+              <a:t>3. Bridge to 1.1.</a:t>
+            </a:r>
+          </a:p>
+          <a:p>
+            <a:r>
+              <a:t>Say: "Performance measurement exists to close that gap."</a:t>
             </a:r>
           </a:p>
         </p:txBody>
@@ -4268,169 +4172,169 @@
           <a:lstStyle/>
           <a:p>
             <a:r>
+              <a:rPr b="1"/>
               <a:t>1.1 — THE EXECUTION VISIBILITY INFRASTRUCTURE (Core concept)</a:t>
             </a:r>
           </a:p>
           <a:p/>
           <a:p>
             <a:r>
-              <a:t>Content:</a:t>
-            </a:r>
-          </a:p>
-          <a:p>
-            <a:r>
-              <a:t>The performance management system has been set and mechanisms for establishing performance are in place. </a:t>
-            </a:r>
-          </a:p>
-          <a:p>
-            <a:r>
-              <a:t>Commitments have been secured. Now the most important discipline of execution begins.</a:t>
-            </a:r>
-          </a:p>
-          <a:p>
-            <a:r>
-              <a:t>Strategy execution fails at the level of visibility. </a:t>
-            </a:r>
-          </a:p>
-          <a:p>
-            <a:r>
-              <a:t>Performance measurement is the discipline that makes execution visible. It answers a simple but decisive question:</a:t>
-            </a:r>
-          </a:p>
-          <a:p>
-            <a:r>
-              <a:t>Are we actually moving closer to our Success in Practice? It is the execution visibility infrastructure!</a:t>
+              <a:rPr b="1"/>
+              <a:t>HOW TO TEACH IT:</a:t>
             </a:r>
           </a:p>
           <a:p/>
+          <a:p>
+            <a:r>
+              <a:rPr b="1"/>
+              <a:t>1. Set the moment.</a:t>
+            </a:r>
+          </a:p>
+          <a:p>
+            <a:r>
+              <a:t>Say: "The performance management system has been set and the mechanisms for establishing performance are in place. Commitments have been secured. Now the most important discipline of execution begins."</a:t>
+            </a:r>
+          </a:p>
           <a:p/>
           <a:p>
             <a:r>
-              <a:t>The visibility infrastructure: </a:t>
-            </a:r>
-          </a:p>
-          <a:p>
-            <a:r>
-              <a:t>Performance measurement creates the visibility infrastructure that allows leaders to observe whether the organisation is genuinely progressing toward its strategic outcomes. Without this infrastructure, strategy remains largely interpretive. </a:t>
-            </a:r>
-          </a:p>
-          <a:p>
-            <a:r>
-              <a:t>Each function develops its own sense of progress. </a:t>
-            </a:r>
-          </a:p>
-          <a:p>
-            <a:r>
-              <a:t>Activity becomes mistaken for advancement. Energy is expended, but the connection to the enterprise result becomes difficult to see.</a:t>
-            </a:r>
-          </a:p>
-          <a:p>
-            <a:r>
-              <a:t>Performance measurement restores that line of sight. </a:t>
-            </a:r>
-          </a:p>
-          <a:p>
-            <a:r>
-              <a:t>It allows the organisation to move from activity visibility to progress visibility.</a:t>
+              <a:rPr b="1"/>
+              <a:t>2. Read the question on the slide.</a:t>
+            </a:r>
+          </a:p>
+          <a:p>
+            <a:r>
+              <a:t>Say: "Strategy execution fails at the level of visibility. Performance measurement is the discipline that makes execution visible. It answers one decisive question:"</a:t>
+            </a:r>
+          </a:p>
+          <a:p>
+            <a:r>
+              <a:t>Read: "Are we actually moving closer to our Success in Practice?"</a:t>
+            </a:r>
+          </a:p>
+          <a:p>
+            <a:r>
+              <a:t>Say: "That is why we call it the execution visibility infrastructure of the strategy."</a:t>
             </a:r>
           </a:p>
           <a:p/>
           <a:p>
             <a:r>
-              <a:t>Most organisations are extremely good at measuring activity: how many projects were launched, how many meetings were held, how many deliverables were completed. </a:t>
-            </a:r>
-          </a:p>
-          <a:p>
-            <a:r>
-              <a:t>These indicators provide evidence that work is occurring. But activity alone does not indicate whether the organisation is actually moving closer to the strategic outcome it set out to achieve.</a:t>
+              <a:rPr b="1"/>
+              <a:t>3. Teach the visibility infrastructure.</a:t>
+            </a:r>
+          </a:p>
+          <a:p>
+            <a:r>
+              <a:t>Say: "Without this infrastructure, strategy remains largely interpretive. Each function develops its own sense of progress. Activity becomes mistaken for advancement. Energy is expended, and the connection to the enterprise result becomes difficult to see. Performance measurement restores that line of sight. It moves the organisation from activity visibility to progress visibility."</a:t>
+            </a:r>
+          </a:p>
+          <a:p>
+            <a:r>
+              <a:t>Teach it on both sides:</a:t>
+            </a:r>
+          </a:p>
+          <a:p>
+            <a:r>
+              <a:t>People performance: leaders see whether individuals and teams are moving their KPIs, OKRs and behaviours towards the enterprise result.</a:t>
+            </a:r>
+          </a:p>
+          <a:p>
+            <a:r>
+              <a:t>Organisational performance: leaders see whether the organisational conditions support the execution of the individuals' tasks. These conditions are the Environment, Systems, Resources and Governance (ESRG) agreed in Unit 6.</a:t>
             </a:r>
           </a:p>
           <a:p/>
           <a:p>
             <a:r>
-              <a:t>Performance measurement therefore asks a different set of questions. </a:t>
-            </a:r>
-          </a:p>
-          <a:p>
-            <a:r>
-              <a:t>The question moves from "What work was done?" to "What changed because of the work?“</a:t>
-            </a:r>
-          </a:p>
-          <a:p>
-            <a:r>
-              <a:t> The organisation examines evidence of progress. This shift transforms performance management from an administrative reporting exercise into an execution intelligence system.</a:t>
+              <a:rPr b="1"/>
+              <a:t>4. Teach the move from activity to progress.</a:t>
+            </a:r>
+          </a:p>
+          <a:p>
+            <a:r>
+              <a:t>Say: "Most organisations are extremely good at measuring activity: how many projects were launched, how many meetings were held, how many deliverables were completed. These indicators show that work is occurring and create a sense of operational movement. Activity alone does not show whether the organisation is moving closer to the outcome it set out to achieve."</a:t>
+            </a:r>
+          </a:p>
+          <a:p>
+            <a:r>
+              <a:t>Point to the line at the foot of the slide: "The question moves from 'What work was done?' to 'What changed because of the work?' This shift turns performance management from an administrative reporting exercise into an execution intelligence system."</a:t>
+            </a:r>
+          </a:p>
+          <a:p>
+            <a:r>
+              <a:t>Teach it on both sides:</a:t>
+            </a:r>
+          </a:p>
+          <a:p>
+            <a:r>
+              <a:t>People performance: the question moves from "How busy are our people?" to "What has their work changed in the Key Result?"</a:t>
+            </a:r>
+          </a:p>
+          <a:p>
+            <a:r>
+              <a:t>Organisational performance: the question moves from "Has the support been put in place?" to "Does the support enable the individuals' tasks to move the Key Result?"</a:t>
+            </a:r>
+          </a:p>
+          <a:p>
+            <a:r>
+              <a:t>Deepen, say: "Many costly strategic decisions are made quietly mid-execution, when the team decides that what has been done is probably enough. Audit the exits: where exactly did we decide to stop, and why?"</a:t>
+            </a:r>
+          </a:p>
+          <a:p>
+            <a:r>
+              <a:t>(Insight: Finished or settled. Source: Journal, 25 June 2026 — Professional Insights: Strategy)</a:t>
+            </a:r>
+          </a:p>
+          <a:p>
+            <a:r>
+              <a:t>Deepen, say: "A culture that rewards understanding without requiring corresponding action trains people to be articulate more than effective. Check whether people acted on what they understood."</a:t>
+            </a:r>
+          </a:p>
+          <a:p>
+            <a:r>
+              <a:t>(Insight: Understanding and action. Source: Journal, 8 June 2026 — Professional Insights: Culture)</a:t>
             </a:r>
           </a:p>
           <a:p/>
+          <a:p>
+            <a:r>
+              <a:rPr b="1"/>
+              <a:t>5. Ask, now that the shift is taught.</a:t>
+            </a:r>
+          </a:p>
+          <a:p>
+            <a:r>
+              <a:t>Ask: "Does your organisation measure activity or progress? What is the difference in your context?"</a:t>
+            </a:r>
+          </a:p>
+          <a:p>
+            <a:r>
+              <a:t>Take two answers.</a:t>
+            </a:r>
+          </a:p>
           <a:p/>
+          <a:p>
+            <a:r>
+              <a:rPr b="1"/>
+              <a:t>6. Bridge to 1.2.</a:t>
+            </a:r>
+          </a:p>
+          <a:p>
+            <a:r>
+              <a:t>Say: "If measurement is the visibility infrastructure, what exactly does it do for the organisation? Four things."</a:t>
+            </a:r>
+          </a:p>
           <a:p/>
           <a:p>
             <a:r>
-              <a:t>PEOPLE PERFORMANCE AND ORGANISATIONAL PERFORMANCE:</a:t>
-            </a:r>
-          </a:p>
-          <a:p>
-            <a:r>
-              <a:t>The visibility infrastructure.</a:t>
-            </a:r>
-          </a:p>
-          <a:p>
-            <a:r>
-              <a:t>People performance: leaders see whether individuals and teams are moving their KPIs, OKRs and behaviours toward the enterprise result.</a:t>
-            </a:r>
-          </a:p>
-          <a:p>
-            <a:r>
-              <a:t>Organisational performance: leaders see whether the organisational conditions support the execution of the individuals' tasks. These conditions are the Environment, Systems, Resources and Governance (ESRG) agreed in Unit 6.</a:t>
-            </a:r>
-          </a:p>
-          <a:p>
-            <a:r>
-              <a:t>From activity to progress.</a:t>
-            </a:r>
-          </a:p>
-          <a:p>
-            <a:r>
-              <a:t>People performance: the question moves from "How busy are our people?" to "What has their work changed in the Key Result?"</a:t>
-            </a:r>
-          </a:p>
-          <a:p>
-            <a:r>
-              <a:t>Organisational performance: the question moves from "Has the support been put in place?" to "Does the support enable the individuals' tasks to move the Key Result?"</a:t>
-            </a:r>
-          </a:p>
-          <a:p/>
-          <a:p>
-            <a:r>
-              <a:t>What activity measures give: Counts of projects launched, meetings held, campaigns executed and deliverables completed create a sense of operational movement.</a:t>
-            </a:r>
-          </a:p>
-          <a:p/>
-          <a:p>
-            <a:r>
-              <a:t>Professional insights:</a:t>
-            </a:r>
-          </a:p>
-          <a:p/>
-          <a:p>
-            <a:r>
-              <a:t>Finished or settled: Many costly strategic decisions are made quietly mid-execution, when the team decides that what has been done is probably enough. Audit the exits: where exactly did we decide to stop, and why? The gap between results and potential often sits at that point.</a:t>
-            </a:r>
-          </a:p>
-          <a:p>
-            <a:r>
-              <a:t>Source: Journal, 25 June 2026 — Professional Insights: Strategy</a:t>
-            </a:r>
-          </a:p>
-          <a:p/>
-          <a:p>
-            <a:r>
-              <a:t>Understanding and action: A culture that rewards understanding without requiring corresponding action trains people to be articulate more than effective. Check whether people acted on what they understood.</a:t>
-            </a:r>
-          </a:p>
-          <a:p>
-            <a:r>
-              <a:t>Source: Journal, 8 June 2026 — Professional Insights: Culture</a:t>
+              <a:rPr b="1"/>
+              <a:t>ON THE PORTAL, AFTER THE TEACHING:</a:t>
+            </a:r>
+          </a:p>
+          <a:p>
+            <a:r>
+              <a:t>Participants write the reflection at the foot of part 1.1: what they measure today that reflects activity, what would reflect genuine progress towards their strategic outcome, and what evidence they hold on whether the organisational conditions support the tasks behind that progress.</a:t>
             </a:r>
           </a:p>
         </p:txBody>
@@ -4516,194 +4420,152 @@
           <a:lstStyle/>
           <a:p>
             <a:r>
+              <a:rPr b="1"/>
               <a:t>1.2 — THE FOUR STRATEGIC PURPOSES OF PERFORMANCE MEASUREMENT</a:t>
             </a:r>
           </a:p>
           <a:p/>
           <a:p>
             <a:r>
-              <a:t>Content:</a:t>
-            </a:r>
-          </a:p>
-          <a:p>
-            <a:r>
-              <a:t>Performance measurement creates execution rhythm. Most strategic outcomes are the result of cumulative progress built over time. </a:t>
-            </a:r>
-          </a:p>
-          <a:p>
-            <a:r>
-              <a:t>Regular review cycles allow leaders to notice the subtle signals that indicate whether execution is strengthening or weakening. </a:t>
-            </a:r>
-          </a:p>
-          <a:p>
-            <a:r>
-              <a:t>Momentum may begin to accelerate in one area while slowing in another. </a:t>
-            </a:r>
-          </a:p>
-          <a:p>
-            <a:r>
-              <a:t>Resource constraints may appear. Decision bottlenecks may surface. </a:t>
-            </a:r>
-          </a:p>
-          <a:p>
-            <a:r>
-              <a:t>Capability gaps may become visible. When these signals are visible early, leaders can respond while the situation is still manageable.</a:t>
-            </a:r>
-          </a:p>
-          <a:p>
-            <a:r>
-              <a:t>This rhythm prevents the most common leadership surprise in organisations: discovering performance failure only at the end of the reporting period. Performance measurement ensures that strategy is observed while it is unfolding, as well as evaluated after the fact.</a:t>
+              <a:rPr b="1"/>
+              <a:t>HOW TO TEACH IT:</a:t>
             </a:r>
           </a:p>
           <a:p/>
           <a:p>
             <a:r>
-              <a:t>At its core, performance measurement serves four strategic purposes within the organisation. Select each to explore.</a:t>
+              <a:rPr b="1"/>
+              <a:t>1. Teach execution rhythm first.</a:t>
+            </a:r>
+          </a:p>
+          <a:p>
+            <a:r>
+              <a:t>Say: "Performance measurement creates execution rhythm. Most strategic outcomes are the result of cumulative progress built over time. Regular review cycles let leaders notice the subtle signals that show whether execution is strengthening or weakening. Momentum may accelerate in one area while slowing in another. Resource constraints may appear. Decision bottlenecks may surface. Capability gaps may become visible. Seen early, these signals can be dealt with while the situation is still manageable.</a:t>
+            </a:r>
+          </a:p>
+          <a:p>
+            <a:r>
+              <a:t>This rhythm prevents the most common leadership surprise: discovering performance failure only at the end of the reporting period. Strategy is observed while it is unfolding, as well as evaluated after the fact."</a:t>
             </a:r>
           </a:p>
           <a:p/>
           <a:p>
             <a:r>
-              <a:t>Purpose 01 - Creates Visibility</a:t>
-            </a:r>
-          </a:p>
-          <a:p>
-            <a:r>
-              <a:t>Leaders can observe where the organisation is gaining momentum and where it is stalling. </a:t>
-            </a:r>
-          </a:p>
-          <a:p>
-            <a:r>
-              <a:t>Strategic priorities that once existed only as intentions begin to appear as measurable progress signals. </a:t>
-            </a:r>
-          </a:p>
-          <a:p>
-            <a:r>
-              <a:t>Without measurement, leaders are flying blind — confident in effort but uncertain about direction.</a:t>
-            </a:r>
-          </a:p>
-          <a:p>
-            <a:r>
-              <a:t>Facilitator prompt: “Where in your organisation does execution happen in the dark? </a:t>
-            </a:r>
-          </a:p>
-          <a:p>
-            <a:r>
-              <a:t>Where are you most likely to be surprised at the end of a reporting period?”</a:t>
+              <a:rPr b="1"/>
+              <a:t>2. Purpose 01 · Creates Visibility.</a:t>
+            </a:r>
+          </a:p>
+          <a:p>
+            <a:r>
+              <a:t>Say: "Leaders can observe where the organisation is gaining momentum and where it is stalling. Strategic priorities that once existed only as intentions appear as measurable progress signals. Without measurement, leaders are flying blind: confident in effort and uncertain about direction."</a:t>
+            </a:r>
+          </a:p>
+          <a:p>
+            <a:r>
+              <a:t>People performance: where individuals' and teams' KPIs are gaining momentum and where they are stalling.</a:t>
+            </a:r>
+          </a:p>
+          <a:p>
+            <a:r>
+              <a:t>Organisational performance: where the organisational conditions are supporting the execution of the tasks, and where they are holding it back.</a:t>
+            </a:r>
+          </a:p>
+          <a:p>
+            <a:r>
+              <a:t>Ask: "Where in your organisation does execution happen in the dark? Where are you most likely to be surprised at the end of a reporting period?"</a:t>
             </a:r>
           </a:p>
           <a:p/>
           <a:p>
             <a:r>
-              <a:t>Purpose 02- Establishes Accountability</a:t>
-            </a:r>
-          </a:p>
-          <a:p>
-            <a:r>
-              <a:t>Strategic completion requires tracking every component of the declared goal, including the parts that bring no visible victory. Record what has been accomplished as evidence that commitments are being kept.</a:t>
-            </a:r>
-          </a:p>
-          <a:p>
-            <a:r>
-              <a:t>Leaders and teams understand which part of the strategy they are responsible for advancing. </a:t>
-            </a:r>
-          </a:p>
-          <a:p>
-            <a:r>
-              <a:t>Accountability without measurement is aspiration without a feedback loop — it depends entirely on personal commitment, with no organisational structure behind it.</a:t>
-            </a:r>
-          </a:p>
-          <a:p>
-            <a:r>
-              <a:t>Facilitator prompt: “If your KPIs disappeared from your scorecard but the targets remained unchanged — how many would still be actively owned?”</a:t>
+              <a:rPr b="1"/>
+              <a:t>3. Purpose 02 · Establishes Accountability.</a:t>
+            </a:r>
+          </a:p>
+          <a:p>
+            <a:r>
+              <a:t>Say: "Strategic completion requires tracking every component of the declared goal, including the parts that bring no visible victory. What has been accomplished is recorded as evidence that commitments are being kept. Leaders and teams understand which part of the strategy they are responsible for advancing. Accountability without measurement is aspiration without a feedback loop: it depends entirely on personal commitment, with no organisational structure behind it."</a:t>
+            </a:r>
+          </a:p>
+          <a:p>
+            <a:r>
+              <a:t>People performance: individuals and teams know which part of the strategy they are responsible for advancing, and their delivery is recorded as evidence.</a:t>
+            </a:r>
+          </a:p>
+          <a:p>
+            <a:r>
+              <a:t>Organisational performance: leaders account for whether the organisational conditions they undertook to provide in Unit 7 support the execution of the individuals' tasks.</a:t>
+            </a:r>
+          </a:p>
+          <a:p>
+            <a:r>
+              <a:t>Ask: "If your KPIs disappeared from your scorecard but the targets remained unchanged, how many would still be actively owned?"</a:t>
             </a:r>
           </a:p>
           <a:p/>
           <a:p>
             <a:r>
-              <a:t>Purpose 03- Execution intelligence: </a:t>
-            </a:r>
-          </a:p>
-          <a:p>
-            <a:r>
-              <a:t>At this point, performance measurement begins to evolve beyond data collection. It becomes execution intelligence. Data on its own rarely improves performance. Numbers simply describe what has happened. Insight emerges only when those numbers are interpreted through disciplined conversation. Performance measurement therefore transforms data into decision insight.</a:t>
-            </a:r>
-          </a:p>
-          <a:p>
-            <a:r>
-              <a:t>Each review cycle helps leaders answer three essential questions:</a:t>
-            </a:r>
-          </a:p>
-          <a:p>
-            <a:r>
-              <a:t>1. What progress has been achieved since the last review?</a:t>
-            </a:r>
-          </a:p>
-          <a:p>
-            <a:r>
-              <a:t>2. What obstacles are preventing further progress?</a:t>
-            </a:r>
-          </a:p>
-          <a:p>
-            <a:r>
-              <a:t>3. What adjustment will restore momentum toward the target?</a:t>
-            </a:r>
-          </a:p>
-          <a:p>
-            <a:r>
-              <a:t>Through these conversations, performance management becomes a learning system. Teams develop a deeper understanding of how strategy unfolds in practice. Leaders strengthen their ability to guide execution through uncertainty and complexity.</a:t>
+              <a:rPr b="1"/>
+              <a:t>4. Purpose 03 · Execution Intelligence.</a:t>
+            </a:r>
+          </a:p>
+          <a:p>
+            <a:r>
+              <a:t>Say: "Here measurement moves beyond data collection. Data on its own rarely improves performance; numbers describe what has happened. Insight emerges when those numbers are interpreted through disciplined conversation. Each review cycle helps leaders answer three questions: What progress has been achieved since the last review? What obstacles are preventing further progress? What adjustment will restore momentum towards the target? Through these conversations, performance management becomes a learning system."</a:t>
+            </a:r>
+          </a:p>
+          <a:p>
+            <a:r>
+              <a:t>People performance: the review learns what accelerates and what slows the progress of individuals and teams.</a:t>
+            </a:r>
+          </a:p>
+          <a:p>
+            <a:r>
+              <a:t>Organisational performance: the review learns which organisational conditions enable execution and which constrain it.</a:t>
+            </a:r>
+          </a:p>
+          <a:p>
+            <a:r>
+              <a:t>Ask: "What did your organisation actually learn from its last strategy cycle? What did it learn about how execution works inside your system?"</a:t>
             </a:r>
           </a:p>
           <a:p/>
           <a:p>
             <a:r>
-              <a:t>Purpose 04- Enables Timely Correction</a:t>
-            </a:r>
-          </a:p>
-          <a:p>
-            <a:r>
-              <a:t>Early signals allow teams to intervene while progress is still recoverable. </a:t>
-            </a:r>
-          </a:p>
-          <a:p>
-            <a:r>
-              <a:t>Problems are addressed when they are small enough to resolve. </a:t>
-            </a:r>
-          </a:p>
-          <a:p>
-            <a:r>
-              <a:t>This purpose is why measurement frequency matters: a signal detected in week four is fundamentally different from the same signal detected in week twelve.</a:t>
-            </a:r>
-          </a:p>
-          <a:p>
-            <a:r>
-              <a:t>Facilitator prompt: “What is the average gap in your organisation between when a performance problem begins and when leadership first becomes aware of it? What does that gap cost?”</a:t>
+              <a:rPr b="1"/>
+              <a:t>5. Purpose 04 · Enables Timely Correction.</a:t>
+            </a:r>
+          </a:p>
+          <a:p>
+            <a:r>
+              <a:t>Say: "Early signals allow teams to intervene while progress is still recoverable. Problems are addressed when they are small enough to resolve. Without early signals, problems are discovered only when targets have already been missed. This is why measurement frequency matters: a signal detected in week four carries a different cost from the same signal detected in week twelve."</a:t>
+            </a:r>
+          </a:p>
+          <a:p>
+            <a:r>
+              <a:t>People performance: an early signal in an individual's progress lets the leader intervene while the KPI is still recoverable.</a:t>
+            </a:r>
+          </a:p>
+          <a:p>
+            <a:r>
+              <a:t>Organisational performance: an early signal in an organisational condition, such as a system outage, a capacity shortfall or a delayed decision, lets the leader responsible act before the individuals' delivery is affected.</a:t>
+            </a:r>
+          </a:p>
+          <a:p>
+            <a:r>
+              <a:t>Ask: "What is the average gap in your organisation between when a performance problem begins and when leadership first becomes aware of it? What does that gap cost?"</a:t>
             </a:r>
           </a:p>
           <a:p/>
           <a:p>
             <a:r>
-              <a:t>PEOPLE PERFORMANCE AND ORGANISATIONAL PERFORMANCE IN EACH PURPOSE:</a:t>
-            </a:r>
-          </a:p>
-          <a:p>
-            <a:r>
-              <a:t>01 · Creates Visibility. People performance: where individuals' and teams' KPIs are gaining momentum and where they are stalling. Organisational performance: where the organisational conditions are supporting the execution of the tasks, and where they are holding it back.</a:t>
-            </a:r>
-          </a:p>
-          <a:p>
-            <a:r>
-              <a:t>02 · Establishes Accountability. People performance: individuals and teams know which part of the strategy they are responsible for advancing, and their delivery is recorded as evidence. Organisational performance: leaders account for whether the organisational conditions they undertook to provide in Unit 7 support the execution of the individuals' tasks.</a:t>
-            </a:r>
-          </a:p>
-          <a:p>
-            <a:r>
-              <a:t>03 · Execution Intelligence. People performance: the review learns what accelerates and what slows the progress of individuals and teams. Organisational performance: the review learns which organisational conditions enable execution and which constrain it.</a:t>
-            </a:r>
-          </a:p>
-          <a:p>
-            <a:r>
-              <a:t>04 · Enables Timely Correction. People performance: an early signal in an individual's progress lets the leader intervene while the KPI is still recoverable. Organisational performance: an early signal in an organisational condition, such as a system outage, a capacity shortfall or a delayed decision, lets the leader responsible act before the individuals' delivery is affected.</a:t>
+              <a:rPr b="1"/>
+              <a:t>6. Bridge to 1.3.</a:t>
+            </a:r>
+          </a:p>
+          <a:p>
+            <a:r>
+              <a:t>Say: "The four purposes show you where a gap is. Identifying a gap does not by itself resolve it. The next slide gives the cycle that does."</a:t>
             </a:r>
           </a:p>
         </p:txBody>
@@ -4789,224 +4651,137 @@
           <a:lstStyle/>
           <a:p>
             <a:r>
+              <a:rPr b="1"/>
               <a:t>1.3 — FROM PERFORMANCE MEASUREMENT TO EXECUTION RECOVERY (the Review–Realign–Restore Cycle, R3)</a:t>
             </a:r>
           </a:p>
           <a:p/>
           <a:p>
             <a:r>
-              <a:t>In Section 1.2, we established that performance measurement serves four strategic purposes: creating visibility, establishing accountability, generating execution intelligence and enabling timely correction.</a:t>
+              <a:rPr b="1"/>
+              <a:t>HOW TO TEACH IT:</a:t>
             </a:r>
           </a:p>
           <a:p/>
           <a:p>
             <a:r>
-              <a:t>These four purposes work together to help leaders understand how strategy is progressing and where intervention is required.</a:t>
-            </a:r>
-          </a:p>
-          <a:p>
-            <a:r>
-              <a:t>But identifying a performance gap does not automatically resolve it. </a:t>
-            </a:r>
-          </a:p>
-          <a:p>
-            <a:r>
-              <a:t>Leaders need a disciplined process for interpreting what the evidence reveals, identifying what needs attention and ensuring that corrective decisions translate into improved execution.</a:t>
+              <a:rPr b="1"/>
+              <a:t>1. Link to 1.2.</a:t>
+            </a:r>
+          </a:p>
+          <a:p>
+            <a:r>
+              <a:t>Say: "Part 1.2 established that performance measurement serves four purposes: creating visibility, establishing accountability, generating execution intelligence and enabling timely correction. Together they show how strategy is progressing and where intervention is required. Leaders still need a disciplined process for interpreting what the evidence reveals, identifying what needs attention and making sure corrective decisions turn into improved execution. Within the S2R® system, this process is the Review–Realign–Restore Cycle, R3: a recurring leadership rhythm that applies to people performance and organisational performance."</a:t>
             </a:r>
           </a:p>
           <a:p/>
           <a:p>
             <a:r>
-              <a:t>Within the S2R® system, this process is called the Review–Realign–Restore Cycle (R3).</a:t>
-            </a:r>
-          </a:p>
-          <a:p>
-            <a:r>
-              <a:t>The cycle provides a recurring leadership rhythm through which performance evidence is examined, execution gaps are addressed and progress is restored.</a:t>
-            </a:r>
-          </a:p>
-          <a:p>
-            <a:r>
-              <a:t>Stage 1 — Review: Establish Execution Reality</a:t>
-            </a:r>
-          </a:p>
-          <a:p>
-            <a:r>
-              <a:t>Review brings together the first three purposes of performance measurement: visibility, accountability and execution intelligence.</a:t>
-            </a:r>
-          </a:p>
-          <a:p>
-            <a:r>
-              <a:t>The KPI owner assesses progress against agreed targets and submits evidence of what has been achieved. </a:t>
-            </a:r>
-          </a:p>
-          <a:p>
-            <a:r>
-              <a:t>The leader independently reviews the same KPI, bringing a broader organisational perspective.</a:t>
-            </a:r>
-          </a:p>
-          <a:p>
-            <a:r>
-              <a:t>Together, they establish a shared understanding of execution reality.</a:t>
-            </a:r>
-          </a:p>
-          <a:p>
-            <a:r>
-              <a:t>Three questions guide the conversation:</a:t>
-            </a:r>
-          </a:p>
-          <a:p>
-            <a:r>
-              <a:t>What progress has been achieved against the agreed target?</a:t>
-            </a:r>
-          </a:p>
-          <a:p>
-            <a:r>
-              <a:t>What does the evidence tell us about performance?</a:t>
-            </a:r>
-          </a:p>
-          <a:p>
-            <a:r>
-              <a:t>Where is actual progress falling short of expectations?</a:t>
-            </a:r>
-          </a:p>
-          <a:p>
-            <a:r>
-              <a:t>Outcome: A shared, evidence-based understanding of progress and any emerging performance gaps.</a:t>
+              <a:rPr b="1"/>
+              <a:t>2. Teach Stage 1 · Review: Establish Execution Reality.</a:t>
+            </a:r>
+          </a:p>
+          <a:p>
+            <a:r>
+              <a:t>Say: "Review brings together the first three purposes: visibility, accountability and execution intelligence. The KPI owner assesses progress against agreed targets and submits evidence of what has been achieved. The leader independently reviews the same KPI, bringing a broader organisational perspective. Together they establish a shared understanding of execution reality."</a:t>
+            </a:r>
+          </a:p>
+          <a:p>
+            <a:r>
+              <a:t>Three questions guide the conversation: What progress has been achieved against the agreed target? What does the evidence tell us about performance? Where is actual progress falling short of expectations?</a:t>
+            </a:r>
+          </a:p>
+          <a:p>
+            <a:r>
+              <a:t>People performance: the individual and the leader establish the progress made against the agreed target.</a:t>
+            </a:r>
+          </a:p>
+          <a:p>
+            <a:r>
+              <a:t>Organisational performance: the leader brings the agreed measures or evidence of readiness for the organisational conditions, and the review establishes whether those conditions support the execution of the individuals' tasks.</a:t>
+            </a:r>
+          </a:p>
+          <a:p>
+            <a:r>
+              <a:t>Say: "Outcome: a shared, evidence-based understanding of progress and any emerging performance gaps."</a:t>
             </a:r>
           </a:p>
           <a:p/>
           <a:p>
             <a:r>
-              <a:t>Stage 2 — Realign: Diagnose and Address Execution Gaps</a:t>
-            </a:r>
-          </a:p>
-          <a:p>
-            <a:r>
-              <a:t>Once Review establishes where progress is falling short, Realign determines what is preventing the expected performance.</a:t>
-            </a:r>
-          </a:p>
-          <a:p>
-            <a:r>
-              <a:t>The leader activates the S2R® Accountability Loop to investigate whether the gap arises from:</a:t>
-            </a:r>
-          </a:p>
-          <a:p>
-            <a:r>
-              <a:t>Ownership: The individual understands the responsibility but has lost connection to its purpose or accountability.</a:t>
-            </a:r>
-          </a:p>
-          <a:p>
-            <a:r>
-              <a:t>Capability: The individual is committed but lacks the skills or support required to deliver.</a:t>
-            </a:r>
-          </a:p>
-          <a:p>
-            <a:r>
-              <a:t>Role or structural constraints: The responsibilities, resources or organisational conditions are preventing effective execution.</a:t>
-            </a:r>
-          </a:p>
-          <a:p>
-            <a:r>
-              <a:t>The leader and KPI owner identify an appropriate intervention, which may include renewed ownership, coaching, additional support or structural adjustments.</a:t>
-            </a:r>
-          </a:p>
-          <a:p>
-            <a:r>
-              <a:t>Outcome: A clear understanding of the underlying performance constraint and an agreed corrective response.</a:t>
+              <a:rPr b="1"/>
+              <a:t>3. Teach Stage 2 · Realign: Diagnose and Address Execution Gaps.</a:t>
+            </a:r>
+          </a:p>
+          <a:p>
+            <a:r>
+              <a:t>Say: "Once Review establishes where progress is falling short, Realign determines what is preventing the expected performance. The leader activates the S2R® Accountability Loop, part 1.4, to find whether the gap arises from ownership, where the individual has lost connection to the purpose or accountability; capability, where the individual is committed and lacks the skills or support; or role or structural constraints, where the responsibilities, resources or organisational conditions prevent effective execution. The leader and KPI owner identify an intervention: renewed ownership, coaching, additional support or structural adjustment."</a:t>
+            </a:r>
+          </a:p>
+          <a:p>
+            <a:r>
+              <a:t>People performance: the Accountability Loop diagnoses what is preventing the individual's expected performance.</a:t>
+            </a:r>
+          </a:p>
+          <a:p>
+            <a:r>
+              <a:t>Organisational performance: the leader determines what is preventing an organisational condition from supporting the execution of the individuals' tasks, and agrees the response.</a:t>
+            </a:r>
+          </a:p>
+          <a:p>
+            <a:r>
+              <a:t>Say: "Outcome: a clear understanding of the underlying constraint and an agreed corrective response."</a:t>
             </a:r>
           </a:p>
           <a:p/>
           <a:p>
             <a:r>
-              <a:t>Stage 3 — Restore: Rebuild Execution Momentum</a:t>
-            </a:r>
-          </a:p>
-          <a:p>
-            <a:r>
-              <a:t>Restore activates the fourth purpose of performance measurement: timely correction.</a:t>
-            </a:r>
-          </a:p>
-          <a:p>
-            <a:r>
-              <a:t>The agreed intervention is translated into concrete execution commitments. </a:t>
-            </a:r>
-          </a:p>
-          <a:p>
-            <a:r>
-              <a:t>The leader and KPI owner establish what must happen next, who is responsible and when progress will be reviewed.</a:t>
-            </a:r>
-          </a:p>
-          <a:p>
-            <a:r>
-              <a:t>At this stage, they:</a:t>
-            </a:r>
-          </a:p>
-          <a:p>
-            <a:r>
-              <a:t>Agree on corrective actions and expected progress.</a:t>
-            </a:r>
-          </a:p>
-          <a:p>
-            <a:r>
-              <a:t>Reaffirm responsibilities and accountability.</a:t>
-            </a:r>
-          </a:p>
-          <a:p>
-            <a:r>
-              <a:t>Establish follow-up timelines and support requirements.</a:t>
-            </a:r>
-          </a:p>
-          <a:p>
-            <a:r>
-              <a:t>Update the KPI alignment state to reflect whether clarity, capability and ownership have been restored.</a:t>
-            </a:r>
-          </a:p>
-          <a:p>
-            <a:r>
-              <a:t>Restoring momentum requires renewed commitment to the intended outcome, supported by the conditions necessary to achieve it.</a:t>
-            </a:r>
-          </a:p>
-          <a:p>
-            <a:r>
-              <a:t>Outcome: A clear recovery pathway, renewed execution ownership and agreed follow-through.</a:t>
+              <a:rPr b="1"/>
+              <a:t>4. Teach Stage 3 · Restore: Rebuild Execution Momentum.</a:t>
+            </a:r>
+          </a:p>
+          <a:p>
+            <a:r>
+              <a:t>Say: "Restore activates the fourth purpose: timely correction. The agreed intervention becomes concrete execution commitments. The leader and KPI owner agree corrective actions and expected progress, reaffirm responsibilities and accountability, set follow-up timelines and support requirements, and update the KPI alignment state to show whether clarity, capability and ownership have been restored. Restoring momentum requires renewed commitment to the intended outcome, supported by the conditions needed to achieve it."</a:t>
+            </a:r>
+          </a:p>
+          <a:p>
+            <a:r>
+              <a:t>People performance: the individual commits to the corrective actions and the follow-up dates.</a:t>
+            </a:r>
+          </a:p>
+          <a:p>
+            <a:r>
+              <a:t>Organisational performance: the leader responsible commits to the actions on the organisational conditions, each with a review date.</a:t>
+            </a:r>
+          </a:p>
+          <a:p>
+            <a:r>
+              <a:t>Say: "Outcome: a clear recovery pathway, renewed execution ownership and agreed follow-through."</a:t>
             </a:r>
           </a:p>
           <a:p/>
           <a:p>
             <a:r>
-              <a:t>How the Cycle Remains Continuous</a:t>
-            </a:r>
-          </a:p>
-          <a:p>
-            <a:r>
-              <a:t>The next Review examines whether the corrective actions have produced the expected improvement. If gaps remain, the cycle continues until execution returns to the required trajectory.</a:t>
+              <a:rPr b="1"/>
+              <a:t>5. Teach how the cycle stays continuous.</a:t>
+            </a:r>
+          </a:p>
+          <a:p>
+            <a:r>
+              <a:t>Say: "The next Review examines whether the corrective actions have produced the expected improvement. If gaps remain, the cycle continues until execution returns to the required trajectory. The next Review examines both: the individuals' progress, and whether the organisational conditions now support their tasks."</a:t>
             </a:r>
           </a:p>
           <a:p/>
           <a:p>
             <a:r>
-              <a:t>THE CYCLE APPLIES TO PEOPLE PERFORMANCE AND ORGANISATIONAL PERFORMANCE:</a:t>
-            </a:r>
-          </a:p>
-          <a:p>
-            <a:r>
-              <a:t>Review. People performance: the individual and the leader establish the progress made against the agreed target. Organisational performance: the leader brings the agreed measures or evidence of readiness for the organisational conditions, and the review establishes whether those conditions support the execution of the individuals' tasks.</a:t>
-            </a:r>
-          </a:p>
-          <a:p>
-            <a:r>
-              <a:t>Realign. People performance: the Accountability Loop (part 1.4) diagnoses what is preventing the individual's expected performance. Organisational performance: the leader determines what is preventing an organisational condition from supporting the execution of the individuals' tasks, and agrees the response.</a:t>
-            </a:r>
-          </a:p>
-          <a:p>
-            <a:r>
-              <a:t>Restore. People performance: the individual commits to the corrective actions and the follow-up dates. Organisational performance: the leader responsible commits to the actions on the organisational conditions, each with a review date.</a:t>
-            </a:r>
-          </a:p>
-          <a:p>
-            <a:r>
-              <a:t>How the cycle remains continuous: the next Review examines both: the individuals' progress, and whether the organisational conditions now support their tasks.</a:t>
+              <a:rPr b="1"/>
+              <a:t>6. Bridge to 1.4.</a:t>
+            </a:r>
+          </a:p>
+          <a:p>
+            <a:r>
+              <a:t>Say: "Realign depends on one diagnostic: the Accountability Loop. We take it next."</a:t>
             </a:r>
           </a:p>
         </p:txBody>
@@ -5092,175 +4867,139 @@
           <a:lstStyle/>
           <a:p>
             <a:r>
-              <a:rPr lang="en-GB" b="1" dirty="0"/>
+              <a:rPr b="1"/>
               <a:t>1.4 — THE ACCOUNTABILITY LOOP</a:t>
             </a:r>
           </a:p>
-          <a:p>
-            <a:endParaRPr lang="en-GB" dirty="0"/>
-          </a:p>
-          <a:p>
-            <a:r>
-              <a:rPr lang="en-GB" b="1" dirty="0"/>
+          <a:p/>
+          <a:p>
+            <a:r>
+              <a:rPr b="1"/>
               <a:t>HOW TO TEACH IT:</a:t>
             </a:r>
           </a:p>
-          <a:p>
-            <a:endParaRPr lang="en-GB" dirty="0"/>
-          </a:p>
-          <a:p>
-            <a:r>
-              <a:rPr lang="en-GB" b="1" dirty="0"/>
+          <a:p/>
+          <a:p>
+            <a:r>
+              <a:rPr b="1"/>
               <a:t>1. Name the default response.</a:t>
             </a:r>
           </a:p>
           <a:p>
             <a:r>
-              <a:rPr lang="en-GB" dirty="0"/>
               <a:t>Say: "Many organisations respond to performance gaps with one default response: they push harder. More urgency is applied. More pressure is introduced. Deadlines are reinforced. Pressure alone rarely solves execution challenges because pressure does not identify the underlying cause of the problem."</a:t>
             </a:r>
           </a:p>
           <a:p>
             <a:r>
-              <a:rPr lang="en-GB" dirty="0"/>
               <a:t>Say: "When a gap is identified, the leader activates the Accountability Loop: a structured diagnostic process designed to restore traction and ownership without collapsing into unproductive performance pressure. Most performance gaps emerge from one of three underlying conditions, and each calls for its own recovery."</a:t>
             </a:r>
           </a:p>
-          <a:p>
-            <a:endParaRPr lang="en-GB" dirty="0"/>
-          </a:p>
-          <a:p>
-            <a:r>
-              <a:rPr lang="en-GB" b="1" dirty="0"/>
+          <a:p/>
+          <a:p>
+            <a:r>
+              <a:rPr b="1"/>
               <a:t>2. Name how the recovery is achieved.</a:t>
             </a:r>
           </a:p>
           <a:p>
             <a:r>
-              <a:rPr lang="en-GB" dirty="0"/>
               <a:t>Say: "The leader achieves the recovery through the GROW model you used for the Alignment Dialogue in Unit 7: Goal, Reality, Options and Will. The goal of the conversation is ownership of the KPI: an alignment score of 9 or 10."</a:t>
             </a:r>
           </a:p>
-          <a:p>
-            <a:endParaRPr lang="en-GB" dirty="0"/>
-          </a:p>
-          <a:p>
-            <a:r>
-              <a:rPr lang="en-GB" b="1" dirty="0"/>
+          <a:p/>
+          <a:p>
+            <a:r>
+              <a:rPr b="1"/>
               <a:t>3. Teach the three root causes, one card at a time.</a:t>
             </a:r>
           </a:p>
           <a:p>
             <a:r>
-              <a:rPr lang="en-GB" dirty="0"/>
               <a:t>Lack of accountability. Say: "The individual understands the task but has lost the motivational connection to it. The work may feel detached from a meaningful outcome. Competing priorities may have diluted attention. Personal energy may have shifted elsewhere. Recovery: Reconnect purpose and ownership. The leader revisits the broader organisational context of the KPI. The conversation reconnects the task to the enterprise outcome it supports, and the individual is reminded how their contribution fits into the wider organisational map. By restoring that line of sight, motivation and commitment can often be reactivated."</a:t>
             </a:r>
           </a:p>
           <a:p>
             <a:r>
-              <a:rPr lang="en-GB" dirty="0"/>
               <a:t>Achieving it through GROW. Goal: Reconnect the KPI to the enterprise outcome it supports, and agree what an alignment of 9 or 10 would look like. Reality: Explore what has drawn attention away from the KPI and how the individual now sees the target. Options: The individual names how they will restore focus on the KPI among competing priorities. Will: The individual restates ownership, the actions and the follow-up date, and the leader asks the alignment question again.</a:t>
             </a:r>
           </a:p>
-          <a:p>
-            <a:endParaRPr lang="en-GB" dirty="0"/>
-          </a:p>
-          <a:p>
-            <a:r>
-              <a:rPr lang="en-GB" dirty="0"/>
+          <a:p/>
+          <a:p>
+            <a:r>
               <a:t>Lack of skill. Say: "The individual is committed but lacks the capability required to achieve the expected level. The challenge may involve technical expertise, analytical capability, leadership skills, or process knowledge that was initially underestimated. Recovery: Develop capability, with no added pressure. Targeted coaching may be introduced. Peer support may be arranged. Formal training may be provided. In some cases the timeline attached to the KPI may also require adjustment if the capability development process requires additional time."</a:t>
             </a:r>
           </a:p>
           <a:p>
             <a:r>
-              <a:rPr lang="en-GB" dirty="0"/>
               <a:t>Achieving it through GROW. Goal: Agree the result the KPI requires, the capability it calls for, and what an alignment of 9 or 10 would look like. Reality: Establish which part of the task the individual cannot yet do, and what they can already do well. Options: Choose together among targeted coaching, peer support, formal training and an adjusted timeline. Will: Agree the development plan, any adjusted milestones and the follow-up, and ask the alignment question again.</a:t>
             </a:r>
           </a:p>
-          <a:p>
-            <a:endParaRPr lang="en-GB" dirty="0"/>
-          </a:p>
-          <a:p>
-            <a:r>
-              <a:rPr lang="en-GB" dirty="0"/>
+          <a:p/>
+          <a:p>
+            <a:r>
               <a:t>Misfit or structural constraint. Say: "The issue lies beyond motivation and skill development. The individual’s strengths do not align with the specific responsibilities, or the role requires capabilities that the individual does not naturally bring to the task. Recovery: Structural alignment. The task may be redistributed across the team. Responsibilities may be adjusted. In some situations the individual may be repositioned into a role that better aligns with their strengths."</a:t>
             </a:r>
           </a:p>
           <a:p>
             <a:r>
-              <a:rPr lang="en-GB" dirty="0"/>
               <a:t>Achieving it through GROW. Goal: Agree the outcome the KPI must deliver, whoever delivers it. Reality: Establish where the demands of the role and the strengths of the individual, or the structure around them, do not match. Options: Consider redistributing the task, adjusting responsibilities or, in a separate role conversation, repositioning the individual. Will: Agree the structural change, who decides it and by when, and ask the alignment question again with whoever now owns the KPI.</a:t>
             </a:r>
           </a:p>
-          <a:p>
-            <a:endParaRPr lang="en-GB" dirty="0"/>
-          </a:p>
-          <a:p>
-            <a:r>
-              <a:rPr lang="en-GB" dirty="0"/>
+          <a:p/>
+          <a:p>
+            <a:r>
               <a:t>Then say: "Every recovery closes with the alignment question asked again: on a scale of 1 to 10, where is your alignment now?"</a:t>
             </a:r>
           </a:p>
           <a:p>
             <a:r>
-              <a:rPr lang="en-GB" dirty="0"/>
               <a:t>Then say: "Leaders must distinguish between team members who cannot perform and those who will not. Inability needs development, and unwillingness needs accountability." (Journal, 7 January 2026, Professional Insights: Leadership)</a:t>
             </a:r>
           </a:p>
           <a:p>
             <a:r>
-              <a:rPr lang="en-GB" dirty="0"/>
               <a:t>With the third card, say: "Avoid assuming that every negative outcome proves individual failure, or that every positive outcome proves sound practice." (Journal, 18 August 2026, Professional Insights: Strategy)</a:t>
             </a:r>
           </a:p>
-          <a:p>
-            <a:endParaRPr lang="en-GB" dirty="0"/>
-          </a:p>
-          <a:p>
-            <a:r>
-              <a:rPr lang="en-GB" b="1" dirty="0"/>
+          <a:p/>
+          <a:p>
+            <a:r>
+              <a:rPr b="1"/>
               <a:t>4. Keep the two conversations separate.</a:t>
             </a:r>
           </a:p>
           <a:p>
             <a:r>
-              <a:rPr lang="en-GB" dirty="0"/>
-              <a:t>Say: "The performance conversation must remain separate from the role conversation. Performance discussions focus on progress toward outcomes. Role alignment discussions focus on placing individuals where their capabilities can generate the greatest organisational value. By maintaining this distinction, the organisation protects both fairness and clarity."</a:t>
-            </a:r>
-          </a:p>
-          <a:p>
-            <a:r>
-              <a:rPr lang="en-GB" dirty="0"/>
+              <a:t>Say: "The performance conversation must remain separate from the role conversation. Performance discussions focus on progress towards outcomes. Role alignment discussions focus on placing individuals where their capabilities can generate the greatest organisational value. By maintaining this distinction, the organisation protects both fairness and clarity."</a:t>
+            </a:r>
+          </a:p>
+          <a:p>
+            <a:r>
               <a:t>Say: "Accountability works when it is specific and behaviour-based. Vague, general assessments of character produce no specific correction." (Journal, 8 April 2026, Professional Insights: Culture)</a:t>
             </a:r>
           </a:p>
-          <a:p>
-            <a:endParaRPr lang="en-GB" dirty="0"/>
-          </a:p>
-          <a:p>
-            <a:r>
-              <a:rPr lang="en-GB" b="1" dirty="0"/>
+          <a:p/>
+          <a:p>
+            <a:r>
+              <a:rPr b="1"/>
               <a:t>5. Ask, now that the loop is taught.</a:t>
             </a:r>
           </a:p>
           <a:p>
             <a:r>
-              <a:rPr lang="en-GB" dirty="0"/>
               <a:t>Ask: "Think of a performance gap in your area. Which of the three root causes sits behind it, and what evidence tells you so?" Take two or three answers in the chat.</a:t>
             </a:r>
           </a:p>
-          <a:p>
-            <a:endParaRPr lang="en-GB" dirty="0"/>
-          </a:p>
-          <a:p>
-            <a:r>
-              <a:rPr lang="en-GB" b="1" dirty="0"/>
+          <a:p/>
+          <a:p>
+            <a:r>
+              <a:rPr b="1"/>
               <a:t>ON THE PORTAL, AFTER THE TEACHING:</a:t>
             </a:r>
           </a:p>
           <a:p>
             <a:r>
-              <a:rPr lang="en-GB" dirty="0"/>
               <a:t>Participants write the reflection at the foot of part 1.4: the stage of the Review–Realign–Restore Cycle a current gap sits in, and the root cause they would most likely diagnose.</a:t>
             </a:r>
           </a:p>
@@ -5347,6 +5086,7 @@
           <a:lstStyle/>
           <a:p>
             <a:r>
+              <a:rPr b="1"/>
               <a:t>SECTION 2 · INTELLIGENCE — WHY</a:t>
             </a:r>
           </a:p>
@@ -5358,6 +5098,25 @@
           <a:p/>
           <a:p>
             <a:r>
+              <a:rPr b="1"/>
+              <a:t>HOW THIS SECTION RUNS:</a:t>
+            </a:r>
+          </a:p>
+          <a:p>
+            <a:r>
+              <a:t>1. 2.1 Four consequences of weak review discipline: execution velocity first, then the four consequences as one chain, each in people performance and organisational performance.</a:t>
+            </a:r>
+          </a:p>
+          <a:p>
+            <a:r>
+              <a:rPr b="1"/>
+              <a:t>2. The Section 2 Reflections slide.</a:t>
+            </a:r>
+          </a:p>
+          <a:p/>
+          <a:p>
+            <a:r>
+              <a:rPr b="1"/>
               <a:t>SECTION LEARNING OUTCOMES:</a:t>
             </a:r>
           </a:p>
@@ -5374,12 +5133,14 @@
           <a:p/>
           <a:p>
             <a:r>
+              <a:rPr b="1"/>
               <a:t>HOW TO OPEN THE SECTION:</a:t>
             </a:r>
           </a:p>
           <a:p/>
           <a:p>
             <a:r>
+              <a:rPr b="1"/>
               <a:t>1. Name the shift.</a:t>
             </a:r>
           </a:p>
@@ -5391,6 +5152,7 @@
           <a:p/>
           <a:p>
             <a:r>
+              <a:rPr b="1"/>
               <a:t>2. Preview the chain.</a:t>
             </a:r>
           </a:p>
@@ -5402,6 +5164,7 @@
           <a:p/>
           <a:p>
             <a:r>
+              <a:rPr b="1"/>
               <a:t>3. Say where it goes.</a:t>
             </a:r>
           </a:p>
@@ -5413,17 +5176,13 @@
           <a:p/>
           <a:p>
             <a:r>
-              <a:t>TEACHING NOTES FROM THE FACILITATOR GUIDE:</a:t>
-            </a:r>
-          </a:p>
-          <a:p>
-            <a:r>
-              <a:t>2.1 · Execution velocity. Open with the question "What determines the velocity of the flight?" and teach execution velocity: the rate at which an organisation converts strategic intent into measurable results, shaped by how quickly leaders detect, understand, decide and act. Performance measurement provides the evidence; review discipline converts it into timely decisions.</a:t>
-            </a:r>
-          </a:p>
-          <a:p>
-            <a:r>
-              <a:t>2.1 · Four Consequences of Weak Review Discipline. Teach the four consequences as one chain, one card at a time, each in people performance and in organisational performance. Ask the question on each card once the card is taught, so participants recognise the chain in their own organisations.</a:t>
+              <a:rPr b="1"/>
+              <a:t>4. Bridge to 2.1.</a:t>
+            </a:r>
+          </a:p>
+          <a:p>
+            <a:r>
+              <a:t>Say: "We start with a question about flight."</a:t>
             </a:r>
           </a:p>
         </p:txBody>
@@ -9595,7 +9354,7 @@
               <a:buNone/>
             </a:pPr>
             <a:r>
-              <a:rPr lang="en-US" sz="3600" b="1" dirty="0">
+              <a:rPr lang="en-US" sz="3200" b="1" dirty="0">
                 <a:solidFill>
                   <a:srgbClr val="1A5C2C"/>
                 </a:solidFill>
@@ -14988,7 +14747,7 @@
               <a:buNone/>
             </a:pPr>
             <a:r>
-              <a:rPr lang="en-US" sz="3600" b="1" dirty="0">
+              <a:rPr lang="en-US" sz="3100" b="1" dirty="0">
                 <a:solidFill>
                   <a:srgbClr val="1A5C2C"/>
                 </a:solidFill>

--- a/Unit decks/Unit 08 - Performance Measurement.pptx
+++ b/Unit decks/Unit 08 - Performance Measurement.pptx
@@ -1847,6 +1847,11 @@
           <a:p>
             <a:r>
               <a:t>Say: "This is Capstone work. You read your group’s record at the foot of the section and select Agree. When every member has agreed, your record feeds your team’s Capstone S2R® Blueprint."</a:t>
+            </a:r>
+          </a:p>
+          <a:p>
+            <a:r>
+              <a:t>Close the group work with Our Position. Say: "When your record is complete, write as a group a short summary statement of your team's position from this unit, in the unit's own terms. Every member agrees it with the rest of the record. It closes this unit's section of your Capstone S2R Blueprint and guides the assessors through your work."</a:t>
             </a:r>
           </a:p>
         </p:txBody>
